--- a/slides.pptx
+++ b/slides.pptx
@@ -7859,7 +7859,7 @@
                 <a:ea typeface="Malgun Gothic" pitchFamily="34" charset="-122"/>
                 <a:cs typeface="Malgun Gothic" pitchFamily="34" charset="-120"/>
               </a:rPr>
-              <a:t>변리사: [ 리포트를 읽은 반응 — 제출 전 채움 ]</a:t>
+              <a:t>변리사가 리포트를 읽고 action item을 반영하겠다고 답함</a:t>
             </a:r>
             <a:endParaRPr lang="en-US" sz="1000" dirty="0"/>
           </a:p>

--- a/slides.pptx
+++ b/slides.pptx
@@ -6899,7 +6899,7 @@
                           <a:ea typeface="Malgun Gothic" pitchFamily="34" charset="-122"/>
                           <a:cs typeface="Malgun Gothic" pitchFamily="34" charset="-120"/>
                         </a:rPr>
-                        <a:t>나(개발)</a:t>
+                        <a:t>변리사</a:t>
                       </a:r>
                       <a:endParaRPr lang="en-US" sz="1000" dirty="0">
                         <a:latin typeface="Malgun Gothic" charset="0"/>
@@ -7105,7 +7105,7 @@
                           <a:ea typeface="Malgun Gothic" pitchFamily="34" charset="-122"/>
                           <a:cs typeface="Malgun Gothic" pitchFamily="34" charset="-120"/>
                         </a:rPr>
-                        <a:t>나(개발)</a:t>
+                        <a:t>변리사</a:t>
                       </a:r>
                       <a:endParaRPr lang="en-US" sz="1000" dirty="0">
                         <a:latin typeface="Malgun Gothic" charset="0"/>

--- a/slides.pptx
+++ b/slides.pptx
@@ -7781,7 +7781,7 @@
                 <a:ea typeface="Malgun Gothic" pitchFamily="34" charset="-122"/>
                 <a:cs typeface="Malgun Gothic" pitchFamily="34" charset="-120"/>
               </a:rPr>
-              <a:t>경로별 감소 원인은 추정  /  서버 통계는 연도 합계  /  신청 뒤(전화·수임) 데이터 없음  /  광고는 클릭까지만</a:t>
+              <a:t>경로별 감소 원인은 추정  /  경로별 방문은 연도 합계  /  신청 뒤(전화·수임) 데이터 없음  /  광고는 클릭까지만</a:t>
             </a:r>
             <a:endParaRPr lang="en-US" sz="1050" dirty="0"/>
           </a:p>

--- a/slides.pptx
+++ b/slides.pptx
@@ -1551,7 +1551,7 @@
               <c:strCache>
                 <c:ptCount val="1"/>
                 <c:pt idx="0">
-                  <c:v>포괄 검색어 9개</c:v>
+                  <c:v>포괄 검색어 8개</c:v>
                 </c:pt>
               </c:strCache>
             </c:strRef>
@@ -1634,7 +1634,7 @@
               <c:strCache>
                 <c:ptCount val="1"/>
                 <c:pt idx="0">
-                  <c:v>구체적 검색어 9,374개</c:v>
+                  <c:v>구체적 검색어 9,375개</c:v>
                 </c:pt>
               </c:strCache>
             </c:strRef>
@@ -4193,7 +4193,7 @@
                 <a:ea typeface="Malgun Gothic" pitchFamily="34" charset="-122"/>
                 <a:cs typeface="Malgun Gothic" pitchFamily="34" charset="-120"/>
               </a:rPr>
-              <a:t>광고: 포괄 검색어 9개가 광고비 26%, 클릭률은 1/8</a:t>
+              <a:t>광고: 포괄 검색어 8개가 광고비 26%, 클릭률은 1/8</a:t>
             </a:r>
             <a:endParaRPr lang="en-US" sz="1000" dirty="0"/>
           </a:p>
@@ -5113,7 +5113,7 @@
                 <a:ea typeface="Malgun Gothic" pitchFamily="34" charset="-122"/>
                 <a:cs typeface="Malgun Gothic" pitchFamily="34" charset="-120"/>
               </a:rPr>
-              <a:t>포괄 검색어 9개('특허'·'변리사' 등 한 단어)가 차지하는 몫</a:t>
+              <a:t>포괄 검색어 8개('특허'·'변리사' 등 한 단어)가 차지하는 몫</a:t>
             </a:r>
             <a:endParaRPr lang="en-US" sz="900" dirty="0"/>
           </a:p>
@@ -5171,7 +5171,7 @@
                 <a:ea typeface="Malgun Gothic" pitchFamily="34" charset="-122"/>
                 <a:cs typeface="Malgun Gothic" pitchFamily="34" charset="-120"/>
               </a:rPr>
-              <a:t>포괄 검색어 9개</a:t>
+              <a:t>포괄 검색어 8개</a:t>
             </a:r>
             <a:endParaRPr lang="en-US" sz="1050" dirty="0"/>
           </a:p>
@@ -5700,7 +5700,27 @@
                 <a:ea typeface="Malgun Gothic" pitchFamily="34" charset="-122"/>
                 <a:cs typeface="Malgun Gothic" pitchFamily="34" charset="-120"/>
               </a:rPr>
-              <a:t>왜 줄었는지는 당시 기록이 없어 모름</a:t>
+              <a:t>당시 이유는 기록이 없어 모름</a:t>
+            </a:r>
+            <a:endParaRPr lang="en-US" sz="950" dirty="0"/>
+          </a:p>
+          <a:p>
+            <a:pPr indent="0" marL="0">
+              <a:spcAft>
+                <a:spcPts val="300"/>
+              </a:spcAft>
+              <a:buNone/>
+            </a:pPr>
+            <a:r>
+              <a:rPr lang="en-US" sz="950" dirty="0">
+                <a:solidFill>
+                  <a:srgbClr val="1C2A30"/>
+                </a:solidFill>
+                <a:latin typeface="Malgun Gothic" pitchFamily="34" charset="0"/>
+                <a:ea typeface="Malgun Gothic" pitchFamily="34" charset="-122"/>
+                <a:cs typeface="Malgun Gothic" pitchFamily="34" charset="-120"/>
+              </a:rPr>
+              <a:t>지금: 광고 방문 중앙값 18초, 27%가 5초 안에 나감</a:t>
             </a:r>
             <a:endParaRPr lang="en-US" sz="950" dirty="0"/>
           </a:p>
@@ -6265,7 +6285,7 @@
                 <a:ea typeface="Malgun Gothic" pitchFamily="34" charset="-122"/>
                 <a:cs typeface="Malgun Gothic" pitchFamily="34" charset="-120"/>
               </a:rPr>
-              <a:t>출처: 신청 알림 문자, 신청 게시판 2,141건(스팸·잘못된 번호 33건 제외), 서버 방문(슬라이드 2), 수수료는 사무소 수가</a:t>
+              <a:t>출처: 신청 알림 문자, 신청 게시판 2,141건(스팸·잘못된 번호 33건 제외), 서버 방문(슬라이드 2), GA4 광고 유입 120세션(2026-09), 수수료는 사무소 수가</a:t>
             </a:r>
             <a:endParaRPr lang="en-US" sz="700" dirty="0"/>
           </a:p>
@@ -6465,11 +6485,80 @@
             <a:tbl>
               <a:tblPr/>
               <a:tblGrid>
-                <a:gridCol w="914400"/>
-                <a:gridCol w="5120640"/>
-                <a:gridCol w="2377440"/>
+                <a:gridCol w="640080"/>
+                <a:gridCol w="822960"/>
+                <a:gridCol w="4663440"/>
+                <a:gridCol w="2286000"/>
               </a:tblGrid>
               <a:tr h="292608">
+                <a:tc>
+                  <a:txBody>
+                    <a:bodyPr/>
+                    <a:lstStyle/>
+                    <a:p>
+                      <a:pPr indent="0" marL="0">
+                        <a:buNone/>
+                      </a:pPr>
+                      <a:r>
+                        <a:rPr lang="en-US" sz="1000" b="1" dirty="0">
+                          <a:solidFill>
+                            <a:srgbClr val="1C2A30"/>
+                          </a:solidFill>
+                          <a:latin typeface="Malgun Gothic" pitchFamily="34" charset="0"/>
+                          <a:ea typeface="Malgun Gothic" pitchFamily="34" charset="-122"/>
+                          <a:cs typeface="Malgun Gothic" pitchFamily="34" charset="-120"/>
+                        </a:rPr>
+                        <a:t>근거</a:t>
+                      </a:r>
+                      <a:endParaRPr lang="en-US" sz="1000" dirty="0">
+                        <a:latin typeface="Malgun Gothic" charset="0"/>
+                        <a:ea typeface="Malgun Gothic" charset="0"/>
+                        <a:cs typeface="Malgun Gothic" charset="0"/>
+                      </a:endParaRPr>
+                    </a:p>
+                  </a:txBody>
+                  <a:tcPr marL="76200" marR="76200" marT="38100" marB="38100" anchor="ctr">
+                    <a:lnL w="6350" cap="flat" cmpd="sng" algn="ctr">
+                      <a:solidFill>
+                        <a:srgbClr val="DFE3E2"/>
+                      </a:solidFill>
+                      <a:prstDash val="solid"/>
+                      <a:round/>
+                      <a:headEnd type="none" w="med" len="med"/>
+                      <a:tailEnd type="none" w="med" len="med"/>
+                    </a:lnL>
+                    <a:lnR w="6350" cap="flat" cmpd="sng" algn="ctr">
+                      <a:solidFill>
+                        <a:srgbClr val="DFE3E2"/>
+                      </a:solidFill>
+                      <a:prstDash val="solid"/>
+                      <a:round/>
+                      <a:headEnd type="none" w="med" len="med"/>
+                      <a:tailEnd type="none" w="med" len="med"/>
+                    </a:lnR>
+                    <a:lnT w="6350" cap="flat" cmpd="sng" algn="ctr">
+                      <a:solidFill>
+                        <a:srgbClr val="DFE3E2"/>
+                      </a:solidFill>
+                      <a:prstDash val="solid"/>
+                      <a:round/>
+                      <a:headEnd type="none" w="med" len="med"/>
+                      <a:tailEnd type="none" w="med" len="med"/>
+                    </a:lnT>
+                    <a:lnB w="6350" cap="flat" cmpd="sng" algn="ctr">
+                      <a:solidFill>
+                        <a:srgbClr val="DFE3E2"/>
+                      </a:solidFill>
+                      <a:prstDash val="solid"/>
+                      <a:round/>
+                      <a:headEnd type="none" w="med" len="med"/>
+                      <a:tailEnd type="none" w="med" len="med"/>
+                    </a:lnB>
+                    <a:solidFill>
+                      <a:srgbClr val="F3F5F4"/>
+                    </a:solidFill>
+                  </a:tcPr>
+                </a:tc>
                 <a:tc>
                   <a:txBody>
                     <a:bodyPr/>
@@ -6693,6 +6782,74 @@
                           <a:ea typeface="Malgun Gothic" pitchFamily="34" charset="-122"/>
                           <a:cs typeface="Malgun Gothic" pitchFamily="34" charset="-120"/>
                         </a:rPr>
+                        <a:t>2·4장</a:t>
+                      </a:r>
+                      <a:endParaRPr lang="en-US" sz="1000" dirty="0">
+                        <a:latin typeface="Malgun Gothic" charset="0"/>
+                        <a:ea typeface="Malgun Gothic" charset="0"/>
+                        <a:cs typeface="Malgun Gothic" charset="0"/>
+                      </a:endParaRPr>
+                    </a:p>
+                  </a:txBody>
+                  <a:tcPr marL="76200" marR="76200" marT="38100" marB="38100" anchor="ctr">
+                    <a:lnL w="6350" cap="flat" cmpd="sng" algn="ctr">
+                      <a:solidFill>
+                        <a:srgbClr val="DFE3E2"/>
+                      </a:solidFill>
+                      <a:prstDash val="solid"/>
+                      <a:round/>
+                      <a:headEnd type="none" w="med" len="med"/>
+                      <a:tailEnd type="none" w="med" len="med"/>
+                    </a:lnL>
+                    <a:lnR w="6350" cap="flat" cmpd="sng" algn="ctr">
+                      <a:solidFill>
+                        <a:srgbClr val="DFE3E2"/>
+                      </a:solidFill>
+                      <a:prstDash val="solid"/>
+                      <a:round/>
+                      <a:headEnd type="none" w="med" len="med"/>
+                      <a:tailEnd type="none" w="med" len="med"/>
+                    </a:lnR>
+                    <a:lnT w="6350" cap="flat" cmpd="sng" algn="ctr">
+                      <a:solidFill>
+                        <a:srgbClr val="DFE3E2"/>
+                      </a:solidFill>
+                      <a:prstDash val="solid"/>
+                      <a:round/>
+                      <a:headEnd type="none" w="med" len="med"/>
+                      <a:tailEnd type="none" w="med" len="med"/>
+                    </a:lnT>
+                    <a:lnB w="6350" cap="flat" cmpd="sng" algn="ctr">
+                      <a:solidFill>
+                        <a:srgbClr val="DFE3E2"/>
+                      </a:solidFill>
+                      <a:prstDash val="solid"/>
+                      <a:round/>
+                      <a:headEnd type="none" w="med" len="med"/>
+                      <a:tailEnd type="none" w="med" len="med"/>
+                    </a:lnB>
+                    <a:solidFill>
+                      <a:srgbClr val="FFFFFF"/>
+                    </a:solidFill>
+                  </a:tcPr>
+                </a:tc>
+                <a:tc>
+                  <a:txBody>
+                    <a:bodyPr/>
+                    <a:lstStyle/>
+                    <a:p>
+                      <a:pPr indent="0" marL="0">
+                        <a:buNone/>
+                      </a:pPr>
+                      <a:r>
+                        <a:rPr lang="en-US" sz="1000" dirty="0">
+                          <a:solidFill>
+                            <a:srgbClr val="1C2A30"/>
+                          </a:solidFill>
+                          <a:latin typeface="Malgun Gothic" pitchFamily="34" charset="0"/>
+                          <a:ea typeface="Malgun Gothic" pitchFamily="34" charset="-122"/>
+                          <a:cs typeface="Malgun Gothic" pitchFamily="34" charset="-120"/>
+                        </a:rPr>
                         <a:t>나(개발)</a:t>
                       </a:r>
                       <a:endParaRPr lang="en-US" sz="1000" dirty="0">
@@ -6899,6 +7056,74 @@
                           <a:ea typeface="Malgun Gothic" pitchFamily="34" charset="-122"/>
                           <a:cs typeface="Malgun Gothic" pitchFamily="34" charset="-120"/>
                         </a:rPr>
+                        <a:t>3장</a:t>
+                      </a:r>
+                      <a:endParaRPr lang="en-US" sz="1000" dirty="0">
+                        <a:latin typeface="Malgun Gothic" charset="0"/>
+                        <a:ea typeface="Malgun Gothic" charset="0"/>
+                        <a:cs typeface="Malgun Gothic" charset="0"/>
+                      </a:endParaRPr>
+                    </a:p>
+                  </a:txBody>
+                  <a:tcPr marL="76200" marR="76200" marT="38100" marB="38100" anchor="ctr">
+                    <a:lnL w="6350" cap="flat" cmpd="sng" algn="ctr">
+                      <a:solidFill>
+                        <a:srgbClr val="DFE3E2"/>
+                      </a:solidFill>
+                      <a:prstDash val="solid"/>
+                      <a:round/>
+                      <a:headEnd type="none" w="med" len="med"/>
+                      <a:tailEnd type="none" w="med" len="med"/>
+                    </a:lnL>
+                    <a:lnR w="6350" cap="flat" cmpd="sng" algn="ctr">
+                      <a:solidFill>
+                        <a:srgbClr val="DFE3E2"/>
+                      </a:solidFill>
+                      <a:prstDash val="solid"/>
+                      <a:round/>
+                      <a:headEnd type="none" w="med" len="med"/>
+                      <a:tailEnd type="none" w="med" len="med"/>
+                    </a:lnR>
+                    <a:lnT w="6350" cap="flat" cmpd="sng" algn="ctr">
+                      <a:solidFill>
+                        <a:srgbClr val="DFE3E2"/>
+                      </a:solidFill>
+                      <a:prstDash val="solid"/>
+                      <a:round/>
+                      <a:headEnd type="none" w="med" len="med"/>
+                      <a:tailEnd type="none" w="med" len="med"/>
+                    </a:lnT>
+                    <a:lnB w="6350" cap="flat" cmpd="sng" algn="ctr">
+                      <a:solidFill>
+                        <a:srgbClr val="DFE3E2"/>
+                      </a:solidFill>
+                      <a:prstDash val="solid"/>
+                      <a:round/>
+                      <a:headEnd type="none" w="med" len="med"/>
+                      <a:tailEnd type="none" w="med" len="med"/>
+                    </a:lnB>
+                    <a:solidFill>
+                      <a:srgbClr val="FFFFFF"/>
+                    </a:solidFill>
+                  </a:tcPr>
+                </a:tc>
+                <a:tc>
+                  <a:txBody>
+                    <a:bodyPr/>
+                    <a:lstStyle/>
+                    <a:p>
+                      <a:pPr indent="0" marL="0">
+                        <a:buNone/>
+                      </a:pPr>
+                      <a:r>
+                        <a:rPr lang="en-US" sz="1000" dirty="0">
+                          <a:solidFill>
+                            <a:srgbClr val="1C2A30"/>
+                          </a:solidFill>
+                          <a:latin typeface="Malgun Gothic" pitchFamily="34" charset="0"/>
+                          <a:ea typeface="Malgun Gothic" pitchFamily="34" charset="-122"/>
+                          <a:cs typeface="Malgun Gothic" pitchFamily="34" charset="-120"/>
+                        </a:rPr>
                         <a:t>변리사</a:t>
                       </a:r>
                       <a:endParaRPr lang="en-US" sz="1000" dirty="0">
@@ -7105,6 +7330,74 @@
                           <a:ea typeface="Malgun Gothic" pitchFamily="34" charset="-122"/>
                           <a:cs typeface="Malgun Gothic" pitchFamily="34" charset="-120"/>
                         </a:rPr>
+                        <a:t>3장</a:t>
+                      </a:r>
+                      <a:endParaRPr lang="en-US" sz="1000" dirty="0">
+                        <a:latin typeface="Malgun Gothic" charset="0"/>
+                        <a:ea typeface="Malgun Gothic" charset="0"/>
+                        <a:cs typeface="Malgun Gothic" charset="0"/>
+                      </a:endParaRPr>
+                    </a:p>
+                  </a:txBody>
+                  <a:tcPr marL="76200" marR="76200" marT="38100" marB="38100" anchor="ctr">
+                    <a:lnL w="6350" cap="flat" cmpd="sng" algn="ctr">
+                      <a:solidFill>
+                        <a:srgbClr val="DFE3E2"/>
+                      </a:solidFill>
+                      <a:prstDash val="solid"/>
+                      <a:round/>
+                      <a:headEnd type="none" w="med" len="med"/>
+                      <a:tailEnd type="none" w="med" len="med"/>
+                    </a:lnL>
+                    <a:lnR w="6350" cap="flat" cmpd="sng" algn="ctr">
+                      <a:solidFill>
+                        <a:srgbClr val="DFE3E2"/>
+                      </a:solidFill>
+                      <a:prstDash val="solid"/>
+                      <a:round/>
+                      <a:headEnd type="none" w="med" len="med"/>
+                      <a:tailEnd type="none" w="med" len="med"/>
+                    </a:lnR>
+                    <a:lnT w="6350" cap="flat" cmpd="sng" algn="ctr">
+                      <a:solidFill>
+                        <a:srgbClr val="DFE3E2"/>
+                      </a:solidFill>
+                      <a:prstDash val="solid"/>
+                      <a:round/>
+                      <a:headEnd type="none" w="med" len="med"/>
+                      <a:tailEnd type="none" w="med" len="med"/>
+                    </a:lnT>
+                    <a:lnB w="6350" cap="flat" cmpd="sng" algn="ctr">
+                      <a:solidFill>
+                        <a:srgbClr val="DFE3E2"/>
+                      </a:solidFill>
+                      <a:prstDash val="solid"/>
+                      <a:round/>
+                      <a:headEnd type="none" w="med" len="med"/>
+                      <a:tailEnd type="none" w="med" len="med"/>
+                    </a:lnB>
+                    <a:solidFill>
+                      <a:srgbClr val="FFFFFF"/>
+                    </a:solidFill>
+                  </a:tcPr>
+                </a:tc>
+                <a:tc>
+                  <a:txBody>
+                    <a:bodyPr/>
+                    <a:lstStyle/>
+                    <a:p>
+                      <a:pPr indent="0" marL="0">
+                        <a:buNone/>
+                      </a:pPr>
+                      <a:r>
+                        <a:rPr lang="en-US" sz="1000" dirty="0">
+                          <a:solidFill>
+                            <a:srgbClr val="1C2A30"/>
+                          </a:solidFill>
+                          <a:latin typeface="Malgun Gothic" pitchFamily="34" charset="0"/>
+                          <a:ea typeface="Malgun Gothic" pitchFamily="34" charset="-122"/>
+                          <a:cs typeface="Malgun Gothic" pitchFamily="34" charset="-120"/>
+                        </a:rPr>
                         <a:t>변리사</a:t>
                       </a:r>
                       <a:endParaRPr lang="en-US" sz="1000" dirty="0">
@@ -7311,6 +7604,74 @@
                           <a:ea typeface="Malgun Gothic" pitchFamily="34" charset="-122"/>
                           <a:cs typeface="Malgun Gothic" pitchFamily="34" charset="-120"/>
                         </a:rPr>
+                        <a:t>4장</a:t>
+                      </a:r>
+                      <a:endParaRPr lang="en-US" sz="1000" dirty="0">
+                        <a:latin typeface="Malgun Gothic" charset="0"/>
+                        <a:ea typeface="Malgun Gothic" charset="0"/>
+                        <a:cs typeface="Malgun Gothic" charset="0"/>
+                      </a:endParaRPr>
+                    </a:p>
+                  </a:txBody>
+                  <a:tcPr marL="76200" marR="76200" marT="38100" marB="38100" anchor="ctr">
+                    <a:lnL w="6350" cap="flat" cmpd="sng" algn="ctr">
+                      <a:solidFill>
+                        <a:srgbClr val="DFE3E2"/>
+                      </a:solidFill>
+                      <a:prstDash val="solid"/>
+                      <a:round/>
+                      <a:headEnd type="none" w="med" len="med"/>
+                      <a:tailEnd type="none" w="med" len="med"/>
+                    </a:lnL>
+                    <a:lnR w="6350" cap="flat" cmpd="sng" algn="ctr">
+                      <a:solidFill>
+                        <a:srgbClr val="DFE3E2"/>
+                      </a:solidFill>
+                      <a:prstDash val="solid"/>
+                      <a:round/>
+                      <a:headEnd type="none" w="med" len="med"/>
+                      <a:tailEnd type="none" w="med" len="med"/>
+                    </a:lnR>
+                    <a:lnT w="6350" cap="flat" cmpd="sng" algn="ctr">
+                      <a:solidFill>
+                        <a:srgbClr val="DFE3E2"/>
+                      </a:solidFill>
+                      <a:prstDash val="solid"/>
+                      <a:round/>
+                      <a:headEnd type="none" w="med" len="med"/>
+                      <a:tailEnd type="none" w="med" len="med"/>
+                    </a:lnT>
+                    <a:lnB w="6350" cap="flat" cmpd="sng" algn="ctr">
+                      <a:solidFill>
+                        <a:srgbClr val="DFE3E2"/>
+                      </a:solidFill>
+                      <a:prstDash val="solid"/>
+                      <a:round/>
+                      <a:headEnd type="none" w="med" len="med"/>
+                      <a:tailEnd type="none" w="med" len="med"/>
+                    </a:lnB>
+                    <a:solidFill>
+                      <a:srgbClr val="FFFFFF"/>
+                    </a:solidFill>
+                  </a:tcPr>
+                </a:tc>
+                <a:tc>
+                  <a:txBody>
+                    <a:bodyPr/>
+                    <a:lstStyle/>
+                    <a:p>
+                      <a:pPr indent="0" marL="0">
+                        <a:buNone/>
+                      </a:pPr>
+                      <a:r>
+                        <a:rPr lang="en-US" sz="1000" dirty="0">
+                          <a:solidFill>
+                            <a:srgbClr val="1C2A30"/>
+                          </a:solidFill>
+                          <a:latin typeface="Malgun Gothic" pitchFamily="34" charset="0"/>
+                          <a:ea typeface="Malgun Gothic" pitchFamily="34" charset="-122"/>
+                          <a:cs typeface="Malgun Gothic" pitchFamily="34" charset="-120"/>
+                        </a:rPr>
                         <a:t>변리사</a:t>
                       </a:r>
                       <a:endParaRPr lang="en-US" sz="1000" dirty="0">
@@ -7500,6 +7861,74 @@
                 </a:tc>
               </a:tr>
               <a:tr h="292608">
+                <a:tc>
+                  <a:txBody>
+                    <a:bodyPr/>
+                    <a:lstStyle/>
+                    <a:p>
+                      <a:pPr indent="0" marL="0">
+                        <a:buNone/>
+                      </a:pPr>
+                      <a:r>
+                        <a:rPr lang="en-US" sz="1000" dirty="0">
+                          <a:solidFill>
+                            <a:srgbClr val="1C2A30"/>
+                          </a:solidFill>
+                          <a:latin typeface="Malgun Gothic" pitchFamily="34" charset="0"/>
+                          <a:ea typeface="Malgun Gothic" pitchFamily="34" charset="-122"/>
+                          <a:cs typeface="Malgun Gothic" pitchFamily="34" charset="-120"/>
+                        </a:rPr>
+                        <a:t>2장</a:t>
+                      </a:r>
+                      <a:endParaRPr lang="en-US" sz="1000" dirty="0">
+                        <a:latin typeface="Malgun Gothic" charset="0"/>
+                        <a:ea typeface="Malgun Gothic" charset="0"/>
+                        <a:cs typeface="Malgun Gothic" charset="0"/>
+                      </a:endParaRPr>
+                    </a:p>
+                  </a:txBody>
+                  <a:tcPr marL="76200" marR="76200" marT="38100" marB="38100" anchor="ctr">
+                    <a:lnL w="6350" cap="flat" cmpd="sng" algn="ctr">
+                      <a:solidFill>
+                        <a:srgbClr val="DFE3E2"/>
+                      </a:solidFill>
+                      <a:prstDash val="solid"/>
+                      <a:round/>
+                      <a:headEnd type="none" w="med" len="med"/>
+                      <a:tailEnd type="none" w="med" len="med"/>
+                    </a:lnL>
+                    <a:lnR w="6350" cap="flat" cmpd="sng" algn="ctr">
+                      <a:solidFill>
+                        <a:srgbClr val="DFE3E2"/>
+                      </a:solidFill>
+                      <a:prstDash val="solid"/>
+                      <a:round/>
+                      <a:headEnd type="none" w="med" len="med"/>
+                      <a:tailEnd type="none" w="med" len="med"/>
+                    </a:lnR>
+                    <a:lnT w="6350" cap="flat" cmpd="sng" algn="ctr">
+                      <a:solidFill>
+                        <a:srgbClr val="DFE3E2"/>
+                      </a:solidFill>
+                      <a:prstDash val="solid"/>
+                      <a:round/>
+                      <a:headEnd type="none" w="med" len="med"/>
+                      <a:tailEnd type="none" w="med" len="med"/>
+                    </a:lnT>
+                    <a:lnB w="6350" cap="flat" cmpd="sng" algn="ctr">
+                      <a:solidFill>
+                        <a:srgbClr val="DFE3E2"/>
+                      </a:solidFill>
+                      <a:prstDash val="solid"/>
+                      <a:round/>
+                      <a:headEnd type="none" w="med" len="med"/>
+                      <a:tailEnd type="none" w="med" len="med"/>
+                    </a:lnB>
+                    <a:solidFill>
+                      <a:srgbClr val="FFFFFF"/>
+                    </a:solidFill>
+                  </a:tcPr>
+                </a:tc>
                 <a:tc>
                   <a:txBody>
                     <a:bodyPr/>
@@ -7912,7 +8341,7 @@
                 <a:ea typeface="Malgun Gothic" pitchFamily="34" charset="-122"/>
                 <a:cs typeface="Malgun Gothic" pitchFamily="34" charset="-120"/>
               </a:rPr>
-              <a:t>코드·차트·초안은 Claude Code, 문제 정의·구조·검증은 사람. 자세한 내용은 제출 폼</a:t>
+              <a:t>코드·차트·초안은 Claude Code, 문제 정의·구조·검증은 사람. 자세한 내용은 GitHub README</a:t>
             </a:r>
             <a:endParaRPr lang="en-US" sz="1000" dirty="0"/>
           </a:p>

--- a/slides.pptx
+++ b/slides.pptx
@@ -121,7 +121,7 @@
       <c:layout/>
       <c:barChart>
         <c:barDir val="col"/>
-        <c:grouping val="clustered"/>
+        <c:grouping val="stacked"/>
         <c:varyColors val="0"/>
         <c:ser>
           <c:idx val="0"/>
@@ -139,19 +139,19 @@
           </c:tx>
           <c:spPr>
             <a:solidFill>
-              <a:srgbClr val="2A78D6"/>
+              <a:srgbClr val="C9D1D3"/>
             </a:solidFill>
             <a:effectLst/>
           </c:spPr>
           <c:invertIfNegative val="0"/>
           <c:dLbls>
-            <c:numFmt formatCode="#,##0" sourceLinked="0"/>
+            <c:numFmt formatCode="#,##0;;;" sourceLinked="0"/>
             <c:txPr>
               <a:bodyPr/>
               <a:lstStyle/>
               <a:p>
                 <a:pPr>
-                  <a:defRPr b="0" i="0" strike="noStrike" sz="700" u="none">
+                  <a:defRPr b="0" i="0" strike="noStrike" sz="750" u="none">
                     <a:solidFill>
                       <a:srgbClr val="1C2A30"/>
                     </a:solidFill>
@@ -236,13 +236,13 @@
                   <c:v>223</c:v>
                 </c:pt>
                 <c:pt idx="5">
-                  <c:v>308</c:v>
+                  <c:v>0</c:v>
                 </c:pt>
                 <c:pt idx="6">
                   <c:v>163</c:v>
                 </c:pt>
                 <c:pt idx="7">
-                  <c:v>72</c:v>
+                  <c:v>0</c:v>
                 </c:pt>
                 <c:pt idx="8">
                   <c:v>92</c:v>
@@ -255,19 +255,156 @@
                 </c:pt>
                 <c:pt idx="11">
                   <c:v>81</c:v>
+                </c:pt>
+              </c:numCache>
+            </c:numRef>
+          </c:val>
+        </c:ser>
+        <c:ser>
+          <c:idx val="1"/>
+          <c:order val="1"/>
+          <c:tx>
+            <c:strRef>
+              <c:f>Sheet1!$C$1</c:f>
+              <c:strCache>
+                <c:ptCount val="1"/>
+                <c:pt idx="0">
+                  <c:v>2020·2022</c:v>
+                </c:pt>
+              </c:strCache>
+            </c:strRef>
+          </c:tx>
+          <c:spPr>
+            <a:solidFill>
+              <a:srgbClr val="C8372D"/>
+            </a:solidFill>
+            <a:effectLst/>
+          </c:spPr>
+          <c:invertIfNegative val="0"/>
+          <c:dLbls>
+            <c:numFmt formatCode="#,##0;;;" sourceLinked="0"/>
+            <c:txPr>
+              <a:bodyPr/>
+              <a:lstStyle/>
+              <a:p>
+                <a:pPr>
+                  <a:defRPr b="0" i="0" strike="noStrike" sz="750" u="none">
+                    <a:solidFill>
+                      <a:srgbClr val="1C2A30"/>
+                    </a:solidFill>
+                    <a:latin typeface="Arial"/>
+                  </a:defRPr>
+                </a:pPr>
+              </a:p>
+            </c:txPr>
+            <c:showLegendKey val="0"/>
+            <c:showVal val="1"/>
+            <c:showCatName val="0"/>
+            <c:showSerName val="0"/>
+            <c:showPercent val="0"/>
+            <c:showBubbleSize val="0"/>
+            <c:showLeaderLines val="0"/>
+          </c:dLbls>
+          <c:cat>
+            <c:multiLvlStrRef>
+              <c:f>Sheet1!$A$2:$A$13</c:f>
+              <c:multiLvlStrCache>
+                <c:ptCount val="12"/>
+                <c:lvl>
+                  <c:pt idx="0">
+                    <c:v>2015</c:v>
+                  </c:pt>
+                  <c:pt idx="1">
+                    <c:v>2016</c:v>
+                  </c:pt>
+                  <c:pt idx="2">
+                    <c:v>2017</c:v>
+                  </c:pt>
+                  <c:pt idx="3">
+                    <c:v>2018</c:v>
+                  </c:pt>
+                  <c:pt idx="4">
+                    <c:v>2019</c:v>
+                  </c:pt>
+                  <c:pt idx="5">
+                    <c:v>2020</c:v>
+                  </c:pt>
+                  <c:pt idx="6">
+                    <c:v>2021</c:v>
+                  </c:pt>
+                  <c:pt idx="7">
+                    <c:v>2022</c:v>
+                  </c:pt>
+                  <c:pt idx="8">
+                    <c:v>2023</c:v>
+                  </c:pt>
+                  <c:pt idx="9">
+                    <c:v>2024</c:v>
+                  </c:pt>
+                  <c:pt idx="10">
+                    <c:v>2025</c:v>
+                  </c:pt>
+                  <c:pt idx="11">
+                    <c:v>2026*</c:v>
+                  </c:pt>
+                </c:lvl>
+              </c:multiLvlStrCache>
+            </c:multiLvlStrRef>
+          </c:cat>
+          <c:val>
+            <c:numRef>
+              <c:f>Sheet1!$C$2:$C$13</c:f>
+              <c:numCache>
+                <c:formatCode>General</c:formatCode>
+                <c:ptCount val="12"/>
+                <c:pt idx="0">
+                  <c:v>0</c:v>
+                </c:pt>
+                <c:pt idx="1">
+                  <c:v>0</c:v>
+                </c:pt>
+                <c:pt idx="2">
+                  <c:v>0</c:v>
+                </c:pt>
+                <c:pt idx="3">
+                  <c:v>0</c:v>
+                </c:pt>
+                <c:pt idx="4">
+                  <c:v>0</c:v>
+                </c:pt>
+                <c:pt idx="5">
+                  <c:v>308</c:v>
+                </c:pt>
+                <c:pt idx="6">
+                  <c:v>0</c:v>
+                </c:pt>
+                <c:pt idx="7">
+                  <c:v>72</c:v>
+                </c:pt>
+                <c:pt idx="8">
+                  <c:v>0</c:v>
+                </c:pt>
+                <c:pt idx="9">
+                  <c:v>0</c:v>
+                </c:pt>
+                <c:pt idx="10">
+                  <c:v>0</c:v>
+                </c:pt>
+                <c:pt idx="11">
+                  <c:v>0</c:v>
                 </c:pt>
               </c:numCache>
             </c:numRef>
           </c:val>
         </c:ser>
         <c:dLbls>
-          <c:numFmt formatCode="#,##0" sourceLinked="0"/>
+          <c:numFmt formatCode="#,##0;;;" sourceLinked="0"/>
           <c:txPr>
             <a:bodyPr/>
             <a:lstStyle/>
             <a:p>
               <a:pPr>
-                <a:defRPr b="0" i="0" strike="noStrike" sz="700" u="none">
+                <a:defRPr b="0" i="0" strike="noStrike" sz="750" u="none">
                   <a:solidFill>
                     <a:srgbClr val="1C2A30"/>
                   </a:solidFill>
@@ -285,7 +422,7 @@
           <c:showLeaderLines val="0"/>
         </c:dLbls>
         <c:gapWidth val="40"/>
-        <c:overlap val="0"/>
+        <c:overlap val="100"/>
         <c:axId val="2094734554"/>
         <c:axId val="2094734552"/>
         <c:axId val="2094734556"/>
@@ -315,7 +452,7 @@
           <a:lstStyle/>
           <a:p>
             <a:pPr>
-              <a:defRPr sz="650" b="0" i="0" u="none" strike="noStrike">
+              <a:defRPr sz="700" b="0" i="0" u="none" strike="noStrike">
                 <a:solidFill>
                   <a:srgbClr val="5D6B70"/>
                 </a:solidFill>
@@ -1244,7 +1381,7 @@
           </c:tx>
           <c:spPr>
             <a:solidFill>
-              <a:srgbClr val="E3E8EA"/>
+              <a:srgbClr val="F0F2F3"/>
             </a:solidFill>
             <a:effectLst/>
           </c:spPr>
@@ -1420,7 +1557,7 @@
           <a:lstStyle/>
           <a:p>
             <a:pPr>
-              <a:defRPr sz="650" b="0" i="0" u="none" strike="noStrike">
+              <a:defRPr sz="700" b="0" i="0" u="none" strike="noStrike">
                 <a:solidFill>
                   <a:srgbClr val="5D6B70"/>
                 </a:solidFill>
@@ -1570,7 +1707,7 @@
               <a:lstStyle/>
               <a:p>
                 <a:pPr>
-                  <a:defRPr b="0" i="0" strike="noStrike" sz="900" u="none">
+                  <a:defRPr b="0" i="0" strike="noStrike" sz="1000" u="none">
                     <a:solidFill>
                       <a:srgbClr val="1C2A30"/>
                     </a:solidFill>
@@ -1653,7 +1790,7 @@
               <a:lstStyle/>
               <a:p>
                 <a:pPr>
-                  <a:defRPr b="0" i="0" strike="noStrike" sz="900" u="none">
+                  <a:defRPr b="0" i="0" strike="noStrike" sz="1000" u="none">
                     <a:solidFill>
                       <a:srgbClr val="1C2A30"/>
                     </a:solidFill>
@@ -1715,7 +1852,7 @@
             <a:lstStyle/>
             <a:p>
               <a:pPr>
-                <a:defRPr b="0" i="0" strike="noStrike" sz="900" u="none">
+                <a:defRPr b="0" i="0" strike="noStrike" sz="1000" u="none">
                   <a:solidFill>
                     <a:srgbClr val="1C2A30"/>
                   </a:solidFill>
@@ -1732,7 +1869,7 @@
           <c:showBubbleSize val="0"/>
           <c:showLeaderLines val="0"/>
         </c:dLbls>
-        <c:gapWidth val="50"/>
+        <c:gapWidth val="45"/>
         <c:overlap val="100"/>
         <c:axId val="2094734554"/>
         <c:axId val="2094734552"/>
@@ -1763,7 +1900,7 @@
           <a:lstStyle/>
           <a:p>
             <a:pPr>
-              <a:defRPr sz="900" b="0" i="0" u="none" strike="noStrike">
+              <a:defRPr sz="1000" b="0" i="0" u="none" strike="noStrike">
                 <a:solidFill>
                   <a:srgbClr val="5D6B70"/>
                 </a:solidFill>
@@ -1826,23 +1963,6 @@
         <a:effectLst/>
       </c:spPr>
     </c:plotArea>
-    <c:legend>
-      <c:legendPos val="b"/>
-      <c:overlay val="0"/>
-      <c:txPr>
-        <a:bodyPr/>
-        <a:lstStyle/>
-        <a:p>
-          <a:pPr>
-            <a:defRPr sz="800">
-              <a:latin typeface="Malgun Gothic"/>
-              <a:cs typeface="Malgun Gothic"/>
-            </a:defRPr>
-          </a:pPr>
-          <a:endParaRPr lang="en-US"/>
-        </a:p>
-      </c:txPr>
-    </c:legend>
     <c:plotVisOnly val="1"/>
     <c:dispBlanksAs val="span"/>
   </c:chart>
@@ -1878,7 +1998,7 @@
               <c:strCache>
                 <c:ptCount val="1"/>
                 <c:pt idx="0">
-                  <c:v>방문당 신청률(%)</c:v>
+                  <c:v>신청률</c:v>
                 </c:pt>
               </c:strCache>
             </c:strRef>
@@ -1904,7 +2024,7 @@
               <a:lstStyle/>
               <a:p>
                 <a:pPr>
-                  <a:defRPr b="0" i="0" strike="noStrike" sz="700" u="none">
+                  <a:defRPr b="0" i="0" strike="noStrike" sz="750" u="none">
                     <a:solidFill>
                       <a:srgbClr val="000000"/>
                     </a:solidFill>
@@ -2004,6 +2124,151 @@
                   <c:v>2.8</c:v>
                 </c:pt>
                 <c:pt idx="7">
+                  <c:v/>
+                </c:pt>
+                <c:pt idx="8">
+                  <c:v/>
+                </c:pt>
+              </c:numCache>
+            </c:numRef>
+          </c:val>
+          <c:smooth val="0"/>
+        </c:ser>
+        <c:ser>
+          <c:idx val="1"/>
+          <c:order val="1"/>
+          <c:tx>
+            <c:strRef>
+              <c:f>Sheet1!$C$1</c:f>
+              <c:strCache>
+                <c:ptCount val="1"/>
+                <c:pt idx="0">
+                  <c:v>신뢰 낮음</c:v>
+                </c:pt>
+              </c:strCache>
+            </c:strRef>
+          </c:tx>
+          <c:spPr>
+            <a:solidFill>
+              <a:srgbClr val="BFC7CA"/>
+            </a:solidFill>
+            <a:ln w="25400" cap="flat">
+              <a:solidFill>
+                <a:srgbClr val="BFC7CA"/>
+              </a:solidFill>
+              <a:prstDash val="solid"/>
+              <a:round/>
+            </a:ln>
+            <a:effectLst/>
+          </c:spPr>
+          <c:invertIfNegative val="0"/>
+          <c:dLbls>
+            <c:numFmt formatCode="0.0" sourceLinked="0"/>
+            <c:txPr>
+              <a:bodyPr/>
+              <a:lstStyle/>
+              <a:p>
+                <a:pPr>
+                  <a:defRPr b="0" i="0" strike="noStrike" sz="750" u="none">
+                    <a:solidFill>
+                      <a:srgbClr val="000000"/>
+                    </a:solidFill>
+                    <a:latin typeface="Arial"/>
+                  </a:defRPr>
+                </a:pPr>
+              </a:p>
+            </c:txPr>
+            <c:dLblPos val="t"/>
+            <c:showLegendKey val="0"/>
+            <c:showVal val="1"/>
+            <c:showCatName val="0"/>
+            <c:showSerName val="0"/>
+            <c:showPercent val="0"/>
+            <c:showBubbleSize val="0"/>
+            <c:showLeaderLines val="0"/>
+          </c:dLbls>
+          <c:marker>
+            <c:symbol val="circle"/>
+            <c:size val="5"/>
+            <c:spPr>
+              <a:solidFill>
+                <a:srgbClr val="BFC7CA"/>
+              </a:solidFill>
+              <a:ln w="9525" cap="flat">
+                <a:solidFill>
+                  <a:srgbClr val="BFC7CA"/>
+                </a:solidFill>
+                <a:prstDash val="solid"/>
+                <a:round/>
+              </a:ln>
+              <a:effectLst/>
+            </c:spPr>
+          </c:marker>
+          <c:cat>
+            <c:multiLvlStrRef>
+              <c:f>Sheet1!$A$2:$A$10</c:f>
+              <c:multiLvlStrCache>
+                <c:ptCount val="9"/>
+                <c:lvl>
+                  <c:pt idx="0">
+                    <c:v>2015</c:v>
+                  </c:pt>
+                  <c:pt idx="1">
+                    <c:v>2018</c:v>
+                  </c:pt>
+                  <c:pt idx="2">
+                    <c:v>2020</c:v>
+                  </c:pt>
+                  <c:pt idx="3">
+                    <c:v>2021</c:v>
+                  </c:pt>
+                  <c:pt idx="4">
+                    <c:v>2022</c:v>
+                  </c:pt>
+                  <c:pt idx="5">
+                    <c:v>2023</c:v>
+                  </c:pt>
+                  <c:pt idx="6">
+                    <c:v>2024</c:v>
+                  </c:pt>
+                  <c:pt idx="7">
+                    <c:v>2025*</c:v>
+                  </c:pt>
+                  <c:pt idx="8">
+                    <c:v>2026*</c:v>
+                  </c:pt>
+                </c:lvl>
+              </c:multiLvlStrCache>
+            </c:multiLvlStrRef>
+          </c:cat>
+          <c:val>
+            <c:numRef>
+              <c:f>Sheet1!$C$2:$C$10</c:f>
+              <c:numCache>
+                <c:formatCode>General</c:formatCode>
+                <c:ptCount val="9"/>
+                <c:pt idx="0">
+                  <c:v/>
+                </c:pt>
+                <c:pt idx="1">
+                  <c:v/>
+                </c:pt>
+                <c:pt idx="2">
+                  <c:v/>
+                </c:pt>
+                <c:pt idx="3">
+                  <c:v/>
+                </c:pt>
+                <c:pt idx="4">
+                  <c:v/>
+                </c:pt>
+                <c:pt idx="5">
+                  <c:v/>
+                </c:pt>
+                <c:pt idx="6">
+                  <c:v/>
+                </c:pt>
+                <c:pt idx="7">
                   <c:v>1</c:v>
                 </c:pt>
                 <c:pt idx="8">
@@ -2021,7 +2286,7 @@
             <a:lstStyle/>
             <a:p>
               <a:pPr>
-                <a:defRPr b="0" i="0" strike="noStrike" sz="700" u="none">
+                <a:defRPr b="0" i="0" strike="noStrike" sz="750" u="none">
                   <a:solidFill>
                     <a:srgbClr val="000000"/>
                   </a:solidFill>
@@ -2069,7 +2334,7 @@
           <a:lstStyle/>
           <a:p>
             <a:pPr>
-              <a:defRPr sz="650" b="0" i="0" u="none" strike="noStrike">
+              <a:defRPr sz="700" b="0" i="0" u="none" strike="noStrike">
                 <a:solidFill>
                   <a:srgbClr val="5D6B70"/>
                 </a:solidFill>
@@ -2159,7 +2424,7 @@
       <c:layout/>
       <c:barChart>
         <c:barDir val="col"/>
-        <c:grouping val="clustered"/>
+        <c:grouping val="stacked"/>
         <c:varyColors val="0"/>
         <c:ser>
           <c:idx val="0"/>
@@ -2170,7 +2435,7 @@
               <c:strCache>
                 <c:ptCount val="1"/>
                 <c:pt idx="0">
-                  <c:v>신청 형태</c:v>
+                  <c:v>번호만</c:v>
                 </c:pt>
               </c:strCache>
             </c:strRef>
@@ -2183,7 +2448,7 @@
           </c:spPr>
           <c:invertIfNegative val="0"/>
           <c:dLbls>
-            <c:numFmt formatCode="#,##0" sourceLinked="0"/>
+            <c:numFmt formatCode="#,##0;;;" sourceLinked="0"/>
             <c:txPr>
               <a:bodyPr/>
               <a:lstStyle/>
@@ -2235,6 +2500,89 @@
                   <c:v>1730</c:v>
                 </c:pt>
                 <c:pt idx="1">
+                  <c:v>0</c:v>
+                </c:pt>
+                <c:pt idx="2">
+                  <c:v>0</c:v>
+                </c:pt>
+              </c:numCache>
+            </c:numRef>
+          </c:val>
+        </c:ser>
+        <c:ser>
+          <c:idx val="1"/>
+          <c:order val="1"/>
+          <c:tx>
+            <c:strRef>
+              <c:f>Sheet1!$C$1</c:f>
+              <c:strCache>
+                <c:ptCount val="1"/>
+                <c:pt idx="0">
+                  <c:v>상세</c:v>
+                </c:pt>
+              </c:strCache>
+            </c:strRef>
+          </c:tx>
+          <c:spPr>
+            <a:solidFill>
+              <a:srgbClr val="C9D1D3"/>
+            </a:solidFill>
+            <a:effectLst/>
+          </c:spPr>
+          <c:invertIfNegative val="0"/>
+          <c:dLbls>
+            <c:numFmt formatCode="#,##0;;;" sourceLinked="0"/>
+            <c:txPr>
+              <a:bodyPr/>
+              <a:lstStyle/>
+              <a:p>
+                <a:pPr>
+                  <a:defRPr b="0" i="0" strike="noStrike" sz="800" u="none">
+                    <a:solidFill>
+                      <a:srgbClr val="000000"/>
+                    </a:solidFill>
+                    <a:latin typeface="Arial"/>
+                  </a:defRPr>
+                </a:pPr>
+              </a:p>
+            </c:txPr>
+            <c:showLegendKey val="0"/>
+            <c:showVal val="1"/>
+            <c:showCatName val="0"/>
+            <c:showSerName val="0"/>
+            <c:showPercent val="0"/>
+            <c:showBubbleSize val="0"/>
+            <c:showLeaderLines val="0"/>
+          </c:dLbls>
+          <c:cat>
+            <c:multiLvlStrRef>
+              <c:f>Sheet1!$A$2:$A$4</c:f>
+              <c:multiLvlStrCache>
+                <c:ptCount val="3"/>
+                <c:lvl>
+                  <c:pt idx="0">
+                    <c:v>번호만</c:v>
+                  </c:pt>
+                  <c:pt idx="1">
+                    <c:v>출원 상세</c:v>
+                  </c:pt>
+                  <c:pt idx="2">
+                    <c:v>분쟁 상세</c:v>
+                  </c:pt>
+                </c:lvl>
+              </c:multiLvlStrCache>
+            </c:multiLvlStrRef>
+          </c:cat>
+          <c:val>
+            <c:numRef>
+              <c:f>Sheet1!$C$2:$C$4</c:f>
+              <c:numCache>
+                <c:formatCode>General</c:formatCode>
+                <c:ptCount val="3"/>
+                <c:pt idx="0">
+                  <c:v>0</c:v>
+                </c:pt>
+                <c:pt idx="1">
                   <c:v>386</c:v>
                 </c:pt>
                 <c:pt idx="2">
@@ -2245,7 +2593,7 @@
           </c:val>
         </c:ser>
         <c:dLbls>
-          <c:numFmt formatCode="#,##0" sourceLinked="0"/>
+          <c:numFmt formatCode="#,##0;;;" sourceLinked="0"/>
           <c:txPr>
             <a:bodyPr/>
             <a:lstStyle/>
@@ -2269,7 +2617,7 @@
           <c:showLeaderLines val="0"/>
         </c:dLbls>
         <c:gapWidth val="50"/>
-        <c:overlap val="0"/>
+        <c:overlap val="100"/>
         <c:axId val="2094734554"/>
         <c:axId val="2094734552"/>
         <c:axId val="2094734556"/>
@@ -2299,7 +2647,7 @@
           <a:lstStyle/>
           <a:p>
             <a:pPr>
-              <a:defRPr sz="650" b="0" i="0" u="none" strike="noStrike">
+              <a:defRPr sz="700" b="0" i="0" u="none" strike="noStrike">
                 <a:solidFill>
                   <a:srgbClr val="5D6B70"/>
                 </a:solidFill>
@@ -3628,8 +3976,8 @@
         </p:nvSpPr>
         <p:spPr>
           <a:xfrm>
-            <a:off x="365760" y="201168"/>
-            <a:ext cx="8046720" cy="384048"/>
+            <a:off x="365760" y="109728"/>
+            <a:ext cx="8412480" cy="201168"/>
           </a:xfrm>
           <a:prstGeom prst="rect">
             <a:avLst/>
@@ -3645,30 +3993,69 @@
               <a:buNone/>
             </a:pPr>
             <a:r>
-              <a:rPr lang="en-US" sz="1800" b="1" dirty="0">
-                <a:solidFill>
-                  <a:srgbClr val="1C2A30"/>
-                </a:solidFill>
-                <a:latin typeface="Malgun Gothic" pitchFamily="34" charset="0"/>
-                <a:ea typeface="Malgun Gothic" pitchFamily="34" charset="-122"/>
-                <a:cs typeface="Malgun Gothic" pitchFamily="34" charset="-120"/>
-              </a:rPr>
-              <a:t>무료진단 랜딩페이지 리뉴얼 — 데이터 분석</a:t>
-            </a:r>
-            <a:endParaRPr lang="en-US" sz="1800" dirty="0"/>
+              <a:rPr lang="en-US" sz="900" dirty="0">
+                <a:solidFill>
+                  <a:srgbClr val="5D6B70"/>
+                </a:solidFill>
+                <a:latin typeface="Malgun Gothic" pitchFamily="34" charset="0"/>
+                <a:ea typeface="Malgun Gothic" pitchFamily="34" charset="-122"/>
+                <a:cs typeface="Malgun Gothic" pitchFamily="34" charset="-120"/>
+              </a:rPr>
+              <a:t>특허사무소 무료진단 랜딩페이지 리뉴얼 — 데이터 분석</a:t>
+            </a:r>
+            <a:endParaRPr lang="en-US" sz="900" dirty="0"/>
           </a:p>
         </p:txBody>
       </p:sp>
       <p:sp>
         <p:nvSpPr>
-          <p:cNvPr id="3" name="Shape 1"/>
+          <p:cNvPr id="3" name="Text 1"/>
+          <p:cNvSpPr txBox="1"/>
+          <p:nvPr/>
+        </p:nvSpPr>
+        <p:spPr>
+          <a:xfrm>
+            <a:off x="365760" y="310896"/>
+            <a:ext cx="8412480" cy="384048"/>
+          </a:xfrm>
+          <a:prstGeom prst="rect">
+            <a:avLst/>
+          </a:prstGeom>
+          <a:noFill/>
+          <a:ln/>
+        </p:spPr>
+        <p:txBody>
+          <a:bodyPr wrap="square" lIns="0" tIns="0" rIns="0" bIns="0" rtlCol="0" anchor="ctr"/>
+          <a:lstStyle/>
+          <a:p>
+            <a:pPr indent="0" marL="0">
+              <a:buNone/>
+            </a:pPr>
+            <a:r>
+              <a:rPr lang="en-US" sz="1800" b="1" dirty="0">
+                <a:solidFill>
+                  <a:srgbClr val="1C2A30"/>
+                </a:solidFill>
+                <a:latin typeface="Malgun Gothic" pitchFamily="34" charset="0"/>
+                <a:ea typeface="Malgun Gothic" pitchFamily="34" charset="-122"/>
+                <a:cs typeface="Malgun Gothic" pitchFamily="34" charset="-120"/>
+              </a:rPr>
+              <a:t>무료진단 신청이 2년 만에 4분의 1로 — 원인은 방문 반, 신청률 반</a:t>
+            </a:r>
+            <a:endParaRPr lang="en-US" sz="1800" dirty="0"/>
+          </a:p>
+        </p:txBody>
+      </p:sp>
+      <p:sp>
+        <p:nvSpPr>
+          <p:cNvPr id="4" name="Shape 2"/>
           <p:cNvSpPr/>
           <p:nvPr/>
         </p:nvSpPr>
         <p:spPr>
           <a:xfrm>
-            <a:off x="365760" y="658368"/>
-            <a:ext cx="8412480" cy="329184"/>
+            <a:off x="365760" y="786384"/>
+            <a:ext cx="8412480" cy="310896"/>
           </a:xfrm>
           <a:prstGeom prst="rect">
             <a:avLst/>
@@ -3686,14 +4073,14 @@
       </p:sp>
       <p:sp>
         <p:nvSpPr>
-          <p:cNvPr id="4" name="Text 2"/>
+          <p:cNvPr id="5" name="Text 3"/>
           <p:cNvSpPr txBox="1"/>
           <p:nvPr/>
         </p:nvSpPr>
         <p:spPr>
           <a:xfrm>
-            <a:off x="365760" y="658368"/>
-            <a:ext cx="8412480" cy="329184"/>
+            <a:off x="365760" y="786384"/>
+            <a:ext cx="8412480" cy="310896"/>
           </a:xfrm>
           <a:prstGeom prst="rect">
             <a:avLst/>
@@ -3709,7 +4096,7 @@
               <a:buNone/>
             </a:pPr>
             <a:r>
-              <a:rPr lang="en-US" sz="1300" b="1" dirty="0">
+              <a:rPr lang="en-US" sz="1200" b="1" dirty="0">
                 <a:solidFill>
                   <a:srgbClr val="1C2A30"/>
                 </a:solidFill>
@@ -3719,20 +4106,20 @@
               </a:rPr>
               <a:t>총 매출  =  수임당 매출  ×  수임 전환율  ×  방문당 신청률  ×  방문수</a:t>
             </a:r>
-            <a:endParaRPr lang="en-US" sz="1300" dirty="0"/>
+            <a:endParaRPr lang="en-US" sz="1200" dirty="0"/>
           </a:p>
         </p:txBody>
       </p:sp>
       <p:sp>
         <p:nvSpPr>
-          <p:cNvPr id="5" name="Shape 3"/>
+          <p:cNvPr id="6" name="Shape 4"/>
           <p:cNvSpPr/>
           <p:nvPr/>
         </p:nvSpPr>
         <p:spPr>
           <a:xfrm>
-            <a:off x="365760" y="1078992"/>
-            <a:ext cx="4206240" cy="3063240"/>
+            <a:off x="365760" y="1188720"/>
+            <a:ext cx="4206240" cy="3108960"/>
           </a:xfrm>
           <a:prstGeom prst="rect">
             <a:avLst/>
@@ -3750,13 +4137,13 @@
       </p:sp>
       <p:sp>
         <p:nvSpPr>
-          <p:cNvPr id="6" name="Text 4"/>
+          <p:cNvPr id="7" name="Text 5"/>
           <p:cNvSpPr txBox="1"/>
           <p:nvPr/>
         </p:nvSpPr>
         <p:spPr>
           <a:xfrm>
-            <a:off x="475488" y="1133856"/>
+            <a:off x="475488" y="1243584"/>
             <a:ext cx="3931920" cy="237744"/>
           </a:xfrm>
           <a:prstGeom prst="rect">
@@ -3789,14 +4176,14 @@
       </p:sp>
       <p:sp>
         <p:nvSpPr>
-          <p:cNvPr id="7" name="Text 5"/>
+          <p:cNvPr id="8" name="Text 6"/>
           <p:cNvSpPr txBox="1"/>
           <p:nvPr/>
         </p:nvSpPr>
         <p:spPr>
           <a:xfrm>
-            <a:off x="475488" y="1389888"/>
-            <a:ext cx="3977640" cy="457200"/>
+            <a:off x="475488" y="1499616"/>
+            <a:ext cx="3977640" cy="274320"/>
           </a:xfrm>
           <a:prstGeom prst="rect">
             <a:avLst/>
@@ -3820,48 +4207,37 @@
                 <a:ea typeface="Malgun Gothic" pitchFamily="34" charset="-122"/>
                 <a:cs typeface="Malgun Gothic" pitchFamily="34" charset="-120"/>
               </a:rPr>
-              <a:t>특허사무소 무료진단 신청이 308건(2020) → 72건(2022)으로 줄고 회복 안 됨</a:t>
+              <a:t>신청 </a:t>
+            </a:r>
+            <a:pPr indent="0" marL="0">
+              <a:buNone/>
+            </a:pPr>
+            <a:r>
+              <a:rPr lang="en-US" sz="1050" b="1" dirty="0">
+                <a:solidFill>
+                  <a:srgbClr val="C8372D"/>
+                </a:solidFill>
+                <a:latin typeface="Malgun Gothic" pitchFamily="34" charset="0"/>
+                <a:ea typeface="Malgun Gothic" pitchFamily="34" charset="-122"/>
+                <a:cs typeface="Malgun Gothic" pitchFamily="34" charset="-120"/>
+              </a:rPr>
+              <a:t>308건(2020) → 72건(2022)</a:t>
+            </a:r>
+            <a:pPr indent="0" marL="0">
+              <a:buNone/>
+            </a:pPr>
+            <a:r>
+              <a:rPr lang="en-US" sz="1050" dirty="0">
+                <a:solidFill>
+                  <a:srgbClr val="1C2A30"/>
+                </a:solidFill>
+                <a:latin typeface="Malgun Gothic" pitchFamily="34" charset="0"/>
+                <a:ea typeface="Malgun Gothic" pitchFamily="34" charset="-122"/>
+                <a:cs typeface="Malgun Gothic" pitchFamily="34" charset="-120"/>
+              </a:rPr>
+              <a:t>, 그 뒤로 회복 안 됨</a:t>
             </a:r>
             <a:endParaRPr lang="en-US" sz="1050" dirty="0"/>
-          </a:p>
-        </p:txBody>
-      </p:sp>
-      <p:sp>
-        <p:nvSpPr>
-          <p:cNvPr id="8" name="Text 6"/>
-          <p:cNvSpPr txBox="1"/>
-          <p:nvPr/>
-        </p:nvSpPr>
-        <p:spPr>
-          <a:xfrm>
-            <a:off x="475488" y="1847088"/>
-            <a:ext cx="3977640" cy="182880"/>
-          </a:xfrm>
-          <a:prstGeom prst="rect">
-            <a:avLst/>
-          </a:prstGeom>
-          <a:noFill/>
-          <a:ln/>
-        </p:spPr>
-        <p:txBody>
-          <a:bodyPr wrap="square" lIns="0" tIns="0" rIns="0" bIns="0" rtlCol="0" anchor="t"/>
-          <a:lstStyle/>
-          <a:p>
-            <a:pPr algn="ctr" indent="0" marL="0">
-              <a:buNone/>
-            </a:pPr>
-            <a:r>
-              <a:rPr lang="en-US" sz="800" dirty="0">
-                <a:solidFill>
-                  <a:srgbClr val="5D6B70"/>
-                </a:solidFill>
-                <a:latin typeface="Malgun Gothic" pitchFamily="34" charset="0"/>
-                <a:ea typeface="Malgun Gothic" pitchFamily="34" charset="-122"/>
-                <a:cs typeface="Malgun Gothic" pitchFamily="34" charset="-120"/>
-              </a:rPr>
-              <a:t>연도별 신청(건)</a:t>
-            </a:r>
-            <a:endParaRPr lang="en-US" sz="800" dirty="0"/>
           </a:p>
         </p:txBody>
       </p:sp>
@@ -3872,8 +4248,8 @@
           <p:nvPr/>
         </p:nvGraphicFramePr>
         <p:xfrm>
-          <a:off x="411480" y="2011680"/>
-          <a:ext cx="4114800" cy="1508760"/>
+          <a:off x="411480" y="1810512"/>
+          <a:ext cx="4114800" cy="1783080"/>
         </p:xfrm>
         <a:graphic xmlns:a="http://schemas.openxmlformats.org/drawingml/2006/main">
           <a:graphicData uri="http://schemas.openxmlformats.org/drawingml/2006/chart">
@@ -3889,8 +4265,8 @@
         </p:nvSpPr>
         <p:spPr>
           <a:xfrm>
-            <a:off x="475488" y="3611880"/>
-            <a:ext cx="3977640" cy="411480"/>
+            <a:off x="475488" y="3703320"/>
+            <a:ext cx="3977640" cy="457200"/>
           </a:xfrm>
           <a:prstGeom prst="rect">
             <a:avLst/>
@@ -3906,7 +4282,7 @@
               <a:buNone/>
             </a:pPr>
             <a:r>
-              <a:rPr lang="en-US" sz="1200" b="1" dirty="0">
+              <a:rPr lang="en-US" sz="1300" b="1" dirty="0">
                 <a:solidFill>
                   <a:srgbClr val="1C2A30"/>
                 </a:solidFill>
@@ -3920,7 +4296,7 @@
               <a:buNone/>
             </a:pPr>
             <a:r>
-              <a:rPr lang="en-US" sz="1200" b="1" dirty="0">
+              <a:rPr lang="en-US" sz="1300" b="1" dirty="0">
                 <a:solidFill>
                   <a:srgbClr val="C8372D"/>
                 </a:solidFill>
@@ -3934,7 +4310,7 @@
               <a:buNone/>
             </a:pPr>
             <a:r>
-              <a:rPr lang="en-US" sz="1200" dirty="0">
+              <a:rPr lang="en-US" sz="1300" dirty="0">
                 <a:solidFill>
                   <a:srgbClr val="1C2A30"/>
                 </a:solidFill>
@@ -3948,7 +4324,7 @@
               <a:buNone/>
             </a:pPr>
             <a:r>
-              <a:rPr lang="en-US" sz="1200" b="1" dirty="0">
+              <a:rPr lang="en-US" sz="1300" b="1" dirty="0">
                 <a:solidFill>
                   <a:srgbClr val="1C2A30"/>
                 </a:solidFill>
@@ -3962,7 +4338,7 @@
               <a:buNone/>
             </a:pPr>
             <a:r>
-              <a:rPr lang="en-US" sz="1200" b="1" dirty="0">
+              <a:rPr lang="en-US" sz="1300" b="1" dirty="0">
                 <a:solidFill>
                   <a:srgbClr val="2A78D6"/>
                 </a:solidFill>
@@ -3972,7 +4348,7 @@
               </a:rPr>
               <a:t>연 150건</a:t>
             </a:r>
-            <a:endParaRPr lang="en-US" sz="1200" dirty="0"/>
+            <a:endParaRPr lang="en-US" sz="1300" dirty="0"/>
           </a:p>
         </p:txBody>
       </p:sp>
@@ -3984,7 +4360,7 @@
         </p:nvSpPr>
         <p:spPr>
           <a:xfrm>
-            <a:off x="4663440" y="1078992"/>
+            <a:off x="4663440" y="1188720"/>
             <a:ext cx="4114800" cy="1600200"/>
           </a:xfrm>
           <a:prstGeom prst="rect">
@@ -4009,7 +4385,7 @@
         </p:nvSpPr>
         <p:spPr>
           <a:xfrm>
-            <a:off x="4773168" y="1133856"/>
+            <a:off x="4773168" y="1243584"/>
             <a:ext cx="3840480" cy="237744"/>
           </a:xfrm>
           <a:prstGeom prst="rect">
@@ -4048,8 +4424,8 @@
         </p:nvSpPr>
         <p:spPr>
           <a:xfrm>
-            <a:off x="4773168" y="1371600"/>
-            <a:ext cx="3886200" cy="365760"/>
+            <a:off x="4773168" y="1499616"/>
+            <a:ext cx="3886200" cy="384048"/>
           </a:xfrm>
           <a:prstGeom prst="rect">
             <a:avLst/>
@@ -4079,7 +4455,7 @@
               <a:buNone/>
             </a:pPr>
             <a:r>
-              <a:rPr lang="en-US" sz="1600" b="1" dirty="0">
+              <a:rPr lang="en-US" sz="1800" b="1" dirty="0">
                 <a:solidFill>
                   <a:srgbClr val="2A78D6"/>
                 </a:solidFill>
@@ -4107,7 +4483,7 @@
               <a:buNone/>
             </a:pPr>
             <a:r>
-              <a:rPr lang="en-US" sz="1600" b="1" dirty="0">
+              <a:rPr lang="en-US" sz="1800" b="1" dirty="0">
                 <a:solidFill>
                   <a:srgbClr val="C8372D"/>
                 </a:solidFill>
@@ -4129,7 +4505,7 @@
                 <a:ea typeface="Malgun Gothic" pitchFamily="34" charset="-122"/>
                 <a:cs typeface="Malgun Gothic" pitchFamily="34" charset="-120"/>
               </a:rPr>
-              <a:t>  (셰이플리 분해)</a:t>
+              <a:t>  셰이플리 분해</a:t>
             </a:r>
             <a:endParaRPr lang="en-US" sz="1100" dirty="0"/>
           </a:p>
@@ -4143,8 +4519,8 @@
         </p:nvSpPr>
         <p:spPr>
           <a:xfrm>
-            <a:off x="4773168" y="1755648"/>
-            <a:ext cx="3886200" cy="868680"/>
+            <a:off x="4773168" y="1920240"/>
+            <a:ext cx="3886200" cy="822960"/>
           </a:xfrm>
           <a:prstGeom prst="rect">
             <a:avLst/>
@@ -4172,7 +4548,7 @@
                 <a:ea typeface="Malgun Gothic" pitchFamily="34" charset="-122"/>
                 <a:cs typeface="Malgun Gothic" pitchFamily="34" charset="-120"/>
               </a:rPr>
-              <a:t>방문: 다음·블로그·검색이 줄고, 광고는 원인 아님</a:t>
+              <a:t>방문: 다음·블로그·검색이 끊김. 광고는 원인 아님 (2장)</a:t>
             </a:r>
             <a:endParaRPr lang="en-US" sz="1000" dirty="0"/>
           </a:p>
@@ -4193,7 +4569,7 @@
                 <a:ea typeface="Malgun Gothic" pitchFamily="34" charset="-122"/>
                 <a:cs typeface="Malgun Gothic" pitchFamily="34" charset="-120"/>
               </a:rPr>
-              <a:t>광고: 포괄 검색어 8개가 광고비 26%, 클릭률은 1/8</a:t>
+              <a:t>광고: 포괄 검색어 8개가 광고비 26%, 클릭률 1/8 (3장)</a:t>
             </a:r>
             <a:endParaRPr lang="en-US" sz="1000" dirty="0"/>
           </a:p>
@@ -4214,7 +4590,7 @@
                 <a:ea typeface="Malgun Gothic" pitchFamily="34" charset="-122"/>
                 <a:cs typeface="Malgun Gothic" pitchFamily="34" charset="-120"/>
               </a:rPr>
-              <a:t>신청률 4.6% → 2.1%, 수임 기록 없음, 분쟁 건당 7배</a:t>
+              <a:t>신청률 4.6% → 2.1%, 수임은 기록 없음 (4장)</a:t>
             </a:r>
             <a:endParaRPr lang="en-US" sz="1000" dirty="0"/>
           </a:p>
@@ -4228,18 +4604,18 @@
         </p:nvSpPr>
         <p:spPr>
           <a:xfrm>
-            <a:off x="4663440" y="2770632"/>
-            <a:ext cx="4114800" cy="1371600"/>
+            <a:off x="4663440" y="2880360"/>
+            <a:ext cx="4114800" cy="1417320"/>
           </a:xfrm>
           <a:prstGeom prst="rect">
             <a:avLst/>
           </a:prstGeom>
           <a:solidFill>
-            <a:srgbClr val="F3F5F4"/>
+            <a:srgbClr val="EEF4FB"/>
           </a:solidFill>
           <a:ln w="12700">
             <a:solidFill>
-              <a:srgbClr val="DFE3E2"/>
+              <a:srgbClr val="EEF4FB"/>
             </a:solidFill>
             <a:prstDash val="solid"/>
           </a:ln>
@@ -4253,7 +4629,7 @@
         </p:nvSpPr>
         <p:spPr>
           <a:xfrm>
-            <a:off x="4773168" y="2825496"/>
+            <a:off x="4773168" y="2935224"/>
             <a:ext cx="3840480" cy="237744"/>
           </a:xfrm>
           <a:prstGeom prst="rect">
@@ -4272,7 +4648,7 @@
             <a:r>
               <a:rPr lang="en-US" sz="1050" b="1" dirty="0">
                 <a:solidFill>
-                  <a:srgbClr val="1C2A30"/>
+                  <a:srgbClr val="2A78D6"/>
                 </a:solidFill>
                 <a:latin typeface="Malgun Gothic" pitchFamily="34" charset="0"/>
                 <a:ea typeface="Malgun Gothic" pitchFamily="34" charset="-122"/>
@@ -4292,7 +4668,7 @@
         </p:nvSpPr>
         <p:spPr>
           <a:xfrm>
-            <a:off x="4773168" y="3063240"/>
+            <a:off x="4773168" y="3200400"/>
             <a:ext cx="3886200" cy="1051560"/>
           </a:xfrm>
           <a:prstGeom prst="rect">
@@ -4363,7 +4739,7 @@
                 <a:ea typeface="Malgun Gothic" pitchFamily="34" charset="-122"/>
                 <a:cs typeface="Malgun Gothic" pitchFamily="34" charset="-120"/>
               </a:rPr>
-              <a:t>기록: 수임 여부, 광고 뒤 신청</a:t>
+              <a:t>기록: 신청마다 수임 여부, 광고 뒤 신청 추적</a:t>
             </a:r>
             <a:endParaRPr lang="en-US" sz="1000" dirty="0"/>
           </a:p>
@@ -4377,7 +4753,7 @@
         </p:nvSpPr>
         <p:spPr>
           <a:xfrm>
-            <a:off x="365760" y="4224528"/>
+            <a:off x="365760" y="4352544"/>
             <a:ext cx="8412480" cy="0"/>
           </a:xfrm>
           <a:prstGeom prst="line">
@@ -4400,7 +4776,7 @@
         </p:nvSpPr>
         <p:spPr>
           <a:xfrm>
-            <a:off x="365760" y="4279392"/>
+            <a:off x="365760" y="4407408"/>
             <a:ext cx="8046720" cy="411480"/>
           </a:xfrm>
           <a:prstGeom prst="rect">
@@ -4420,7 +4796,7 @@
               <a:buNone/>
             </a:pPr>
             <a:r>
-              <a:rPr lang="en-US" sz="700" dirty="0">
+              <a:rPr lang="en-US" sz="800" dirty="0">
                 <a:solidFill>
                   <a:srgbClr val="5D6B70"/>
                 </a:solidFill>
@@ -4430,7 +4806,7 @@
               </a:rPr>
               <a:t>출처: 신청 알림 문자 2014-11 ~ 2026-10-05, 2,895건(스팸 254건 제외). *2026은 10-05까지</a:t>
             </a:r>
-            <a:endParaRPr lang="en-US" sz="700" dirty="0"/>
+            <a:endParaRPr lang="en-US" sz="800" dirty="0"/>
           </a:p>
           <a:p>
             <a:pPr indent="0" marL="0">
@@ -4440,7 +4816,7 @@
               <a:buNone/>
             </a:pPr>
             <a:r>
-              <a:rPr lang="en-US" sz="700" dirty="0">
+              <a:rPr lang="en-US" sz="800" dirty="0">
                 <a:solidFill>
                   <a:srgbClr val="5D6B70"/>
                 </a:solidFill>
@@ -4448,9 +4824,9 @@
                 <a:ea typeface="Malgun Gothic" pitchFamily="34" charset="-122"/>
                 <a:cs typeface="Malgun Gothic" pitchFamily="34" charset="-120"/>
               </a:rPr>
-              <a:t>손실 = 연 200건 감소 × 수임률 10~20% × 출원 수수료 300만 원.  목표 = 신청률이 2020년 4.6%로 돌아오면 지금 방문(3,812)으로 177건</a:t>
-            </a:r>
-            <a:endParaRPr lang="en-US" sz="700" dirty="0"/>
+              <a:t>손실 = 연 200건 감소 × 수임률 10~20% × 출원 수수료 300만 원.  목표 = 신청률이 2020년 4.6%로 돌아오면 지금 방문(2024년 3,812)으로 177건</a:t>
+            </a:r>
+            <a:endParaRPr lang="en-US" sz="800" dirty="0"/>
           </a:p>
         </p:txBody>
       </p:sp>
@@ -4535,8 +4911,8 @@
         </p:nvSpPr>
         <p:spPr>
           <a:xfrm>
-            <a:off x="365760" y="201168"/>
-            <a:ext cx="8046720" cy="384048"/>
+            <a:off x="365760" y="109728"/>
+            <a:ext cx="8412480" cy="201168"/>
           </a:xfrm>
           <a:prstGeom prst="rect">
             <a:avLst/>
@@ -4552,17 +4928,17 @@
               <a:buNone/>
             </a:pPr>
             <a:r>
-              <a:rPr lang="en-US" sz="1800" b="1" dirty="0">
-                <a:solidFill>
-                  <a:srgbClr val="1C2A30"/>
-                </a:solidFill>
-                <a:latin typeface="Malgun Gothic" pitchFamily="34" charset="0"/>
-                <a:ea typeface="Malgun Gothic" pitchFamily="34" charset="-122"/>
-                <a:cs typeface="Malgun Gothic" pitchFamily="34" charset="-120"/>
-              </a:rPr>
-              <a:t>유입경로별 방문자수</a:t>
-            </a:r>
-            <a:endParaRPr lang="en-US" sz="1800" dirty="0"/>
+              <a:rPr lang="en-US" sz="900" dirty="0">
+                <a:solidFill>
+                  <a:srgbClr val="5D6B70"/>
+                </a:solidFill>
+                <a:latin typeface="Malgun Gothic" pitchFamily="34" charset="0"/>
+                <a:ea typeface="Malgun Gothic" pitchFamily="34" charset="-122"/>
+                <a:cs typeface="Malgun Gothic" pitchFamily="34" charset="-120"/>
+              </a:rPr>
+              <a:t>2 · 유입경로별 방문자수</a:t>
+            </a:r>
+            <a:endParaRPr lang="en-US" sz="900" dirty="0"/>
           </a:p>
         </p:txBody>
       </p:sp>
@@ -4574,7 +4950,46 @@
         </p:nvSpPr>
         <p:spPr>
           <a:xfrm>
-            <a:off x="411480" y="685800"/>
+            <a:off x="365760" y="310896"/>
+            <a:ext cx="8412480" cy="384048"/>
+          </a:xfrm>
+          <a:prstGeom prst="rect">
+            <a:avLst/>
+          </a:prstGeom>
+          <a:noFill/>
+          <a:ln/>
+        </p:spPr>
+        <p:txBody>
+          <a:bodyPr wrap="square" lIns="0" tIns="0" rIns="0" bIns="0" rtlCol="0" anchor="ctr"/>
+          <a:lstStyle/>
+          <a:p>
+            <a:pPr indent="0" marL="0">
+              <a:buNone/>
+            </a:pPr>
+            <a:r>
+              <a:rPr lang="en-US" sz="1800" b="1" dirty="0">
+                <a:solidFill>
+                  <a:srgbClr val="1C2A30"/>
+                </a:solidFill>
+                <a:latin typeface="Malgun Gothic" pitchFamily="34" charset="0"/>
+                <a:ea typeface="Malgun Gothic" pitchFamily="34" charset="-122"/>
+                <a:cs typeface="Malgun Gothic" pitchFamily="34" charset="-120"/>
+              </a:rPr>
+              <a:t>신청이 준 2020→2022년, 끊긴 건 광고 밖 경로였다</a:t>
+            </a:r>
+            <a:endParaRPr lang="en-US" sz="1800" dirty="0"/>
+          </a:p>
+        </p:txBody>
+      </p:sp>
+      <p:sp>
+        <p:nvSpPr>
+          <p:cNvPr id="4" name="Text 2"/>
+          <p:cNvSpPr txBox="1"/>
+          <p:nvPr/>
+        </p:nvSpPr>
+        <p:spPr>
+          <a:xfrm>
+            <a:off x="411480" y="786384"/>
             <a:ext cx="4846320" cy="201168"/>
           </a:xfrm>
           <a:prstGeom prst="rect">
@@ -4593,7 +5008,7 @@
             <a:r>
               <a:rPr lang="en-US" sz="900" dirty="0">
                 <a:solidFill>
-                  <a:srgbClr val="1C2A30"/>
+                  <a:srgbClr val="5D6B70"/>
                 </a:solidFill>
                 <a:latin typeface="Malgun Gothic" pitchFamily="34" charset="0"/>
                 <a:ea typeface="Malgun Gothic" pitchFamily="34" charset="-122"/>
@@ -4607,12 +5022,12 @@
       </p:sp>
       <p:graphicFrame>
         <p:nvGraphicFramePr>
-          <p:cNvPr id="4" name="Chart 0" descr=""/>
+          <p:cNvPr id="5" name="Chart 0" descr=""/>
           <p:cNvGraphicFramePr/>
           <p:nvPr/>
         </p:nvGraphicFramePr>
         <p:xfrm>
-          <a:off x="320040" y="896112"/>
+          <a:off x="320040" y="987552"/>
           <a:ext cx="4983480" cy="3291840"/>
         </p:xfrm>
         <a:graphic xmlns:a="http://schemas.openxmlformats.org/drawingml/2006/main">
@@ -4623,14 +5038,41 @@
       </p:graphicFrame>
       <p:sp>
         <p:nvSpPr>
-          <p:cNvPr id="5" name="Text 2"/>
+          <p:cNvPr id="6" name="Shape 3"/>
+          <p:cNvSpPr/>
+          <p:nvPr/>
+        </p:nvSpPr>
+        <p:spPr>
+          <a:xfrm>
+            <a:off x="2615184" y="1097280"/>
+            <a:ext cx="1097280" cy="2670048"/>
+          </a:xfrm>
+          <a:prstGeom prst="rect">
+            <a:avLst/>
+          </a:prstGeom>
+          <a:solidFill>
+            <a:srgbClr val="FFFFFF">
+              <a:alpha val="0"/>
+            </a:srgbClr>
+          </a:solidFill>
+          <a:ln w="12700">
+            <a:solidFill>
+              <a:srgbClr val="D9A400"/>
+            </a:solidFill>
+            <a:prstDash val="dash"/>
+          </a:ln>
+        </p:spPr>
+      </p:sp>
+      <p:sp>
+        <p:nvSpPr>
+          <p:cNvPr id="7" name="Text 4"/>
           <p:cNvSpPr txBox="1"/>
           <p:nvPr/>
         </p:nvSpPr>
         <p:spPr>
           <a:xfrm>
-            <a:off x="5486400" y="777240"/>
-            <a:ext cx="3291840" cy="3383280"/>
+            <a:off x="2615184" y="1115568"/>
+            <a:ext cx="1097280" cy="182880"/>
           </a:xfrm>
           <a:prstGeom prst="rect">
             <a:avLst/>
@@ -4642,6 +5084,45 @@
           <a:bodyPr wrap="square" lIns="0" tIns="0" rIns="0" bIns="0" rtlCol="0" anchor="t"/>
           <a:lstStyle/>
           <a:p>
+            <a:pPr algn="ctr" indent="0" marL="0">
+              <a:buNone/>
+            </a:pPr>
+            <a:r>
+              <a:rPr lang="en-US" sz="800" b="1" dirty="0">
+                <a:solidFill>
+                  <a:srgbClr val="8A6A00"/>
+                </a:solidFill>
+                <a:latin typeface="Malgun Gothic" pitchFamily="34" charset="0"/>
+                <a:ea typeface="Malgun Gothic" pitchFamily="34" charset="-122"/>
+                <a:cs typeface="Malgun Gothic" pitchFamily="34" charset="-120"/>
+              </a:rPr>
+              <a:t>2020→2022</a:t>
+            </a:r>
+            <a:endParaRPr lang="en-US" sz="800" dirty="0"/>
+          </a:p>
+        </p:txBody>
+      </p:sp>
+      <p:sp>
+        <p:nvSpPr>
+          <p:cNvPr id="8" name="Text 5"/>
+          <p:cNvSpPr txBox="1"/>
+          <p:nvPr/>
+        </p:nvSpPr>
+        <p:spPr>
+          <a:xfrm>
+            <a:off x="5486400" y="868680"/>
+            <a:ext cx="3291840" cy="3429000"/>
+          </a:xfrm>
+          <a:prstGeom prst="rect">
+            <a:avLst/>
+          </a:prstGeom>
+          <a:noFill/>
+          <a:ln/>
+        </p:spPr>
+        <p:txBody>
+          <a:bodyPr wrap="square" lIns="0" tIns="0" rIns="0" bIns="0" rtlCol="0" anchor="t"/>
+          <a:lstStyle/>
+          <a:p>
             <a:pPr indent="0" marL="0">
               <a:spcAft>
                 <a:spcPts val="300"/>
@@ -4649,9 +5130,9 @@
               <a:buNone/>
             </a:pPr>
             <a:r>
-              <a:rPr lang="en-US" sz="1050" b="1" dirty="0">
-                <a:solidFill>
-                  <a:srgbClr val="1C2A30"/>
+              <a:rPr lang="en-US" sz="1100" b="1" dirty="0">
+                <a:solidFill>
+                  <a:srgbClr val="C8372D"/>
                 </a:solidFill>
                 <a:latin typeface="Malgun Gothic" pitchFamily="34" charset="0"/>
                 <a:ea typeface="Malgun Gothic" pitchFamily="34" charset="-122"/>
@@ -4659,7 +5140,7 @@
               </a:rPr>
               <a:t>다음 −99%</a:t>
             </a:r>
-            <a:endParaRPr lang="en-US" sz="1050" dirty="0"/>
+            <a:endParaRPr lang="en-US" sz="1100" dirty="0"/>
           </a:p>
           <a:p>
             <a:pPr indent="0" marL="0">
@@ -4679,7 +5160,7 @@
               </a:rPr>
               <a:t>다음 광고·등록 중단</a:t>
             </a:r>
-            <a:endParaRPr lang="en-US" sz="1050" dirty="0"/>
+            <a:endParaRPr lang="en-US" sz="1100" dirty="0"/>
           </a:p>
           <a:p>
             <a:pPr indent="0" marL="0">
@@ -4689,7 +5170,7 @@
               <a:buNone/>
             </a:pPr>
             <a:r>
-              <a:rPr lang="en-US" sz="950" dirty="0">
+              <a:rPr lang="en-US" sz="950" b="1" dirty="0">
                 <a:solidFill>
                   <a:srgbClr val="2A78D6"/>
                 </a:solidFill>
@@ -4699,7 +5180,7 @@
               </a:rPr>
               <a:t>→ 다음 재개 검토</a:t>
             </a:r>
-            <a:endParaRPr lang="en-US" sz="1050" dirty="0"/>
+            <a:endParaRPr lang="en-US" sz="1100" dirty="0"/>
           </a:p>
           <a:p>
             <a:pPr indent="0" marL="0">
@@ -4709,9 +5190,9 @@
               <a:buNone/>
             </a:pPr>
             <a:r>
-              <a:rPr lang="en-US" sz="1050" b="1" dirty="0">
-                <a:solidFill>
-                  <a:srgbClr val="1C2A30"/>
+              <a:rPr lang="en-US" sz="1100" b="1" dirty="0">
+                <a:solidFill>
+                  <a:srgbClr val="B07A10"/>
                 </a:solidFill>
                 <a:latin typeface="Malgun Gothic" pitchFamily="34" charset="0"/>
                 <a:ea typeface="Malgun Gothic" pitchFamily="34" charset="-122"/>
@@ -4719,7 +5200,7 @@
               </a:rPr>
               <a:t>네이버 블로그 −93%</a:t>
             </a:r>
-            <a:endParaRPr lang="en-US" sz="1050" dirty="0"/>
+            <a:endParaRPr lang="en-US" sz="1100" dirty="0"/>
           </a:p>
           <a:p>
             <a:pPr indent="0" marL="0">
@@ -4739,7 +5220,7 @@
               </a:rPr>
               <a:t>글 수는 그대로(2020·21년 318·322건)</a:t>
             </a:r>
-            <a:endParaRPr lang="en-US" sz="1050" dirty="0"/>
+            <a:endParaRPr lang="en-US" sz="1100" dirty="0"/>
           </a:p>
           <a:p>
             <a:pPr indent="0" marL="0">
@@ -4759,7 +5240,7 @@
               </a:rPr>
               <a:t>네이버 노출 방식 변화로 추정</a:t>
             </a:r>
-            <a:endParaRPr lang="en-US" sz="1050" dirty="0"/>
+            <a:endParaRPr lang="en-US" sz="1100" dirty="0"/>
           </a:p>
           <a:p>
             <a:pPr indent="0" marL="0">
@@ -4769,7 +5250,7 @@
               <a:buNone/>
             </a:pPr>
             <a:r>
-              <a:rPr lang="en-US" sz="950" dirty="0">
+              <a:rPr lang="en-US" sz="950" b="1" dirty="0">
                 <a:solidFill>
                   <a:srgbClr val="2A78D6"/>
                 </a:solidFill>
@@ -4779,7 +5260,7 @@
               </a:rPr>
               <a:t>→ 읽을거리 있는 글로</a:t>
             </a:r>
-            <a:endParaRPr lang="en-US" sz="1050" dirty="0"/>
+            <a:endParaRPr lang="en-US" sz="1100" dirty="0"/>
           </a:p>
           <a:p>
             <a:pPr indent="0" marL="0">
@@ -4789,9 +5270,9 @@
               <a:buNone/>
             </a:pPr>
             <a:r>
-              <a:rPr lang="en-US" sz="1050" b="1" dirty="0">
-                <a:solidFill>
-                  <a:srgbClr val="1C2A30"/>
+              <a:rPr lang="en-US" sz="1100" b="1" dirty="0">
+                <a:solidFill>
+                  <a:srgbClr val="2E8A64"/>
                 </a:solidFill>
                 <a:latin typeface="Malgun Gothic" pitchFamily="34" charset="0"/>
                 <a:ea typeface="Malgun Gothic" pitchFamily="34" charset="-122"/>
@@ -4799,7 +5280,7 @@
               </a:rPr>
               <a:t>네이버 검색 −54%</a:t>
             </a:r>
-            <a:endParaRPr lang="en-US" sz="1050" dirty="0"/>
+            <a:endParaRPr lang="en-US" sz="1100" dirty="0"/>
           </a:p>
           <a:p>
             <a:pPr indent="0" marL="0">
@@ -4819,7 +5300,7 @@
               </a:rPr>
               <a:t>사이트 글자가 그림이라 검색에 안 잡힘(추정)</a:t>
             </a:r>
-            <a:endParaRPr lang="en-US" sz="1050" dirty="0"/>
+            <a:endParaRPr lang="en-US" sz="1100" dirty="0"/>
           </a:p>
           <a:p>
             <a:pPr indent="0" marL="0">
@@ -4829,7 +5310,7 @@
               <a:buNone/>
             </a:pPr>
             <a:r>
-              <a:rPr lang="en-US" sz="950" dirty="0">
+              <a:rPr lang="en-US" sz="950" b="1" dirty="0">
                 <a:solidFill>
                   <a:srgbClr val="2A78D6"/>
                 </a:solidFill>
@@ -4839,7 +5320,7 @@
               </a:rPr>
               <a:t>→ 새 사이트는 글자로</a:t>
             </a:r>
-            <a:endParaRPr lang="en-US" sz="1050" dirty="0"/>
+            <a:endParaRPr lang="en-US" sz="1100" dirty="0"/>
           </a:p>
           <a:p>
             <a:pPr indent="0" marL="0">
@@ -4849,9 +5330,9 @@
               <a:buNone/>
             </a:pPr>
             <a:r>
-              <a:rPr lang="en-US" sz="1050" b="1" dirty="0">
-                <a:solidFill>
-                  <a:srgbClr val="1C2A30"/>
+              <a:rPr lang="en-US" sz="1100" b="1" dirty="0">
+                <a:solidFill>
+                  <a:srgbClr val="2A78D6"/>
                 </a:solidFill>
                 <a:latin typeface="Malgun Gothic" pitchFamily="34" charset="0"/>
                 <a:ea typeface="Malgun Gothic" pitchFamily="34" charset="-122"/>
@@ -4859,7 +5340,7 @@
               </a:rPr>
               <a:t>네이버 광고 −40%</a:t>
             </a:r>
-            <a:endParaRPr lang="en-US" sz="1050" dirty="0"/>
+            <a:endParaRPr lang="en-US" sz="1100" dirty="0"/>
           </a:p>
           <a:p>
             <a:pPr indent="0" marL="0">
@@ -4879,19 +5360,39 @@
               </a:rPr>
               <a:t>가장 덜 줄어 원인 아님</a:t>
             </a:r>
-            <a:endParaRPr lang="en-US" sz="1050" dirty="0"/>
+            <a:endParaRPr lang="en-US" sz="1100" dirty="0"/>
+          </a:p>
+          <a:p>
+            <a:pPr indent="0" marL="0">
+              <a:spcAft>
+                <a:spcPts val="300"/>
+              </a:spcAft>
+              <a:buNone/>
+            </a:pPr>
+            <a:r>
+              <a:rPr lang="en-US" sz="950" dirty="0">
+                <a:solidFill>
+                  <a:srgbClr val="1C2A30"/>
+                </a:solidFill>
+                <a:latin typeface="Malgun Gothic" pitchFamily="34" charset="0"/>
+                <a:ea typeface="Malgun Gothic" pitchFamily="34" charset="-122"/>
+                <a:cs typeface="Malgun Gothic" pitchFamily="34" charset="-120"/>
+              </a:rPr>
+              <a:t>지금 남은 방문의 3분의 2</a:t>
+            </a:r>
+            <a:endParaRPr lang="en-US" sz="1100" dirty="0"/>
           </a:p>
         </p:txBody>
       </p:sp>
       <p:sp>
         <p:nvSpPr>
-          <p:cNvPr id="6" name="Shape 3"/>
+          <p:cNvPr id="9" name="Shape 6"/>
           <p:cNvSpPr/>
           <p:nvPr/>
         </p:nvSpPr>
         <p:spPr>
           <a:xfrm>
-            <a:off x="365760" y="4288536"/>
+            <a:off x="365760" y="4352544"/>
             <a:ext cx="8412480" cy="0"/>
           </a:xfrm>
           <a:prstGeom prst="line">
@@ -4908,13 +5409,13 @@
       </p:sp>
       <p:sp>
         <p:nvSpPr>
-          <p:cNvPr id="7" name="Text 4"/>
+          <p:cNvPr id="10" name="Text 7"/>
           <p:cNvSpPr txBox="1"/>
           <p:nvPr/>
         </p:nvSpPr>
         <p:spPr>
           <a:xfrm>
-            <a:off x="365760" y="4343400"/>
+            <a:off x="365760" y="4407408"/>
             <a:ext cx="8046720" cy="411480"/>
           </a:xfrm>
           <a:prstGeom prst="rect">
@@ -4934,7 +5435,7 @@
               <a:buNone/>
             </a:pPr>
             <a:r>
-              <a:rPr lang="en-US" sz="700" dirty="0">
+              <a:rPr lang="en-US" sz="800" dirty="0">
                 <a:solidFill>
                   <a:srgbClr val="5D6B70"/>
                 </a:solidFill>
@@ -4944,7 +5445,7 @@
               </a:rPr>
               <a:t>출처: 서버 관리자 접속자통계(도메인별·OS별) 2015 ~ 2026-10-06. 감소율은 2020 → 2022</a:t>
             </a:r>
-            <a:endParaRPr lang="en-US" sz="700" dirty="0"/>
+            <a:endParaRPr lang="en-US" sz="800" dirty="0"/>
           </a:p>
           <a:p>
             <a:pPr indent="0" marL="0">
@@ -4954,7 +5455,7 @@
               <a:buNone/>
             </a:pPr>
             <a:r>
-              <a:rPr lang="en-US" sz="700" dirty="0">
+              <a:rPr lang="en-US" sz="800" dirty="0">
                 <a:solidFill>
                   <a:srgbClr val="5D6B70"/>
                 </a:solidFill>
@@ -4962,9 +5463,9 @@
                 <a:ea typeface="Malgun Gothic" pitchFamily="34" charset="-122"/>
                 <a:cs typeface="Malgun Gothic" pitchFamily="34" charset="-120"/>
               </a:rPr>
-              <a:t>전처리: 봇은 OS(Robot·Linux)로 뺌. *다 못 뺀 해(2016·17·19·25·26)는 연한 회색</a:t>
-            </a:r>
-            <a:endParaRPr lang="en-US" sz="700" dirty="0"/>
+              <a:t>전처리: 직접 유입에서 봇(OS가 Robot·Linux)을 뺌. *다 못 뺀 해(2016·17·19·25·26)는 연한 회색</a:t>
+            </a:r>
+            <a:endParaRPr lang="en-US" sz="800" dirty="0"/>
           </a:p>
         </p:txBody>
       </p:sp>
@@ -5049,8 +5550,8 @@
         </p:nvSpPr>
         <p:spPr>
           <a:xfrm>
-            <a:off x="365760" y="201168"/>
-            <a:ext cx="8046720" cy="384048"/>
+            <a:off x="365760" y="109728"/>
+            <a:ext cx="8412480" cy="201168"/>
           </a:xfrm>
           <a:prstGeom prst="rect">
             <a:avLst/>
@@ -5066,17 +5567,17 @@
               <a:buNone/>
             </a:pPr>
             <a:r>
-              <a:rPr lang="en-US" sz="1800" b="1" dirty="0">
-                <a:solidFill>
-                  <a:srgbClr val="1C2A30"/>
-                </a:solidFill>
-                <a:latin typeface="Malgun Gothic" pitchFamily="34" charset="0"/>
-                <a:ea typeface="Malgun Gothic" pitchFamily="34" charset="-122"/>
-                <a:cs typeface="Malgun Gothic" pitchFamily="34" charset="-120"/>
-              </a:rPr>
-              <a:t>방문자수 — 네이버 광고</a:t>
-            </a:r>
-            <a:endParaRPr lang="en-US" sz="1800" dirty="0"/>
+              <a:rPr lang="en-US" sz="900" dirty="0">
+                <a:solidFill>
+                  <a:srgbClr val="5D6B70"/>
+                </a:solidFill>
+                <a:latin typeface="Malgun Gothic" pitchFamily="34" charset="0"/>
+                <a:ea typeface="Malgun Gothic" pitchFamily="34" charset="-122"/>
+                <a:cs typeface="Malgun Gothic" pitchFamily="34" charset="-120"/>
+              </a:rPr>
+              <a:t>3 · 방문자수 — 네이버 광고</a:t>
+            </a:r>
+            <a:endParaRPr lang="en-US" sz="900" dirty="0"/>
           </a:p>
         </p:txBody>
       </p:sp>
@@ -5088,8 +5589,47 @@
         </p:nvSpPr>
         <p:spPr>
           <a:xfrm>
-            <a:off x="411480" y="685800"/>
-            <a:ext cx="4434840" cy="201168"/>
+            <a:off x="365760" y="310896"/>
+            <a:ext cx="8412480" cy="384048"/>
+          </a:xfrm>
+          <a:prstGeom prst="rect">
+            <a:avLst/>
+          </a:prstGeom>
+          <a:noFill/>
+          <a:ln/>
+        </p:spPr>
+        <p:txBody>
+          <a:bodyPr wrap="square" lIns="0" tIns="0" rIns="0" bIns="0" rtlCol="0" anchor="ctr"/>
+          <a:lstStyle/>
+          <a:p>
+            <a:pPr indent="0" marL="0">
+              <a:buNone/>
+            </a:pPr>
+            <a:r>
+              <a:rPr lang="en-US" sz="1800" b="1" dirty="0">
+                <a:solidFill>
+                  <a:srgbClr val="1C2A30"/>
+                </a:solidFill>
+                <a:latin typeface="Malgun Gothic" pitchFamily="34" charset="0"/>
+                <a:ea typeface="Malgun Gothic" pitchFamily="34" charset="-122"/>
+                <a:cs typeface="Malgun Gothic" pitchFamily="34" charset="-120"/>
+              </a:rPr>
+              <a:t>광고비 4분의 1이 거의 안 눌리는 검색어 8개에 쓰인다</a:t>
+            </a:r>
+            <a:endParaRPr lang="en-US" sz="1800" dirty="0"/>
+          </a:p>
+        </p:txBody>
+      </p:sp>
+      <p:sp>
+        <p:nvSpPr>
+          <p:cNvPr id="4" name="Text 2"/>
+          <p:cNvSpPr txBox="1"/>
+          <p:nvPr/>
+        </p:nvSpPr>
+        <p:spPr>
+          <a:xfrm>
+            <a:off x="411480" y="786384"/>
+            <a:ext cx="4480560" cy="201168"/>
           </a:xfrm>
           <a:prstGeom prst="rect">
             <a:avLst/>
@@ -5105,29 +5645,71 @@
               <a:buNone/>
             </a:pPr>
             <a:r>
-              <a:rPr lang="en-US" sz="900" dirty="0">
-                <a:solidFill>
-                  <a:srgbClr val="1C2A30"/>
-                </a:solidFill>
-                <a:latin typeface="Malgun Gothic" pitchFamily="34" charset="0"/>
-                <a:ea typeface="Malgun Gothic" pitchFamily="34" charset="-122"/>
-                <a:cs typeface="Malgun Gothic" pitchFamily="34" charset="-120"/>
-              </a:rPr>
-              <a:t>포괄 검색어 8개('특허'·'변리사' 등 한 단어)가 차지하는 몫</a:t>
-            </a:r>
-            <a:endParaRPr lang="en-US" sz="900" dirty="0"/>
+              <a:rPr lang="en-US" sz="850" dirty="0">
+                <a:solidFill>
+                  <a:srgbClr val="C8372D"/>
+                </a:solidFill>
+                <a:latin typeface="Malgun Gothic" pitchFamily="34" charset="0"/>
+                <a:ea typeface="Malgun Gothic" pitchFamily="34" charset="-122"/>
+                <a:cs typeface="Malgun Gothic" pitchFamily="34" charset="-120"/>
+              </a:rPr>
+              <a:t>■ </a:t>
+            </a:r>
+            <a:pPr algn="ctr" indent="0" marL="0">
+              <a:buNone/>
+            </a:pPr>
+            <a:r>
+              <a:rPr lang="en-US" sz="850" dirty="0">
+                <a:solidFill>
+                  <a:srgbClr val="5D6B70"/>
+                </a:solidFill>
+                <a:latin typeface="Malgun Gothic" pitchFamily="34" charset="0"/>
+                <a:ea typeface="Malgun Gothic" pitchFamily="34" charset="-122"/>
+                <a:cs typeface="Malgun Gothic" pitchFamily="34" charset="-120"/>
+              </a:rPr>
+              <a:t>포괄 검색어 8개('특허'·'변리사' 등 한 단어)  </a:t>
+            </a:r>
+            <a:pPr algn="ctr" indent="0" marL="0">
+              <a:buNone/>
+            </a:pPr>
+            <a:r>
+              <a:rPr lang="en-US" sz="850" dirty="0">
+                <a:solidFill>
+                  <a:srgbClr val="C9D1D3"/>
+                </a:solidFill>
+                <a:latin typeface="Malgun Gothic" pitchFamily="34" charset="0"/>
+                <a:ea typeface="Malgun Gothic" pitchFamily="34" charset="-122"/>
+                <a:cs typeface="Malgun Gothic" pitchFamily="34" charset="-120"/>
+              </a:rPr>
+              <a:t>■ </a:t>
+            </a:r>
+            <a:pPr algn="ctr" indent="0" marL="0">
+              <a:buNone/>
+            </a:pPr>
+            <a:r>
+              <a:rPr lang="en-US" sz="850" dirty="0">
+                <a:solidFill>
+                  <a:srgbClr val="5D6B70"/>
+                </a:solidFill>
+                <a:latin typeface="Malgun Gothic" pitchFamily="34" charset="0"/>
+                <a:ea typeface="Malgun Gothic" pitchFamily="34" charset="-122"/>
+                <a:cs typeface="Malgun Gothic" pitchFamily="34" charset="-120"/>
+              </a:rPr>
+              <a:t>구체적 검색어 9,375개</a:t>
+            </a:r>
+            <a:endParaRPr lang="en-US" sz="850" dirty="0"/>
           </a:p>
         </p:txBody>
       </p:sp>
       <p:graphicFrame>
         <p:nvGraphicFramePr>
-          <p:cNvPr id="4" name="Chart 0" descr=""/>
+          <p:cNvPr id="5" name="Chart 0" descr=""/>
           <p:cNvGraphicFramePr/>
           <p:nvPr/>
         </p:nvGraphicFramePr>
         <p:xfrm>
-          <a:off x="320040" y="896112"/>
-          <a:ext cx="4572000" cy="3200400"/>
+          <a:off x="320040" y="1005840"/>
+          <a:ext cx="4572000" cy="3246120"/>
         </p:xfrm>
         <a:graphic xmlns:a="http://schemas.openxmlformats.org/drawingml/2006/main">
           <a:graphicData uri="http://schemas.openxmlformats.org/drawingml/2006/chart">
@@ -5137,14 +5719,14 @@
       </p:graphicFrame>
       <p:sp>
         <p:nvSpPr>
-          <p:cNvPr id="5" name="Text 2"/>
+          <p:cNvPr id="6" name="Text 3"/>
           <p:cNvSpPr txBox="1"/>
           <p:nvPr/>
         </p:nvSpPr>
         <p:spPr>
           <a:xfrm>
-            <a:off x="5074920" y="777240"/>
-            <a:ext cx="3703320" cy="2103120"/>
+            <a:off x="5120640" y="914400"/>
+            <a:ext cx="3657600" cy="1097280"/>
           </a:xfrm>
           <a:prstGeom prst="rect">
             <a:avLst/>
@@ -5157,13 +5739,38 @@
           <a:lstStyle/>
           <a:p>
             <a:pPr indent="0" marL="0">
-              <a:spcAft>
-                <a:spcPts val="300"/>
-              </a:spcAft>
               <a:buNone/>
             </a:pPr>
             <a:r>
-              <a:rPr lang="en-US" sz="1050" b="1" dirty="0">
+              <a:rPr lang="en-US" sz="2400" b="1" dirty="0">
+                <a:solidFill>
+                  <a:srgbClr val="C8372D"/>
+                </a:solidFill>
+                <a:latin typeface="Malgun Gothic" pitchFamily="34" charset="0"/>
+                <a:ea typeface="Malgun Gothic" pitchFamily="34" charset="-122"/>
+                <a:cs typeface="Malgun Gothic" pitchFamily="34" charset="-120"/>
+              </a:rPr>
+              <a:t>0.06%</a:t>
+            </a:r>
+            <a:pPr indent="0" marL="0">
+              <a:buNone/>
+            </a:pPr>
+            <a:r>
+              <a:rPr lang="en-US" sz="1100" dirty="0">
+                <a:solidFill>
+                  <a:srgbClr val="5D6B70"/>
+                </a:solidFill>
+                <a:latin typeface="Malgun Gothic" pitchFamily="34" charset="0"/>
+                <a:ea typeface="Malgun Gothic" pitchFamily="34" charset="-122"/>
+                <a:cs typeface="Malgun Gothic" pitchFamily="34" charset="-120"/>
+              </a:rPr>
+              <a:t>   vs   </a:t>
+            </a:r>
+            <a:pPr indent="0" marL="0">
+              <a:buNone/>
+            </a:pPr>
+            <a:r>
+              <a:rPr lang="en-US" sz="2400" b="1" dirty="0">
                 <a:solidFill>
                   <a:srgbClr val="1C2A30"/>
                 </a:solidFill>
@@ -5171,10 +5778,66 @@
                 <a:ea typeface="Malgun Gothic" pitchFamily="34" charset="-122"/>
                 <a:cs typeface="Malgun Gothic" pitchFamily="34" charset="-120"/>
               </a:rPr>
-              <a:t>포괄 검색어 8개</a:t>
-            </a:r>
-            <a:endParaRPr lang="en-US" sz="1050" dirty="0"/>
-          </a:p>
+              <a:t>0.50%</a:t>
+            </a:r>
+            <a:endParaRPr lang="en-US" sz="2400" dirty="0"/>
+          </a:p>
+          <a:p>
+            <a:pPr indent="0" marL="0">
+              <a:buNone/>
+            </a:pPr>
+            <a:r>
+              <a:rPr lang="en-US" sz="950" dirty="0">
+                <a:solidFill>
+                  <a:srgbClr val="1C2A30"/>
+                </a:solidFill>
+                <a:latin typeface="Malgun Gothic" pitchFamily="34" charset="0"/>
+                <a:ea typeface="Malgun Gothic" pitchFamily="34" charset="-122"/>
+                <a:cs typeface="Malgun Gothic" pitchFamily="34" charset="-120"/>
+              </a:rPr>
+              <a:t>클릭률: 포괄 검색어 vs 구체적 검색어. 8배 차이</a:t>
+            </a:r>
+            <a:endParaRPr lang="en-US" sz="2400" dirty="0"/>
+          </a:p>
+          <a:p>
+            <a:pPr indent="0" marL="0">
+              <a:buNone/>
+            </a:pPr>
+            <a:r>
+              <a:rPr lang="en-US" sz="850" dirty="0">
+                <a:solidFill>
+                  <a:srgbClr val="5D6B70"/>
+                </a:solidFill>
+                <a:latin typeface="Malgun Gothic" pitchFamily="34" charset="0"/>
+                <a:ea typeface="Malgun Gothic" pitchFamily="34" charset="-122"/>
+                <a:cs typeface="Malgun Gothic" pitchFamily="34" charset="-120"/>
+              </a:rPr>
+              <a:t>피셔 정확검정, 우연일 확률 0.1% 미만</a:t>
+            </a:r>
+            <a:endParaRPr lang="en-US" sz="2400" dirty="0"/>
+          </a:p>
+        </p:txBody>
+      </p:sp>
+      <p:sp>
+        <p:nvSpPr>
+          <p:cNvPr id="7" name="Text 4"/>
+          <p:cNvSpPr txBox="1"/>
+          <p:nvPr/>
+        </p:nvSpPr>
+        <p:spPr>
+          <a:xfrm>
+            <a:off x="5120640" y="2103120"/>
+            <a:ext cx="3657600" cy="777240"/>
+          </a:xfrm>
+          <a:prstGeom prst="rect">
+            <a:avLst/>
+          </a:prstGeom>
+          <a:noFill/>
+          <a:ln/>
+        </p:spPr>
+        <p:txBody>
+          <a:bodyPr wrap="square" lIns="0" tIns="0" rIns="0" bIns="0" rtlCol="0" anchor="t"/>
+          <a:lstStyle/>
           <a:p>
             <a:pPr indent="0" marL="0">
               <a:spcAft>
@@ -5183,7 +5846,7 @@
               <a:buNone/>
             </a:pPr>
             <a:r>
-              <a:rPr lang="en-US" sz="950" dirty="0">
+              <a:rPr lang="en-US" sz="1050" b="1" dirty="0">
                 <a:solidFill>
                   <a:srgbClr val="1C2A30"/>
                 </a:solidFill>
@@ -5191,7 +5854,7 @@
                 <a:ea typeface="Malgun Gothic" pitchFamily="34" charset="-122"/>
                 <a:cs typeface="Malgun Gothic" pitchFamily="34" charset="-120"/>
               </a:rPr>
-              <a:t>광고비 26%, 클릭률 0.06% vs 구체적 검색어 0.50% (피셔 정확검정, 우연일 확률 0.1% 미만)</a:t>
+              <a:t>확장검색 (네이버가 비슷한 말에 붙인 광고)</a:t>
             </a:r>
             <a:endParaRPr lang="en-US" sz="1050" dirty="0"/>
           </a:p>
@@ -5203,7 +5866,7 @@
               <a:buNone/>
             </a:pPr>
             <a:r>
-              <a:rPr lang="en-US" sz="1050" b="1" dirty="0">
+              <a:rPr lang="en-US" sz="950" dirty="0">
                 <a:solidFill>
                   <a:srgbClr val="1C2A30"/>
                 </a:solidFill>
@@ -5211,7 +5874,7 @@
                 <a:ea typeface="Malgun Gothic" pitchFamily="34" charset="-122"/>
                 <a:cs typeface="Malgun Gothic" pitchFamily="34" charset="-120"/>
               </a:rPr>
-              <a:t>확장검색 (네이버가 비슷한 말에 붙인 광고)</a:t>
+              <a:t>직접 등록한 말 0.61% vs 확장 0.32%, 절반만 눌림</a:t>
             </a:r>
             <a:endParaRPr lang="en-US" sz="1050" dirty="0"/>
           </a:p>
@@ -5223,15 +5886,15 @@
               <a:buNone/>
             </a:pPr>
             <a:r>
-              <a:rPr lang="en-US" sz="950" dirty="0">
-                <a:solidFill>
-                  <a:srgbClr val="1C2A30"/>
-                </a:solidFill>
-                <a:latin typeface="Malgun Gothic" pitchFamily="34" charset="0"/>
-                <a:ea typeface="Malgun Gothic" pitchFamily="34" charset="-122"/>
-                <a:cs typeface="Malgun Gothic" pitchFamily="34" charset="-120"/>
-              </a:rPr>
-              <a:t>직접 등록한 말 0.61% vs 확장 0.32%, 2배 차이 (같은 검정, 포괄 검색어 제외)</a:t>
+              <a:rPr lang="en-US" sz="850" dirty="0">
+                <a:solidFill>
+                  <a:srgbClr val="5D6B70"/>
+                </a:solidFill>
+                <a:latin typeface="Malgun Gothic" pitchFamily="34" charset="0"/>
+                <a:ea typeface="Malgun Gothic" pitchFamily="34" charset="-122"/>
+                <a:cs typeface="Malgun Gothic" pitchFamily="34" charset="-120"/>
+              </a:rPr>
+              <a:t>포괄 검색어를 빼고 비교, 같은 검정</a:t>
             </a:r>
             <a:endParaRPr lang="en-US" sz="1050" dirty="0"/>
           </a:p>
@@ -5239,14 +5902,14 @@
       </p:sp>
       <p:sp>
         <p:nvSpPr>
-          <p:cNvPr id="6" name="Shape 3"/>
+          <p:cNvPr id="8" name="Shape 5"/>
           <p:cNvSpPr/>
           <p:nvPr/>
         </p:nvSpPr>
         <p:spPr>
           <a:xfrm>
-            <a:off x="5074920" y="2926080"/>
-            <a:ext cx="3703320" cy="1188720"/>
+            <a:off x="5120640" y="2971800"/>
+            <a:ext cx="3657600" cy="1280160"/>
           </a:xfrm>
           <a:prstGeom prst="rect">
             <a:avLst/>
@@ -5264,14 +5927,14 @@
       </p:sp>
       <p:sp>
         <p:nvSpPr>
-          <p:cNvPr id="7" name="Text 4"/>
+          <p:cNvPr id="9" name="Text 6"/>
           <p:cNvSpPr txBox="1"/>
           <p:nvPr/>
         </p:nvSpPr>
         <p:spPr>
           <a:xfrm>
-            <a:off x="5166360" y="2990088"/>
-            <a:ext cx="3520440" cy="1078992"/>
+            <a:off x="5230368" y="3044952"/>
+            <a:ext cx="3474720" cy="1170432"/>
           </a:xfrm>
           <a:prstGeom prst="rect">
             <a:avLst/>
@@ -5311,7 +5974,7 @@
               <a:buChar char="•"/>
             </a:pPr>
             <a:r>
-              <a:rPr lang="en-US" sz="950" dirty="0">
+              <a:rPr lang="en-US" sz="1000" dirty="0">
                 <a:solidFill>
                   <a:srgbClr val="1C2A30"/>
                 </a:solidFill>
@@ -5332,7 +5995,7 @@
               <a:buChar char="•"/>
             </a:pPr>
             <a:r>
-              <a:rPr lang="en-US" sz="950" dirty="0">
+              <a:rPr lang="en-US" sz="1000" dirty="0">
                 <a:solidFill>
                   <a:srgbClr val="1C2A30"/>
                 </a:solidFill>
@@ -5353,7 +6016,7 @@
               <a:buChar char="•"/>
             </a:pPr>
             <a:r>
-              <a:rPr lang="en-US" sz="950" dirty="0">
+              <a:rPr lang="en-US" sz="1000" dirty="0">
                 <a:solidFill>
                   <a:srgbClr val="1C2A30"/>
                 </a:solidFill>
@@ -5369,13 +6032,13 @@
       </p:sp>
       <p:sp>
         <p:nvSpPr>
-          <p:cNvPr id="8" name="Shape 5"/>
+          <p:cNvPr id="10" name="Shape 7"/>
           <p:cNvSpPr/>
           <p:nvPr/>
         </p:nvSpPr>
         <p:spPr>
           <a:xfrm>
-            <a:off x="365760" y="4288536"/>
+            <a:off x="365760" y="4352544"/>
             <a:ext cx="8412480" cy="0"/>
           </a:xfrm>
           <a:prstGeom prst="line">
@@ -5392,13 +6055,13 @@
       </p:sp>
       <p:sp>
         <p:nvSpPr>
-          <p:cNvPr id="9" name="Text 6"/>
+          <p:cNvPr id="11" name="Text 8"/>
           <p:cNvSpPr txBox="1"/>
           <p:nvPr/>
         </p:nvSpPr>
         <p:spPr>
           <a:xfrm>
-            <a:off x="365760" y="4343400"/>
+            <a:off x="365760" y="4407408"/>
             <a:ext cx="8046720" cy="411480"/>
           </a:xfrm>
           <a:prstGeom prst="rect">
@@ -5418,7 +6081,7 @@
               <a:buNone/>
             </a:pPr>
             <a:r>
-              <a:rPr lang="en-US" sz="700" dirty="0">
+              <a:rPr lang="en-US" sz="800" dirty="0">
                 <a:solidFill>
                   <a:srgbClr val="5D6B70"/>
                 </a:solidFill>
@@ -5428,7 +6091,7 @@
               </a:rPr>
               <a:t>출처: 네이버 광고 검색어 보고서 2026-07-06 ~ 10-03(90일), 27,277행(보고서 제목 줄 제거)</a:t>
             </a:r>
-            <a:endParaRPr lang="en-US" sz="700" dirty="0"/>
+            <a:endParaRPr lang="en-US" sz="800" dirty="0"/>
           </a:p>
           <a:p>
             <a:pPr indent="0" marL="0">
@@ -5438,7 +6101,7 @@
               <a:buNone/>
             </a:pPr>
             <a:r>
-              <a:rPr lang="en-US" sz="700" dirty="0">
+              <a:rPr lang="en-US" sz="800" dirty="0">
                 <a:solidFill>
                   <a:srgbClr val="5D6B70"/>
                 </a:solidFill>
@@ -5448,7 +6111,7 @@
               </a:rPr>
               <a:t>한계: 클릭 뒤 신청은 안 잡힘</a:t>
             </a:r>
-            <a:endParaRPr lang="en-US" sz="700" dirty="0"/>
+            <a:endParaRPr lang="en-US" sz="800" dirty="0"/>
           </a:p>
         </p:txBody>
       </p:sp>
@@ -5533,8 +6196,8 @@
         </p:nvSpPr>
         <p:spPr>
           <a:xfrm>
-            <a:off x="365760" y="201168"/>
-            <a:ext cx="8046720" cy="384048"/>
+            <a:off x="365760" y="109728"/>
+            <a:ext cx="8412480" cy="201168"/>
           </a:xfrm>
           <a:prstGeom prst="rect">
             <a:avLst/>
@@ -5550,30 +6213,69 @@
               <a:buNone/>
             </a:pPr>
             <a:r>
-              <a:rPr lang="en-US" sz="1800" b="1" dirty="0">
-                <a:solidFill>
-                  <a:srgbClr val="1C2A30"/>
-                </a:solidFill>
-                <a:latin typeface="Malgun Gothic" pitchFamily="34" charset="0"/>
-                <a:ea typeface="Malgun Gothic" pitchFamily="34" charset="-122"/>
-                <a:cs typeface="Malgun Gothic" pitchFamily="34" charset="-120"/>
-              </a:rPr>
-              <a:t>방문당 신청률 · 수임 전환율 · 수임당 매출</a:t>
-            </a:r>
-            <a:endParaRPr lang="en-US" sz="1800" dirty="0"/>
+              <a:rPr lang="en-US" sz="900" dirty="0">
+                <a:solidFill>
+                  <a:srgbClr val="5D6B70"/>
+                </a:solidFill>
+                <a:latin typeface="Malgun Gothic" pitchFamily="34" charset="0"/>
+                <a:ea typeface="Malgun Gothic" pitchFamily="34" charset="-122"/>
+                <a:cs typeface="Malgun Gothic" pitchFamily="34" charset="-120"/>
+              </a:rPr>
+              <a:t>4 · 방문당 신청률 · 수임 전환율 · 수임당 매출</a:t>
+            </a:r>
+            <a:endParaRPr lang="en-US" sz="900" dirty="0"/>
           </a:p>
         </p:txBody>
       </p:sp>
       <p:sp>
         <p:nvSpPr>
-          <p:cNvPr id="3" name="Shape 1"/>
+          <p:cNvPr id="3" name="Text 1"/>
+          <p:cNvSpPr txBox="1"/>
+          <p:nvPr/>
+        </p:nvSpPr>
+        <p:spPr>
+          <a:xfrm>
+            <a:off x="365760" y="310896"/>
+            <a:ext cx="8412480" cy="384048"/>
+          </a:xfrm>
+          <a:prstGeom prst="rect">
+            <a:avLst/>
+          </a:prstGeom>
+          <a:noFill/>
+          <a:ln/>
+        </p:spPr>
+        <p:txBody>
+          <a:bodyPr wrap="square" lIns="0" tIns="0" rIns="0" bIns="0" rtlCol="0" anchor="ctr"/>
+          <a:lstStyle/>
+          <a:p>
+            <a:pPr indent="0" marL="0">
+              <a:buNone/>
+            </a:pPr>
+            <a:r>
+              <a:rPr lang="en-US" sz="1800" b="1" dirty="0">
+                <a:solidFill>
+                  <a:srgbClr val="1C2A30"/>
+                </a:solidFill>
+                <a:latin typeface="Malgun Gothic" pitchFamily="34" charset="0"/>
+                <a:ea typeface="Malgun Gothic" pitchFamily="34" charset="-122"/>
+                <a:cs typeface="Malgun Gothic" pitchFamily="34" charset="-120"/>
+              </a:rPr>
+              <a:t>신청률은 반토막, 신청 뒤는 기록조차 없다</a:t>
+            </a:r>
+            <a:endParaRPr lang="en-US" sz="1800" dirty="0"/>
+          </a:p>
+        </p:txBody>
+      </p:sp>
+      <p:sp>
+        <p:nvSpPr>
+          <p:cNvPr id="4" name="Shape 2"/>
           <p:cNvSpPr/>
           <p:nvPr/>
         </p:nvSpPr>
         <p:spPr>
           <a:xfrm>
-            <a:off x="365760" y="685800"/>
-            <a:ext cx="2743200" cy="3520440"/>
+            <a:off x="365760" y="804672"/>
+            <a:ext cx="2743200" cy="3493008"/>
           </a:xfrm>
           <a:prstGeom prst="rect">
             <a:avLst/>
@@ -5591,13 +6293,13 @@
       </p:sp>
       <p:sp>
         <p:nvSpPr>
-          <p:cNvPr id="4" name="Text 2"/>
+          <p:cNvPr id="5" name="Text 3"/>
           <p:cNvSpPr txBox="1"/>
           <p:nvPr/>
         </p:nvSpPr>
         <p:spPr>
           <a:xfrm>
-            <a:off x="457200" y="731520"/>
+            <a:off x="457200" y="850392"/>
             <a:ext cx="2560320" cy="237744"/>
           </a:xfrm>
           <a:prstGeom prst="rect">
@@ -5628,32 +6330,16 @@
           </a:p>
         </p:txBody>
       </p:sp>
-      <p:graphicFrame>
-        <p:nvGraphicFramePr>
-          <p:cNvPr id="5" name="Chart 0" descr=""/>
-          <p:cNvGraphicFramePr/>
-          <p:nvPr/>
-        </p:nvGraphicFramePr>
-        <p:xfrm>
-          <a:off x="411480" y="1005840"/>
-          <a:ext cx="2651760" cy="1645920"/>
-        </p:xfrm>
-        <a:graphic xmlns:a="http://schemas.openxmlformats.org/drawingml/2006/main">
-          <a:graphicData uri="http://schemas.openxmlformats.org/drawingml/2006/chart">
-            <c:chart xmlns:c="http://schemas.openxmlformats.org/drawingml/2006/chart" r:id="rId1"/>
-          </a:graphicData>
-        </a:graphic>
-      </p:graphicFrame>
       <p:sp>
         <p:nvSpPr>
-          <p:cNvPr id="6" name="Text 3"/>
+          <p:cNvPr id="6" name="Text 4"/>
           <p:cNvSpPr txBox="1"/>
           <p:nvPr/>
         </p:nvSpPr>
         <p:spPr>
           <a:xfrm>
-            <a:off x="457200" y="2697480"/>
-            <a:ext cx="2560320" cy="960120"/>
+            <a:off x="457200" y="1088136"/>
+            <a:ext cx="2560320" cy="182880"/>
           </a:xfrm>
           <a:prstGeom prst="rect">
             <a:avLst/>
@@ -5666,76 +6352,49 @@
           <a:lstStyle/>
           <a:p>
             <a:pPr indent="0" marL="0">
-              <a:spcAft>
-                <a:spcPts val="300"/>
-              </a:spcAft>
               <a:buNone/>
             </a:pPr>
             <a:r>
-              <a:rPr lang="en-US" sz="950" dirty="0">
-                <a:solidFill>
-                  <a:srgbClr val="1C2A30"/>
-                </a:solidFill>
-                <a:latin typeface="Malgun Gothic" pitchFamily="34" charset="0"/>
-                <a:ea typeface="Malgun Gothic" pitchFamily="34" charset="-122"/>
-                <a:cs typeface="Malgun Gothic" pitchFamily="34" charset="-120"/>
-              </a:rPr>
-              <a:t>4.6%(2020) → 2.1%(2022)</a:t>
-            </a:r>
-            <a:endParaRPr lang="en-US" sz="950" dirty="0"/>
-          </a:p>
-          <a:p>
-            <a:pPr indent="0" marL="0">
-              <a:spcAft>
-                <a:spcPts val="300"/>
-              </a:spcAft>
-              <a:buNone/>
-            </a:pPr>
-            <a:r>
-              <a:rPr lang="en-US" sz="950" dirty="0">
-                <a:solidFill>
-                  <a:srgbClr val="1C2A30"/>
-                </a:solidFill>
-                <a:latin typeface="Malgun Gothic" pitchFamily="34" charset="0"/>
-                <a:ea typeface="Malgun Gothic" pitchFamily="34" charset="-122"/>
-                <a:cs typeface="Malgun Gothic" pitchFamily="34" charset="-120"/>
-              </a:rPr>
-              <a:t>당시 이유는 기록이 없어 모름</a:t>
-            </a:r>
-            <a:endParaRPr lang="en-US" sz="950" dirty="0"/>
-          </a:p>
-          <a:p>
-            <a:pPr indent="0" marL="0">
-              <a:spcAft>
-                <a:spcPts val="300"/>
-              </a:spcAft>
-              <a:buNone/>
-            </a:pPr>
-            <a:r>
-              <a:rPr lang="en-US" sz="950" dirty="0">
-                <a:solidFill>
-                  <a:srgbClr val="1C2A30"/>
-                </a:solidFill>
-                <a:latin typeface="Malgun Gothic" pitchFamily="34" charset="0"/>
-                <a:ea typeface="Malgun Gothic" pitchFamily="34" charset="-122"/>
-                <a:cs typeface="Malgun Gothic" pitchFamily="34" charset="-120"/>
-              </a:rPr>
-              <a:t>지금: 광고 방문 중앙값 18초, 27%가 5초 안에 나감</a:t>
-            </a:r>
-            <a:endParaRPr lang="en-US" sz="950" dirty="0"/>
+              <a:rPr lang="en-US" sz="800" dirty="0">
+                <a:solidFill>
+                  <a:srgbClr val="5D6B70"/>
+                </a:solidFill>
+                <a:latin typeface="Malgun Gothic" pitchFamily="34" charset="0"/>
+                <a:ea typeface="Malgun Gothic" pitchFamily="34" charset="-122"/>
+                <a:cs typeface="Malgun Gothic" pitchFamily="34" charset="-120"/>
+              </a:rPr>
+              <a:t>연도별 방문당 신청률(%)</a:t>
+            </a:r>
+            <a:endParaRPr lang="en-US" sz="800" dirty="0"/>
           </a:p>
         </p:txBody>
       </p:sp>
+      <p:graphicFrame>
+        <p:nvGraphicFramePr>
+          <p:cNvPr id="7" name="Chart 0" descr=""/>
+          <p:cNvGraphicFramePr/>
+          <p:nvPr/>
+        </p:nvGraphicFramePr>
+        <p:xfrm>
+          <a:off x="411480" y="1261872"/>
+          <a:ext cx="2651760" cy="1783080"/>
+        </p:xfrm>
+        <a:graphic xmlns:a="http://schemas.openxmlformats.org/drawingml/2006/main">
+          <a:graphicData uri="http://schemas.openxmlformats.org/drawingml/2006/chart">
+            <c:chart xmlns:c="http://schemas.openxmlformats.org/drawingml/2006/chart" r:id="rId1"/>
+          </a:graphicData>
+        </a:graphic>
+      </p:graphicFrame>
       <p:sp>
         <p:nvSpPr>
-          <p:cNvPr id="7" name="Text 4"/>
+          <p:cNvPr id="8" name="Text 5"/>
           <p:cNvSpPr txBox="1"/>
           <p:nvPr/>
         </p:nvSpPr>
         <p:spPr>
           <a:xfrm>
-            <a:off x="457200" y="3657600"/>
-            <a:ext cx="2560320" cy="457200"/>
+            <a:off x="457200" y="3090672"/>
+            <a:ext cx="2560320" cy="777240"/>
           </a:xfrm>
           <a:prstGeom prst="rect">
             <a:avLst/>
@@ -5748,33 +6407,95 @@
           <a:lstStyle/>
           <a:p>
             <a:pPr indent="0" marL="0">
+              <a:spcAft>
+                <a:spcPts val="300"/>
+              </a:spcAft>
               <a:buNone/>
             </a:pPr>
             <a:r>
-              <a:rPr lang="en-US" sz="1000" b="1" dirty="0">
-                <a:solidFill>
-                  <a:srgbClr val="2A78D6"/>
-                </a:solidFill>
-                <a:latin typeface="Malgun Gothic" pitchFamily="34" charset="0"/>
-                <a:ea typeface="Malgun Gothic" pitchFamily="34" charset="-122"/>
-                <a:cs typeface="Malgun Gothic" pitchFamily="34" charset="-120"/>
-              </a:rPr>
-              <a:t>→ 새 사이트</a:t>
-            </a:r>
-            <a:endParaRPr lang="en-US" sz="1000" dirty="0"/>
+              <a:rPr lang="en-US" sz="950" dirty="0">
+                <a:solidFill>
+                  <a:srgbClr val="1C2A30"/>
+                </a:solidFill>
+                <a:latin typeface="Malgun Gothic" pitchFamily="34" charset="0"/>
+                <a:ea typeface="Malgun Gothic" pitchFamily="34" charset="-122"/>
+                <a:cs typeface="Malgun Gothic" pitchFamily="34" charset="-120"/>
+              </a:rPr>
+              <a:t>4.6%(2020) → 2.1%(2022). 당시 이유는 기록 없음</a:t>
+            </a:r>
+            <a:endParaRPr lang="en-US" sz="950" dirty="0"/>
+          </a:p>
+          <a:p>
+            <a:pPr indent="0" marL="0">
+              <a:spcAft>
+                <a:spcPts val="300"/>
+              </a:spcAft>
+              <a:buNone/>
+            </a:pPr>
+            <a:r>
+              <a:rPr lang="en-US" sz="950" dirty="0">
+                <a:solidFill>
+                  <a:srgbClr val="1C2A30"/>
+                </a:solidFill>
+                <a:latin typeface="Malgun Gothic" pitchFamily="34" charset="0"/>
+                <a:ea typeface="Malgun Gothic" pitchFamily="34" charset="-122"/>
+                <a:cs typeface="Malgun Gothic" pitchFamily="34" charset="-120"/>
+              </a:rPr>
+              <a:t>지금: 광고 방문 중앙값 18초, 27%가 5초 안에 나감</a:t>
+            </a:r>
+            <a:endParaRPr lang="en-US" sz="950" dirty="0"/>
           </a:p>
         </p:txBody>
       </p:sp>
       <p:sp>
         <p:nvSpPr>
-          <p:cNvPr id="8" name="Shape 5"/>
+          <p:cNvPr id="9" name="Text 6"/>
+          <p:cNvSpPr txBox="1"/>
+          <p:nvPr/>
+        </p:nvSpPr>
+        <p:spPr>
+          <a:xfrm>
+            <a:off x="457200" y="3895344"/>
+            <a:ext cx="2560320" cy="329184"/>
+          </a:xfrm>
+          <a:prstGeom prst="rect">
+            <a:avLst/>
+          </a:prstGeom>
+          <a:noFill/>
+          <a:ln/>
+        </p:spPr>
+        <p:txBody>
+          <a:bodyPr wrap="square" lIns="0" tIns="0" rIns="0" bIns="0" rtlCol="0" anchor="ctr"/>
+          <a:lstStyle/>
+          <a:p>
+            <a:pPr indent="0" marL="0">
+              <a:buNone/>
+            </a:pPr>
+            <a:r>
+              <a:rPr lang="en-US" sz="1050" b="1" dirty="0">
+                <a:solidFill>
+                  <a:srgbClr val="2A78D6"/>
+                </a:solidFill>
+                <a:latin typeface="Malgun Gothic" pitchFamily="34" charset="0"/>
+                <a:ea typeface="Malgun Gothic" pitchFamily="34" charset="-122"/>
+                <a:cs typeface="Malgun Gothic" pitchFamily="34" charset="-120"/>
+              </a:rPr>
+              <a:t>→ 새 사이트</a:t>
+            </a:r>
+            <a:endParaRPr lang="en-US" sz="1050" dirty="0"/>
+          </a:p>
+        </p:txBody>
+      </p:sp>
+      <p:sp>
+        <p:nvSpPr>
+          <p:cNvPr id="10" name="Shape 7"/>
           <p:cNvSpPr/>
           <p:nvPr/>
         </p:nvSpPr>
         <p:spPr>
           <a:xfrm>
-            <a:off x="3200400" y="685800"/>
-            <a:ext cx="2743200" cy="3520440"/>
+            <a:off x="3200400" y="804672"/>
+            <a:ext cx="2743200" cy="3493008"/>
           </a:xfrm>
           <a:prstGeom prst="rect">
             <a:avLst/>
@@ -5792,13 +6513,13 @@
       </p:sp>
       <p:sp>
         <p:nvSpPr>
-          <p:cNvPr id="9" name="Text 6"/>
+          <p:cNvPr id="11" name="Text 8"/>
           <p:cNvSpPr txBox="1"/>
           <p:nvPr/>
         </p:nvSpPr>
         <p:spPr>
           <a:xfrm>
-            <a:off x="3291840" y="731520"/>
+            <a:off x="3291840" y="850392"/>
             <a:ext cx="2560320" cy="237744"/>
           </a:xfrm>
           <a:prstGeom prst="rect">
@@ -5829,32 +6550,16 @@
           </a:p>
         </p:txBody>
       </p:sp>
-      <p:graphicFrame>
-        <p:nvGraphicFramePr>
-          <p:cNvPr id="10" name="Chart 1" descr=""/>
-          <p:cNvGraphicFramePr/>
-          <p:nvPr/>
-        </p:nvGraphicFramePr>
-        <p:xfrm>
-          <a:off x="3246120" y="1005840"/>
-          <a:ext cx="2651760" cy="1645920"/>
-        </p:xfrm>
-        <a:graphic xmlns:a="http://schemas.openxmlformats.org/drawingml/2006/main">
-          <a:graphicData uri="http://schemas.openxmlformats.org/drawingml/2006/chart">
-            <c:chart xmlns:c="http://schemas.openxmlformats.org/drawingml/2006/chart" r:id="rId2"/>
-          </a:graphicData>
-        </a:graphic>
-      </p:graphicFrame>
       <p:sp>
         <p:nvSpPr>
-          <p:cNvPr id="11" name="Text 7"/>
+          <p:cNvPr id="12" name="Text 9"/>
           <p:cNvSpPr txBox="1"/>
           <p:nvPr/>
         </p:nvSpPr>
         <p:spPr>
           <a:xfrm>
-            <a:off x="3291840" y="2697480"/>
-            <a:ext cx="2560320" cy="960120"/>
+            <a:off x="3291840" y="1088136"/>
+            <a:ext cx="2560320" cy="182880"/>
           </a:xfrm>
           <a:prstGeom prst="rect">
             <a:avLst/>
@@ -5867,56 +6572,49 @@
           <a:lstStyle/>
           <a:p>
             <a:pPr indent="0" marL="0">
-              <a:spcAft>
-                <a:spcPts val="300"/>
-              </a:spcAft>
               <a:buNone/>
             </a:pPr>
             <a:r>
-              <a:rPr lang="en-US" sz="950" dirty="0">
-                <a:solidFill>
-                  <a:srgbClr val="1C2A30"/>
-                </a:solidFill>
-                <a:latin typeface="Malgun Gothic" pitchFamily="34" charset="0"/>
-                <a:ea typeface="Malgun Gothic" pitchFamily="34" charset="-122"/>
-                <a:cs typeface="Malgun Gothic" pitchFamily="34" charset="-120"/>
-              </a:rPr>
-              <a:t>기록 없음(기억으로 10건 중 1~2건)</a:t>
-            </a:r>
-            <a:endParaRPr lang="en-US" sz="950" dirty="0"/>
-          </a:p>
-          <a:p>
-            <a:pPr indent="0" marL="0">
-              <a:spcAft>
-                <a:spcPts val="300"/>
-              </a:spcAft>
-              <a:buNone/>
-            </a:pPr>
-            <a:r>
-              <a:rPr lang="en-US" sz="950" dirty="0">
-                <a:solidFill>
-                  <a:srgbClr val="1C2A30"/>
-                </a:solidFill>
-                <a:latin typeface="Malgun Gothic" pitchFamily="34" charset="0"/>
-                <a:ea typeface="Malgun Gothic" pitchFamily="34" charset="-122"/>
-                <a:cs typeface="Malgun Gothic" pitchFamily="34" charset="-120"/>
-              </a:rPr>
-              <a:t>신청의 81%가 번호만 남김</a:t>
-            </a:r>
-            <a:endParaRPr lang="en-US" sz="950" dirty="0"/>
+              <a:rPr lang="en-US" sz="800" dirty="0">
+                <a:solidFill>
+                  <a:srgbClr val="5D6B70"/>
+                </a:solidFill>
+                <a:latin typeface="Malgun Gothic" pitchFamily="34" charset="0"/>
+                <a:ea typeface="Malgun Gothic" pitchFamily="34" charset="-122"/>
+                <a:cs typeface="Malgun Gothic" pitchFamily="34" charset="-120"/>
+              </a:rPr>
+              <a:t>기록 없음 → 대신 본 것: 신청 형태(건)</a:t>
+            </a:r>
+            <a:endParaRPr lang="en-US" sz="800" dirty="0"/>
           </a:p>
         </p:txBody>
       </p:sp>
+      <p:graphicFrame>
+        <p:nvGraphicFramePr>
+          <p:cNvPr id="13" name="Chart 1" descr=""/>
+          <p:cNvGraphicFramePr/>
+          <p:nvPr/>
+        </p:nvGraphicFramePr>
+        <p:xfrm>
+          <a:off x="3246120" y="1261872"/>
+          <a:ext cx="2651760" cy="1783080"/>
+        </p:xfrm>
+        <a:graphic xmlns:a="http://schemas.openxmlformats.org/drawingml/2006/main">
+          <a:graphicData uri="http://schemas.openxmlformats.org/drawingml/2006/chart">
+            <c:chart xmlns:c="http://schemas.openxmlformats.org/drawingml/2006/chart" r:id="rId2"/>
+          </a:graphicData>
+        </a:graphic>
+      </p:graphicFrame>
       <p:sp>
         <p:nvSpPr>
-          <p:cNvPr id="12" name="Text 8"/>
+          <p:cNvPr id="14" name="Text 10"/>
           <p:cNvSpPr txBox="1"/>
           <p:nvPr/>
         </p:nvSpPr>
         <p:spPr>
           <a:xfrm>
-            <a:off x="3291840" y="3657600"/>
-            <a:ext cx="2560320" cy="457200"/>
+            <a:off x="3291840" y="3090672"/>
+            <a:ext cx="2560320" cy="777240"/>
           </a:xfrm>
           <a:prstGeom prst="rect">
             <a:avLst/>
@@ -5929,33 +6627,95 @@
           <a:lstStyle/>
           <a:p>
             <a:pPr indent="0" marL="0">
+              <a:spcAft>
+                <a:spcPts val="300"/>
+              </a:spcAft>
               <a:buNone/>
             </a:pPr>
             <a:r>
-              <a:rPr lang="en-US" sz="1000" b="1" dirty="0">
-                <a:solidFill>
-                  <a:srgbClr val="2A78D6"/>
-                </a:solidFill>
-                <a:latin typeface="Malgun Gothic" pitchFamily="34" charset="0"/>
-                <a:ea typeface="Malgun Gothic" pitchFamily="34" charset="-122"/>
-                <a:cs typeface="Malgun Gothic" pitchFamily="34" charset="-120"/>
-              </a:rPr>
-              <a:t>→ 신청마다 수임 여부 기록</a:t>
-            </a:r>
-            <a:endParaRPr lang="en-US" sz="1000" dirty="0"/>
+              <a:rPr lang="en-US" sz="950" dirty="0">
+                <a:solidFill>
+                  <a:srgbClr val="1C2A30"/>
+                </a:solidFill>
+                <a:latin typeface="Malgun Gothic" pitchFamily="34" charset="0"/>
+                <a:ea typeface="Malgun Gothic" pitchFamily="34" charset="-122"/>
+                <a:cs typeface="Malgun Gothic" pitchFamily="34" charset="-120"/>
+              </a:rPr>
+              <a:t>수임률은 기억으로 10건 중 1~2건</a:t>
+            </a:r>
+            <a:endParaRPr lang="en-US" sz="950" dirty="0"/>
+          </a:p>
+          <a:p>
+            <a:pPr indent="0" marL="0">
+              <a:spcAft>
+                <a:spcPts val="300"/>
+              </a:spcAft>
+              <a:buNone/>
+            </a:pPr>
+            <a:r>
+              <a:rPr lang="en-US" sz="950" dirty="0">
+                <a:solidFill>
+                  <a:srgbClr val="1C2A30"/>
+                </a:solidFill>
+                <a:latin typeface="Malgun Gothic" pitchFamily="34" charset="0"/>
+                <a:ea typeface="Malgun Gothic" pitchFamily="34" charset="-122"/>
+                <a:cs typeface="Malgun Gothic" pitchFamily="34" charset="-120"/>
+              </a:rPr>
+              <a:t>신청의 81%가 전화번호만 남김</a:t>
+            </a:r>
+            <a:endParaRPr lang="en-US" sz="950" dirty="0"/>
           </a:p>
         </p:txBody>
       </p:sp>
       <p:sp>
         <p:nvSpPr>
-          <p:cNvPr id="13" name="Shape 9"/>
+          <p:cNvPr id="15" name="Text 11"/>
+          <p:cNvSpPr txBox="1"/>
+          <p:nvPr/>
+        </p:nvSpPr>
+        <p:spPr>
+          <a:xfrm>
+            <a:off x="3291840" y="3895344"/>
+            <a:ext cx="2560320" cy="329184"/>
+          </a:xfrm>
+          <a:prstGeom prst="rect">
+            <a:avLst/>
+          </a:prstGeom>
+          <a:noFill/>
+          <a:ln/>
+        </p:spPr>
+        <p:txBody>
+          <a:bodyPr wrap="square" lIns="0" tIns="0" rIns="0" bIns="0" rtlCol="0" anchor="ctr"/>
+          <a:lstStyle/>
+          <a:p>
+            <a:pPr indent="0" marL="0">
+              <a:buNone/>
+            </a:pPr>
+            <a:r>
+              <a:rPr lang="en-US" sz="1050" b="1" dirty="0">
+                <a:solidFill>
+                  <a:srgbClr val="2A78D6"/>
+                </a:solidFill>
+                <a:latin typeface="Malgun Gothic" pitchFamily="34" charset="0"/>
+                <a:ea typeface="Malgun Gothic" pitchFamily="34" charset="-122"/>
+                <a:cs typeface="Malgun Gothic" pitchFamily="34" charset="-120"/>
+              </a:rPr>
+              <a:t>→ 신청마다 수임 여부 기록</a:t>
+            </a:r>
+            <a:endParaRPr lang="en-US" sz="1050" dirty="0"/>
+          </a:p>
+        </p:txBody>
+      </p:sp>
+      <p:sp>
+        <p:nvSpPr>
+          <p:cNvPr id="16" name="Shape 12"/>
           <p:cNvSpPr/>
           <p:nvPr/>
         </p:nvSpPr>
         <p:spPr>
           <a:xfrm>
-            <a:off x="6035040" y="685800"/>
-            <a:ext cx="2743200" cy="3520440"/>
+            <a:off x="6035040" y="804672"/>
+            <a:ext cx="2743200" cy="3493008"/>
           </a:xfrm>
           <a:prstGeom prst="rect">
             <a:avLst/>
@@ -5973,13 +6733,13 @@
       </p:sp>
       <p:sp>
         <p:nvSpPr>
-          <p:cNvPr id="14" name="Text 10"/>
+          <p:cNvPr id="17" name="Text 13"/>
           <p:cNvSpPr txBox="1"/>
           <p:nvPr/>
         </p:nvSpPr>
         <p:spPr>
           <a:xfrm>
-            <a:off x="6126480" y="731520"/>
+            <a:off x="6126480" y="850392"/>
             <a:ext cx="2560320" cy="237744"/>
           </a:xfrm>
           <a:prstGeom prst="rect">
@@ -6012,14 +6772,53 @@
       </p:sp>
       <p:sp>
         <p:nvSpPr>
-          <p:cNvPr id="15" name="Text 11"/>
+          <p:cNvPr id="18" name="Text 14"/>
           <p:cNvSpPr txBox="1"/>
           <p:nvPr/>
         </p:nvSpPr>
         <p:spPr>
           <a:xfrm>
-            <a:off x="6172200" y="1051560"/>
-            <a:ext cx="2468880" cy="1600200"/>
+            <a:off x="6126480" y="1088136"/>
+            <a:ext cx="2560320" cy="182880"/>
+          </a:xfrm>
+          <a:prstGeom prst="rect">
+            <a:avLst/>
+          </a:prstGeom>
+          <a:noFill/>
+          <a:ln/>
+        </p:spPr>
+        <p:txBody>
+          <a:bodyPr wrap="square" lIns="0" tIns="0" rIns="0" bIns="0" rtlCol="0" anchor="t"/>
+          <a:lstStyle/>
+          <a:p>
+            <a:pPr indent="0" marL="0">
+              <a:buNone/>
+            </a:pPr>
+            <a:r>
+              <a:rPr lang="en-US" sz="800" dirty="0">
+                <a:solidFill>
+                  <a:srgbClr val="5D6B70"/>
+                </a:solidFill>
+                <a:latin typeface="Malgun Gothic" pitchFamily="34" charset="0"/>
+                <a:ea typeface="Malgun Gothic" pitchFamily="34" charset="-122"/>
+                <a:cs typeface="Malgun Gothic" pitchFamily="34" charset="-120"/>
+              </a:rPr>
+              <a:t>건당 수수료</a:t>
+            </a:r>
+            <a:endParaRPr lang="en-US" sz="800" dirty="0"/>
+          </a:p>
+        </p:txBody>
+      </p:sp>
+      <p:sp>
+        <p:nvSpPr>
+          <p:cNvPr id="19" name="Text 15"/>
+          <p:cNvSpPr txBox="1"/>
+          <p:nvPr/>
+        </p:nvSpPr>
+        <p:spPr>
+          <a:xfrm>
+            <a:off x="6172200" y="1307592"/>
+            <a:ext cx="2468880" cy="1691640"/>
           </a:xfrm>
           <a:prstGeom prst="rect">
             <a:avLst/>
@@ -6083,7 +6882,7 @@
               <a:buNone/>
             </a:pPr>
             <a:r>
-              <a:rPr lang="en-US" sz="600" dirty="0">
+              <a:rPr lang="en-US" sz="800" dirty="0">
                 <a:solidFill>
                   <a:srgbClr val="1C2A30"/>
                 </a:solidFill>
@@ -6147,14 +6946,14 @@
       </p:sp>
       <p:sp>
         <p:nvSpPr>
-          <p:cNvPr id="16" name="Text 12"/>
+          <p:cNvPr id="20" name="Text 16"/>
           <p:cNvSpPr txBox="1"/>
           <p:nvPr/>
         </p:nvSpPr>
         <p:spPr>
           <a:xfrm>
-            <a:off x="6126480" y="2697480"/>
-            <a:ext cx="2560320" cy="960120"/>
+            <a:off x="6126480" y="3090672"/>
+            <a:ext cx="2560320" cy="777240"/>
           </a:xfrm>
           <a:prstGeom prst="rect">
             <a:avLst/>
@@ -6181,7 +6980,7 @@
                 <a:ea typeface="Malgun Gothic" pitchFamily="34" charset="-122"/>
                 <a:cs typeface="Malgun Gothic" pitchFamily="34" charset="-120"/>
               </a:rPr>
-              <a:t>분쟁은 건수는 적지만 건당 수임료가 7배</a:t>
+              <a:t>분쟁은 건수는 적지만 건당 수수료가 7배</a:t>
             </a:r>
             <a:endParaRPr lang="en-US" sz="950" dirty="0"/>
           </a:p>
@@ -6189,14 +6988,14 @@
       </p:sp>
       <p:sp>
         <p:nvSpPr>
-          <p:cNvPr id="17" name="Text 13"/>
+          <p:cNvPr id="21" name="Text 17"/>
           <p:cNvSpPr txBox="1"/>
           <p:nvPr/>
         </p:nvSpPr>
         <p:spPr>
           <a:xfrm>
-            <a:off x="6126480" y="3657600"/>
-            <a:ext cx="2560320" cy="457200"/>
+            <a:off x="6126480" y="3895344"/>
+            <a:ext cx="2560320" cy="329184"/>
           </a:xfrm>
           <a:prstGeom prst="rect">
             <a:avLst/>
@@ -6205,14 +7004,14 @@
           <a:ln/>
         </p:spPr>
         <p:txBody>
-          <a:bodyPr wrap="square" lIns="0" tIns="0" rIns="0" bIns="0" rtlCol="0" anchor="t"/>
+          <a:bodyPr wrap="square" lIns="0" tIns="0" rIns="0" bIns="0" rtlCol="0" anchor="ctr"/>
           <a:lstStyle/>
           <a:p>
             <a:pPr indent="0" marL="0">
               <a:buNone/>
             </a:pPr>
             <a:r>
-              <a:rPr lang="en-US" sz="1000" b="1" dirty="0">
+              <a:rPr lang="en-US" sz="1050" b="1" dirty="0">
                 <a:solidFill>
                   <a:srgbClr val="2A78D6"/>
                 </a:solidFill>
@@ -6222,19 +7021,19 @@
               </a:rPr>
               <a:t>→ 분쟁 전용 페이지</a:t>
             </a:r>
-            <a:endParaRPr lang="en-US" sz="1000" dirty="0"/>
+            <a:endParaRPr lang="en-US" sz="1050" dirty="0"/>
           </a:p>
         </p:txBody>
       </p:sp>
       <p:sp>
         <p:nvSpPr>
-          <p:cNvPr id="18" name="Shape 14"/>
+          <p:cNvPr id="22" name="Shape 18"/>
           <p:cNvSpPr/>
           <p:nvPr/>
         </p:nvSpPr>
         <p:spPr>
           <a:xfrm>
-            <a:off x="365760" y="4288536"/>
+            <a:off x="365760" y="4352544"/>
             <a:ext cx="8412480" cy="0"/>
           </a:xfrm>
           <a:prstGeom prst="line">
@@ -6251,13 +7050,13 @@
       </p:sp>
       <p:sp>
         <p:nvSpPr>
-          <p:cNvPr id="19" name="Text 15"/>
+          <p:cNvPr id="23" name="Text 19"/>
           <p:cNvSpPr txBox="1"/>
           <p:nvPr/>
         </p:nvSpPr>
         <p:spPr>
           <a:xfrm>
-            <a:off x="365760" y="4343400"/>
+            <a:off x="365760" y="4407408"/>
             <a:ext cx="8046720" cy="411480"/>
           </a:xfrm>
           <a:prstGeom prst="rect">
@@ -6277,7 +7076,7 @@
               <a:buNone/>
             </a:pPr>
             <a:r>
-              <a:rPr lang="en-US" sz="700" dirty="0">
+              <a:rPr lang="en-US" sz="800" dirty="0">
                 <a:solidFill>
                   <a:srgbClr val="5D6B70"/>
                 </a:solidFill>
@@ -6287,7 +7086,7 @@
               </a:rPr>
               <a:t>출처: 신청 알림 문자, 신청 게시판 2,141건(스팸·잘못된 번호 33건 제외), 서버 방문(슬라이드 2), GA4 광고 유입 120세션(2026-09), 수수료는 사무소 수가</a:t>
             </a:r>
-            <a:endParaRPr lang="en-US" sz="700" dirty="0"/>
+            <a:endParaRPr lang="en-US" sz="800" dirty="0"/>
           </a:p>
           <a:p>
             <a:pPr indent="0" marL="0">
@@ -6297,7 +7096,7 @@
               <a:buNone/>
             </a:pPr>
             <a:r>
-              <a:rPr lang="en-US" sz="700" dirty="0">
+              <a:rPr lang="en-US" sz="800" dirty="0">
                 <a:solidFill>
                   <a:srgbClr val="5D6B70"/>
                 </a:solidFill>
@@ -6305,9 +7104,9 @@
                 <a:ea typeface="Malgun Gothic" pitchFamily="34" charset="-122"/>
                 <a:cs typeface="Malgun Gothic" pitchFamily="34" charset="-120"/>
               </a:rPr>
-              <a:t>*2025·26은 방문 추정 신뢰 낮음</a:t>
-            </a:r>
-            <a:endParaRPr lang="en-US" sz="700" dirty="0"/>
+              <a:t>*2025·26은 방문 추정 신뢰 낮음(회색)</a:t>
+            </a:r>
+            <a:endParaRPr lang="en-US" sz="800" dirty="0"/>
           </a:p>
         </p:txBody>
       </p:sp>
@@ -6392,8 +7191,8 @@
         </p:nvSpPr>
         <p:spPr>
           <a:xfrm>
-            <a:off x="365760" y="201168"/>
-            <a:ext cx="8046720" cy="384048"/>
+            <a:off x="365760" y="109728"/>
+            <a:ext cx="8412480" cy="201168"/>
           </a:xfrm>
           <a:prstGeom prst="rect">
             <a:avLst/>
@@ -6409,17 +7208,17 @@
               <a:buNone/>
             </a:pPr>
             <a:r>
-              <a:rPr lang="en-US" sz="1800" b="1" dirty="0">
-                <a:solidFill>
-                  <a:srgbClr val="1C2A30"/>
-                </a:solidFill>
-                <a:latin typeface="Malgun Gothic" pitchFamily="34" charset="0"/>
-                <a:ea typeface="Malgun Gothic" pitchFamily="34" charset="-122"/>
-                <a:cs typeface="Malgun Gothic" pitchFamily="34" charset="-120"/>
-              </a:rPr>
-              <a:t>해야 할 것과 한계</a:t>
-            </a:r>
-            <a:endParaRPr lang="en-US" sz="1800" dirty="0"/>
+              <a:rPr lang="en-US" sz="900" dirty="0">
+                <a:solidFill>
+                  <a:srgbClr val="5D6B70"/>
+                </a:solidFill>
+                <a:latin typeface="Malgun Gothic" pitchFamily="34" charset="0"/>
+                <a:ea typeface="Malgun Gothic" pitchFamily="34" charset="-122"/>
+                <a:cs typeface="Malgun Gothic" pitchFamily="34" charset="-120"/>
+              </a:rPr>
+              <a:t>5 · 해야 할 것과 한계</a:t>
+            </a:r>
+            <a:endParaRPr lang="en-US" sz="900" dirty="0"/>
           </a:p>
         </p:txBody>
       </p:sp>
@@ -6431,8 +7230,8 @@
         </p:nvSpPr>
         <p:spPr>
           <a:xfrm>
-            <a:off x="365760" y="685800"/>
-            <a:ext cx="8412480" cy="237744"/>
+            <a:off x="365760" y="310896"/>
+            <a:ext cx="8412480" cy="384048"/>
           </a:xfrm>
           <a:prstGeom prst="rect">
             <a:avLst/>
@@ -6448,7 +7247,7 @@
               <a:buNone/>
             </a:pPr>
             <a:r>
-              <a:rPr lang="en-US" sz="1050" b="1" dirty="0">
+              <a:rPr lang="en-US" sz="1800" b="1" dirty="0">
                 <a:solidFill>
                   <a:srgbClr val="1C2A30"/>
                 </a:solidFill>
@@ -6456,9 +7255,9 @@
                 <a:ea typeface="Malgun Gothic" pitchFamily="34" charset="-122"/>
                 <a:cs typeface="Malgun Gothic" pitchFamily="34" charset="-120"/>
               </a:rPr>
-              <a:t>누가 무엇을 하면 무엇이 움직이나</a:t>
-            </a:r>
-            <a:endParaRPr lang="en-US" sz="1050" dirty="0"/>
+              <a:t>새 사이트로 신청률을 4.6%까지 — 연 150건</a:t>
+            </a:r>
+            <a:endParaRPr lang="en-US" sz="1800" dirty="0"/>
           </a:p>
         </p:txBody>
       </p:sp>
@@ -6477,7 +7276,7 @@
           </p:nvPr>
         </p:nvGraphicFramePr>
         <p:xfrm>
-          <a:off x="365760" y="960120"/>
+          <a:off x="365760" y="822960"/>
           <a:ext cx="8412480" cy="914400"/>
         </p:xfrm>
         <a:graphic>
@@ -6490,7 +7289,7 @@
                 <a:gridCol w="4663440"/>
                 <a:gridCol w="2286000"/>
               </a:tblGrid>
-              <a:tr h="292608">
+              <a:tr h="283464">
                 <a:tc>
                   <a:txBody>
                     <a:bodyPr/>
@@ -6764,7 +7563,7 @@
                   </a:tcPr>
                 </a:tc>
               </a:tr>
-              <a:tr h="292608">
+              <a:tr h="283464">
                 <a:tc>
                   <a:txBody>
                     <a:bodyPr/>
@@ -7038,7 +7837,7 @@
                   </a:tcPr>
                 </a:tc>
               </a:tr>
-              <a:tr h="292608">
+              <a:tr h="283464">
                 <a:tc>
                   <a:txBody>
                     <a:bodyPr/>
@@ -7312,7 +8111,7 @@
                   </a:tcPr>
                 </a:tc>
               </a:tr>
-              <a:tr h="292608">
+              <a:tr h="283464">
                 <a:tc>
                   <a:txBody>
                     <a:bodyPr/>
@@ -7586,7 +8385,7 @@
                   </a:tcPr>
                 </a:tc>
               </a:tr>
-              <a:tr h="292608">
+              <a:tr h="283464">
                 <a:tc>
                   <a:txBody>
                     <a:bodyPr/>
@@ -7860,7 +8659,7 @@
                   </a:tcPr>
                 </a:tc>
               </a:tr>
-              <a:tr h="292608">
+              <a:tr h="283464">
                 <a:tc>
                   <a:txBody>
                     <a:bodyPr/>
@@ -8140,13 +8939,147 @@
       </p:graphicFrame>
       <p:sp>
         <p:nvSpPr>
-          <p:cNvPr id="5" name="Text 2"/>
+          <p:cNvPr id="5" name="Shape 2"/>
+          <p:cNvSpPr/>
+          <p:nvPr/>
+        </p:nvSpPr>
+        <p:spPr>
+          <a:xfrm>
+            <a:off x="365760" y="2670048"/>
+            <a:ext cx="8412480" cy="566928"/>
+          </a:xfrm>
+          <a:prstGeom prst="rect">
+            <a:avLst/>
+          </a:prstGeom>
+          <a:solidFill>
+            <a:srgbClr val="EEF4FB"/>
+          </a:solidFill>
+          <a:ln w="12700">
+            <a:solidFill>
+              <a:srgbClr val="EEF4FB"/>
+            </a:solidFill>
+            <a:prstDash val="solid"/>
+          </a:ln>
+        </p:spPr>
+      </p:sp>
+      <p:sp>
+        <p:nvSpPr>
+          <p:cNvPr id="6" name="Text 3"/>
           <p:cNvSpPr txBox="1"/>
           <p:nvPr/>
         </p:nvSpPr>
         <p:spPr>
           <a:xfrm>
-            <a:off x="365760" y="2834640"/>
+            <a:off x="502920" y="2670048"/>
+            <a:ext cx="8229600" cy="566928"/>
+          </a:xfrm>
+          <a:prstGeom prst="rect">
+            <a:avLst/>
+          </a:prstGeom>
+          <a:noFill/>
+          <a:ln/>
+        </p:spPr>
+        <p:txBody>
+          <a:bodyPr wrap="square" lIns="0" tIns="0" rIns="0" bIns="0" rtlCol="0" anchor="ctr"/>
+          <a:lstStyle/>
+          <a:p>
+            <a:pPr indent="0" marL="0">
+              <a:buNone/>
+            </a:pPr>
+            <a:r>
+              <a:rPr lang="en-US" sz="1100" b="1" dirty="0">
+                <a:solidFill>
+                  <a:srgbClr val="2A78D6"/>
+                </a:solidFill>
+                <a:latin typeface="Malgun Gothic" pitchFamily="34" charset="0"/>
+                <a:ea typeface="Malgun Gothic" pitchFamily="34" charset="-122"/>
+                <a:cs typeface="Malgun Gothic" pitchFamily="34" charset="-120"/>
+              </a:rPr>
+              <a:t>목표   </a:t>
+            </a:r>
+            <a:pPr indent="0" marL="0">
+              <a:buNone/>
+            </a:pPr>
+            <a:r>
+              <a:rPr lang="en-US" sz="1200" dirty="0">
+                <a:solidFill>
+                  <a:srgbClr val="1C2A30"/>
+                </a:solidFill>
+                <a:latin typeface="Malgun Gothic" pitchFamily="34" charset="0"/>
+                <a:ea typeface="Malgun Gothic" pitchFamily="34" charset="-122"/>
+                <a:cs typeface="Malgun Gothic" pitchFamily="34" charset="-120"/>
+              </a:rPr>
+              <a:t>방문당 신청률 </a:t>
+            </a:r>
+            <a:pPr indent="0" marL="0">
+              <a:buNone/>
+            </a:pPr>
+            <a:r>
+              <a:rPr lang="en-US" sz="1800" b="1" dirty="0">
+                <a:solidFill>
+                  <a:srgbClr val="2A78D6"/>
+                </a:solidFill>
+                <a:latin typeface="Malgun Gothic" pitchFamily="34" charset="0"/>
+                <a:ea typeface="Malgun Gothic" pitchFamily="34" charset="-122"/>
+                <a:cs typeface="Malgun Gothic" pitchFamily="34" charset="-120"/>
+              </a:rPr>
+              <a:t>2.8% → 4.6%</a:t>
+            </a:r>
+            <a:pPr indent="0" marL="0">
+              <a:buNone/>
+            </a:pPr>
+            <a:r>
+              <a:rPr lang="en-US" sz="1200" dirty="0">
+                <a:solidFill>
+                  <a:srgbClr val="1C2A30"/>
+                </a:solidFill>
+                <a:latin typeface="Malgun Gothic" pitchFamily="34" charset="0"/>
+                <a:ea typeface="Malgun Gothic" pitchFamily="34" charset="-122"/>
+                <a:cs typeface="Malgun Gothic" pitchFamily="34" charset="-120"/>
+              </a:rPr>
+              <a:t>     신청 </a:t>
+            </a:r>
+            <a:pPr indent="0" marL="0">
+              <a:buNone/>
+            </a:pPr>
+            <a:r>
+              <a:rPr lang="en-US" sz="1800" b="1" dirty="0">
+                <a:solidFill>
+                  <a:srgbClr val="2A78D6"/>
+                </a:solidFill>
+                <a:latin typeface="Malgun Gothic" pitchFamily="34" charset="0"/>
+                <a:ea typeface="Malgun Gothic" pitchFamily="34" charset="-122"/>
+                <a:cs typeface="Malgun Gothic" pitchFamily="34" charset="-120"/>
+              </a:rPr>
+              <a:t>연 105건 → 150건</a:t>
+            </a:r>
+            <a:pPr indent="0" marL="0">
+              <a:buNone/>
+            </a:pPr>
+            <a:r>
+              <a:rPr lang="en-US" sz="850" dirty="0">
+                <a:solidFill>
+                  <a:srgbClr val="5D6B70"/>
+                </a:solidFill>
+                <a:latin typeface="Malgun Gothic" pitchFamily="34" charset="0"/>
+                <a:ea typeface="Malgun Gothic" pitchFamily="34" charset="-122"/>
+                <a:cs typeface="Malgun Gothic" pitchFamily="34" charset="-120"/>
+              </a:rPr>
+              <a:t>   (2024년 → 2020년 수준)</a:t>
+            </a:r>
+            <a:endParaRPr lang="en-US" sz="1100" dirty="0"/>
+          </a:p>
+        </p:txBody>
+      </p:sp>
+      <p:sp>
+        <p:nvSpPr>
+          <p:cNvPr id="7" name="Text 4"/>
+          <p:cNvSpPr txBox="1"/>
+          <p:nvPr/>
+        </p:nvSpPr>
+        <p:spPr>
+          <a:xfrm>
+            <a:off x="365760" y="3346704"/>
             <a:ext cx="8412480" cy="237744"/>
           </a:xfrm>
           <a:prstGeom prst="rect">
@@ -8179,14 +9112,14 @@
       </p:sp>
       <p:sp>
         <p:nvSpPr>
-          <p:cNvPr id="6" name="Text 3"/>
+          <p:cNvPr id="8" name="Text 5"/>
           <p:cNvSpPr txBox="1"/>
           <p:nvPr/>
         </p:nvSpPr>
         <p:spPr>
           <a:xfrm>
-            <a:off x="365760" y="3090672"/>
-            <a:ext cx="8412480" cy="274320"/>
+            <a:off x="365760" y="3584448"/>
+            <a:ext cx="8412480" cy="256032"/>
           </a:xfrm>
           <a:prstGeom prst="rect">
             <a:avLst/>
@@ -8202,7 +9135,7 @@
               <a:buNone/>
             </a:pPr>
             <a:r>
-              <a:rPr lang="en-US" sz="1050" dirty="0">
+              <a:rPr lang="en-US" sz="1000" dirty="0">
                 <a:solidFill>
                   <a:srgbClr val="1C2A30"/>
                 </a:solidFill>
@@ -8212,20 +9145,20 @@
               </a:rPr>
               <a:t>경로별 감소 원인은 추정  /  경로별 방문은 연도 합계  /  신청 뒤(전화·수임) 데이터 없음  /  광고는 클릭까지만</a:t>
             </a:r>
-            <a:endParaRPr lang="en-US" sz="1050" dirty="0"/>
+            <a:endParaRPr lang="en-US" sz="1000" dirty="0"/>
           </a:p>
         </p:txBody>
       </p:sp>
       <p:sp>
         <p:nvSpPr>
-          <p:cNvPr id="7" name="Shape 4"/>
+          <p:cNvPr id="9" name="Shape 6"/>
           <p:cNvSpPr/>
           <p:nvPr/>
         </p:nvSpPr>
         <p:spPr>
           <a:xfrm>
-            <a:off x="365760" y="3474720"/>
-            <a:ext cx="8412480" cy="347472"/>
+            <a:off x="365760" y="3931920"/>
+            <a:ext cx="8412480" cy="329184"/>
           </a:xfrm>
           <a:prstGeom prst="rect">
             <a:avLst/>
@@ -8243,14 +9176,14 @@
       </p:sp>
       <p:sp>
         <p:nvSpPr>
-          <p:cNvPr id="8" name="Text 5"/>
+          <p:cNvPr id="10" name="Text 7"/>
           <p:cNvSpPr txBox="1"/>
           <p:nvPr/>
         </p:nvSpPr>
         <p:spPr>
           <a:xfrm>
-            <a:off x="475488" y="3474720"/>
-            <a:ext cx="8229600" cy="347472"/>
+            <a:off x="475488" y="3931920"/>
+            <a:ext cx="8229600" cy="329184"/>
           </a:xfrm>
           <a:prstGeom prst="rect">
             <a:avLst/>
@@ -8296,14 +9229,14 @@
       </p:sp>
       <p:sp>
         <p:nvSpPr>
-          <p:cNvPr id="9" name="Text 6"/>
+          <p:cNvPr id="11" name="Text 8"/>
           <p:cNvSpPr txBox="1"/>
           <p:nvPr/>
         </p:nvSpPr>
         <p:spPr>
           <a:xfrm>
-            <a:off x="365760" y="3931920"/>
-            <a:ext cx="8412480" cy="292608"/>
+            <a:off x="365760" y="4352544"/>
+            <a:ext cx="8412480" cy="274320"/>
           </a:xfrm>
           <a:prstGeom prst="rect">
             <a:avLst/>
@@ -8319,7 +9252,7 @@
               <a:buNone/>
             </a:pPr>
             <a:r>
-              <a:rPr lang="en-US" sz="1000" b="1" dirty="0">
+              <a:rPr lang="en-US" sz="950" b="1" dirty="0">
                 <a:solidFill>
                   <a:srgbClr val="1C2A30"/>
                 </a:solidFill>
@@ -8333,7 +9266,7 @@
               <a:buNone/>
             </a:pPr>
             <a:r>
-              <a:rPr lang="en-US" sz="1000" dirty="0">
+              <a:rPr lang="en-US" sz="950" dirty="0">
                 <a:solidFill>
                   <a:srgbClr val="1C2A30"/>
                 </a:solidFill>
@@ -8343,7 +9276,7 @@
               </a:rPr>
               <a:t>코드·차트·초안은 Claude Code, 문제 정의·구조·검증은 사람. 자세한 내용은 GitHub README</a:t>
             </a:r>
-            <a:endParaRPr lang="en-US" sz="1000" dirty="0"/>
+            <a:endParaRPr lang="en-US" sz="950" dirty="0"/>
           </a:p>
         </p:txBody>
       </p:sp>

--- a/slides.pptx
+++ b/slides.pptx
@@ -139,7 +139,7 @@
           </c:tx>
           <c:spPr>
             <a:solidFill>
-              <a:srgbClr val="C9D1D3"/>
+              <a:srgbClr val="D5DBDE"/>
             </a:solidFill>
             <a:effectLst/>
           </c:spPr>
@@ -151,7 +151,7 @@
               <a:lstStyle/>
               <a:p>
                 <a:pPr>
-                  <a:defRPr b="0" i="0" strike="noStrike" sz="750" u="none">
+                  <a:defRPr b="0" i="0" strike="noStrike" sz="800" u="none">
                     <a:solidFill>
                       <a:srgbClr val="1C2A30"/>
                     </a:solidFill>
@@ -288,7 +288,7 @@
               <a:lstStyle/>
               <a:p>
                 <a:pPr>
-                  <a:defRPr b="0" i="0" strike="noStrike" sz="750" u="none">
+                  <a:defRPr b="0" i="0" strike="noStrike" sz="800" u="none">
                     <a:solidFill>
                       <a:srgbClr val="1C2A30"/>
                     </a:solidFill>
@@ -404,7 +404,7 @@
             <a:lstStyle/>
             <a:p>
               <a:pPr>
-                <a:defRPr b="0" i="0" strike="noStrike" sz="750" u="none">
+                <a:defRPr b="0" i="0" strike="noStrike" sz="800" u="none">
                   <a:solidFill>
                     <a:srgbClr val="1C2A30"/>
                   </a:solidFill>
@@ -421,7 +421,7 @@
           <c:showBubbleSize val="0"/>
           <c:showLeaderLines val="0"/>
         </c:dLbls>
-        <c:gapWidth val="40"/>
+        <c:gapWidth val="35"/>
         <c:overlap val="100"/>
         <c:axId val="2094734554"/>
         <c:axId val="2094734552"/>
@@ -440,9 +440,7 @@
         <c:tickLblPos val="low"/>
         <c:spPr>
           <a:ln w="12700" cap="flat">
-            <a:solidFill>
-              <a:srgbClr val="888888"/>
-            </a:solidFill>
+            <a:noFill/>
             <a:prstDash val="solid"/>
             <a:round/>
           </a:ln>
@@ -452,9 +450,9 @@
           <a:lstStyle/>
           <a:p>
             <a:pPr>
-              <a:defRPr sz="700" b="0" i="0" u="none" strike="noStrike">
-                <a:solidFill>
-                  <a:srgbClr val="5D6B70"/>
+              <a:defRPr sz="850" b="0" i="0" u="none" strike="noStrike">
+                <a:solidFill>
+                  <a:srgbClr val="6B7A80"/>
                 </a:solidFill>
                 <a:latin typeface="Malgun Gothic"/>
               </a:defRPr>
@@ -481,9 +479,7 @@
         <c:tickLblPos val="nextTo"/>
         <c:spPr>
           <a:ln w="12700" cap="flat">
-            <a:solidFill>
-              <a:srgbClr val="888888"/>
-            </a:solidFill>
+            <a:noFill/>
             <a:prstDash val="solid"/>
             <a:round/>
           </a:ln>
@@ -493,9 +489,9 @@
           <a:lstStyle/>
           <a:p>
             <a:pPr>
-              <a:defRPr sz="700" b="0" i="0" u="none" strike="noStrike">
-                <a:solidFill>
-                  <a:srgbClr val="5D6B70"/>
+              <a:defRPr sz="800" b="0" i="0" u="none" strike="noStrike">
+                <a:solidFill>
+                  <a:srgbClr val="6B7A80"/>
                 </a:solidFill>
                 <a:latin typeface="Malgun Gothic"/>
               </a:defRPr>
@@ -508,9 +504,13 @@
         <c:crossBetween val="between"/>
       </c:valAx>
       <c:spPr>
-        <a:noFill/>
-        <a:ln>
-          <a:noFill/>
+        <a:solidFill>
+          <a:srgbClr val="FFFFFF"/>
+        </a:solidFill>
+        <a:ln w="12700" cap="flat">
+          <a:solidFill>
+            <a:srgbClr val="FFFFFF"/>
+          </a:solidFill>
         </a:ln>
         <a:effectLst/>
       </c:spPr>
@@ -519,9 +519,13 @@
     <c:dispBlanksAs val="span"/>
   </c:chart>
   <c:spPr>
-    <a:noFill/>
-    <a:ln>
-      <a:noFill/>
+    <a:solidFill>
+      <a:srgbClr val="FFFFFF"/>
+    </a:solidFill>
+    <a:ln w="12700" cap="flat">
+      <a:solidFill>
+        <a:srgbClr val="FFFFFF"/>
+      </a:solidFill>
     </a:ln>
     <a:effectLst/>
   </c:spPr>
@@ -1244,7 +1248,7 @@
           </c:tx>
           <c:spPr>
             <a:solidFill>
-              <a:srgbClr val="A9B4B8"/>
+              <a:srgbClr val="B4BDC1"/>
             </a:solidFill>
             <a:effectLst/>
           </c:spPr>
@@ -1381,7 +1385,7 @@
           </c:tx>
           <c:spPr>
             <a:solidFill>
-              <a:srgbClr val="F0F2F3"/>
+              <a:srgbClr val="F1F3F4"/>
             </a:solidFill>
             <a:effectLst/>
           </c:spPr>
@@ -1526,7 +1530,7 @@
           <c:showBubbleSize val="0"/>
           <c:showLeaderLines val="0"/>
         </c:dLbls>
-        <c:gapWidth val="40"/>
+        <c:gapWidth val="35"/>
         <c:overlap val="100"/>
         <c:axId val="2094734554"/>
         <c:axId val="2094734552"/>
@@ -1545,9 +1549,7 @@
         <c:tickLblPos val="low"/>
         <c:spPr>
           <a:ln w="12700" cap="flat">
-            <a:solidFill>
-              <a:srgbClr val="888888"/>
-            </a:solidFill>
+            <a:noFill/>
             <a:prstDash val="solid"/>
             <a:round/>
           </a:ln>
@@ -1557,9 +1559,9 @@
           <a:lstStyle/>
           <a:p>
             <a:pPr>
-              <a:defRPr sz="700" b="0" i="0" u="none" strike="noStrike">
-                <a:solidFill>
-                  <a:srgbClr val="5D6B70"/>
+              <a:defRPr sz="850" b="0" i="0" u="none" strike="noStrike">
+                <a:solidFill>
+                  <a:srgbClr val="6B7A80"/>
                 </a:solidFill>
                 <a:latin typeface="Malgun Gothic"/>
               </a:defRPr>
@@ -1584,7 +1586,7 @@
           <c:spPr>
             <a:ln w="6350" cap="flat">
               <a:solidFill>
-                <a:srgbClr val="EEEEEE"/>
+                <a:srgbClr val="EEF0F1"/>
               </a:solidFill>
               <a:prstDash val="solid"/>
               <a:round/>
@@ -1597,9 +1599,7 @@
         <c:tickLblPos val="nextTo"/>
         <c:spPr>
           <a:ln w="12700" cap="flat">
-            <a:solidFill>
-              <a:srgbClr val="888888"/>
-            </a:solidFill>
+            <a:noFill/>
             <a:prstDash val="solid"/>
             <a:round/>
           </a:ln>
@@ -1609,9 +1609,9 @@
           <a:lstStyle/>
           <a:p>
             <a:pPr>
-              <a:defRPr sz="700" b="0" i="0" u="none" strike="noStrike">
-                <a:solidFill>
-                  <a:srgbClr val="5D6B70"/>
+              <a:defRPr sz="800" b="0" i="0" u="none" strike="noStrike">
+                <a:solidFill>
+                  <a:srgbClr val="6B7A80"/>
                 </a:solidFill>
                 <a:latin typeface="Malgun Gothic"/>
               </a:defRPr>
@@ -1624,9 +1624,13 @@
         <c:crossBetween val="between"/>
       </c:valAx>
       <c:spPr>
-        <a:noFill/>
-        <a:ln>
-          <a:noFill/>
+        <a:solidFill>
+          <a:srgbClr val="FFFFFF"/>
+        </a:solidFill>
+        <a:ln w="12700" cap="flat">
+          <a:solidFill>
+            <a:srgbClr val="FFFFFF"/>
+          </a:solidFill>
         </a:ln>
         <a:effectLst/>
       </c:spPr>
@@ -1639,7 +1643,7 @@
         <a:lstStyle/>
         <a:p>
           <a:pPr>
-            <a:defRPr sz="750">
+            <a:defRPr sz="800">
               <a:solidFill>
                 <a:srgbClr val="1C2A30"/>
               </a:solidFill>
@@ -1655,9 +1659,13 @@
     <c:dispBlanksAs val="span"/>
   </c:chart>
   <c:spPr>
-    <a:noFill/>
-    <a:ln>
-      <a:noFill/>
+    <a:solidFill>
+      <a:srgbClr val="FFFFFF"/>
+    </a:solidFill>
+    <a:ln w="12700" cap="flat">
+      <a:solidFill>
+        <a:srgbClr val="FFFFFF"/>
+      </a:solidFill>
     </a:ln>
     <a:effectLst/>
   </c:spPr>
@@ -1707,7 +1715,7 @@
               <a:lstStyle/>
               <a:p>
                 <a:pPr>
-                  <a:defRPr b="0" i="0" strike="noStrike" sz="1000" u="none">
+                  <a:defRPr b="0" i="0" strike="noStrike" sz="1100" u="none">
                     <a:solidFill>
                       <a:srgbClr val="1C2A30"/>
                     </a:solidFill>
@@ -1790,7 +1798,7 @@
               <a:lstStyle/>
               <a:p>
                 <a:pPr>
-                  <a:defRPr b="0" i="0" strike="noStrike" sz="1000" u="none">
+                  <a:defRPr b="0" i="0" strike="noStrike" sz="1100" u="none">
                     <a:solidFill>
                       <a:srgbClr val="1C2A30"/>
                     </a:solidFill>
@@ -1852,7 +1860,7 @@
             <a:lstStyle/>
             <a:p>
               <a:pPr>
-                <a:defRPr b="0" i="0" strike="noStrike" sz="1000" u="none">
+                <a:defRPr b="0" i="0" strike="noStrike" sz="1100" u="none">
                   <a:solidFill>
                     <a:srgbClr val="1C2A30"/>
                   </a:solidFill>
@@ -1869,7 +1877,7 @@
           <c:showBubbleSize val="0"/>
           <c:showLeaderLines val="0"/>
         </c:dLbls>
-        <c:gapWidth val="45"/>
+        <c:gapWidth val="40"/>
         <c:overlap val="100"/>
         <c:axId val="2094734554"/>
         <c:axId val="2094734552"/>
@@ -1888,9 +1896,7 @@
         <c:tickLblPos val="nextTo"/>
         <c:spPr>
           <a:ln w="12700" cap="flat">
-            <a:solidFill>
-              <a:srgbClr val="888888"/>
-            </a:solidFill>
+            <a:noFill/>
             <a:prstDash val="solid"/>
             <a:round/>
           </a:ln>
@@ -1900,9 +1906,9 @@
           <a:lstStyle/>
           <a:p>
             <a:pPr>
-              <a:defRPr sz="1000" b="0" i="0" u="none" strike="noStrike">
-                <a:solidFill>
-                  <a:srgbClr val="5D6B70"/>
+              <a:defRPr sz="1100" b="0" i="0" u="none" strike="noStrike">
+                <a:solidFill>
+                  <a:srgbClr val="6B7A80"/>
                 </a:solidFill>
                 <a:latin typeface="Malgun Gothic"/>
               </a:defRPr>
@@ -1929,9 +1935,7 @@
         <c:tickLblPos val="low"/>
         <c:spPr>
           <a:ln w="12700" cap="flat">
-            <a:solidFill>
-              <a:srgbClr val="888888"/>
-            </a:solidFill>
+            <a:noFill/>
             <a:prstDash val="solid"/>
             <a:round/>
           </a:ln>
@@ -1941,9 +1945,9 @@
           <a:lstStyle/>
           <a:p>
             <a:pPr>
-              <a:defRPr sz="700" b="0" i="0" u="none" strike="noStrike">
-                <a:solidFill>
-                  <a:srgbClr val="5D6B70"/>
+              <a:defRPr sz="800" b="0" i="0" u="none" strike="noStrike">
+                <a:solidFill>
+                  <a:srgbClr val="6B7A80"/>
                 </a:solidFill>
                 <a:latin typeface="Malgun Gothic"/>
               </a:defRPr>
@@ -1956,9 +1960,13 @@
         <c:crossBetween val="between"/>
       </c:valAx>
       <c:spPr>
-        <a:noFill/>
-        <a:ln>
-          <a:noFill/>
+        <a:solidFill>
+          <a:srgbClr val="FFFFFF"/>
+        </a:solidFill>
+        <a:ln w="12700" cap="flat">
+          <a:solidFill>
+            <a:srgbClr val="FFFFFF"/>
+          </a:solidFill>
         </a:ln>
         <a:effectLst/>
       </c:spPr>
@@ -1967,9 +1975,13 @@
     <c:dispBlanksAs val="span"/>
   </c:chart>
   <c:spPr>
-    <a:noFill/>
-    <a:ln>
-      <a:noFill/>
+    <a:solidFill>
+      <a:srgbClr val="FFFFFF"/>
+    </a:solidFill>
+    <a:ln w="12700" cap="flat">
+      <a:solidFill>
+        <a:srgbClr val="FFFFFF"/>
+      </a:solidFill>
     </a:ln>
     <a:effectLst/>
   </c:spPr>
@@ -2024,7 +2036,7 @@
               <a:lstStyle/>
               <a:p>
                 <a:pPr>
-                  <a:defRPr b="0" i="0" strike="noStrike" sz="750" u="none">
+                  <a:defRPr b="0" i="0" strike="noStrike" sz="800" u="none">
                     <a:solidFill>
                       <a:srgbClr val="000000"/>
                     </a:solidFill>
@@ -2044,7 +2056,7 @@
           </c:dLbls>
           <c:marker>
             <c:symbol val="circle"/>
-            <c:size val="5"/>
+            <c:size val="6"/>
             <c:spPr>
               <a:solidFill>
                 <a:srgbClr val="C8372D"/>
@@ -2150,11 +2162,11 @@
           </c:tx>
           <c:spPr>
             <a:solidFill>
-              <a:srgbClr val="BFC7CA"/>
+              <a:srgbClr val="D5DBDE"/>
             </a:solidFill>
             <a:ln w="25400" cap="flat">
               <a:solidFill>
-                <a:srgbClr val="BFC7CA"/>
+                <a:srgbClr val="D5DBDE"/>
               </a:solidFill>
               <a:prstDash val="solid"/>
               <a:round/>
@@ -2169,7 +2181,7 @@
               <a:lstStyle/>
               <a:p>
                 <a:pPr>
-                  <a:defRPr b="0" i="0" strike="noStrike" sz="750" u="none">
+                  <a:defRPr b="0" i="0" strike="noStrike" sz="800" u="none">
                     <a:solidFill>
                       <a:srgbClr val="000000"/>
                     </a:solidFill>
@@ -2189,14 +2201,14 @@
           </c:dLbls>
           <c:marker>
             <c:symbol val="circle"/>
-            <c:size val="5"/>
+            <c:size val="6"/>
             <c:spPr>
               <a:solidFill>
-                <a:srgbClr val="BFC7CA"/>
+                <a:srgbClr val="D5DBDE"/>
               </a:solidFill>
               <a:ln w="9525" cap="flat">
                 <a:solidFill>
-                  <a:srgbClr val="BFC7CA"/>
+                  <a:srgbClr val="D5DBDE"/>
                 </a:solidFill>
                 <a:prstDash val="solid"/>
                 <a:round/>
@@ -2286,7 +2298,7 @@
             <a:lstStyle/>
             <a:p>
               <a:pPr>
-                <a:defRPr b="0" i="0" strike="noStrike" sz="750" u="none">
+                <a:defRPr b="0" i="0" strike="noStrike" sz="800" u="none">
                   <a:solidFill>
                     <a:srgbClr val="000000"/>
                   </a:solidFill>
@@ -2322,9 +2334,7 @@
         <c:tickLblPos val="low"/>
         <c:spPr>
           <a:ln w="12700" cap="flat">
-            <a:solidFill>
-              <a:srgbClr val="888888"/>
-            </a:solidFill>
+            <a:noFill/>
             <a:prstDash val="solid"/>
             <a:round/>
           </a:ln>
@@ -2334,9 +2344,9 @@
           <a:lstStyle/>
           <a:p>
             <a:pPr>
-              <a:defRPr sz="700" b="0" i="0" u="none" strike="noStrike">
-                <a:solidFill>
-                  <a:srgbClr val="5D6B70"/>
+              <a:defRPr sz="750" b="0" i="0" u="none" strike="noStrike">
+                <a:solidFill>
+                  <a:srgbClr val="6B7A80"/>
                 </a:solidFill>
                 <a:latin typeface="Malgun Gothic"/>
               </a:defRPr>
@@ -2364,9 +2374,7 @@
         <c:tickLblPos val="nextTo"/>
         <c:spPr>
           <a:ln w="12700" cap="flat">
-            <a:solidFill>
-              <a:srgbClr val="888888"/>
-            </a:solidFill>
+            <a:noFill/>
             <a:prstDash val="solid"/>
             <a:round/>
           </a:ln>
@@ -2376,9 +2384,9 @@
           <a:lstStyle/>
           <a:p>
             <a:pPr>
-              <a:defRPr sz="700" b="0" i="0" u="none" strike="noStrike">
-                <a:solidFill>
-                  <a:srgbClr val="5D6B70"/>
+              <a:defRPr sz="800" b="0" i="0" u="none" strike="noStrike">
+                <a:solidFill>
+                  <a:srgbClr val="6B7A80"/>
                 </a:solidFill>
                 <a:latin typeface="Malgun Gothic"/>
               </a:defRPr>
@@ -2391,9 +2399,13 @@
         <c:crossBetween val="between"/>
       </c:valAx>
       <c:spPr>
-        <a:noFill/>
-        <a:ln>
-          <a:noFill/>
+        <a:solidFill>
+          <a:srgbClr val="FFFFFF"/>
+        </a:solidFill>
+        <a:ln w="12700" cap="flat">
+          <a:solidFill>
+            <a:srgbClr val="FFFFFF"/>
+          </a:solidFill>
         </a:ln>
         <a:effectLst/>
       </c:spPr>
@@ -2402,9 +2414,13 @@
     <c:dispBlanksAs val="span"/>
   </c:chart>
   <c:spPr>
-    <a:noFill/>
-    <a:ln>
-      <a:noFill/>
+    <a:solidFill>
+      <a:srgbClr val="FFFFFF"/>
+    </a:solidFill>
+    <a:ln w="12700" cap="flat">
+      <a:solidFill>
+        <a:srgbClr val="FFFFFF"/>
+      </a:solidFill>
     </a:ln>
     <a:effectLst/>
   </c:spPr>
@@ -2454,7 +2470,7 @@
               <a:lstStyle/>
               <a:p>
                 <a:pPr>
-                  <a:defRPr b="0" i="0" strike="noStrike" sz="800" u="none">
+                  <a:defRPr b="0" i="0" strike="noStrike" sz="850" u="none">
                     <a:solidFill>
                       <a:srgbClr val="000000"/>
                     </a:solidFill>
@@ -2537,7 +2553,7 @@
               <a:lstStyle/>
               <a:p>
                 <a:pPr>
-                  <a:defRPr b="0" i="0" strike="noStrike" sz="800" u="none">
+                  <a:defRPr b="0" i="0" strike="noStrike" sz="850" u="none">
                     <a:solidFill>
                       <a:srgbClr val="000000"/>
                     </a:solidFill>
@@ -2599,7 +2615,7 @@
             <a:lstStyle/>
             <a:p>
               <a:pPr>
-                <a:defRPr b="0" i="0" strike="noStrike" sz="800" u="none">
+                <a:defRPr b="0" i="0" strike="noStrike" sz="850" u="none">
                   <a:solidFill>
                     <a:srgbClr val="000000"/>
                   </a:solidFill>
@@ -2616,7 +2632,7 @@
           <c:showBubbleSize val="0"/>
           <c:showLeaderLines val="0"/>
         </c:dLbls>
-        <c:gapWidth val="50"/>
+        <c:gapWidth val="45"/>
         <c:overlap val="100"/>
         <c:axId val="2094734554"/>
         <c:axId val="2094734552"/>
@@ -2635,9 +2651,7 @@
         <c:tickLblPos val="low"/>
         <c:spPr>
           <a:ln w="12700" cap="flat">
-            <a:solidFill>
-              <a:srgbClr val="888888"/>
-            </a:solidFill>
+            <a:noFill/>
             <a:prstDash val="solid"/>
             <a:round/>
           </a:ln>
@@ -2647,9 +2661,9 @@
           <a:lstStyle/>
           <a:p>
             <a:pPr>
-              <a:defRPr sz="700" b="0" i="0" u="none" strike="noStrike">
-                <a:solidFill>
-                  <a:srgbClr val="5D6B70"/>
+              <a:defRPr sz="850" b="0" i="0" u="none" strike="noStrike">
+                <a:solidFill>
+                  <a:srgbClr val="6B7A80"/>
                 </a:solidFill>
                 <a:latin typeface="Malgun Gothic"/>
               </a:defRPr>
@@ -2676,9 +2690,7 @@
         <c:tickLblPos val="nextTo"/>
         <c:spPr>
           <a:ln w="12700" cap="flat">
-            <a:solidFill>
-              <a:srgbClr val="888888"/>
-            </a:solidFill>
+            <a:noFill/>
             <a:prstDash val="solid"/>
             <a:round/>
           </a:ln>
@@ -2688,9 +2700,9 @@
           <a:lstStyle/>
           <a:p>
             <a:pPr>
-              <a:defRPr sz="700" b="0" i="0" u="none" strike="noStrike">
-                <a:solidFill>
-                  <a:srgbClr val="5D6B70"/>
+              <a:defRPr sz="800" b="0" i="0" u="none" strike="noStrike">
+                <a:solidFill>
+                  <a:srgbClr val="6B7A80"/>
                 </a:solidFill>
                 <a:latin typeface="Malgun Gothic"/>
               </a:defRPr>
@@ -2703,9 +2715,13 @@
         <c:crossBetween val="between"/>
       </c:valAx>
       <c:spPr>
-        <a:noFill/>
-        <a:ln>
-          <a:noFill/>
+        <a:solidFill>
+          <a:srgbClr val="FFFFFF"/>
+        </a:solidFill>
+        <a:ln w="12700" cap="flat">
+          <a:solidFill>
+            <a:srgbClr val="FFFFFF"/>
+          </a:solidFill>
         </a:ln>
         <a:effectLst/>
       </c:spPr>
@@ -2714,9 +2730,13 @@
     <c:dispBlanksAs val="span"/>
   </c:chart>
   <c:spPr>
-    <a:noFill/>
-    <a:ln>
-      <a:noFill/>
+    <a:solidFill>
+      <a:srgbClr val="FFFFFF"/>
+    </a:solidFill>
+    <a:ln w="12700" cap="flat">
+      <a:solidFill>
+        <a:srgbClr val="FFFFFF"/>
+      </a:solidFill>
     </a:ln>
     <a:effectLst/>
   </c:spPr>
@@ -3581,7 +3601,7 @@
         </p:nvSpPr>
         <p:spPr>
           <a:xfrm>
-            <a:off x="8458200" y="4864608"/>
+            <a:off x="8503920" y="4846320"/>
             <a:ext cx="365760" cy="201168"/>
           </a:xfrm>
           <a:prstGeom prst="rect">
@@ -3599,7 +3619,7 @@
             <a:lvl1pPr>
               <a:defRPr sz="800">
                 <a:solidFill>
-                  <a:srgbClr val="5D6B70"/>
+                  <a:srgbClr val="6B7A80"/>
                 </a:solidFill>
                 <a:latin typeface="Malgun Gothic"/>
                 <a:ea typeface="Malgun Gothic"/>
@@ -3654,7 +3674,7 @@
         </p:nvSpPr>
         <p:spPr>
           <a:xfrm>
-            <a:off x="8458200" y="4864608"/>
+            <a:off x="8503920" y="4846320"/>
             <a:ext cx="365760" cy="201168"/>
           </a:xfrm>
           <a:prstGeom prst="rect">
@@ -3672,7 +3692,7 @@
             <a:lvl1pPr>
               <a:defRPr sz="800">
                 <a:solidFill>
-                  <a:srgbClr val="5D6B70"/>
+                  <a:srgbClr val="6B7A80"/>
                 </a:solidFill>
                 <a:latin typeface="Malgun Gothic"/>
                 <a:ea typeface="Malgun Gothic"/>
@@ -3976,8 +3996,8 @@
         </p:nvSpPr>
         <p:spPr>
           <a:xfrm>
-            <a:off x="365760" y="109728"/>
-            <a:ext cx="8412480" cy="201168"/>
+            <a:off x="457200" y="146304"/>
+            <a:ext cx="8229600" cy="201168"/>
           </a:xfrm>
           <a:prstGeom prst="rect">
             <a:avLst/>
@@ -3993,9 +4013,9 @@
               <a:buNone/>
             </a:pPr>
             <a:r>
-              <a:rPr lang="en-US" sz="900" dirty="0">
-                <a:solidFill>
-                  <a:srgbClr val="5D6B70"/>
+              <a:rPr lang="en-US" sz="950" dirty="0">
+                <a:solidFill>
+                  <a:srgbClr val="6B7A80"/>
                 </a:solidFill>
                 <a:latin typeface="Malgun Gothic" pitchFamily="34" charset="0"/>
                 <a:ea typeface="Malgun Gothic" pitchFamily="34" charset="-122"/>
@@ -4003,7 +4023,7 @@
               </a:rPr>
               <a:t>특허사무소 무료진단 랜딩페이지 리뉴얼 — 데이터 분석</a:t>
             </a:r>
-            <a:endParaRPr lang="en-US" sz="900" dirty="0"/>
+            <a:endParaRPr lang="en-US" sz="950" dirty="0"/>
           </a:p>
         </p:txBody>
       </p:sp>
@@ -4015,8 +4035,8 @@
         </p:nvSpPr>
         <p:spPr>
           <a:xfrm>
-            <a:off x="365760" y="310896"/>
-            <a:ext cx="8412480" cy="384048"/>
+            <a:off x="457200" y="365760"/>
+            <a:ext cx="8229600" cy="457200"/>
           </a:xfrm>
           <a:prstGeom prst="rect">
             <a:avLst/>
@@ -4032,7 +4052,7 @@
               <a:buNone/>
             </a:pPr>
             <a:r>
-              <a:rPr lang="en-US" sz="1800" b="1" dirty="0">
+              <a:rPr lang="en-US" sz="2000" b="1" dirty="0">
                 <a:solidFill>
                   <a:srgbClr val="1C2A30"/>
                 </a:solidFill>
@@ -4040,9 +4060,9 @@
                 <a:ea typeface="Malgun Gothic" pitchFamily="34" charset="-122"/>
                 <a:cs typeface="Malgun Gothic" pitchFamily="34" charset="-120"/>
               </a:rPr>
-              <a:t>무료진단 신청이 2년 만에 4분의 1로 — 원인은 방문 반, 신청률 반</a:t>
-            </a:r>
-            <a:endParaRPr lang="en-US" sz="1800" dirty="0"/>
+              <a:t>무료진단 신청이 2년 만에 4분의 1로 — 원인은 방문 절반, 신청률 절반</a:t>
+            </a:r>
+            <a:endParaRPr lang="en-US" sz="2000" dirty="0"/>
           </a:p>
         </p:txBody>
       </p:sp>
@@ -4054,8 +4074,8 @@
         </p:nvSpPr>
         <p:spPr>
           <a:xfrm>
-            <a:off x="365760" y="786384"/>
-            <a:ext cx="8412480" cy="310896"/>
+            <a:off x="457200" y="914400"/>
+            <a:ext cx="8229600" cy="292608"/>
           </a:xfrm>
           <a:prstGeom prst="rect">
             <a:avLst/>
@@ -4079,8 +4099,8 @@
         </p:nvSpPr>
         <p:spPr>
           <a:xfrm>
-            <a:off x="365760" y="786384"/>
-            <a:ext cx="8412480" cy="310896"/>
+            <a:off x="457200" y="914400"/>
+            <a:ext cx="8229600" cy="292608"/>
           </a:xfrm>
           <a:prstGeom prst="rect">
             <a:avLst/>
@@ -4096,7 +4116,7 @@
               <a:buNone/>
             </a:pPr>
             <a:r>
-              <a:rPr lang="en-US" sz="1200" b="1" dirty="0">
+              <a:rPr lang="en-US" sz="1150" b="1" dirty="0">
                 <a:solidFill>
                   <a:srgbClr val="1C2A30"/>
                 </a:solidFill>
@@ -4106,45 +4126,20 @@
               </a:rPr>
               <a:t>총 매출  =  수임당 매출  ×  수임 전환율  ×  방문당 신청률  ×  방문수</a:t>
             </a:r>
-            <a:endParaRPr lang="en-US" sz="1200" dirty="0"/>
+            <a:endParaRPr lang="en-US" sz="1150" dirty="0"/>
           </a:p>
         </p:txBody>
       </p:sp>
       <p:sp>
         <p:nvSpPr>
-          <p:cNvPr id="6" name="Shape 4"/>
-          <p:cNvSpPr/>
+          <p:cNvPr id="6" name="Text 4"/>
+          <p:cNvSpPr txBox="1"/>
           <p:nvPr/>
         </p:nvSpPr>
         <p:spPr>
           <a:xfrm>
-            <a:off x="365760" y="1188720"/>
-            <a:ext cx="4206240" cy="3108960"/>
-          </a:xfrm>
-          <a:prstGeom prst="rect">
-            <a:avLst/>
-          </a:prstGeom>
-          <a:solidFill>
-            <a:srgbClr val="F3F5F4"/>
-          </a:solidFill>
-          <a:ln w="12700">
-            <a:solidFill>
-              <a:srgbClr val="DFE3E2"/>
-            </a:solidFill>
-            <a:prstDash val="solid"/>
-          </a:ln>
-        </p:spPr>
-      </p:sp>
-      <p:sp>
-        <p:nvSpPr>
-          <p:cNvPr id="7" name="Text 5"/>
-          <p:cNvSpPr txBox="1"/>
-          <p:nvPr/>
-        </p:nvSpPr>
-        <p:spPr>
-          <a:xfrm>
-            <a:off x="475488" y="1243584"/>
-            <a:ext cx="3931920" cy="237744"/>
+            <a:off x="457200" y="1353312"/>
+            <a:ext cx="4389120" cy="237744"/>
           </a:xfrm>
           <a:prstGeom prst="rect">
             <a:avLst/>
@@ -4160,9 +4155,9 @@
               <a:buNone/>
             </a:pPr>
             <a:r>
-              <a:rPr lang="en-US" sz="1050" b="1" dirty="0">
-                <a:solidFill>
-                  <a:srgbClr val="1C2A30"/>
+              <a:rPr lang="en-US" sz="1000" b="1" spc="100" kern="0" dirty="0">
+                <a:solidFill>
+                  <a:srgbClr val="6B7A80"/>
                 </a:solidFill>
                 <a:latin typeface="Malgun Gothic" pitchFamily="34" charset="0"/>
                 <a:ea typeface="Malgun Gothic" pitchFamily="34" charset="-122"/>
@@ -4170,7 +4165,88 @@
               </a:rPr>
               <a:t>문제</a:t>
             </a:r>
-            <a:endParaRPr lang="en-US" sz="1050" dirty="0"/>
+            <a:endParaRPr lang="en-US" sz="1000" dirty="0"/>
+          </a:p>
+        </p:txBody>
+      </p:sp>
+      <p:sp>
+        <p:nvSpPr>
+          <p:cNvPr id="7" name="Text 5"/>
+          <p:cNvSpPr txBox="1"/>
+          <p:nvPr/>
+        </p:nvSpPr>
+        <p:spPr>
+          <a:xfrm>
+            <a:off x="457200" y="1591056"/>
+            <a:ext cx="4389120" cy="457200"/>
+          </a:xfrm>
+          <a:prstGeom prst="rect">
+            <a:avLst/>
+          </a:prstGeom>
+          <a:noFill/>
+          <a:ln/>
+        </p:spPr>
+        <p:txBody>
+          <a:bodyPr wrap="square" lIns="0" tIns="0" rIns="0" bIns="0" rtlCol="0" anchor="ctr"/>
+          <a:lstStyle/>
+          <a:p>
+            <a:pPr indent="0" marL="0">
+              <a:buNone/>
+            </a:pPr>
+            <a:r>
+              <a:rPr lang="en-US" sz="2600" b="1" dirty="0">
+                <a:solidFill>
+                  <a:srgbClr val="C8372D"/>
+                </a:solidFill>
+                <a:latin typeface="Malgun Gothic" pitchFamily="34" charset="0"/>
+                <a:ea typeface="Malgun Gothic" pitchFamily="34" charset="-122"/>
+                <a:cs typeface="Malgun Gothic" pitchFamily="34" charset="-120"/>
+              </a:rPr>
+              <a:t>308건</a:t>
+            </a:r>
+            <a:pPr indent="0" marL="0">
+              <a:buNone/>
+            </a:pPr>
+            <a:r>
+              <a:rPr lang="en-US" sz="1200" dirty="0">
+                <a:solidFill>
+                  <a:srgbClr val="6B7A80"/>
+                </a:solidFill>
+                <a:latin typeface="Malgun Gothic" pitchFamily="34" charset="0"/>
+                <a:ea typeface="Malgun Gothic" pitchFamily="34" charset="-122"/>
+                <a:cs typeface="Malgun Gothic" pitchFamily="34" charset="-120"/>
+              </a:rPr>
+              <a:t> (2020)  →  </a:t>
+            </a:r>
+            <a:pPr indent="0" marL="0">
+              <a:buNone/>
+            </a:pPr>
+            <a:r>
+              <a:rPr lang="en-US" sz="2600" b="1" dirty="0">
+                <a:solidFill>
+                  <a:srgbClr val="C8372D"/>
+                </a:solidFill>
+                <a:latin typeface="Malgun Gothic" pitchFamily="34" charset="0"/>
+                <a:ea typeface="Malgun Gothic" pitchFamily="34" charset="-122"/>
+                <a:cs typeface="Malgun Gothic" pitchFamily="34" charset="-120"/>
+              </a:rPr>
+              <a:t>72건</a:t>
+            </a:r>
+            <a:pPr indent="0" marL="0">
+              <a:buNone/>
+            </a:pPr>
+            <a:r>
+              <a:rPr lang="en-US" sz="1200" dirty="0">
+                <a:solidFill>
+                  <a:srgbClr val="6B7A80"/>
+                </a:solidFill>
+                <a:latin typeface="Malgun Gothic" pitchFamily="34" charset="0"/>
+                <a:ea typeface="Malgun Gothic" pitchFamily="34" charset="-122"/>
+                <a:cs typeface="Malgun Gothic" pitchFamily="34" charset="-120"/>
+              </a:rPr>
+              <a:t> (2022)</a:t>
+            </a:r>
+            <a:endParaRPr lang="en-US" sz="2600" dirty="0"/>
           </a:p>
         </p:txBody>
       </p:sp>
@@ -4182,8 +4258,8 @@
         </p:nvSpPr>
         <p:spPr>
           <a:xfrm>
-            <a:off x="475488" y="1499616"/>
-            <a:ext cx="3977640" cy="274320"/>
+            <a:off x="457200" y="2048256"/>
+            <a:ext cx="4389120" cy="219456"/>
           </a:xfrm>
           <a:prstGeom prst="rect">
             <a:avLst/>
@@ -4207,35 +4283,7 @@
                 <a:ea typeface="Malgun Gothic" pitchFamily="34" charset="-122"/>
                 <a:cs typeface="Malgun Gothic" pitchFamily="34" charset="-120"/>
               </a:rPr>
-              <a:t>신청 </a:t>
-            </a:r>
-            <a:pPr indent="0" marL="0">
-              <a:buNone/>
-            </a:pPr>
-            <a:r>
-              <a:rPr lang="en-US" sz="1050" b="1" dirty="0">
-                <a:solidFill>
-                  <a:srgbClr val="C8372D"/>
-                </a:solidFill>
-                <a:latin typeface="Malgun Gothic" pitchFamily="34" charset="0"/>
-                <a:ea typeface="Malgun Gothic" pitchFamily="34" charset="-122"/>
-                <a:cs typeface="Malgun Gothic" pitchFamily="34" charset="-120"/>
-              </a:rPr>
-              <a:t>308건(2020) → 72건(2022)</a:t>
-            </a:r>
-            <a:pPr indent="0" marL="0">
-              <a:buNone/>
-            </a:pPr>
-            <a:r>
-              <a:rPr lang="en-US" sz="1050" dirty="0">
-                <a:solidFill>
-                  <a:srgbClr val="1C2A30"/>
-                </a:solidFill>
-                <a:latin typeface="Malgun Gothic" pitchFamily="34" charset="0"/>
-                <a:ea typeface="Malgun Gothic" pitchFamily="34" charset="-122"/>
-                <a:cs typeface="Malgun Gothic" pitchFamily="34" charset="-120"/>
-              </a:rPr>
-              <a:t>, 그 뒤로 회복 안 됨</a:t>
+              <a:t>무료진단 신청 수. 그 뒤로 연 100건 안팎에서 회복 안 됨</a:t>
             </a:r>
             <a:endParaRPr lang="en-US" sz="1050" dirty="0"/>
           </a:p>
@@ -4248,8 +4296,8 @@
           <p:nvPr/>
         </p:nvGraphicFramePr>
         <p:xfrm>
-          <a:off x="411480" y="1810512"/>
-          <a:ext cx="4114800" cy="1783080"/>
+          <a:off x="411480" y="2286000"/>
+          <a:ext cx="4480560" cy="1508760"/>
         </p:xfrm>
         <a:graphic xmlns:a="http://schemas.openxmlformats.org/drawingml/2006/main">
           <a:graphicData uri="http://schemas.openxmlformats.org/drawingml/2006/chart">
@@ -4265,8 +4313,8 @@
         </p:nvSpPr>
         <p:spPr>
           <a:xfrm>
-            <a:off x="475488" y="3703320"/>
-            <a:ext cx="3977640" cy="457200"/>
+            <a:off x="457200" y="3886200"/>
+            <a:ext cx="4389120" cy="365760"/>
           </a:xfrm>
           <a:prstGeom prst="rect">
             <a:avLst/>
@@ -4282,9 +4330,9 @@
               <a:buNone/>
             </a:pPr>
             <a:r>
-              <a:rPr lang="en-US" sz="1300" b="1" dirty="0">
-                <a:solidFill>
-                  <a:srgbClr val="1C2A30"/>
+              <a:rPr lang="en-US" sz="1100" dirty="0">
+                <a:solidFill>
+                  <a:srgbClr val="6B7A80"/>
                 </a:solidFill>
                 <a:latin typeface="Malgun Gothic" pitchFamily="34" charset="0"/>
                 <a:ea typeface="Malgun Gothic" pitchFamily="34" charset="-122"/>
@@ -4296,7 +4344,7 @@
               <a:buNone/>
             </a:pPr>
             <a:r>
-              <a:rPr lang="en-US" sz="1300" b="1" dirty="0">
+              <a:rPr lang="en-US" sz="1400" b="1" dirty="0">
                 <a:solidFill>
                   <a:srgbClr val="C8372D"/>
                 </a:solidFill>
@@ -4310,35 +4358,21 @@
               <a:buNone/>
             </a:pPr>
             <a:r>
-              <a:rPr lang="en-US" sz="1300" dirty="0">
-                <a:solidFill>
-                  <a:srgbClr val="1C2A30"/>
-                </a:solidFill>
-                <a:latin typeface="Malgun Gothic" pitchFamily="34" charset="0"/>
-                <a:ea typeface="Malgun Gothic" pitchFamily="34" charset="-122"/>
-                <a:cs typeface="Malgun Gothic" pitchFamily="34" charset="-120"/>
-              </a:rPr>
-              <a:t>        </a:t>
-            </a:r>
-            <a:pPr indent="0" marL="0">
-              <a:buNone/>
-            </a:pPr>
-            <a:r>
-              <a:rPr lang="en-US" sz="1300" b="1" dirty="0">
-                <a:solidFill>
-                  <a:srgbClr val="1C2A30"/>
-                </a:solidFill>
-                <a:latin typeface="Malgun Gothic" pitchFamily="34" charset="0"/>
-                <a:ea typeface="Malgun Gothic" pitchFamily="34" charset="-122"/>
-                <a:cs typeface="Malgun Gothic" pitchFamily="34" charset="-120"/>
-              </a:rPr>
-              <a:t>목표 </a:t>
-            </a:r>
-            <a:pPr indent="0" marL="0">
-              <a:buNone/>
-            </a:pPr>
-            <a:r>
-              <a:rPr lang="en-US" sz="1300" b="1" dirty="0">
+              <a:rPr lang="en-US" sz="1100" dirty="0">
+                <a:solidFill>
+                  <a:srgbClr val="6B7A80"/>
+                </a:solidFill>
+                <a:latin typeface="Malgun Gothic" pitchFamily="34" charset="0"/>
+                <a:ea typeface="Malgun Gothic" pitchFamily="34" charset="-122"/>
+                <a:cs typeface="Malgun Gothic" pitchFamily="34" charset="-120"/>
+              </a:rPr>
+              <a:t>       목표 </a:t>
+            </a:r>
+            <a:pPr indent="0" marL="0">
+              <a:buNone/>
+            </a:pPr>
+            <a:r>
+              <a:rPr lang="en-US" sz="1400" b="1" dirty="0">
                 <a:solidFill>
                   <a:srgbClr val="2A78D6"/>
                 </a:solidFill>
@@ -4348,7 +4382,7 @@
               </a:rPr>
               <a:t>연 150건</a:t>
             </a:r>
-            <a:endParaRPr lang="en-US" sz="1300" dirty="0"/>
+            <a:endParaRPr lang="en-US" sz="1100" dirty="0"/>
           </a:p>
         </p:txBody>
       </p:sp>
@@ -4360,18 +4394,16 @@
         </p:nvSpPr>
         <p:spPr>
           <a:xfrm>
-            <a:off x="4663440" y="1188720"/>
-            <a:ext cx="4114800" cy="1600200"/>
+            <a:off x="5120640" y="1353312"/>
+            <a:ext cx="0" cy="2926080"/>
           </a:xfrm>
-          <a:prstGeom prst="rect">
+          <a:prstGeom prst="line">
             <a:avLst/>
           </a:prstGeom>
-          <a:solidFill>
-            <a:srgbClr val="F3F5F4"/>
-          </a:solidFill>
+          <a:noFill/>
           <a:ln w="12700">
             <a:solidFill>
-              <a:srgbClr val="DFE3E2"/>
+              <a:srgbClr val="E3E7E8"/>
             </a:solidFill>
             <a:prstDash val="solid"/>
           </a:ln>
@@ -4385,8 +4417,8 @@
         </p:nvSpPr>
         <p:spPr>
           <a:xfrm>
-            <a:off x="4773168" y="1243584"/>
-            <a:ext cx="3840480" cy="237744"/>
+            <a:off x="5349240" y="1353312"/>
+            <a:ext cx="3337560" cy="237744"/>
           </a:xfrm>
           <a:prstGeom prst="rect">
             <a:avLst/>
@@ -4402,9 +4434,9 @@
               <a:buNone/>
             </a:pPr>
             <a:r>
-              <a:rPr lang="en-US" sz="1050" b="1" dirty="0">
-                <a:solidFill>
-                  <a:srgbClr val="1C2A30"/>
+              <a:rPr lang="en-US" sz="1000" b="1" spc="100" kern="0" dirty="0">
+                <a:solidFill>
+                  <a:srgbClr val="6B7A80"/>
                 </a:solidFill>
                 <a:latin typeface="Malgun Gothic" pitchFamily="34" charset="0"/>
                 <a:ea typeface="Malgun Gothic" pitchFamily="34" charset="-122"/>
@@ -4412,7 +4444,7 @@
               </a:rPr>
               <a:t>결과</a:t>
             </a:r>
-            <a:endParaRPr lang="en-US" sz="1050" dirty="0"/>
+            <a:endParaRPr lang="en-US" sz="1000" dirty="0"/>
           </a:p>
         </p:txBody>
       </p:sp>
@@ -4424,8 +4456,8 @@
         </p:nvSpPr>
         <p:spPr>
           <a:xfrm>
-            <a:off x="4773168" y="1499616"/>
-            <a:ext cx="3886200" cy="384048"/>
+            <a:off x="5349240" y="1591056"/>
+            <a:ext cx="3337560" cy="438912"/>
           </a:xfrm>
           <a:prstGeom prst="rect">
             <a:avLst/>
@@ -4441,7 +4473,7 @@
               <a:buNone/>
             </a:pPr>
             <a:r>
-              <a:rPr lang="en-US" sz="1100" dirty="0">
+              <a:rPr lang="en-US" sz="1200" dirty="0">
                 <a:solidFill>
                   <a:srgbClr val="1C2A30"/>
                 </a:solidFill>
@@ -4449,13 +4481,13 @@
                 <a:ea typeface="Malgun Gothic" pitchFamily="34" charset="-122"/>
                 <a:cs typeface="Malgun Gothic" pitchFamily="34" charset="-120"/>
               </a:rPr>
-              <a:t>236건 감소 = 방문 </a:t>
-            </a:r>
-            <a:pPr indent="0" marL="0">
-              <a:buNone/>
-            </a:pPr>
-            <a:r>
-              <a:rPr lang="en-US" sz="1800" b="1" dirty="0">
+              <a:t>방문 </a:t>
+            </a:r>
+            <a:pPr indent="0" marL="0">
+              <a:buNone/>
+            </a:pPr>
+            <a:r>
+              <a:rPr lang="en-US" sz="2400" b="1" dirty="0">
                 <a:solidFill>
                   <a:srgbClr val="2A78D6"/>
                 </a:solidFill>
@@ -4469,7 +4501,7 @@
               <a:buNone/>
             </a:pPr>
             <a:r>
-              <a:rPr lang="en-US" sz="1100" dirty="0">
+              <a:rPr lang="en-US" sz="1200" dirty="0">
                 <a:solidFill>
                   <a:srgbClr val="1C2A30"/>
                 </a:solidFill>
@@ -4477,13 +4509,13 @@
                 <a:ea typeface="Malgun Gothic" pitchFamily="34" charset="-122"/>
                 <a:cs typeface="Malgun Gothic" pitchFamily="34" charset="-120"/>
               </a:rPr>
-              <a:t> + 신청률 </a:t>
-            </a:r>
-            <a:pPr indent="0" marL="0">
-              <a:buNone/>
-            </a:pPr>
-            <a:r>
-              <a:rPr lang="en-US" sz="1800" b="1" dirty="0">
+              <a:t>  +  신청률 </a:t>
+            </a:r>
+            <a:pPr indent="0" marL="0">
+              <a:buNone/>
+            </a:pPr>
+            <a:r>
+              <a:rPr lang="en-US" sz="2400" b="1" dirty="0">
                 <a:solidFill>
                   <a:srgbClr val="C8372D"/>
                 </a:solidFill>
@@ -4493,21 +4525,7 @@
               </a:rPr>
               <a:t>53%</a:t>
             </a:r>
-            <a:pPr indent="0" marL="0">
-              <a:buNone/>
-            </a:pPr>
-            <a:r>
-              <a:rPr lang="en-US" sz="850" dirty="0">
-                <a:solidFill>
-                  <a:srgbClr val="5D6B70"/>
-                </a:solidFill>
-                <a:latin typeface="Malgun Gothic" pitchFamily="34" charset="0"/>
-                <a:ea typeface="Malgun Gothic" pitchFamily="34" charset="-122"/>
-                <a:cs typeface="Malgun Gothic" pitchFamily="34" charset="-120"/>
-              </a:rPr>
-              <a:t>  셰이플리 분해</a:t>
-            </a:r>
-            <a:endParaRPr lang="en-US" sz="1100" dirty="0"/>
+            <a:endParaRPr lang="en-US" sz="1200" dirty="0"/>
           </a:p>
         </p:txBody>
       </p:sp>
@@ -4519,8 +4537,8 @@
         </p:nvSpPr>
         <p:spPr>
           <a:xfrm>
-            <a:off x="4773168" y="1920240"/>
-            <a:ext cx="3886200" cy="822960"/>
+            <a:off x="5349240" y="2029968"/>
+            <a:ext cx="3337560" cy="201168"/>
           </a:xfrm>
           <a:prstGeom prst="rect">
             <a:avLst/>
@@ -4532,15 +4550,54 @@
           <a:bodyPr wrap="square" lIns="0" tIns="0" rIns="0" bIns="0" rtlCol="0" anchor="t"/>
           <a:lstStyle/>
           <a:p>
-            <a:pPr marL="127000" indent="-127000">
+            <a:pPr indent="0" marL="0">
+              <a:buNone/>
+            </a:pPr>
+            <a:r>
+              <a:rPr lang="en-US" sz="950" dirty="0">
+                <a:solidFill>
+                  <a:srgbClr val="6B7A80"/>
+                </a:solidFill>
+                <a:latin typeface="Malgun Gothic" pitchFamily="34" charset="0"/>
+                <a:ea typeface="Malgun Gothic" pitchFamily="34" charset="-122"/>
+                <a:cs typeface="Malgun Gothic" pitchFamily="34" charset="-120"/>
+              </a:rPr>
+              <a:t>줄어든 236건의 몫 (셰이플리 분해)</a:t>
+            </a:r>
+            <a:endParaRPr lang="en-US" sz="950" dirty="0"/>
+          </a:p>
+        </p:txBody>
+      </p:sp>
+      <p:sp>
+        <p:nvSpPr>
+          <p:cNvPr id="15" name="Text 12"/>
+          <p:cNvSpPr txBox="1"/>
+          <p:nvPr/>
+        </p:nvSpPr>
+        <p:spPr>
+          <a:xfrm>
+            <a:off x="5349240" y="2286000"/>
+            <a:ext cx="3337560" cy="868680"/>
+          </a:xfrm>
+          <a:prstGeom prst="rect">
+            <a:avLst/>
+          </a:prstGeom>
+          <a:noFill/>
+          <a:ln/>
+        </p:spPr>
+        <p:txBody>
+          <a:bodyPr wrap="square" lIns="0" tIns="0" rIns="0" bIns="0" rtlCol="0" anchor="t"/>
+          <a:lstStyle/>
+          <a:p>
+            <a:pPr marL="152400" indent="-152400">
               <a:spcAft>
-                <a:spcPts val="300"/>
+                <a:spcPts val="400"/>
               </a:spcAft>
               <a:buSzPct val="100000"/>
               <a:buChar char="•"/>
             </a:pPr>
             <a:r>
-              <a:rPr lang="en-US" sz="1000" dirty="0">
+              <a:rPr lang="en-US" sz="1050" dirty="0">
                 <a:solidFill>
                   <a:srgbClr val="1C2A30"/>
                 </a:solidFill>
@@ -4548,20 +4605,20 @@
                 <a:ea typeface="Malgun Gothic" pitchFamily="34" charset="-122"/>
                 <a:cs typeface="Malgun Gothic" pitchFamily="34" charset="-120"/>
               </a:rPr>
-              <a:t>방문: 다음·블로그·검색이 끊김. 광고는 원인 아님 (2장)</a:t>
-            </a:r>
-            <a:endParaRPr lang="en-US" sz="1000" dirty="0"/>
-          </a:p>
-          <a:p>
-            <a:pPr marL="127000" indent="-127000">
+              <a:t>방문: 다음·블로그·검색이 끊김, 광고는 원인 아님</a:t>
+            </a:r>
+            <a:endParaRPr lang="en-US" sz="1050" dirty="0"/>
+          </a:p>
+          <a:p>
+            <a:pPr marL="152400" indent="-152400">
               <a:spcAft>
-                <a:spcPts val="300"/>
+                <a:spcPts val="400"/>
               </a:spcAft>
               <a:buSzPct val="100000"/>
               <a:buChar char="•"/>
             </a:pPr>
             <a:r>
-              <a:rPr lang="en-US" sz="1000" dirty="0">
+              <a:rPr lang="en-US" sz="1050" dirty="0">
                 <a:solidFill>
                   <a:srgbClr val="1C2A30"/>
                 </a:solidFill>
@@ -4569,20 +4626,20 @@
                 <a:ea typeface="Malgun Gothic" pitchFamily="34" charset="-122"/>
                 <a:cs typeface="Malgun Gothic" pitchFamily="34" charset="-120"/>
               </a:rPr>
-              <a:t>광고: 포괄 검색어 8개가 광고비 26%, 클릭률 1/8 (3장)</a:t>
-            </a:r>
-            <a:endParaRPr lang="en-US" sz="1000" dirty="0"/>
-          </a:p>
-          <a:p>
-            <a:pPr marL="127000" indent="-127000">
+              <a:t>광고: 포괄 검색어 8개가 광고비 26%, 클릭률 1/8</a:t>
+            </a:r>
+            <a:endParaRPr lang="en-US" sz="1050" dirty="0"/>
+          </a:p>
+          <a:p>
+            <a:pPr marL="152400" indent="-152400">
               <a:spcAft>
-                <a:spcPts val="300"/>
+                <a:spcPts val="400"/>
               </a:spcAft>
               <a:buSzPct val="100000"/>
               <a:buChar char="•"/>
             </a:pPr>
             <a:r>
-              <a:rPr lang="en-US" sz="1000" dirty="0">
+              <a:rPr lang="en-US" sz="1050" dirty="0">
                 <a:solidFill>
                   <a:srgbClr val="1C2A30"/>
                 </a:solidFill>
@@ -4590,32 +4647,32 @@
                 <a:ea typeface="Malgun Gothic" pitchFamily="34" charset="-122"/>
                 <a:cs typeface="Malgun Gothic" pitchFamily="34" charset="-120"/>
               </a:rPr>
-              <a:t>신청률 4.6% → 2.1%, 수임은 기록 없음 (4장)</a:t>
-            </a:r>
-            <a:endParaRPr lang="en-US" sz="1000" dirty="0"/>
+              <a:t>신청률 4.6% → 2.1%, 신청 뒤는 기록 없음</a:t>
+            </a:r>
+            <a:endParaRPr lang="en-US" sz="1050" dirty="0"/>
           </a:p>
         </p:txBody>
       </p:sp>
       <p:sp>
         <p:nvSpPr>
-          <p:cNvPr id="15" name="Shape 12"/>
+          <p:cNvPr id="16" name="Shape 13"/>
           <p:cNvSpPr/>
           <p:nvPr/>
         </p:nvSpPr>
         <p:spPr>
           <a:xfrm>
-            <a:off x="4663440" y="2880360"/>
-            <a:ext cx="4114800" cy="1417320"/>
+            <a:off x="5349240" y="3246120"/>
+            <a:ext cx="54864" cy="1005840"/>
           </a:xfrm>
           <a:prstGeom prst="rect">
             <a:avLst/>
           </a:prstGeom>
           <a:solidFill>
-            <a:srgbClr val="EEF4FB"/>
+            <a:srgbClr val="2A78D6"/>
           </a:solidFill>
           <a:ln w="12700">
             <a:solidFill>
-              <a:srgbClr val="EEF4FB"/>
+              <a:srgbClr val="2A78D6"/>
             </a:solidFill>
             <a:prstDash val="solid"/>
           </a:ln>
@@ -4623,14 +4680,14 @@
       </p:sp>
       <p:sp>
         <p:nvSpPr>
-          <p:cNvPr id="16" name="Text 13"/>
+          <p:cNvPr id="17" name="Text 14"/>
           <p:cNvSpPr txBox="1"/>
           <p:nvPr/>
         </p:nvSpPr>
         <p:spPr>
           <a:xfrm>
-            <a:off x="4773168" y="2935224"/>
-            <a:ext cx="3840480" cy="237744"/>
+            <a:off x="5513832" y="3246120"/>
+            <a:ext cx="3172968" cy="237744"/>
           </a:xfrm>
           <a:prstGeom prst="rect">
             <a:avLst/>
@@ -4646,7 +4703,7 @@
               <a:buNone/>
             </a:pPr>
             <a:r>
-              <a:rPr lang="en-US" sz="1050" b="1" dirty="0">
+              <a:rPr lang="en-US" sz="1000" b="1" spc="100" kern="0" dirty="0">
                 <a:solidFill>
                   <a:srgbClr val="2A78D6"/>
                 </a:solidFill>
@@ -4656,20 +4713,20 @@
               </a:rPr>
               <a:t>해결책</a:t>
             </a:r>
-            <a:endParaRPr lang="en-US" sz="1050" dirty="0"/>
+            <a:endParaRPr lang="en-US" sz="1000" dirty="0"/>
           </a:p>
         </p:txBody>
       </p:sp>
       <p:sp>
         <p:nvSpPr>
-          <p:cNvPr id="17" name="Text 14"/>
+          <p:cNvPr id="18" name="Text 15"/>
           <p:cNvSpPr txBox="1"/>
           <p:nvPr/>
         </p:nvSpPr>
         <p:spPr>
           <a:xfrm>
-            <a:off x="4773168" y="3200400"/>
-            <a:ext cx="3886200" cy="1051560"/>
+            <a:off x="5513832" y="3493008"/>
+            <a:ext cx="3172968" cy="777240"/>
           </a:xfrm>
           <a:prstGeom prst="rect">
             <a:avLst/>
@@ -4681,15 +4738,14 @@
           <a:bodyPr wrap="square" lIns="0" tIns="0" rIns="0" bIns="0" rtlCol="0" anchor="t"/>
           <a:lstStyle/>
           <a:p>
-            <a:pPr marL="127000" indent="-127000">
+            <a:pPr indent="0" marL="0">
               <a:spcAft>
-                <a:spcPts val="300"/>
+                <a:spcPts val="400"/>
               </a:spcAft>
-              <a:buSzPct val="100000"/>
-              <a:buChar char="•"/>
-            </a:pPr>
-            <a:r>
-              <a:rPr lang="en-US" sz="1000" dirty="0">
+              <a:buNone/>
+            </a:pPr>
+            <a:r>
+              <a:rPr lang="en-US" sz="1050" dirty="0">
                 <a:solidFill>
                   <a:srgbClr val="1C2A30"/>
                 </a:solidFill>
@@ -4699,18 +4755,17 @@
               </a:rPr>
               <a:t>새 사이트: 글자로, 첫 화면에 신청 칸, 분쟁 페이지</a:t>
             </a:r>
-            <a:endParaRPr lang="en-US" sz="1000" dirty="0"/>
-          </a:p>
-          <a:p>
-            <a:pPr marL="127000" indent="-127000">
+            <a:endParaRPr lang="en-US" sz="1050" dirty="0"/>
+          </a:p>
+          <a:p>
+            <a:pPr indent="0" marL="0">
               <a:spcAft>
-                <a:spcPts val="300"/>
+                <a:spcPts val="400"/>
               </a:spcAft>
-              <a:buSzPct val="100000"/>
-              <a:buChar char="•"/>
-            </a:pPr>
-            <a:r>
-              <a:rPr lang="en-US" sz="1000" dirty="0">
+              <a:buNone/>
+            </a:pPr>
+            <a:r>
+              <a:rPr lang="en-US" sz="1050" dirty="0">
                 <a:solidFill>
                   <a:srgbClr val="1C2A30"/>
                 </a:solidFill>
@@ -4720,18 +4775,17 @@
               </a:rPr>
               <a:t>광고: 포괄 검색어 입찰 낮추기, 제외 키워드</a:t>
             </a:r>
-            <a:endParaRPr lang="en-US" sz="1000" dirty="0"/>
-          </a:p>
-          <a:p>
-            <a:pPr marL="127000" indent="-127000">
+            <a:endParaRPr lang="en-US" sz="1050" dirty="0"/>
+          </a:p>
+          <a:p>
+            <a:pPr indent="0" marL="0">
               <a:spcAft>
-                <a:spcPts val="300"/>
+                <a:spcPts val="400"/>
               </a:spcAft>
-              <a:buSzPct val="100000"/>
-              <a:buChar char="•"/>
-            </a:pPr>
-            <a:r>
-              <a:rPr lang="en-US" sz="1000" dirty="0">
+              <a:buNone/>
+            </a:pPr>
+            <a:r>
+              <a:rPr lang="en-US" sz="1050" dirty="0">
                 <a:solidFill>
                   <a:srgbClr val="1C2A30"/>
                 </a:solidFill>
@@ -4741,20 +4795,20 @@
               </a:rPr>
               <a:t>기록: 신청마다 수임 여부, 광고 뒤 신청 추적</a:t>
             </a:r>
-            <a:endParaRPr lang="en-US" sz="1000" dirty="0"/>
+            <a:endParaRPr lang="en-US" sz="1050" dirty="0"/>
           </a:p>
         </p:txBody>
       </p:sp>
       <p:sp>
         <p:nvSpPr>
-          <p:cNvPr id="18" name="Shape 15"/>
+          <p:cNvPr id="19" name="Shape 16"/>
           <p:cNvSpPr/>
           <p:nvPr/>
         </p:nvSpPr>
         <p:spPr>
           <a:xfrm>
-            <a:off x="365760" y="4352544"/>
-            <a:ext cx="8412480" cy="0"/>
+            <a:off x="457200" y="4462272"/>
+            <a:ext cx="8229600" cy="0"/>
           </a:xfrm>
           <a:prstGeom prst="line">
             <a:avLst/>
@@ -4762,7 +4816,7 @@
           <a:noFill/>
           <a:ln w="12700">
             <a:solidFill>
-              <a:srgbClr val="DFE3E2"/>
+              <a:srgbClr val="E3E7E8"/>
             </a:solidFill>
             <a:prstDash val="solid"/>
           </a:ln>
@@ -4770,14 +4824,14 @@
       </p:sp>
       <p:sp>
         <p:nvSpPr>
-          <p:cNvPr id="19" name="Text 16"/>
+          <p:cNvPr id="20" name="Text 17"/>
           <p:cNvSpPr txBox="1"/>
           <p:nvPr/>
         </p:nvSpPr>
         <p:spPr>
           <a:xfrm>
-            <a:off x="365760" y="4407408"/>
-            <a:ext cx="8046720" cy="411480"/>
+            <a:off x="457200" y="4526280"/>
+            <a:ext cx="7955280" cy="411480"/>
           </a:xfrm>
           <a:prstGeom prst="rect">
             <a:avLst/>
@@ -4796,9 +4850,9 @@
               <a:buNone/>
             </a:pPr>
             <a:r>
-              <a:rPr lang="en-US" sz="800" dirty="0">
-                <a:solidFill>
-                  <a:srgbClr val="5D6B70"/>
+              <a:rPr lang="en-US" sz="850" dirty="0">
+                <a:solidFill>
+                  <a:srgbClr val="6B7A80"/>
                 </a:solidFill>
                 <a:latin typeface="Malgun Gothic" pitchFamily="34" charset="0"/>
                 <a:ea typeface="Malgun Gothic" pitchFamily="34" charset="-122"/>
@@ -4806,7 +4860,7 @@
               </a:rPr>
               <a:t>출처: 신청 알림 문자 2014-11 ~ 2026-10-05, 2,895건(스팸 254건 제외). *2026은 10-05까지</a:t>
             </a:r>
-            <a:endParaRPr lang="en-US" sz="800" dirty="0"/>
+            <a:endParaRPr lang="en-US" sz="850" dirty="0"/>
           </a:p>
           <a:p>
             <a:pPr indent="0" marL="0">
@@ -4816,9 +4870,9 @@
               <a:buNone/>
             </a:pPr>
             <a:r>
-              <a:rPr lang="en-US" sz="800" dirty="0">
-                <a:solidFill>
-                  <a:srgbClr val="5D6B70"/>
+              <a:rPr lang="en-US" sz="850" dirty="0">
+                <a:solidFill>
+                  <a:srgbClr val="6B7A80"/>
                 </a:solidFill>
                 <a:latin typeface="Malgun Gothic" pitchFamily="34" charset="0"/>
                 <a:ea typeface="Malgun Gothic" pitchFamily="34" charset="-122"/>
@@ -4826,7 +4880,7 @@
               </a:rPr>
               <a:t>손실 = 연 200건 감소 × 수임률 10~20% × 출원 수수료 300만 원.  목표 = 신청률이 2020년 4.6%로 돌아오면 지금 방문(2024년 3,812)으로 177건</a:t>
             </a:r>
-            <a:endParaRPr lang="en-US" sz="800" dirty="0"/>
+            <a:endParaRPr lang="en-US" sz="850" dirty="0"/>
           </a:p>
         </p:txBody>
       </p:sp>
@@ -4842,7 +4896,7 @@
         </p:nvSpPr>
         <p:spPr>
           <a:xfrm>
-            <a:off x="8458200" y="4864608"/>
+            <a:off x="8503920" y="4846320"/>
             <a:ext cx="365760" cy="201168"/>
           </a:xfrm>
           <a:prstGeom prst="rect">
@@ -4860,7 +4914,7 @@
             <a:lvl1pPr>
               <a:defRPr sz="800">
                 <a:solidFill>
-                  <a:srgbClr val="5D6B70"/>
+                  <a:srgbClr val="6B7A80"/>
                 </a:solidFill>
                 <a:latin typeface="Malgun Gothic"/>
                 <a:ea typeface="Malgun Gothic"/>
@@ -4911,8 +4965,8 @@
         </p:nvSpPr>
         <p:spPr>
           <a:xfrm>
-            <a:off x="365760" y="109728"/>
-            <a:ext cx="8412480" cy="201168"/>
+            <a:off x="457200" y="146304"/>
+            <a:ext cx="8229600" cy="201168"/>
           </a:xfrm>
           <a:prstGeom prst="rect">
             <a:avLst/>
@@ -4928,9 +4982,9 @@
               <a:buNone/>
             </a:pPr>
             <a:r>
-              <a:rPr lang="en-US" sz="900" dirty="0">
-                <a:solidFill>
-                  <a:srgbClr val="5D6B70"/>
+              <a:rPr lang="en-US" sz="950" dirty="0">
+                <a:solidFill>
+                  <a:srgbClr val="6B7A80"/>
                 </a:solidFill>
                 <a:latin typeface="Malgun Gothic" pitchFamily="34" charset="0"/>
                 <a:ea typeface="Malgun Gothic" pitchFamily="34" charset="-122"/>
@@ -4938,7 +4992,7 @@
               </a:rPr>
               <a:t>2 · 유입경로별 방문자수</a:t>
             </a:r>
-            <a:endParaRPr lang="en-US" sz="900" dirty="0"/>
+            <a:endParaRPr lang="en-US" sz="950" dirty="0"/>
           </a:p>
         </p:txBody>
       </p:sp>
@@ -4950,8 +5004,8 @@
         </p:nvSpPr>
         <p:spPr>
           <a:xfrm>
-            <a:off x="365760" y="310896"/>
-            <a:ext cx="8412480" cy="384048"/>
+            <a:off x="457200" y="365760"/>
+            <a:ext cx="8229600" cy="457200"/>
           </a:xfrm>
           <a:prstGeom prst="rect">
             <a:avLst/>
@@ -4967,7 +5021,7 @@
               <a:buNone/>
             </a:pPr>
             <a:r>
-              <a:rPr lang="en-US" sz="1800" b="1" dirty="0">
+              <a:rPr lang="en-US" sz="2000" b="1" dirty="0">
                 <a:solidFill>
                   <a:srgbClr val="1C2A30"/>
                 </a:solidFill>
@@ -4977,58 +5031,19 @@
               </a:rPr>
               <a:t>신청이 준 2020→2022년, 끊긴 건 광고 밖 경로였다</a:t>
             </a:r>
-            <a:endParaRPr lang="en-US" sz="1800" dirty="0"/>
-          </a:p>
-        </p:txBody>
-      </p:sp>
-      <p:sp>
-        <p:nvSpPr>
-          <p:cNvPr id="4" name="Text 2"/>
-          <p:cNvSpPr txBox="1"/>
-          <p:nvPr/>
-        </p:nvSpPr>
-        <p:spPr>
-          <a:xfrm>
-            <a:off x="411480" y="786384"/>
-            <a:ext cx="4846320" cy="201168"/>
-          </a:xfrm>
-          <a:prstGeom prst="rect">
-            <a:avLst/>
-          </a:prstGeom>
-          <a:noFill/>
-          <a:ln/>
-        </p:spPr>
-        <p:txBody>
-          <a:bodyPr wrap="square" lIns="0" tIns="0" rIns="0" bIns="0" rtlCol="0" anchor="t"/>
-          <a:lstStyle/>
-          <a:p>
-            <a:pPr algn="ctr" indent="0" marL="0">
-              <a:buNone/>
-            </a:pPr>
-            <a:r>
-              <a:rPr lang="en-US" sz="900" dirty="0">
-                <a:solidFill>
-                  <a:srgbClr val="5D6B70"/>
-                </a:solidFill>
-                <a:latin typeface="Malgun Gothic" pitchFamily="34" charset="0"/>
-                <a:ea typeface="Malgun Gothic" pitchFamily="34" charset="-122"/>
-                <a:cs typeface="Malgun Gothic" pitchFamily="34" charset="-120"/>
-              </a:rPr>
-              <a:t>연도별 유입 경로별 방문</a:t>
-            </a:r>
-            <a:endParaRPr lang="en-US" sz="900" dirty="0"/>
+            <a:endParaRPr lang="en-US" sz="2000" dirty="0"/>
           </a:p>
         </p:txBody>
       </p:sp>
       <p:graphicFrame>
         <p:nvGraphicFramePr>
-          <p:cNvPr id="5" name="Chart 0" descr=""/>
+          <p:cNvPr id="4" name="Chart 0" descr=""/>
           <p:cNvGraphicFramePr/>
           <p:nvPr/>
         </p:nvGraphicFramePr>
         <p:xfrm>
-          <a:off x="320040" y="987552"/>
-          <a:ext cx="4983480" cy="3291840"/>
+          <a:off x="365760" y="914400"/>
+          <a:ext cx="5212080" cy="3474720"/>
         </p:xfrm>
         <a:graphic xmlns:a="http://schemas.openxmlformats.org/drawingml/2006/main">
           <a:graphicData uri="http://schemas.openxmlformats.org/drawingml/2006/chart">
@@ -5038,14 +5053,14 @@
       </p:graphicFrame>
       <p:sp>
         <p:nvSpPr>
-          <p:cNvPr id="6" name="Shape 3"/>
+          <p:cNvPr id="5" name="Shape 2"/>
           <p:cNvSpPr/>
           <p:nvPr/>
         </p:nvSpPr>
         <p:spPr>
           <a:xfrm>
-            <a:off x="2615184" y="1097280"/>
-            <a:ext cx="1097280" cy="2670048"/>
+            <a:off x="2724912" y="1005840"/>
+            <a:ext cx="1161288" cy="2816352"/>
           </a:xfrm>
           <a:prstGeom prst="rect">
             <a:avLst/>
@@ -5065,14 +5080,14 @@
       </p:sp>
       <p:sp>
         <p:nvSpPr>
-          <p:cNvPr id="7" name="Text 4"/>
+          <p:cNvPr id="6" name="Text 3"/>
           <p:cNvSpPr txBox="1"/>
           <p:nvPr/>
         </p:nvSpPr>
         <p:spPr>
           <a:xfrm>
-            <a:off x="2615184" y="1115568"/>
-            <a:ext cx="1097280" cy="182880"/>
+            <a:off x="2724912" y="1024128"/>
+            <a:ext cx="1161288" cy="182880"/>
           </a:xfrm>
           <a:prstGeom prst="rect">
             <a:avLst/>
@@ -5088,7 +5103,7 @@
               <a:buNone/>
             </a:pPr>
             <a:r>
-              <a:rPr lang="en-US" sz="800" b="1" dirty="0">
+              <a:rPr lang="en-US" sz="850" b="1" dirty="0">
                 <a:solidFill>
                   <a:srgbClr val="8A6A00"/>
                 </a:solidFill>
@@ -5096,9 +5111,62 @@
                 <a:ea typeface="Malgun Gothic" pitchFamily="34" charset="-122"/>
                 <a:cs typeface="Malgun Gothic" pitchFamily="34" charset="-120"/>
               </a:rPr>
-              <a:t>2020→2022</a:t>
-            </a:r>
-            <a:endParaRPr lang="en-US" sz="800" dirty="0"/>
+              <a:t>2020 → 2022</a:t>
+            </a:r>
+            <a:endParaRPr lang="en-US" sz="850" dirty="0"/>
+          </a:p>
+        </p:txBody>
+      </p:sp>
+      <p:sp>
+        <p:nvSpPr>
+          <p:cNvPr id="7" name="Text 4"/>
+          <p:cNvSpPr txBox="1"/>
+          <p:nvPr/>
+        </p:nvSpPr>
+        <p:spPr>
+          <a:xfrm>
+            <a:off x="5806440" y="914400"/>
+            <a:ext cx="2880360" cy="274320"/>
+          </a:xfrm>
+          <a:prstGeom prst="rect">
+            <a:avLst/>
+          </a:prstGeom>
+          <a:noFill/>
+          <a:ln/>
+        </p:spPr>
+        <p:txBody>
+          <a:bodyPr wrap="square" lIns="0" tIns="0" rIns="0" bIns="0" rtlCol="0" anchor="ctr"/>
+          <a:lstStyle/>
+          <a:p>
+            <a:pPr indent="0" marL="0">
+              <a:buNone/>
+            </a:pPr>
+            <a:r>
+              <a:rPr lang="en-US" sz="1150" b="1" dirty="0">
+                <a:solidFill>
+                  <a:srgbClr val="C8372D"/>
+                </a:solidFill>
+                <a:latin typeface="Malgun Gothic" pitchFamily="34" charset="0"/>
+                <a:ea typeface="Malgun Gothic" pitchFamily="34" charset="-122"/>
+                <a:cs typeface="Malgun Gothic" pitchFamily="34" charset="-120"/>
+              </a:rPr>
+              <a:t>다음  </a:t>
+            </a:r>
+            <a:pPr indent="0" marL="0">
+              <a:buNone/>
+            </a:pPr>
+            <a:r>
+              <a:rPr lang="en-US" sz="1500" b="1" dirty="0">
+                <a:solidFill>
+                  <a:srgbClr val="C8372D"/>
+                </a:solidFill>
+                <a:latin typeface="Malgun Gothic" pitchFamily="34" charset="0"/>
+                <a:ea typeface="Malgun Gothic" pitchFamily="34" charset="-122"/>
+                <a:cs typeface="Malgun Gothic" pitchFamily="34" charset="-120"/>
+              </a:rPr>
+              <a:t>−99%</a:t>
+            </a:r>
+            <a:endParaRPr lang="en-US" sz="1150" dirty="0"/>
           </a:p>
         </p:txBody>
       </p:sp>
@@ -5110,8 +5178,8 @@
         </p:nvSpPr>
         <p:spPr>
           <a:xfrm>
-            <a:off x="5486400" y="868680"/>
-            <a:ext cx="3291840" cy="3429000"/>
+            <a:off x="5806440" y="1188720"/>
+            <a:ext cx="2880360" cy="365760"/>
           </a:xfrm>
           <a:prstGeom prst="rect">
             <a:avLst/>
@@ -5124,33 +5192,10 @@
           <a:lstStyle/>
           <a:p>
             <a:pPr indent="0" marL="0">
-              <a:spcAft>
-                <a:spcPts val="300"/>
-              </a:spcAft>
-              <a:buNone/>
-            </a:pPr>
-            <a:r>
-              <a:rPr lang="en-US" sz="1100" b="1" dirty="0">
-                <a:solidFill>
-                  <a:srgbClr val="C8372D"/>
-                </a:solidFill>
-                <a:latin typeface="Malgun Gothic" pitchFamily="34" charset="0"/>
-                <a:ea typeface="Malgun Gothic" pitchFamily="34" charset="-122"/>
-                <a:cs typeface="Malgun Gothic" pitchFamily="34" charset="-120"/>
-              </a:rPr>
-              <a:t>다음 −99%</a:t>
-            </a:r>
-            <a:endParaRPr lang="en-US" sz="1100" dirty="0"/>
-          </a:p>
-          <a:p>
-            <a:pPr indent="0" marL="0">
-              <a:spcAft>
-                <a:spcPts val="300"/>
-              </a:spcAft>
-              <a:buNone/>
-            </a:pPr>
-            <a:r>
-              <a:rPr lang="en-US" sz="950" dirty="0">
+              <a:buNone/>
+            </a:pPr>
+            <a:r>
+              <a:rPr lang="en-US" sz="1000" dirty="0">
                 <a:solidFill>
                   <a:srgbClr val="1C2A30"/>
                 </a:solidFill>
@@ -5158,265 +5203,22 @@
                 <a:ea typeface="Malgun Gothic" pitchFamily="34" charset="-122"/>
                 <a:cs typeface="Malgun Gothic" pitchFamily="34" charset="-120"/>
               </a:rPr>
-              <a:t>다음 광고·등록 중단</a:t>
-            </a:r>
-            <a:endParaRPr lang="en-US" sz="1100" dirty="0"/>
-          </a:p>
-          <a:p>
-            <a:pPr indent="0" marL="0">
-              <a:spcAft>
-                <a:spcPts val="300"/>
-              </a:spcAft>
-              <a:buNone/>
-            </a:pPr>
-            <a:r>
-              <a:rPr lang="en-US" sz="950" b="1" dirty="0">
-                <a:solidFill>
-                  <a:srgbClr val="2A78D6"/>
-                </a:solidFill>
-                <a:latin typeface="Malgun Gothic" pitchFamily="34" charset="0"/>
-                <a:ea typeface="Malgun Gothic" pitchFamily="34" charset="-122"/>
-                <a:cs typeface="Malgun Gothic" pitchFamily="34" charset="-120"/>
-              </a:rPr>
-              <a:t>→ 다음 재개 검토</a:t>
-            </a:r>
-            <a:endParaRPr lang="en-US" sz="1100" dirty="0"/>
-          </a:p>
-          <a:p>
-            <a:pPr indent="0" marL="0">
-              <a:spcAft>
-                <a:spcPts val="300"/>
-              </a:spcAft>
-              <a:buNone/>
-            </a:pPr>
-            <a:r>
-              <a:rPr lang="en-US" sz="1100" b="1" dirty="0">
-                <a:solidFill>
-                  <a:srgbClr val="B07A10"/>
-                </a:solidFill>
-                <a:latin typeface="Malgun Gothic" pitchFamily="34" charset="0"/>
-                <a:ea typeface="Malgun Gothic" pitchFamily="34" charset="-122"/>
-                <a:cs typeface="Malgun Gothic" pitchFamily="34" charset="-120"/>
-              </a:rPr>
-              <a:t>네이버 블로그 −93%</a:t>
-            </a:r>
-            <a:endParaRPr lang="en-US" sz="1100" dirty="0"/>
-          </a:p>
-          <a:p>
-            <a:pPr indent="0" marL="0">
-              <a:spcAft>
-                <a:spcPts val="300"/>
-              </a:spcAft>
-              <a:buNone/>
-            </a:pPr>
-            <a:r>
-              <a:rPr lang="en-US" sz="950" dirty="0">
-                <a:solidFill>
-                  <a:srgbClr val="1C2A30"/>
-                </a:solidFill>
-                <a:latin typeface="Malgun Gothic" pitchFamily="34" charset="0"/>
-                <a:ea typeface="Malgun Gothic" pitchFamily="34" charset="-122"/>
-                <a:cs typeface="Malgun Gothic" pitchFamily="34" charset="-120"/>
-              </a:rPr>
-              <a:t>글 수는 그대로(2020·21년 318·322건)</a:t>
-            </a:r>
-            <a:endParaRPr lang="en-US" sz="1100" dirty="0"/>
-          </a:p>
-          <a:p>
-            <a:pPr indent="0" marL="0">
-              <a:spcAft>
-                <a:spcPts val="300"/>
-              </a:spcAft>
-              <a:buNone/>
-            </a:pPr>
-            <a:r>
-              <a:rPr lang="en-US" sz="950" dirty="0">
-                <a:solidFill>
-                  <a:srgbClr val="1C2A30"/>
-                </a:solidFill>
-                <a:latin typeface="Malgun Gothic" pitchFamily="34" charset="0"/>
-                <a:ea typeface="Malgun Gothic" pitchFamily="34" charset="-122"/>
-                <a:cs typeface="Malgun Gothic" pitchFamily="34" charset="-120"/>
-              </a:rPr>
-              <a:t>네이버 노출 방식 변화로 추정</a:t>
-            </a:r>
-            <a:endParaRPr lang="en-US" sz="1100" dirty="0"/>
-          </a:p>
-          <a:p>
-            <a:pPr indent="0" marL="0">
-              <a:spcAft>
-                <a:spcPts val="300"/>
-              </a:spcAft>
-              <a:buNone/>
-            </a:pPr>
-            <a:r>
-              <a:rPr lang="en-US" sz="950" b="1" dirty="0">
-                <a:solidFill>
-                  <a:srgbClr val="2A78D6"/>
-                </a:solidFill>
-                <a:latin typeface="Malgun Gothic" pitchFamily="34" charset="0"/>
-                <a:ea typeface="Malgun Gothic" pitchFamily="34" charset="-122"/>
-                <a:cs typeface="Malgun Gothic" pitchFamily="34" charset="-120"/>
-              </a:rPr>
-              <a:t>→ 읽을거리 있는 글로</a:t>
-            </a:r>
-            <a:endParaRPr lang="en-US" sz="1100" dirty="0"/>
-          </a:p>
-          <a:p>
-            <a:pPr indent="0" marL="0">
-              <a:spcAft>
-                <a:spcPts val="300"/>
-              </a:spcAft>
-              <a:buNone/>
-            </a:pPr>
-            <a:r>
-              <a:rPr lang="en-US" sz="1100" b="1" dirty="0">
-                <a:solidFill>
-                  <a:srgbClr val="2E8A64"/>
-                </a:solidFill>
-                <a:latin typeface="Malgun Gothic" pitchFamily="34" charset="0"/>
-                <a:ea typeface="Malgun Gothic" pitchFamily="34" charset="-122"/>
-                <a:cs typeface="Malgun Gothic" pitchFamily="34" charset="-120"/>
-              </a:rPr>
-              <a:t>네이버 검색 −54%</a:t>
-            </a:r>
-            <a:endParaRPr lang="en-US" sz="1100" dirty="0"/>
-          </a:p>
-          <a:p>
-            <a:pPr indent="0" marL="0">
-              <a:spcAft>
-                <a:spcPts val="300"/>
-              </a:spcAft>
-              <a:buNone/>
-            </a:pPr>
-            <a:r>
-              <a:rPr lang="en-US" sz="950" dirty="0">
-                <a:solidFill>
-                  <a:srgbClr val="1C2A30"/>
-                </a:solidFill>
-                <a:latin typeface="Malgun Gothic" pitchFamily="34" charset="0"/>
-                <a:ea typeface="Malgun Gothic" pitchFamily="34" charset="-122"/>
-                <a:cs typeface="Malgun Gothic" pitchFamily="34" charset="-120"/>
-              </a:rPr>
-              <a:t>사이트 글자가 그림이라 검색에 안 잡힘(추정)</a:t>
-            </a:r>
-            <a:endParaRPr lang="en-US" sz="1100" dirty="0"/>
-          </a:p>
-          <a:p>
-            <a:pPr indent="0" marL="0">
-              <a:spcAft>
-                <a:spcPts val="300"/>
-              </a:spcAft>
-              <a:buNone/>
-            </a:pPr>
-            <a:r>
-              <a:rPr lang="en-US" sz="950" b="1" dirty="0">
-                <a:solidFill>
-                  <a:srgbClr val="2A78D6"/>
-                </a:solidFill>
-                <a:latin typeface="Malgun Gothic" pitchFamily="34" charset="0"/>
-                <a:ea typeface="Malgun Gothic" pitchFamily="34" charset="-122"/>
-                <a:cs typeface="Malgun Gothic" pitchFamily="34" charset="-120"/>
-              </a:rPr>
-              <a:t>→ 새 사이트는 글자로</a:t>
-            </a:r>
-            <a:endParaRPr lang="en-US" sz="1100" dirty="0"/>
-          </a:p>
-          <a:p>
-            <a:pPr indent="0" marL="0">
-              <a:spcAft>
-                <a:spcPts val="300"/>
-              </a:spcAft>
-              <a:buNone/>
-            </a:pPr>
-            <a:r>
-              <a:rPr lang="en-US" sz="1100" b="1" dirty="0">
-                <a:solidFill>
-                  <a:srgbClr val="2A78D6"/>
-                </a:solidFill>
-                <a:latin typeface="Malgun Gothic" pitchFamily="34" charset="0"/>
-                <a:ea typeface="Malgun Gothic" pitchFamily="34" charset="-122"/>
-                <a:cs typeface="Malgun Gothic" pitchFamily="34" charset="-120"/>
-              </a:rPr>
-              <a:t>네이버 광고 −40%</a:t>
-            </a:r>
-            <a:endParaRPr lang="en-US" sz="1100" dirty="0"/>
-          </a:p>
-          <a:p>
-            <a:pPr indent="0" marL="0">
-              <a:spcAft>
-                <a:spcPts val="300"/>
-              </a:spcAft>
-              <a:buNone/>
-            </a:pPr>
-            <a:r>
-              <a:rPr lang="en-US" sz="950" dirty="0">
-                <a:solidFill>
-                  <a:srgbClr val="1C2A30"/>
-                </a:solidFill>
-                <a:latin typeface="Malgun Gothic" pitchFamily="34" charset="0"/>
-                <a:ea typeface="Malgun Gothic" pitchFamily="34" charset="-122"/>
-                <a:cs typeface="Malgun Gothic" pitchFamily="34" charset="-120"/>
-              </a:rPr>
-              <a:t>가장 덜 줄어 원인 아님</a:t>
-            </a:r>
-            <a:endParaRPr lang="en-US" sz="1100" dirty="0"/>
-          </a:p>
-          <a:p>
-            <a:pPr indent="0" marL="0">
-              <a:spcAft>
-                <a:spcPts val="300"/>
-              </a:spcAft>
-              <a:buNone/>
-            </a:pPr>
-            <a:r>
-              <a:rPr lang="en-US" sz="950" dirty="0">
-                <a:solidFill>
-                  <a:srgbClr val="1C2A30"/>
-                </a:solidFill>
-                <a:latin typeface="Malgun Gothic" pitchFamily="34" charset="0"/>
-                <a:ea typeface="Malgun Gothic" pitchFamily="34" charset="-122"/>
-                <a:cs typeface="Malgun Gothic" pitchFamily="34" charset="-120"/>
-              </a:rPr>
-              <a:t>지금 남은 방문의 3분의 2</a:t>
-            </a:r>
-            <a:endParaRPr lang="en-US" sz="1100" dirty="0"/>
+              <a:t>광고·등록 중단</a:t>
+            </a:r>
+            <a:endParaRPr lang="en-US" sz="1000" dirty="0"/>
           </a:p>
         </p:txBody>
       </p:sp>
       <p:sp>
         <p:nvSpPr>
-          <p:cNvPr id="9" name="Shape 6"/>
-          <p:cNvSpPr/>
+          <p:cNvPr id="9" name="Text 6"/>
+          <p:cNvSpPr txBox="1"/>
           <p:nvPr/>
         </p:nvSpPr>
         <p:spPr>
           <a:xfrm>
-            <a:off x="365760" y="4352544"/>
-            <a:ext cx="8412480" cy="0"/>
-          </a:xfrm>
-          <a:prstGeom prst="line">
-            <a:avLst/>
-          </a:prstGeom>
-          <a:noFill/>
-          <a:ln w="12700">
-            <a:solidFill>
-              <a:srgbClr val="DFE3E2"/>
-            </a:solidFill>
-            <a:prstDash val="solid"/>
-          </a:ln>
-        </p:spPr>
-      </p:sp>
-      <p:sp>
-        <p:nvSpPr>
-          <p:cNvPr id="10" name="Text 7"/>
-          <p:cNvSpPr txBox="1"/>
-          <p:nvPr/>
-        </p:nvSpPr>
-        <p:spPr>
-          <a:xfrm>
-            <a:off x="365760" y="4407408"/>
-            <a:ext cx="8046720" cy="411480"/>
+            <a:off x="5806440" y="1517904"/>
+            <a:ext cx="2880360" cy="201168"/>
           </a:xfrm>
           <a:prstGeom prst="rect">
             <a:avLst/>
@@ -5429,15 +5231,431 @@
           <a:lstStyle/>
           <a:p>
             <a:pPr indent="0" marL="0">
+              <a:buNone/>
+            </a:pPr>
+            <a:r>
+              <a:rPr lang="en-US" sz="1000" b="1" dirty="0">
+                <a:solidFill>
+                  <a:srgbClr val="2A78D6"/>
+                </a:solidFill>
+                <a:latin typeface="Malgun Gothic" pitchFamily="34" charset="0"/>
+                <a:ea typeface="Malgun Gothic" pitchFamily="34" charset="-122"/>
+                <a:cs typeface="Malgun Gothic" pitchFamily="34" charset="-120"/>
+              </a:rPr>
+              <a:t>→ 다음 재개 검토</a:t>
+            </a:r>
+            <a:endParaRPr lang="en-US" sz="1000" dirty="0"/>
+          </a:p>
+        </p:txBody>
+      </p:sp>
+      <p:sp>
+        <p:nvSpPr>
+          <p:cNvPr id="10" name="Text 7"/>
+          <p:cNvSpPr txBox="1"/>
+          <p:nvPr/>
+        </p:nvSpPr>
+        <p:spPr>
+          <a:xfrm>
+            <a:off x="5806440" y="1783080"/>
+            <a:ext cx="2880360" cy="274320"/>
+          </a:xfrm>
+          <a:prstGeom prst="rect">
+            <a:avLst/>
+          </a:prstGeom>
+          <a:noFill/>
+          <a:ln/>
+        </p:spPr>
+        <p:txBody>
+          <a:bodyPr wrap="square" lIns="0" tIns="0" rIns="0" bIns="0" rtlCol="0" anchor="ctr"/>
+          <a:lstStyle/>
+          <a:p>
+            <a:pPr indent="0" marL="0">
+              <a:buNone/>
+            </a:pPr>
+            <a:r>
+              <a:rPr lang="en-US" sz="1150" b="1" dirty="0">
+                <a:solidFill>
+                  <a:srgbClr val="B07A10"/>
+                </a:solidFill>
+                <a:latin typeface="Malgun Gothic" pitchFamily="34" charset="0"/>
+                <a:ea typeface="Malgun Gothic" pitchFamily="34" charset="-122"/>
+                <a:cs typeface="Malgun Gothic" pitchFamily="34" charset="-120"/>
+              </a:rPr>
+              <a:t>네이버 블로그  </a:t>
+            </a:r>
+            <a:pPr indent="0" marL="0">
+              <a:buNone/>
+            </a:pPr>
+            <a:r>
+              <a:rPr lang="en-US" sz="1500" b="1" dirty="0">
+                <a:solidFill>
+                  <a:srgbClr val="B07A10"/>
+                </a:solidFill>
+                <a:latin typeface="Malgun Gothic" pitchFamily="34" charset="0"/>
+                <a:ea typeface="Malgun Gothic" pitchFamily="34" charset="-122"/>
+                <a:cs typeface="Malgun Gothic" pitchFamily="34" charset="-120"/>
+              </a:rPr>
+              <a:t>−93%</a:t>
+            </a:r>
+            <a:endParaRPr lang="en-US" sz="1150" dirty="0"/>
+          </a:p>
+        </p:txBody>
+      </p:sp>
+      <p:sp>
+        <p:nvSpPr>
+          <p:cNvPr id="11" name="Text 8"/>
+          <p:cNvSpPr txBox="1"/>
+          <p:nvPr/>
+        </p:nvSpPr>
+        <p:spPr>
+          <a:xfrm>
+            <a:off x="5806440" y="2057400"/>
+            <a:ext cx="2880360" cy="365760"/>
+          </a:xfrm>
+          <a:prstGeom prst="rect">
+            <a:avLst/>
+          </a:prstGeom>
+          <a:noFill/>
+          <a:ln/>
+        </p:spPr>
+        <p:txBody>
+          <a:bodyPr wrap="square" lIns="0" tIns="0" rIns="0" bIns="0" rtlCol="0" anchor="t"/>
+          <a:lstStyle/>
+          <a:p>
+            <a:pPr indent="0" marL="0">
+              <a:buNone/>
+            </a:pPr>
+            <a:r>
+              <a:rPr lang="en-US" sz="1000" dirty="0">
+                <a:solidFill>
+                  <a:srgbClr val="1C2A30"/>
+                </a:solidFill>
+                <a:latin typeface="Malgun Gothic" pitchFamily="34" charset="0"/>
+                <a:ea typeface="Malgun Gothic" pitchFamily="34" charset="-122"/>
+                <a:cs typeface="Malgun Gothic" pitchFamily="34" charset="-120"/>
+              </a:rPr>
+              <a:t>글 수는 그대로(2020·21년 318·322건). 네이버 노출 방식 변화로 추정</a:t>
+            </a:r>
+            <a:endParaRPr lang="en-US" sz="1000" dirty="0"/>
+          </a:p>
+        </p:txBody>
+      </p:sp>
+      <p:sp>
+        <p:nvSpPr>
+          <p:cNvPr id="12" name="Text 9"/>
+          <p:cNvSpPr txBox="1"/>
+          <p:nvPr/>
+        </p:nvSpPr>
+        <p:spPr>
+          <a:xfrm>
+            <a:off x="5806440" y="2386584"/>
+            <a:ext cx="2880360" cy="201168"/>
+          </a:xfrm>
+          <a:prstGeom prst="rect">
+            <a:avLst/>
+          </a:prstGeom>
+          <a:noFill/>
+          <a:ln/>
+        </p:spPr>
+        <p:txBody>
+          <a:bodyPr wrap="square" lIns="0" tIns="0" rIns="0" bIns="0" rtlCol="0" anchor="t"/>
+          <a:lstStyle/>
+          <a:p>
+            <a:pPr indent="0" marL="0">
+              <a:buNone/>
+            </a:pPr>
+            <a:r>
+              <a:rPr lang="en-US" sz="1000" b="1" dirty="0">
+                <a:solidFill>
+                  <a:srgbClr val="2A78D6"/>
+                </a:solidFill>
+                <a:latin typeface="Malgun Gothic" pitchFamily="34" charset="0"/>
+                <a:ea typeface="Malgun Gothic" pitchFamily="34" charset="-122"/>
+                <a:cs typeface="Malgun Gothic" pitchFamily="34" charset="-120"/>
+              </a:rPr>
+              <a:t>→ 읽을거리 있는 글로</a:t>
+            </a:r>
+            <a:endParaRPr lang="en-US" sz="1000" dirty="0"/>
+          </a:p>
+        </p:txBody>
+      </p:sp>
+      <p:sp>
+        <p:nvSpPr>
+          <p:cNvPr id="13" name="Text 10"/>
+          <p:cNvSpPr txBox="1"/>
+          <p:nvPr/>
+        </p:nvSpPr>
+        <p:spPr>
+          <a:xfrm>
+            <a:off x="5806440" y="2697480"/>
+            <a:ext cx="2880360" cy="274320"/>
+          </a:xfrm>
+          <a:prstGeom prst="rect">
+            <a:avLst/>
+          </a:prstGeom>
+          <a:noFill/>
+          <a:ln/>
+        </p:spPr>
+        <p:txBody>
+          <a:bodyPr wrap="square" lIns="0" tIns="0" rIns="0" bIns="0" rtlCol="0" anchor="ctr"/>
+          <a:lstStyle/>
+          <a:p>
+            <a:pPr indent="0" marL="0">
+              <a:buNone/>
+            </a:pPr>
+            <a:r>
+              <a:rPr lang="en-US" sz="1150" b="1" dirty="0">
+                <a:solidFill>
+                  <a:srgbClr val="2E8A64"/>
+                </a:solidFill>
+                <a:latin typeface="Malgun Gothic" pitchFamily="34" charset="0"/>
+                <a:ea typeface="Malgun Gothic" pitchFamily="34" charset="-122"/>
+                <a:cs typeface="Malgun Gothic" pitchFamily="34" charset="-120"/>
+              </a:rPr>
+              <a:t>네이버 검색  </a:t>
+            </a:r>
+            <a:pPr indent="0" marL="0">
+              <a:buNone/>
+            </a:pPr>
+            <a:r>
+              <a:rPr lang="en-US" sz="1500" b="1" dirty="0">
+                <a:solidFill>
+                  <a:srgbClr val="2E8A64"/>
+                </a:solidFill>
+                <a:latin typeface="Malgun Gothic" pitchFamily="34" charset="0"/>
+                <a:ea typeface="Malgun Gothic" pitchFamily="34" charset="-122"/>
+                <a:cs typeface="Malgun Gothic" pitchFamily="34" charset="-120"/>
+              </a:rPr>
+              <a:t>−54%</a:t>
+            </a:r>
+            <a:endParaRPr lang="en-US" sz="1150" dirty="0"/>
+          </a:p>
+        </p:txBody>
+      </p:sp>
+      <p:sp>
+        <p:nvSpPr>
+          <p:cNvPr id="14" name="Text 11"/>
+          <p:cNvSpPr txBox="1"/>
+          <p:nvPr/>
+        </p:nvSpPr>
+        <p:spPr>
+          <a:xfrm>
+            <a:off x="5806440" y="2971800"/>
+            <a:ext cx="2880360" cy="365760"/>
+          </a:xfrm>
+          <a:prstGeom prst="rect">
+            <a:avLst/>
+          </a:prstGeom>
+          <a:noFill/>
+          <a:ln/>
+        </p:spPr>
+        <p:txBody>
+          <a:bodyPr wrap="square" lIns="0" tIns="0" rIns="0" bIns="0" rtlCol="0" anchor="t"/>
+          <a:lstStyle/>
+          <a:p>
+            <a:pPr indent="0" marL="0">
+              <a:buNone/>
+            </a:pPr>
+            <a:r>
+              <a:rPr lang="en-US" sz="1000" dirty="0">
+                <a:solidFill>
+                  <a:srgbClr val="1C2A30"/>
+                </a:solidFill>
+                <a:latin typeface="Malgun Gothic" pitchFamily="34" charset="0"/>
+                <a:ea typeface="Malgun Gothic" pitchFamily="34" charset="-122"/>
+                <a:cs typeface="Malgun Gothic" pitchFamily="34" charset="-120"/>
+              </a:rPr>
+              <a:t>사이트 글자가 그림이라 검색에 안 잡힘(추정)</a:t>
+            </a:r>
+            <a:endParaRPr lang="en-US" sz="1000" dirty="0"/>
+          </a:p>
+        </p:txBody>
+      </p:sp>
+      <p:sp>
+        <p:nvSpPr>
+          <p:cNvPr id="15" name="Text 12"/>
+          <p:cNvSpPr txBox="1"/>
+          <p:nvPr/>
+        </p:nvSpPr>
+        <p:spPr>
+          <a:xfrm>
+            <a:off x="5806440" y="3300984"/>
+            <a:ext cx="2880360" cy="201168"/>
+          </a:xfrm>
+          <a:prstGeom prst="rect">
+            <a:avLst/>
+          </a:prstGeom>
+          <a:noFill/>
+          <a:ln/>
+        </p:spPr>
+        <p:txBody>
+          <a:bodyPr wrap="square" lIns="0" tIns="0" rIns="0" bIns="0" rtlCol="0" anchor="t"/>
+          <a:lstStyle/>
+          <a:p>
+            <a:pPr indent="0" marL="0">
+              <a:buNone/>
+            </a:pPr>
+            <a:r>
+              <a:rPr lang="en-US" sz="1000" b="1" dirty="0">
+                <a:solidFill>
+                  <a:srgbClr val="2A78D6"/>
+                </a:solidFill>
+                <a:latin typeface="Malgun Gothic" pitchFamily="34" charset="0"/>
+                <a:ea typeface="Malgun Gothic" pitchFamily="34" charset="-122"/>
+                <a:cs typeface="Malgun Gothic" pitchFamily="34" charset="-120"/>
+              </a:rPr>
+              <a:t>→ 새 사이트는 글자로</a:t>
+            </a:r>
+            <a:endParaRPr lang="en-US" sz="1000" dirty="0"/>
+          </a:p>
+        </p:txBody>
+      </p:sp>
+      <p:sp>
+        <p:nvSpPr>
+          <p:cNvPr id="16" name="Text 13"/>
+          <p:cNvSpPr txBox="1"/>
+          <p:nvPr/>
+        </p:nvSpPr>
+        <p:spPr>
+          <a:xfrm>
+            <a:off x="5806440" y="3566160"/>
+            <a:ext cx="2880360" cy="274320"/>
+          </a:xfrm>
+          <a:prstGeom prst="rect">
+            <a:avLst/>
+          </a:prstGeom>
+          <a:noFill/>
+          <a:ln/>
+        </p:spPr>
+        <p:txBody>
+          <a:bodyPr wrap="square" lIns="0" tIns="0" rIns="0" bIns="0" rtlCol="0" anchor="ctr"/>
+          <a:lstStyle/>
+          <a:p>
+            <a:pPr indent="0" marL="0">
+              <a:buNone/>
+            </a:pPr>
+            <a:r>
+              <a:rPr lang="en-US" sz="1150" b="1" dirty="0">
+                <a:solidFill>
+                  <a:srgbClr val="2A78D6"/>
+                </a:solidFill>
+                <a:latin typeface="Malgun Gothic" pitchFamily="34" charset="0"/>
+                <a:ea typeface="Malgun Gothic" pitchFamily="34" charset="-122"/>
+                <a:cs typeface="Malgun Gothic" pitchFamily="34" charset="-120"/>
+              </a:rPr>
+              <a:t>네이버 광고  </a:t>
+            </a:r>
+            <a:pPr indent="0" marL="0">
+              <a:buNone/>
+            </a:pPr>
+            <a:r>
+              <a:rPr lang="en-US" sz="1500" b="1" dirty="0">
+                <a:solidFill>
+                  <a:srgbClr val="2A78D6"/>
+                </a:solidFill>
+                <a:latin typeface="Malgun Gothic" pitchFamily="34" charset="0"/>
+                <a:ea typeface="Malgun Gothic" pitchFamily="34" charset="-122"/>
+                <a:cs typeface="Malgun Gothic" pitchFamily="34" charset="-120"/>
+              </a:rPr>
+              <a:t>−40%</a:t>
+            </a:r>
+            <a:endParaRPr lang="en-US" sz="1150" dirty="0"/>
+          </a:p>
+        </p:txBody>
+      </p:sp>
+      <p:sp>
+        <p:nvSpPr>
+          <p:cNvPr id="17" name="Text 14"/>
+          <p:cNvSpPr txBox="1"/>
+          <p:nvPr/>
+        </p:nvSpPr>
+        <p:spPr>
+          <a:xfrm>
+            <a:off x="5806440" y="3840480"/>
+            <a:ext cx="2880360" cy="365760"/>
+          </a:xfrm>
+          <a:prstGeom prst="rect">
+            <a:avLst/>
+          </a:prstGeom>
+          <a:noFill/>
+          <a:ln/>
+        </p:spPr>
+        <p:txBody>
+          <a:bodyPr wrap="square" lIns="0" tIns="0" rIns="0" bIns="0" rtlCol="0" anchor="t"/>
+          <a:lstStyle/>
+          <a:p>
+            <a:pPr indent="0" marL="0">
+              <a:buNone/>
+            </a:pPr>
+            <a:r>
+              <a:rPr lang="en-US" sz="1000" dirty="0">
+                <a:solidFill>
+                  <a:srgbClr val="1C2A30"/>
+                </a:solidFill>
+                <a:latin typeface="Malgun Gothic" pitchFamily="34" charset="0"/>
+                <a:ea typeface="Malgun Gothic" pitchFamily="34" charset="-122"/>
+                <a:cs typeface="Malgun Gothic" pitchFamily="34" charset="-120"/>
+              </a:rPr>
+              <a:t>가장 덜 줄어 원인 아님. 지금 남은 방문의 3분의 2</a:t>
+            </a:r>
+            <a:endParaRPr lang="en-US" sz="1000" dirty="0"/>
+          </a:p>
+        </p:txBody>
+      </p:sp>
+      <p:sp>
+        <p:nvSpPr>
+          <p:cNvPr id="18" name="Shape 15"/>
+          <p:cNvSpPr/>
+          <p:nvPr/>
+        </p:nvSpPr>
+        <p:spPr>
+          <a:xfrm>
+            <a:off x="457200" y="4462272"/>
+            <a:ext cx="8229600" cy="0"/>
+          </a:xfrm>
+          <a:prstGeom prst="line">
+            <a:avLst/>
+          </a:prstGeom>
+          <a:noFill/>
+          <a:ln w="12700">
+            <a:solidFill>
+              <a:srgbClr val="E3E7E8"/>
+            </a:solidFill>
+            <a:prstDash val="solid"/>
+          </a:ln>
+        </p:spPr>
+      </p:sp>
+      <p:sp>
+        <p:nvSpPr>
+          <p:cNvPr id="19" name="Text 16"/>
+          <p:cNvSpPr txBox="1"/>
+          <p:nvPr/>
+        </p:nvSpPr>
+        <p:spPr>
+          <a:xfrm>
+            <a:off x="457200" y="4526280"/>
+            <a:ext cx="7955280" cy="411480"/>
+          </a:xfrm>
+          <a:prstGeom prst="rect">
+            <a:avLst/>
+          </a:prstGeom>
+          <a:noFill/>
+          <a:ln/>
+        </p:spPr>
+        <p:txBody>
+          <a:bodyPr wrap="square" lIns="0" tIns="0" rIns="0" bIns="0" rtlCol="0" anchor="t"/>
+          <a:lstStyle/>
+          <a:p>
+            <a:pPr indent="0" marL="0">
               <a:spcAft>
                 <a:spcPts val="100"/>
               </a:spcAft>
               <a:buNone/>
             </a:pPr>
             <a:r>
-              <a:rPr lang="en-US" sz="800" dirty="0">
-                <a:solidFill>
-                  <a:srgbClr val="5D6B70"/>
+              <a:rPr lang="en-US" sz="850" dirty="0">
+                <a:solidFill>
+                  <a:srgbClr val="6B7A80"/>
                 </a:solidFill>
                 <a:latin typeface="Malgun Gothic" pitchFamily="34" charset="0"/>
                 <a:ea typeface="Malgun Gothic" pitchFamily="34" charset="-122"/>
@@ -5445,7 +5663,7 @@
               </a:rPr>
               <a:t>출처: 서버 관리자 접속자통계(도메인별·OS별) 2015 ~ 2026-10-06. 감소율은 2020 → 2022</a:t>
             </a:r>
-            <a:endParaRPr lang="en-US" sz="800" dirty="0"/>
+            <a:endParaRPr lang="en-US" sz="850" dirty="0"/>
           </a:p>
           <a:p>
             <a:pPr indent="0" marL="0">
@@ -5455,9 +5673,9 @@
               <a:buNone/>
             </a:pPr>
             <a:r>
-              <a:rPr lang="en-US" sz="800" dirty="0">
-                <a:solidFill>
-                  <a:srgbClr val="5D6B70"/>
+              <a:rPr lang="en-US" sz="850" dirty="0">
+                <a:solidFill>
+                  <a:srgbClr val="6B7A80"/>
                 </a:solidFill>
                 <a:latin typeface="Malgun Gothic" pitchFamily="34" charset="0"/>
                 <a:ea typeface="Malgun Gothic" pitchFamily="34" charset="-122"/>
@@ -5465,7 +5683,7 @@
               </a:rPr>
               <a:t>전처리: 직접 유입에서 봇(OS가 Robot·Linux)을 뺌. *다 못 뺀 해(2016·17·19·25·26)는 연한 회색</a:t>
             </a:r>
-            <a:endParaRPr lang="en-US" sz="800" dirty="0"/>
+            <a:endParaRPr lang="en-US" sz="850" dirty="0"/>
           </a:p>
         </p:txBody>
       </p:sp>
@@ -5481,7 +5699,7 @@
         </p:nvSpPr>
         <p:spPr>
           <a:xfrm>
-            <a:off x="8458200" y="4864608"/>
+            <a:off x="8503920" y="4846320"/>
             <a:ext cx="365760" cy="201168"/>
           </a:xfrm>
           <a:prstGeom prst="rect">
@@ -5499,7 +5717,7 @@
             <a:lvl1pPr>
               <a:defRPr sz="800">
                 <a:solidFill>
-                  <a:srgbClr val="5D6B70"/>
+                  <a:srgbClr val="6B7A80"/>
                 </a:solidFill>
                 <a:latin typeface="Malgun Gothic"/>
                 <a:ea typeface="Malgun Gothic"/>
@@ -5550,8 +5768,8 @@
         </p:nvSpPr>
         <p:spPr>
           <a:xfrm>
-            <a:off x="365760" y="109728"/>
-            <a:ext cx="8412480" cy="201168"/>
+            <a:off x="457200" y="146304"/>
+            <a:ext cx="8229600" cy="201168"/>
           </a:xfrm>
           <a:prstGeom prst="rect">
             <a:avLst/>
@@ -5567,9 +5785,9 @@
               <a:buNone/>
             </a:pPr>
             <a:r>
-              <a:rPr lang="en-US" sz="900" dirty="0">
-                <a:solidFill>
-                  <a:srgbClr val="5D6B70"/>
+              <a:rPr lang="en-US" sz="950" dirty="0">
+                <a:solidFill>
+                  <a:srgbClr val="6B7A80"/>
                 </a:solidFill>
                 <a:latin typeface="Malgun Gothic" pitchFamily="34" charset="0"/>
                 <a:ea typeface="Malgun Gothic" pitchFamily="34" charset="-122"/>
@@ -5577,7 +5795,7 @@
               </a:rPr>
               <a:t>3 · 방문자수 — 네이버 광고</a:t>
             </a:r>
-            <a:endParaRPr lang="en-US" sz="900" dirty="0"/>
+            <a:endParaRPr lang="en-US" sz="950" dirty="0"/>
           </a:p>
         </p:txBody>
       </p:sp>
@@ -5589,8 +5807,8 @@
         </p:nvSpPr>
         <p:spPr>
           <a:xfrm>
-            <a:off x="365760" y="310896"/>
-            <a:ext cx="8412480" cy="384048"/>
+            <a:off x="457200" y="365760"/>
+            <a:ext cx="8229600" cy="457200"/>
           </a:xfrm>
           <a:prstGeom prst="rect">
             <a:avLst/>
@@ -5606,7 +5824,7 @@
               <a:buNone/>
             </a:pPr>
             <a:r>
-              <a:rPr lang="en-US" sz="1800" b="1" dirty="0">
+              <a:rPr lang="en-US" sz="2000" b="1" dirty="0">
                 <a:solidFill>
                   <a:srgbClr val="1C2A30"/>
                 </a:solidFill>
@@ -5616,7 +5834,7 @@
               </a:rPr>
               <a:t>광고비 4분의 1이 거의 안 눌리는 검색어 8개에 쓰인다</a:t>
             </a:r>
-            <a:endParaRPr lang="en-US" sz="1800" dirty="0"/>
+            <a:endParaRPr lang="en-US" sz="2000" dirty="0"/>
           </a:p>
         </p:txBody>
       </p:sp>
@@ -5628,8 +5846,8 @@
         </p:nvSpPr>
         <p:spPr>
           <a:xfrm>
-            <a:off x="411480" y="786384"/>
-            <a:ext cx="4480560" cy="201168"/>
+            <a:off x="457200" y="914400"/>
+            <a:ext cx="4754880" cy="219456"/>
           </a:xfrm>
           <a:prstGeom prst="rect">
             <a:avLst/>
@@ -5641,11 +5859,11 @@
           <a:bodyPr wrap="square" lIns="0" tIns="0" rIns="0" bIns="0" rtlCol="0" anchor="t"/>
           <a:lstStyle/>
           <a:p>
-            <a:pPr algn="ctr" indent="0" marL="0">
-              <a:buNone/>
-            </a:pPr>
-            <a:r>
-              <a:rPr lang="en-US" sz="850" dirty="0">
+            <a:pPr indent="0" marL="0">
+              <a:buNone/>
+            </a:pPr>
+            <a:r>
+              <a:rPr lang="en-US" sz="950" dirty="0">
                 <a:solidFill>
                   <a:srgbClr val="C8372D"/>
                 </a:solidFill>
@@ -5655,25 +5873,25 @@
               </a:rPr>
               <a:t>■ </a:t>
             </a:r>
-            <a:pPr algn="ctr" indent="0" marL="0">
-              <a:buNone/>
-            </a:pPr>
-            <a:r>
-              <a:rPr lang="en-US" sz="850" dirty="0">
-                <a:solidFill>
-                  <a:srgbClr val="5D6B70"/>
-                </a:solidFill>
-                <a:latin typeface="Malgun Gothic" pitchFamily="34" charset="0"/>
-                <a:ea typeface="Malgun Gothic" pitchFamily="34" charset="-122"/>
-                <a:cs typeface="Malgun Gothic" pitchFamily="34" charset="-120"/>
-              </a:rPr>
-              <a:t>포괄 검색어 8개('특허'·'변리사' 등 한 단어)  </a:t>
-            </a:r>
-            <a:pPr algn="ctr" indent="0" marL="0">
-              <a:buNone/>
-            </a:pPr>
-            <a:r>
-              <a:rPr lang="en-US" sz="850" dirty="0">
+            <a:pPr indent="0" marL="0">
+              <a:buNone/>
+            </a:pPr>
+            <a:r>
+              <a:rPr lang="en-US" sz="950" dirty="0">
+                <a:solidFill>
+                  <a:srgbClr val="6B7A80"/>
+                </a:solidFill>
+                <a:latin typeface="Malgun Gothic" pitchFamily="34" charset="0"/>
+                <a:ea typeface="Malgun Gothic" pitchFamily="34" charset="-122"/>
+                <a:cs typeface="Malgun Gothic" pitchFamily="34" charset="-120"/>
+              </a:rPr>
+              <a:t>포괄 검색어 8개 ('특허'·'변리사' 등 한 단어)     </a:t>
+            </a:r>
+            <a:pPr indent="0" marL="0">
+              <a:buNone/>
+            </a:pPr>
+            <a:r>
+              <a:rPr lang="en-US" sz="950" dirty="0">
                 <a:solidFill>
                   <a:srgbClr val="C9D1D3"/>
                 </a:solidFill>
@@ -5683,13 +5901,13 @@
               </a:rPr>
               <a:t>■ </a:t>
             </a:r>
-            <a:pPr algn="ctr" indent="0" marL="0">
-              <a:buNone/>
-            </a:pPr>
-            <a:r>
-              <a:rPr lang="en-US" sz="850" dirty="0">
-                <a:solidFill>
-                  <a:srgbClr val="5D6B70"/>
+            <a:pPr indent="0" marL="0">
+              <a:buNone/>
+            </a:pPr>
+            <a:r>
+              <a:rPr lang="en-US" sz="950" dirty="0">
+                <a:solidFill>
+                  <a:srgbClr val="6B7A80"/>
                 </a:solidFill>
                 <a:latin typeface="Malgun Gothic" pitchFamily="34" charset="0"/>
                 <a:ea typeface="Malgun Gothic" pitchFamily="34" charset="-122"/>
@@ -5697,7 +5915,7 @@
               </a:rPr>
               <a:t>구체적 검색어 9,375개</a:t>
             </a:r>
-            <a:endParaRPr lang="en-US" sz="850" dirty="0"/>
+            <a:endParaRPr lang="en-US" sz="950" dirty="0"/>
           </a:p>
         </p:txBody>
       </p:sp>
@@ -5708,8 +5926,8 @@
           <p:nvPr/>
         </p:nvGraphicFramePr>
         <p:xfrm>
-          <a:off x="320040" y="1005840"/>
-          <a:ext cx="4572000" cy="3246120"/>
+          <a:off x="365760" y="1188720"/>
+          <a:ext cx="4846320" cy="3108960"/>
         </p:xfrm>
         <a:graphic xmlns:a="http://schemas.openxmlformats.org/drawingml/2006/main">
           <a:graphicData uri="http://schemas.openxmlformats.org/drawingml/2006/chart">
@@ -5719,14 +5937,143 @@
       </p:graphicFrame>
       <p:sp>
         <p:nvSpPr>
-          <p:cNvPr id="6" name="Text 3"/>
+          <p:cNvPr id="6" name="Shape 3"/>
+          <p:cNvSpPr/>
+          <p:nvPr/>
+        </p:nvSpPr>
+        <p:spPr>
+          <a:xfrm>
+            <a:off x="5440680" y="914400"/>
+            <a:ext cx="0" cy="3429000"/>
+          </a:xfrm>
+          <a:prstGeom prst="line">
+            <a:avLst/>
+          </a:prstGeom>
+          <a:noFill/>
+          <a:ln w="12700">
+            <a:solidFill>
+              <a:srgbClr val="E3E7E8"/>
+            </a:solidFill>
+            <a:prstDash val="solid"/>
+          </a:ln>
+        </p:spPr>
+      </p:sp>
+      <p:sp>
+        <p:nvSpPr>
+          <p:cNvPr id="7" name="Text 4"/>
           <p:cNvSpPr txBox="1"/>
           <p:nvPr/>
         </p:nvSpPr>
         <p:spPr>
           <a:xfrm>
-            <a:off x="5120640" y="914400"/>
-            <a:ext cx="3657600" cy="1097280"/>
+            <a:off x="5669280" y="914400"/>
+            <a:ext cx="3017520" cy="237744"/>
+          </a:xfrm>
+          <a:prstGeom prst="rect">
+            <a:avLst/>
+          </a:prstGeom>
+          <a:noFill/>
+          <a:ln/>
+        </p:spPr>
+        <p:txBody>
+          <a:bodyPr wrap="square" lIns="0" tIns="0" rIns="0" bIns="0" rtlCol="0" anchor="ctr"/>
+          <a:lstStyle/>
+          <a:p>
+            <a:pPr indent="0" marL="0">
+              <a:buNone/>
+            </a:pPr>
+            <a:r>
+              <a:rPr lang="en-US" sz="1000" b="1" spc="100" kern="0" dirty="0">
+                <a:solidFill>
+                  <a:srgbClr val="6B7A80"/>
+                </a:solidFill>
+                <a:latin typeface="Malgun Gothic" pitchFamily="34" charset="0"/>
+                <a:ea typeface="Malgun Gothic" pitchFamily="34" charset="-122"/>
+                <a:cs typeface="Malgun Gothic" pitchFamily="34" charset="-120"/>
+              </a:rPr>
+              <a:t>클릭률</a:t>
+            </a:r>
+            <a:endParaRPr lang="en-US" sz="1000" dirty="0"/>
+          </a:p>
+        </p:txBody>
+      </p:sp>
+      <p:sp>
+        <p:nvSpPr>
+          <p:cNvPr id="8" name="Text 5"/>
+          <p:cNvSpPr txBox="1"/>
+          <p:nvPr/>
+        </p:nvSpPr>
+        <p:spPr>
+          <a:xfrm>
+            <a:off x="5669280" y="1152144"/>
+            <a:ext cx="3017520" cy="502920"/>
+          </a:xfrm>
+          <a:prstGeom prst="rect">
+            <a:avLst/>
+          </a:prstGeom>
+          <a:noFill/>
+          <a:ln/>
+        </p:spPr>
+        <p:txBody>
+          <a:bodyPr wrap="square" lIns="0" tIns="0" rIns="0" bIns="0" rtlCol="0" anchor="ctr"/>
+          <a:lstStyle/>
+          <a:p>
+            <a:pPr indent="0" marL="0">
+              <a:buNone/>
+            </a:pPr>
+            <a:r>
+              <a:rPr lang="en-US" sz="2800" b="1" dirty="0">
+                <a:solidFill>
+                  <a:srgbClr val="C8372D"/>
+                </a:solidFill>
+                <a:latin typeface="Malgun Gothic" pitchFamily="34" charset="0"/>
+                <a:ea typeface="Malgun Gothic" pitchFamily="34" charset="-122"/>
+                <a:cs typeface="Malgun Gothic" pitchFamily="34" charset="-120"/>
+              </a:rPr>
+              <a:t>0.06%</a:t>
+            </a:r>
+            <a:pPr indent="0" marL="0">
+              <a:buNone/>
+            </a:pPr>
+            <a:r>
+              <a:rPr lang="en-US" sz="1200" dirty="0">
+                <a:solidFill>
+                  <a:srgbClr val="6B7A80"/>
+                </a:solidFill>
+                <a:latin typeface="Malgun Gothic" pitchFamily="34" charset="0"/>
+                <a:ea typeface="Malgun Gothic" pitchFamily="34" charset="-122"/>
+                <a:cs typeface="Malgun Gothic" pitchFamily="34" charset="-120"/>
+              </a:rPr>
+              <a:t>  vs  </a:t>
+            </a:r>
+            <a:pPr indent="0" marL="0">
+              <a:buNone/>
+            </a:pPr>
+            <a:r>
+              <a:rPr lang="en-US" sz="2800" b="1" dirty="0">
+                <a:solidFill>
+                  <a:srgbClr val="1C2A30"/>
+                </a:solidFill>
+                <a:latin typeface="Malgun Gothic" pitchFamily="34" charset="0"/>
+                <a:ea typeface="Malgun Gothic" pitchFamily="34" charset="-122"/>
+                <a:cs typeface="Malgun Gothic" pitchFamily="34" charset="-120"/>
+              </a:rPr>
+              <a:t>0.50%</a:t>
+            </a:r>
+            <a:endParaRPr lang="en-US" sz="2800" dirty="0"/>
+          </a:p>
+        </p:txBody>
+      </p:sp>
+      <p:sp>
+        <p:nvSpPr>
+          <p:cNvPr id="9" name="Text 6"/>
+          <p:cNvSpPr txBox="1"/>
+          <p:nvPr/>
+        </p:nvSpPr>
+        <p:spPr>
+          <a:xfrm>
+            <a:off x="5669280" y="1664208"/>
+            <a:ext cx="3017520" cy="219456"/>
           </a:xfrm>
           <a:prstGeom prst="rect">
             <a:avLst/>
@@ -5742,35 +6089,7 @@
               <a:buNone/>
             </a:pPr>
             <a:r>
-              <a:rPr lang="en-US" sz="2400" b="1" dirty="0">
-                <a:solidFill>
-                  <a:srgbClr val="C8372D"/>
-                </a:solidFill>
-                <a:latin typeface="Malgun Gothic" pitchFamily="34" charset="0"/>
-                <a:ea typeface="Malgun Gothic" pitchFamily="34" charset="-122"/>
-                <a:cs typeface="Malgun Gothic" pitchFamily="34" charset="-120"/>
-              </a:rPr>
-              <a:t>0.06%</a:t>
-            </a:r>
-            <a:pPr indent="0" marL="0">
-              <a:buNone/>
-            </a:pPr>
-            <a:r>
-              <a:rPr lang="en-US" sz="1100" dirty="0">
-                <a:solidFill>
-                  <a:srgbClr val="5D6B70"/>
-                </a:solidFill>
-                <a:latin typeface="Malgun Gothic" pitchFamily="34" charset="0"/>
-                <a:ea typeface="Malgun Gothic" pitchFamily="34" charset="-122"/>
-                <a:cs typeface="Malgun Gothic" pitchFamily="34" charset="-120"/>
-              </a:rPr>
-              <a:t>   vs   </a:t>
-            </a:r>
-            <a:pPr indent="0" marL="0">
-              <a:buNone/>
-            </a:pPr>
-            <a:r>
-              <a:rPr lang="en-US" sz="2400" b="1" dirty="0">
+              <a:rPr lang="en-US" sz="1050" dirty="0">
                 <a:solidFill>
                   <a:srgbClr val="1C2A30"/>
                 </a:solidFill>
@@ -5778,56 +6097,22 @@
                 <a:ea typeface="Malgun Gothic" pitchFamily="34" charset="-122"/>
                 <a:cs typeface="Malgun Gothic" pitchFamily="34" charset="-120"/>
               </a:rPr>
-              <a:t>0.50%</a:t>
-            </a:r>
-            <a:endParaRPr lang="en-US" sz="2400" dirty="0"/>
-          </a:p>
-          <a:p>
-            <a:pPr indent="0" marL="0">
-              <a:buNone/>
-            </a:pPr>
-            <a:r>
-              <a:rPr lang="en-US" sz="950" dirty="0">
-                <a:solidFill>
-                  <a:srgbClr val="1C2A30"/>
-                </a:solidFill>
-                <a:latin typeface="Malgun Gothic" pitchFamily="34" charset="0"/>
-                <a:ea typeface="Malgun Gothic" pitchFamily="34" charset="-122"/>
-                <a:cs typeface="Malgun Gothic" pitchFamily="34" charset="-120"/>
-              </a:rPr>
-              <a:t>클릭률: 포괄 검색어 vs 구체적 검색어. 8배 차이</a:t>
-            </a:r>
-            <a:endParaRPr lang="en-US" sz="2400" dirty="0"/>
-          </a:p>
-          <a:p>
-            <a:pPr indent="0" marL="0">
-              <a:buNone/>
-            </a:pPr>
-            <a:r>
-              <a:rPr lang="en-US" sz="850" dirty="0">
-                <a:solidFill>
-                  <a:srgbClr val="5D6B70"/>
-                </a:solidFill>
-                <a:latin typeface="Malgun Gothic" pitchFamily="34" charset="0"/>
-                <a:ea typeface="Malgun Gothic" pitchFamily="34" charset="-122"/>
-                <a:cs typeface="Malgun Gothic" pitchFamily="34" charset="-120"/>
-              </a:rPr>
-              <a:t>피셔 정확검정, 우연일 확률 0.1% 미만</a:t>
-            </a:r>
-            <a:endParaRPr lang="en-US" sz="2400" dirty="0"/>
+              <a:t>포괄 검색어 vs 구체적 검색어. 8배 차이</a:t>
+            </a:r>
+            <a:endParaRPr lang="en-US" sz="1050" dirty="0"/>
           </a:p>
         </p:txBody>
       </p:sp>
       <p:sp>
         <p:nvSpPr>
-          <p:cNvPr id="7" name="Text 4"/>
+          <p:cNvPr id="10" name="Text 7"/>
           <p:cNvSpPr txBox="1"/>
           <p:nvPr/>
         </p:nvSpPr>
         <p:spPr>
           <a:xfrm>
-            <a:off x="5120640" y="2103120"/>
-            <a:ext cx="3657600" cy="777240"/>
+            <a:off x="5669280" y="1883664"/>
+            <a:ext cx="3017520" cy="201168"/>
           </a:xfrm>
           <a:prstGeom prst="rect">
             <a:avLst/>
@@ -5840,101 +6125,139 @@
           <a:lstStyle/>
           <a:p>
             <a:pPr indent="0" marL="0">
-              <a:spcAft>
-                <a:spcPts val="300"/>
-              </a:spcAft>
-              <a:buNone/>
-            </a:pPr>
-            <a:r>
-              <a:rPr lang="en-US" sz="1050" b="1" dirty="0">
-                <a:solidFill>
-                  <a:srgbClr val="1C2A30"/>
-                </a:solidFill>
-                <a:latin typeface="Malgun Gothic" pitchFamily="34" charset="0"/>
-                <a:ea typeface="Malgun Gothic" pitchFamily="34" charset="-122"/>
-                <a:cs typeface="Malgun Gothic" pitchFamily="34" charset="-120"/>
-              </a:rPr>
-              <a:t>확장검색 (네이버가 비슷한 말에 붙인 광고)</a:t>
-            </a:r>
-            <a:endParaRPr lang="en-US" sz="1050" dirty="0"/>
-          </a:p>
-          <a:p>
-            <a:pPr indent="0" marL="0">
-              <a:spcAft>
-                <a:spcPts val="300"/>
-              </a:spcAft>
               <a:buNone/>
             </a:pPr>
             <a:r>
               <a:rPr lang="en-US" sz="950" dirty="0">
                 <a:solidFill>
-                  <a:srgbClr val="1C2A30"/>
-                </a:solidFill>
-                <a:latin typeface="Malgun Gothic" pitchFamily="34" charset="0"/>
-                <a:ea typeface="Malgun Gothic" pitchFamily="34" charset="-122"/>
-                <a:cs typeface="Malgun Gothic" pitchFamily="34" charset="-120"/>
-              </a:rPr>
-              <a:t>직접 등록한 말 0.61% vs 확장 0.32%, 절반만 눌림</a:t>
-            </a:r>
-            <a:endParaRPr lang="en-US" sz="1050" dirty="0"/>
-          </a:p>
-          <a:p>
-            <a:pPr indent="0" marL="0">
-              <a:spcAft>
-                <a:spcPts val="300"/>
-              </a:spcAft>
-              <a:buNone/>
-            </a:pPr>
-            <a:r>
-              <a:rPr lang="en-US" sz="850" dirty="0">
-                <a:solidFill>
-                  <a:srgbClr val="5D6B70"/>
-                </a:solidFill>
-                <a:latin typeface="Malgun Gothic" pitchFamily="34" charset="0"/>
-                <a:ea typeface="Malgun Gothic" pitchFamily="34" charset="-122"/>
-                <a:cs typeface="Malgun Gothic" pitchFamily="34" charset="-120"/>
-              </a:rPr>
-              <a:t>포괄 검색어를 빼고 비교, 같은 검정</a:t>
-            </a:r>
-            <a:endParaRPr lang="en-US" sz="1050" dirty="0"/>
+                  <a:srgbClr val="6B7A80"/>
+                </a:solidFill>
+                <a:latin typeface="Malgun Gothic" pitchFamily="34" charset="0"/>
+                <a:ea typeface="Malgun Gothic" pitchFamily="34" charset="-122"/>
+                <a:cs typeface="Malgun Gothic" pitchFamily="34" charset="-120"/>
+              </a:rPr>
+              <a:t>피셔 정확검정, 우연일 확률 0.1% 미만</a:t>
+            </a:r>
+            <a:endParaRPr lang="en-US" sz="950" dirty="0"/>
           </a:p>
         </p:txBody>
       </p:sp>
       <p:sp>
         <p:nvSpPr>
-          <p:cNvPr id="8" name="Shape 5"/>
-          <p:cNvSpPr/>
+          <p:cNvPr id="11" name="Text 8"/>
+          <p:cNvSpPr txBox="1"/>
           <p:nvPr/>
         </p:nvSpPr>
         <p:spPr>
           <a:xfrm>
-            <a:off x="5120640" y="2971800"/>
-            <a:ext cx="3657600" cy="1280160"/>
+            <a:off x="5669280" y="2286000"/>
+            <a:ext cx="3017520" cy="237744"/>
           </a:xfrm>
           <a:prstGeom prst="rect">
             <a:avLst/>
           </a:prstGeom>
-          <a:solidFill>
-            <a:srgbClr val="EEF4FB"/>
-          </a:solidFill>
-          <a:ln w="12700">
-            <a:solidFill>
-              <a:srgbClr val="EEF4FB"/>
-            </a:solidFill>
-            <a:prstDash val="solid"/>
-          </a:ln>
+          <a:noFill/>
+          <a:ln/>
         </p:spPr>
-      </p:sp>
-      <p:sp>
-        <p:nvSpPr>
-          <p:cNvPr id="9" name="Text 6"/>
+        <p:txBody>
+          <a:bodyPr wrap="square" lIns="0" tIns="0" rIns="0" bIns="0" rtlCol="0" anchor="ctr"/>
+          <a:lstStyle/>
+          <a:p>
+            <a:pPr indent="0" marL="0">
+              <a:buNone/>
+            </a:pPr>
+            <a:r>
+              <a:rPr lang="en-US" sz="1000" b="1" spc="100" kern="0" dirty="0">
+                <a:solidFill>
+                  <a:srgbClr val="6B7A80"/>
+                </a:solidFill>
+                <a:latin typeface="Malgun Gothic" pitchFamily="34" charset="0"/>
+                <a:ea typeface="Malgun Gothic" pitchFamily="34" charset="-122"/>
+                <a:cs typeface="Malgun Gothic" pitchFamily="34" charset="-120"/>
+              </a:rPr>
+              <a:t>확장검색 (네이버가 비슷한 말에 붙인 광고)</a:t>
+            </a:r>
+            <a:endParaRPr lang="en-US" sz="1000" dirty="0"/>
+          </a:p>
+        </p:txBody>
+      </p:sp>
+      <p:sp>
+        <p:nvSpPr>
+          <p:cNvPr id="12" name="Text 9"/>
           <p:cNvSpPr txBox="1"/>
           <p:nvPr/>
         </p:nvSpPr>
         <p:spPr>
           <a:xfrm>
-            <a:off x="5230368" y="3044952"/>
-            <a:ext cx="3474720" cy="1170432"/>
+            <a:off x="5669280" y="2523744"/>
+            <a:ext cx="3017520" cy="310896"/>
+          </a:xfrm>
+          <a:prstGeom prst="rect">
+            <a:avLst/>
+          </a:prstGeom>
+          <a:noFill/>
+          <a:ln/>
+        </p:spPr>
+        <p:txBody>
+          <a:bodyPr wrap="square" lIns="0" tIns="0" rIns="0" bIns="0" rtlCol="0" anchor="ctr"/>
+          <a:lstStyle/>
+          <a:p>
+            <a:pPr indent="0" marL="0">
+              <a:buNone/>
+            </a:pPr>
+            <a:r>
+              <a:rPr lang="en-US" sz="1600" b="1" dirty="0">
+                <a:solidFill>
+                  <a:srgbClr val="C8372D"/>
+                </a:solidFill>
+                <a:latin typeface="Malgun Gothic" pitchFamily="34" charset="0"/>
+                <a:ea typeface="Malgun Gothic" pitchFamily="34" charset="-122"/>
+                <a:cs typeface="Malgun Gothic" pitchFamily="34" charset="-120"/>
+              </a:rPr>
+              <a:t>0.32%</a:t>
+            </a:r>
+            <a:pPr indent="0" marL="0">
+              <a:buNone/>
+            </a:pPr>
+            <a:r>
+              <a:rPr lang="en-US" sz="1050" dirty="0">
+                <a:solidFill>
+                  <a:srgbClr val="1C2A30"/>
+                </a:solidFill>
+                <a:latin typeface="Malgun Gothic" pitchFamily="34" charset="0"/>
+                <a:ea typeface="Malgun Gothic" pitchFamily="34" charset="-122"/>
+                <a:cs typeface="Malgun Gothic" pitchFamily="34" charset="-120"/>
+              </a:rPr>
+              <a:t>  vs  직접 등록한 말 </a:t>
+            </a:r>
+            <a:pPr indent="0" marL="0">
+              <a:buNone/>
+            </a:pPr>
+            <a:r>
+              <a:rPr lang="en-US" sz="1600" b="1" dirty="0">
+                <a:solidFill>
+                  <a:srgbClr val="1C2A30"/>
+                </a:solidFill>
+                <a:latin typeface="Malgun Gothic" pitchFamily="34" charset="0"/>
+                <a:ea typeface="Malgun Gothic" pitchFamily="34" charset="-122"/>
+                <a:cs typeface="Malgun Gothic" pitchFamily="34" charset="-120"/>
+              </a:rPr>
+              <a:t>0.61%</a:t>
+            </a:r>
+            <a:endParaRPr lang="en-US" sz="1600" dirty="0"/>
+          </a:p>
+        </p:txBody>
+      </p:sp>
+      <p:sp>
+        <p:nvSpPr>
+          <p:cNvPr id="13" name="Text 10"/>
+          <p:cNvSpPr txBox="1"/>
+          <p:nvPr/>
+        </p:nvSpPr>
+        <p:spPr>
+          <a:xfrm>
+            <a:off x="5669280" y="2834640"/>
+            <a:ext cx="3017520" cy="201168"/>
           </a:xfrm>
           <a:prstGeom prst="rect">
             <a:avLst/>
@@ -5947,107 +6270,43 @@
           <a:lstStyle/>
           <a:p>
             <a:pPr indent="0" marL="0">
-              <a:spcAft>
-                <a:spcPts val="300"/>
-              </a:spcAft>
-              <a:buNone/>
-            </a:pPr>
-            <a:r>
-              <a:rPr lang="en-US" sz="1050" b="1" dirty="0">
-                <a:solidFill>
-                  <a:srgbClr val="2A78D6"/>
-                </a:solidFill>
-                <a:latin typeface="Malgun Gothic" pitchFamily="34" charset="0"/>
-                <a:ea typeface="Malgun Gothic" pitchFamily="34" charset="-122"/>
-                <a:cs typeface="Malgun Gothic" pitchFamily="34" charset="-120"/>
-              </a:rPr>
-              <a:t>할 일</a:t>
-            </a:r>
-            <a:endParaRPr lang="en-US" sz="1050" dirty="0"/>
-          </a:p>
-          <a:p>
-            <a:pPr marL="127000" indent="-127000">
-              <a:spcAft>
-                <a:spcPts val="300"/>
-              </a:spcAft>
-              <a:buSzPct val="100000"/>
-              <a:buChar char="•"/>
-            </a:pPr>
-            <a:r>
-              <a:rPr lang="en-US" sz="1000" dirty="0">
-                <a:solidFill>
-                  <a:srgbClr val="1C2A30"/>
-                </a:solidFill>
-                <a:latin typeface="Malgun Gothic" pitchFamily="34" charset="0"/>
-                <a:ea typeface="Malgun Gothic" pitchFamily="34" charset="-122"/>
-                <a:cs typeface="Malgun Gothic" pitchFamily="34" charset="-120"/>
-              </a:rPr>
-              <a:t>포괄 검색어 입찰 낮추기</a:t>
-            </a:r>
-            <a:endParaRPr lang="en-US" sz="1050" dirty="0"/>
-          </a:p>
-          <a:p>
-            <a:pPr marL="127000" indent="-127000">
-              <a:spcAft>
-                <a:spcPts val="300"/>
-              </a:spcAft>
-              <a:buSzPct val="100000"/>
-              <a:buChar char="•"/>
-            </a:pPr>
-            <a:r>
-              <a:rPr lang="en-US" sz="1000" dirty="0">
-                <a:solidFill>
-                  <a:srgbClr val="1C2A30"/>
-                </a:solidFill>
-                <a:latin typeface="Malgun Gothic" pitchFamily="34" charset="0"/>
-                <a:ea typeface="Malgun Gothic" pitchFamily="34" charset="-122"/>
-                <a:cs typeface="Malgun Gothic" pitchFamily="34" charset="-120"/>
-              </a:rPr>
-              <a:t>엉뚱한 검색어 막기(제외 키워드)</a:t>
-            </a:r>
-            <a:endParaRPr lang="en-US" sz="1050" dirty="0"/>
-          </a:p>
-          <a:p>
-            <a:pPr marL="127000" indent="-127000">
-              <a:spcAft>
-                <a:spcPts val="300"/>
-              </a:spcAft>
-              <a:buSzPct val="100000"/>
-              <a:buChar char="•"/>
-            </a:pPr>
-            <a:r>
-              <a:rPr lang="en-US" sz="1000" dirty="0">
-                <a:solidFill>
-                  <a:srgbClr val="1C2A30"/>
-                </a:solidFill>
-                <a:latin typeface="Malgun Gothic" pitchFamily="34" charset="0"/>
-                <a:ea typeface="Malgun Gothic" pitchFamily="34" charset="-122"/>
-                <a:cs typeface="Malgun Gothic" pitchFamily="34" charset="-120"/>
-              </a:rPr>
-              <a:t>광고 뒤 신청 추적 켜기</a:t>
-            </a:r>
-            <a:endParaRPr lang="en-US" sz="1050" dirty="0"/>
+              <a:buNone/>
+            </a:pPr>
+            <a:r>
+              <a:rPr lang="en-US" sz="950" dirty="0">
+                <a:solidFill>
+                  <a:srgbClr val="6B7A80"/>
+                </a:solidFill>
+                <a:latin typeface="Malgun Gothic" pitchFamily="34" charset="0"/>
+                <a:ea typeface="Malgun Gothic" pitchFamily="34" charset="-122"/>
+                <a:cs typeface="Malgun Gothic" pitchFamily="34" charset="-120"/>
+              </a:rPr>
+              <a:t>절반만 눌림. 포괄 검색어를 빼고 비교, 같은 검정</a:t>
+            </a:r>
+            <a:endParaRPr lang="en-US" sz="950" dirty="0"/>
           </a:p>
         </p:txBody>
       </p:sp>
       <p:sp>
         <p:nvSpPr>
-          <p:cNvPr id="10" name="Shape 7"/>
+          <p:cNvPr id="14" name="Shape 11"/>
           <p:cNvSpPr/>
           <p:nvPr/>
         </p:nvSpPr>
         <p:spPr>
           <a:xfrm>
-            <a:off x="365760" y="4352544"/>
-            <a:ext cx="8412480" cy="0"/>
+            <a:off x="5669280" y="3200400"/>
+            <a:ext cx="54864" cy="1097280"/>
           </a:xfrm>
-          <a:prstGeom prst="line">
+          <a:prstGeom prst="rect">
             <a:avLst/>
           </a:prstGeom>
-          <a:noFill/>
+          <a:solidFill>
+            <a:srgbClr val="2A78D6"/>
+          </a:solidFill>
           <a:ln w="12700">
             <a:solidFill>
-              <a:srgbClr val="DFE3E2"/>
+              <a:srgbClr val="2A78D6"/>
             </a:solidFill>
             <a:prstDash val="solid"/>
           </a:ln>
@@ -6055,14 +6314,53 @@
       </p:sp>
       <p:sp>
         <p:nvSpPr>
-          <p:cNvPr id="11" name="Text 8"/>
+          <p:cNvPr id="15" name="Text 12"/>
           <p:cNvSpPr txBox="1"/>
           <p:nvPr/>
         </p:nvSpPr>
         <p:spPr>
           <a:xfrm>
-            <a:off x="365760" y="4407408"/>
-            <a:ext cx="8046720" cy="411480"/>
+            <a:off x="5833872" y="3200400"/>
+            <a:ext cx="2852928" cy="237744"/>
+          </a:xfrm>
+          <a:prstGeom prst="rect">
+            <a:avLst/>
+          </a:prstGeom>
+          <a:noFill/>
+          <a:ln/>
+        </p:spPr>
+        <p:txBody>
+          <a:bodyPr wrap="square" lIns="0" tIns="0" rIns="0" bIns="0" rtlCol="0" anchor="ctr"/>
+          <a:lstStyle/>
+          <a:p>
+            <a:pPr indent="0" marL="0">
+              <a:buNone/>
+            </a:pPr>
+            <a:r>
+              <a:rPr lang="en-US" sz="1000" b="1" spc="100" kern="0" dirty="0">
+                <a:solidFill>
+                  <a:srgbClr val="2A78D6"/>
+                </a:solidFill>
+                <a:latin typeface="Malgun Gothic" pitchFamily="34" charset="0"/>
+                <a:ea typeface="Malgun Gothic" pitchFamily="34" charset="-122"/>
+                <a:cs typeface="Malgun Gothic" pitchFamily="34" charset="-120"/>
+              </a:rPr>
+              <a:t>할 일</a:t>
+            </a:r>
+            <a:endParaRPr lang="en-US" sz="1000" dirty="0"/>
+          </a:p>
+        </p:txBody>
+      </p:sp>
+      <p:sp>
+        <p:nvSpPr>
+          <p:cNvPr id="16" name="Text 13"/>
+          <p:cNvSpPr txBox="1"/>
+          <p:nvPr/>
+        </p:nvSpPr>
+        <p:spPr>
+          <a:xfrm>
+            <a:off x="5833872" y="3456432"/>
+            <a:ext cx="2852928" cy="822960"/>
           </a:xfrm>
           <a:prstGeom prst="rect">
             <a:avLst/>
@@ -6076,23 +6374,108 @@
           <a:p>
             <a:pPr indent="0" marL="0">
               <a:spcAft>
-                <a:spcPts val="100"/>
+                <a:spcPts val="400"/>
               </a:spcAft>
               <a:buNone/>
             </a:pPr>
             <a:r>
-              <a:rPr lang="en-US" sz="800" dirty="0">
-                <a:solidFill>
-                  <a:srgbClr val="5D6B70"/>
-                </a:solidFill>
-                <a:latin typeface="Malgun Gothic" pitchFamily="34" charset="0"/>
-                <a:ea typeface="Malgun Gothic" pitchFamily="34" charset="-122"/>
-                <a:cs typeface="Malgun Gothic" pitchFamily="34" charset="-120"/>
-              </a:rPr>
-              <a:t>출처: 네이버 광고 검색어 보고서 2026-07-06 ~ 10-03(90일), 27,277행(보고서 제목 줄 제거)</a:t>
-            </a:r>
-            <a:endParaRPr lang="en-US" sz="800" dirty="0"/>
-          </a:p>
+              <a:rPr lang="en-US" sz="1050" dirty="0">
+                <a:solidFill>
+                  <a:srgbClr val="1C2A30"/>
+                </a:solidFill>
+                <a:latin typeface="Malgun Gothic" pitchFamily="34" charset="0"/>
+                <a:ea typeface="Malgun Gothic" pitchFamily="34" charset="-122"/>
+                <a:cs typeface="Malgun Gothic" pitchFamily="34" charset="-120"/>
+              </a:rPr>
+              <a:t>포괄 검색어 입찰 낮추기</a:t>
+            </a:r>
+            <a:endParaRPr lang="en-US" sz="1050" dirty="0"/>
+          </a:p>
+          <a:p>
+            <a:pPr indent="0" marL="0">
+              <a:spcAft>
+                <a:spcPts val="400"/>
+              </a:spcAft>
+              <a:buNone/>
+            </a:pPr>
+            <a:r>
+              <a:rPr lang="en-US" sz="1050" dirty="0">
+                <a:solidFill>
+                  <a:srgbClr val="1C2A30"/>
+                </a:solidFill>
+                <a:latin typeface="Malgun Gothic" pitchFamily="34" charset="0"/>
+                <a:ea typeface="Malgun Gothic" pitchFamily="34" charset="-122"/>
+                <a:cs typeface="Malgun Gothic" pitchFamily="34" charset="-120"/>
+              </a:rPr>
+              <a:t>엉뚱한 검색어 막기(제외 키워드)</a:t>
+            </a:r>
+            <a:endParaRPr lang="en-US" sz="1050" dirty="0"/>
+          </a:p>
+          <a:p>
+            <a:pPr indent="0" marL="0">
+              <a:spcAft>
+                <a:spcPts val="400"/>
+              </a:spcAft>
+              <a:buNone/>
+            </a:pPr>
+            <a:r>
+              <a:rPr lang="en-US" sz="1050" dirty="0">
+                <a:solidFill>
+                  <a:srgbClr val="1C2A30"/>
+                </a:solidFill>
+                <a:latin typeface="Malgun Gothic" pitchFamily="34" charset="0"/>
+                <a:ea typeface="Malgun Gothic" pitchFamily="34" charset="-122"/>
+                <a:cs typeface="Malgun Gothic" pitchFamily="34" charset="-120"/>
+              </a:rPr>
+              <a:t>광고 뒤 신청 추적 켜기</a:t>
+            </a:r>
+            <a:endParaRPr lang="en-US" sz="1050" dirty="0"/>
+          </a:p>
+        </p:txBody>
+      </p:sp>
+      <p:sp>
+        <p:nvSpPr>
+          <p:cNvPr id="17" name="Shape 14"/>
+          <p:cNvSpPr/>
+          <p:nvPr/>
+        </p:nvSpPr>
+        <p:spPr>
+          <a:xfrm>
+            <a:off x="457200" y="4462272"/>
+            <a:ext cx="8229600" cy="0"/>
+          </a:xfrm>
+          <a:prstGeom prst="line">
+            <a:avLst/>
+          </a:prstGeom>
+          <a:noFill/>
+          <a:ln w="12700">
+            <a:solidFill>
+              <a:srgbClr val="E3E7E8"/>
+            </a:solidFill>
+            <a:prstDash val="solid"/>
+          </a:ln>
+        </p:spPr>
+      </p:sp>
+      <p:sp>
+        <p:nvSpPr>
+          <p:cNvPr id="18" name="Text 15"/>
+          <p:cNvSpPr txBox="1"/>
+          <p:nvPr/>
+        </p:nvSpPr>
+        <p:spPr>
+          <a:xfrm>
+            <a:off x="457200" y="4526280"/>
+            <a:ext cx="7955280" cy="411480"/>
+          </a:xfrm>
+          <a:prstGeom prst="rect">
+            <a:avLst/>
+          </a:prstGeom>
+          <a:noFill/>
+          <a:ln/>
+        </p:spPr>
+        <p:txBody>
+          <a:bodyPr wrap="square" lIns="0" tIns="0" rIns="0" bIns="0" rtlCol="0" anchor="t"/>
+          <a:lstStyle/>
           <a:p>
             <a:pPr indent="0" marL="0">
               <a:spcAft>
@@ -6101,9 +6484,29 @@
               <a:buNone/>
             </a:pPr>
             <a:r>
-              <a:rPr lang="en-US" sz="800" dirty="0">
-                <a:solidFill>
-                  <a:srgbClr val="5D6B70"/>
+              <a:rPr lang="en-US" sz="850" dirty="0">
+                <a:solidFill>
+                  <a:srgbClr val="6B7A80"/>
+                </a:solidFill>
+                <a:latin typeface="Malgun Gothic" pitchFamily="34" charset="0"/>
+                <a:ea typeface="Malgun Gothic" pitchFamily="34" charset="-122"/>
+                <a:cs typeface="Malgun Gothic" pitchFamily="34" charset="-120"/>
+              </a:rPr>
+              <a:t>출처: 네이버 광고 검색어 보고서 2026-07-06 ~ 10-03(90일), 27,277행(보고서 제목 줄 제거)</a:t>
+            </a:r>
+            <a:endParaRPr lang="en-US" sz="850" dirty="0"/>
+          </a:p>
+          <a:p>
+            <a:pPr indent="0" marL="0">
+              <a:spcAft>
+                <a:spcPts val="100"/>
+              </a:spcAft>
+              <a:buNone/>
+            </a:pPr>
+            <a:r>
+              <a:rPr lang="en-US" sz="850" dirty="0">
+                <a:solidFill>
+                  <a:srgbClr val="6B7A80"/>
                 </a:solidFill>
                 <a:latin typeface="Malgun Gothic" pitchFamily="34" charset="0"/>
                 <a:ea typeface="Malgun Gothic" pitchFamily="34" charset="-122"/>
@@ -6111,7 +6514,7 @@
               </a:rPr>
               <a:t>한계: 클릭 뒤 신청은 안 잡힘</a:t>
             </a:r>
-            <a:endParaRPr lang="en-US" sz="800" dirty="0"/>
+            <a:endParaRPr lang="en-US" sz="850" dirty="0"/>
           </a:p>
         </p:txBody>
       </p:sp>
@@ -6127,7 +6530,7 @@
         </p:nvSpPr>
         <p:spPr>
           <a:xfrm>
-            <a:off x="8458200" y="4864608"/>
+            <a:off x="8503920" y="4846320"/>
             <a:ext cx="365760" cy="201168"/>
           </a:xfrm>
           <a:prstGeom prst="rect">
@@ -6145,7 +6548,7 @@
             <a:lvl1pPr>
               <a:defRPr sz="800">
                 <a:solidFill>
-                  <a:srgbClr val="5D6B70"/>
+                  <a:srgbClr val="6B7A80"/>
                 </a:solidFill>
                 <a:latin typeface="Malgun Gothic"/>
                 <a:ea typeface="Malgun Gothic"/>
@@ -6196,8 +6599,8 @@
         </p:nvSpPr>
         <p:spPr>
           <a:xfrm>
-            <a:off x="365760" y="109728"/>
-            <a:ext cx="8412480" cy="201168"/>
+            <a:off x="457200" y="146304"/>
+            <a:ext cx="8229600" cy="201168"/>
           </a:xfrm>
           <a:prstGeom prst="rect">
             <a:avLst/>
@@ -6213,9 +6616,9 @@
               <a:buNone/>
             </a:pPr>
             <a:r>
-              <a:rPr lang="en-US" sz="900" dirty="0">
-                <a:solidFill>
-                  <a:srgbClr val="5D6B70"/>
+              <a:rPr lang="en-US" sz="950" dirty="0">
+                <a:solidFill>
+                  <a:srgbClr val="6B7A80"/>
                 </a:solidFill>
                 <a:latin typeface="Malgun Gothic" pitchFamily="34" charset="0"/>
                 <a:ea typeface="Malgun Gothic" pitchFamily="34" charset="-122"/>
@@ -6223,7 +6626,7 @@
               </a:rPr>
               <a:t>4 · 방문당 신청률 · 수임 전환율 · 수임당 매출</a:t>
             </a:r>
-            <a:endParaRPr lang="en-US" sz="900" dirty="0"/>
+            <a:endParaRPr lang="en-US" sz="950" dirty="0"/>
           </a:p>
         </p:txBody>
       </p:sp>
@@ -6235,8 +6638,8 @@
         </p:nvSpPr>
         <p:spPr>
           <a:xfrm>
-            <a:off x="365760" y="310896"/>
-            <a:ext cx="8412480" cy="384048"/>
+            <a:off x="457200" y="365760"/>
+            <a:ext cx="8229600" cy="457200"/>
           </a:xfrm>
           <a:prstGeom prst="rect">
             <a:avLst/>
@@ -6252,7 +6655,7 @@
               <a:buNone/>
             </a:pPr>
             <a:r>
-              <a:rPr lang="en-US" sz="1800" b="1" dirty="0">
+              <a:rPr lang="en-US" sz="2000" b="1" dirty="0">
                 <a:solidFill>
                   <a:srgbClr val="1C2A30"/>
                 </a:solidFill>
@@ -6262,7 +6665,7 @@
               </a:rPr>
               <a:t>신청률은 반토막, 신청 뒤는 기록조차 없다</a:t>
             </a:r>
-            <a:endParaRPr lang="en-US" sz="1800" dirty="0"/>
+            <a:endParaRPr lang="en-US" sz="2000" dirty="0"/>
           </a:p>
         </p:txBody>
       </p:sp>
@@ -6274,18 +6677,16 @@
         </p:nvSpPr>
         <p:spPr>
           <a:xfrm>
-            <a:off x="365760" y="804672"/>
-            <a:ext cx="2743200" cy="3493008"/>
+            <a:off x="3166110" y="914400"/>
+            <a:ext cx="0" cy="3383280"/>
           </a:xfrm>
-          <a:prstGeom prst="rect">
+          <a:prstGeom prst="line">
             <a:avLst/>
           </a:prstGeom>
-          <a:solidFill>
-            <a:srgbClr val="F3F5F4"/>
-          </a:solidFill>
+          <a:noFill/>
           <a:ln w="12700">
             <a:solidFill>
-              <a:srgbClr val="DFE3E2"/>
+              <a:srgbClr val="E3E7E8"/>
             </a:solidFill>
             <a:prstDash val="solid"/>
           </a:ln>
@@ -6293,14 +6694,37 @@
       </p:sp>
       <p:sp>
         <p:nvSpPr>
-          <p:cNvPr id="5" name="Text 3"/>
+          <p:cNvPr id="5" name="Shape 3"/>
+          <p:cNvSpPr/>
+          <p:nvPr/>
+        </p:nvSpPr>
+        <p:spPr>
+          <a:xfrm>
+            <a:off x="5977890" y="914400"/>
+            <a:ext cx="0" cy="3383280"/>
+          </a:xfrm>
+          <a:prstGeom prst="line">
+            <a:avLst/>
+          </a:prstGeom>
+          <a:noFill/>
+          <a:ln w="12700">
+            <a:solidFill>
+              <a:srgbClr val="E3E7E8"/>
+            </a:solidFill>
+            <a:prstDash val="solid"/>
+          </a:ln>
+        </p:spPr>
+      </p:sp>
+      <p:sp>
+        <p:nvSpPr>
+          <p:cNvPr id="6" name="Text 4"/>
           <p:cNvSpPr txBox="1"/>
           <p:nvPr/>
         </p:nvSpPr>
         <p:spPr>
           <a:xfrm>
-            <a:off x="457200" y="850392"/>
-            <a:ext cx="2560320" cy="237744"/>
+            <a:off x="457200" y="914400"/>
+            <a:ext cx="2606040" cy="237744"/>
           </a:xfrm>
           <a:prstGeom prst="rect">
             <a:avLst/>
@@ -6316,9 +6740,9 @@
               <a:buNone/>
             </a:pPr>
             <a:r>
-              <a:rPr lang="en-US" sz="1050" b="1" dirty="0">
-                <a:solidFill>
-                  <a:srgbClr val="1C2A30"/>
+              <a:rPr lang="en-US" sz="1000" b="1" spc="100" kern="0" dirty="0">
+                <a:solidFill>
+                  <a:srgbClr val="6B7A80"/>
                 </a:solidFill>
                 <a:latin typeface="Malgun Gothic" pitchFamily="34" charset="0"/>
                 <a:ea typeface="Malgun Gothic" pitchFamily="34" charset="-122"/>
@@ -6326,20 +6750,59 @@
               </a:rPr>
               <a:t>방문당 신청률</a:t>
             </a:r>
-            <a:endParaRPr lang="en-US" sz="1050" dirty="0"/>
+            <a:endParaRPr lang="en-US" sz="1000" dirty="0"/>
           </a:p>
         </p:txBody>
       </p:sp>
       <p:sp>
         <p:nvSpPr>
-          <p:cNvPr id="6" name="Text 4"/>
+          <p:cNvPr id="7" name="Text 5"/>
           <p:cNvSpPr txBox="1"/>
           <p:nvPr/>
         </p:nvSpPr>
         <p:spPr>
           <a:xfrm>
-            <a:off x="457200" y="1088136"/>
-            <a:ext cx="2560320" cy="182880"/>
+            <a:off x="457200" y="1152144"/>
+            <a:ext cx="2606040" cy="384048"/>
+          </a:xfrm>
+          <a:prstGeom prst="rect">
+            <a:avLst/>
+          </a:prstGeom>
+          <a:noFill/>
+          <a:ln/>
+        </p:spPr>
+        <p:txBody>
+          <a:bodyPr wrap="square" lIns="0" tIns="0" rIns="0" bIns="0" rtlCol="0" anchor="ctr"/>
+          <a:lstStyle/>
+          <a:p>
+            <a:pPr indent="0" marL="0">
+              <a:buNone/>
+            </a:pPr>
+            <a:r>
+              <a:rPr lang="en-US" sz="2000" b="1" dirty="0">
+                <a:solidFill>
+                  <a:srgbClr val="C8372D"/>
+                </a:solidFill>
+                <a:latin typeface="Malgun Gothic" pitchFamily="34" charset="0"/>
+                <a:ea typeface="Malgun Gothic" pitchFamily="34" charset="-122"/>
+                <a:cs typeface="Malgun Gothic" pitchFamily="34" charset="-120"/>
+              </a:rPr>
+              <a:t>4.6% → 2.1%</a:t>
+            </a:r>
+            <a:endParaRPr lang="en-US" sz="2000" dirty="0"/>
+          </a:p>
+        </p:txBody>
+      </p:sp>
+      <p:sp>
+        <p:nvSpPr>
+          <p:cNvPr id="8" name="Text 6"/>
+          <p:cNvSpPr txBox="1"/>
+          <p:nvPr/>
+        </p:nvSpPr>
+        <p:spPr>
+          <a:xfrm>
+            <a:off x="457200" y="1554480"/>
+            <a:ext cx="2606040" cy="201168"/>
           </a:xfrm>
           <a:prstGeom prst="rect">
             <a:avLst/>
@@ -6355,29 +6818,29 @@
               <a:buNone/>
             </a:pPr>
             <a:r>
-              <a:rPr lang="en-US" sz="800" dirty="0">
-                <a:solidFill>
-                  <a:srgbClr val="5D6B70"/>
-                </a:solidFill>
-                <a:latin typeface="Malgun Gothic" pitchFamily="34" charset="0"/>
-                <a:ea typeface="Malgun Gothic" pitchFamily="34" charset="-122"/>
-                <a:cs typeface="Malgun Gothic" pitchFamily="34" charset="-120"/>
-              </a:rPr>
-              <a:t>연도별 방문당 신청률(%)</a:t>
-            </a:r>
-            <a:endParaRPr lang="en-US" sz="800" dirty="0"/>
+              <a:rPr lang="en-US" sz="900" dirty="0">
+                <a:solidFill>
+                  <a:srgbClr val="6B7A80"/>
+                </a:solidFill>
+                <a:latin typeface="Malgun Gothic" pitchFamily="34" charset="0"/>
+                <a:ea typeface="Malgun Gothic" pitchFamily="34" charset="-122"/>
+                <a:cs typeface="Malgun Gothic" pitchFamily="34" charset="-120"/>
+              </a:rPr>
+              <a:t>2020 → 2022. 연도별 신청률(%)</a:t>
+            </a:r>
+            <a:endParaRPr lang="en-US" sz="900" dirty="0"/>
           </a:p>
         </p:txBody>
       </p:sp>
       <p:graphicFrame>
         <p:nvGraphicFramePr>
-          <p:cNvPr id="7" name="Chart 0" descr=""/>
+          <p:cNvPr id="9" name="Chart 0" descr=""/>
           <p:cNvGraphicFramePr/>
           <p:nvPr/>
         </p:nvGraphicFramePr>
         <p:xfrm>
-          <a:off x="411480" y="1261872"/>
-          <a:ext cx="2651760" cy="1783080"/>
+          <a:off x="411480" y="1783080"/>
+          <a:ext cx="2697480" cy="1600200"/>
         </p:xfrm>
         <a:graphic xmlns:a="http://schemas.openxmlformats.org/drawingml/2006/main">
           <a:graphicData uri="http://schemas.openxmlformats.org/drawingml/2006/chart">
@@ -6387,14 +6850,14 @@
       </p:graphicFrame>
       <p:sp>
         <p:nvSpPr>
-          <p:cNvPr id="8" name="Text 5"/>
+          <p:cNvPr id="10" name="Text 7"/>
           <p:cNvSpPr txBox="1"/>
           <p:nvPr/>
         </p:nvSpPr>
         <p:spPr>
           <a:xfrm>
-            <a:off x="457200" y="3090672"/>
-            <a:ext cx="2560320" cy="777240"/>
+            <a:off x="457200" y="3401568"/>
+            <a:ext cx="2606040" cy="566928"/>
           </a:xfrm>
           <a:prstGeom prst="rect">
             <a:avLst/>
@@ -6408,12 +6871,12 @@
           <a:p>
             <a:pPr indent="0" marL="0">
               <a:spcAft>
-                <a:spcPts val="300"/>
+                <a:spcPts val="400"/>
               </a:spcAft>
               <a:buNone/>
             </a:pPr>
             <a:r>
-              <a:rPr lang="en-US" sz="950" dirty="0">
+              <a:rPr lang="en-US" sz="1000" dirty="0">
                 <a:solidFill>
                   <a:srgbClr val="1C2A30"/>
                 </a:solidFill>
@@ -6421,19 +6884,19 @@
                 <a:ea typeface="Malgun Gothic" pitchFamily="34" charset="-122"/>
                 <a:cs typeface="Malgun Gothic" pitchFamily="34" charset="-120"/>
               </a:rPr>
-              <a:t>4.6%(2020) → 2.1%(2022). 당시 이유는 기록 없음</a:t>
-            </a:r>
-            <a:endParaRPr lang="en-US" sz="950" dirty="0"/>
+              <a:t>당시 이유는 기록 없음</a:t>
+            </a:r>
+            <a:endParaRPr lang="en-US" sz="1000" dirty="0"/>
           </a:p>
           <a:p>
             <a:pPr indent="0" marL="0">
               <a:spcAft>
-                <a:spcPts val="300"/>
+                <a:spcPts val="400"/>
               </a:spcAft>
               <a:buNone/>
             </a:pPr>
             <a:r>
-              <a:rPr lang="en-US" sz="950" dirty="0">
+              <a:rPr lang="en-US" sz="1000" dirty="0">
                 <a:solidFill>
                   <a:srgbClr val="1C2A30"/>
                 </a:solidFill>
@@ -6443,20 +6906,20 @@
               </a:rPr>
               <a:t>지금: 광고 방문 중앙값 18초, 27%가 5초 안에 나감</a:t>
             </a:r>
-            <a:endParaRPr lang="en-US" sz="950" dirty="0"/>
+            <a:endParaRPr lang="en-US" sz="1000" dirty="0"/>
           </a:p>
         </p:txBody>
       </p:sp>
       <p:sp>
         <p:nvSpPr>
-          <p:cNvPr id="9" name="Text 6"/>
+          <p:cNvPr id="11" name="Text 8"/>
           <p:cNvSpPr txBox="1"/>
           <p:nvPr/>
         </p:nvSpPr>
         <p:spPr>
           <a:xfrm>
-            <a:off x="457200" y="3895344"/>
-            <a:ext cx="2560320" cy="329184"/>
+            <a:off x="457200" y="4005072"/>
+            <a:ext cx="2606040" cy="274320"/>
           </a:xfrm>
           <a:prstGeom prst="rect">
             <a:avLst/>
@@ -6472,7 +6935,7 @@
               <a:buNone/>
             </a:pPr>
             <a:r>
-              <a:rPr lang="en-US" sz="1050" b="1" dirty="0">
+              <a:rPr lang="en-US" sz="1100" b="1" dirty="0">
                 <a:solidFill>
                   <a:srgbClr val="2A78D6"/>
                 </a:solidFill>
@@ -6482,45 +6945,20 @@
               </a:rPr>
               <a:t>→ 새 사이트</a:t>
             </a:r>
-            <a:endParaRPr lang="en-US" sz="1050" dirty="0"/>
+            <a:endParaRPr lang="en-US" sz="1100" dirty="0"/>
           </a:p>
         </p:txBody>
       </p:sp>
       <p:sp>
         <p:nvSpPr>
-          <p:cNvPr id="10" name="Shape 7"/>
-          <p:cNvSpPr/>
+          <p:cNvPr id="12" name="Text 9"/>
+          <p:cNvSpPr txBox="1"/>
           <p:nvPr/>
         </p:nvSpPr>
         <p:spPr>
           <a:xfrm>
-            <a:off x="3200400" y="804672"/>
-            <a:ext cx="2743200" cy="3493008"/>
-          </a:xfrm>
-          <a:prstGeom prst="rect">
-            <a:avLst/>
-          </a:prstGeom>
-          <a:solidFill>
-            <a:srgbClr val="F3F5F4"/>
-          </a:solidFill>
-          <a:ln w="12700">
-            <a:solidFill>
-              <a:srgbClr val="DFE3E2"/>
-            </a:solidFill>
-            <a:prstDash val="solid"/>
-          </a:ln>
-        </p:spPr>
-      </p:sp>
-      <p:sp>
-        <p:nvSpPr>
-          <p:cNvPr id="11" name="Text 8"/>
-          <p:cNvSpPr txBox="1"/>
-          <p:nvPr/>
-        </p:nvSpPr>
-        <p:spPr>
-          <a:xfrm>
-            <a:off x="3291840" y="850392"/>
-            <a:ext cx="2560320" cy="237744"/>
+            <a:off x="3268980" y="914400"/>
+            <a:ext cx="2606040" cy="237744"/>
           </a:xfrm>
           <a:prstGeom prst="rect">
             <a:avLst/>
@@ -6536,9 +6974,9 @@
               <a:buNone/>
             </a:pPr>
             <a:r>
-              <a:rPr lang="en-US" sz="1050" b="1" dirty="0">
-                <a:solidFill>
-                  <a:srgbClr val="1C2A30"/>
+              <a:rPr lang="en-US" sz="1000" b="1" spc="100" kern="0" dirty="0">
+                <a:solidFill>
+                  <a:srgbClr val="6B7A80"/>
                 </a:solidFill>
                 <a:latin typeface="Malgun Gothic" pitchFamily="34" charset="0"/>
                 <a:ea typeface="Malgun Gothic" pitchFamily="34" charset="-122"/>
@@ -6546,20 +6984,59 @@
               </a:rPr>
               <a:t>수임 전환율</a:t>
             </a:r>
-            <a:endParaRPr lang="en-US" sz="1050" dirty="0"/>
+            <a:endParaRPr lang="en-US" sz="1000" dirty="0"/>
           </a:p>
         </p:txBody>
       </p:sp>
       <p:sp>
         <p:nvSpPr>
-          <p:cNvPr id="12" name="Text 9"/>
+          <p:cNvPr id="13" name="Text 10"/>
           <p:cNvSpPr txBox="1"/>
           <p:nvPr/>
         </p:nvSpPr>
         <p:spPr>
           <a:xfrm>
-            <a:off x="3291840" y="1088136"/>
-            <a:ext cx="2560320" cy="182880"/>
+            <a:off x="3268980" y="1152144"/>
+            <a:ext cx="2606040" cy="384048"/>
+          </a:xfrm>
+          <a:prstGeom prst="rect">
+            <a:avLst/>
+          </a:prstGeom>
+          <a:noFill/>
+          <a:ln/>
+        </p:spPr>
+        <p:txBody>
+          <a:bodyPr wrap="square" lIns="0" tIns="0" rIns="0" bIns="0" rtlCol="0" anchor="ctr"/>
+          <a:lstStyle/>
+          <a:p>
+            <a:pPr indent="0" marL="0">
+              <a:buNone/>
+            </a:pPr>
+            <a:r>
+              <a:rPr lang="en-US" sz="2000" b="1" dirty="0">
+                <a:solidFill>
+                  <a:srgbClr val="C8372D"/>
+                </a:solidFill>
+                <a:latin typeface="Malgun Gothic" pitchFamily="34" charset="0"/>
+                <a:ea typeface="Malgun Gothic" pitchFamily="34" charset="-122"/>
+                <a:cs typeface="Malgun Gothic" pitchFamily="34" charset="-120"/>
+              </a:rPr>
+              <a:t>기록 없음</a:t>
+            </a:r>
+            <a:endParaRPr lang="en-US" sz="2000" dirty="0"/>
+          </a:p>
+        </p:txBody>
+      </p:sp>
+      <p:sp>
+        <p:nvSpPr>
+          <p:cNvPr id="14" name="Text 11"/>
+          <p:cNvSpPr txBox="1"/>
+          <p:nvPr/>
+        </p:nvSpPr>
+        <p:spPr>
+          <a:xfrm>
+            <a:off x="3268980" y="1554480"/>
+            <a:ext cx="2606040" cy="201168"/>
           </a:xfrm>
           <a:prstGeom prst="rect">
             <a:avLst/>
@@ -6575,29 +7052,29 @@
               <a:buNone/>
             </a:pPr>
             <a:r>
-              <a:rPr lang="en-US" sz="800" dirty="0">
-                <a:solidFill>
-                  <a:srgbClr val="5D6B70"/>
-                </a:solidFill>
-                <a:latin typeface="Malgun Gothic" pitchFamily="34" charset="0"/>
-                <a:ea typeface="Malgun Gothic" pitchFamily="34" charset="-122"/>
-                <a:cs typeface="Malgun Gothic" pitchFamily="34" charset="-120"/>
-              </a:rPr>
-              <a:t>기록 없음 → 대신 본 것: 신청 형태(건)</a:t>
-            </a:r>
-            <a:endParaRPr lang="en-US" sz="800" dirty="0"/>
+              <a:rPr lang="en-US" sz="900" dirty="0">
+                <a:solidFill>
+                  <a:srgbClr val="6B7A80"/>
+                </a:solidFill>
+                <a:latin typeface="Malgun Gothic" pitchFamily="34" charset="0"/>
+                <a:ea typeface="Malgun Gothic" pitchFamily="34" charset="-122"/>
+                <a:cs typeface="Malgun Gothic" pitchFamily="34" charset="-120"/>
+              </a:rPr>
+              <a:t>기억으로 10건 중 1~2건. 대신 본 것: 신청 형태(건)</a:t>
+            </a:r>
+            <a:endParaRPr lang="en-US" sz="900" dirty="0"/>
           </a:p>
         </p:txBody>
       </p:sp>
       <p:graphicFrame>
         <p:nvGraphicFramePr>
-          <p:cNvPr id="13" name="Chart 1" descr=""/>
+          <p:cNvPr id="15" name="Chart 1" descr=""/>
           <p:cNvGraphicFramePr/>
           <p:nvPr/>
         </p:nvGraphicFramePr>
         <p:xfrm>
-          <a:off x="3246120" y="1261872"/>
-          <a:ext cx="2651760" cy="1783080"/>
+          <a:off x="3223260" y="1783080"/>
+          <a:ext cx="2697480" cy="1600200"/>
         </p:xfrm>
         <a:graphic xmlns:a="http://schemas.openxmlformats.org/drawingml/2006/main">
           <a:graphicData uri="http://schemas.openxmlformats.org/drawingml/2006/chart">
@@ -6607,14 +7084,14 @@
       </p:graphicFrame>
       <p:sp>
         <p:nvSpPr>
-          <p:cNvPr id="14" name="Text 10"/>
+          <p:cNvPr id="16" name="Text 12"/>
           <p:cNvSpPr txBox="1"/>
           <p:nvPr/>
         </p:nvSpPr>
         <p:spPr>
           <a:xfrm>
-            <a:off x="3291840" y="3090672"/>
-            <a:ext cx="2560320" cy="777240"/>
+            <a:off x="3268980" y="3401568"/>
+            <a:ext cx="2606040" cy="566928"/>
           </a:xfrm>
           <a:prstGeom prst="rect">
             <a:avLst/>
@@ -6628,12 +7105,12 @@
           <a:p>
             <a:pPr indent="0" marL="0">
               <a:spcAft>
-                <a:spcPts val="300"/>
+                <a:spcPts val="400"/>
               </a:spcAft>
               <a:buNone/>
             </a:pPr>
             <a:r>
-              <a:rPr lang="en-US" sz="950" dirty="0">
+              <a:rPr lang="en-US" sz="1000" dirty="0">
                 <a:solidFill>
                   <a:srgbClr val="1C2A30"/>
                 </a:solidFill>
@@ -6641,19 +7118,19 @@
                 <a:ea typeface="Malgun Gothic" pitchFamily="34" charset="-122"/>
                 <a:cs typeface="Malgun Gothic" pitchFamily="34" charset="-120"/>
               </a:rPr>
-              <a:t>수임률은 기억으로 10건 중 1~2건</a:t>
-            </a:r>
-            <a:endParaRPr lang="en-US" sz="950" dirty="0"/>
+              <a:t>신청의 81%가 전화번호만 남김</a:t>
+            </a:r>
+            <a:endParaRPr lang="en-US" sz="1000" dirty="0"/>
           </a:p>
           <a:p>
             <a:pPr indent="0" marL="0">
               <a:spcAft>
-                <a:spcPts val="300"/>
+                <a:spcPts val="400"/>
               </a:spcAft>
               <a:buNone/>
             </a:pPr>
             <a:r>
-              <a:rPr lang="en-US" sz="950" dirty="0">
+              <a:rPr lang="en-US" sz="1000" dirty="0">
                 <a:solidFill>
                   <a:srgbClr val="1C2A30"/>
                 </a:solidFill>
@@ -6661,22 +7138,22 @@
                 <a:ea typeface="Malgun Gothic" pitchFamily="34" charset="-122"/>
                 <a:cs typeface="Malgun Gothic" pitchFamily="34" charset="-120"/>
               </a:rPr>
-              <a:t>신청의 81%가 전화번호만 남김</a:t>
-            </a:r>
-            <a:endParaRPr lang="en-US" sz="950" dirty="0"/>
+              <a:t>신청 뒤는 전화라 사이트 밖</a:t>
+            </a:r>
+            <a:endParaRPr lang="en-US" sz="1000" dirty="0"/>
           </a:p>
         </p:txBody>
       </p:sp>
       <p:sp>
         <p:nvSpPr>
-          <p:cNvPr id="15" name="Text 11"/>
+          <p:cNvPr id="17" name="Text 13"/>
           <p:cNvSpPr txBox="1"/>
           <p:nvPr/>
         </p:nvSpPr>
         <p:spPr>
           <a:xfrm>
-            <a:off x="3291840" y="3895344"/>
-            <a:ext cx="2560320" cy="329184"/>
+            <a:off x="3268980" y="4005072"/>
+            <a:ext cx="2606040" cy="274320"/>
           </a:xfrm>
           <a:prstGeom prst="rect">
             <a:avLst/>
@@ -6692,7 +7169,7 @@
               <a:buNone/>
             </a:pPr>
             <a:r>
-              <a:rPr lang="en-US" sz="1050" b="1" dirty="0">
+              <a:rPr lang="en-US" sz="1100" b="1" dirty="0">
                 <a:solidFill>
                   <a:srgbClr val="2A78D6"/>
                 </a:solidFill>
@@ -6702,45 +7179,20 @@
               </a:rPr>
               <a:t>→ 신청마다 수임 여부 기록</a:t>
             </a:r>
-            <a:endParaRPr lang="en-US" sz="1050" dirty="0"/>
+            <a:endParaRPr lang="en-US" sz="1100" dirty="0"/>
           </a:p>
         </p:txBody>
       </p:sp>
       <p:sp>
         <p:nvSpPr>
-          <p:cNvPr id="16" name="Shape 12"/>
-          <p:cNvSpPr/>
+          <p:cNvPr id="18" name="Text 14"/>
+          <p:cNvSpPr txBox="1"/>
           <p:nvPr/>
         </p:nvSpPr>
         <p:spPr>
           <a:xfrm>
-            <a:off x="6035040" y="804672"/>
-            <a:ext cx="2743200" cy="3493008"/>
-          </a:xfrm>
-          <a:prstGeom prst="rect">
-            <a:avLst/>
-          </a:prstGeom>
-          <a:solidFill>
-            <a:srgbClr val="F3F5F4"/>
-          </a:solidFill>
-          <a:ln w="12700">
-            <a:solidFill>
-              <a:srgbClr val="DFE3E2"/>
-            </a:solidFill>
-            <a:prstDash val="solid"/>
-          </a:ln>
-        </p:spPr>
-      </p:sp>
-      <p:sp>
-        <p:nvSpPr>
-          <p:cNvPr id="17" name="Text 13"/>
-          <p:cNvSpPr txBox="1"/>
-          <p:nvPr/>
-        </p:nvSpPr>
-        <p:spPr>
-          <a:xfrm>
-            <a:off x="6126480" y="850392"/>
-            <a:ext cx="2560320" cy="237744"/>
+            <a:off x="6080760" y="914400"/>
+            <a:ext cx="2606040" cy="237744"/>
           </a:xfrm>
           <a:prstGeom prst="rect">
             <a:avLst/>
@@ -6756,9 +7208,9 @@
               <a:buNone/>
             </a:pPr>
             <a:r>
-              <a:rPr lang="en-US" sz="1050" b="1" dirty="0">
-                <a:solidFill>
-                  <a:srgbClr val="1C2A30"/>
+              <a:rPr lang="en-US" sz="1000" b="1" spc="100" kern="0" dirty="0">
+                <a:solidFill>
+                  <a:srgbClr val="6B7A80"/>
                 </a:solidFill>
                 <a:latin typeface="Malgun Gothic" pitchFamily="34" charset="0"/>
                 <a:ea typeface="Malgun Gothic" pitchFamily="34" charset="-122"/>
@@ -6766,20 +7218,59 @@
               </a:rPr>
               <a:t>수임당 매출</a:t>
             </a:r>
-            <a:endParaRPr lang="en-US" sz="1050" dirty="0"/>
+            <a:endParaRPr lang="en-US" sz="1000" dirty="0"/>
           </a:p>
         </p:txBody>
       </p:sp>
       <p:sp>
         <p:nvSpPr>
-          <p:cNvPr id="18" name="Text 14"/>
+          <p:cNvPr id="19" name="Text 15"/>
           <p:cNvSpPr txBox="1"/>
           <p:nvPr/>
         </p:nvSpPr>
         <p:spPr>
           <a:xfrm>
-            <a:off x="6126480" y="1088136"/>
-            <a:ext cx="2560320" cy="182880"/>
+            <a:off x="6080760" y="1152144"/>
+            <a:ext cx="2606040" cy="384048"/>
+          </a:xfrm>
+          <a:prstGeom prst="rect">
+            <a:avLst/>
+          </a:prstGeom>
+          <a:noFill/>
+          <a:ln/>
+        </p:spPr>
+        <p:txBody>
+          <a:bodyPr wrap="square" lIns="0" tIns="0" rIns="0" bIns="0" rtlCol="0" anchor="ctr"/>
+          <a:lstStyle/>
+          <a:p>
+            <a:pPr indent="0" marL="0">
+              <a:buNone/>
+            </a:pPr>
+            <a:r>
+              <a:rPr lang="en-US" sz="2000" b="1" dirty="0">
+                <a:solidFill>
+                  <a:srgbClr val="C8372D"/>
+                </a:solidFill>
+                <a:latin typeface="Malgun Gothic" pitchFamily="34" charset="0"/>
+                <a:ea typeface="Malgun Gothic" pitchFamily="34" charset="-122"/>
+                <a:cs typeface="Malgun Gothic" pitchFamily="34" charset="-120"/>
+              </a:rPr>
+              <a:t>분쟁은 출원의 7배</a:t>
+            </a:r>
+            <a:endParaRPr lang="en-US" sz="2000" dirty="0"/>
+          </a:p>
+        </p:txBody>
+      </p:sp>
+      <p:sp>
+        <p:nvSpPr>
+          <p:cNvPr id="20" name="Text 16"/>
+          <p:cNvSpPr txBox="1"/>
+          <p:nvPr/>
+        </p:nvSpPr>
+        <p:spPr>
+          <a:xfrm>
+            <a:off x="6080760" y="1554480"/>
+            <a:ext cx="2606040" cy="201168"/>
           </a:xfrm>
           <a:prstGeom prst="rect">
             <a:avLst/>
@@ -6795,9 +7286,9 @@
               <a:buNone/>
             </a:pPr>
             <a:r>
-              <a:rPr lang="en-US" sz="800" dirty="0">
-                <a:solidFill>
-                  <a:srgbClr val="5D6B70"/>
+              <a:rPr lang="en-US" sz="900" dirty="0">
+                <a:solidFill>
+                  <a:srgbClr val="6B7A80"/>
                 </a:solidFill>
                 <a:latin typeface="Malgun Gothic" pitchFamily="34" charset="0"/>
                 <a:ea typeface="Malgun Gothic" pitchFamily="34" charset="-122"/>
@@ -6805,20 +7296,20 @@
               </a:rPr>
               <a:t>건당 수수료</a:t>
             </a:r>
-            <a:endParaRPr lang="en-US" sz="800" dirty="0"/>
+            <a:endParaRPr lang="en-US" sz="900" dirty="0"/>
           </a:p>
         </p:txBody>
       </p:sp>
       <p:sp>
         <p:nvSpPr>
-          <p:cNvPr id="19" name="Text 15"/>
+          <p:cNvPr id="21" name="Text 17"/>
           <p:cNvSpPr txBox="1"/>
           <p:nvPr/>
         </p:nvSpPr>
         <p:spPr>
           <a:xfrm>
-            <a:off x="6172200" y="1307592"/>
-            <a:ext cx="2468880" cy="1691640"/>
+            <a:off x="6172200" y="1828800"/>
+            <a:ext cx="2423160" cy="1508760"/>
           </a:xfrm>
           <a:prstGeom prst="rect">
             <a:avLst/>
@@ -6865,15 +7356,32 @@
               <a:buNone/>
             </a:pPr>
             <a:r>
+              <a:rPr lang="en-US" sz="950" dirty="0">
+                <a:solidFill>
+                  <a:srgbClr val="6B7A80"/>
+                </a:solidFill>
+                <a:latin typeface="Malgun Gothic" pitchFamily="34" charset="0"/>
+                <a:ea typeface="Malgun Gothic" pitchFamily="34" charset="-122"/>
+                <a:cs typeface="Malgun Gothic" pitchFamily="34" charset="-120"/>
+              </a:rPr>
+              <a:t>신청의 94% (2,021건)</a:t>
+            </a:r>
+            <a:endParaRPr lang="en-US" sz="1100" dirty="0"/>
+          </a:p>
+          <a:p>
+            <a:pPr indent="0" marL="0">
+              <a:buNone/>
+            </a:pPr>
+            <a:r>
               <a:rPr lang="en-US" sz="900" dirty="0">
                 <a:solidFill>
-                  <a:srgbClr val="5D6B70"/>
-                </a:solidFill>
-                <a:latin typeface="Malgun Gothic" pitchFamily="34" charset="0"/>
-                <a:ea typeface="Malgun Gothic" pitchFamily="34" charset="-122"/>
-                <a:cs typeface="Malgun Gothic" pitchFamily="34" charset="-120"/>
-              </a:rPr>
-              <a:t>신청의 94% (2,021건)</a:t>
+                  <a:srgbClr val="1C2A30"/>
+                </a:solidFill>
+                <a:latin typeface="Malgun Gothic" pitchFamily="34" charset="0"/>
+                <a:ea typeface="Malgun Gothic" pitchFamily="34" charset="-122"/>
+                <a:cs typeface="Malgun Gothic" pitchFamily="34" charset="-120"/>
+              </a:rPr>
+              <a:t> </a:t>
             </a:r>
             <a:endParaRPr lang="en-US" sz="1100" dirty="0"/>
           </a:p>
@@ -6882,7 +7390,7 @@
               <a:buNone/>
             </a:pPr>
             <a:r>
-              <a:rPr lang="en-US" sz="800" dirty="0">
+              <a:rPr lang="en-US" sz="1100" dirty="0">
                 <a:solidFill>
                   <a:srgbClr val="1C2A30"/>
                 </a:solidFill>
@@ -6890,7 +7398,21 @@
                 <a:ea typeface="Malgun Gothic" pitchFamily="34" charset="-122"/>
                 <a:cs typeface="Malgun Gothic" pitchFamily="34" charset="-120"/>
               </a:rPr>
-              <a:t> </a:t>
+              <a:t>분쟁  </a:t>
+            </a:r>
+            <a:pPr indent="0" marL="0">
+              <a:buNone/>
+            </a:pPr>
+            <a:r>
+              <a:rPr lang="en-US" sz="1800" b="1" dirty="0">
+                <a:solidFill>
+                  <a:srgbClr val="C8372D"/>
+                </a:solidFill>
+                <a:latin typeface="Malgun Gothic" pitchFamily="34" charset="0"/>
+                <a:ea typeface="Malgun Gothic" pitchFamily="34" charset="-122"/>
+                <a:cs typeface="Malgun Gothic" pitchFamily="34" charset="-120"/>
+              </a:rPr>
+              <a:t>약 2,000만 원</a:t>
             </a:r>
             <a:endParaRPr lang="en-US" sz="1100" dirty="0"/>
           </a:p>
@@ -6899,61 +7421,30 @@
               <a:buNone/>
             </a:pPr>
             <a:r>
-              <a:rPr lang="en-US" sz="1100" dirty="0">
-                <a:solidFill>
-                  <a:srgbClr val="1C2A30"/>
-                </a:solidFill>
-                <a:latin typeface="Malgun Gothic" pitchFamily="34" charset="0"/>
-                <a:ea typeface="Malgun Gothic" pitchFamily="34" charset="-122"/>
-                <a:cs typeface="Malgun Gothic" pitchFamily="34" charset="-120"/>
-              </a:rPr>
-              <a:t>분쟁  </a:t>
-            </a:r>
-            <a:pPr indent="0" marL="0">
-              <a:buNone/>
-            </a:pPr>
-            <a:r>
-              <a:rPr lang="en-US" sz="1800" b="1" dirty="0">
-                <a:solidFill>
-                  <a:srgbClr val="C8372D"/>
-                </a:solidFill>
-                <a:latin typeface="Malgun Gothic" pitchFamily="34" charset="0"/>
-                <a:ea typeface="Malgun Gothic" pitchFamily="34" charset="-122"/>
-                <a:cs typeface="Malgun Gothic" pitchFamily="34" charset="-120"/>
-              </a:rPr>
-              <a:t>약 2,000만 원</a:t>
+              <a:rPr lang="en-US" sz="950" dirty="0">
+                <a:solidFill>
+                  <a:srgbClr val="6B7A80"/>
+                </a:solidFill>
+                <a:latin typeface="Malgun Gothic" pitchFamily="34" charset="0"/>
+                <a:ea typeface="Malgun Gothic" pitchFamily="34" charset="-122"/>
+                <a:cs typeface="Malgun Gothic" pitchFamily="34" charset="-120"/>
+              </a:rPr>
+              <a:t>신청의 6% (120건)</a:t>
             </a:r>
             <a:endParaRPr lang="en-US" sz="1100" dirty="0"/>
           </a:p>
-          <a:p>
-            <a:pPr indent="0" marL="0">
-              <a:buNone/>
-            </a:pPr>
-            <a:r>
-              <a:rPr lang="en-US" sz="900" dirty="0">
-                <a:solidFill>
-                  <a:srgbClr val="5D6B70"/>
-                </a:solidFill>
-                <a:latin typeface="Malgun Gothic" pitchFamily="34" charset="0"/>
-                <a:ea typeface="Malgun Gothic" pitchFamily="34" charset="-122"/>
-                <a:cs typeface="Malgun Gothic" pitchFamily="34" charset="-120"/>
-              </a:rPr>
-              <a:t>신청의 6% (120건)</a:t>
-            </a:r>
-            <a:endParaRPr lang="en-US" sz="1100" dirty="0"/>
-          </a:p>
         </p:txBody>
       </p:sp>
       <p:sp>
         <p:nvSpPr>
-          <p:cNvPr id="20" name="Text 16"/>
+          <p:cNvPr id="22" name="Text 18"/>
           <p:cNvSpPr txBox="1"/>
           <p:nvPr/>
         </p:nvSpPr>
         <p:spPr>
           <a:xfrm>
-            <a:off x="6126480" y="3090672"/>
-            <a:ext cx="2560320" cy="777240"/>
+            <a:off x="6080760" y="3401568"/>
+            <a:ext cx="2606040" cy="566928"/>
           </a:xfrm>
           <a:prstGeom prst="rect">
             <a:avLst/>
@@ -6967,12 +7458,12 @@
           <a:p>
             <a:pPr indent="0" marL="0">
               <a:spcAft>
-                <a:spcPts val="300"/>
+                <a:spcPts val="400"/>
               </a:spcAft>
               <a:buNone/>
             </a:pPr>
             <a:r>
-              <a:rPr lang="en-US" sz="950" dirty="0">
+              <a:rPr lang="en-US" sz="1000" dirty="0">
                 <a:solidFill>
                   <a:srgbClr val="1C2A30"/>
                 </a:solidFill>
@@ -6980,22 +7471,42 @@
                 <a:ea typeface="Malgun Gothic" pitchFamily="34" charset="-122"/>
                 <a:cs typeface="Malgun Gothic" pitchFamily="34" charset="-120"/>
               </a:rPr>
-              <a:t>분쟁은 건수는 적지만 건당 수수료가 7배</a:t>
-            </a:r>
-            <a:endParaRPr lang="en-US" sz="950" dirty="0"/>
+              <a:t>건수는 적지만 한 건이 7배</a:t>
+            </a:r>
+            <a:endParaRPr lang="en-US" sz="1000" dirty="0"/>
+          </a:p>
+          <a:p>
+            <a:pPr indent="0" marL="0">
+              <a:spcAft>
+                <a:spcPts val="400"/>
+              </a:spcAft>
+              <a:buNone/>
+            </a:pPr>
+            <a:r>
+              <a:rPr lang="en-US" sz="1000" dirty="0">
+                <a:solidFill>
+                  <a:srgbClr val="1C2A30"/>
+                </a:solidFill>
+                <a:latin typeface="Malgun Gothic" pitchFamily="34" charset="0"/>
+                <a:ea typeface="Malgun Gothic" pitchFamily="34" charset="-122"/>
+                <a:cs typeface="Malgun Gothic" pitchFamily="34" charset="-120"/>
+              </a:rPr>
+              <a:t>분쟁 검색자가 가장 짧게 머묾</a:t>
+            </a:r>
+            <a:endParaRPr lang="en-US" sz="1000" dirty="0"/>
           </a:p>
         </p:txBody>
       </p:sp>
       <p:sp>
         <p:nvSpPr>
-          <p:cNvPr id="21" name="Text 17"/>
+          <p:cNvPr id="23" name="Text 19"/>
           <p:cNvSpPr txBox="1"/>
           <p:nvPr/>
         </p:nvSpPr>
         <p:spPr>
           <a:xfrm>
-            <a:off x="6126480" y="3895344"/>
-            <a:ext cx="2560320" cy="329184"/>
+            <a:off x="6080760" y="4005072"/>
+            <a:ext cx="2606040" cy="274320"/>
           </a:xfrm>
           <a:prstGeom prst="rect">
             <a:avLst/>
@@ -7011,7 +7522,7 @@
               <a:buNone/>
             </a:pPr>
             <a:r>
-              <a:rPr lang="en-US" sz="1050" b="1" dirty="0">
+              <a:rPr lang="en-US" sz="1100" b="1" dirty="0">
                 <a:solidFill>
                   <a:srgbClr val="2A78D6"/>
                 </a:solidFill>
@@ -7021,20 +7532,20 @@
               </a:rPr>
               <a:t>→ 분쟁 전용 페이지</a:t>
             </a:r>
-            <a:endParaRPr lang="en-US" sz="1050" dirty="0"/>
+            <a:endParaRPr lang="en-US" sz="1100" dirty="0"/>
           </a:p>
         </p:txBody>
       </p:sp>
       <p:sp>
         <p:nvSpPr>
-          <p:cNvPr id="22" name="Shape 18"/>
+          <p:cNvPr id="24" name="Shape 20"/>
           <p:cNvSpPr/>
           <p:nvPr/>
         </p:nvSpPr>
         <p:spPr>
           <a:xfrm>
-            <a:off x="365760" y="4352544"/>
-            <a:ext cx="8412480" cy="0"/>
+            <a:off x="457200" y="4462272"/>
+            <a:ext cx="8229600" cy="0"/>
           </a:xfrm>
           <a:prstGeom prst="line">
             <a:avLst/>
@@ -7042,7 +7553,7 @@
           <a:noFill/>
           <a:ln w="12700">
             <a:solidFill>
-              <a:srgbClr val="DFE3E2"/>
+              <a:srgbClr val="E3E7E8"/>
             </a:solidFill>
             <a:prstDash val="solid"/>
           </a:ln>
@@ -7050,14 +7561,14 @@
       </p:sp>
       <p:sp>
         <p:nvSpPr>
-          <p:cNvPr id="23" name="Text 19"/>
+          <p:cNvPr id="25" name="Text 21"/>
           <p:cNvSpPr txBox="1"/>
           <p:nvPr/>
         </p:nvSpPr>
         <p:spPr>
           <a:xfrm>
-            <a:off x="365760" y="4407408"/>
-            <a:ext cx="8046720" cy="411480"/>
+            <a:off x="457200" y="4526280"/>
+            <a:ext cx="7955280" cy="411480"/>
           </a:xfrm>
           <a:prstGeom prst="rect">
             <a:avLst/>
@@ -7076,9 +7587,9 @@
               <a:buNone/>
             </a:pPr>
             <a:r>
-              <a:rPr lang="en-US" sz="800" dirty="0">
-                <a:solidFill>
-                  <a:srgbClr val="5D6B70"/>
+              <a:rPr lang="en-US" sz="850" dirty="0">
+                <a:solidFill>
+                  <a:srgbClr val="6B7A80"/>
                 </a:solidFill>
                 <a:latin typeface="Malgun Gothic" pitchFamily="34" charset="0"/>
                 <a:ea typeface="Malgun Gothic" pitchFamily="34" charset="-122"/>
@@ -7086,7 +7597,7 @@
               </a:rPr>
               <a:t>출처: 신청 알림 문자, 신청 게시판 2,141건(스팸·잘못된 번호 33건 제외), 서버 방문(슬라이드 2), GA4 광고 유입 120세션(2026-09), 수수료는 사무소 수가</a:t>
             </a:r>
-            <a:endParaRPr lang="en-US" sz="800" dirty="0"/>
+            <a:endParaRPr lang="en-US" sz="850" dirty="0"/>
           </a:p>
           <a:p>
             <a:pPr indent="0" marL="0">
@@ -7096,9 +7607,9 @@
               <a:buNone/>
             </a:pPr>
             <a:r>
-              <a:rPr lang="en-US" sz="800" dirty="0">
-                <a:solidFill>
-                  <a:srgbClr val="5D6B70"/>
+              <a:rPr lang="en-US" sz="850" dirty="0">
+                <a:solidFill>
+                  <a:srgbClr val="6B7A80"/>
                 </a:solidFill>
                 <a:latin typeface="Malgun Gothic" pitchFamily="34" charset="0"/>
                 <a:ea typeface="Malgun Gothic" pitchFamily="34" charset="-122"/>
@@ -7106,7 +7617,7 @@
               </a:rPr>
               <a:t>*2025·26은 방문 추정 신뢰 낮음(회색)</a:t>
             </a:r>
-            <a:endParaRPr lang="en-US" sz="800" dirty="0"/>
+            <a:endParaRPr lang="en-US" sz="850" dirty="0"/>
           </a:p>
         </p:txBody>
       </p:sp>
@@ -7122,7 +7633,7 @@
         </p:nvSpPr>
         <p:spPr>
           <a:xfrm>
-            <a:off x="8458200" y="4864608"/>
+            <a:off x="8503920" y="4846320"/>
             <a:ext cx="365760" cy="201168"/>
           </a:xfrm>
           <a:prstGeom prst="rect">
@@ -7140,7 +7651,7 @@
             <a:lvl1pPr>
               <a:defRPr sz="800">
                 <a:solidFill>
-                  <a:srgbClr val="5D6B70"/>
+                  <a:srgbClr val="6B7A80"/>
                 </a:solidFill>
                 <a:latin typeface="Malgun Gothic"/>
                 <a:ea typeface="Malgun Gothic"/>
@@ -7191,8 +7702,8 @@
         </p:nvSpPr>
         <p:spPr>
           <a:xfrm>
-            <a:off x="365760" y="109728"/>
-            <a:ext cx="8412480" cy="201168"/>
+            <a:off x="457200" y="146304"/>
+            <a:ext cx="8229600" cy="201168"/>
           </a:xfrm>
           <a:prstGeom prst="rect">
             <a:avLst/>
@@ -7208,9 +7719,9 @@
               <a:buNone/>
             </a:pPr>
             <a:r>
-              <a:rPr lang="en-US" sz="900" dirty="0">
-                <a:solidFill>
-                  <a:srgbClr val="5D6B70"/>
+              <a:rPr lang="en-US" sz="950" dirty="0">
+                <a:solidFill>
+                  <a:srgbClr val="6B7A80"/>
                 </a:solidFill>
                 <a:latin typeface="Malgun Gothic" pitchFamily="34" charset="0"/>
                 <a:ea typeface="Malgun Gothic" pitchFamily="34" charset="-122"/>
@@ -7218,7 +7729,7 @@
               </a:rPr>
               <a:t>5 · 해야 할 것과 한계</a:t>
             </a:r>
-            <a:endParaRPr lang="en-US" sz="900" dirty="0"/>
+            <a:endParaRPr lang="en-US" sz="950" dirty="0"/>
           </a:p>
         </p:txBody>
       </p:sp>
@@ -7230,8 +7741,8 @@
         </p:nvSpPr>
         <p:spPr>
           <a:xfrm>
-            <a:off x="365760" y="310896"/>
-            <a:ext cx="8412480" cy="384048"/>
+            <a:off x="457200" y="365760"/>
+            <a:ext cx="8229600" cy="457200"/>
           </a:xfrm>
           <a:prstGeom prst="rect">
             <a:avLst/>
@@ -7247,7 +7758,7 @@
               <a:buNone/>
             </a:pPr>
             <a:r>
-              <a:rPr lang="en-US" sz="1800" b="1" dirty="0">
+              <a:rPr lang="en-US" sz="2000" b="1" dirty="0">
                 <a:solidFill>
                   <a:srgbClr val="1C2A30"/>
                 </a:solidFill>
@@ -7257,7 +7768,7 @@
               </a:rPr>
               <a:t>새 사이트로 신청률을 4.6%까지 — 연 150건</a:t>
             </a:r>
-            <a:endParaRPr lang="en-US" sz="1800" dirty="0"/>
+            <a:endParaRPr lang="en-US" sz="2000" dirty="0"/>
           </a:p>
         </p:txBody>
       </p:sp>
@@ -7276,8 +7787,8 @@
           </p:nvPr>
         </p:nvGraphicFramePr>
         <p:xfrm>
-          <a:off x="365760" y="822960"/>
-          <a:ext cx="8412480" cy="914400"/>
+          <a:off x="457200" y="914400"/>
+          <a:ext cx="8229600" cy="914400"/>
         </p:xfrm>
         <a:graphic>
           <a:graphicData uri="http://schemas.openxmlformats.org/drawingml/2006/table">
@@ -7286,8 +7797,8 @@
               <a:tblGrid>
                 <a:gridCol w="640080"/>
                 <a:gridCol w="822960"/>
-                <a:gridCol w="4663440"/>
-                <a:gridCol w="2286000"/>
+                <a:gridCol w="4572000"/>
+                <a:gridCol w="2194560"/>
               </a:tblGrid>
               <a:tr h="283464">
                 <a:tc>
@@ -7299,9 +7810,9 @@
                         <a:buNone/>
                       </a:pPr>
                       <a:r>
-                        <a:rPr lang="en-US" sz="1000" b="1" dirty="0">
+                        <a:rPr lang="en-US" sz="1050" b="1" dirty="0">
                           <a:solidFill>
-                            <a:srgbClr val="1C2A30"/>
+                            <a:srgbClr val="6B7A80"/>
                           </a:solidFill>
                           <a:latin typeface="Malgun Gothic" pitchFamily="34" charset="0"/>
                           <a:ea typeface="Malgun Gothic" pitchFamily="34" charset="-122"/>
@@ -7309,318 +7820,26 @@
                         </a:rPr>
                         <a:t>근거</a:t>
                       </a:r>
-                      <a:endParaRPr lang="en-US" sz="1000" dirty="0">
+                      <a:endParaRPr lang="en-US" sz="1050" dirty="0">
                         <a:latin typeface="Malgun Gothic" charset="0"/>
                         <a:ea typeface="Malgun Gothic" charset="0"/>
                         <a:cs typeface="Malgun Gothic" charset="0"/>
                       </a:endParaRPr>
                     </a:p>
                   </a:txBody>
-                  <a:tcPr marL="76200" marR="76200" marT="38100" marB="38100" anchor="ctr">
-                    <a:lnL w="6350" cap="flat" cmpd="sng" algn="ctr">
-                      <a:solidFill>
-                        <a:srgbClr val="DFE3E2"/>
-                      </a:solidFill>
-                      <a:prstDash val="solid"/>
-                      <a:round/>
-                      <a:headEnd type="none" w="med" len="med"/>
-                      <a:tailEnd type="none" w="med" len="med"/>
+                  <a:tcPr marL="76200" marR="76200" marT="25400" marB="25400" anchor="ctr">
+                    <a:lnL w="0" cap="flat" cmpd="sng" algn="ctr">
+                      <a:noFill/>
                     </a:lnL>
-                    <a:lnR w="6350" cap="flat" cmpd="sng" algn="ctr">
-                      <a:solidFill>
-                        <a:srgbClr val="DFE3E2"/>
-                      </a:solidFill>
-                      <a:prstDash val="solid"/>
-                      <a:round/>
-                      <a:headEnd type="none" w="med" len="med"/>
-                      <a:tailEnd type="none" w="med" len="med"/>
+                    <a:lnR w="0" cap="flat" cmpd="sng" algn="ctr">
+                      <a:noFill/>
                     </a:lnR>
-                    <a:lnT w="6350" cap="flat" cmpd="sng" algn="ctr">
-                      <a:solidFill>
-                        <a:srgbClr val="DFE3E2"/>
-                      </a:solidFill>
-                      <a:prstDash val="solid"/>
-                      <a:round/>
-                      <a:headEnd type="none" w="med" len="med"/>
-                      <a:tailEnd type="none" w="med" len="med"/>
+                    <a:lnT w="0" cap="flat" cmpd="sng" algn="ctr">
+                      <a:noFill/>
                     </a:lnT>
                     <a:lnB w="6350" cap="flat" cmpd="sng" algn="ctr">
                       <a:solidFill>
-                        <a:srgbClr val="DFE3E2"/>
-                      </a:solidFill>
-                      <a:prstDash val="solid"/>
-                      <a:round/>
-                      <a:headEnd type="none" w="med" len="med"/>
-                      <a:tailEnd type="none" w="med" len="med"/>
-                    </a:lnB>
-                    <a:solidFill>
-                      <a:srgbClr val="F3F5F4"/>
-                    </a:solidFill>
-                  </a:tcPr>
-                </a:tc>
-                <a:tc>
-                  <a:txBody>
-                    <a:bodyPr/>
-                    <a:lstStyle/>
-                    <a:p>
-                      <a:pPr indent="0" marL="0">
-                        <a:buNone/>
-                      </a:pPr>
-                      <a:r>
-                        <a:rPr lang="en-US" sz="1000" b="1" dirty="0">
-                          <a:solidFill>
-                            <a:srgbClr val="1C2A30"/>
-                          </a:solidFill>
-                          <a:latin typeface="Malgun Gothic" pitchFamily="34" charset="0"/>
-                          <a:ea typeface="Malgun Gothic" pitchFamily="34" charset="-122"/>
-                          <a:cs typeface="Malgun Gothic" pitchFamily="34" charset="-120"/>
-                        </a:rPr>
-                        <a:t>누가</a:t>
-                      </a:r>
-                      <a:endParaRPr lang="en-US" sz="1000" dirty="0">
-                        <a:latin typeface="Malgun Gothic" charset="0"/>
-                        <a:ea typeface="Malgun Gothic" charset="0"/>
-                        <a:cs typeface="Malgun Gothic" charset="0"/>
-                      </a:endParaRPr>
-                    </a:p>
-                  </a:txBody>
-                  <a:tcPr marL="76200" marR="76200" marT="38100" marB="38100" anchor="ctr">
-                    <a:lnL w="6350" cap="flat" cmpd="sng" algn="ctr">
-                      <a:solidFill>
-                        <a:srgbClr val="DFE3E2"/>
-                      </a:solidFill>
-                      <a:prstDash val="solid"/>
-                      <a:round/>
-                      <a:headEnd type="none" w="med" len="med"/>
-                      <a:tailEnd type="none" w="med" len="med"/>
-                    </a:lnL>
-                    <a:lnR w="6350" cap="flat" cmpd="sng" algn="ctr">
-                      <a:solidFill>
-                        <a:srgbClr val="DFE3E2"/>
-                      </a:solidFill>
-                      <a:prstDash val="solid"/>
-                      <a:round/>
-                      <a:headEnd type="none" w="med" len="med"/>
-                      <a:tailEnd type="none" w="med" len="med"/>
-                    </a:lnR>
-                    <a:lnT w="6350" cap="flat" cmpd="sng" algn="ctr">
-                      <a:solidFill>
-                        <a:srgbClr val="DFE3E2"/>
-                      </a:solidFill>
-                      <a:prstDash val="solid"/>
-                      <a:round/>
-                      <a:headEnd type="none" w="med" len="med"/>
-                      <a:tailEnd type="none" w="med" len="med"/>
-                    </a:lnT>
-                    <a:lnB w="6350" cap="flat" cmpd="sng" algn="ctr">
-                      <a:solidFill>
-                        <a:srgbClr val="DFE3E2"/>
-                      </a:solidFill>
-                      <a:prstDash val="solid"/>
-                      <a:round/>
-                      <a:headEnd type="none" w="med" len="med"/>
-                      <a:tailEnd type="none" w="med" len="med"/>
-                    </a:lnB>
-                    <a:solidFill>
-                      <a:srgbClr val="F3F5F4"/>
-                    </a:solidFill>
-                  </a:tcPr>
-                </a:tc>
-                <a:tc>
-                  <a:txBody>
-                    <a:bodyPr/>
-                    <a:lstStyle/>
-                    <a:p>
-                      <a:pPr indent="0" marL="0">
-                        <a:buNone/>
-                      </a:pPr>
-                      <a:r>
-                        <a:rPr lang="en-US" sz="1000" b="1" dirty="0">
-                          <a:solidFill>
-                            <a:srgbClr val="1C2A30"/>
-                          </a:solidFill>
-                          <a:latin typeface="Malgun Gothic" pitchFamily="34" charset="0"/>
-                          <a:ea typeface="Malgun Gothic" pitchFamily="34" charset="-122"/>
-                          <a:cs typeface="Malgun Gothic" pitchFamily="34" charset="-120"/>
-                        </a:rPr>
-                        <a:t>무엇을</a:t>
-                      </a:r>
-                      <a:endParaRPr lang="en-US" sz="1000" dirty="0">
-                        <a:latin typeface="Malgun Gothic" charset="0"/>
-                        <a:ea typeface="Malgun Gothic" charset="0"/>
-                        <a:cs typeface="Malgun Gothic" charset="0"/>
-                      </a:endParaRPr>
-                    </a:p>
-                  </a:txBody>
-                  <a:tcPr marL="76200" marR="76200" marT="38100" marB="38100" anchor="ctr">
-                    <a:lnL w="6350" cap="flat" cmpd="sng" algn="ctr">
-                      <a:solidFill>
-                        <a:srgbClr val="DFE3E2"/>
-                      </a:solidFill>
-                      <a:prstDash val="solid"/>
-                      <a:round/>
-                      <a:headEnd type="none" w="med" len="med"/>
-                      <a:tailEnd type="none" w="med" len="med"/>
-                    </a:lnL>
-                    <a:lnR w="6350" cap="flat" cmpd="sng" algn="ctr">
-                      <a:solidFill>
-                        <a:srgbClr val="DFE3E2"/>
-                      </a:solidFill>
-                      <a:prstDash val="solid"/>
-                      <a:round/>
-                      <a:headEnd type="none" w="med" len="med"/>
-                      <a:tailEnd type="none" w="med" len="med"/>
-                    </a:lnR>
-                    <a:lnT w="6350" cap="flat" cmpd="sng" algn="ctr">
-                      <a:solidFill>
-                        <a:srgbClr val="DFE3E2"/>
-                      </a:solidFill>
-                      <a:prstDash val="solid"/>
-                      <a:round/>
-                      <a:headEnd type="none" w="med" len="med"/>
-                      <a:tailEnd type="none" w="med" len="med"/>
-                    </a:lnT>
-                    <a:lnB w="6350" cap="flat" cmpd="sng" algn="ctr">
-                      <a:solidFill>
-                        <a:srgbClr val="DFE3E2"/>
-                      </a:solidFill>
-                      <a:prstDash val="solid"/>
-                      <a:round/>
-                      <a:headEnd type="none" w="med" len="med"/>
-                      <a:tailEnd type="none" w="med" len="med"/>
-                    </a:lnB>
-                    <a:solidFill>
-                      <a:srgbClr val="F3F5F4"/>
-                    </a:solidFill>
-                  </a:tcPr>
-                </a:tc>
-                <a:tc>
-                  <a:txBody>
-                    <a:bodyPr/>
-                    <a:lstStyle/>
-                    <a:p>
-                      <a:pPr indent="0" marL="0">
-                        <a:buNone/>
-                      </a:pPr>
-                      <a:r>
-                        <a:rPr lang="en-US" sz="1000" b="1" dirty="0">
-                          <a:solidFill>
-                            <a:srgbClr val="1C2A30"/>
-                          </a:solidFill>
-                          <a:latin typeface="Malgun Gothic" pitchFamily="34" charset="0"/>
-                          <a:ea typeface="Malgun Gothic" pitchFamily="34" charset="-122"/>
-                          <a:cs typeface="Malgun Gothic" pitchFamily="34" charset="-120"/>
-                        </a:rPr>
-                        <a:t>움직이는 지표</a:t>
-                      </a:r>
-                      <a:endParaRPr lang="en-US" sz="1000" dirty="0">
-                        <a:latin typeface="Malgun Gothic" charset="0"/>
-                        <a:ea typeface="Malgun Gothic" charset="0"/>
-                        <a:cs typeface="Malgun Gothic" charset="0"/>
-                      </a:endParaRPr>
-                    </a:p>
-                  </a:txBody>
-                  <a:tcPr marL="76200" marR="76200" marT="38100" marB="38100" anchor="ctr">
-                    <a:lnL w="6350" cap="flat" cmpd="sng" algn="ctr">
-                      <a:solidFill>
-                        <a:srgbClr val="DFE3E2"/>
-                      </a:solidFill>
-                      <a:prstDash val="solid"/>
-                      <a:round/>
-                      <a:headEnd type="none" w="med" len="med"/>
-                      <a:tailEnd type="none" w="med" len="med"/>
-                    </a:lnL>
-                    <a:lnR w="6350" cap="flat" cmpd="sng" algn="ctr">
-                      <a:solidFill>
-                        <a:srgbClr val="DFE3E2"/>
-                      </a:solidFill>
-                      <a:prstDash val="solid"/>
-                      <a:round/>
-                      <a:headEnd type="none" w="med" len="med"/>
-                      <a:tailEnd type="none" w="med" len="med"/>
-                    </a:lnR>
-                    <a:lnT w="6350" cap="flat" cmpd="sng" algn="ctr">
-                      <a:solidFill>
-                        <a:srgbClr val="DFE3E2"/>
-                      </a:solidFill>
-                      <a:prstDash val="solid"/>
-                      <a:round/>
-                      <a:headEnd type="none" w="med" len="med"/>
-                      <a:tailEnd type="none" w="med" len="med"/>
-                    </a:lnT>
-                    <a:lnB w="6350" cap="flat" cmpd="sng" algn="ctr">
-                      <a:solidFill>
-                        <a:srgbClr val="DFE3E2"/>
-                      </a:solidFill>
-                      <a:prstDash val="solid"/>
-                      <a:round/>
-                      <a:headEnd type="none" w="med" len="med"/>
-                      <a:tailEnd type="none" w="med" len="med"/>
-                    </a:lnB>
-                    <a:solidFill>
-                      <a:srgbClr val="F3F5F4"/>
-                    </a:solidFill>
-                  </a:tcPr>
-                </a:tc>
-              </a:tr>
-              <a:tr h="283464">
-                <a:tc>
-                  <a:txBody>
-                    <a:bodyPr/>
-                    <a:lstStyle/>
-                    <a:p>
-                      <a:pPr indent="0" marL="0">
-                        <a:buNone/>
-                      </a:pPr>
-                      <a:r>
-                        <a:rPr lang="en-US" sz="1000" dirty="0">
-                          <a:solidFill>
-                            <a:srgbClr val="1C2A30"/>
-                          </a:solidFill>
-                          <a:latin typeface="Malgun Gothic" pitchFamily="34" charset="0"/>
-                          <a:ea typeface="Malgun Gothic" pitchFamily="34" charset="-122"/>
-                          <a:cs typeface="Malgun Gothic" pitchFamily="34" charset="-120"/>
-                        </a:rPr>
-                        <a:t>2·4장</a:t>
-                      </a:r>
-                      <a:endParaRPr lang="en-US" sz="1000" dirty="0">
-                        <a:latin typeface="Malgun Gothic" charset="0"/>
-                        <a:ea typeface="Malgun Gothic" charset="0"/>
-                        <a:cs typeface="Malgun Gothic" charset="0"/>
-                      </a:endParaRPr>
-                    </a:p>
-                  </a:txBody>
-                  <a:tcPr marL="76200" marR="76200" marT="38100" marB="38100" anchor="ctr">
-                    <a:lnL w="6350" cap="flat" cmpd="sng" algn="ctr">
-                      <a:solidFill>
-                        <a:srgbClr val="DFE3E2"/>
-                      </a:solidFill>
-                      <a:prstDash val="solid"/>
-                      <a:round/>
-                      <a:headEnd type="none" w="med" len="med"/>
-                      <a:tailEnd type="none" w="med" len="med"/>
-                    </a:lnL>
-                    <a:lnR w="6350" cap="flat" cmpd="sng" algn="ctr">
-                      <a:solidFill>
-                        <a:srgbClr val="DFE3E2"/>
-                      </a:solidFill>
-                      <a:prstDash val="solid"/>
-                      <a:round/>
-                      <a:headEnd type="none" w="med" len="med"/>
-                      <a:tailEnd type="none" w="med" len="med"/>
-                    </a:lnR>
-                    <a:lnT w="6350" cap="flat" cmpd="sng" algn="ctr">
-                      <a:solidFill>
-                        <a:srgbClr val="DFE3E2"/>
-                      </a:solidFill>
-                      <a:prstDash val="solid"/>
-                      <a:round/>
-                      <a:headEnd type="none" w="med" len="med"/>
-                      <a:tailEnd type="none" w="med" len="med"/>
-                    </a:lnT>
-                    <a:lnB w="6350" cap="flat" cmpd="sng" algn="ctr">
-                      <a:solidFill>
-                        <a:srgbClr val="DFE3E2"/>
+                        <a:srgbClr val="E3E7E8"/>
                       </a:solidFill>
                       <a:prstDash val="solid"/>
                       <a:round/>
@@ -7641,54 +7860,36 @@
                         <a:buNone/>
                       </a:pPr>
                       <a:r>
-                        <a:rPr lang="en-US" sz="1000" dirty="0">
+                        <a:rPr lang="en-US" sz="1050" b="1" dirty="0">
                           <a:solidFill>
-                            <a:srgbClr val="1C2A30"/>
+                            <a:srgbClr val="6B7A80"/>
                           </a:solidFill>
                           <a:latin typeface="Malgun Gothic" pitchFamily="34" charset="0"/>
                           <a:ea typeface="Malgun Gothic" pitchFamily="34" charset="-122"/>
                           <a:cs typeface="Malgun Gothic" pitchFamily="34" charset="-120"/>
                         </a:rPr>
-                        <a:t>나(개발)</a:t>
+                        <a:t>누가</a:t>
                       </a:r>
-                      <a:endParaRPr lang="en-US" sz="1000" dirty="0">
+                      <a:endParaRPr lang="en-US" sz="1050" dirty="0">
                         <a:latin typeface="Malgun Gothic" charset="0"/>
                         <a:ea typeface="Malgun Gothic" charset="0"/>
                         <a:cs typeface="Malgun Gothic" charset="0"/>
                       </a:endParaRPr>
                     </a:p>
                   </a:txBody>
-                  <a:tcPr marL="76200" marR="76200" marT="38100" marB="38100" anchor="ctr">
-                    <a:lnL w="6350" cap="flat" cmpd="sng" algn="ctr">
-                      <a:solidFill>
-                        <a:srgbClr val="DFE3E2"/>
-                      </a:solidFill>
-                      <a:prstDash val="solid"/>
-                      <a:round/>
-                      <a:headEnd type="none" w="med" len="med"/>
-                      <a:tailEnd type="none" w="med" len="med"/>
+                  <a:tcPr marL="76200" marR="76200" marT="25400" marB="25400" anchor="ctr">
+                    <a:lnL w="0" cap="flat" cmpd="sng" algn="ctr">
+                      <a:noFill/>
                     </a:lnL>
-                    <a:lnR w="6350" cap="flat" cmpd="sng" algn="ctr">
-                      <a:solidFill>
-                        <a:srgbClr val="DFE3E2"/>
-                      </a:solidFill>
-                      <a:prstDash val="solid"/>
-                      <a:round/>
-                      <a:headEnd type="none" w="med" len="med"/>
-                      <a:tailEnd type="none" w="med" len="med"/>
+                    <a:lnR w="0" cap="flat" cmpd="sng" algn="ctr">
+                      <a:noFill/>
                     </a:lnR>
-                    <a:lnT w="6350" cap="flat" cmpd="sng" algn="ctr">
-                      <a:solidFill>
-                        <a:srgbClr val="DFE3E2"/>
-                      </a:solidFill>
-                      <a:prstDash val="solid"/>
-                      <a:round/>
-                      <a:headEnd type="none" w="med" len="med"/>
-                      <a:tailEnd type="none" w="med" len="med"/>
+                    <a:lnT w="0" cap="flat" cmpd="sng" algn="ctr">
+                      <a:noFill/>
                     </a:lnT>
                     <a:lnB w="6350" cap="flat" cmpd="sng" algn="ctr">
                       <a:solidFill>
-                        <a:srgbClr val="DFE3E2"/>
+                        <a:srgbClr val="E3E7E8"/>
                       </a:solidFill>
                       <a:prstDash val="solid"/>
                       <a:round/>
@@ -7709,54 +7910,36 @@
                         <a:buNone/>
                       </a:pPr>
                       <a:r>
-                        <a:rPr lang="en-US" sz="1000" dirty="0">
+                        <a:rPr lang="en-US" sz="1050" b="1" dirty="0">
                           <a:solidFill>
-                            <a:srgbClr val="1C2A30"/>
+                            <a:srgbClr val="6B7A80"/>
                           </a:solidFill>
                           <a:latin typeface="Malgun Gothic" pitchFamily="34" charset="0"/>
                           <a:ea typeface="Malgun Gothic" pitchFamily="34" charset="-122"/>
                           <a:cs typeface="Malgun Gothic" pitchFamily="34" charset="-120"/>
                         </a:rPr>
-                        <a:t>새 사이트(글자·첫 화면 신청 칸·분쟁 페이지) 완성, 변리사 확인 후 공개</a:t>
+                        <a:t>무엇을</a:t>
                       </a:r>
-                      <a:endParaRPr lang="en-US" sz="1000" dirty="0">
+                      <a:endParaRPr lang="en-US" sz="1050" dirty="0">
                         <a:latin typeface="Malgun Gothic" charset="0"/>
                         <a:ea typeface="Malgun Gothic" charset="0"/>
                         <a:cs typeface="Malgun Gothic" charset="0"/>
                       </a:endParaRPr>
                     </a:p>
                   </a:txBody>
-                  <a:tcPr marL="76200" marR="76200" marT="38100" marB="38100" anchor="ctr">
-                    <a:lnL w="6350" cap="flat" cmpd="sng" algn="ctr">
-                      <a:solidFill>
-                        <a:srgbClr val="DFE3E2"/>
-                      </a:solidFill>
-                      <a:prstDash val="solid"/>
-                      <a:round/>
-                      <a:headEnd type="none" w="med" len="med"/>
-                      <a:tailEnd type="none" w="med" len="med"/>
+                  <a:tcPr marL="76200" marR="76200" marT="25400" marB="25400" anchor="ctr">
+                    <a:lnL w="0" cap="flat" cmpd="sng" algn="ctr">
+                      <a:noFill/>
                     </a:lnL>
-                    <a:lnR w="6350" cap="flat" cmpd="sng" algn="ctr">
-                      <a:solidFill>
-                        <a:srgbClr val="DFE3E2"/>
-                      </a:solidFill>
-                      <a:prstDash val="solid"/>
-                      <a:round/>
-                      <a:headEnd type="none" w="med" len="med"/>
-                      <a:tailEnd type="none" w="med" len="med"/>
+                    <a:lnR w="0" cap="flat" cmpd="sng" algn="ctr">
+                      <a:noFill/>
                     </a:lnR>
-                    <a:lnT w="6350" cap="flat" cmpd="sng" algn="ctr">
-                      <a:solidFill>
-                        <a:srgbClr val="DFE3E2"/>
-                      </a:solidFill>
-                      <a:prstDash val="solid"/>
-                      <a:round/>
-                      <a:headEnd type="none" w="med" len="med"/>
-                      <a:tailEnd type="none" w="med" len="med"/>
+                    <a:lnT w="0" cap="flat" cmpd="sng" algn="ctr">
+                      <a:noFill/>
                     </a:lnT>
                     <a:lnB w="6350" cap="flat" cmpd="sng" algn="ctr">
                       <a:solidFill>
-                        <a:srgbClr val="DFE3E2"/>
+                        <a:srgbClr val="E3E7E8"/>
                       </a:solidFill>
                       <a:prstDash val="solid"/>
                       <a:round/>
@@ -7777,54 +7960,36 @@
                         <a:buNone/>
                       </a:pPr>
                       <a:r>
-                        <a:rPr lang="en-US" sz="1000" dirty="0">
+                        <a:rPr lang="en-US" sz="1050" b="1" dirty="0">
                           <a:solidFill>
-                            <a:srgbClr val="1C2A30"/>
+                            <a:srgbClr val="6B7A80"/>
                           </a:solidFill>
                           <a:latin typeface="Malgun Gothic" pitchFamily="34" charset="0"/>
                           <a:ea typeface="Malgun Gothic" pitchFamily="34" charset="-122"/>
                           <a:cs typeface="Malgun Gothic" pitchFamily="34" charset="-120"/>
                         </a:rPr>
-                        <a:t>방문당 신청률, 네이버 검색 방문</a:t>
+                        <a:t>움직이는 지표</a:t>
                       </a:r>
-                      <a:endParaRPr lang="en-US" sz="1000" dirty="0">
+                      <a:endParaRPr lang="en-US" sz="1050" dirty="0">
                         <a:latin typeface="Malgun Gothic" charset="0"/>
                         <a:ea typeface="Malgun Gothic" charset="0"/>
                         <a:cs typeface="Malgun Gothic" charset="0"/>
                       </a:endParaRPr>
                     </a:p>
                   </a:txBody>
-                  <a:tcPr marL="76200" marR="76200" marT="38100" marB="38100" anchor="ctr">
-                    <a:lnL w="6350" cap="flat" cmpd="sng" algn="ctr">
-                      <a:solidFill>
-                        <a:srgbClr val="DFE3E2"/>
-                      </a:solidFill>
-                      <a:prstDash val="solid"/>
-                      <a:round/>
-                      <a:headEnd type="none" w="med" len="med"/>
-                      <a:tailEnd type="none" w="med" len="med"/>
+                  <a:tcPr marL="76200" marR="76200" marT="25400" marB="25400" anchor="ctr">
+                    <a:lnL w="0" cap="flat" cmpd="sng" algn="ctr">
+                      <a:noFill/>
                     </a:lnL>
-                    <a:lnR w="6350" cap="flat" cmpd="sng" algn="ctr">
-                      <a:solidFill>
-                        <a:srgbClr val="DFE3E2"/>
-                      </a:solidFill>
-                      <a:prstDash val="solid"/>
-                      <a:round/>
-                      <a:headEnd type="none" w="med" len="med"/>
-                      <a:tailEnd type="none" w="med" len="med"/>
+                    <a:lnR w="0" cap="flat" cmpd="sng" algn="ctr">
+                      <a:noFill/>
                     </a:lnR>
-                    <a:lnT w="6350" cap="flat" cmpd="sng" algn="ctr">
-                      <a:solidFill>
-                        <a:srgbClr val="DFE3E2"/>
-                      </a:solidFill>
-                      <a:prstDash val="solid"/>
-                      <a:round/>
-                      <a:headEnd type="none" w="med" len="med"/>
-                      <a:tailEnd type="none" w="med" len="med"/>
+                    <a:lnT w="0" cap="flat" cmpd="sng" algn="ctr">
+                      <a:noFill/>
                     </a:lnT>
                     <a:lnB w="6350" cap="flat" cmpd="sng" algn="ctr">
                       <a:solidFill>
-                        <a:srgbClr val="DFE3E2"/>
+                        <a:srgbClr val="E3E7E8"/>
                       </a:solidFill>
                       <a:prstDash val="solid"/>
                       <a:round/>
@@ -7847,7 +8012,7 @@
                         <a:buNone/>
                       </a:pPr>
                       <a:r>
-                        <a:rPr lang="en-US" sz="1000" dirty="0">
+                        <a:rPr lang="en-US" sz="1050" dirty="0">
                           <a:solidFill>
                             <a:srgbClr val="1C2A30"/>
                           </a:solidFill>
@@ -7855,46 +8020,28 @@
                           <a:ea typeface="Malgun Gothic" pitchFamily="34" charset="-122"/>
                           <a:cs typeface="Malgun Gothic" pitchFamily="34" charset="-120"/>
                         </a:rPr>
-                        <a:t>3장</a:t>
+                        <a:t>2·4장</a:t>
                       </a:r>
-                      <a:endParaRPr lang="en-US" sz="1000" dirty="0">
+                      <a:endParaRPr lang="en-US" sz="1050" dirty="0">
                         <a:latin typeface="Malgun Gothic" charset="0"/>
                         <a:ea typeface="Malgun Gothic" charset="0"/>
                         <a:cs typeface="Malgun Gothic" charset="0"/>
                       </a:endParaRPr>
                     </a:p>
                   </a:txBody>
-                  <a:tcPr marL="76200" marR="76200" marT="38100" marB="38100" anchor="ctr">
-                    <a:lnL w="6350" cap="flat" cmpd="sng" algn="ctr">
-                      <a:solidFill>
-                        <a:srgbClr val="DFE3E2"/>
-                      </a:solidFill>
-                      <a:prstDash val="solid"/>
-                      <a:round/>
-                      <a:headEnd type="none" w="med" len="med"/>
-                      <a:tailEnd type="none" w="med" len="med"/>
+                  <a:tcPr marL="76200" marR="76200" marT="25400" marB="25400" anchor="ctr">
+                    <a:lnL w="0" cap="flat" cmpd="sng" algn="ctr">
+                      <a:noFill/>
                     </a:lnL>
-                    <a:lnR w="6350" cap="flat" cmpd="sng" algn="ctr">
-                      <a:solidFill>
-                        <a:srgbClr val="DFE3E2"/>
-                      </a:solidFill>
-                      <a:prstDash val="solid"/>
-                      <a:round/>
-                      <a:headEnd type="none" w="med" len="med"/>
-                      <a:tailEnd type="none" w="med" len="med"/>
+                    <a:lnR w="0" cap="flat" cmpd="sng" algn="ctr">
+                      <a:noFill/>
                     </a:lnR>
-                    <a:lnT w="6350" cap="flat" cmpd="sng" algn="ctr">
-                      <a:solidFill>
-                        <a:srgbClr val="DFE3E2"/>
-                      </a:solidFill>
-                      <a:prstDash val="solid"/>
-                      <a:round/>
-                      <a:headEnd type="none" w="med" len="med"/>
-                      <a:tailEnd type="none" w="med" len="med"/>
+                    <a:lnT w="0" cap="flat" cmpd="sng" algn="ctr">
+                      <a:noFill/>
                     </a:lnT>
                     <a:lnB w="6350" cap="flat" cmpd="sng" algn="ctr">
                       <a:solidFill>
-                        <a:srgbClr val="DFE3E2"/>
+                        <a:srgbClr val="E3E7E8"/>
                       </a:solidFill>
                       <a:prstDash val="solid"/>
                       <a:round/>
@@ -7915,7 +8062,7 @@
                         <a:buNone/>
                       </a:pPr>
                       <a:r>
-                        <a:rPr lang="en-US" sz="1000" dirty="0">
+                        <a:rPr lang="en-US" sz="1050" dirty="0">
                           <a:solidFill>
                             <a:srgbClr val="1C2A30"/>
                           </a:solidFill>
@@ -7923,46 +8070,28 @@
                           <a:ea typeface="Malgun Gothic" pitchFamily="34" charset="-122"/>
                           <a:cs typeface="Malgun Gothic" pitchFamily="34" charset="-120"/>
                         </a:rPr>
-                        <a:t>변리사</a:t>
+                        <a:t>나(개발)</a:t>
                       </a:r>
-                      <a:endParaRPr lang="en-US" sz="1000" dirty="0">
+                      <a:endParaRPr lang="en-US" sz="1050" dirty="0">
                         <a:latin typeface="Malgun Gothic" charset="0"/>
                         <a:ea typeface="Malgun Gothic" charset="0"/>
                         <a:cs typeface="Malgun Gothic" charset="0"/>
                       </a:endParaRPr>
                     </a:p>
                   </a:txBody>
-                  <a:tcPr marL="76200" marR="76200" marT="38100" marB="38100" anchor="ctr">
-                    <a:lnL w="6350" cap="flat" cmpd="sng" algn="ctr">
-                      <a:solidFill>
-                        <a:srgbClr val="DFE3E2"/>
-                      </a:solidFill>
-                      <a:prstDash val="solid"/>
-                      <a:round/>
-                      <a:headEnd type="none" w="med" len="med"/>
-                      <a:tailEnd type="none" w="med" len="med"/>
+                  <a:tcPr marL="76200" marR="76200" marT="25400" marB="25400" anchor="ctr">
+                    <a:lnL w="0" cap="flat" cmpd="sng" algn="ctr">
+                      <a:noFill/>
                     </a:lnL>
-                    <a:lnR w="6350" cap="flat" cmpd="sng" algn="ctr">
-                      <a:solidFill>
-                        <a:srgbClr val="DFE3E2"/>
-                      </a:solidFill>
-                      <a:prstDash val="solid"/>
-                      <a:round/>
-                      <a:headEnd type="none" w="med" len="med"/>
-                      <a:tailEnd type="none" w="med" len="med"/>
+                    <a:lnR w="0" cap="flat" cmpd="sng" algn="ctr">
+                      <a:noFill/>
                     </a:lnR>
-                    <a:lnT w="6350" cap="flat" cmpd="sng" algn="ctr">
-                      <a:solidFill>
-                        <a:srgbClr val="DFE3E2"/>
-                      </a:solidFill>
-                      <a:prstDash val="solid"/>
-                      <a:round/>
-                      <a:headEnd type="none" w="med" len="med"/>
-                      <a:tailEnd type="none" w="med" len="med"/>
+                    <a:lnT w="0" cap="flat" cmpd="sng" algn="ctr">
+                      <a:noFill/>
                     </a:lnT>
                     <a:lnB w="6350" cap="flat" cmpd="sng" algn="ctr">
                       <a:solidFill>
-                        <a:srgbClr val="DFE3E2"/>
+                        <a:srgbClr val="E3E7E8"/>
                       </a:solidFill>
                       <a:prstDash val="solid"/>
                       <a:round/>
@@ -7983,7 +8112,7 @@
                         <a:buNone/>
                       </a:pPr>
                       <a:r>
-                        <a:rPr lang="en-US" sz="1000" dirty="0">
+                        <a:rPr lang="en-US" sz="1050" b="1" dirty="0">
                           <a:solidFill>
                             <a:srgbClr val="1C2A30"/>
                           </a:solidFill>
@@ -7991,46 +8120,28 @@
                           <a:ea typeface="Malgun Gothic" pitchFamily="34" charset="-122"/>
                           <a:cs typeface="Malgun Gothic" pitchFamily="34" charset="-120"/>
                         </a:rPr>
-                        <a:t>포괄 검색어 입찰 낮추기, 엉뚱한 검색어 막기</a:t>
+                        <a:t>새 사이트(글자·첫 화면 신청 칸·분쟁 페이지) 완성, 변리사 확인 후 공개</a:t>
                       </a:r>
-                      <a:endParaRPr lang="en-US" sz="1000" dirty="0">
+                      <a:endParaRPr lang="en-US" sz="1050" dirty="0">
                         <a:latin typeface="Malgun Gothic" charset="0"/>
                         <a:ea typeface="Malgun Gothic" charset="0"/>
                         <a:cs typeface="Malgun Gothic" charset="0"/>
                       </a:endParaRPr>
                     </a:p>
                   </a:txBody>
-                  <a:tcPr marL="76200" marR="76200" marT="38100" marB="38100" anchor="ctr">
-                    <a:lnL w="6350" cap="flat" cmpd="sng" algn="ctr">
-                      <a:solidFill>
-                        <a:srgbClr val="DFE3E2"/>
-                      </a:solidFill>
-                      <a:prstDash val="solid"/>
-                      <a:round/>
-                      <a:headEnd type="none" w="med" len="med"/>
-                      <a:tailEnd type="none" w="med" len="med"/>
+                  <a:tcPr marL="76200" marR="76200" marT="25400" marB="25400" anchor="ctr">
+                    <a:lnL w="0" cap="flat" cmpd="sng" algn="ctr">
+                      <a:noFill/>
                     </a:lnL>
-                    <a:lnR w="6350" cap="flat" cmpd="sng" algn="ctr">
-                      <a:solidFill>
-                        <a:srgbClr val="DFE3E2"/>
-                      </a:solidFill>
-                      <a:prstDash val="solid"/>
-                      <a:round/>
-                      <a:headEnd type="none" w="med" len="med"/>
-                      <a:tailEnd type="none" w="med" len="med"/>
+                    <a:lnR w="0" cap="flat" cmpd="sng" algn="ctr">
+                      <a:noFill/>
                     </a:lnR>
-                    <a:lnT w="6350" cap="flat" cmpd="sng" algn="ctr">
-                      <a:solidFill>
-                        <a:srgbClr val="DFE3E2"/>
-                      </a:solidFill>
-                      <a:prstDash val="solid"/>
-                      <a:round/>
-                      <a:headEnd type="none" w="med" len="med"/>
-                      <a:tailEnd type="none" w="med" len="med"/>
+                    <a:lnT w="0" cap="flat" cmpd="sng" algn="ctr">
+                      <a:noFill/>
                     </a:lnT>
                     <a:lnB w="6350" cap="flat" cmpd="sng" algn="ctr">
                       <a:solidFill>
-                        <a:srgbClr val="DFE3E2"/>
+                        <a:srgbClr val="E3E7E8"/>
                       </a:solidFill>
                       <a:prstDash val="solid"/>
                       <a:round/>
@@ -8051,7 +8162,7 @@
                         <a:buNone/>
                       </a:pPr>
                       <a:r>
-                        <a:rPr lang="en-US" sz="1000" dirty="0">
+                        <a:rPr lang="en-US" sz="1050" dirty="0">
                           <a:solidFill>
                             <a:srgbClr val="1C2A30"/>
                           </a:solidFill>
@@ -8059,46 +8170,28 @@
                           <a:ea typeface="Malgun Gothic" pitchFamily="34" charset="-122"/>
                           <a:cs typeface="Malgun Gothic" pitchFamily="34" charset="-120"/>
                         </a:rPr>
-                        <a:t>광고 클릭률, 광고비</a:t>
+                        <a:t>방문당 신청률, 네이버 검색 방문</a:t>
                       </a:r>
-                      <a:endParaRPr lang="en-US" sz="1000" dirty="0">
+                      <a:endParaRPr lang="en-US" sz="1050" dirty="0">
                         <a:latin typeface="Malgun Gothic" charset="0"/>
                         <a:ea typeface="Malgun Gothic" charset="0"/>
                         <a:cs typeface="Malgun Gothic" charset="0"/>
                       </a:endParaRPr>
                     </a:p>
                   </a:txBody>
-                  <a:tcPr marL="76200" marR="76200" marT="38100" marB="38100" anchor="ctr">
-                    <a:lnL w="6350" cap="flat" cmpd="sng" algn="ctr">
-                      <a:solidFill>
-                        <a:srgbClr val="DFE3E2"/>
-                      </a:solidFill>
-                      <a:prstDash val="solid"/>
-                      <a:round/>
-                      <a:headEnd type="none" w="med" len="med"/>
-                      <a:tailEnd type="none" w="med" len="med"/>
+                  <a:tcPr marL="76200" marR="76200" marT="25400" marB="25400" anchor="ctr">
+                    <a:lnL w="0" cap="flat" cmpd="sng" algn="ctr">
+                      <a:noFill/>
                     </a:lnL>
-                    <a:lnR w="6350" cap="flat" cmpd="sng" algn="ctr">
-                      <a:solidFill>
-                        <a:srgbClr val="DFE3E2"/>
-                      </a:solidFill>
-                      <a:prstDash val="solid"/>
-                      <a:round/>
-                      <a:headEnd type="none" w="med" len="med"/>
-                      <a:tailEnd type="none" w="med" len="med"/>
+                    <a:lnR w="0" cap="flat" cmpd="sng" algn="ctr">
+                      <a:noFill/>
                     </a:lnR>
-                    <a:lnT w="6350" cap="flat" cmpd="sng" algn="ctr">
-                      <a:solidFill>
-                        <a:srgbClr val="DFE3E2"/>
-                      </a:solidFill>
-                      <a:prstDash val="solid"/>
-                      <a:round/>
-                      <a:headEnd type="none" w="med" len="med"/>
-                      <a:tailEnd type="none" w="med" len="med"/>
+                    <a:lnT w="0" cap="flat" cmpd="sng" algn="ctr">
+                      <a:noFill/>
                     </a:lnT>
                     <a:lnB w="6350" cap="flat" cmpd="sng" algn="ctr">
                       <a:solidFill>
-                        <a:srgbClr val="DFE3E2"/>
+                        <a:srgbClr val="E3E7E8"/>
                       </a:solidFill>
                       <a:prstDash val="solid"/>
                       <a:round/>
@@ -8121,7 +8214,7 @@
                         <a:buNone/>
                       </a:pPr>
                       <a:r>
-                        <a:rPr lang="en-US" sz="1000" dirty="0">
+                        <a:rPr lang="en-US" sz="1050" dirty="0">
                           <a:solidFill>
                             <a:srgbClr val="1C2A30"/>
                           </a:solidFill>
@@ -8131,44 +8224,26 @@
                         </a:rPr>
                         <a:t>3장</a:t>
                       </a:r>
-                      <a:endParaRPr lang="en-US" sz="1000" dirty="0">
+                      <a:endParaRPr lang="en-US" sz="1050" dirty="0">
                         <a:latin typeface="Malgun Gothic" charset="0"/>
                         <a:ea typeface="Malgun Gothic" charset="0"/>
                         <a:cs typeface="Malgun Gothic" charset="0"/>
                       </a:endParaRPr>
                     </a:p>
                   </a:txBody>
-                  <a:tcPr marL="76200" marR="76200" marT="38100" marB="38100" anchor="ctr">
-                    <a:lnL w="6350" cap="flat" cmpd="sng" algn="ctr">
-                      <a:solidFill>
-                        <a:srgbClr val="DFE3E2"/>
-                      </a:solidFill>
-                      <a:prstDash val="solid"/>
-                      <a:round/>
-                      <a:headEnd type="none" w="med" len="med"/>
-                      <a:tailEnd type="none" w="med" len="med"/>
+                  <a:tcPr marL="76200" marR="76200" marT="25400" marB="25400" anchor="ctr">
+                    <a:lnL w="0" cap="flat" cmpd="sng" algn="ctr">
+                      <a:noFill/>
                     </a:lnL>
-                    <a:lnR w="6350" cap="flat" cmpd="sng" algn="ctr">
-                      <a:solidFill>
-                        <a:srgbClr val="DFE3E2"/>
-                      </a:solidFill>
-                      <a:prstDash val="solid"/>
-                      <a:round/>
-                      <a:headEnd type="none" w="med" len="med"/>
-                      <a:tailEnd type="none" w="med" len="med"/>
+                    <a:lnR w="0" cap="flat" cmpd="sng" algn="ctr">
+                      <a:noFill/>
                     </a:lnR>
-                    <a:lnT w="6350" cap="flat" cmpd="sng" algn="ctr">
-                      <a:solidFill>
-                        <a:srgbClr val="DFE3E2"/>
-                      </a:solidFill>
-                      <a:prstDash val="solid"/>
-                      <a:round/>
-                      <a:headEnd type="none" w="med" len="med"/>
-                      <a:tailEnd type="none" w="med" len="med"/>
+                    <a:lnT w="0" cap="flat" cmpd="sng" algn="ctr">
+                      <a:noFill/>
                     </a:lnT>
                     <a:lnB w="6350" cap="flat" cmpd="sng" algn="ctr">
                       <a:solidFill>
-                        <a:srgbClr val="DFE3E2"/>
+                        <a:srgbClr val="E3E7E8"/>
                       </a:solidFill>
                       <a:prstDash val="solid"/>
                       <a:round/>
@@ -8189,7 +8264,7 @@
                         <a:buNone/>
                       </a:pPr>
                       <a:r>
-                        <a:rPr lang="en-US" sz="1000" dirty="0">
+                        <a:rPr lang="en-US" sz="1050" dirty="0">
                           <a:solidFill>
                             <a:srgbClr val="1C2A30"/>
                           </a:solidFill>
@@ -8199,44 +8274,26 @@
                         </a:rPr>
                         <a:t>변리사</a:t>
                       </a:r>
-                      <a:endParaRPr lang="en-US" sz="1000" dirty="0">
+                      <a:endParaRPr lang="en-US" sz="1050" dirty="0">
                         <a:latin typeface="Malgun Gothic" charset="0"/>
                         <a:ea typeface="Malgun Gothic" charset="0"/>
                         <a:cs typeface="Malgun Gothic" charset="0"/>
                       </a:endParaRPr>
                     </a:p>
                   </a:txBody>
-                  <a:tcPr marL="76200" marR="76200" marT="38100" marB="38100" anchor="ctr">
-                    <a:lnL w="6350" cap="flat" cmpd="sng" algn="ctr">
-                      <a:solidFill>
-                        <a:srgbClr val="DFE3E2"/>
-                      </a:solidFill>
-                      <a:prstDash val="solid"/>
-                      <a:round/>
-                      <a:headEnd type="none" w="med" len="med"/>
-                      <a:tailEnd type="none" w="med" len="med"/>
+                  <a:tcPr marL="76200" marR="76200" marT="25400" marB="25400" anchor="ctr">
+                    <a:lnL w="0" cap="flat" cmpd="sng" algn="ctr">
+                      <a:noFill/>
                     </a:lnL>
-                    <a:lnR w="6350" cap="flat" cmpd="sng" algn="ctr">
-                      <a:solidFill>
-                        <a:srgbClr val="DFE3E2"/>
-                      </a:solidFill>
-                      <a:prstDash val="solid"/>
-                      <a:round/>
-                      <a:headEnd type="none" w="med" len="med"/>
-                      <a:tailEnd type="none" w="med" len="med"/>
+                    <a:lnR w="0" cap="flat" cmpd="sng" algn="ctr">
+                      <a:noFill/>
                     </a:lnR>
-                    <a:lnT w="6350" cap="flat" cmpd="sng" algn="ctr">
-                      <a:solidFill>
-                        <a:srgbClr val="DFE3E2"/>
-                      </a:solidFill>
-                      <a:prstDash val="solid"/>
-                      <a:round/>
-                      <a:headEnd type="none" w="med" len="med"/>
-                      <a:tailEnd type="none" w="med" len="med"/>
+                    <a:lnT w="0" cap="flat" cmpd="sng" algn="ctr">
+                      <a:noFill/>
                     </a:lnT>
                     <a:lnB w="6350" cap="flat" cmpd="sng" algn="ctr">
                       <a:solidFill>
-                        <a:srgbClr val="DFE3E2"/>
+                        <a:srgbClr val="E3E7E8"/>
                       </a:solidFill>
                       <a:prstDash val="solid"/>
                       <a:round/>
@@ -8257,7 +8314,7 @@
                         <a:buNone/>
                       </a:pPr>
                       <a:r>
-                        <a:rPr lang="en-US" sz="1000" dirty="0">
+                        <a:rPr lang="en-US" sz="1050" dirty="0">
                           <a:solidFill>
                             <a:srgbClr val="1C2A30"/>
                           </a:solidFill>
@@ -8265,46 +8322,28 @@
                           <a:ea typeface="Malgun Gothic" pitchFamily="34" charset="-122"/>
                           <a:cs typeface="Malgun Gothic" pitchFamily="34" charset="-120"/>
                         </a:rPr>
-                        <a:t>네이버 광고 신청 추적 켜기</a:t>
+                        <a:t>포괄 검색어 입찰 낮추기, 엉뚱한 검색어 막기</a:t>
                       </a:r>
-                      <a:endParaRPr lang="en-US" sz="1000" dirty="0">
+                      <a:endParaRPr lang="en-US" sz="1050" dirty="0">
                         <a:latin typeface="Malgun Gothic" charset="0"/>
                         <a:ea typeface="Malgun Gothic" charset="0"/>
                         <a:cs typeface="Malgun Gothic" charset="0"/>
                       </a:endParaRPr>
                     </a:p>
                   </a:txBody>
-                  <a:tcPr marL="76200" marR="76200" marT="38100" marB="38100" anchor="ctr">
-                    <a:lnL w="6350" cap="flat" cmpd="sng" algn="ctr">
-                      <a:solidFill>
-                        <a:srgbClr val="DFE3E2"/>
-                      </a:solidFill>
-                      <a:prstDash val="solid"/>
-                      <a:round/>
-                      <a:headEnd type="none" w="med" len="med"/>
-                      <a:tailEnd type="none" w="med" len="med"/>
+                  <a:tcPr marL="76200" marR="76200" marT="25400" marB="25400" anchor="ctr">
+                    <a:lnL w="0" cap="flat" cmpd="sng" algn="ctr">
+                      <a:noFill/>
                     </a:lnL>
-                    <a:lnR w="6350" cap="flat" cmpd="sng" algn="ctr">
-                      <a:solidFill>
-                        <a:srgbClr val="DFE3E2"/>
-                      </a:solidFill>
-                      <a:prstDash val="solid"/>
-                      <a:round/>
-                      <a:headEnd type="none" w="med" len="med"/>
-                      <a:tailEnd type="none" w="med" len="med"/>
+                    <a:lnR w="0" cap="flat" cmpd="sng" algn="ctr">
+                      <a:noFill/>
                     </a:lnR>
-                    <a:lnT w="6350" cap="flat" cmpd="sng" algn="ctr">
-                      <a:solidFill>
-                        <a:srgbClr val="DFE3E2"/>
-                      </a:solidFill>
-                      <a:prstDash val="solid"/>
-                      <a:round/>
-                      <a:headEnd type="none" w="med" len="med"/>
-                      <a:tailEnd type="none" w="med" len="med"/>
+                    <a:lnT w="0" cap="flat" cmpd="sng" algn="ctr">
+                      <a:noFill/>
                     </a:lnT>
                     <a:lnB w="6350" cap="flat" cmpd="sng" algn="ctr">
                       <a:solidFill>
-                        <a:srgbClr val="DFE3E2"/>
+                        <a:srgbClr val="E3E7E8"/>
                       </a:solidFill>
                       <a:prstDash val="solid"/>
                       <a:round/>
@@ -8325,7 +8364,7 @@
                         <a:buNone/>
                       </a:pPr>
                       <a:r>
-                        <a:rPr lang="en-US" sz="1000" dirty="0">
+                        <a:rPr lang="en-US" sz="1050" dirty="0">
                           <a:solidFill>
                             <a:srgbClr val="1C2A30"/>
                           </a:solidFill>
@@ -8333,46 +8372,28 @@
                           <a:ea typeface="Malgun Gothic" pitchFamily="34" charset="-122"/>
                           <a:cs typeface="Malgun Gothic" pitchFamily="34" charset="-120"/>
                         </a:rPr>
-                        <a:t>검색어별 신청</a:t>
+                        <a:t>광고 클릭률, 광고비</a:t>
                       </a:r>
-                      <a:endParaRPr lang="en-US" sz="1000" dirty="0">
+                      <a:endParaRPr lang="en-US" sz="1050" dirty="0">
                         <a:latin typeface="Malgun Gothic" charset="0"/>
                         <a:ea typeface="Malgun Gothic" charset="0"/>
                         <a:cs typeface="Malgun Gothic" charset="0"/>
                       </a:endParaRPr>
                     </a:p>
                   </a:txBody>
-                  <a:tcPr marL="76200" marR="76200" marT="38100" marB="38100" anchor="ctr">
-                    <a:lnL w="6350" cap="flat" cmpd="sng" algn="ctr">
-                      <a:solidFill>
-                        <a:srgbClr val="DFE3E2"/>
-                      </a:solidFill>
-                      <a:prstDash val="solid"/>
-                      <a:round/>
-                      <a:headEnd type="none" w="med" len="med"/>
-                      <a:tailEnd type="none" w="med" len="med"/>
+                  <a:tcPr marL="76200" marR="76200" marT="25400" marB="25400" anchor="ctr">
+                    <a:lnL w="0" cap="flat" cmpd="sng" algn="ctr">
+                      <a:noFill/>
                     </a:lnL>
-                    <a:lnR w="6350" cap="flat" cmpd="sng" algn="ctr">
-                      <a:solidFill>
-                        <a:srgbClr val="DFE3E2"/>
-                      </a:solidFill>
-                      <a:prstDash val="solid"/>
-                      <a:round/>
-                      <a:headEnd type="none" w="med" len="med"/>
-                      <a:tailEnd type="none" w="med" len="med"/>
+                    <a:lnR w="0" cap="flat" cmpd="sng" algn="ctr">
+                      <a:noFill/>
                     </a:lnR>
-                    <a:lnT w="6350" cap="flat" cmpd="sng" algn="ctr">
-                      <a:solidFill>
-                        <a:srgbClr val="DFE3E2"/>
-                      </a:solidFill>
-                      <a:prstDash val="solid"/>
-                      <a:round/>
-                      <a:headEnd type="none" w="med" len="med"/>
-                      <a:tailEnd type="none" w="med" len="med"/>
+                    <a:lnT w="0" cap="flat" cmpd="sng" algn="ctr">
+                      <a:noFill/>
                     </a:lnT>
                     <a:lnB w="6350" cap="flat" cmpd="sng" algn="ctr">
                       <a:solidFill>
-                        <a:srgbClr val="DFE3E2"/>
+                        <a:srgbClr val="E3E7E8"/>
                       </a:solidFill>
                       <a:prstDash val="solid"/>
                       <a:round/>
@@ -8395,7 +8416,7 @@
                         <a:buNone/>
                       </a:pPr>
                       <a:r>
-                        <a:rPr lang="en-US" sz="1000" dirty="0">
+                        <a:rPr lang="en-US" sz="1050" dirty="0">
                           <a:solidFill>
                             <a:srgbClr val="1C2A30"/>
                           </a:solidFill>
@@ -8403,46 +8424,28 @@
                           <a:ea typeface="Malgun Gothic" pitchFamily="34" charset="-122"/>
                           <a:cs typeface="Malgun Gothic" pitchFamily="34" charset="-120"/>
                         </a:rPr>
-                        <a:t>4장</a:t>
+                        <a:t>3장</a:t>
                       </a:r>
-                      <a:endParaRPr lang="en-US" sz="1000" dirty="0">
+                      <a:endParaRPr lang="en-US" sz="1050" dirty="0">
                         <a:latin typeface="Malgun Gothic" charset="0"/>
                         <a:ea typeface="Malgun Gothic" charset="0"/>
                         <a:cs typeface="Malgun Gothic" charset="0"/>
                       </a:endParaRPr>
                     </a:p>
                   </a:txBody>
-                  <a:tcPr marL="76200" marR="76200" marT="38100" marB="38100" anchor="ctr">
-                    <a:lnL w="6350" cap="flat" cmpd="sng" algn="ctr">
-                      <a:solidFill>
-                        <a:srgbClr val="DFE3E2"/>
-                      </a:solidFill>
-                      <a:prstDash val="solid"/>
-                      <a:round/>
-                      <a:headEnd type="none" w="med" len="med"/>
-                      <a:tailEnd type="none" w="med" len="med"/>
+                  <a:tcPr marL="76200" marR="76200" marT="25400" marB="25400" anchor="ctr">
+                    <a:lnL w="0" cap="flat" cmpd="sng" algn="ctr">
+                      <a:noFill/>
                     </a:lnL>
-                    <a:lnR w="6350" cap="flat" cmpd="sng" algn="ctr">
-                      <a:solidFill>
-                        <a:srgbClr val="DFE3E2"/>
-                      </a:solidFill>
-                      <a:prstDash val="solid"/>
-                      <a:round/>
-                      <a:headEnd type="none" w="med" len="med"/>
-                      <a:tailEnd type="none" w="med" len="med"/>
+                    <a:lnR w="0" cap="flat" cmpd="sng" algn="ctr">
+                      <a:noFill/>
                     </a:lnR>
-                    <a:lnT w="6350" cap="flat" cmpd="sng" algn="ctr">
-                      <a:solidFill>
-                        <a:srgbClr val="DFE3E2"/>
-                      </a:solidFill>
-                      <a:prstDash val="solid"/>
-                      <a:round/>
-                      <a:headEnd type="none" w="med" len="med"/>
-                      <a:tailEnd type="none" w="med" len="med"/>
+                    <a:lnT w="0" cap="flat" cmpd="sng" algn="ctr">
+                      <a:noFill/>
                     </a:lnT>
                     <a:lnB w="6350" cap="flat" cmpd="sng" algn="ctr">
                       <a:solidFill>
-                        <a:srgbClr val="DFE3E2"/>
+                        <a:srgbClr val="E3E7E8"/>
                       </a:solidFill>
                       <a:prstDash val="solid"/>
                       <a:round/>
@@ -8463,7 +8466,7 @@
                         <a:buNone/>
                       </a:pPr>
                       <a:r>
-                        <a:rPr lang="en-US" sz="1000" dirty="0">
+                        <a:rPr lang="en-US" sz="1050" dirty="0">
                           <a:solidFill>
                             <a:srgbClr val="1C2A30"/>
                           </a:solidFill>
@@ -8473,44 +8476,26 @@
                         </a:rPr>
                         <a:t>변리사</a:t>
                       </a:r>
-                      <a:endParaRPr lang="en-US" sz="1000" dirty="0">
+                      <a:endParaRPr lang="en-US" sz="1050" dirty="0">
                         <a:latin typeface="Malgun Gothic" charset="0"/>
                         <a:ea typeface="Malgun Gothic" charset="0"/>
                         <a:cs typeface="Malgun Gothic" charset="0"/>
                       </a:endParaRPr>
                     </a:p>
                   </a:txBody>
-                  <a:tcPr marL="76200" marR="76200" marT="38100" marB="38100" anchor="ctr">
-                    <a:lnL w="6350" cap="flat" cmpd="sng" algn="ctr">
-                      <a:solidFill>
-                        <a:srgbClr val="DFE3E2"/>
-                      </a:solidFill>
-                      <a:prstDash val="solid"/>
-                      <a:round/>
-                      <a:headEnd type="none" w="med" len="med"/>
-                      <a:tailEnd type="none" w="med" len="med"/>
+                  <a:tcPr marL="76200" marR="76200" marT="25400" marB="25400" anchor="ctr">
+                    <a:lnL w="0" cap="flat" cmpd="sng" algn="ctr">
+                      <a:noFill/>
                     </a:lnL>
-                    <a:lnR w="6350" cap="flat" cmpd="sng" algn="ctr">
-                      <a:solidFill>
-                        <a:srgbClr val="DFE3E2"/>
-                      </a:solidFill>
-                      <a:prstDash val="solid"/>
-                      <a:round/>
-                      <a:headEnd type="none" w="med" len="med"/>
-                      <a:tailEnd type="none" w="med" len="med"/>
+                    <a:lnR w="0" cap="flat" cmpd="sng" algn="ctr">
+                      <a:noFill/>
                     </a:lnR>
-                    <a:lnT w="6350" cap="flat" cmpd="sng" algn="ctr">
-                      <a:solidFill>
-                        <a:srgbClr val="DFE3E2"/>
-                      </a:solidFill>
-                      <a:prstDash val="solid"/>
-                      <a:round/>
-                      <a:headEnd type="none" w="med" len="med"/>
-                      <a:tailEnd type="none" w="med" len="med"/>
+                    <a:lnT w="0" cap="flat" cmpd="sng" algn="ctr">
+                      <a:noFill/>
                     </a:lnT>
                     <a:lnB w="6350" cap="flat" cmpd="sng" algn="ctr">
                       <a:solidFill>
-                        <a:srgbClr val="DFE3E2"/>
+                        <a:srgbClr val="E3E7E8"/>
                       </a:solidFill>
                       <a:prstDash val="solid"/>
                       <a:round/>
@@ -8531,7 +8516,7 @@
                         <a:buNone/>
                       </a:pPr>
                       <a:r>
-                        <a:rPr lang="en-US" sz="1000" dirty="0">
+                        <a:rPr lang="en-US" sz="1050" dirty="0">
                           <a:solidFill>
                             <a:srgbClr val="1C2A30"/>
                           </a:solidFill>
@@ -8539,46 +8524,28 @@
                           <a:ea typeface="Malgun Gothic" pitchFamily="34" charset="-122"/>
                           <a:cs typeface="Malgun Gothic" pitchFamily="34" charset="-120"/>
                         </a:rPr>
-                        <a:t>신청마다 수임 여부 기록</a:t>
+                        <a:t>네이버 광고 신청 추적 켜기</a:t>
                       </a:r>
-                      <a:endParaRPr lang="en-US" sz="1000" dirty="0">
+                      <a:endParaRPr lang="en-US" sz="1050" dirty="0">
                         <a:latin typeface="Malgun Gothic" charset="0"/>
                         <a:ea typeface="Malgun Gothic" charset="0"/>
                         <a:cs typeface="Malgun Gothic" charset="0"/>
                       </a:endParaRPr>
                     </a:p>
                   </a:txBody>
-                  <a:tcPr marL="76200" marR="76200" marT="38100" marB="38100" anchor="ctr">
-                    <a:lnL w="6350" cap="flat" cmpd="sng" algn="ctr">
-                      <a:solidFill>
-                        <a:srgbClr val="DFE3E2"/>
-                      </a:solidFill>
-                      <a:prstDash val="solid"/>
-                      <a:round/>
-                      <a:headEnd type="none" w="med" len="med"/>
-                      <a:tailEnd type="none" w="med" len="med"/>
+                  <a:tcPr marL="76200" marR="76200" marT="25400" marB="25400" anchor="ctr">
+                    <a:lnL w="0" cap="flat" cmpd="sng" algn="ctr">
+                      <a:noFill/>
                     </a:lnL>
-                    <a:lnR w="6350" cap="flat" cmpd="sng" algn="ctr">
-                      <a:solidFill>
-                        <a:srgbClr val="DFE3E2"/>
-                      </a:solidFill>
-                      <a:prstDash val="solid"/>
-                      <a:round/>
-                      <a:headEnd type="none" w="med" len="med"/>
-                      <a:tailEnd type="none" w="med" len="med"/>
+                    <a:lnR w="0" cap="flat" cmpd="sng" algn="ctr">
+                      <a:noFill/>
                     </a:lnR>
-                    <a:lnT w="6350" cap="flat" cmpd="sng" algn="ctr">
-                      <a:solidFill>
-                        <a:srgbClr val="DFE3E2"/>
-                      </a:solidFill>
-                      <a:prstDash val="solid"/>
-                      <a:round/>
-                      <a:headEnd type="none" w="med" len="med"/>
-                      <a:tailEnd type="none" w="med" len="med"/>
+                    <a:lnT w="0" cap="flat" cmpd="sng" algn="ctr">
+                      <a:noFill/>
                     </a:lnT>
                     <a:lnB w="6350" cap="flat" cmpd="sng" algn="ctr">
                       <a:solidFill>
-                        <a:srgbClr val="DFE3E2"/>
+                        <a:srgbClr val="E3E7E8"/>
                       </a:solidFill>
                       <a:prstDash val="solid"/>
                       <a:round/>
@@ -8599,7 +8566,7 @@
                         <a:buNone/>
                       </a:pPr>
                       <a:r>
-                        <a:rPr lang="en-US" sz="1000" dirty="0">
+                        <a:rPr lang="en-US" sz="1050" dirty="0">
                           <a:solidFill>
                             <a:srgbClr val="1C2A30"/>
                           </a:solidFill>
@@ -8607,46 +8574,28 @@
                           <a:ea typeface="Malgun Gothic" pitchFamily="34" charset="-122"/>
                           <a:cs typeface="Malgun Gothic" pitchFamily="34" charset="-120"/>
                         </a:rPr>
-                        <a:t>수임 전환율</a:t>
+                        <a:t>검색어별 신청</a:t>
                       </a:r>
-                      <a:endParaRPr lang="en-US" sz="1000" dirty="0">
+                      <a:endParaRPr lang="en-US" sz="1050" dirty="0">
                         <a:latin typeface="Malgun Gothic" charset="0"/>
                         <a:ea typeface="Malgun Gothic" charset="0"/>
                         <a:cs typeface="Malgun Gothic" charset="0"/>
                       </a:endParaRPr>
                     </a:p>
                   </a:txBody>
-                  <a:tcPr marL="76200" marR="76200" marT="38100" marB="38100" anchor="ctr">
-                    <a:lnL w="6350" cap="flat" cmpd="sng" algn="ctr">
-                      <a:solidFill>
-                        <a:srgbClr val="DFE3E2"/>
-                      </a:solidFill>
-                      <a:prstDash val="solid"/>
-                      <a:round/>
-                      <a:headEnd type="none" w="med" len="med"/>
-                      <a:tailEnd type="none" w="med" len="med"/>
+                  <a:tcPr marL="76200" marR="76200" marT="25400" marB="25400" anchor="ctr">
+                    <a:lnL w="0" cap="flat" cmpd="sng" algn="ctr">
+                      <a:noFill/>
                     </a:lnL>
-                    <a:lnR w="6350" cap="flat" cmpd="sng" algn="ctr">
-                      <a:solidFill>
-                        <a:srgbClr val="DFE3E2"/>
-                      </a:solidFill>
-                      <a:prstDash val="solid"/>
-                      <a:round/>
-                      <a:headEnd type="none" w="med" len="med"/>
-                      <a:tailEnd type="none" w="med" len="med"/>
+                    <a:lnR w="0" cap="flat" cmpd="sng" algn="ctr">
+                      <a:noFill/>
                     </a:lnR>
-                    <a:lnT w="6350" cap="flat" cmpd="sng" algn="ctr">
-                      <a:solidFill>
-                        <a:srgbClr val="DFE3E2"/>
-                      </a:solidFill>
-                      <a:prstDash val="solid"/>
-                      <a:round/>
-                      <a:headEnd type="none" w="med" len="med"/>
-                      <a:tailEnd type="none" w="med" len="med"/>
+                    <a:lnT w="0" cap="flat" cmpd="sng" algn="ctr">
+                      <a:noFill/>
                     </a:lnT>
                     <a:lnB w="6350" cap="flat" cmpd="sng" algn="ctr">
                       <a:solidFill>
-                        <a:srgbClr val="DFE3E2"/>
+                        <a:srgbClr val="E3E7E8"/>
                       </a:solidFill>
                       <a:prstDash val="solid"/>
                       <a:round/>
@@ -8669,7 +8618,7 @@
                         <a:buNone/>
                       </a:pPr>
                       <a:r>
-                        <a:rPr lang="en-US" sz="1000" dirty="0">
+                        <a:rPr lang="en-US" sz="1050" dirty="0">
                           <a:solidFill>
                             <a:srgbClr val="1C2A30"/>
                           </a:solidFill>
@@ -8677,46 +8626,28 @@
                           <a:ea typeface="Malgun Gothic" pitchFamily="34" charset="-122"/>
                           <a:cs typeface="Malgun Gothic" pitchFamily="34" charset="-120"/>
                         </a:rPr>
-                        <a:t>2장</a:t>
+                        <a:t>4장</a:t>
                       </a:r>
-                      <a:endParaRPr lang="en-US" sz="1000" dirty="0">
+                      <a:endParaRPr lang="en-US" sz="1050" dirty="0">
                         <a:latin typeface="Malgun Gothic" charset="0"/>
                         <a:ea typeface="Malgun Gothic" charset="0"/>
                         <a:cs typeface="Malgun Gothic" charset="0"/>
                       </a:endParaRPr>
                     </a:p>
                   </a:txBody>
-                  <a:tcPr marL="76200" marR="76200" marT="38100" marB="38100" anchor="ctr">
-                    <a:lnL w="6350" cap="flat" cmpd="sng" algn="ctr">
-                      <a:solidFill>
-                        <a:srgbClr val="DFE3E2"/>
-                      </a:solidFill>
-                      <a:prstDash val="solid"/>
-                      <a:round/>
-                      <a:headEnd type="none" w="med" len="med"/>
-                      <a:tailEnd type="none" w="med" len="med"/>
+                  <a:tcPr marL="76200" marR="76200" marT="25400" marB="25400" anchor="ctr">
+                    <a:lnL w="0" cap="flat" cmpd="sng" algn="ctr">
+                      <a:noFill/>
                     </a:lnL>
-                    <a:lnR w="6350" cap="flat" cmpd="sng" algn="ctr">
-                      <a:solidFill>
-                        <a:srgbClr val="DFE3E2"/>
-                      </a:solidFill>
-                      <a:prstDash val="solid"/>
-                      <a:round/>
-                      <a:headEnd type="none" w="med" len="med"/>
-                      <a:tailEnd type="none" w="med" len="med"/>
+                    <a:lnR w="0" cap="flat" cmpd="sng" algn="ctr">
+                      <a:noFill/>
                     </a:lnR>
-                    <a:lnT w="6350" cap="flat" cmpd="sng" algn="ctr">
-                      <a:solidFill>
-                        <a:srgbClr val="DFE3E2"/>
-                      </a:solidFill>
-                      <a:prstDash val="solid"/>
-                      <a:round/>
-                      <a:headEnd type="none" w="med" len="med"/>
-                      <a:tailEnd type="none" w="med" len="med"/>
+                    <a:lnT w="0" cap="flat" cmpd="sng" algn="ctr">
+                      <a:noFill/>
                     </a:lnT>
                     <a:lnB w="6350" cap="flat" cmpd="sng" algn="ctr">
                       <a:solidFill>
-                        <a:srgbClr val="DFE3E2"/>
+                        <a:srgbClr val="E3E7E8"/>
                       </a:solidFill>
                       <a:prstDash val="solid"/>
                       <a:round/>
@@ -8737,7 +8668,7 @@
                         <a:buNone/>
                       </a:pPr>
                       <a:r>
-                        <a:rPr lang="en-US" sz="1000" dirty="0">
+                        <a:rPr lang="en-US" sz="1050" dirty="0">
                           <a:solidFill>
                             <a:srgbClr val="1C2A30"/>
                           </a:solidFill>
@@ -8747,44 +8678,26 @@
                         </a:rPr>
                         <a:t>변리사</a:t>
                       </a:r>
-                      <a:endParaRPr lang="en-US" sz="1000" dirty="0">
+                      <a:endParaRPr lang="en-US" sz="1050" dirty="0">
                         <a:latin typeface="Malgun Gothic" charset="0"/>
                         <a:ea typeface="Malgun Gothic" charset="0"/>
                         <a:cs typeface="Malgun Gothic" charset="0"/>
                       </a:endParaRPr>
                     </a:p>
                   </a:txBody>
-                  <a:tcPr marL="76200" marR="76200" marT="38100" marB="38100" anchor="ctr">
-                    <a:lnL w="6350" cap="flat" cmpd="sng" algn="ctr">
-                      <a:solidFill>
-                        <a:srgbClr val="DFE3E2"/>
-                      </a:solidFill>
-                      <a:prstDash val="solid"/>
-                      <a:round/>
-                      <a:headEnd type="none" w="med" len="med"/>
-                      <a:tailEnd type="none" w="med" len="med"/>
+                  <a:tcPr marL="76200" marR="76200" marT="25400" marB="25400" anchor="ctr">
+                    <a:lnL w="0" cap="flat" cmpd="sng" algn="ctr">
+                      <a:noFill/>
                     </a:lnL>
-                    <a:lnR w="6350" cap="flat" cmpd="sng" algn="ctr">
-                      <a:solidFill>
-                        <a:srgbClr val="DFE3E2"/>
-                      </a:solidFill>
-                      <a:prstDash val="solid"/>
-                      <a:round/>
-                      <a:headEnd type="none" w="med" len="med"/>
-                      <a:tailEnd type="none" w="med" len="med"/>
+                    <a:lnR w="0" cap="flat" cmpd="sng" algn="ctr">
+                      <a:noFill/>
                     </a:lnR>
-                    <a:lnT w="6350" cap="flat" cmpd="sng" algn="ctr">
-                      <a:solidFill>
-                        <a:srgbClr val="DFE3E2"/>
-                      </a:solidFill>
-                      <a:prstDash val="solid"/>
-                      <a:round/>
-                      <a:headEnd type="none" w="med" len="med"/>
-                      <a:tailEnd type="none" w="med" len="med"/>
+                    <a:lnT w="0" cap="flat" cmpd="sng" algn="ctr">
+                      <a:noFill/>
                     </a:lnT>
                     <a:lnB w="6350" cap="flat" cmpd="sng" algn="ctr">
                       <a:solidFill>
-                        <a:srgbClr val="DFE3E2"/>
+                        <a:srgbClr val="E3E7E8"/>
                       </a:solidFill>
                       <a:prstDash val="solid"/>
                       <a:round/>
@@ -8805,7 +8718,7 @@
                         <a:buNone/>
                       </a:pPr>
                       <a:r>
-                        <a:rPr lang="en-US" sz="1000" dirty="0">
+                        <a:rPr lang="en-US" sz="1050" dirty="0">
                           <a:solidFill>
                             <a:srgbClr val="1C2A30"/>
                           </a:solidFill>
@@ -8813,46 +8726,28 @@
                           <a:ea typeface="Malgun Gothic" pitchFamily="34" charset="-122"/>
                           <a:cs typeface="Malgun Gothic" pitchFamily="34" charset="-120"/>
                         </a:rPr>
-                        <a:t>다음 광고 재개 결정, 블로그는 읽을거리 있는 글로</a:t>
+                        <a:t>신청마다 수임 여부 기록</a:t>
                       </a:r>
-                      <a:endParaRPr lang="en-US" sz="1000" dirty="0">
+                      <a:endParaRPr lang="en-US" sz="1050" dirty="0">
                         <a:latin typeface="Malgun Gothic" charset="0"/>
                         <a:ea typeface="Malgun Gothic" charset="0"/>
                         <a:cs typeface="Malgun Gothic" charset="0"/>
                       </a:endParaRPr>
                     </a:p>
                   </a:txBody>
-                  <a:tcPr marL="76200" marR="76200" marT="38100" marB="38100" anchor="ctr">
-                    <a:lnL w="6350" cap="flat" cmpd="sng" algn="ctr">
-                      <a:solidFill>
-                        <a:srgbClr val="DFE3E2"/>
-                      </a:solidFill>
-                      <a:prstDash val="solid"/>
-                      <a:round/>
-                      <a:headEnd type="none" w="med" len="med"/>
-                      <a:tailEnd type="none" w="med" len="med"/>
+                  <a:tcPr marL="76200" marR="76200" marT="25400" marB="25400" anchor="ctr">
+                    <a:lnL w="0" cap="flat" cmpd="sng" algn="ctr">
+                      <a:noFill/>
                     </a:lnL>
-                    <a:lnR w="6350" cap="flat" cmpd="sng" algn="ctr">
-                      <a:solidFill>
-                        <a:srgbClr val="DFE3E2"/>
-                      </a:solidFill>
-                      <a:prstDash val="solid"/>
-                      <a:round/>
-                      <a:headEnd type="none" w="med" len="med"/>
-                      <a:tailEnd type="none" w="med" len="med"/>
+                    <a:lnR w="0" cap="flat" cmpd="sng" algn="ctr">
+                      <a:noFill/>
                     </a:lnR>
-                    <a:lnT w="6350" cap="flat" cmpd="sng" algn="ctr">
-                      <a:solidFill>
-                        <a:srgbClr val="DFE3E2"/>
-                      </a:solidFill>
-                      <a:prstDash val="solid"/>
-                      <a:round/>
-                      <a:headEnd type="none" w="med" len="med"/>
-                      <a:tailEnd type="none" w="med" len="med"/>
+                    <a:lnT w="0" cap="flat" cmpd="sng" algn="ctr">
+                      <a:noFill/>
                     </a:lnT>
                     <a:lnB w="6350" cap="flat" cmpd="sng" algn="ctr">
                       <a:solidFill>
-                        <a:srgbClr val="DFE3E2"/>
+                        <a:srgbClr val="E3E7E8"/>
                       </a:solidFill>
                       <a:prstDash val="solid"/>
                       <a:round/>
@@ -8873,7 +8768,209 @@
                         <a:buNone/>
                       </a:pPr>
                       <a:r>
-                        <a:rPr lang="en-US" sz="1000" dirty="0">
+                        <a:rPr lang="en-US" sz="1050" dirty="0">
+                          <a:solidFill>
+                            <a:srgbClr val="1C2A30"/>
+                          </a:solidFill>
+                          <a:latin typeface="Malgun Gothic" pitchFamily="34" charset="0"/>
+                          <a:ea typeface="Malgun Gothic" pitchFamily="34" charset="-122"/>
+                          <a:cs typeface="Malgun Gothic" pitchFamily="34" charset="-120"/>
+                        </a:rPr>
+                        <a:t>수임 전환율</a:t>
+                      </a:r>
+                      <a:endParaRPr lang="en-US" sz="1050" dirty="0">
+                        <a:latin typeface="Malgun Gothic" charset="0"/>
+                        <a:ea typeface="Malgun Gothic" charset="0"/>
+                        <a:cs typeface="Malgun Gothic" charset="0"/>
+                      </a:endParaRPr>
+                    </a:p>
+                  </a:txBody>
+                  <a:tcPr marL="76200" marR="76200" marT="25400" marB="25400" anchor="ctr">
+                    <a:lnL w="0" cap="flat" cmpd="sng" algn="ctr">
+                      <a:noFill/>
+                    </a:lnL>
+                    <a:lnR w="0" cap="flat" cmpd="sng" algn="ctr">
+                      <a:noFill/>
+                    </a:lnR>
+                    <a:lnT w="0" cap="flat" cmpd="sng" algn="ctr">
+                      <a:noFill/>
+                    </a:lnT>
+                    <a:lnB w="6350" cap="flat" cmpd="sng" algn="ctr">
+                      <a:solidFill>
+                        <a:srgbClr val="E3E7E8"/>
+                      </a:solidFill>
+                      <a:prstDash val="solid"/>
+                      <a:round/>
+                      <a:headEnd type="none" w="med" len="med"/>
+                      <a:tailEnd type="none" w="med" len="med"/>
+                    </a:lnB>
+                    <a:solidFill>
+                      <a:srgbClr val="FFFFFF"/>
+                    </a:solidFill>
+                  </a:tcPr>
+                </a:tc>
+              </a:tr>
+              <a:tr h="283464">
+                <a:tc>
+                  <a:txBody>
+                    <a:bodyPr/>
+                    <a:lstStyle/>
+                    <a:p>
+                      <a:pPr indent="0" marL="0">
+                        <a:buNone/>
+                      </a:pPr>
+                      <a:r>
+                        <a:rPr lang="en-US" sz="1050" dirty="0">
+                          <a:solidFill>
+                            <a:srgbClr val="1C2A30"/>
+                          </a:solidFill>
+                          <a:latin typeface="Malgun Gothic" pitchFamily="34" charset="0"/>
+                          <a:ea typeface="Malgun Gothic" pitchFamily="34" charset="-122"/>
+                          <a:cs typeface="Malgun Gothic" pitchFamily="34" charset="-120"/>
+                        </a:rPr>
+                        <a:t>2장</a:t>
+                      </a:r>
+                      <a:endParaRPr lang="en-US" sz="1050" dirty="0">
+                        <a:latin typeface="Malgun Gothic" charset="0"/>
+                        <a:ea typeface="Malgun Gothic" charset="0"/>
+                        <a:cs typeface="Malgun Gothic" charset="0"/>
+                      </a:endParaRPr>
+                    </a:p>
+                  </a:txBody>
+                  <a:tcPr marL="76200" marR="76200" marT="25400" marB="25400" anchor="ctr">
+                    <a:lnL w="0" cap="flat" cmpd="sng" algn="ctr">
+                      <a:noFill/>
+                    </a:lnL>
+                    <a:lnR w="0" cap="flat" cmpd="sng" algn="ctr">
+                      <a:noFill/>
+                    </a:lnR>
+                    <a:lnT w="0" cap="flat" cmpd="sng" algn="ctr">
+                      <a:noFill/>
+                    </a:lnT>
+                    <a:lnB w="6350" cap="flat" cmpd="sng" algn="ctr">
+                      <a:solidFill>
+                        <a:srgbClr val="E3E7E8"/>
+                      </a:solidFill>
+                      <a:prstDash val="solid"/>
+                      <a:round/>
+                      <a:headEnd type="none" w="med" len="med"/>
+                      <a:tailEnd type="none" w="med" len="med"/>
+                    </a:lnB>
+                    <a:solidFill>
+                      <a:srgbClr val="FFFFFF"/>
+                    </a:solidFill>
+                  </a:tcPr>
+                </a:tc>
+                <a:tc>
+                  <a:txBody>
+                    <a:bodyPr/>
+                    <a:lstStyle/>
+                    <a:p>
+                      <a:pPr indent="0" marL="0">
+                        <a:buNone/>
+                      </a:pPr>
+                      <a:r>
+                        <a:rPr lang="en-US" sz="1050" dirty="0">
+                          <a:solidFill>
+                            <a:srgbClr val="1C2A30"/>
+                          </a:solidFill>
+                          <a:latin typeface="Malgun Gothic" pitchFamily="34" charset="0"/>
+                          <a:ea typeface="Malgun Gothic" pitchFamily="34" charset="-122"/>
+                          <a:cs typeface="Malgun Gothic" pitchFamily="34" charset="-120"/>
+                        </a:rPr>
+                        <a:t>변리사</a:t>
+                      </a:r>
+                      <a:endParaRPr lang="en-US" sz="1050" dirty="0">
+                        <a:latin typeface="Malgun Gothic" charset="0"/>
+                        <a:ea typeface="Malgun Gothic" charset="0"/>
+                        <a:cs typeface="Malgun Gothic" charset="0"/>
+                      </a:endParaRPr>
+                    </a:p>
+                  </a:txBody>
+                  <a:tcPr marL="76200" marR="76200" marT="25400" marB="25400" anchor="ctr">
+                    <a:lnL w="0" cap="flat" cmpd="sng" algn="ctr">
+                      <a:noFill/>
+                    </a:lnL>
+                    <a:lnR w="0" cap="flat" cmpd="sng" algn="ctr">
+                      <a:noFill/>
+                    </a:lnR>
+                    <a:lnT w="0" cap="flat" cmpd="sng" algn="ctr">
+                      <a:noFill/>
+                    </a:lnT>
+                    <a:lnB w="6350" cap="flat" cmpd="sng" algn="ctr">
+                      <a:solidFill>
+                        <a:srgbClr val="E3E7E8"/>
+                      </a:solidFill>
+                      <a:prstDash val="solid"/>
+                      <a:round/>
+                      <a:headEnd type="none" w="med" len="med"/>
+                      <a:tailEnd type="none" w="med" len="med"/>
+                    </a:lnB>
+                    <a:solidFill>
+                      <a:srgbClr val="FFFFFF"/>
+                    </a:solidFill>
+                  </a:tcPr>
+                </a:tc>
+                <a:tc>
+                  <a:txBody>
+                    <a:bodyPr/>
+                    <a:lstStyle/>
+                    <a:p>
+                      <a:pPr indent="0" marL="0">
+                        <a:buNone/>
+                      </a:pPr>
+                      <a:r>
+                        <a:rPr lang="en-US" sz="1050" dirty="0">
+                          <a:solidFill>
+                            <a:srgbClr val="1C2A30"/>
+                          </a:solidFill>
+                          <a:latin typeface="Malgun Gothic" pitchFamily="34" charset="0"/>
+                          <a:ea typeface="Malgun Gothic" pitchFamily="34" charset="-122"/>
+                          <a:cs typeface="Malgun Gothic" pitchFamily="34" charset="-120"/>
+                        </a:rPr>
+                        <a:t>다음 광고 재개 결정, 블로그는 읽을거리 있는 글로</a:t>
+                      </a:r>
+                      <a:endParaRPr lang="en-US" sz="1050" dirty="0">
+                        <a:latin typeface="Malgun Gothic" charset="0"/>
+                        <a:ea typeface="Malgun Gothic" charset="0"/>
+                        <a:cs typeface="Malgun Gothic" charset="0"/>
+                      </a:endParaRPr>
+                    </a:p>
+                  </a:txBody>
+                  <a:tcPr marL="76200" marR="76200" marT="25400" marB="25400" anchor="ctr">
+                    <a:lnL w="0" cap="flat" cmpd="sng" algn="ctr">
+                      <a:noFill/>
+                    </a:lnL>
+                    <a:lnR w="0" cap="flat" cmpd="sng" algn="ctr">
+                      <a:noFill/>
+                    </a:lnR>
+                    <a:lnT w="0" cap="flat" cmpd="sng" algn="ctr">
+                      <a:noFill/>
+                    </a:lnT>
+                    <a:lnB w="6350" cap="flat" cmpd="sng" algn="ctr">
+                      <a:solidFill>
+                        <a:srgbClr val="E3E7E8"/>
+                      </a:solidFill>
+                      <a:prstDash val="solid"/>
+                      <a:round/>
+                      <a:headEnd type="none" w="med" len="med"/>
+                      <a:tailEnd type="none" w="med" len="med"/>
+                    </a:lnB>
+                    <a:solidFill>
+                      <a:srgbClr val="FFFFFF"/>
+                    </a:solidFill>
+                  </a:tcPr>
+                </a:tc>
+                <a:tc>
+                  <a:txBody>
+                    <a:bodyPr/>
+                    <a:lstStyle/>
+                    <a:p>
+                      <a:pPr indent="0" marL="0">
+                        <a:buNone/>
+                      </a:pPr>
+                      <a:r>
+                        <a:rPr lang="en-US" sz="1050" dirty="0">
                           <a:solidFill>
                             <a:srgbClr val="1C2A30"/>
                           </a:solidFill>
@@ -8883,44 +8980,26 @@
                         </a:rPr>
                         <a:t>다음·블로그 방문</a:t>
                       </a:r>
-                      <a:endParaRPr lang="en-US" sz="1000" dirty="0">
+                      <a:endParaRPr lang="en-US" sz="1050" dirty="0">
                         <a:latin typeface="Malgun Gothic" charset="0"/>
                         <a:ea typeface="Malgun Gothic" charset="0"/>
                         <a:cs typeface="Malgun Gothic" charset="0"/>
                       </a:endParaRPr>
                     </a:p>
                   </a:txBody>
-                  <a:tcPr marL="76200" marR="76200" marT="38100" marB="38100" anchor="ctr">
-                    <a:lnL w="6350" cap="flat" cmpd="sng" algn="ctr">
-                      <a:solidFill>
-                        <a:srgbClr val="DFE3E2"/>
-                      </a:solidFill>
-                      <a:prstDash val="solid"/>
-                      <a:round/>
-                      <a:headEnd type="none" w="med" len="med"/>
-                      <a:tailEnd type="none" w="med" len="med"/>
+                  <a:tcPr marL="76200" marR="76200" marT="25400" marB="25400" anchor="ctr">
+                    <a:lnL w="0" cap="flat" cmpd="sng" algn="ctr">
+                      <a:noFill/>
                     </a:lnL>
-                    <a:lnR w="6350" cap="flat" cmpd="sng" algn="ctr">
-                      <a:solidFill>
-                        <a:srgbClr val="DFE3E2"/>
-                      </a:solidFill>
-                      <a:prstDash val="solid"/>
-                      <a:round/>
-                      <a:headEnd type="none" w="med" len="med"/>
-                      <a:tailEnd type="none" w="med" len="med"/>
+                    <a:lnR w="0" cap="flat" cmpd="sng" algn="ctr">
+                      <a:noFill/>
                     </a:lnR>
-                    <a:lnT w="6350" cap="flat" cmpd="sng" algn="ctr">
-                      <a:solidFill>
-                        <a:srgbClr val="DFE3E2"/>
-                      </a:solidFill>
-                      <a:prstDash val="solid"/>
-                      <a:round/>
-                      <a:headEnd type="none" w="med" len="med"/>
-                      <a:tailEnd type="none" w="med" len="med"/>
+                    <a:lnT w="0" cap="flat" cmpd="sng" algn="ctr">
+                      <a:noFill/>
                     </a:lnT>
                     <a:lnB w="6350" cap="flat" cmpd="sng" algn="ctr">
                       <a:solidFill>
-                        <a:srgbClr val="DFE3E2"/>
+                        <a:srgbClr val="E3E7E8"/>
                       </a:solidFill>
                       <a:prstDash val="solid"/>
                       <a:round/>
@@ -8945,8 +9024,8 @@
         </p:nvSpPr>
         <p:spPr>
           <a:xfrm>
-            <a:off x="365760" y="2670048"/>
-            <a:ext cx="8412480" cy="566928"/>
+            <a:off x="457200" y="2724912"/>
+            <a:ext cx="8229600" cy="566928"/>
           </a:xfrm>
           <a:prstGeom prst="rect">
             <a:avLst/>
@@ -8970,8 +9049,8 @@
         </p:nvSpPr>
         <p:spPr>
           <a:xfrm>
-            <a:off x="502920" y="2670048"/>
-            <a:ext cx="8229600" cy="566928"/>
+            <a:off x="640080" y="2724912"/>
+            <a:ext cx="7863840" cy="566928"/>
           </a:xfrm>
           <a:prstGeom prst="rect">
             <a:avLst/>
@@ -9037,7 +9116,7 @@
                 <a:ea typeface="Malgun Gothic" pitchFamily="34" charset="-122"/>
                 <a:cs typeface="Malgun Gothic" pitchFamily="34" charset="-120"/>
               </a:rPr>
-              <a:t>     신청 </a:t>
+              <a:t>      신청 </a:t>
             </a:r>
             <a:pPr indent="0" marL="0">
               <a:buNone/>
@@ -9057,15 +9136,15 @@
               <a:buNone/>
             </a:pPr>
             <a:r>
-              <a:rPr lang="en-US" sz="850" dirty="0">
-                <a:solidFill>
-                  <a:srgbClr val="5D6B70"/>
-                </a:solidFill>
-                <a:latin typeface="Malgun Gothic" pitchFamily="34" charset="0"/>
-                <a:ea typeface="Malgun Gothic" pitchFamily="34" charset="-122"/>
-                <a:cs typeface="Malgun Gothic" pitchFamily="34" charset="-120"/>
-              </a:rPr>
-              <a:t>   (2024년 → 2020년 수준)</a:t>
+              <a:rPr lang="en-US" sz="900" dirty="0">
+                <a:solidFill>
+                  <a:srgbClr val="6B7A80"/>
+                </a:solidFill>
+                <a:latin typeface="Malgun Gothic" pitchFamily="34" charset="0"/>
+                <a:ea typeface="Malgun Gothic" pitchFamily="34" charset="-122"/>
+                <a:cs typeface="Malgun Gothic" pitchFamily="34" charset="-120"/>
+              </a:rPr>
+              <a:t>    (2024년 → 2020년 수준)</a:t>
             </a:r>
             <a:endParaRPr lang="en-US" sz="1100" dirty="0"/>
           </a:p>
@@ -9079,8 +9158,8 @@
         </p:nvSpPr>
         <p:spPr>
           <a:xfrm>
-            <a:off x="365760" y="3346704"/>
-            <a:ext cx="8412480" cy="237744"/>
+            <a:off x="457200" y="3419856"/>
+            <a:ext cx="8229600" cy="237744"/>
           </a:xfrm>
           <a:prstGeom prst="rect">
             <a:avLst/>
@@ -9096,9 +9175,9 @@
               <a:buNone/>
             </a:pPr>
             <a:r>
-              <a:rPr lang="en-US" sz="1050" b="1" dirty="0">
-                <a:solidFill>
-                  <a:srgbClr val="1C2A30"/>
+              <a:rPr lang="en-US" sz="1000" b="1" spc="100" kern="0" dirty="0">
+                <a:solidFill>
+                  <a:srgbClr val="6B7A80"/>
                 </a:solidFill>
                 <a:latin typeface="Malgun Gothic" pitchFamily="34" charset="0"/>
                 <a:ea typeface="Malgun Gothic" pitchFamily="34" charset="-122"/>
@@ -9106,7 +9185,7 @@
               </a:rPr>
               <a:t>한계</a:t>
             </a:r>
-            <a:endParaRPr lang="en-US" sz="1050" dirty="0"/>
+            <a:endParaRPr lang="en-US" sz="1000" dirty="0"/>
           </a:p>
         </p:txBody>
       </p:sp>
@@ -9118,8 +9197,8 @@
         </p:nvSpPr>
         <p:spPr>
           <a:xfrm>
-            <a:off x="365760" y="3584448"/>
-            <a:ext cx="8412480" cy="256032"/>
+            <a:off x="457200" y="3639312"/>
+            <a:ext cx="8229600" cy="237744"/>
           </a:xfrm>
           <a:prstGeom prst="rect">
             <a:avLst/>
@@ -9135,7 +9214,7 @@
               <a:buNone/>
             </a:pPr>
             <a:r>
-              <a:rPr lang="en-US" sz="1000" dirty="0">
+              <a:rPr lang="en-US" sz="1050" dirty="0">
                 <a:solidFill>
                   <a:srgbClr val="1C2A30"/>
                 </a:solidFill>
@@ -9143,9 +9222,9 @@
                 <a:ea typeface="Malgun Gothic" pitchFamily="34" charset="-122"/>
                 <a:cs typeface="Malgun Gothic" pitchFamily="34" charset="-120"/>
               </a:rPr>
-              <a:t>경로별 감소 원인은 추정  /  경로별 방문은 연도 합계  /  신청 뒤(전화·수임) 데이터 없음  /  광고는 클릭까지만</a:t>
-            </a:r>
-            <a:endParaRPr lang="en-US" sz="1000" dirty="0"/>
+              <a:t>경로별 감소 원인은 추정  ·  경로별 방문은 연도 합계  ·  신청 뒤(전화·수임) 데이터 없음  ·  광고는 클릭까지만</a:t>
+            </a:r>
+            <a:endParaRPr lang="en-US" sz="1050" dirty="0"/>
           </a:p>
         </p:txBody>
       </p:sp>
@@ -9157,8 +9236,8 @@
         </p:nvSpPr>
         <p:spPr>
           <a:xfrm>
-            <a:off x="365760" y="3931920"/>
-            <a:ext cx="8412480" cy="329184"/>
+            <a:off x="457200" y="3950208"/>
+            <a:ext cx="8229600" cy="310896"/>
           </a:xfrm>
           <a:prstGeom prst="rect">
             <a:avLst/>
@@ -9182,8 +9261,8 @@
         </p:nvSpPr>
         <p:spPr>
           <a:xfrm>
-            <a:off x="475488" y="3931920"/>
-            <a:ext cx="8229600" cy="329184"/>
+            <a:off x="566928" y="3950208"/>
+            <a:ext cx="8010144" cy="310896"/>
           </a:xfrm>
           <a:prstGeom prst="rect">
             <a:avLst/>
@@ -9199,7 +9278,7 @@
               <a:buNone/>
             </a:pPr>
             <a:r>
-              <a:rPr lang="en-US" sz="1000" b="1" dirty="0">
+              <a:rPr lang="en-US" sz="1050" b="1" dirty="0">
                 <a:solidFill>
                   <a:srgbClr val="1C2A30"/>
                 </a:solidFill>
@@ -9213,7 +9292,7 @@
               <a:buNone/>
             </a:pPr>
             <a:r>
-              <a:rPr lang="en-US" sz="1000" dirty="0">
+              <a:rPr lang="en-US" sz="1050" dirty="0">
                 <a:solidFill>
                   <a:srgbClr val="1C2A30"/>
                 </a:solidFill>
@@ -9223,7 +9302,7 @@
               </a:rPr>
               <a:t>변리사가 리포트를 읽고 action item을 반영하겠다고 답함</a:t>
             </a:r>
-            <a:endParaRPr lang="en-US" sz="1000" dirty="0"/>
+            <a:endParaRPr lang="en-US" sz="1050" dirty="0"/>
           </a:p>
         </p:txBody>
       </p:sp>
@@ -9235,8 +9314,8 @@
         </p:nvSpPr>
         <p:spPr>
           <a:xfrm>
-            <a:off x="365760" y="4352544"/>
-            <a:ext cx="8412480" cy="274320"/>
+            <a:off x="457200" y="4526280"/>
+            <a:ext cx="8229600" cy="274320"/>
           </a:xfrm>
           <a:prstGeom prst="rect">
             <a:avLst/>
@@ -9254,7 +9333,7 @@
             <a:r>
               <a:rPr lang="en-US" sz="950" b="1" dirty="0">
                 <a:solidFill>
-                  <a:srgbClr val="1C2A30"/>
+                  <a:srgbClr val="6B7A80"/>
                 </a:solidFill>
                 <a:latin typeface="Malgun Gothic" pitchFamily="34" charset="0"/>
                 <a:ea typeface="Malgun Gothic" pitchFamily="34" charset="-122"/>
@@ -9268,7 +9347,7 @@
             <a:r>
               <a:rPr lang="en-US" sz="950" dirty="0">
                 <a:solidFill>
-                  <a:srgbClr val="1C2A30"/>
+                  <a:srgbClr val="6B7A80"/>
                 </a:solidFill>
                 <a:latin typeface="Malgun Gothic" pitchFamily="34" charset="0"/>
                 <a:ea typeface="Malgun Gothic" pitchFamily="34" charset="-122"/>
@@ -9292,7 +9371,7 @@
         </p:nvSpPr>
         <p:spPr>
           <a:xfrm>
-            <a:off x="8458200" y="4864608"/>
+            <a:off x="8503920" y="4846320"/>
             <a:ext cx="365760" cy="201168"/>
           </a:xfrm>
           <a:prstGeom prst="rect">
@@ -9310,7 +9389,7 @@
             <a:lvl1pPr>
               <a:defRPr sz="800">
                 <a:solidFill>
-                  <a:srgbClr val="5D6B70"/>
+                  <a:srgbClr val="6B7A80"/>
                 </a:solidFill>
                 <a:latin typeface="Malgun Gothic"/>
                 <a:ea typeface="Malgun Gothic"/>

--- a/slides.pptx
+++ b/slides.pptx
@@ -4711,7 +4711,7 @@
                 <a:ea typeface="Malgun Gothic" pitchFamily="34" charset="-122"/>
                 <a:cs typeface="Malgun Gothic" pitchFamily="34" charset="-120"/>
               </a:rPr>
-              <a:t>무료진단 랜딩페이지 리뉴얼 — 데이터 분석</a:t>
+              <a:t>특허사무소 무료진단 신청 회복 — 랜딩 사이트·네이버 광고 개선</a:t>
             </a:r>
             <a:endParaRPr lang="en-US" sz="1900" dirty="0"/>
           </a:p>
@@ -5236,7 +5236,7 @@
                 <a:ea typeface="Malgun Gothic" pitchFamily="34" charset="-122"/>
                 <a:cs typeface="Malgun Gothic" pitchFamily="34" charset="-120"/>
               </a:rPr>
-              <a:t>새 사이트: 글자로, 첫 화면에 신청 칸, 분쟁 페이지</a:t>
+              <a:t>랜딩 사이트: 글자로, 첫 화면에 신청 칸, 분쟁 페이지</a:t>
             </a:r>
             <a:endParaRPr lang="en-US" sz="950" dirty="0"/>
           </a:p>

--- a/slides.pptx
+++ b/slides.pptx
@@ -4711,7 +4711,7 @@
                 <a:ea typeface="Malgun Gothic" pitchFamily="34" charset="-122"/>
                 <a:cs typeface="Malgun Gothic" pitchFamily="34" charset="-120"/>
               </a:rPr>
-              <a:t>특허사무소 무료진단 신청 회복 — 랜딩 사이트·네이버 광고 개선</a:t>
+              <a:t>특허사무소 무료진단 신청 회복 — 랜딩 사이트·광고 개선</a:t>
             </a:r>
             <a:endParaRPr lang="en-US" sz="1900" dirty="0"/>
           </a:p>

--- a/slides.pptx
+++ b/slides.pptx
@@ -547,6 +547,374 @@
     <c:autoTitleDeleted val="1"/>
     <c:plotArea>
       <c:layout/>
+      <c:barChart>
+        <c:barDir val="col"/>
+        <c:grouping val="stacked"/>
+        <c:varyColors val="0"/>
+        <c:ser>
+          <c:idx val="0"/>
+          <c:order val="0"/>
+          <c:tx>
+            <c:strRef>
+              <c:f>Sheet1!$B$1</c:f>
+              <c:strCache>
+                <c:ptCount val="1"/>
+                <c:pt idx="0">
+                  <c:v>방문</c:v>
+                </c:pt>
+              </c:strCache>
+            </c:strRef>
+          </c:tx>
+          <c:spPr>
+            <a:solidFill>
+              <a:srgbClr val="B8B6B0"/>
+            </a:solidFill>
+            <a:effectLst/>
+          </c:spPr>
+          <c:invertIfNegative val="0"/>
+          <c:dLbls>
+            <c:numFmt formatCode="#,##0;;;" sourceLinked="0"/>
+            <c:txPr>
+              <a:bodyPr/>
+              <a:lstStyle/>
+              <a:p>
+                <a:pPr>
+                  <a:defRPr b="0" i="0" strike="noStrike" sz="700" u="none">
+                    <a:solidFill>
+                      <a:srgbClr val="0B0B0B"/>
+                    </a:solidFill>
+                    <a:latin typeface="Arial"/>
+                  </a:defRPr>
+                </a:pPr>
+              </a:p>
+            </c:txPr>
+            <c:showLegendKey val="0"/>
+            <c:showVal val="1"/>
+            <c:showCatName val="0"/>
+            <c:showSerName val="0"/>
+            <c:showPercent val="0"/>
+            <c:showBubbleSize val="0"/>
+            <c:showLeaderLines val="0"/>
+          </c:dLbls>
+          <c:cat>
+            <c:multiLvlStrRef>
+              <c:f>Sheet1!$A$2:$A$8</c:f>
+              <c:multiLvlStrCache>
+                <c:ptCount val="7"/>
+                <c:lvl>
+                  <c:pt idx="0">
+                    <c:v>2015</c:v>
+                  </c:pt>
+                  <c:pt idx="1">
+                    <c:v>2018</c:v>
+                  </c:pt>
+                  <c:pt idx="2">
+                    <c:v>2020</c:v>
+                  </c:pt>
+                  <c:pt idx="3">
+                    <c:v>2021</c:v>
+                  </c:pt>
+                  <c:pt idx="4">
+                    <c:v>2022</c:v>
+                  </c:pt>
+                  <c:pt idx="5">
+                    <c:v>2023</c:v>
+                  </c:pt>
+                  <c:pt idx="6">
+                    <c:v>2024</c:v>
+                  </c:pt>
+                </c:lvl>
+              </c:multiLvlStrCache>
+            </c:multiLvlStrRef>
+          </c:cat>
+          <c:val>
+            <c:numRef>
+              <c:f>Sheet1!$B$2:$B$8</c:f>
+              <c:numCache>
+                <c:formatCode>General</c:formatCode>
+                <c:ptCount val="7"/>
+                <c:pt idx="0">
+                  <c:v>11253</c:v>
+                </c:pt>
+                <c:pt idx="1">
+                  <c:v>9345</c:v>
+                </c:pt>
+                <c:pt idx="2">
+                  <c:v>0</c:v>
+                </c:pt>
+                <c:pt idx="3">
+                  <c:v>0</c:v>
+                </c:pt>
+                <c:pt idx="4">
+                  <c:v>0</c:v>
+                </c:pt>
+                <c:pt idx="5">
+                  <c:v>3910</c:v>
+                </c:pt>
+                <c:pt idx="6">
+                  <c:v>3812</c:v>
+                </c:pt>
+              </c:numCache>
+            </c:numRef>
+          </c:val>
+        </c:ser>
+        <c:ser>
+          <c:idx val="1"/>
+          <c:order val="1"/>
+          <c:tx>
+            <c:strRef>
+              <c:f>Sheet1!$C$1</c:f>
+              <c:strCache>
+                <c:ptCount val="1"/>
+                <c:pt idx="0">
+                  <c:v>급감 구간</c:v>
+                </c:pt>
+              </c:strCache>
+            </c:strRef>
+          </c:tx>
+          <c:spPr>
+            <a:solidFill>
+              <a:srgbClr val="2A78D6"/>
+            </a:solidFill>
+            <a:effectLst/>
+          </c:spPr>
+          <c:invertIfNegative val="0"/>
+          <c:dLbls>
+            <c:numFmt formatCode="#,##0;;;" sourceLinked="0"/>
+            <c:txPr>
+              <a:bodyPr/>
+              <a:lstStyle/>
+              <a:p>
+                <a:pPr>
+                  <a:defRPr b="0" i="0" strike="noStrike" sz="700" u="none">
+                    <a:solidFill>
+                      <a:srgbClr val="0B0B0B"/>
+                    </a:solidFill>
+                    <a:latin typeface="Arial"/>
+                  </a:defRPr>
+                </a:pPr>
+              </a:p>
+            </c:txPr>
+            <c:showLegendKey val="0"/>
+            <c:showVal val="1"/>
+            <c:showCatName val="0"/>
+            <c:showSerName val="0"/>
+            <c:showPercent val="0"/>
+            <c:showBubbleSize val="0"/>
+            <c:showLeaderLines val="0"/>
+          </c:dLbls>
+          <c:cat>
+            <c:multiLvlStrRef>
+              <c:f>Sheet1!$A$2:$A$8</c:f>
+              <c:multiLvlStrCache>
+                <c:ptCount val="7"/>
+                <c:lvl>
+                  <c:pt idx="0">
+                    <c:v>2015</c:v>
+                  </c:pt>
+                  <c:pt idx="1">
+                    <c:v>2018</c:v>
+                  </c:pt>
+                  <c:pt idx="2">
+                    <c:v>2020</c:v>
+                  </c:pt>
+                  <c:pt idx="3">
+                    <c:v>2021</c:v>
+                  </c:pt>
+                  <c:pt idx="4">
+                    <c:v>2022</c:v>
+                  </c:pt>
+                  <c:pt idx="5">
+                    <c:v>2023</c:v>
+                  </c:pt>
+                  <c:pt idx="6">
+                    <c:v>2024</c:v>
+                  </c:pt>
+                </c:lvl>
+              </c:multiLvlStrCache>
+            </c:multiLvlStrRef>
+          </c:cat>
+          <c:val>
+            <c:numRef>
+              <c:f>Sheet1!$C$2:$C$8</c:f>
+              <c:numCache>
+                <c:formatCode>General</c:formatCode>
+                <c:ptCount val="7"/>
+                <c:pt idx="0">
+                  <c:v>0</c:v>
+                </c:pt>
+                <c:pt idx="1">
+                  <c:v>0</c:v>
+                </c:pt>
+                <c:pt idx="2">
+                  <c:v>6648</c:v>
+                </c:pt>
+                <c:pt idx="3">
+                  <c:v>4776</c:v>
+                </c:pt>
+                <c:pt idx="4">
+                  <c:v>3397</c:v>
+                </c:pt>
+                <c:pt idx="5">
+                  <c:v>0</c:v>
+                </c:pt>
+                <c:pt idx="6">
+                  <c:v>0</c:v>
+                </c:pt>
+              </c:numCache>
+            </c:numRef>
+          </c:val>
+        </c:ser>
+        <c:dLbls>
+          <c:numFmt formatCode="#,##0;;;" sourceLinked="0"/>
+          <c:txPr>
+            <a:bodyPr/>
+            <a:lstStyle/>
+            <a:p>
+              <a:pPr>
+                <a:defRPr b="0" i="0" strike="noStrike" sz="700" u="none">
+                  <a:solidFill>
+                    <a:srgbClr val="0B0B0B"/>
+                  </a:solidFill>
+                  <a:latin typeface="Arial"/>
+                </a:defRPr>
+              </a:pPr>
+            </a:p>
+          </c:txPr>
+          <c:showLegendKey val="0"/>
+          <c:showVal val="1"/>
+          <c:showCatName val="0"/>
+          <c:showSerName val="0"/>
+          <c:showPercent val="0"/>
+          <c:showBubbleSize val="0"/>
+          <c:showLeaderLines val="0"/>
+        </c:dLbls>
+        <c:gapWidth val="35"/>
+        <c:overlap val="100"/>
+        <c:axId val="2094734554"/>
+        <c:axId val="2094734552"/>
+        <c:axId val="2094734556"/>
+      </c:barChart>
+      <c:catAx>
+        <c:axId val="2094734554"/>
+        <c:scaling>
+          <c:orientation val="minMax"/>
+        </c:scaling>
+        <c:delete val="0"/>
+        <c:axPos val="b"/>
+        <c:numFmt formatCode="General" sourceLinked="1"/>
+        <c:majorTickMark val="out"/>
+        <c:minorTickMark val="none"/>
+        <c:tickLblPos val="low"/>
+        <c:spPr>
+          <a:ln w="12700" cap="flat">
+            <a:noFill/>
+            <a:prstDash val="solid"/>
+            <a:round/>
+          </a:ln>
+        </c:spPr>
+        <c:txPr>
+          <a:bodyPr/>
+          <a:lstStyle/>
+          <a:p>
+            <a:pPr>
+              <a:defRPr sz="700" b="0" i="0" u="none" strike="noStrike">
+                <a:solidFill>
+                  <a:srgbClr val="52514E"/>
+                </a:solidFill>
+                <a:latin typeface="Malgun Gothic"/>
+              </a:defRPr>
+            </a:pPr>
+            <a:endParaRPr lang="en-US"/>
+          </a:p>
+        </c:txPr>
+        <c:crossAx val="2094734552"/>
+        <c:crosses val="autoZero"/>
+        <c:auto val="1"/>
+        <c:lblAlgn val="ctr"/>
+        <c:noMultiLvlLbl val="1"/>
+      </c:catAx>
+      <c:valAx>
+        <c:axId val="2094734552"/>
+        <c:scaling>
+          <c:orientation val="minMax"/>
+        </c:scaling>
+        <c:delete val="1"/>
+        <c:axPos val="l"/>
+        <c:numFmt formatCode="General" sourceLinked="0"/>
+        <c:majorTickMark val="out"/>
+        <c:minorTickMark val="none"/>
+        <c:tickLblPos val="nextTo"/>
+        <c:spPr>
+          <a:ln w="12700" cap="flat">
+            <a:noFill/>
+            <a:prstDash val="solid"/>
+            <a:round/>
+          </a:ln>
+        </c:spPr>
+        <c:txPr>
+          <a:bodyPr/>
+          <a:lstStyle/>
+          <a:p>
+            <a:pPr>
+              <a:defRPr sz="750" b="0" i="0" u="none" strike="noStrike">
+                <a:solidFill>
+                  <a:srgbClr val="52514E"/>
+                </a:solidFill>
+                <a:latin typeface="Malgun Gothic"/>
+              </a:defRPr>
+            </a:pPr>
+            <a:endParaRPr lang="en-US"/>
+          </a:p>
+        </c:txPr>
+        <c:crossAx val="2094734554"/>
+        <c:crosses val="autoZero"/>
+        <c:crossBetween val="between"/>
+      </c:valAx>
+      <c:spPr>
+        <a:solidFill>
+          <a:srgbClr val="FFFFFF">
+            <a:alpha val="0"/>
+          </a:srgbClr>
+        </a:solidFill>
+        <a:ln w="12700" cap="flat">
+          <a:solidFill>
+            <a:srgbClr val="FFFFFF"/>
+          </a:solidFill>
+        </a:ln>
+        <a:effectLst/>
+      </c:spPr>
+    </c:plotArea>
+    <c:plotVisOnly val="1"/>
+    <c:dispBlanksAs val="span"/>
+  </c:chart>
+  <c:spPr>
+    <a:solidFill>
+      <a:srgbClr val="FFFFFF">
+        <a:alpha val="0"/>
+      </a:srgbClr>
+    </a:solidFill>
+    <a:ln w="12700" cap="flat">
+      <a:solidFill>
+        <a:srgbClr val="FFFFFF"/>
+      </a:solidFill>
+    </a:ln>
+    <a:effectLst/>
+  </c:spPr>
+  <c:externalData r:id="rId1">
+    <c:autoUpdate val="0"/>
+  </c:externalData>
+</c:chartSpace>
+</file>
+
+<file path=ppt/charts/chart3.xml><?xml version="1.0" encoding="utf-8"?>
+<c:chartSpace xmlns:c="http://schemas.openxmlformats.org/drawingml/2006/chart" xmlns:a="http://schemas.openxmlformats.org/drawingml/2006/main" xmlns:r="http://schemas.openxmlformats.org/officeDocument/2006/relationships">
+  <c:date1904 val="0"/>
+  <c:roundedCorners val="1"/>
+  <c:chart>
+    <c:autoTitleDeleted val="1"/>
+    <c:plotArea>
+      <c:layout/>
       <c:lineChart>
         <c:varyColors val="0"/>
         <c:ser>
@@ -1251,1450 +1619,6 @@
 </c:chartSpace>
 </file>
 
-<file path=ppt/charts/chart3.xml><?xml version="1.0" encoding="utf-8"?>
-<c:chartSpace xmlns:c="http://schemas.openxmlformats.org/drawingml/2006/chart" xmlns:a="http://schemas.openxmlformats.org/drawingml/2006/main" xmlns:r="http://schemas.openxmlformats.org/officeDocument/2006/relationships">
-  <c:date1904 val="0"/>
-  <c:roundedCorners val="1"/>
-  <c:chart>
-    <c:autoTitleDeleted val="1"/>
-    <c:plotArea>
-      <c:layout/>
-      <c:barChart>
-        <c:barDir val="col"/>
-        <c:grouping val="stacked"/>
-        <c:varyColors val="0"/>
-        <c:ser>
-          <c:idx val="0"/>
-          <c:order val="0"/>
-          <c:tx>
-            <c:strRef>
-              <c:f>Sheet1!$B$1</c:f>
-              <c:strCache>
-                <c:ptCount val="1"/>
-                <c:pt idx="0">
-                  <c:v>평소</c:v>
-                </c:pt>
-              </c:strCache>
-            </c:strRef>
-          </c:tx>
-          <c:spPr>
-            <a:solidFill>
-              <a:srgbClr val="2A78D6"/>
-            </a:solidFill>
-            <a:effectLst/>
-          </c:spPr>
-          <c:invertIfNegative val="0"/>
-          <c:dLbls>
-            <c:numFmt formatCode="#,##0" sourceLinked="0"/>
-            <c:txPr>
-              <a:bodyPr/>
-              <a:lstStyle/>
-              <a:p>
-                <a:pPr>
-                  <a:defRPr b="0" i="0" strike="noStrike" sz="1200" u="none">
-                    <a:solidFill>
-                      <a:srgbClr val="000000"/>
-                    </a:solidFill>
-                    <a:latin typeface="Arial"/>
-                  </a:defRPr>
-                </a:pPr>
-              </a:p>
-            </c:txPr>
-            <c:showLegendKey val="0"/>
-            <c:showVal val="0"/>
-            <c:showCatName val="0"/>
-            <c:showSerName val="0"/>
-            <c:showPercent val="0"/>
-            <c:showBubbleSize val="0"/>
-            <c:showLeaderLines val="0"/>
-          </c:dLbls>
-          <c:cat>
-            <c:multiLvlStrRef>
-              <c:f>Sheet1!$A$2:$A$61</c:f>
-              <c:multiLvlStrCache>
-                <c:ptCount val="60"/>
-                <c:lvl>
-                  <c:pt idx="0">
-                    <c:v>2019</c:v>
-                  </c:pt>
-                  <c:pt idx="1">
-                    <c:v/>
-                  </c:pt>
-                  <c:pt idx="2">
-                    <c:v/>
-                  </c:pt>
-                  <c:pt idx="3">
-                    <c:v/>
-                  </c:pt>
-                  <c:pt idx="4">
-                    <c:v/>
-                  </c:pt>
-                  <c:pt idx="5">
-                    <c:v/>
-                  </c:pt>
-                  <c:pt idx="6">
-                    <c:v/>
-                  </c:pt>
-                  <c:pt idx="7">
-                    <c:v/>
-                  </c:pt>
-                  <c:pt idx="8">
-                    <c:v/>
-                  </c:pt>
-                  <c:pt idx="9">
-                    <c:v/>
-                  </c:pt>
-                  <c:pt idx="10">
-                    <c:v/>
-                  </c:pt>
-                  <c:pt idx="11">
-                    <c:v/>
-                  </c:pt>
-                  <c:pt idx="12">
-                    <c:v>2020</c:v>
-                  </c:pt>
-                  <c:pt idx="13">
-                    <c:v/>
-                  </c:pt>
-                  <c:pt idx="14">
-                    <c:v/>
-                  </c:pt>
-                  <c:pt idx="15">
-                    <c:v/>
-                  </c:pt>
-                  <c:pt idx="16">
-                    <c:v/>
-                  </c:pt>
-                  <c:pt idx="17">
-                    <c:v/>
-                  </c:pt>
-                  <c:pt idx="18">
-                    <c:v/>
-                  </c:pt>
-                  <c:pt idx="19">
-                    <c:v/>
-                  </c:pt>
-                  <c:pt idx="20">
-                    <c:v/>
-                  </c:pt>
-                  <c:pt idx="21">
-                    <c:v/>
-                  </c:pt>
-                  <c:pt idx="22">
-                    <c:v/>
-                  </c:pt>
-                  <c:pt idx="23">
-                    <c:v/>
-                  </c:pt>
-                  <c:pt idx="24">
-                    <c:v>2021</c:v>
-                  </c:pt>
-                  <c:pt idx="25">
-                    <c:v/>
-                  </c:pt>
-                  <c:pt idx="26">
-                    <c:v/>
-                  </c:pt>
-                  <c:pt idx="27">
-                    <c:v/>
-                  </c:pt>
-                  <c:pt idx="28">
-                    <c:v/>
-                  </c:pt>
-                  <c:pt idx="29">
-                    <c:v/>
-                  </c:pt>
-                  <c:pt idx="30">
-                    <c:v/>
-                  </c:pt>
-                  <c:pt idx="31">
-                    <c:v/>
-                  </c:pt>
-                  <c:pt idx="32">
-                    <c:v/>
-                  </c:pt>
-                  <c:pt idx="33">
-                    <c:v/>
-                  </c:pt>
-                  <c:pt idx="34">
-                    <c:v/>
-                  </c:pt>
-                  <c:pt idx="35">
-                    <c:v/>
-                  </c:pt>
-                  <c:pt idx="36">
-                    <c:v>2022</c:v>
-                  </c:pt>
-                  <c:pt idx="37">
-                    <c:v/>
-                  </c:pt>
-                  <c:pt idx="38">
-                    <c:v/>
-                  </c:pt>
-                  <c:pt idx="39">
-                    <c:v/>
-                  </c:pt>
-                  <c:pt idx="40">
-                    <c:v/>
-                  </c:pt>
-                  <c:pt idx="41">
-                    <c:v/>
-                  </c:pt>
-                  <c:pt idx="42">
-                    <c:v/>
-                  </c:pt>
-                  <c:pt idx="43">
-                    <c:v/>
-                  </c:pt>
-                  <c:pt idx="44">
-                    <c:v/>
-                  </c:pt>
-                  <c:pt idx="45">
-                    <c:v/>
-                  </c:pt>
-                  <c:pt idx="46">
-                    <c:v/>
-                  </c:pt>
-                  <c:pt idx="47">
-                    <c:v/>
-                  </c:pt>
-                  <c:pt idx="48">
-                    <c:v>2023</c:v>
-                  </c:pt>
-                  <c:pt idx="49">
-                    <c:v/>
-                  </c:pt>
-                  <c:pt idx="50">
-                    <c:v/>
-                  </c:pt>
-                  <c:pt idx="51">
-                    <c:v/>
-                  </c:pt>
-                  <c:pt idx="52">
-                    <c:v/>
-                  </c:pt>
-                  <c:pt idx="53">
-                    <c:v/>
-                  </c:pt>
-                  <c:pt idx="54">
-                    <c:v/>
-                  </c:pt>
-                  <c:pt idx="55">
-                    <c:v/>
-                  </c:pt>
-                  <c:pt idx="56">
-                    <c:v/>
-                  </c:pt>
-                  <c:pt idx="57">
-                    <c:v/>
-                  </c:pt>
-                  <c:pt idx="58">
-                    <c:v/>
-                  </c:pt>
-                  <c:pt idx="59">
-                    <c:v/>
-                  </c:pt>
-                </c:lvl>
-              </c:multiLvlStrCache>
-            </c:multiLvlStrRef>
-          </c:cat>
-          <c:val>
-            <c:numRef>
-              <c:f>Sheet1!$B$2:$B$61</c:f>
-              <c:numCache>
-                <c:formatCode>General</c:formatCode>
-                <c:ptCount val="60"/>
-                <c:pt idx="0">
-                  <c:v>22</c:v>
-                </c:pt>
-                <c:pt idx="1">
-                  <c:v>14</c:v>
-                </c:pt>
-                <c:pt idx="2">
-                  <c:v>18</c:v>
-                </c:pt>
-                <c:pt idx="3">
-                  <c:v>13</c:v>
-                </c:pt>
-                <c:pt idx="4">
-                  <c:v>13</c:v>
-                </c:pt>
-                <c:pt idx="5">
-                  <c:v>12</c:v>
-                </c:pt>
-                <c:pt idx="6">
-                  <c:v>23</c:v>
-                </c:pt>
-                <c:pt idx="7">
-                  <c:v>12</c:v>
-                </c:pt>
-                <c:pt idx="8">
-                  <c:v>10</c:v>
-                </c:pt>
-                <c:pt idx="9">
-                  <c:v>22</c:v>
-                </c:pt>
-                <c:pt idx="10">
-                  <c:v>19</c:v>
-                </c:pt>
-                <c:pt idx="11">
-                  <c:v>31</c:v>
-                </c:pt>
-                <c:pt idx="12">
-                  <c:v>25</c:v>
-                </c:pt>
-                <c:pt idx="13">
-                  <c:v>26</c:v>
-                </c:pt>
-                <c:pt idx="14">
-                  <c:v>28</c:v>
-                </c:pt>
-                <c:pt idx="15">
-                  <c:v>25</c:v>
-                </c:pt>
-                <c:pt idx="16">
-                  <c:v>32</c:v>
-                </c:pt>
-                <c:pt idx="17">
-                  <c:v>28</c:v>
-                </c:pt>
-                <c:pt idx="18">
-                  <c:v>23</c:v>
-                </c:pt>
-                <c:pt idx="19">
-                  <c:v>26</c:v>
-                </c:pt>
-                <c:pt idx="20">
-                  <c:v>21</c:v>
-                </c:pt>
-                <c:pt idx="21">
-                  <c:v>15</c:v>
-                </c:pt>
-                <c:pt idx="22">
-                  <c:v>23</c:v>
-                </c:pt>
-                <c:pt idx="23">
-                  <c:v>19</c:v>
-                </c:pt>
-                <c:pt idx="24">
-                  <c:v>19</c:v>
-                </c:pt>
-                <c:pt idx="25">
-                  <c:v>19</c:v>
-                </c:pt>
-                <c:pt idx="26">
-                  <c:v>20</c:v>
-                </c:pt>
-                <c:pt idx="27">
-                  <c:v>20</c:v>
-                </c:pt>
-                <c:pt idx="28">
-                  <c:v>0</c:v>
-                </c:pt>
-                <c:pt idx="29">
-                  <c:v>0</c:v>
-                </c:pt>
-                <c:pt idx="30">
-                  <c:v>0</c:v>
-                </c:pt>
-                <c:pt idx="31">
-                  <c:v>0</c:v>
-                </c:pt>
-                <c:pt idx="32">
-                  <c:v>0</c:v>
-                </c:pt>
-                <c:pt idx="33">
-                  <c:v>0</c:v>
-                </c:pt>
-                <c:pt idx="34">
-                  <c:v>0</c:v>
-                </c:pt>
-                <c:pt idx="35">
-                  <c:v>0</c:v>
-                </c:pt>
-                <c:pt idx="36">
-                  <c:v>0</c:v>
-                </c:pt>
-                <c:pt idx="37">
-                  <c:v>0</c:v>
-                </c:pt>
-                <c:pt idx="38">
-                  <c:v>0</c:v>
-                </c:pt>
-                <c:pt idx="39">
-                  <c:v>0</c:v>
-                </c:pt>
-                <c:pt idx="40">
-                  <c:v>0</c:v>
-                </c:pt>
-                <c:pt idx="41">
-                  <c:v>0</c:v>
-                </c:pt>
-                <c:pt idx="42">
-                  <c:v>0</c:v>
-                </c:pt>
-                <c:pt idx="43">
-                  <c:v>0</c:v>
-                </c:pt>
-                <c:pt idx="44">
-                  <c:v>13</c:v>
-                </c:pt>
-                <c:pt idx="45">
-                  <c:v>8</c:v>
-                </c:pt>
-                <c:pt idx="46">
-                  <c:v>4</c:v>
-                </c:pt>
-                <c:pt idx="47">
-                  <c:v>4</c:v>
-                </c:pt>
-                <c:pt idx="48">
-                  <c:v>3</c:v>
-                </c:pt>
-                <c:pt idx="49">
-                  <c:v>8</c:v>
-                </c:pt>
-                <c:pt idx="50">
-                  <c:v>2</c:v>
-                </c:pt>
-                <c:pt idx="51">
-                  <c:v>9</c:v>
-                </c:pt>
-                <c:pt idx="52">
-                  <c:v>10</c:v>
-                </c:pt>
-                <c:pt idx="53">
-                  <c:v>13</c:v>
-                </c:pt>
-                <c:pt idx="54">
-                  <c:v>5</c:v>
-                </c:pt>
-                <c:pt idx="55">
-                  <c:v>8</c:v>
-                </c:pt>
-                <c:pt idx="56">
-                  <c:v>6</c:v>
-                </c:pt>
-                <c:pt idx="57">
-                  <c:v>7</c:v>
-                </c:pt>
-                <c:pt idx="58">
-                  <c:v>10</c:v>
-                </c:pt>
-                <c:pt idx="59">
-                  <c:v>6</c:v>
-                </c:pt>
-              </c:numCache>
-            </c:numRef>
-          </c:val>
-        </c:ser>
-        <c:ser>
-          <c:idx val="1"/>
-          <c:order val="1"/>
-          <c:tx>
-            <c:strRef>
-              <c:f>Sheet1!$C$1</c:f>
-              <c:strCache>
-                <c:ptCount val="1"/>
-                <c:pt idx="0">
-                  <c:v>첫 꺾임</c:v>
-                </c:pt>
-              </c:strCache>
-            </c:strRef>
-          </c:tx>
-          <c:spPr>
-            <a:solidFill>
-              <a:srgbClr val="EDA100"/>
-            </a:solidFill>
-            <a:effectLst/>
-          </c:spPr>
-          <c:invertIfNegative val="0"/>
-          <c:dLbls>
-            <c:numFmt formatCode="#,##0" sourceLinked="0"/>
-            <c:txPr>
-              <a:bodyPr/>
-              <a:lstStyle/>
-              <a:p>
-                <a:pPr>
-                  <a:defRPr b="0" i="0" strike="noStrike" sz="1200" u="none">
-                    <a:solidFill>
-                      <a:srgbClr val="000000"/>
-                    </a:solidFill>
-                    <a:latin typeface="Arial"/>
-                  </a:defRPr>
-                </a:pPr>
-              </a:p>
-            </c:txPr>
-            <c:showLegendKey val="0"/>
-            <c:showVal val="0"/>
-            <c:showCatName val="0"/>
-            <c:showSerName val="0"/>
-            <c:showPercent val="0"/>
-            <c:showBubbleSize val="0"/>
-            <c:showLeaderLines val="0"/>
-          </c:dLbls>
-          <c:cat>
-            <c:multiLvlStrRef>
-              <c:f>Sheet1!$A$2:$A$61</c:f>
-              <c:multiLvlStrCache>
-                <c:ptCount val="60"/>
-                <c:lvl>
-                  <c:pt idx="0">
-                    <c:v>2019</c:v>
-                  </c:pt>
-                  <c:pt idx="1">
-                    <c:v/>
-                  </c:pt>
-                  <c:pt idx="2">
-                    <c:v/>
-                  </c:pt>
-                  <c:pt idx="3">
-                    <c:v/>
-                  </c:pt>
-                  <c:pt idx="4">
-                    <c:v/>
-                  </c:pt>
-                  <c:pt idx="5">
-                    <c:v/>
-                  </c:pt>
-                  <c:pt idx="6">
-                    <c:v/>
-                  </c:pt>
-                  <c:pt idx="7">
-                    <c:v/>
-                  </c:pt>
-                  <c:pt idx="8">
-                    <c:v/>
-                  </c:pt>
-                  <c:pt idx="9">
-                    <c:v/>
-                  </c:pt>
-                  <c:pt idx="10">
-                    <c:v/>
-                  </c:pt>
-                  <c:pt idx="11">
-                    <c:v/>
-                  </c:pt>
-                  <c:pt idx="12">
-                    <c:v>2020</c:v>
-                  </c:pt>
-                  <c:pt idx="13">
-                    <c:v/>
-                  </c:pt>
-                  <c:pt idx="14">
-                    <c:v/>
-                  </c:pt>
-                  <c:pt idx="15">
-                    <c:v/>
-                  </c:pt>
-                  <c:pt idx="16">
-                    <c:v/>
-                  </c:pt>
-                  <c:pt idx="17">
-                    <c:v/>
-                  </c:pt>
-                  <c:pt idx="18">
-                    <c:v/>
-                  </c:pt>
-                  <c:pt idx="19">
-                    <c:v/>
-                  </c:pt>
-                  <c:pt idx="20">
-                    <c:v/>
-                  </c:pt>
-                  <c:pt idx="21">
-                    <c:v/>
-                  </c:pt>
-                  <c:pt idx="22">
-                    <c:v/>
-                  </c:pt>
-                  <c:pt idx="23">
-                    <c:v/>
-                  </c:pt>
-                  <c:pt idx="24">
-                    <c:v>2021</c:v>
-                  </c:pt>
-                  <c:pt idx="25">
-                    <c:v/>
-                  </c:pt>
-                  <c:pt idx="26">
-                    <c:v/>
-                  </c:pt>
-                  <c:pt idx="27">
-                    <c:v/>
-                  </c:pt>
-                  <c:pt idx="28">
-                    <c:v/>
-                  </c:pt>
-                  <c:pt idx="29">
-                    <c:v/>
-                  </c:pt>
-                  <c:pt idx="30">
-                    <c:v/>
-                  </c:pt>
-                  <c:pt idx="31">
-                    <c:v/>
-                  </c:pt>
-                  <c:pt idx="32">
-                    <c:v/>
-                  </c:pt>
-                  <c:pt idx="33">
-                    <c:v/>
-                  </c:pt>
-                  <c:pt idx="34">
-                    <c:v/>
-                  </c:pt>
-                  <c:pt idx="35">
-                    <c:v/>
-                  </c:pt>
-                  <c:pt idx="36">
-                    <c:v>2022</c:v>
-                  </c:pt>
-                  <c:pt idx="37">
-                    <c:v/>
-                  </c:pt>
-                  <c:pt idx="38">
-                    <c:v/>
-                  </c:pt>
-                  <c:pt idx="39">
-                    <c:v/>
-                  </c:pt>
-                  <c:pt idx="40">
-                    <c:v/>
-                  </c:pt>
-                  <c:pt idx="41">
-                    <c:v/>
-                  </c:pt>
-                  <c:pt idx="42">
-                    <c:v/>
-                  </c:pt>
-                  <c:pt idx="43">
-                    <c:v/>
-                  </c:pt>
-                  <c:pt idx="44">
-                    <c:v/>
-                  </c:pt>
-                  <c:pt idx="45">
-                    <c:v/>
-                  </c:pt>
-                  <c:pt idx="46">
-                    <c:v/>
-                  </c:pt>
-                  <c:pt idx="47">
-                    <c:v/>
-                  </c:pt>
-                  <c:pt idx="48">
-                    <c:v>2023</c:v>
-                  </c:pt>
-                  <c:pt idx="49">
-                    <c:v/>
-                  </c:pt>
-                  <c:pt idx="50">
-                    <c:v/>
-                  </c:pt>
-                  <c:pt idx="51">
-                    <c:v/>
-                  </c:pt>
-                  <c:pt idx="52">
-                    <c:v/>
-                  </c:pt>
-                  <c:pt idx="53">
-                    <c:v/>
-                  </c:pt>
-                  <c:pt idx="54">
-                    <c:v/>
-                  </c:pt>
-                  <c:pt idx="55">
-                    <c:v/>
-                  </c:pt>
-                  <c:pt idx="56">
-                    <c:v/>
-                  </c:pt>
-                  <c:pt idx="57">
-                    <c:v/>
-                  </c:pt>
-                  <c:pt idx="58">
-                    <c:v/>
-                  </c:pt>
-                  <c:pt idx="59">
-                    <c:v/>
-                  </c:pt>
-                </c:lvl>
-              </c:multiLvlStrCache>
-            </c:multiLvlStrRef>
-          </c:cat>
-          <c:val>
-            <c:numRef>
-              <c:f>Sheet1!$C$2:$C$61</c:f>
-              <c:numCache>
-                <c:formatCode>General</c:formatCode>
-                <c:ptCount val="60"/>
-                <c:pt idx="0">
-                  <c:v>0</c:v>
-                </c:pt>
-                <c:pt idx="1">
-                  <c:v>0</c:v>
-                </c:pt>
-                <c:pt idx="2">
-                  <c:v>0</c:v>
-                </c:pt>
-                <c:pt idx="3">
-                  <c:v>0</c:v>
-                </c:pt>
-                <c:pt idx="4">
-                  <c:v>0</c:v>
-                </c:pt>
-                <c:pt idx="5">
-                  <c:v>0</c:v>
-                </c:pt>
-                <c:pt idx="6">
-                  <c:v>0</c:v>
-                </c:pt>
-                <c:pt idx="7">
-                  <c:v>0</c:v>
-                </c:pt>
-                <c:pt idx="8">
-                  <c:v>0</c:v>
-                </c:pt>
-                <c:pt idx="9">
-                  <c:v>0</c:v>
-                </c:pt>
-                <c:pt idx="10">
-                  <c:v>0</c:v>
-                </c:pt>
-                <c:pt idx="11">
-                  <c:v>0</c:v>
-                </c:pt>
-                <c:pt idx="12">
-                  <c:v>0</c:v>
-                </c:pt>
-                <c:pt idx="13">
-                  <c:v>0</c:v>
-                </c:pt>
-                <c:pt idx="14">
-                  <c:v>0</c:v>
-                </c:pt>
-                <c:pt idx="15">
-                  <c:v>0</c:v>
-                </c:pt>
-                <c:pt idx="16">
-                  <c:v>0</c:v>
-                </c:pt>
-                <c:pt idx="17">
-                  <c:v>0</c:v>
-                </c:pt>
-                <c:pt idx="18">
-                  <c:v>0</c:v>
-                </c:pt>
-                <c:pt idx="19">
-                  <c:v>0</c:v>
-                </c:pt>
-                <c:pt idx="20">
-                  <c:v>0</c:v>
-                </c:pt>
-                <c:pt idx="21">
-                  <c:v>0</c:v>
-                </c:pt>
-                <c:pt idx="22">
-                  <c:v>0</c:v>
-                </c:pt>
-                <c:pt idx="23">
-                  <c:v>0</c:v>
-                </c:pt>
-                <c:pt idx="24">
-                  <c:v>0</c:v>
-                </c:pt>
-                <c:pt idx="25">
-                  <c:v>0</c:v>
-                </c:pt>
-                <c:pt idx="26">
-                  <c:v>0</c:v>
-                </c:pt>
-                <c:pt idx="27">
-                  <c:v>0</c:v>
-                </c:pt>
-                <c:pt idx="28">
-                  <c:v>13</c:v>
-                </c:pt>
-                <c:pt idx="29">
-                  <c:v>13</c:v>
-                </c:pt>
-                <c:pt idx="30">
-                  <c:v>13</c:v>
-                </c:pt>
-                <c:pt idx="31">
-                  <c:v>12</c:v>
-                </c:pt>
-                <c:pt idx="32">
-                  <c:v>9</c:v>
-                </c:pt>
-                <c:pt idx="33">
-                  <c:v>0</c:v>
-                </c:pt>
-                <c:pt idx="34">
-                  <c:v>0</c:v>
-                </c:pt>
-                <c:pt idx="35">
-                  <c:v>0</c:v>
-                </c:pt>
-                <c:pt idx="36">
-                  <c:v>0</c:v>
-                </c:pt>
-                <c:pt idx="37">
-                  <c:v>0</c:v>
-                </c:pt>
-                <c:pt idx="38">
-                  <c:v>0</c:v>
-                </c:pt>
-                <c:pt idx="39">
-                  <c:v>0</c:v>
-                </c:pt>
-                <c:pt idx="40">
-                  <c:v>0</c:v>
-                </c:pt>
-                <c:pt idx="41">
-                  <c:v>0</c:v>
-                </c:pt>
-                <c:pt idx="42">
-                  <c:v>0</c:v>
-                </c:pt>
-                <c:pt idx="43">
-                  <c:v>0</c:v>
-                </c:pt>
-                <c:pt idx="44">
-                  <c:v>0</c:v>
-                </c:pt>
-                <c:pt idx="45">
-                  <c:v>0</c:v>
-                </c:pt>
-                <c:pt idx="46">
-                  <c:v>0</c:v>
-                </c:pt>
-                <c:pt idx="47">
-                  <c:v>0</c:v>
-                </c:pt>
-                <c:pt idx="48">
-                  <c:v>0</c:v>
-                </c:pt>
-                <c:pt idx="49">
-                  <c:v>0</c:v>
-                </c:pt>
-                <c:pt idx="50">
-                  <c:v>0</c:v>
-                </c:pt>
-                <c:pt idx="51">
-                  <c:v>0</c:v>
-                </c:pt>
-                <c:pt idx="52">
-                  <c:v>0</c:v>
-                </c:pt>
-                <c:pt idx="53">
-                  <c:v>0</c:v>
-                </c:pt>
-                <c:pt idx="54">
-                  <c:v>0</c:v>
-                </c:pt>
-                <c:pt idx="55">
-                  <c:v>0</c:v>
-                </c:pt>
-                <c:pt idx="56">
-                  <c:v>0</c:v>
-                </c:pt>
-                <c:pt idx="57">
-                  <c:v>0</c:v>
-                </c:pt>
-                <c:pt idx="58">
-                  <c:v>0</c:v>
-                </c:pt>
-                <c:pt idx="59">
-                  <c:v>0</c:v>
-                </c:pt>
-              </c:numCache>
-            </c:numRef>
-          </c:val>
-        </c:ser>
-        <c:ser>
-          <c:idx val="2"/>
-          <c:order val="2"/>
-          <c:tx>
-            <c:strRef>
-              <c:f>Sheet1!$D$1</c:f>
-              <c:strCache>
-                <c:ptCount val="1"/>
-                <c:pt idx="0">
-                  <c:v>둘째 꺾임</c:v>
-                </c:pt>
-              </c:strCache>
-            </c:strRef>
-          </c:tx>
-          <c:spPr>
-            <a:solidFill>
-              <a:srgbClr val="EB6834"/>
-            </a:solidFill>
-            <a:effectLst/>
-          </c:spPr>
-          <c:invertIfNegative val="0"/>
-          <c:dLbls>
-            <c:numFmt formatCode="#,##0" sourceLinked="0"/>
-            <c:txPr>
-              <a:bodyPr/>
-              <a:lstStyle/>
-              <a:p>
-                <a:pPr>
-                  <a:defRPr b="0" i="0" strike="noStrike" sz="1200" u="none">
-                    <a:solidFill>
-                      <a:srgbClr val="000000"/>
-                    </a:solidFill>
-                    <a:latin typeface="Arial"/>
-                  </a:defRPr>
-                </a:pPr>
-              </a:p>
-            </c:txPr>
-            <c:showLegendKey val="0"/>
-            <c:showVal val="0"/>
-            <c:showCatName val="0"/>
-            <c:showSerName val="0"/>
-            <c:showPercent val="0"/>
-            <c:showBubbleSize val="0"/>
-            <c:showLeaderLines val="0"/>
-          </c:dLbls>
-          <c:cat>
-            <c:multiLvlStrRef>
-              <c:f>Sheet1!$A$2:$A$61</c:f>
-              <c:multiLvlStrCache>
-                <c:ptCount val="60"/>
-                <c:lvl>
-                  <c:pt idx="0">
-                    <c:v>2019</c:v>
-                  </c:pt>
-                  <c:pt idx="1">
-                    <c:v/>
-                  </c:pt>
-                  <c:pt idx="2">
-                    <c:v/>
-                  </c:pt>
-                  <c:pt idx="3">
-                    <c:v/>
-                  </c:pt>
-                  <c:pt idx="4">
-                    <c:v/>
-                  </c:pt>
-                  <c:pt idx="5">
-                    <c:v/>
-                  </c:pt>
-                  <c:pt idx="6">
-                    <c:v/>
-                  </c:pt>
-                  <c:pt idx="7">
-                    <c:v/>
-                  </c:pt>
-                  <c:pt idx="8">
-                    <c:v/>
-                  </c:pt>
-                  <c:pt idx="9">
-                    <c:v/>
-                  </c:pt>
-                  <c:pt idx="10">
-                    <c:v/>
-                  </c:pt>
-                  <c:pt idx="11">
-                    <c:v/>
-                  </c:pt>
-                  <c:pt idx="12">
-                    <c:v>2020</c:v>
-                  </c:pt>
-                  <c:pt idx="13">
-                    <c:v/>
-                  </c:pt>
-                  <c:pt idx="14">
-                    <c:v/>
-                  </c:pt>
-                  <c:pt idx="15">
-                    <c:v/>
-                  </c:pt>
-                  <c:pt idx="16">
-                    <c:v/>
-                  </c:pt>
-                  <c:pt idx="17">
-                    <c:v/>
-                  </c:pt>
-                  <c:pt idx="18">
-                    <c:v/>
-                  </c:pt>
-                  <c:pt idx="19">
-                    <c:v/>
-                  </c:pt>
-                  <c:pt idx="20">
-                    <c:v/>
-                  </c:pt>
-                  <c:pt idx="21">
-                    <c:v/>
-                  </c:pt>
-                  <c:pt idx="22">
-                    <c:v/>
-                  </c:pt>
-                  <c:pt idx="23">
-                    <c:v/>
-                  </c:pt>
-                  <c:pt idx="24">
-                    <c:v>2021</c:v>
-                  </c:pt>
-                  <c:pt idx="25">
-                    <c:v/>
-                  </c:pt>
-                  <c:pt idx="26">
-                    <c:v/>
-                  </c:pt>
-                  <c:pt idx="27">
-                    <c:v/>
-                  </c:pt>
-                  <c:pt idx="28">
-                    <c:v/>
-                  </c:pt>
-                  <c:pt idx="29">
-                    <c:v/>
-                  </c:pt>
-                  <c:pt idx="30">
-                    <c:v/>
-                  </c:pt>
-                  <c:pt idx="31">
-                    <c:v/>
-                  </c:pt>
-                  <c:pt idx="32">
-                    <c:v/>
-                  </c:pt>
-                  <c:pt idx="33">
-                    <c:v/>
-                  </c:pt>
-                  <c:pt idx="34">
-                    <c:v/>
-                  </c:pt>
-                  <c:pt idx="35">
-                    <c:v/>
-                  </c:pt>
-                  <c:pt idx="36">
-                    <c:v>2022</c:v>
-                  </c:pt>
-                  <c:pt idx="37">
-                    <c:v/>
-                  </c:pt>
-                  <c:pt idx="38">
-                    <c:v/>
-                  </c:pt>
-                  <c:pt idx="39">
-                    <c:v/>
-                  </c:pt>
-                  <c:pt idx="40">
-                    <c:v/>
-                  </c:pt>
-                  <c:pt idx="41">
-                    <c:v/>
-                  </c:pt>
-                  <c:pt idx="42">
-                    <c:v/>
-                  </c:pt>
-                  <c:pt idx="43">
-                    <c:v/>
-                  </c:pt>
-                  <c:pt idx="44">
-                    <c:v/>
-                  </c:pt>
-                  <c:pt idx="45">
-                    <c:v/>
-                  </c:pt>
-                  <c:pt idx="46">
-                    <c:v/>
-                  </c:pt>
-                  <c:pt idx="47">
-                    <c:v/>
-                  </c:pt>
-                  <c:pt idx="48">
-                    <c:v>2023</c:v>
-                  </c:pt>
-                  <c:pt idx="49">
-                    <c:v/>
-                  </c:pt>
-                  <c:pt idx="50">
-                    <c:v/>
-                  </c:pt>
-                  <c:pt idx="51">
-                    <c:v/>
-                  </c:pt>
-                  <c:pt idx="52">
-                    <c:v/>
-                  </c:pt>
-                  <c:pt idx="53">
-                    <c:v/>
-                  </c:pt>
-                  <c:pt idx="54">
-                    <c:v/>
-                  </c:pt>
-                  <c:pt idx="55">
-                    <c:v/>
-                  </c:pt>
-                  <c:pt idx="56">
-                    <c:v/>
-                  </c:pt>
-                  <c:pt idx="57">
-                    <c:v/>
-                  </c:pt>
-                  <c:pt idx="58">
-                    <c:v/>
-                  </c:pt>
-                  <c:pt idx="59">
-                    <c:v/>
-                  </c:pt>
-                </c:lvl>
-              </c:multiLvlStrCache>
-            </c:multiLvlStrRef>
-          </c:cat>
-          <c:val>
-            <c:numRef>
-              <c:f>Sheet1!$D$2:$D$61</c:f>
-              <c:numCache>
-                <c:formatCode>General</c:formatCode>
-                <c:ptCount val="60"/>
-                <c:pt idx="0">
-                  <c:v>0</c:v>
-                </c:pt>
-                <c:pt idx="1">
-                  <c:v>0</c:v>
-                </c:pt>
-                <c:pt idx="2">
-                  <c:v>0</c:v>
-                </c:pt>
-                <c:pt idx="3">
-                  <c:v>0</c:v>
-                </c:pt>
-                <c:pt idx="4">
-                  <c:v>0</c:v>
-                </c:pt>
-                <c:pt idx="5">
-                  <c:v>0</c:v>
-                </c:pt>
-                <c:pt idx="6">
-                  <c:v>0</c:v>
-                </c:pt>
-                <c:pt idx="7">
-                  <c:v>0</c:v>
-                </c:pt>
-                <c:pt idx="8">
-                  <c:v>0</c:v>
-                </c:pt>
-                <c:pt idx="9">
-                  <c:v>0</c:v>
-                </c:pt>
-                <c:pt idx="10">
-                  <c:v>0</c:v>
-                </c:pt>
-                <c:pt idx="11">
-                  <c:v>0</c:v>
-                </c:pt>
-                <c:pt idx="12">
-                  <c:v>0</c:v>
-                </c:pt>
-                <c:pt idx="13">
-                  <c:v>0</c:v>
-                </c:pt>
-                <c:pt idx="14">
-                  <c:v>0</c:v>
-                </c:pt>
-                <c:pt idx="15">
-                  <c:v>0</c:v>
-                </c:pt>
-                <c:pt idx="16">
-                  <c:v>0</c:v>
-                </c:pt>
-                <c:pt idx="17">
-                  <c:v>0</c:v>
-                </c:pt>
-                <c:pt idx="18">
-                  <c:v>0</c:v>
-                </c:pt>
-                <c:pt idx="19">
-                  <c:v>0</c:v>
-                </c:pt>
-                <c:pt idx="20">
-                  <c:v>0</c:v>
-                </c:pt>
-                <c:pt idx="21">
-                  <c:v>0</c:v>
-                </c:pt>
-                <c:pt idx="22">
-                  <c:v>0</c:v>
-                </c:pt>
-                <c:pt idx="23">
-                  <c:v>0</c:v>
-                </c:pt>
-                <c:pt idx="24">
-                  <c:v>0</c:v>
-                </c:pt>
-                <c:pt idx="25">
-                  <c:v>0</c:v>
-                </c:pt>
-                <c:pt idx="26">
-                  <c:v>0</c:v>
-                </c:pt>
-                <c:pt idx="27">
-                  <c:v>0</c:v>
-                </c:pt>
-                <c:pt idx="28">
-                  <c:v>0</c:v>
-                </c:pt>
-                <c:pt idx="29">
-                  <c:v>0</c:v>
-                </c:pt>
-                <c:pt idx="30">
-                  <c:v>0</c:v>
-                </c:pt>
-                <c:pt idx="31">
-                  <c:v>0</c:v>
-                </c:pt>
-                <c:pt idx="32">
-                  <c:v>0</c:v>
-                </c:pt>
-                <c:pt idx="33">
-                  <c:v>5</c:v>
-                </c:pt>
-                <c:pt idx="34">
-                  <c:v>3</c:v>
-                </c:pt>
-                <c:pt idx="35">
-                  <c:v>7</c:v>
-                </c:pt>
-                <c:pt idx="36">
-                  <c:v>9</c:v>
-                </c:pt>
-                <c:pt idx="37">
-                  <c:v>4</c:v>
-                </c:pt>
-                <c:pt idx="38">
-                  <c:v>3</c:v>
-                </c:pt>
-                <c:pt idx="39">
-                  <c:v>7</c:v>
-                </c:pt>
-                <c:pt idx="40">
-                  <c:v>5</c:v>
-                </c:pt>
-                <c:pt idx="41">
-                  <c:v>2</c:v>
-                </c:pt>
-                <c:pt idx="42">
-                  <c:v>3</c:v>
-                </c:pt>
-                <c:pt idx="43">
-                  <c:v>8</c:v>
-                </c:pt>
-                <c:pt idx="44">
-                  <c:v>0</c:v>
-                </c:pt>
-                <c:pt idx="45">
-                  <c:v>0</c:v>
-                </c:pt>
-                <c:pt idx="46">
-                  <c:v>0</c:v>
-                </c:pt>
-                <c:pt idx="47">
-                  <c:v>0</c:v>
-                </c:pt>
-                <c:pt idx="48">
-                  <c:v>0</c:v>
-                </c:pt>
-                <c:pt idx="49">
-                  <c:v>0</c:v>
-                </c:pt>
-                <c:pt idx="50">
-                  <c:v>0</c:v>
-                </c:pt>
-                <c:pt idx="51">
-                  <c:v>0</c:v>
-                </c:pt>
-                <c:pt idx="52">
-                  <c:v>0</c:v>
-                </c:pt>
-                <c:pt idx="53">
-                  <c:v>0</c:v>
-                </c:pt>
-                <c:pt idx="54">
-                  <c:v>0</c:v>
-                </c:pt>
-                <c:pt idx="55">
-                  <c:v>0</c:v>
-                </c:pt>
-                <c:pt idx="56">
-                  <c:v>0</c:v>
-                </c:pt>
-                <c:pt idx="57">
-                  <c:v>0</c:v>
-                </c:pt>
-                <c:pt idx="58">
-                  <c:v>0</c:v>
-                </c:pt>
-                <c:pt idx="59">
-                  <c:v>0</c:v>
-                </c:pt>
-              </c:numCache>
-            </c:numRef>
-          </c:val>
-        </c:ser>
-        <c:dLbls>
-          <c:numFmt formatCode="#,##0" sourceLinked="0"/>
-          <c:txPr>
-            <a:bodyPr/>
-            <a:lstStyle/>
-            <a:p>
-              <a:pPr>
-                <a:defRPr b="0" i="0" strike="noStrike" sz="1200" u="none">
-                  <a:solidFill>
-                    <a:srgbClr val="000000"/>
-                  </a:solidFill>
-                  <a:latin typeface="Arial"/>
-                </a:defRPr>
-              </a:pPr>
-            </a:p>
-          </c:txPr>
-          <c:showLegendKey val="0"/>
-          <c:showVal val="0"/>
-          <c:showCatName val="0"/>
-          <c:showSerName val="0"/>
-          <c:showPercent val="0"/>
-          <c:showBubbleSize val="0"/>
-          <c:showLeaderLines val="0"/>
-        </c:dLbls>
-        <c:gapWidth val="30"/>
-        <c:overlap val="100"/>
-        <c:axId val="2094734554"/>
-        <c:axId val="2094734552"/>
-        <c:axId val="2094734556"/>
-      </c:barChart>
-      <c:catAx>
-        <c:axId val="2094734554"/>
-        <c:scaling>
-          <c:orientation val="minMax"/>
-        </c:scaling>
-        <c:delete val="0"/>
-        <c:axPos val="b"/>
-        <c:numFmt formatCode="General" sourceLinked="1"/>
-        <c:majorTickMark val="out"/>
-        <c:minorTickMark val="none"/>
-        <c:tickLblPos val="low"/>
-        <c:spPr>
-          <a:ln w="12700" cap="flat">
-            <a:noFill/>
-            <a:prstDash val="solid"/>
-            <a:round/>
-          </a:ln>
-        </c:spPr>
-        <c:txPr>
-          <a:bodyPr/>
-          <a:lstStyle/>
-          <a:p>
-            <a:pPr>
-              <a:defRPr sz="750" b="0" i="0" u="none" strike="noStrike">
-                <a:solidFill>
-                  <a:srgbClr val="52514E"/>
-                </a:solidFill>
-                <a:latin typeface="Malgun Gothic"/>
-              </a:defRPr>
-            </a:pPr>
-            <a:endParaRPr lang="en-US"/>
-          </a:p>
-        </c:txPr>
-        <c:crossAx val="2094734552"/>
-        <c:crosses val="autoZero"/>
-        <c:auto val="1"/>
-        <c:lblAlgn val="ctr"/>
-        <c:noMultiLvlLbl val="1"/>
-        <c:tickLblSkip val="1"/>
-      </c:catAx>
-      <c:valAx>
-        <c:axId val="2094734552"/>
-        <c:scaling>
-          <c:orientation val="minMax"/>
-          <c:max val="35"/>
-          <c:min val="0"/>
-        </c:scaling>
-        <c:delete val="0"/>
-        <c:axPos val="l"/>
-        <c:majorGridlines>
-          <c:spPr>
-            <a:ln w="6350" cap="flat">
-              <a:solidFill>
-                <a:srgbClr val="E6E5E1"/>
-              </a:solidFill>
-              <a:prstDash val="solid"/>
-              <a:round/>
-            </a:ln>
-          </c:spPr>
-        </c:majorGridlines>
-        <c:numFmt formatCode="General" sourceLinked="0"/>
-        <c:majorTickMark val="out"/>
-        <c:minorTickMark val="none"/>
-        <c:tickLblPos val="nextTo"/>
-        <c:spPr>
-          <a:ln w="12700" cap="flat">
-            <a:noFill/>
-            <a:prstDash val="solid"/>
-            <a:round/>
-          </a:ln>
-        </c:spPr>
-        <c:txPr>
-          <a:bodyPr/>
-          <a:lstStyle/>
-          <a:p>
-            <a:pPr>
-              <a:defRPr sz="750" b="0" i="0" u="none" strike="noStrike">
-                <a:solidFill>
-                  <a:srgbClr val="52514E"/>
-                </a:solidFill>
-                <a:latin typeface="Malgun Gothic"/>
-              </a:defRPr>
-            </a:pPr>
-            <a:endParaRPr lang="en-US"/>
-          </a:p>
-        </c:txPr>
-        <c:crossAx val="2094734554"/>
-        <c:crosses val="autoZero"/>
-        <c:crossBetween val="between"/>
-        <c:majorUnit val="10"/>
-      </c:valAx>
-      <c:spPr>
-        <a:solidFill>
-          <a:srgbClr val="FFFFFF">
-            <a:alpha val="0"/>
-          </a:srgbClr>
-        </a:solidFill>
-        <a:ln w="12700" cap="flat">
-          <a:solidFill>
-            <a:srgbClr val="FFFFFF"/>
-          </a:solidFill>
-        </a:ln>
-        <a:effectLst/>
-      </c:spPr>
-    </c:plotArea>
-    <c:plotVisOnly val="1"/>
-    <c:dispBlanksAs val="span"/>
-  </c:chart>
-  <c:spPr>
-    <a:solidFill>
-      <a:srgbClr val="FFFFFF">
-        <a:alpha val="0"/>
-      </a:srgbClr>
-    </a:solidFill>
-    <a:ln w="12700" cap="flat">
-      <a:solidFill>
-        <a:srgbClr val="FFFFFF"/>
-      </a:solidFill>
-    </a:ln>
-    <a:effectLst/>
-  </c:spPr>
-  <c:externalData r:id="rId1">
-    <c:autoUpdate val="0"/>
-  </c:externalData>
-</c:chartSpace>
-</file>
-
 <file path=ppt/charts/chart4.xml><?xml version="1.0" encoding="utf-8"?>
 <c:chartSpace xmlns:c="http://schemas.openxmlformats.org/drawingml/2006/chart" xmlns:a="http://schemas.openxmlformats.org/drawingml/2006/main" xmlns:r="http://schemas.openxmlformats.org/officeDocument/2006/relationships">
   <c:date1904 val="0"/>
@@ -2735,7 +1659,7 @@
               <a:lstStyle/>
               <a:p>
                 <a:pPr>
-                  <a:defRPr b="0" i="0" strike="noStrike" sz="900" u="none">
+                  <a:defRPr b="0" i="0" strike="noStrike" sz="850" u="none">
                     <a:solidFill>
                       <a:srgbClr val="0B0B0B"/>
                     </a:solidFill>
@@ -2842,7 +1766,7 @@
               <a:lstStyle/>
               <a:p>
                 <a:pPr>
-                  <a:defRPr b="0" i="0" strike="noStrike" sz="900" u="none">
+                  <a:defRPr b="0" i="0" strike="noStrike" sz="850" u="none">
                     <a:solidFill>
                       <a:srgbClr val="0B0B0B"/>
                     </a:solidFill>
@@ -2928,7 +1852,7 @@
             <a:lstStyle/>
             <a:p>
               <a:pPr>
-                <a:defRPr b="0" i="0" strike="noStrike" sz="900" u="none">
+                <a:defRPr b="0" i="0" strike="noStrike" sz="850" u="none">
                   <a:solidFill>
                     <a:srgbClr val="0B0B0B"/>
                   </a:solidFill>
@@ -2945,7 +1869,7 @@
           <c:showBubbleSize val="0"/>
           <c:showLeaderLines val="0"/>
         </c:dLbls>
-        <c:gapWidth val="40"/>
+        <c:gapWidth val="35"/>
         <c:overlap val="100"/>
         <c:axId val="2094734554"/>
         <c:axId val="2094734552"/>
@@ -2974,7 +1898,7 @@
           <a:lstStyle/>
           <a:p>
             <a:pPr>
-              <a:defRPr sz="850" b="0" i="0" u="none" strike="noStrike">
+              <a:defRPr sz="800" b="0" i="0" u="none" strike="noStrike">
                 <a:solidFill>
                   <a:srgbClr val="52514E"/>
                 </a:solidFill>
@@ -3405,7 +2329,7 @@
         <a:lstStyle/>
         <a:p>
           <a:pPr>
-            <a:defRPr sz="750">
+            <a:defRPr sz="700">
               <a:latin typeface="Malgun Gothic"/>
               <a:cs typeface="Malgun Gothic"/>
             </a:defRPr>
@@ -5490,7 +4414,7 @@
         <p:spPr>
           <a:xfrm>
             <a:off x="411480" y="658368"/>
-            <a:ext cx="4069080" cy="237744"/>
+            <a:ext cx="2514600" cy="237744"/>
           </a:xfrm>
           <a:prstGeom prst="rect">
             <a:avLst/>
@@ -5506,7 +4430,7 @@
               <a:buNone/>
             </a:pPr>
             <a:r>
-              <a:rPr lang="en-US" sz="1100" b="1" dirty="0">
+              <a:rPr lang="en-US" sz="1050" b="1" dirty="0">
                 <a:solidFill>
                   <a:srgbClr val="0B0B0B"/>
                 </a:solidFill>
@@ -5514,9 +4438,9 @@
                 <a:ea typeface="Malgun Gothic" pitchFamily="34" charset="-122"/>
                 <a:cs typeface="Malgun Gothic" pitchFamily="34" charset="-120"/>
               </a:rPr>
-              <a:t>끊긴 것은 다음·블로그·네이버 검색이다. 광고는 가장 덜 줄었다</a:t>
-            </a:r>
-            <a:endParaRPr lang="en-US" sz="1100" dirty="0"/>
+              <a:t>방문은 2020→2022년에 절반</a:t>
+            </a:r>
+            <a:endParaRPr lang="en-US" sz="1050" dirty="0"/>
           </a:p>
         </p:txBody>
       </p:sp>
@@ -5529,7 +4453,7 @@
         <p:spPr>
           <a:xfrm>
             <a:off x="411480" y="896112"/>
-            <a:ext cx="4069080" cy="182880"/>
+            <a:ext cx="2514600" cy="182880"/>
           </a:xfrm>
           <a:prstGeom prst="rect">
             <a:avLst/>
@@ -5553,22 +4477,201 @@
                 <a:ea typeface="Malgun Gothic" pitchFamily="34" charset="-122"/>
                 <a:cs typeface="Malgun Gothic" pitchFamily="34" charset="-120"/>
               </a:rPr>
-              <a:t>유입 경로별 연간 방문 (서버 기록. 추이로만 봄)</a:t>
+              <a:t>봇을 뺀 실제 방문 추정, 명</a:t>
             </a:r>
             <a:endParaRPr lang="en-US" sz="800" dirty="0"/>
           </a:p>
         </p:txBody>
       </p:sp>
-      <p:sp>
-        <p:nvSpPr>
-          <p:cNvPr id="5" name="Shape 3"/>
+      <p:graphicFrame>
+        <p:nvGraphicFramePr>
+          <p:cNvPr id="5" name="Chart 0" descr=""/>
+          <p:cNvGraphicFramePr/>
+          <p:nvPr/>
+        </p:nvGraphicFramePr>
+        <p:xfrm>
+          <a:off x="338328" y="1097280"/>
+          <a:ext cx="2606040" cy="1965960"/>
+        </p:xfrm>
+        <a:graphic xmlns:a="http://schemas.openxmlformats.org/drawingml/2006/main">
+          <a:graphicData uri="http://schemas.openxmlformats.org/drawingml/2006/chart">
+            <c:chart xmlns:c="http://schemas.openxmlformats.org/drawingml/2006/chart" r:id="rId1"/>
+          </a:graphicData>
+        </a:graphic>
+      </p:graphicFrame>
+      <p:sp>
+        <p:nvSpPr>
+          <p:cNvPr id="6" name="Text 3"/>
+          <p:cNvSpPr txBox="1"/>
+          <p:nvPr/>
+        </p:nvSpPr>
+        <p:spPr>
+          <a:xfrm>
+            <a:off x="411480" y="3072384"/>
+            <a:ext cx="2514600" cy="365760"/>
+          </a:xfrm>
+          <a:prstGeom prst="rect">
+            <a:avLst/>
+          </a:prstGeom>
+          <a:noFill/>
+          <a:ln/>
+        </p:spPr>
+        <p:txBody>
+          <a:bodyPr wrap="square" lIns="0" tIns="0" rIns="0" bIns="0" rtlCol="0" anchor="t"/>
+          <a:lstStyle/>
+          <a:p>
+            <a:pPr indent="0" marL="0">
+              <a:spcAft>
+                <a:spcPts val="300"/>
+              </a:spcAft>
+              <a:buNone/>
+            </a:pPr>
+            <a:r>
+              <a:rPr lang="en-US" sz="750" b="1" dirty="0">
+                <a:solidFill>
+                  <a:srgbClr val="0B0B0B"/>
+                </a:solidFill>
+                <a:latin typeface="Malgun Gothic" pitchFamily="34" charset="0"/>
+                <a:ea typeface="Malgun Gothic" pitchFamily="34" charset="-122"/>
+                <a:cs typeface="Malgun Gothic" pitchFamily="34" charset="-120"/>
+              </a:rPr>
+              <a:t>봇 추정 = OS가 Robot·Linux인 방문을 뺌</a:t>
+            </a:r>
+            <a:endParaRPr lang="en-US" sz="750" dirty="0"/>
+          </a:p>
+          <a:p>
+            <a:pPr indent="0" marL="0">
+              <a:spcAft>
+                <a:spcPts val="300"/>
+              </a:spcAft>
+              <a:buNone/>
+            </a:pPr>
+            <a:r>
+              <a:rPr lang="en-US" sz="750" dirty="0">
+                <a:solidFill>
+                  <a:srgbClr val="0B0B0B"/>
+                </a:solidFill>
+                <a:latin typeface="Malgun Gothic" pitchFamily="34" charset="0"/>
+                <a:ea typeface="Malgun Gothic" pitchFamily="34" charset="-122"/>
+                <a:cs typeface="Malgun Gothic" pitchFamily="34" charset="-120"/>
+              </a:rPr>
+              <a:t>근거: 2021-10부터 방문이 월 900 → 2,100인데 신청은 12 → 5, 급증분은 전부 경로 없는 "직접"</a:t>
+            </a:r>
+            <a:endParaRPr lang="en-US" sz="750" dirty="0"/>
+          </a:p>
+        </p:txBody>
+      </p:sp>
+      <p:sp>
+        <p:nvSpPr>
+          <p:cNvPr id="7" name="Shape 4"/>
           <p:cNvSpPr/>
           <p:nvPr/>
         </p:nvSpPr>
         <p:spPr>
           <a:xfrm>
-            <a:off x="1472184" y="1216152"/>
-            <a:ext cx="1106424" cy="1673352"/>
+            <a:off x="3063240" y="685800"/>
+            <a:ext cx="0" cy="2743200"/>
+          </a:xfrm>
+          <a:prstGeom prst="line">
+            <a:avLst/>
+          </a:prstGeom>
+          <a:noFill/>
+          <a:ln w="12700">
+            <a:solidFill>
+              <a:srgbClr val="DFE3E2"/>
+            </a:solidFill>
+            <a:prstDash val="solid"/>
+          </a:ln>
+        </p:spPr>
+      </p:sp>
+      <p:sp>
+        <p:nvSpPr>
+          <p:cNvPr id="8" name="Text 5"/>
+          <p:cNvSpPr txBox="1"/>
+          <p:nvPr/>
+        </p:nvSpPr>
+        <p:spPr>
+          <a:xfrm>
+            <a:off x="3200400" y="658368"/>
+            <a:ext cx="5532120" cy="237744"/>
+          </a:xfrm>
+          <a:prstGeom prst="rect">
+            <a:avLst/>
+          </a:prstGeom>
+          <a:noFill/>
+          <a:ln/>
+        </p:spPr>
+        <p:txBody>
+          <a:bodyPr wrap="square" lIns="0" tIns="0" rIns="0" bIns="0" rtlCol="0" anchor="ctr"/>
+          <a:lstStyle/>
+          <a:p>
+            <a:pPr indent="0" marL="0">
+              <a:buNone/>
+            </a:pPr>
+            <a:r>
+              <a:rPr lang="en-US" sz="1050" b="1" dirty="0">
+                <a:solidFill>
+                  <a:srgbClr val="0B0B0B"/>
+                </a:solidFill>
+                <a:latin typeface="Malgun Gothic" pitchFamily="34" charset="0"/>
+                <a:ea typeface="Malgun Gothic" pitchFamily="34" charset="-122"/>
+                <a:cs typeface="Malgun Gothic" pitchFamily="34" charset="-120"/>
+              </a:rPr>
+              <a:t>끊긴 것은 다음·블로그·네이버 검색이다. 광고는 가장 덜 줄었다</a:t>
+            </a:r>
+            <a:endParaRPr lang="en-US" sz="1050" dirty="0"/>
+          </a:p>
+        </p:txBody>
+      </p:sp>
+      <p:sp>
+        <p:nvSpPr>
+          <p:cNvPr id="9" name="Text 6"/>
+          <p:cNvSpPr txBox="1"/>
+          <p:nvPr/>
+        </p:nvSpPr>
+        <p:spPr>
+          <a:xfrm>
+            <a:off x="3200400" y="896112"/>
+            <a:ext cx="5532120" cy="182880"/>
+          </a:xfrm>
+          <a:prstGeom prst="rect">
+            <a:avLst/>
+          </a:prstGeom>
+          <a:noFill/>
+          <a:ln/>
+        </p:spPr>
+        <p:txBody>
+          <a:bodyPr wrap="square" lIns="0" tIns="0" rIns="0" bIns="0" rtlCol="0" anchor="ctr"/>
+          <a:lstStyle/>
+          <a:p>
+            <a:pPr indent="0" marL="0">
+              <a:buNone/>
+            </a:pPr>
+            <a:r>
+              <a:rPr lang="en-US" sz="800" dirty="0">
+                <a:solidFill>
+                  <a:srgbClr val="52514E"/>
+                </a:solidFill>
+                <a:latin typeface="Malgun Gothic" pitchFamily="34" charset="0"/>
+                <a:ea typeface="Malgun Gothic" pitchFamily="34" charset="-122"/>
+                <a:cs typeface="Malgun Gothic" pitchFamily="34" charset="-120"/>
+              </a:rPr>
+              <a:t>경로별 연간 방문 (서버 기록, "직접" 제외. 출처를 놓치는 경우가 많아 추이로만 봄)</a:t>
+            </a:r>
+            <a:endParaRPr lang="en-US" sz="800" dirty="0"/>
+          </a:p>
+        </p:txBody>
+      </p:sp>
+      <p:sp>
+        <p:nvSpPr>
+          <p:cNvPr id="10" name="Shape 7"/>
+          <p:cNvSpPr/>
+          <p:nvPr/>
+        </p:nvSpPr>
+        <p:spPr>
+          <a:xfrm>
+            <a:off x="5138928" y="1216152"/>
+            <a:ext cx="896112" cy="1737360"/>
           </a:xfrm>
           <a:prstGeom prst="rect">
             <a:avLst/>
@@ -5586,14 +4689,14 @@
       </p:sp>
       <p:sp>
         <p:nvSpPr>
-          <p:cNvPr id="6" name="Text 4"/>
+          <p:cNvPr id="11" name="Text 8"/>
           <p:cNvSpPr txBox="1"/>
           <p:nvPr/>
         </p:nvSpPr>
         <p:spPr>
           <a:xfrm>
-            <a:off x="1472184" y="1069848"/>
-            <a:ext cx="1106424" cy="137160"/>
+            <a:off x="5138928" y="1069848"/>
+            <a:ext cx="896112" cy="137160"/>
           </a:xfrm>
           <a:prstGeom prst="rect">
             <a:avLst/>
@@ -5625,107 +4728,13 @@
       </p:sp>
       <p:graphicFrame>
         <p:nvGraphicFramePr>
-          <p:cNvPr id="7" name="Chart 0" descr=""/>
+          <p:cNvPr id="12" name="Chart 1" descr=""/>
           <p:cNvGraphicFramePr/>
           <p:nvPr/>
         </p:nvGraphicFramePr>
         <p:xfrm>
-          <a:off x="320040" y="1097280"/>
-          <a:ext cx="4206240" cy="2057400"/>
-        </p:xfrm>
-        <a:graphic xmlns:a="http://schemas.openxmlformats.org/drawingml/2006/main">
-          <a:graphicData uri="http://schemas.openxmlformats.org/drawingml/2006/chart">
-            <c:chart xmlns:c="http://schemas.openxmlformats.org/drawingml/2006/chart" r:id="rId1"/>
-          </a:graphicData>
-        </a:graphic>
-      </p:graphicFrame>
-      <p:sp>
-        <p:nvSpPr>
-          <p:cNvPr id="8" name="Text 5"/>
-          <p:cNvSpPr txBox="1"/>
-          <p:nvPr/>
-        </p:nvSpPr>
-        <p:spPr>
-          <a:xfrm>
-            <a:off x="4663440" y="658368"/>
-            <a:ext cx="4069080" cy="237744"/>
-          </a:xfrm>
-          <a:prstGeom prst="rect">
-            <a:avLst/>
-          </a:prstGeom>
-          <a:noFill/>
-          <a:ln/>
-        </p:spPr>
-        <p:txBody>
-          <a:bodyPr wrap="square" lIns="0" tIns="0" rIns="0" bIns="0" rtlCol="0" anchor="ctr"/>
-          <a:lstStyle/>
-          <a:p>
-            <a:pPr indent="0" marL="0">
-              <a:buNone/>
-            </a:pPr>
-            <a:r>
-              <a:rPr lang="en-US" sz="1100" b="1" dirty="0">
-                <a:solidFill>
-                  <a:srgbClr val="0B0B0B"/>
-                </a:solidFill>
-                <a:latin typeface="Malgun Gothic" pitchFamily="34" charset="0"/>
-                <a:ea typeface="Malgun Gothic" pitchFamily="34" charset="-122"/>
-                <a:cs typeface="Malgun Gothic" pitchFamily="34" charset="-120"/>
-              </a:rPr>
-              <a:t>신청은 2021년 5월에 한 번, 10월에 다시 꺾였다</a:t>
-            </a:r>
-            <a:endParaRPr lang="en-US" sz="1100" dirty="0"/>
-          </a:p>
-        </p:txBody>
-      </p:sp>
-      <p:sp>
-        <p:nvSpPr>
-          <p:cNvPr id="9" name="Text 6"/>
-          <p:cNvSpPr txBox="1"/>
-          <p:nvPr/>
-        </p:nvSpPr>
-        <p:spPr>
-          <a:xfrm>
-            <a:off x="4663440" y="896112"/>
-            <a:ext cx="4069080" cy="182880"/>
-          </a:xfrm>
-          <a:prstGeom prst="rect">
-            <a:avLst/>
-          </a:prstGeom>
-          <a:noFill/>
-          <a:ln/>
-        </p:spPr>
-        <p:txBody>
-          <a:bodyPr wrap="square" lIns="0" tIns="0" rIns="0" bIns="0" rtlCol="0" anchor="ctr"/>
-          <a:lstStyle/>
-          <a:p>
-            <a:pPr indent="0" marL="0">
-              <a:buNone/>
-            </a:pPr>
-            <a:r>
-              <a:rPr lang="en-US" sz="800" dirty="0">
-                <a:solidFill>
-                  <a:srgbClr val="52514E"/>
-                </a:solidFill>
-                <a:latin typeface="Malgun Gothic" pitchFamily="34" charset="0"/>
-                <a:ea typeface="Malgun Gothic" pitchFamily="34" charset="-122"/>
-                <a:cs typeface="Malgun Gothic" pitchFamily="34" charset="-120"/>
-              </a:rPr>
-              <a:t>월별 신청 건수 (게시판, 2019-01 ~ 2023-12) · 10월은 네이버 검색 개편과 같은 달</a:t>
-            </a:r>
-            <a:endParaRPr lang="en-US" sz="800" dirty="0"/>
-          </a:p>
-        </p:txBody>
-      </p:sp>
-      <p:graphicFrame>
-        <p:nvGraphicFramePr>
-          <p:cNvPr id="10" name="Chart 1" descr=""/>
-          <p:cNvGraphicFramePr/>
-          <p:nvPr/>
-        </p:nvGraphicFramePr>
-        <p:xfrm>
-          <a:off x="4590288" y="1097280"/>
-          <a:ext cx="4160520" cy="2057400"/>
+          <a:off x="3108960" y="1097280"/>
+          <a:ext cx="5669280" cy="2103120"/>
         </p:xfrm>
         <a:graphic xmlns:a="http://schemas.openxmlformats.org/drawingml/2006/main">
           <a:graphicData uri="http://schemas.openxmlformats.org/drawingml/2006/chart">
@@ -5735,14 +4744,14 @@
       </p:graphicFrame>
       <p:sp>
         <p:nvSpPr>
-          <p:cNvPr id="11" name="Text 7"/>
+          <p:cNvPr id="13" name="Text 9"/>
           <p:cNvSpPr txBox="1"/>
           <p:nvPr/>
         </p:nvSpPr>
         <p:spPr>
           <a:xfrm>
-            <a:off x="4663440" y="3127248"/>
-            <a:ext cx="4069080" cy="182880"/>
+            <a:off x="3200400" y="3200400"/>
+            <a:ext cx="5532120" cy="201168"/>
           </a:xfrm>
           <a:prstGeom prst="rect">
             <a:avLst/>
@@ -5760,55 +4769,13 @@
             <a:r>
               <a:rPr lang="en-US" sz="850" b="1" dirty="0">
                 <a:solidFill>
-                  <a:srgbClr val="B07A00"/>
-                </a:solidFill>
-                <a:latin typeface="Malgun Gothic" pitchFamily="34" charset="0"/>
-                <a:ea typeface="Malgun Gothic" pitchFamily="34" charset="-122"/>
-                <a:cs typeface="Malgun Gothic" pitchFamily="34" charset="-120"/>
-              </a:rPr>
-              <a:t>2021-05  </a:t>
-            </a:r>
-            <a:pPr indent="0" marL="0">
-              <a:buNone/>
-            </a:pPr>
-            <a:r>
-              <a:rPr lang="en-US" sz="850" dirty="0">
-                <a:solidFill>
                   <a:srgbClr val="0B0B0B"/>
                 </a:solidFill>
                 <a:latin typeface="Malgun Gothic" pitchFamily="34" charset="0"/>
                 <a:ea typeface="Malgun Gothic" pitchFamily="34" charset="-122"/>
                 <a:cs typeface="Malgun Gothic" pitchFamily="34" charset="-120"/>
               </a:rPr>
-              <a:t>월 20 → 13건</a:t>
-            </a:r>
-            <a:pPr indent="0" marL="0">
-              <a:buNone/>
-            </a:pPr>
-            <a:r>
-              <a:rPr lang="en-US" sz="850" b="1" dirty="0">
-                <a:solidFill>
-                  <a:srgbClr val="EB6834"/>
-                </a:solidFill>
-                <a:latin typeface="Malgun Gothic" pitchFamily="34" charset="0"/>
-                <a:ea typeface="Malgun Gothic" pitchFamily="34" charset="-122"/>
-                <a:cs typeface="Malgun Gothic" pitchFamily="34" charset="-120"/>
-              </a:rPr>
-              <a:t>      2021-10  </a:t>
-            </a:r>
-            <a:pPr indent="0" marL="0">
-              <a:buNone/>
-            </a:pPr>
-            <a:r>
-              <a:rPr lang="en-US" sz="850" dirty="0">
-                <a:solidFill>
-                  <a:srgbClr val="0B0B0B"/>
-                </a:solidFill>
-                <a:latin typeface="Malgun Gothic" pitchFamily="34" charset="0"/>
-                <a:ea typeface="Malgun Gothic" pitchFamily="34" charset="-122"/>
-                <a:cs typeface="Malgun Gothic" pitchFamily="34" charset="-120"/>
-              </a:rPr>
-              <a:t>월 13 → 5건 이하</a:t>
+              <a:t>2020 → 2022:  다음 −99% · 네이버 블로그 −93% · 네이버 검색 −54% · 네이버 광고 −40%  (신청 −77%)</a:t>
             </a:r>
             <a:endParaRPr lang="en-US" sz="850" dirty="0"/>
           </a:p>
@@ -5816,14 +4783,14 @@
       </p:sp>
       <p:sp>
         <p:nvSpPr>
-          <p:cNvPr id="12" name="Shape 8"/>
+          <p:cNvPr id="14" name="Shape 10"/>
           <p:cNvSpPr/>
           <p:nvPr/>
         </p:nvSpPr>
         <p:spPr>
           <a:xfrm>
-            <a:off x="411480" y="3401568"/>
-            <a:ext cx="45720" cy="987552"/>
+            <a:off x="411480" y="3493008"/>
+            <a:ext cx="45720" cy="914400"/>
           </a:xfrm>
           <a:prstGeom prst="rect">
             <a:avLst/>
@@ -5841,13 +4808,13 @@
       </p:sp>
       <p:sp>
         <p:nvSpPr>
-          <p:cNvPr id="13" name="Text 9"/>
+          <p:cNvPr id="15" name="Text 11"/>
           <p:cNvSpPr txBox="1"/>
           <p:nvPr/>
         </p:nvSpPr>
         <p:spPr>
           <a:xfrm>
-            <a:off x="521208" y="3401568"/>
+            <a:off x="521208" y="3493008"/>
             <a:ext cx="1901952" cy="219456"/>
           </a:xfrm>
           <a:prstGeom prst="rect">
@@ -5880,14 +4847,14 @@
       </p:sp>
       <p:sp>
         <p:nvSpPr>
-          <p:cNvPr id="14" name="Text 10"/>
+          <p:cNvPr id="16" name="Text 12"/>
           <p:cNvSpPr txBox="1"/>
           <p:nvPr/>
         </p:nvSpPr>
         <p:spPr>
           <a:xfrm>
-            <a:off x="521208" y="3630168"/>
-            <a:ext cx="1901952" cy="502920"/>
+            <a:off x="521208" y="3712464"/>
+            <a:ext cx="1901952" cy="457200"/>
           </a:xfrm>
           <a:prstGeom prst="rect">
             <a:avLst/>
@@ -5903,7 +4870,7 @@
               <a:buNone/>
             </a:pPr>
             <a:r>
-              <a:rPr lang="en-US" sz="850" dirty="0">
+              <a:rPr lang="en-US" sz="800" dirty="0">
                 <a:solidFill>
                   <a:srgbClr val="0B0B0B"/>
                 </a:solidFill>
@@ -5911,22 +4878,22 @@
                 <a:ea typeface="Malgun Gothic" pitchFamily="34" charset="-122"/>
                 <a:cs typeface="Malgun Gothic" pitchFamily="34" charset="-120"/>
               </a:rPr>
-              <a:t>광고·등록 중단 (확인된 원인)</a:t>
-            </a:r>
-            <a:endParaRPr lang="en-US" sz="850" dirty="0"/>
+              <a:t>광고·등록 중단 (확인된 원인). 2020년 수준(644)이면 연 30건</a:t>
+            </a:r>
+            <a:endParaRPr lang="en-US" sz="800" dirty="0"/>
           </a:p>
         </p:txBody>
       </p:sp>
       <p:sp>
         <p:nvSpPr>
-          <p:cNvPr id="15" name="Text 11"/>
+          <p:cNvPr id="17" name="Text 13"/>
           <p:cNvSpPr txBox="1"/>
           <p:nvPr/>
         </p:nvSpPr>
         <p:spPr>
           <a:xfrm>
-            <a:off x="521208" y="4160520"/>
-            <a:ext cx="1901952" cy="228600"/>
+            <a:off x="521208" y="4187952"/>
+            <a:ext cx="1901952" cy="219456"/>
           </a:xfrm>
           <a:prstGeom prst="rect">
             <a:avLst/>
@@ -5942,7 +4909,7 @@
               <a:buNone/>
             </a:pPr>
             <a:r>
-              <a:rPr lang="en-US" sz="900" b="1" dirty="0">
+              <a:rPr lang="en-US" sz="850" b="1" dirty="0">
                 <a:solidFill>
                   <a:srgbClr val="2A78D6"/>
                 </a:solidFill>
@@ -5950,22 +4917,22 @@
                 <a:ea typeface="Malgun Gothic" pitchFamily="34" charset="-122"/>
                 <a:cs typeface="Malgun Gothic" pitchFamily="34" charset="-120"/>
               </a:rPr>
-              <a:t>→ 다음(카카오) 재개 검토</a:t>
-            </a:r>
-            <a:endParaRPr lang="en-US" sz="900" dirty="0"/>
+              <a:t>→ 다음(카카오) 재개를 비용 대 수익으로 검토</a:t>
+            </a:r>
+            <a:endParaRPr lang="en-US" sz="850" dirty="0"/>
           </a:p>
         </p:txBody>
       </p:sp>
       <p:sp>
         <p:nvSpPr>
-          <p:cNvPr id="16" name="Shape 12"/>
+          <p:cNvPr id="18" name="Shape 14"/>
           <p:cNvSpPr/>
           <p:nvPr/>
         </p:nvSpPr>
         <p:spPr>
           <a:xfrm>
-            <a:off x="2514600" y="3401568"/>
-            <a:ext cx="45720" cy="987552"/>
+            <a:off x="2514600" y="3493008"/>
+            <a:ext cx="45720" cy="914400"/>
           </a:xfrm>
           <a:prstGeom prst="rect">
             <a:avLst/>
@@ -5983,13 +4950,13 @@
       </p:sp>
       <p:sp>
         <p:nvSpPr>
-          <p:cNvPr id="17" name="Text 13"/>
+          <p:cNvPr id="19" name="Text 15"/>
           <p:cNvSpPr txBox="1"/>
           <p:nvPr/>
         </p:nvSpPr>
         <p:spPr>
           <a:xfrm>
-            <a:off x="2624328" y="3401568"/>
+            <a:off x="2624328" y="3493008"/>
             <a:ext cx="1901952" cy="219456"/>
           </a:xfrm>
           <a:prstGeom prst="rect">
@@ -6022,14 +4989,14 @@
       </p:sp>
       <p:sp>
         <p:nvSpPr>
-          <p:cNvPr id="18" name="Text 14"/>
+          <p:cNvPr id="20" name="Text 16"/>
           <p:cNvSpPr txBox="1"/>
           <p:nvPr/>
         </p:nvSpPr>
         <p:spPr>
           <a:xfrm>
-            <a:off x="2624328" y="3630168"/>
-            <a:ext cx="1901952" cy="502920"/>
+            <a:off x="2624328" y="3712464"/>
+            <a:ext cx="1901952" cy="457200"/>
           </a:xfrm>
           <a:prstGeom prst="rect">
             <a:avLst/>
@@ -6045,7 +5012,7 @@
               <a:buNone/>
             </a:pPr>
             <a:r>
-              <a:rPr lang="en-US" sz="850" dirty="0">
+              <a:rPr lang="en-US" sz="800" dirty="0">
                 <a:solidFill>
                   <a:srgbClr val="0B0B0B"/>
                 </a:solidFill>
@@ -6055,20 +5022,20 @@
               </a:rPr>
               <a:t>글 수는 그대로(2020·21년 318·322건). 실적 나열 글 + 네이버 노출 방식 변화로 추정</a:t>
             </a:r>
-            <a:endParaRPr lang="en-US" sz="850" dirty="0"/>
+            <a:endParaRPr lang="en-US" sz="800" dirty="0"/>
           </a:p>
         </p:txBody>
       </p:sp>
       <p:sp>
         <p:nvSpPr>
-          <p:cNvPr id="19" name="Text 15"/>
+          <p:cNvPr id="21" name="Text 17"/>
           <p:cNvSpPr txBox="1"/>
           <p:nvPr/>
         </p:nvSpPr>
         <p:spPr>
           <a:xfrm>
-            <a:off x="2624328" y="4160520"/>
-            <a:ext cx="1901952" cy="228600"/>
+            <a:off x="2624328" y="4187952"/>
+            <a:ext cx="1901952" cy="219456"/>
           </a:xfrm>
           <a:prstGeom prst="rect">
             <a:avLst/>
@@ -6084,7 +5051,7 @@
               <a:buNone/>
             </a:pPr>
             <a:r>
-              <a:rPr lang="en-US" sz="900" b="1" dirty="0">
+              <a:rPr lang="en-US" sz="850" b="1" dirty="0">
                 <a:solidFill>
                   <a:srgbClr val="2A78D6"/>
                 </a:solidFill>
@@ -6094,20 +5061,20 @@
               </a:rPr>
               <a:t>→ 읽을 내용이 있는 글로</a:t>
             </a:r>
-            <a:endParaRPr lang="en-US" sz="900" dirty="0"/>
+            <a:endParaRPr lang="en-US" sz="850" dirty="0"/>
           </a:p>
         </p:txBody>
       </p:sp>
       <p:sp>
         <p:nvSpPr>
-          <p:cNvPr id="20" name="Shape 16"/>
+          <p:cNvPr id="22" name="Shape 18"/>
           <p:cNvSpPr/>
           <p:nvPr/>
         </p:nvSpPr>
         <p:spPr>
           <a:xfrm>
-            <a:off x="4617720" y="3401568"/>
-            <a:ext cx="45720" cy="987552"/>
+            <a:off x="4617720" y="3493008"/>
+            <a:ext cx="45720" cy="914400"/>
           </a:xfrm>
           <a:prstGeom prst="rect">
             <a:avLst/>
@@ -6125,13 +5092,13 @@
       </p:sp>
       <p:sp>
         <p:nvSpPr>
-          <p:cNvPr id="21" name="Text 17"/>
+          <p:cNvPr id="23" name="Text 19"/>
           <p:cNvSpPr txBox="1"/>
           <p:nvPr/>
         </p:nvSpPr>
         <p:spPr>
           <a:xfrm>
-            <a:off x="4727448" y="3401568"/>
+            <a:off x="4727448" y="3493008"/>
             <a:ext cx="1901952" cy="219456"/>
           </a:xfrm>
           <a:prstGeom prst="rect">
@@ -6164,14 +5131,14 @@
       </p:sp>
       <p:sp>
         <p:nvSpPr>
-          <p:cNvPr id="22" name="Text 18"/>
+          <p:cNvPr id="24" name="Text 20"/>
           <p:cNvSpPr txBox="1"/>
           <p:nvPr/>
         </p:nvSpPr>
         <p:spPr>
           <a:xfrm>
-            <a:off x="4727448" y="3630168"/>
-            <a:ext cx="1901952" cy="502920"/>
+            <a:off x="4727448" y="3712464"/>
+            <a:ext cx="1901952" cy="457200"/>
           </a:xfrm>
           <a:prstGeom prst="rect">
             <a:avLst/>
@@ -6187,7 +5154,7 @@
               <a:buNone/>
             </a:pPr>
             <a:r>
-              <a:rPr lang="en-US" sz="850" dirty="0">
+              <a:rPr lang="en-US" sz="800" dirty="0">
                 <a:solidFill>
                   <a:srgbClr val="0B0B0B"/>
                 </a:solidFill>
@@ -6197,20 +5164,20 @@
               </a:rPr>
               <a:t>사이트 글자가 전부 이미지라 검색엔진이 못 읽음 + 네이버 개편(추정)</a:t>
             </a:r>
-            <a:endParaRPr lang="en-US" sz="850" dirty="0"/>
+            <a:endParaRPr lang="en-US" sz="800" dirty="0"/>
           </a:p>
         </p:txBody>
       </p:sp>
       <p:sp>
         <p:nvSpPr>
-          <p:cNvPr id="23" name="Text 19"/>
+          <p:cNvPr id="25" name="Text 21"/>
           <p:cNvSpPr txBox="1"/>
           <p:nvPr/>
         </p:nvSpPr>
         <p:spPr>
           <a:xfrm>
-            <a:off x="4727448" y="4160520"/>
-            <a:ext cx="1901952" cy="228600"/>
+            <a:off x="4727448" y="4187952"/>
+            <a:ext cx="1901952" cy="219456"/>
           </a:xfrm>
           <a:prstGeom prst="rect">
             <a:avLst/>
@@ -6226,7 +5193,7 @@
               <a:buNone/>
             </a:pPr>
             <a:r>
-              <a:rPr lang="en-US" sz="900" b="1" dirty="0">
+              <a:rPr lang="en-US" sz="850" b="1" dirty="0">
                 <a:solidFill>
                   <a:srgbClr val="2A78D6"/>
                 </a:solidFill>
@@ -6234,22 +5201,22 @@
                 <a:ea typeface="Malgun Gothic" pitchFamily="34" charset="-122"/>
                 <a:cs typeface="Malgun Gothic" pitchFamily="34" charset="-120"/>
               </a:rPr>
-              <a:t>→ 새 사이트는 글자를 텍스트로</a:t>
-            </a:r>
-            <a:endParaRPr lang="en-US" sz="900" dirty="0"/>
+              <a:t>→ 리뉴얼로 글자를 텍스트로</a:t>
+            </a:r>
+            <a:endParaRPr lang="en-US" sz="850" dirty="0"/>
           </a:p>
         </p:txBody>
       </p:sp>
       <p:sp>
         <p:nvSpPr>
-          <p:cNvPr id="24" name="Shape 20"/>
+          <p:cNvPr id="26" name="Shape 22"/>
           <p:cNvSpPr/>
           <p:nvPr/>
         </p:nvSpPr>
         <p:spPr>
           <a:xfrm>
-            <a:off x="6720840" y="3401568"/>
-            <a:ext cx="45720" cy="987552"/>
+            <a:off x="6720840" y="3493008"/>
+            <a:ext cx="45720" cy="914400"/>
           </a:xfrm>
           <a:prstGeom prst="rect">
             <a:avLst/>
@@ -6267,13 +5234,13 @@
       </p:sp>
       <p:sp>
         <p:nvSpPr>
-          <p:cNvPr id="25" name="Text 21"/>
+          <p:cNvPr id="27" name="Text 23"/>
           <p:cNvSpPr txBox="1"/>
           <p:nvPr/>
         </p:nvSpPr>
         <p:spPr>
           <a:xfrm>
-            <a:off x="6830568" y="3401568"/>
+            <a:off x="6830568" y="3493008"/>
             <a:ext cx="1901952" cy="219456"/>
           </a:xfrm>
           <a:prstGeom prst="rect">
@@ -6306,14 +5273,14 @@
       </p:sp>
       <p:sp>
         <p:nvSpPr>
-          <p:cNvPr id="26" name="Text 22"/>
+          <p:cNvPr id="28" name="Text 24"/>
           <p:cNvSpPr txBox="1"/>
           <p:nvPr/>
         </p:nvSpPr>
         <p:spPr>
           <a:xfrm>
-            <a:off x="6830568" y="3630168"/>
-            <a:ext cx="1901952" cy="502920"/>
+            <a:off x="6830568" y="3712464"/>
+            <a:ext cx="1901952" cy="457200"/>
           </a:xfrm>
           <a:prstGeom prst="rect">
             <a:avLst/>
@@ -6329,7 +5296,7 @@
               <a:buNone/>
             </a:pPr>
             <a:r>
-              <a:rPr lang="en-US" sz="850" dirty="0">
+              <a:rPr lang="en-US" sz="800" dirty="0">
                 <a:solidFill>
                   <a:srgbClr val="0B0B0B"/>
                 </a:solidFill>
@@ -6337,22 +5304,22 @@
                 <a:ea typeface="Malgun Gothic" pitchFamily="34" charset="-122"/>
                 <a:cs typeface="Malgun Gothic" pitchFamily="34" charset="-120"/>
               </a:rPr>
-              <a:t>가장 덜 줄어 원인 아님. 지금 실제 방문의 3분의 2</a:t>
-            </a:r>
-            <a:endParaRPr lang="en-US" sz="850" dirty="0"/>
+              <a:t>가장 덜 줄어 원인 아님. 지금 실제 방문의 3분의 2, 모바일 44%</a:t>
+            </a:r>
+            <a:endParaRPr lang="en-US" sz="800" dirty="0"/>
           </a:p>
         </p:txBody>
       </p:sp>
       <p:sp>
         <p:nvSpPr>
-          <p:cNvPr id="27" name="Text 23"/>
+          <p:cNvPr id="29" name="Text 25"/>
           <p:cNvSpPr txBox="1"/>
           <p:nvPr/>
         </p:nvSpPr>
         <p:spPr>
           <a:xfrm>
-            <a:off x="6830568" y="4160520"/>
-            <a:ext cx="1901952" cy="228600"/>
+            <a:off x="6830568" y="4187952"/>
+            <a:ext cx="1901952" cy="219456"/>
           </a:xfrm>
           <a:prstGeom prst="rect">
             <a:avLst/>
@@ -6368,7 +5335,7 @@
               <a:buNone/>
             </a:pPr>
             <a:r>
-              <a:rPr lang="en-US" sz="900" b="1" dirty="0">
+              <a:rPr lang="en-US" sz="850" b="1" dirty="0">
                 <a:solidFill>
                   <a:srgbClr val="2A78D6"/>
                 </a:solidFill>
@@ -6376,15 +5343,15 @@
                 <a:ea typeface="Malgun Gothic" pitchFamily="34" charset="-122"/>
                 <a:cs typeface="Malgun Gothic" pitchFamily="34" charset="-120"/>
               </a:rPr>
-              <a:t>→ 랜딩은 광고 방문자·휴대폰 기준</a:t>
-            </a:r>
-            <a:endParaRPr lang="en-US" sz="900" dirty="0"/>
+              <a:t>→ 랜딩은 광고 방문자 기준, 휴대폰부터</a:t>
+            </a:r>
+            <a:endParaRPr lang="en-US" sz="850" dirty="0"/>
           </a:p>
         </p:txBody>
       </p:sp>
       <p:sp>
         <p:nvSpPr>
-          <p:cNvPr id="28" name="Shape 24"/>
+          <p:cNvPr id="30" name="Shape 26"/>
           <p:cNvSpPr/>
           <p:nvPr/>
         </p:nvSpPr>
@@ -6407,7 +5374,7 @@
       </p:sp>
       <p:sp>
         <p:nvSpPr>
-          <p:cNvPr id="29" name="Text 25"/>
+          <p:cNvPr id="31" name="Text 27"/>
           <p:cNvSpPr txBox="1"/>
           <p:nvPr/>
         </p:nvSpPr>
@@ -6441,7 +5408,7 @@
                 <a:ea typeface="Malgun Gothic" pitchFamily="34" charset="-122"/>
                 <a:cs typeface="Malgun Gothic" pitchFamily="34" charset="-120"/>
               </a:rPr>
-              <a:t>출처: 관리자 페이지 접속자통계(도메인별) 2016 ~ 2026-10-06, 게시판 글 날짜(스팸·형식 오류 제외). 경로 비교는 "직접"(봇 대부분) 제외</a:t>
+              <a:t>출처: 관리자 페이지 접속자통계 — 연도별·OS별 방문자(2015 ~ 2025, 같은 IP는 하루 1회), 유입 도메인별 방문(2016 ~ 2026-10-06). 2016·17·19년은 OS 자료 없음, 2025년 이후 신뢰 낮음</a:t>
             </a:r>
             <a:endParaRPr lang="en-US" sz="800" dirty="0"/>
           </a:p>
@@ -6461,7 +5428,7 @@
                 <a:ea typeface="Malgun Gothic" pitchFamily="34" charset="-122"/>
                 <a:cs typeface="Malgun Gothic" pitchFamily="34" charset="-120"/>
               </a:rPr>
-              <a:t>봇을 뺀 실제 방문(OS Robot·Linux 제외): 11,253(2015) → 6,648(2020) → 3,397(2022). 감소율은 2020 → 2022</a:t>
+              <a:t>경로 비교는 "직접"(봇 대부분) 제외. 서버 광고 유입 203 vs 광고 보고서 클릭 388(같은 90일)이라 경로는 추이로만 봄. 감소율은 2020 → 2022</a:t>
             </a:r>
             <a:endParaRPr lang="en-US" sz="800" dirty="0"/>
           </a:p>
@@ -6581,296 +5548,14 @@
       </p:sp>
       <p:sp>
         <p:nvSpPr>
-          <p:cNvPr id="3" name="Text 1"/>
-          <p:cNvSpPr txBox="1"/>
-          <p:nvPr/>
-        </p:nvSpPr>
-        <p:spPr>
-          <a:xfrm>
-            <a:off x="411480" y="658368"/>
-            <a:ext cx="5029200" cy="237744"/>
-          </a:xfrm>
-          <a:prstGeom prst="rect">
-            <a:avLst/>
-          </a:prstGeom>
-          <a:noFill/>
-          <a:ln/>
-        </p:spPr>
-        <p:txBody>
-          <a:bodyPr wrap="square" lIns="0" tIns="0" rIns="0" bIns="0" rtlCol="0" anchor="ctr"/>
-          <a:lstStyle/>
-          <a:p>
-            <a:pPr indent="0" marL="0">
-              <a:buNone/>
-            </a:pPr>
-            <a:r>
-              <a:rPr lang="en-US" sz="1050" b="1" dirty="0">
-                <a:solidFill>
-                  <a:srgbClr val="0B0B0B"/>
-                </a:solidFill>
-                <a:latin typeface="Malgun Gothic" pitchFamily="34" charset="0"/>
-                <a:ea typeface="Malgun Gothic" pitchFamily="34" charset="-122"/>
-                <a:cs typeface="Malgun Gothic" pitchFamily="34" charset="-120"/>
-              </a:rPr>
-              <a:t>특허·변리사 같은 일반 검색어는 1만 번 보여야 12번 눌린다</a:t>
-            </a:r>
-            <a:endParaRPr lang="en-US" sz="1050" dirty="0"/>
-          </a:p>
-        </p:txBody>
-      </p:sp>
-      <p:sp>
-        <p:nvSpPr>
-          <p:cNvPr id="4" name="Text 2"/>
-          <p:cNvSpPr txBox="1"/>
-          <p:nvPr/>
-        </p:nvSpPr>
-        <p:spPr>
-          <a:xfrm>
-            <a:off x="411480" y="896112"/>
-            <a:ext cx="5029200" cy="182880"/>
-          </a:xfrm>
-          <a:prstGeom prst="rect">
-            <a:avLst/>
-          </a:prstGeom>
-          <a:noFill/>
-          <a:ln/>
-        </p:spPr>
-        <p:txBody>
-          <a:bodyPr wrap="square" lIns="0" tIns="0" rIns="0" bIns="0" rtlCol="0" anchor="ctr"/>
-          <a:lstStyle/>
-          <a:p>
-            <a:pPr indent="0" marL="0">
-              <a:buNone/>
-            </a:pPr>
-            <a:r>
-              <a:rPr lang="en-US" sz="800" dirty="0">
-                <a:solidFill>
-                  <a:srgbClr val="52514E"/>
-                </a:solidFill>
-                <a:latin typeface="Malgun Gothic" pitchFamily="34" charset="0"/>
-                <a:ea typeface="Malgun Gothic" pitchFamily="34" charset="-122"/>
-                <a:cs typeface="Malgun Gothic" pitchFamily="34" charset="-120"/>
-              </a:rPr>
-              <a:t>검색어 유형별 클릭률 · 괄호는 90일 클릭 수 · 클릭당 비용은 2,000원 안팎(지역명만 706원)</a:t>
-            </a:r>
-            <a:endParaRPr lang="en-US" sz="800" dirty="0"/>
-          </a:p>
-        </p:txBody>
-      </p:sp>
-      <p:graphicFrame>
-        <p:nvGraphicFramePr>
-          <p:cNvPr id="5" name="Chart 0" descr=""/>
-          <p:cNvGraphicFramePr/>
-          <p:nvPr/>
-        </p:nvGraphicFramePr>
-        <p:xfrm>
-          <a:off x="320040" y="1115568"/>
-          <a:ext cx="4846320" cy="3246120"/>
-        </p:xfrm>
-        <a:graphic xmlns:a="http://schemas.openxmlformats.org/drawingml/2006/main">
-          <a:graphicData uri="http://schemas.openxmlformats.org/drawingml/2006/chart">
-            <c:chart xmlns:c="http://schemas.openxmlformats.org/drawingml/2006/chart" r:id="rId1"/>
-          </a:graphicData>
-        </a:graphic>
-      </p:graphicFrame>
-      <p:sp>
-        <p:nvSpPr>
-          <p:cNvPr id="6" name="Text 3"/>
-          <p:cNvSpPr txBox="1"/>
-          <p:nvPr/>
-        </p:nvSpPr>
-        <p:spPr>
-          <a:xfrm>
-            <a:off x="5486400" y="658368"/>
-            <a:ext cx="3246120" cy="219456"/>
-          </a:xfrm>
-          <a:prstGeom prst="rect">
-            <a:avLst/>
-          </a:prstGeom>
-          <a:noFill/>
-          <a:ln/>
-        </p:spPr>
-        <p:txBody>
-          <a:bodyPr wrap="square" lIns="0" tIns="0" rIns="0" bIns="0" rtlCol="0" anchor="ctr"/>
-          <a:lstStyle/>
-          <a:p>
-            <a:pPr indent="0" marL="0">
-              <a:buNone/>
-            </a:pPr>
-            <a:r>
-              <a:rPr lang="en-US" sz="950" b="1" dirty="0">
-                <a:solidFill>
-                  <a:srgbClr val="52514E"/>
-                </a:solidFill>
-                <a:latin typeface="Malgun Gothic" pitchFamily="34" charset="0"/>
-                <a:ea typeface="Malgun Gothic" pitchFamily="34" charset="-122"/>
-                <a:cs typeface="Malgun Gothic" pitchFamily="34" charset="-120"/>
-              </a:rPr>
-              <a:t>포괄 검색어 8개 vs 구체적 검색어 (모든 광고그룹)</a:t>
-            </a:r>
-            <a:endParaRPr lang="en-US" sz="950" dirty="0"/>
-          </a:p>
-        </p:txBody>
-      </p:sp>
-      <p:sp>
-        <p:nvSpPr>
-          <p:cNvPr id="7" name="Text 4"/>
-          <p:cNvSpPr txBox="1"/>
-          <p:nvPr/>
-        </p:nvSpPr>
-        <p:spPr>
-          <a:xfrm>
-            <a:off x="5486400" y="896112"/>
-            <a:ext cx="3246120" cy="438912"/>
-          </a:xfrm>
-          <a:prstGeom prst="rect">
-            <a:avLst/>
-          </a:prstGeom>
-          <a:noFill/>
-          <a:ln/>
-        </p:spPr>
-        <p:txBody>
-          <a:bodyPr wrap="square" lIns="0" tIns="0" rIns="0" bIns="0" rtlCol="0" anchor="ctr"/>
-          <a:lstStyle/>
-          <a:p>
-            <a:pPr indent="0" marL="0">
-              <a:buNone/>
-            </a:pPr>
-            <a:r>
-              <a:rPr lang="en-US" sz="2400" b="1" dirty="0">
-                <a:solidFill>
-                  <a:srgbClr val="EB6834"/>
-                </a:solidFill>
-                <a:latin typeface="Malgun Gothic" pitchFamily="34" charset="0"/>
-                <a:ea typeface="Malgun Gothic" pitchFamily="34" charset="-122"/>
-                <a:cs typeface="Malgun Gothic" pitchFamily="34" charset="-120"/>
-              </a:rPr>
-              <a:t>0.06%</a:t>
-            </a:r>
-            <a:pPr indent="0" marL="0">
-              <a:buNone/>
-            </a:pPr>
-            <a:r>
-              <a:rPr lang="en-US" sz="1100" dirty="0">
-                <a:solidFill>
-                  <a:srgbClr val="52514E"/>
-                </a:solidFill>
-                <a:latin typeface="Malgun Gothic" pitchFamily="34" charset="0"/>
-                <a:ea typeface="Malgun Gothic" pitchFamily="34" charset="-122"/>
-                <a:cs typeface="Malgun Gothic" pitchFamily="34" charset="-120"/>
-              </a:rPr>
-              <a:t>  vs  </a:t>
-            </a:r>
-            <a:pPr indent="0" marL="0">
-              <a:buNone/>
-            </a:pPr>
-            <a:r>
-              <a:rPr lang="en-US" sz="2400" b="1" dirty="0">
-                <a:solidFill>
-                  <a:srgbClr val="2A78D6"/>
-                </a:solidFill>
-                <a:latin typeface="Malgun Gothic" pitchFamily="34" charset="0"/>
-                <a:ea typeface="Malgun Gothic" pitchFamily="34" charset="-122"/>
-                <a:cs typeface="Malgun Gothic" pitchFamily="34" charset="-120"/>
-              </a:rPr>
-              <a:t>0.50%</a:t>
-            </a:r>
-            <a:endParaRPr lang="en-US" sz="2400" dirty="0"/>
-          </a:p>
-        </p:txBody>
-      </p:sp>
-      <p:sp>
-        <p:nvSpPr>
-          <p:cNvPr id="8" name="Text 5"/>
-          <p:cNvSpPr txBox="1"/>
-          <p:nvPr/>
-        </p:nvSpPr>
-        <p:spPr>
-          <a:xfrm>
-            <a:off x="5486400" y="1371600"/>
-            <a:ext cx="3246120" cy="1234440"/>
-          </a:xfrm>
-          <a:prstGeom prst="rect">
-            <a:avLst/>
-          </a:prstGeom>
-          <a:noFill/>
-          <a:ln/>
-        </p:spPr>
-        <p:txBody>
-          <a:bodyPr wrap="square" lIns="0" tIns="0" rIns="0" bIns="0" rtlCol="0" anchor="t"/>
-          <a:lstStyle/>
-          <a:p>
-            <a:pPr indent="0" marL="0">
-              <a:spcAft>
-                <a:spcPts val="300"/>
-              </a:spcAft>
-              <a:buNone/>
-            </a:pPr>
-            <a:r>
-              <a:rPr lang="en-US" sz="950" dirty="0">
-                <a:solidFill>
-                  <a:srgbClr val="0B0B0B"/>
-                </a:solidFill>
-                <a:latin typeface="Malgun Gothic" pitchFamily="34" charset="0"/>
-                <a:ea typeface="Malgun Gothic" pitchFamily="34" charset="-122"/>
-                <a:cs typeface="Malgun Gothic" pitchFamily="34" charset="-120"/>
-              </a:rPr>
-              <a:t>포괄 검색어가 노출 68%, 광고비 26%(192,641원)를 쓰고 클릭은 20%</a:t>
-            </a:r>
-            <a:endParaRPr lang="en-US" sz="950" dirty="0"/>
-          </a:p>
-          <a:p>
-            <a:pPr indent="0" marL="0">
-              <a:spcAft>
-                <a:spcPts val="300"/>
-              </a:spcAft>
-              <a:buNone/>
-            </a:pPr>
-            <a:r>
-              <a:rPr lang="en-US" sz="850" dirty="0">
-                <a:solidFill>
-                  <a:srgbClr val="52514E"/>
-                </a:solidFill>
-                <a:latin typeface="Malgun Gothic" pitchFamily="34" charset="0"/>
-                <a:ea typeface="Malgun Gothic" pitchFamily="34" charset="-122"/>
-                <a:cs typeface="Malgun Gothic" pitchFamily="34" charset="-120"/>
-              </a:rPr>
-              <a:t>클릭당 비용은 같음(2,547원 대 2,434원). 피셔, 우연일 확률 0.1% 미만</a:t>
-            </a:r>
-            <a:endParaRPr lang="en-US" sz="950" dirty="0"/>
-          </a:p>
-          <a:p>
-            <a:pPr indent="0" marL="0">
-              <a:spcAft>
-                <a:spcPts val="300"/>
-              </a:spcAft>
-              <a:buNone/>
-            </a:pPr>
-            <a:r>
-              <a:rPr lang="en-US" sz="950" dirty="0">
-                <a:solidFill>
-                  <a:srgbClr val="0B0B0B"/>
-                </a:solidFill>
-                <a:latin typeface="Malgun Gothic" pitchFamily="34" charset="0"/>
-                <a:ea typeface="Malgun Gothic" pitchFamily="34" charset="-122"/>
-                <a:cs typeface="Malgun Gothic" pitchFamily="34" charset="-120"/>
-              </a:rPr>
-              <a:t>확장 검색은 직접 등록한 키워드의 절반만 눌림(0.32% 대 0.61%)</a:t>
-            </a:r>
-            <a:endParaRPr lang="en-US" sz="950" dirty="0"/>
-          </a:p>
-        </p:txBody>
-      </p:sp>
-      <p:sp>
-        <p:nvSpPr>
-          <p:cNvPr id="9" name="Shape 6"/>
+          <p:cNvPr id="3" name="Shape 1"/>
           <p:cNvSpPr/>
           <p:nvPr/>
         </p:nvSpPr>
         <p:spPr>
           <a:xfrm>
-            <a:off x="5486400" y="2697480"/>
-            <a:ext cx="3246120" cy="1691640"/>
+            <a:off x="411480" y="676656"/>
+            <a:ext cx="2682240" cy="457200"/>
           </a:xfrm>
           <a:prstGeom prst="rect">
             <a:avLst/>
@@ -6888,14 +5573,498 @@
       </p:sp>
       <p:sp>
         <p:nvSpPr>
-          <p:cNvPr id="10" name="Text 7"/>
+          <p:cNvPr id="4" name="Text 2"/>
           <p:cNvSpPr txBox="1"/>
           <p:nvPr/>
         </p:nvSpPr>
         <p:spPr>
           <a:xfrm>
-            <a:off x="5596128" y="2761488"/>
-            <a:ext cx="3026664" cy="1600200"/>
+            <a:off x="502920" y="694944"/>
+            <a:ext cx="2499360" cy="219456"/>
+          </a:xfrm>
+          <a:prstGeom prst="rect">
+            <a:avLst/>
+          </a:prstGeom>
+          <a:noFill/>
+          <a:ln/>
+        </p:spPr>
+        <p:txBody>
+          <a:bodyPr wrap="square" lIns="0" tIns="0" rIns="0" bIns="0" rtlCol="0" anchor="ctr"/>
+          <a:lstStyle/>
+          <a:p>
+            <a:pPr indent="0" marL="0">
+              <a:buNone/>
+            </a:pPr>
+            <a:r>
+              <a:rPr lang="en-US" sz="1000" b="1" dirty="0">
+                <a:solidFill>
+                  <a:srgbClr val="0B0B0B"/>
+                </a:solidFill>
+                <a:latin typeface="Malgun Gothic" pitchFamily="34" charset="0"/>
+                <a:ea typeface="Malgun Gothic" pitchFamily="34" charset="-122"/>
+                <a:cs typeface="Malgun Gothic" pitchFamily="34" charset="-120"/>
+              </a:rPr>
+              <a:t>실제 방문의 3분의 2가 광고</a:t>
+            </a:r>
+            <a:endParaRPr lang="en-US" sz="1000" dirty="0"/>
+          </a:p>
+        </p:txBody>
+      </p:sp>
+      <p:sp>
+        <p:nvSpPr>
+          <p:cNvPr id="5" name="Text 3"/>
+          <p:cNvSpPr txBox="1"/>
+          <p:nvPr/>
+        </p:nvSpPr>
+        <p:spPr>
+          <a:xfrm>
+            <a:off x="502920" y="914400"/>
+            <a:ext cx="2499360" cy="182880"/>
+          </a:xfrm>
+          <a:prstGeom prst="rect">
+            <a:avLst/>
+          </a:prstGeom>
+          <a:noFill/>
+          <a:ln/>
+        </p:spPr>
+        <p:txBody>
+          <a:bodyPr wrap="square" lIns="0" tIns="0" rIns="0" bIns="0" rtlCol="0" anchor="ctr"/>
+          <a:lstStyle/>
+          <a:p>
+            <a:pPr indent="0" marL="0">
+              <a:buNone/>
+            </a:pPr>
+            <a:r>
+              <a:rPr lang="en-US" sz="750" dirty="0">
+                <a:solidFill>
+                  <a:srgbClr val="52514E"/>
+                </a:solidFill>
+                <a:latin typeface="Malgun Gothic" pitchFamily="34" charset="0"/>
+                <a:ea typeface="Malgun Gothic" pitchFamily="34" charset="-122"/>
+                <a:cs typeface="Malgun Gothic" pitchFamily="34" charset="-120"/>
+              </a:rPr>
+              <a:t>9월 세션 약 180 중 광고 주소로 온 120 (GA4)</a:t>
+            </a:r>
+            <a:endParaRPr lang="en-US" sz="750" dirty="0"/>
+          </a:p>
+        </p:txBody>
+      </p:sp>
+      <p:sp>
+        <p:nvSpPr>
+          <p:cNvPr id="6" name="Shape 4"/>
+          <p:cNvSpPr/>
+          <p:nvPr/>
+        </p:nvSpPr>
+        <p:spPr>
+          <a:xfrm>
+            <a:off x="3230880" y="676656"/>
+            <a:ext cx="2682240" cy="457200"/>
+          </a:xfrm>
+          <a:prstGeom prst="rect">
+            <a:avLst/>
+          </a:prstGeom>
+          <a:solidFill>
+            <a:srgbClr val="EEF4FB"/>
+          </a:solidFill>
+          <a:ln w="12700">
+            <a:solidFill>
+              <a:srgbClr val="EEF4FB"/>
+            </a:solidFill>
+            <a:prstDash val="solid"/>
+          </a:ln>
+        </p:spPr>
+      </p:sp>
+      <p:sp>
+        <p:nvSpPr>
+          <p:cNvPr id="7" name="Text 5"/>
+          <p:cNvSpPr txBox="1"/>
+          <p:nvPr/>
+        </p:nvSpPr>
+        <p:spPr>
+          <a:xfrm>
+            <a:off x="3322320" y="694944"/>
+            <a:ext cx="2499360" cy="219456"/>
+          </a:xfrm>
+          <a:prstGeom prst="rect">
+            <a:avLst/>
+          </a:prstGeom>
+          <a:noFill/>
+          <a:ln/>
+        </p:spPr>
+        <p:txBody>
+          <a:bodyPr wrap="square" lIns="0" tIns="0" rIns="0" bIns="0" rtlCol="0" anchor="ctr"/>
+          <a:lstStyle/>
+          <a:p>
+            <a:pPr indent="0" marL="0">
+              <a:buNone/>
+            </a:pPr>
+            <a:r>
+              <a:rPr lang="en-US" sz="1000" b="1" dirty="0">
+                <a:solidFill>
+                  <a:srgbClr val="0B0B0B"/>
+                </a:solidFill>
+                <a:latin typeface="Malgun Gothic" pitchFamily="34" charset="0"/>
+                <a:ea typeface="Malgun Gothic" pitchFamily="34" charset="-122"/>
+                <a:cs typeface="Malgun Gothic" pitchFamily="34" charset="-120"/>
+              </a:rPr>
+              <a:t>모바일 44%</a:t>
+            </a:r>
+            <a:endParaRPr lang="en-US" sz="1000" dirty="0"/>
+          </a:p>
+        </p:txBody>
+      </p:sp>
+      <p:sp>
+        <p:nvSpPr>
+          <p:cNvPr id="8" name="Text 6"/>
+          <p:cNvSpPr txBox="1"/>
+          <p:nvPr/>
+        </p:nvSpPr>
+        <p:spPr>
+          <a:xfrm>
+            <a:off x="3322320" y="914400"/>
+            <a:ext cx="2499360" cy="182880"/>
+          </a:xfrm>
+          <a:prstGeom prst="rect">
+            <a:avLst/>
+          </a:prstGeom>
+          <a:noFill/>
+          <a:ln/>
+        </p:spPr>
+        <p:txBody>
+          <a:bodyPr wrap="square" lIns="0" tIns="0" rIns="0" bIns="0" rtlCol="0" anchor="ctr"/>
+          <a:lstStyle/>
+          <a:p>
+            <a:pPr indent="0" marL="0">
+              <a:buNone/>
+            </a:pPr>
+            <a:r>
+              <a:rPr lang="en-US" sz="750" dirty="0">
+                <a:solidFill>
+                  <a:srgbClr val="52514E"/>
+                </a:solidFill>
+                <a:latin typeface="Malgun Gothic" pitchFamily="34" charset="0"/>
+                <a:ea typeface="Malgun Gothic" pitchFamily="34" charset="-122"/>
+                <a:cs typeface="Malgun Gothic" pitchFamily="34" charset="-120"/>
+              </a:rPr>
+              <a:t>신청 페이지 142명 중 62. 옛 사이트는 PC 폭 고정</a:t>
+            </a:r>
+            <a:endParaRPr lang="en-US" sz="750" dirty="0"/>
+          </a:p>
+        </p:txBody>
+      </p:sp>
+      <p:sp>
+        <p:nvSpPr>
+          <p:cNvPr id="9" name="Shape 7"/>
+          <p:cNvSpPr/>
+          <p:nvPr/>
+        </p:nvSpPr>
+        <p:spPr>
+          <a:xfrm>
+            <a:off x="6050280" y="676656"/>
+            <a:ext cx="2682240" cy="457200"/>
+          </a:xfrm>
+          <a:prstGeom prst="rect">
+            <a:avLst/>
+          </a:prstGeom>
+          <a:solidFill>
+            <a:srgbClr val="EEF4FB"/>
+          </a:solidFill>
+          <a:ln w="12700">
+            <a:solidFill>
+              <a:srgbClr val="EEF4FB"/>
+            </a:solidFill>
+            <a:prstDash val="solid"/>
+          </a:ln>
+        </p:spPr>
+      </p:sp>
+      <p:sp>
+        <p:nvSpPr>
+          <p:cNvPr id="10" name="Text 8"/>
+          <p:cNvSpPr txBox="1"/>
+          <p:nvPr/>
+        </p:nvSpPr>
+        <p:spPr>
+          <a:xfrm>
+            <a:off x="6141720" y="694944"/>
+            <a:ext cx="2499360" cy="219456"/>
+          </a:xfrm>
+          <a:prstGeom prst="rect">
+            <a:avLst/>
+          </a:prstGeom>
+          <a:noFill/>
+          <a:ln/>
+        </p:spPr>
+        <p:txBody>
+          <a:bodyPr wrap="square" lIns="0" tIns="0" rIns="0" bIns="0" rtlCol="0" anchor="ctr"/>
+          <a:lstStyle/>
+          <a:p>
+            <a:pPr indent="0" marL="0">
+              <a:buNone/>
+            </a:pPr>
+            <a:r>
+              <a:rPr lang="en-US" sz="1000" b="1" dirty="0">
+                <a:solidFill>
+                  <a:srgbClr val="0B0B0B"/>
+                </a:solidFill>
+                <a:latin typeface="Malgun Gothic" pitchFamily="34" charset="0"/>
+                <a:ea typeface="Malgun Gothic" pitchFamily="34" charset="-122"/>
+                <a:cs typeface="Malgun Gothic" pitchFamily="34" charset="-120"/>
+              </a:rPr>
+              <a:t>90일 노출 195,455 · 클릭 388 · 733,728원</a:t>
+            </a:r>
+            <a:endParaRPr lang="en-US" sz="1000" dirty="0"/>
+          </a:p>
+        </p:txBody>
+      </p:sp>
+      <p:sp>
+        <p:nvSpPr>
+          <p:cNvPr id="11" name="Text 9"/>
+          <p:cNvSpPr txBox="1"/>
+          <p:nvPr/>
+        </p:nvSpPr>
+        <p:spPr>
+          <a:xfrm>
+            <a:off x="6141720" y="914400"/>
+            <a:ext cx="2499360" cy="182880"/>
+          </a:xfrm>
+          <a:prstGeom prst="rect">
+            <a:avLst/>
+          </a:prstGeom>
+          <a:noFill/>
+          <a:ln/>
+        </p:spPr>
+        <p:txBody>
+          <a:bodyPr wrap="square" lIns="0" tIns="0" rIns="0" bIns="0" rtlCol="0" anchor="ctr"/>
+          <a:lstStyle/>
+          <a:p>
+            <a:pPr indent="0" marL="0">
+              <a:buNone/>
+            </a:pPr>
+            <a:r>
+              <a:rPr lang="en-US" sz="750" dirty="0">
+                <a:solidFill>
+                  <a:srgbClr val="52514E"/>
+                </a:solidFill>
+                <a:latin typeface="Malgun Gothic" pitchFamily="34" charset="0"/>
+                <a:ea typeface="Malgun Gothic" pitchFamily="34" charset="-122"/>
+                <a:cs typeface="Malgun Gothic" pitchFamily="34" charset="-120"/>
+              </a:rPr>
+              <a:t>클릭률 0.2% · 클릭당 1,891원 · 전환 측정 없음</a:t>
+            </a:r>
+            <a:endParaRPr lang="en-US" sz="750" dirty="0"/>
+          </a:p>
+        </p:txBody>
+      </p:sp>
+      <p:sp>
+        <p:nvSpPr>
+          <p:cNvPr id="12" name="Text 10"/>
+          <p:cNvSpPr txBox="1"/>
+          <p:nvPr/>
+        </p:nvSpPr>
+        <p:spPr>
+          <a:xfrm>
+            <a:off x="411480" y="1243584"/>
+            <a:ext cx="4937760" cy="237744"/>
+          </a:xfrm>
+          <a:prstGeom prst="rect">
+            <a:avLst/>
+          </a:prstGeom>
+          <a:noFill/>
+          <a:ln/>
+        </p:spPr>
+        <p:txBody>
+          <a:bodyPr wrap="square" lIns="0" tIns="0" rIns="0" bIns="0" rtlCol="0" anchor="ctr"/>
+          <a:lstStyle/>
+          <a:p>
+            <a:pPr indent="0" marL="0">
+              <a:buNone/>
+            </a:pPr>
+            <a:r>
+              <a:rPr lang="en-US" sz="1050" b="1" dirty="0">
+                <a:solidFill>
+                  <a:srgbClr val="0B0B0B"/>
+                </a:solidFill>
+                <a:latin typeface="Malgun Gothic" pitchFamily="34" charset="0"/>
+                <a:ea typeface="Malgun Gothic" pitchFamily="34" charset="-122"/>
+                <a:cs typeface="Malgun Gothic" pitchFamily="34" charset="-120"/>
+              </a:rPr>
+              <a:t>특허·변리사 같은 일반 검색어는 1만 번 보여야 12번 눌린다</a:t>
+            </a:r>
+            <a:endParaRPr lang="en-US" sz="1050" dirty="0"/>
+          </a:p>
+        </p:txBody>
+      </p:sp>
+      <p:sp>
+        <p:nvSpPr>
+          <p:cNvPr id="13" name="Text 11"/>
+          <p:cNvSpPr txBox="1"/>
+          <p:nvPr/>
+        </p:nvSpPr>
+        <p:spPr>
+          <a:xfrm>
+            <a:off x="411480" y="1481328"/>
+            <a:ext cx="4937760" cy="182880"/>
+          </a:xfrm>
+          <a:prstGeom prst="rect">
+            <a:avLst/>
+          </a:prstGeom>
+          <a:noFill/>
+          <a:ln/>
+        </p:spPr>
+        <p:txBody>
+          <a:bodyPr wrap="square" lIns="0" tIns="0" rIns="0" bIns="0" rtlCol="0" anchor="ctr"/>
+          <a:lstStyle/>
+          <a:p>
+            <a:pPr indent="0" marL="0">
+              <a:buNone/>
+            </a:pPr>
+            <a:r>
+              <a:rPr lang="en-US" sz="800" dirty="0">
+                <a:solidFill>
+                  <a:srgbClr val="52514E"/>
+                </a:solidFill>
+                <a:latin typeface="Malgun Gothic" pitchFamily="34" charset="0"/>
+                <a:ea typeface="Malgun Gothic" pitchFamily="34" charset="-122"/>
+                <a:cs typeface="Malgun Gothic" pitchFamily="34" charset="-120"/>
+              </a:rPr>
+              <a:t>검색어 유형별 클릭률 · 괄호는 90일 클릭 수 · 클릭당 비용은 유형과 상관없이 2,000원 안팎(지역명만 706원)</a:t>
+            </a:r>
+            <a:endParaRPr lang="en-US" sz="800" dirty="0"/>
+          </a:p>
+        </p:txBody>
+      </p:sp>
+      <p:graphicFrame>
+        <p:nvGraphicFramePr>
+          <p:cNvPr id="14" name="Chart 0" descr=""/>
+          <p:cNvGraphicFramePr/>
+          <p:nvPr/>
+        </p:nvGraphicFramePr>
+        <p:xfrm>
+          <a:off x="320040" y="1700784"/>
+          <a:ext cx="4754880" cy="2697480"/>
+        </p:xfrm>
+        <a:graphic xmlns:a="http://schemas.openxmlformats.org/drawingml/2006/main">
+          <a:graphicData uri="http://schemas.openxmlformats.org/drawingml/2006/chart">
+            <c:chart xmlns:c="http://schemas.openxmlformats.org/drawingml/2006/chart" r:id="rId1"/>
+          </a:graphicData>
+        </a:graphic>
+      </p:graphicFrame>
+      <p:sp>
+        <p:nvSpPr>
+          <p:cNvPr id="15" name="Text 12"/>
+          <p:cNvSpPr txBox="1"/>
+          <p:nvPr/>
+        </p:nvSpPr>
+        <p:spPr>
+          <a:xfrm>
+            <a:off x="5440680" y="1243584"/>
+            <a:ext cx="3291840" cy="219456"/>
+          </a:xfrm>
+          <a:prstGeom prst="rect">
+            <a:avLst/>
+          </a:prstGeom>
+          <a:noFill/>
+          <a:ln/>
+        </p:spPr>
+        <p:txBody>
+          <a:bodyPr wrap="square" lIns="0" tIns="0" rIns="0" bIns="0" rtlCol="0" anchor="ctr"/>
+          <a:lstStyle/>
+          <a:p>
+            <a:pPr indent="0" marL="0">
+              <a:buNone/>
+            </a:pPr>
+            <a:r>
+              <a:rPr lang="en-US" sz="950" b="1" dirty="0">
+                <a:solidFill>
+                  <a:srgbClr val="52514E"/>
+                </a:solidFill>
+                <a:latin typeface="Malgun Gothic" pitchFamily="34" charset="0"/>
+                <a:ea typeface="Malgun Gothic" pitchFamily="34" charset="-122"/>
+                <a:cs typeface="Malgun Gothic" pitchFamily="34" charset="-120"/>
+              </a:rPr>
+              <a:t>포괄 검색어 8개 vs 구체적 검색어 (모든 광고그룹)</a:t>
+            </a:r>
+            <a:endParaRPr lang="en-US" sz="950" dirty="0"/>
+          </a:p>
+        </p:txBody>
+      </p:sp>
+      <p:sp>
+        <p:nvSpPr>
+          <p:cNvPr id="16" name="Text 13"/>
+          <p:cNvSpPr txBox="1"/>
+          <p:nvPr/>
+        </p:nvSpPr>
+        <p:spPr>
+          <a:xfrm>
+            <a:off x="5440680" y="1463040"/>
+            <a:ext cx="3291840" cy="384048"/>
+          </a:xfrm>
+          <a:prstGeom prst="rect">
+            <a:avLst/>
+          </a:prstGeom>
+          <a:noFill/>
+          <a:ln/>
+        </p:spPr>
+        <p:txBody>
+          <a:bodyPr wrap="square" lIns="0" tIns="0" rIns="0" bIns="0" rtlCol="0" anchor="ctr"/>
+          <a:lstStyle/>
+          <a:p>
+            <a:pPr indent="0" marL="0">
+              <a:buNone/>
+            </a:pPr>
+            <a:r>
+              <a:rPr lang="en-US" sz="2200" b="1" dirty="0">
+                <a:solidFill>
+                  <a:srgbClr val="EB6834"/>
+                </a:solidFill>
+                <a:latin typeface="Malgun Gothic" pitchFamily="34" charset="0"/>
+                <a:ea typeface="Malgun Gothic" pitchFamily="34" charset="-122"/>
+                <a:cs typeface="Malgun Gothic" pitchFamily="34" charset="-120"/>
+              </a:rPr>
+              <a:t>0.06%</a:t>
+            </a:r>
+            <a:pPr indent="0" marL="0">
+              <a:buNone/>
+            </a:pPr>
+            <a:r>
+              <a:rPr lang="en-US" sz="1000" dirty="0">
+                <a:solidFill>
+                  <a:srgbClr val="52514E"/>
+                </a:solidFill>
+                <a:latin typeface="Malgun Gothic" pitchFamily="34" charset="0"/>
+                <a:ea typeface="Malgun Gothic" pitchFamily="34" charset="-122"/>
+                <a:cs typeface="Malgun Gothic" pitchFamily="34" charset="-120"/>
+              </a:rPr>
+              <a:t>  vs  </a:t>
+            </a:r>
+            <a:pPr indent="0" marL="0">
+              <a:buNone/>
+            </a:pPr>
+            <a:r>
+              <a:rPr lang="en-US" sz="2200" b="1" dirty="0">
+                <a:solidFill>
+                  <a:srgbClr val="2A78D6"/>
+                </a:solidFill>
+                <a:latin typeface="Malgun Gothic" pitchFamily="34" charset="0"/>
+                <a:ea typeface="Malgun Gothic" pitchFamily="34" charset="-122"/>
+                <a:cs typeface="Malgun Gothic" pitchFamily="34" charset="-120"/>
+              </a:rPr>
+              <a:t>0.50%</a:t>
+            </a:r>
+            <a:endParaRPr lang="en-US" sz="2200" dirty="0"/>
+          </a:p>
+        </p:txBody>
+      </p:sp>
+      <p:sp>
+        <p:nvSpPr>
+          <p:cNvPr id="17" name="Text 14"/>
+          <p:cNvSpPr txBox="1"/>
+          <p:nvPr/>
+        </p:nvSpPr>
+        <p:spPr>
+          <a:xfrm>
+            <a:off x="5440680" y="1865376"/>
+            <a:ext cx="3291840" cy="1188720"/>
           </a:xfrm>
           <a:prstGeom prst="rect">
             <a:avLst/>
@@ -6914,7 +6083,134 @@
               <a:buNone/>
             </a:pPr>
             <a:r>
-              <a:rPr lang="en-US" sz="900" b="1" dirty="0">
+              <a:rPr lang="en-US" sz="850" dirty="0">
+                <a:solidFill>
+                  <a:srgbClr val="0B0B0B"/>
+                </a:solidFill>
+                <a:latin typeface="Malgun Gothic" pitchFamily="34" charset="0"/>
+                <a:ea typeface="Malgun Gothic" pitchFamily="34" charset="-122"/>
+                <a:cs typeface="Malgun Gothic" pitchFamily="34" charset="-120"/>
+              </a:rPr>
+              <a:t>포괄 검색어가 노출 68%, 광고비 26%를 쓰고 클릭은 20%. 클릭당 비용은 같음(2,547원 대 2,434원)</a:t>
+            </a:r>
+            <a:endParaRPr lang="en-US" sz="850" dirty="0"/>
+          </a:p>
+          <a:p>
+            <a:pPr indent="0" marL="0">
+              <a:spcAft>
+                <a:spcPts val="300"/>
+              </a:spcAft>
+              <a:buNone/>
+            </a:pPr>
+            <a:r>
+              <a:rPr lang="en-US" sz="800" dirty="0">
+                <a:solidFill>
+                  <a:srgbClr val="52514E"/>
+                </a:solidFill>
+                <a:latin typeface="Malgun Gothic" pitchFamily="34" charset="0"/>
+                <a:ea typeface="Malgun Gothic" pitchFamily="34" charset="-122"/>
+                <a:cs typeface="Malgun Gothic" pitchFamily="34" charset="-120"/>
+              </a:rPr>
+              <a:t>피셔 정확검정, 우연일 확률 0.1% 미만</a:t>
+            </a:r>
+            <a:endParaRPr lang="en-US" sz="850" dirty="0"/>
+          </a:p>
+          <a:p>
+            <a:pPr indent="0" marL="0">
+              <a:spcAft>
+                <a:spcPts val="300"/>
+              </a:spcAft>
+              <a:buNone/>
+            </a:pPr>
+            <a:r>
+              <a:rPr lang="en-US" sz="850" dirty="0">
+                <a:solidFill>
+                  <a:srgbClr val="0B0B0B"/>
+                </a:solidFill>
+                <a:latin typeface="Malgun Gothic" pitchFamily="34" charset="0"/>
+                <a:ea typeface="Malgun Gothic" pitchFamily="34" charset="-122"/>
+                <a:cs typeface="Malgun Gothic" pitchFamily="34" charset="-120"/>
+              </a:rPr>
+              <a:t>확장 검색은 직접 등록한 키워드의 절반만 눌림(0.32% 대 0.61%)</a:t>
+            </a:r>
+            <a:endParaRPr lang="en-US" sz="850" dirty="0"/>
+          </a:p>
+          <a:p>
+            <a:pPr indent="0" marL="0">
+              <a:spcAft>
+                <a:spcPts val="300"/>
+              </a:spcAft>
+              <a:buNone/>
+            </a:pPr>
+            <a:r>
+              <a:rPr lang="en-US" sz="850" dirty="0">
+                <a:solidFill>
+                  <a:srgbClr val="0B0B0B"/>
+                </a:solidFill>
+                <a:latin typeface="Malgun Gothic" pitchFamily="34" charset="0"/>
+                <a:ea typeface="Malgun Gothic" pitchFamily="34" charset="-122"/>
+                <a:cs typeface="Malgun Gothic" pitchFamily="34" charset="-120"/>
+              </a:rPr>
+              <a:t>작년 정리로 광고비 −45%에 신청은 18 → 15(−17%). 광고비대로 줄지 않았다는 경향(포아송 8%)</a:t>
+            </a:r>
+            <a:endParaRPr lang="en-US" sz="850" dirty="0"/>
+          </a:p>
+        </p:txBody>
+      </p:sp>
+      <p:sp>
+        <p:nvSpPr>
+          <p:cNvPr id="18" name="Shape 15"/>
+          <p:cNvSpPr/>
+          <p:nvPr/>
+        </p:nvSpPr>
+        <p:spPr>
+          <a:xfrm>
+            <a:off x="5440680" y="3108960"/>
+            <a:ext cx="3291840" cy="1298448"/>
+          </a:xfrm>
+          <a:prstGeom prst="rect">
+            <a:avLst/>
+          </a:prstGeom>
+          <a:solidFill>
+            <a:srgbClr val="EEF4FB"/>
+          </a:solidFill>
+          <a:ln w="12700">
+            <a:solidFill>
+              <a:srgbClr val="EEF4FB"/>
+            </a:solidFill>
+            <a:prstDash val="solid"/>
+          </a:ln>
+        </p:spPr>
+      </p:sp>
+      <p:sp>
+        <p:nvSpPr>
+          <p:cNvPr id="19" name="Text 16"/>
+          <p:cNvSpPr txBox="1"/>
+          <p:nvPr/>
+        </p:nvSpPr>
+        <p:spPr>
+          <a:xfrm>
+            <a:off x="5550408" y="3163824"/>
+            <a:ext cx="3072384" cy="1207008"/>
+          </a:xfrm>
+          <a:prstGeom prst="rect">
+            <a:avLst/>
+          </a:prstGeom>
+          <a:noFill/>
+          <a:ln/>
+        </p:spPr>
+        <p:txBody>
+          <a:bodyPr wrap="square" lIns="0" tIns="0" rIns="0" bIns="0" rtlCol="0" anchor="t"/>
+          <a:lstStyle/>
+          <a:p>
+            <a:pPr indent="0" marL="0">
+              <a:spcAft>
+                <a:spcPts val="300"/>
+              </a:spcAft>
+              <a:buNone/>
+            </a:pPr>
+            <a:r>
+              <a:rPr lang="en-US" sz="850" b="1" dirty="0">
                 <a:solidFill>
                   <a:srgbClr val="EB6834"/>
                 </a:solidFill>
@@ -6924,7 +6220,7 @@
               </a:rPr>
               <a:t>뺌</a:t>
             </a:r>
-            <a:endParaRPr lang="en-US" sz="900" dirty="0"/>
+            <a:endParaRPr lang="en-US" sz="850" dirty="0"/>
           </a:p>
           <a:p>
             <a:pPr marL="127000" indent="-127000">
@@ -6935,7 +6231,7 @@
               <a:buChar char="•"/>
             </a:pPr>
             <a:r>
-              <a:rPr lang="en-US" sz="900" dirty="0">
+              <a:rPr lang="en-US" sz="850" dirty="0">
                 <a:solidFill>
                   <a:srgbClr val="0B0B0B"/>
                 </a:solidFill>
@@ -6943,9 +6239,9 @@
                 <a:ea typeface="Malgun Gothic" pitchFamily="34" charset="-122"/>
                 <a:cs typeface="Malgun Gothic" pitchFamily="34" charset="-120"/>
               </a:rPr>
-              <a:t>특허·특허법인·변리사·특허사무소 입찰 낮추거나 제외</a:t>
-            </a:r>
-            <a:endParaRPr lang="en-US" sz="900" dirty="0"/>
+              <a:t>특허·특허법인·변리사·특허사무소 입찰 낮추거나 제외("특허출원"은 남김)</a:t>
+            </a:r>
+            <a:endParaRPr lang="en-US" sz="850" dirty="0"/>
           </a:p>
           <a:p>
             <a:pPr marL="127000" indent="-127000">
@@ -6956,7 +6252,7 @@
               <a:buChar char="•"/>
             </a:pPr>
             <a:r>
-              <a:rPr lang="en-US" sz="900" dirty="0">
+              <a:rPr lang="en-US" sz="850" dirty="0">
                 <a:solidFill>
                   <a:srgbClr val="0B0B0B"/>
                 </a:solidFill>
@@ -6966,7 +6262,7 @@
               </a:rPr>
               <a:t>확장 검색은 성적 나쁜 그룹부터 끔, "변리사파견" 등 무관 노출 정리</a:t>
             </a:r>
-            <a:endParaRPr lang="en-US" sz="900" dirty="0"/>
+            <a:endParaRPr lang="en-US" sz="850" dirty="0"/>
           </a:p>
           <a:p>
             <a:pPr indent="0" marL="0">
@@ -6976,7 +6272,7 @@
               <a:buNone/>
             </a:pPr>
             <a:r>
-              <a:rPr lang="en-US" sz="900" b="1" dirty="0">
+              <a:rPr lang="en-US" sz="850" b="1" dirty="0">
                 <a:solidFill>
                   <a:srgbClr val="2A78D6"/>
                 </a:solidFill>
@@ -6986,7 +6282,7 @@
               </a:rPr>
               <a:t>늘림</a:t>
             </a:r>
-            <a:endParaRPr lang="en-US" sz="900" dirty="0"/>
+            <a:endParaRPr lang="en-US" sz="850" dirty="0"/>
           </a:p>
           <a:p>
             <a:pPr marL="127000" indent="-127000">
@@ -6997,7 +6293,7 @@
               <a:buChar char="•"/>
             </a:pPr>
             <a:r>
-              <a:rPr lang="en-US" sz="900" dirty="0">
+              <a:rPr lang="en-US" sz="850" dirty="0">
                 <a:solidFill>
                   <a:srgbClr val="0B0B0B"/>
                 </a:solidFill>
@@ -7007,7 +6303,7 @@
               </a:rPr>
               <a:t>지방 키워드(클릭률 1.9%, 클릭당 706원, 변리사 선호)</a:t>
             </a:r>
-            <a:endParaRPr lang="en-US" sz="900" dirty="0"/>
+            <a:endParaRPr lang="en-US" sz="850" dirty="0"/>
           </a:p>
           <a:p>
             <a:pPr marL="127000" indent="-127000">
@@ -7018,7 +6314,7 @@
               <a:buChar char="•"/>
             </a:pPr>
             <a:r>
-              <a:rPr lang="en-US" sz="900" dirty="0">
+              <a:rPr lang="en-US" sz="850" dirty="0">
                 <a:solidFill>
                   <a:srgbClr val="0B0B0B"/>
                 </a:solidFill>
@@ -7028,13 +6324,13 @@
               </a:rPr>
               <a:t>심사관출신 그룹(클릭률 1위, 비용 2.5%)</a:t>
             </a:r>
-            <a:endParaRPr lang="en-US" sz="900" dirty="0"/>
+            <a:endParaRPr lang="en-US" sz="850" dirty="0"/>
           </a:p>
         </p:txBody>
       </p:sp>
       <p:sp>
         <p:nvSpPr>
-          <p:cNvPr id="11" name="Shape 8"/>
+          <p:cNvPr id="20" name="Shape 17"/>
           <p:cNvSpPr/>
           <p:nvPr/>
         </p:nvSpPr>
@@ -7057,7 +6353,7 @@
       </p:sp>
       <p:sp>
         <p:nvSpPr>
-          <p:cNvPr id="12" name="Text 9"/>
+          <p:cNvPr id="21" name="Text 18"/>
           <p:cNvSpPr txBox="1"/>
           <p:nvPr/>
         </p:nvSpPr>
@@ -7091,7 +6387,7 @@
                 <a:ea typeface="Malgun Gothic" pitchFamily="34" charset="-122"/>
                 <a:cs typeface="Malgun Gothic" pitchFamily="34" charset="-120"/>
               </a:rPr>
-              <a:t>출처: 네이버 검색광고 검색어 보고서 2026-07-06 ~ 10-03(90일), 27,277행. 검색어 9,383개를 글자 규칙으로 유형 분류(클릭 난 231개는 검산)</a:t>
+              <a:t>출처: 네이버 검색광고 검색어 보고서 2026-07-06 ~ 10-03(90일, 27,277행), 비교용 2025-07-02 ~ 09-29. GA4 2026-09-02 ~ 10-01(작업자 접속 69세션 제외)</a:t>
             </a:r>
             <a:endParaRPr lang="en-US" sz="800" dirty="0"/>
           </a:p>
@@ -7111,7 +6407,7 @@
                 <a:ea typeface="Malgun Gothic" pitchFamily="34" charset="-122"/>
                 <a:cs typeface="Malgun Gothic" pitchFamily="34" charset="-120"/>
               </a:rPr>
-              <a:t>한계: 전환 측정이 없어 클릭까지만 봄. 확장 검색의 실제 검색어는 보고서에 안 나옴</a:t>
+              <a:t>검색어 9,383개를 글자 규칙으로 유형 분류(클릭 난 231개는 검산). 한계: 전환 측정이 없어 클릭까지만 봄. 확장 검색의 실제 검색어는 보고서에 안 나옴</a:t>
             </a:r>
             <a:endParaRPr lang="en-US" sz="800" dirty="0"/>
           </a:p>
@@ -7237,7 +6533,7 @@
         </p:nvSpPr>
         <p:spPr>
           <a:xfrm>
-            <a:off x="3954780" y="658368"/>
+            <a:off x="4069080" y="658368"/>
             <a:ext cx="0" cy="3703320"/>
           </a:xfrm>
           <a:prstGeom prst="line">
@@ -7260,7 +6556,7 @@
         </p:nvSpPr>
         <p:spPr>
           <a:xfrm>
-            <a:off x="6926580" y="658368"/>
+            <a:off x="6583680" y="658368"/>
             <a:ext cx="0" cy="3703320"/>
           </a:xfrm>
           <a:prstGeom prst="line">
@@ -7284,7 +6580,7 @@
         <p:spPr>
           <a:xfrm>
             <a:off x="411480" y="658368"/>
-            <a:ext cx="3429000" cy="219456"/>
+            <a:ext cx="3566160" cy="219456"/>
           </a:xfrm>
           <a:prstGeom prst="rect">
             <a:avLst/>
@@ -7308,7 +6604,7 @@
                 <a:ea typeface="Malgun Gothic" pitchFamily="34" charset="-122"/>
                 <a:cs typeface="Malgun Gothic" pitchFamily="34" charset="-120"/>
               </a:rPr>
-              <a:t>방문당 신청률</a:t>
+              <a:t>방문당 신청률 (2장)</a:t>
             </a:r>
             <a:endParaRPr lang="en-US" sz="950" dirty="0"/>
           </a:p>
@@ -7323,7 +6619,7 @@
         <p:spPr>
           <a:xfrm>
             <a:off x="411480" y="877824"/>
-            <a:ext cx="3429000" cy="347472"/>
+            <a:ext cx="3566160" cy="347472"/>
           </a:xfrm>
           <a:prstGeom prst="rect">
             <a:avLst/>
@@ -7353,7 +6649,7 @@
               <a:buNone/>
             </a:pPr>
             <a:r>
-              <a:rPr lang="en-US" sz="900" dirty="0">
+              <a:rPr lang="en-US" sz="850" dirty="0">
                 <a:solidFill>
                   <a:srgbClr val="52514E"/>
                 </a:solidFill>
@@ -7361,7 +6657,7 @@
                 <a:ea typeface="Malgun Gothic" pitchFamily="34" charset="-122"/>
                 <a:cs typeface="Malgun Gothic" pitchFamily="34" charset="-120"/>
               </a:rPr>
-              <a:t>  2020 → 2022, 절반</a:t>
+              <a:t>  2020 → 2022, 절반. 방문도 절반 → 신청 4분의 1</a:t>
             </a:r>
             <a:endParaRPr lang="en-US" sz="1800" dirty="0"/>
           </a:p>
@@ -7369,363 +6665,18 @@
       </p:sp>
       <p:sp>
         <p:nvSpPr>
-          <p:cNvPr id="7" name="Text 5"/>
-          <p:cNvSpPr txBox="1"/>
+          <p:cNvPr id="7" name="Shape 5"/>
+          <p:cNvSpPr/>
           <p:nvPr/>
         </p:nvSpPr>
         <p:spPr>
           <a:xfrm>
             <a:off x="411480" y="1261872"/>
-            <a:ext cx="3429000" cy="237744"/>
-          </a:xfrm>
-          <a:prstGeom prst="rect">
-            <a:avLst/>
-          </a:prstGeom>
-          <a:noFill/>
-          <a:ln/>
-        </p:spPr>
-        <p:txBody>
-          <a:bodyPr wrap="square" lIns="0" tIns="0" rIns="0" bIns="0" rtlCol="0" anchor="ctr"/>
-          <a:lstStyle/>
-          <a:p>
-            <a:pPr indent="0" marL="0">
-              <a:buNone/>
-            </a:pPr>
-            <a:r>
-              <a:rPr lang="en-US" sz="1100" b="1" dirty="0">
-                <a:solidFill>
-                  <a:srgbClr val="0B0B0B"/>
-                </a:solidFill>
-                <a:latin typeface="Malgun Gothic" pitchFamily="34" charset="0"/>
-                <a:ea typeface="Malgun Gothic" pitchFamily="34" charset="-122"/>
-                <a:cs typeface="Malgun Gothic" pitchFamily="34" charset="-120"/>
-              </a:rPr>
-              <a:t>광고로 온 사람 4명 중 1명은 5초 안에 나간다</a:t>
-            </a:r>
-            <a:endParaRPr lang="en-US" sz="1100" dirty="0"/>
-          </a:p>
-        </p:txBody>
-      </p:sp>
-      <p:sp>
-        <p:nvSpPr>
-          <p:cNvPr id="8" name="Text 6"/>
-          <p:cNvSpPr txBox="1"/>
-          <p:nvPr/>
-        </p:nvSpPr>
-        <p:spPr>
-          <a:xfrm>
-            <a:off x="411480" y="1499616"/>
-            <a:ext cx="3429000" cy="182880"/>
-          </a:xfrm>
-          <a:prstGeom prst="rect">
-            <a:avLst/>
-          </a:prstGeom>
-          <a:noFill/>
-          <a:ln/>
-        </p:spPr>
-        <p:txBody>
-          <a:bodyPr wrap="square" lIns="0" tIns="0" rIns="0" bIns="0" rtlCol="0" anchor="ctr"/>
-          <a:lstStyle/>
-          <a:p>
-            <a:pPr indent="0" marL="0">
-              <a:buNone/>
-            </a:pPr>
-            <a:r>
-              <a:rPr lang="en-US" sz="800" dirty="0">
-                <a:solidFill>
-                  <a:srgbClr val="52514E"/>
-                </a:solidFill>
-                <a:latin typeface="Malgun Gothic" pitchFamily="34" charset="0"/>
-                <a:ea typeface="Malgun Gothic" pitchFamily="34" charset="-122"/>
-                <a:cs typeface="Malgun Gothic" pitchFamily="34" charset="-120"/>
-              </a:rPr>
-              <a:t>검색어 유형별 체류(%) · 괄호는 사람 수, 수가 작아 경향</a:t>
-            </a:r>
-            <a:endParaRPr lang="en-US" sz="800" dirty="0"/>
-          </a:p>
-        </p:txBody>
-      </p:sp>
-      <p:graphicFrame>
-        <p:nvGraphicFramePr>
-          <p:cNvPr id="9" name="Chart 0" descr=""/>
-          <p:cNvGraphicFramePr/>
-          <p:nvPr/>
-        </p:nvGraphicFramePr>
-        <p:xfrm>
-          <a:off x="338328" y="1664208"/>
-          <a:ext cx="3538728" cy="1783080"/>
-        </p:xfrm>
-        <a:graphic xmlns:a="http://schemas.openxmlformats.org/drawingml/2006/main">
-          <a:graphicData uri="http://schemas.openxmlformats.org/drawingml/2006/chart">
-            <c:chart xmlns:c="http://schemas.openxmlformats.org/drawingml/2006/chart" r:id="rId1"/>
-          </a:graphicData>
-        </a:graphic>
-      </p:graphicFrame>
-      <p:sp>
-        <p:nvSpPr>
-          <p:cNvPr id="10" name="Text 7"/>
-          <p:cNvSpPr txBox="1"/>
-          <p:nvPr/>
-        </p:nvSpPr>
-        <p:spPr>
-          <a:xfrm>
-            <a:off x="411480" y="3474720"/>
-            <a:ext cx="3429000" cy="411480"/>
-          </a:xfrm>
-          <a:prstGeom prst="rect">
-            <a:avLst/>
-          </a:prstGeom>
-          <a:noFill/>
-          <a:ln/>
-        </p:spPr>
-        <p:txBody>
-          <a:bodyPr wrap="square" lIns="0" tIns="0" rIns="0" bIns="0" rtlCol="0" anchor="t"/>
-          <a:lstStyle/>
-          <a:p>
-            <a:pPr indent="0" marL="0">
-              <a:spcAft>
-                <a:spcPts val="300"/>
-              </a:spcAft>
-              <a:buNone/>
-            </a:pPr>
-            <a:r>
-              <a:rPr lang="en-US" sz="850" dirty="0">
-                <a:solidFill>
-                  <a:srgbClr val="0B0B0B"/>
-                </a:solidFill>
-                <a:latin typeface="Malgun Gothic" pitchFamily="34" charset="0"/>
-                <a:ea typeface="Malgun Gothic" pitchFamily="34" charset="-122"/>
-                <a:cs typeface="Malgun Gothic" pitchFamily="34" charset="-120"/>
-              </a:rPr>
-              <a:t>나머지는 읽고 나서 신청하지 않음(Clarity 5건 중 4건이 20~34초 읽고 폼 접촉 0)</a:t>
-            </a:r>
-            <a:endParaRPr lang="en-US" sz="850" dirty="0"/>
-          </a:p>
-        </p:txBody>
-      </p:sp>
-      <p:sp>
-        <p:nvSpPr>
-          <p:cNvPr id="11" name="Text 8"/>
-          <p:cNvSpPr txBox="1"/>
-          <p:nvPr/>
-        </p:nvSpPr>
-        <p:spPr>
-          <a:xfrm>
-            <a:off x="411480" y="3904488"/>
-            <a:ext cx="3429000" cy="411480"/>
-          </a:xfrm>
-          <a:prstGeom prst="rect">
-            <a:avLst/>
-          </a:prstGeom>
-          <a:noFill/>
-          <a:ln/>
-        </p:spPr>
-        <p:txBody>
-          <a:bodyPr wrap="square" lIns="0" tIns="0" rIns="0" bIns="0" rtlCol="0" anchor="t"/>
-          <a:lstStyle/>
-          <a:p>
-            <a:pPr indent="0" marL="0">
-              <a:buNone/>
-            </a:pPr>
-            <a:r>
-              <a:rPr lang="en-US" sz="900" b="1" dirty="0">
-                <a:solidFill>
-                  <a:srgbClr val="2A78D6"/>
-                </a:solidFill>
-                <a:latin typeface="Malgun Gothic" pitchFamily="34" charset="0"/>
-                <a:ea typeface="Malgun Gothic" pitchFamily="34" charset="-122"/>
-                <a:cs typeface="Malgun Gothic" pitchFamily="34" charset="-120"/>
-              </a:rPr>
-              <a:t>→ 18초 안에 "누가·무엇을·무료로", 읽기 끝에 간편 신청, 휴대폰 대응</a:t>
-            </a:r>
-            <a:endParaRPr lang="en-US" sz="900" dirty="0"/>
-          </a:p>
-        </p:txBody>
-      </p:sp>
-      <p:sp>
-        <p:nvSpPr>
-          <p:cNvPr id="12" name="Text 9"/>
-          <p:cNvSpPr txBox="1"/>
-          <p:nvPr/>
-        </p:nvSpPr>
-        <p:spPr>
-          <a:xfrm>
-            <a:off x="4069080" y="658368"/>
-            <a:ext cx="2743200" cy="219456"/>
-          </a:xfrm>
-          <a:prstGeom prst="rect">
-            <a:avLst/>
-          </a:prstGeom>
-          <a:noFill/>
-          <a:ln/>
-        </p:spPr>
-        <p:txBody>
-          <a:bodyPr wrap="square" lIns="0" tIns="0" rIns="0" bIns="0" rtlCol="0" anchor="ctr"/>
-          <a:lstStyle/>
-          <a:p>
-            <a:pPr indent="0" marL="0">
-              <a:buNone/>
-            </a:pPr>
-            <a:r>
-              <a:rPr lang="en-US" sz="950" b="1" dirty="0">
-                <a:solidFill>
-                  <a:srgbClr val="52514E"/>
-                </a:solidFill>
-                <a:latin typeface="Malgun Gothic" pitchFamily="34" charset="0"/>
-                <a:ea typeface="Malgun Gothic" pitchFamily="34" charset="-122"/>
-                <a:cs typeface="Malgun Gothic" pitchFamily="34" charset="-120"/>
-              </a:rPr>
-              <a:t>수임 전환율</a:t>
-            </a:r>
-            <a:endParaRPr lang="en-US" sz="950" dirty="0"/>
-          </a:p>
-        </p:txBody>
-      </p:sp>
-      <p:sp>
-        <p:nvSpPr>
-          <p:cNvPr id="13" name="Text 10"/>
-          <p:cNvSpPr txBox="1"/>
-          <p:nvPr/>
-        </p:nvSpPr>
-        <p:spPr>
-          <a:xfrm>
-            <a:off x="4069080" y="877824"/>
-            <a:ext cx="2743200" cy="347472"/>
-          </a:xfrm>
-          <a:prstGeom prst="rect">
-            <a:avLst/>
-          </a:prstGeom>
-          <a:noFill/>
-          <a:ln/>
-        </p:spPr>
-        <p:txBody>
-          <a:bodyPr wrap="square" lIns="0" tIns="0" rIns="0" bIns="0" rtlCol="0" anchor="ctr"/>
-          <a:lstStyle/>
-          <a:p>
-            <a:pPr indent="0" marL="0">
-              <a:buNone/>
-            </a:pPr>
-            <a:r>
-              <a:rPr lang="en-US" sz="1800" b="1" dirty="0">
-                <a:solidFill>
-                  <a:srgbClr val="EB6834"/>
-                </a:solidFill>
-                <a:latin typeface="Malgun Gothic" pitchFamily="34" charset="0"/>
-                <a:ea typeface="Malgun Gothic" pitchFamily="34" charset="-122"/>
-                <a:cs typeface="Malgun Gothic" pitchFamily="34" charset="-120"/>
-              </a:rPr>
-              <a:t>기록 없음</a:t>
-            </a:r>
-            <a:pPr indent="0" marL="0">
-              <a:buNone/>
-            </a:pPr>
-            <a:r>
-              <a:rPr lang="en-US" sz="900" dirty="0">
-                <a:solidFill>
-                  <a:srgbClr val="52514E"/>
-                </a:solidFill>
-                <a:latin typeface="Malgun Gothic" pitchFamily="34" charset="0"/>
-                <a:ea typeface="Malgun Gothic" pitchFamily="34" charset="-122"/>
-                <a:cs typeface="Malgun Gothic" pitchFamily="34" charset="-120"/>
-              </a:rPr>
-              <a:t>  신청 뒤는 전화</a:t>
-            </a:r>
-            <a:endParaRPr lang="en-US" sz="1800" dirty="0"/>
-          </a:p>
-        </p:txBody>
-      </p:sp>
-      <p:sp>
-        <p:nvSpPr>
-          <p:cNvPr id="14" name="Text 11"/>
-          <p:cNvSpPr txBox="1"/>
-          <p:nvPr/>
-        </p:nvSpPr>
-        <p:spPr>
-          <a:xfrm>
-            <a:off x="4069080" y="1261872"/>
-            <a:ext cx="2743200" cy="237744"/>
-          </a:xfrm>
-          <a:prstGeom prst="rect">
-            <a:avLst/>
-          </a:prstGeom>
-          <a:noFill/>
-          <a:ln/>
-        </p:spPr>
-        <p:txBody>
-          <a:bodyPr wrap="square" lIns="0" tIns="0" rIns="0" bIns="0" rtlCol="0" anchor="ctr"/>
-          <a:lstStyle/>
-          <a:p>
-            <a:pPr indent="0" marL="0">
-              <a:buNone/>
-            </a:pPr>
-            <a:r>
-              <a:rPr lang="en-US" sz="1050" b="1" dirty="0">
-                <a:solidFill>
-                  <a:srgbClr val="0B0B0B"/>
-                </a:solidFill>
-                <a:latin typeface="Malgun Gothic" pitchFamily="34" charset="0"/>
-                <a:ea typeface="Malgun Gothic" pitchFamily="34" charset="-122"/>
-                <a:cs typeface="Malgun Gothic" pitchFamily="34" charset="-120"/>
-              </a:rPr>
-              <a:t>광고 100번 → 신청 4명 → 수임 1건 미만</a:t>
-            </a:r>
-            <a:endParaRPr lang="en-US" sz="1050" dirty="0"/>
-          </a:p>
-        </p:txBody>
-      </p:sp>
-      <p:sp>
-        <p:nvSpPr>
-          <p:cNvPr id="15" name="Text 12"/>
-          <p:cNvSpPr txBox="1"/>
-          <p:nvPr/>
-        </p:nvSpPr>
-        <p:spPr>
-          <a:xfrm>
-            <a:off x="4069080" y="1499616"/>
-            <a:ext cx="2743200" cy="182880"/>
-          </a:xfrm>
-          <a:prstGeom prst="rect">
-            <a:avLst/>
-          </a:prstGeom>
-          <a:noFill/>
-          <a:ln/>
-        </p:spPr>
-        <p:txBody>
-          <a:bodyPr wrap="square" lIns="0" tIns="0" rIns="0" bIns="0" rtlCol="0" anchor="ctr"/>
-          <a:lstStyle/>
-          <a:p>
-            <a:pPr indent="0" marL="0">
-              <a:buNone/>
-            </a:pPr>
-            <a:r>
-              <a:rPr lang="en-US" sz="800" dirty="0">
-                <a:solidFill>
-                  <a:srgbClr val="52514E"/>
-                </a:solidFill>
-                <a:latin typeface="Malgun Gothic" pitchFamily="34" charset="0"/>
-                <a:ea typeface="Malgun Gothic" pitchFamily="34" charset="-122"/>
-                <a:cs typeface="Malgun Gothic" pitchFamily="34" charset="-120"/>
-              </a:rPr>
-              <a:t>네이버 광고 90일 (2026-07-06 ~ 10-03)</a:t>
-            </a:r>
-            <a:endParaRPr lang="en-US" sz="800" dirty="0"/>
-          </a:p>
-        </p:txBody>
-      </p:sp>
-      <p:sp>
-        <p:nvSpPr>
-          <p:cNvPr id="16" name="Shape 13"/>
-          <p:cNvSpPr/>
-          <p:nvPr/>
-        </p:nvSpPr>
-        <p:spPr>
-          <a:xfrm>
-            <a:off x="4069080" y="1709928"/>
-            <a:ext cx="1737360" cy="329184"/>
+            <a:ext cx="713232" cy="402336"/>
           </a:xfrm>
           <a:prstGeom prst="roundRect">
             <a:avLst>
-              <a:gd name="adj" fmla="val 16667"/>
+              <a:gd name="adj" fmla="val 11364"/>
             </a:avLst>
           </a:prstGeom>
           <a:solidFill>
@@ -7741,14 +6692,14 @@
       </p:sp>
       <p:sp>
         <p:nvSpPr>
-          <p:cNvPr id="17" name="Text 14"/>
+          <p:cNvPr id="8" name="Text 6"/>
           <p:cNvSpPr txBox="1"/>
           <p:nvPr/>
         </p:nvSpPr>
         <p:spPr>
           <a:xfrm>
-            <a:off x="4160520" y="1709928"/>
-            <a:ext cx="1600200" cy="329184"/>
+            <a:off x="448056" y="1280160"/>
+            <a:ext cx="640080" cy="365760"/>
           </a:xfrm>
           <a:prstGeom prst="rect">
             <a:avLst/>
@@ -7760,11 +6711,11 @@
           <a:bodyPr wrap="square" lIns="0" tIns="0" rIns="0" bIns="0" rtlCol="0" anchor="ctr"/>
           <a:lstStyle/>
           <a:p>
-            <a:pPr indent="0" marL="0">
-              <a:buNone/>
-            </a:pPr>
-            <a:r>
-              <a:rPr lang="en-US" sz="850" dirty="0">
+            <a:pPr algn="ctr" indent="0" marL="0">
+              <a:buNone/>
+            </a:pPr>
+            <a:r>
+              <a:rPr lang="en-US" sz="700" dirty="0">
                 <a:solidFill>
                   <a:srgbClr val="FFFFFF"/>
                 </a:solidFill>
@@ -7772,13 +6723,16 @@
                 <a:ea typeface="Malgun Gothic" pitchFamily="34" charset="-122"/>
                 <a:cs typeface="Malgun Gothic" pitchFamily="34" charset="-120"/>
               </a:rPr>
-              <a:t>광고 노출  </a:t>
-            </a:r>
-            <a:pPr indent="0" marL="0">
-              <a:buNone/>
-            </a:pPr>
-            <a:r>
-              <a:rPr lang="en-US" sz="1200" b="1" dirty="0">
+              <a:t>노출</a:t>
+            </a:r>
+            <a:endParaRPr lang="en-US" sz="700" dirty="0"/>
+          </a:p>
+          <a:p>
+            <a:pPr algn="ctr" indent="0" marL="0">
+              <a:buNone/>
+            </a:pPr>
+            <a:r>
+              <a:rPr lang="en-US" sz="1000" b="1" dirty="0">
                 <a:solidFill>
                   <a:srgbClr val="FFFFFF"/>
                 </a:solidFill>
@@ -7788,20 +6742,20 @@
               </a:rPr>
               <a:t>195,455</a:t>
             </a:r>
-            <a:endParaRPr lang="en-US" sz="850" dirty="0"/>
+            <a:endParaRPr lang="en-US" sz="700" dirty="0"/>
           </a:p>
         </p:txBody>
       </p:sp>
       <p:sp>
         <p:nvSpPr>
-          <p:cNvPr id="18" name="Text 15"/>
+          <p:cNvPr id="9" name="Text 7"/>
           <p:cNvSpPr txBox="1"/>
           <p:nvPr/>
         </p:nvSpPr>
         <p:spPr>
           <a:xfrm>
-            <a:off x="5879592" y="1911096"/>
-            <a:ext cx="868680" cy="201168"/>
+            <a:off x="1124712" y="1371600"/>
+            <a:ext cx="237744" cy="182880"/>
           </a:xfrm>
           <a:prstGeom prst="rect">
             <a:avLst/>
@@ -7813,11 +6767,11 @@
           <a:bodyPr wrap="square" lIns="0" tIns="0" rIns="0" bIns="0" rtlCol="0" anchor="t"/>
           <a:lstStyle/>
           <a:p>
-            <a:pPr indent="0" marL="0">
-              <a:buNone/>
-            </a:pPr>
-            <a:r>
-              <a:rPr lang="en-US" sz="850" b="1" dirty="0">
+            <a:pPr algn="ctr" indent="0" marL="0">
+              <a:buNone/>
+            </a:pPr>
+            <a:r>
+              <a:rPr lang="en-US" sz="700" b="1" dirty="0">
                 <a:solidFill>
                   <a:srgbClr val="52514E"/>
                 </a:solidFill>
@@ -7825,26 +6779,26 @@
                 <a:ea typeface="Malgun Gothic" pitchFamily="34" charset="-122"/>
                 <a:cs typeface="Malgun Gothic" pitchFamily="34" charset="-120"/>
               </a:rPr>
-              <a:t>↓ 0.2%</a:t>
-            </a:r>
-            <a:endParaRPr lang="en-US" sz="850" dirty="0"/>
+              <a:t>0.2%</a:t>
+            </a:r>
+            <a:endParaRPr lang="en-US" sz="700" dirty="0"/>
           </a:p>
         </p:txBody>
       </p:sp>
       <p:sp>
         <p:nvSpPr>
-          <p:cNvPr id="19" name="Shape 16"/>
+          <p:cNvPr id="10" name="Shape 8"/>
           <p:cNvSpPr/>
           <p:nvPr/>
         </p:nvSpPr>
         <p:spPr>
           <a:xfrm>
-            <a:off x="4069080" y="2139696"/>
-            <a:ext cx="1737360" cy="329184"/>
+            <a:off x="1362456" y="1261872"/>
+            <a:ext cx="713232" cy="402336"/>
           </a:xfrm>
           <a:prstGeom prst="roundRect">
             <a:avLst>
-              <a:gd name="adj" fmla="val 16667"/>
+              <a:gd name="adj" fmla="val 11364"/>
             </a:avLst>
           </a:prstGeom>
           <a:solidFill>
@@ -7860,14 +6814,14 @@
       </p:sp>
       <p:sp>
         <p:nvSpPr>
-          <p:cNvPr id="20" name="Text 17"/>
+          <p:cNvPr id="11" name="Text 9"/>
           <p:cNvSpPr txBox="1"/>
           <p:nvPr/>
         </p:nvSpPr>
         <p:spPr>
           <a:xfrm>
-            <a:off x="4160520" y="2139696"/>
-            <a:ext cx="1600200" cy="329184"/>
+            <a:off x="1399032" y="1280160"/>
+            <a:ext cx="640080" cy="365760"/>
           </a:xfrm>
           <a:prstGeom prst="rect">
             <a:avLst/>
@@ -7879,11 +6833,11 @@
           <a:bodyPr wrap="square" lIns="0" tIns="0" rIns="0" bIns="0" rtlCol="0" anchor="ctr"/>
           <a:lstStyle/>
           <a:p>
-            <a:pPr indent="0" marL="0">
-              <a:buNone/>
-            </a:pPr>
-            <a:r>
-              <a:rPr lang="en-US" sz="850" dirty="0">
+            <a:pPr algn="ctr" indent="0" marL="0">
+              <a:buNone/>
+            </a:pPr>
+            <a:r>
+              <a:rPr lang="en-US" sz="700" dirty="0">
                 <a:solidFill>
                   <a:srgbClr val="FFFFFF"/>
                 </a:solidFill>
@@ -7891,13 +6845,16 @@
                 <a:ea typeface="Malgun Gothic" pitchFamily="34" charset="-122"/>
                 <a:cs typeface="Malgun Gothic" pitchFamily="34" charset="-120"/>
               </a:rPr>
-              <a:t>클릭 = 방문  </a:t>
-            </a:r>
-            <a:pPr indent="0" marL="0">
-              <a:buNone/>
-            </a:pPr>
-            <a:r>
-              <a:rPr lang="en-US" sz="1200" b="1" dirty="0">
+              <a:t>클릭</a:t>
+            </a:r>
+            <a:endParaRPr lang="en-US" sz="700" dirty="0"/>
+          </a:p>
+          <a:p>
+            <a:pPr algn="ctr" indent="0" marL="0">
+              <a:buNone/>
+            </a:pPr>
+            <a:r>
+              <a:rPr lang="en-US" sz="1000" b="1" dirty="0">
                 <a:solidFill>
                   <a:srgbClr val="FFFFFF"/>
                 </a:solidFill>
@@ -7907,20 +6864,20 @@
               </a:rPr>
               <a:t>388</a:t>
             </a:r>
-            <a:endParaRPr lang="en-US" sz="850" dirty="0"/>
+            <a:endParaRPr lang="en-US" sz="700" dirty="0"/>
           </a:p>
         </p:txBody>
       </p:sp>
       <p:sp>
         <p:nvSpPr>
-          <p:cNvPr id="21" name="Text 18"/>
+          <p:cNvPr id="12" name="Text 10"/>
           <p:cNvSpPr txBox="1"/>
           <p:nvPr/>
         </p:nvSpPr>
         <p:spPr>
           <a:xfrm>
-            <a:off x="5879592" y="2340864"/>
-            <a:ext cx="868680" cy="201168"/>
+            <a:off x="2075688" y="1371600"/>
+            <a:ext cx="237744" cy="182880"/>
           </a:xfrm>
           <a:prstGeom prst="rect">
             <a:avLst/>
@@ -7932,11 +6889,11 @@
           <a:bodyPr wrap="square" lIns="0" tIns="0" rIns="0" bIns="0" rtlCol="0" anchor="t"/>
           <a:lstStyle/>
           <a:p>
-            <a:pPr indent="0" marL="0">
-              <a:buNone/>
-            </a:pPr>
-            <a:r>
-              <a:rPr lang="en-US" sz="850" b="1" dirty="0">
+            <a:pPr algn="ctr" indent="0" marL="0">
+              <a:buNone/>
+            </a:pPr>
+            <a:r>
+              <a:rPr lang="en-US" sz="700" b="1" dirty="0">
                 <a:solidFill>
                   <a:srgbClr val="52514E"/>
                 </a:solidFill>
@@ -7944,26 +6901,26 @@
                 <a:ea typeface="Malgun Gothic" pitchFamily="34" charset="-122"/>
                 <a:cs typeface="Malgun Gothic" pitchFamily="34" charset="-120"/>
               </a:rPr>
-              <a:t>↓ 3.9%</a:t>
-            </a:r>
-            <a:endParaRPr lang="en-US" sz="850" dirty="0"/>
+              <a:t>3.9%</a:t>
+            </a:r>
+            <a:endParaRPr lang="en-US" sz="700" dirty="0"/>
           </a:p>
         </p:txBody>
       </p:sp>
       <p:sp>
         <p:nvSpPr>
-          <p:cNvPr id="22" name="Shape 19"/>
+          <p:cNvPr id="13" name="Shape 11"/>
           <p:cNvSpPr/>
           <p:nvPr/>
         </p:nvSpPr>
         <p:spPr>
           <a:xfrm>
-            <a:off x="4069080" y="2569464"/>
-            <a:ext cx="1737360" cy="329184"/>
+            <a:off x="2313432" y="1261872"/>
+            <a:ext cx="713232" cy="402336"/>
           </a:xfrm>
           <a:prstGeom prst="roundRect">
             <a:avLst>
-              <a:gd name="adj" fmla="val 16667"/>
+              <a:gd name="adj" fmla="val 11364"/>
             </a:avLst>
           </a:prstGeom>
           <a:solidFill>
@@ -7979,14 +6936,14 @@
       </p:sp>
       <p:sp>
         <p:nvSpPr>
-          <p:cNvPr id="23" name="Text 20"/>
+          <p:cNvPr id="14" name="Text 12"/>
           <p:cNvSpPr txBox="1"/>
           <p:nvPr/>
         </p:nvSpPr>
         <p:spPr>
           <a:xfrm>
-            <a:off x="4160520" y="2569464"/>
-            <a:ext cx="1600200" cy="329184"/>
+            <a:off x="2350008" y="1280160"/>
+            <a:ext cx="640080" cy="365760"/>
           </a:xfrm>
           <a:prstGeom prst="rect">
             <a:avLst/>
@@ -7998,11 +6955,11 @@
           <a:bodyPr wrap="square" lIns="0" tIns="0" rIns="0" bIns="0" rtlCol="0" anchor="ctr"/>
           <a:lstStyle/>
           <a:p>
-            <a:pPr indent="0" marL="0">
-              <a:buNone/>
-            </a:pPr>
-            <a:r>
-              <a:rPr lang="en-US" sz="850" dirty="0">
+            <a:pPr algn="ctr" indent="0" marL="0">
+              <a:buNone/>
+            </a:pPr>
+            <a:r>
+              <a:rPr lang="en-US" sz="700" dirty="0">
                 <a:solidFill>
                   <a:srgbClr val="FFFFFF"/>
                 </a:solidFill>
@@ -8010,13 +6967,16 @@
                 <a:ea typeface="Malgun Gothic" pitchFamily="34" charset="-122"/>
                 <a:cs typeface="Malgun Gothic" pitchFamily="34" charset="-120"/>
               </a:rPr>
-              <a:t>폼 신청  </a:t>
-            </a:r>
-            <a:pPr indent="0" marL="0">
-              <a:buNone/>
-            </a:pPr>
-            <a:r>
-              <a:rPr lang="en-US" sz="1200" b="1" dirty="0">
+              <a:t>폼 신청</a:t>
+            </a:r>
+            <a:endParaRPr lang="en-US" sz="700" dirty="0"/>
+          </a:p>
+          <a:p>
+            <a:pPr algn="ctr" indent="0" marL="0">
+              <a:buNone/>
+            </a:pPr>
+            <a:r>
+              <a:rPr lang="en-US" sz="1000" b="1" dirty="0">
                 <a:solidFill>
                   <a:srgbClr val="FFFFFF"/>
                 </a:solidFill>
@@ -8026,20 +6986,20 @@
               </a:rPr>
               <a:t>15</a:t>
             </a:r>
-            <a:endParaRPr lang="en-US" sz="850" dirty="0"/>
+            <a:endParaRPr lang="en-US" sz="700" dirty="0"/>
           </a:p>
         </p:txBody>
       </p:sp>
       <p:sp>
         <p:nvSpPr>
-          <p:cNvPr id="24" name="Text 21"/>
+          <p:cNvPr id="15" name="Text 13"/>
           <p:cNvSpPr txBox="1"/>
           <p:nvPr/>
         </p:nvSpPr>
         <p:spPr>
           <a:xfrm>
-            <a:off x="5879592" y="2770632"/>
-            <a:ext cx="868680" cy="201168"/>
+            <a:off x="3026664" y="1371600"/>
+            <a:ext cx="237744" cy="182880"/>
           </a:xfrm>
           <a:prstGeom prst="rect">
             <a:avLst/>
@@ -8051,11 +7011,11 @@
           <a:bodyPr wrap="square" lIns="0" tIns="0" rIns="0" bIns="0" rtlCol="0" anchor="t"/>
           <a:lstStyle/>
           <a:p>
-            <a:pPr indent="0" marL="0">
-              <a:buNone/>
-            </a:pPr>
-            <a:r>
-              <a:rPr lang="en-US" sz="850" b="1" dirty="0">
+            <a:pPr algn="ctr" indent="0" marL="0">
+              <a:buNone/>
+            </a:pPr>
+            <a:r>
+              <a:rPr lang="en-US" sz="700" b="1" dirty="0">
                 <a:solidFill>
                   <a:srgbClr val="52514E"/>
                 </a:solidFill>
@@ -8063,26 +7023,26 @@
                 <a:ea typeface="Malgun Gothic" pitchFamily="34" charset="-122"/>
                 <a:cs typeface="Malgun Gothic" pitchFamily="34" charset="-120"/>
               </a:rPr>
-              <a:t>↓ 10~20%</a:t>
-            </a:r>
-            <a:endParaRPr lang="en-US" sz="850" dirty="0"/>
+              <a:t>10~20%</a:t>
+            </a:r>
+            <a:endParaRPr lang="en-US" sz="700" dirty="0"/>
           </a:p>
         </p:txBody>
       </p:sp>
       <p:sp>
         <p:nvSpPr>
-          <p:cNvPr id="25" name="Shape 22"/>
+          <p:cNvPr id="16" name="Shape 14"/>
           <p:cNvSpPr/>
           <p:nvPr/>
         </p:nvSpPr>
         <p:spPr>
           <a:xfrm>
-            <a:off x="4069080" y="2999232"/>
-            <a:ext cx="1737360" cy="329184"/>
+            <a:off x="3264408" y="1261872"/>
+            <a:ext cx="713232" cy="402336"/>
           </a:xfrm>
           <a:prstGeom prst="roundRect">
             <a:avLst>
-              <a:gd name="adj" fmla="val 16667"/>
+              <a:gd name="adj" fmla="val 11364"/>
             </a:avLst>
           </a:prstGeom>
           <a:solidFill>
@@ -8098,14 +7058,14 @@
       </p:sp>
       <p:sp>
         <p:nvSpPr>
-          <p:cNvPr id="26" name="Text 23"/>
+          <p:cNvPr id="17" name="Text 15"/>
           <p:cNvSpPr txBox="1"/>
           <p:nvPr/>
         </p:nvSpPr>
         <p:spPr>
           <a:xfrm>
-            <a:off x="4160520" y="2999232"/>
-            <a:ext cx="1600200" cy="329184"/>
+            <a:off x="3300984" y="1280160"/>
+            <a:ext cx="640080" cy="365760"/>
           </a:xfrm>
           <a:prstGeom prst="rect">
             <a:avLst/>
@@ -8117,48 +7077,315 @@
           <a:bodyPr wrap="square" lIns="0" tIns="0" rIns="0" bIns="0" rtlCol="0" anchor="ctr"/>
           <a:lstStyle/>
           <a:p>
+            <a:pPr algn="ctr" indent="0" marL="0">
+              <a:buNone/>
+            </a:pPr>
+            <a:r>
+              <a:rPr lang="en-US" sz="700" dirty="0">
+                <a:solidFill>
+                  <a:srgbClr val="FFFFFF"/>
+                </a:solidFill>
+                <a:latin typeface="Malgun Gothic" pitchFamily="34" charset="0"/>
+                <a:ea typeface="Malgun Gothic" pitchFamily="34" charset="-122"/>
+                <a:cs typeface="Malgun Gothic" pitchFamily="34" charset="-120"/>
+              </a:rPr>
+              <a:t>수임 추정</a:t>
+            </a:r>
+            <a:endParaRPr lang="en-US" sz="700" dirty="0"/>
+          </a:p>
+          <a:p>
+            <a:pPr algn="ctr" indent="0" marL="0">
+              <a:buNone/>
+            </a:pPr>
+            <a:r>
+              <a:rPr lang="en-US" sz="1000" b="1" dirty="0">
+                <a:solidFill>
+                  <a:srgbClr val="FFFFFF"/>
+                </a:solidFill>
+                <a:latin typeface="Malgun Gothic" pitchFamily="34" charset="0"/>
+                <a:ea typeface="Malgun Gothic" pitchFamily="34" charset="-122"/>
+                <a:cs typeface="Malgun Gothic" pitchFamily="34" charset="-120"/>
+              </a:rPr>
+              <a:t>1.5~3</a:t>
+            </a:r>
+            <a:endParaRPr lang="en-US" sz="700" dirty="0"/>
+          </a:p>
+        </p:txBody>
+      </p:sp>
+      <p:sp>
+        <p:nvSpPr>
+          <p:cNvPr id="18" name="Text 16"/>
+          <p:cNvSpPr txBox="1"/>
+          <p:nvPr/>
+        </p:nvSpPr>
+        <p:spPr>
+          <a:xfrm>
+            <a:off x="411480" y="1691640"/>
+            <a:ext cx="3566160" cy="310896"/>
+          </a:xfrm>
+          <a:prstGeom prst="rect">
+            <a:avLst/>
+          </a:prstGeom>
+          <a:noFill/>
+          <a:ln/>
+        </p:spPr>
+        <p:txBody>
+          <a:bodyPr wrap="square" lIns="0" tIns="0" rIns="0" bIns="0" rtlCol="0" anchor="t"/>
+          <a:lstStyle/>
+          <a:p>
             <a:pPr indent="0" marL="0">
               <a:buNone/>
             </a:pPr>
             <a:r>
+              <a:rPr lang="en-US" sz="750" dirty="0">
+                <a:solidFill>
+                  <a:srgbClr val="52514E"/>
+                </a:solidFill>
+                <a:latin typeface="Malgun Gothic" pitchFamily="34" charset="0"/>
+                <a:ea typeface="Malgun Gothic" pitchFamily="34" charset="-122"/>
+                <a:cs typeface="Malgun Gothic" pitchFamily="34" charset="-120"/>
+              </a:rPr>
+              <a:t>광고 100번 눌리면 4명 신청, 수임은 1건 미만(90일). 수임 1건당 광고비 24만~98만 원 = 수수료의 8~33% → 광고는 남음</a:t>
+            </a:r>
+            <a:endParaRPr lang="en-US" sz="750" dirty="0"/>
+          </a:p>
+        </p:txBody>
+      </p:sp>
+      <p:sp>
+        <p:nvSpPr>
+          <p:cNvPr id="19" name="Text 17"/>
+          <p:cNvSpPr txBox="1"/>
+          <p:nvPr/>
+        </p:nvSpPr>
+        <p:spPr>
+          <a:xfrm>
+            <a:off x="411480" y="2029968"/>
+            <a:ext cx="3566160" cy="237744"/>
+          </a:xfrm>
+          <a:prstGeom prst="rect">
+            <a:avLst/>
+          </a:prstGeom>
+          <a:noFill/>
+          <a:ln/>
+        </p:spPr>
+        <p:txBody>
+          <a:bodyPr wrap="square" lIns="0" tIns="0" rIns="0" bIns="0" rtlCol="0" anchor="ctr"/>
+          <a:lstStyle/>
+          <a:p>
+            <a:pPr indent="0" marL="0">
+              <a:buNone/>
+            </a:pPr>
+            <a:r>
+              <a:rPr lang="en-US" sz="950" b="1" dirty="0">
+                <a:solidFill>
+                  <a:srgbClr val="0B0B0B"/>
+                </a:solidFill>
+                <a:latin typeface="Malgun Gothic" pitchFamily="34" charset="0"/>
+                <a:ea typeface="Malgun Gothic" pitchFamily="34" charset="-122"/>
+                <a:cs typeface="Malgun Gothic" pitchFamily="34" charset="-120"/>
+              </a:rPr>
+              <a:t>광고로 온 사람 4명 중 1명은 5초 안에 나간다</a:t>
+            </a:r>
+            <a:endParaRPr lang="en-US" sz="950" dirty="0"/>
+          </a:p>
+        </p:txBody>
+      </p:sp>
+      <p:sp>
+        <p:nvSpPr>
+          <p:cNvPr id="20" name="Text 18"/>
+          <p:cNvSpPr txBox="1"/>
+          <p:nvPr/>
+        </p:nvSpPr>
+        <p:spPr>
+          <a:xfrm>
+            <a:off x="411480" y="2267712"/>
+            <a:ext cx="3566160" cy="182880"/>
+          </a:xfrm>
+          <a:prstGeom prst="rect">
+            <a:avLst/>
+          </a:prstGeom>
+          <a:noFill/>
+          <a:ln/>
+        </p:spPr>
+        <p:txBody>
+          <a:bodyPr wrap="square" lIns="0" tIns="0" rIns="0" bIns="0" rtlCol="0" anchor="ctr"/>
+          <a:lstStyle/>
+          <a:p>
+            <a:pPr indent="0" marL="0">
+              <a:buNone/>
+            </a:pPr>
+            <a:r>
+              <a:rPr lang="en-US" sz="800" dirty="0">
+                <a:solidFill>
+                  <a:srgbClr val="52514E"/>
+                </a:solidFill>
+                <a:latin typeface="Malgun Gothic" pitchFamily="34" charset="0"/>
+                <a:ea typeface="Malgun Gothic" pitchFamily="34" charset="-122"/>
+                <a:cs typeface="Malgun Gothic" pitchFamily="34" charset="-120"/>
+              </a:rPr>
+              <a:t>검색어 유형별 체류(%) · 괄호는 사람 수, 수가 작아 경향</a:t>
+            </a:r>
+            <a:endParaRPr lang="en-US" sz="800" dirty="0"/>
+          </a:p>
+        </p:txBody>
+      </p:sp>
+      <p:graphicFrame>
+        <p:nvGraphicFramePr>
+          <p:cNvPr id="21" name="Chart 0" descr=""/>
+          <p:cNvGraphicFramePr/>
+          <p:nvPr/>
+        </p:nvGraphicFramePr>
+        <p:xfrm>
+          <a:off x="338328" y="2441448"/>
+          <a:ext cx="3675888" cy="1371600"/>
+        </p:xfrm>
+        <a:graphic xmlns:a="http://schemas.openxmlformats.org/drawingml/2006/main">
+          <a:graphicData uri="http://schemas.openxmlformats.org/drawingml/2006/chart">
+            <c:chart xmlns:c="http://schemas.openxmlformats.org/drawingml/2006/chart" r:id="rId1"/>
+          </a:graphicData>
+        </a:graphic>
+      </p:graphicFrame>
+      <p:sp>
+        <p:nvSpPr>
+          <p:cNvPr id="22" name="Text 19"/>
+          <p:cNvSpPr txBox="1"/>
+          <p:nvPr/>
+        </p:nvSpPr>
+        <p:spPr>
+          <a:xfrm>
+            <a:off x="411480" y="3858768"/>
+            <a:ext cx="3566160" cy="411480"/>
+          </a:xfrm>
+          <a:prstGeom prst="rect">
+            <a:avLst/>
+          </a:prstGeom>
+          <a:noFill/>
+          <a:ln/>
+        </p:spPr>
+        <p:txBody>
+          <a:bodyPr wrap="square" lIns="0" tIns="0" rIns="0" bIns="0" rtlCol="0" anchor="t"/>
+          <a:lstStyle/>
+          <a:p>
+            <a:pPr indent="0" marL="0">
+              <a:buNone/>
+            </a:pPr>
+            <a:r>
+              <a:rPr lang="en-US" sz="850" b="1" dirty="0">
+                <a:solidFill>
+                  <a:srgbClr val="2A78D6"/>
+                </a:solidFill>
+                <a:latin typeface="Malgun Gothic" pitchFamily="34" charset="0"/>
+                <a:ea typeface="Malgun Gothic" pitchFamily="34" charset="-122"/>
+                <a:cs typeface="Malgun Gothic" pitchFamily="34" charset="-120"/>
+              </a:rPr>
+              <a:t>→ 18초 안에 "누가·무엇을·무료로", 읽기 끝에 간편 신청, 휴대폰 대응, 비용·절차 블록</a:t>
+            </a:r>
+            <a:endParaRPr lang="en-US" sz="850" dirty="0"/>
+          </a:p>
+        </p:txBody>
+      </p:sp>
+      <p:sp>
+        <p:nvSpPr>
+          <p:cNvPr id="23" name="Text 20"/>
+          <p:cNvSpPr txBox="1"/>
+          <p:nvPr/>
+        </p:nvSpPr>
+        <p:spPr>
+          <a:xfrm>
+            <a:off x="4160520" y="658368"/>
+            <a:ext cx="2331720" cy="219456"/>
+          </a:xfrm>
+          <a:prstGeom prst="rect">
+            <a:avLst/>
+          </a:prstGeom>
+          <a:noFill/>
+          <a:ln/>
+        </p:spPr>
+        <p:txBody>
+          <a:bodyPr wrap="square" lIns="0" tIns="0" rIns="0" bIns="0" rtlCol="0" anchor="ctr"/>
+          <a:lstStyle/>
+          <a:p>
+            <a:pPr indent="0" marL="0">
+              <a:buNone/>
+            </a:pPr>
+            <a:r>
+              <a:rPr lang="en-US" sz="950" b="1" dirty="0">
+                <a:solidFill>
+                  <a:srgbClr val="52514E"/>
+                </a:solidFill>
+                <a:latin typeface="Malgun Gothic" pitchFamily="34" charset="0"/>
+                <a:ea typeface="Malgun Gothic" pitchFamily="34" charset="-122"/>
+                <a:cs typeface="Malgun Gothic" pitchFamily="34" charset="-120"/>
+              </a:rPr>
+              <a:t>수임 전환율 (3장)</a:t>
+            </a:r>
+            <a:endParaRPr lang="en-US" sz="950" dirty="0"/>
+          </a:p>
+        </p:txBody>
+      </p:sp>
+      <p:sp>
+        <p:nvSpPr>
+          <p:cNvPr id="24" name="Text 21"/>
+          <p:cNvSpPr txBox="1"/>
+          <p:nvPr/>
+        </p:nvSpPr>
+        <p:spPr>
+          <a:xfrm>
+            <a:off x="4160520" y="877824"/>
+            <a:ext cx="2331720" cy="347472"/>
+          </a:xfrm>
+          <a:prstGeom prst="rect">
+            <a:avLst/>
+          </a:prstGeom>
+          <a:noFill/>
+          <a:ln/>
+        </p:spPr>
+        <p:txBody>
+          <a:bodyPr wrap="square" lIns="0" tIns="0" rIns="0" bIns="0" rtlCol="0" anchor="ctr"/>
+          <a:lstStyle/>
+          <a:p>
+            <a:pPr indent="0" marL="0">
+              <a:buNone/>
+            </a:pPr>
+            <a:r>
+              <a:rPr lang="en-US" sz="1800" b="1" dirty="0">
+                <a:solidFill>
+                  <a:srgbClr val="EB6834"/>
+                </a:solidFill>
+                <a:latin typeface="Malgun Gothic" pitchFamily="34" charset="0"/>
+                <a:ea typeface="Malgun Gothic" pitchFamily="34" charset="-122"/>
+                <a:cs typeface="Malgun Gothic" pitchFamily="34" charset="-120"/>
+              </a:rPr>
+              <a:t>기록 없음</a:t>
+            </a:r>
+            <a:pPr indent="0" marL="0">
+              <a:buNone/>
+            </a:pPr>
+            <a:r>
               <a:rPr lang="en-US" sz="850" dirty="0">
                 <a:solidFill>
-                  <a:srgbClr val="FFFFFF"/>
-                </a:solidFill>
-                <a:latin typeface="Malgun Gothic" pitchFamily="34" charset="0"/>
-                <a:ea typeface="Malgun Gothic" pitchFamily="34" charset="-122"/>
-                <a:cs typeface="Malgun Gothic" pitchFamily="34" charset="-120"/>
-              </a:rPr>
-              <a:t>수임 추정  </a:t>
-            </a:r>
-            <a:pPr indent="0" marL="0">
-              <a:buNone/>
-            </a:pPr>
-            <a:r>
-              <a:rPr lang="en-US" sz="1200" b="1" dirty="0">
-                <a:solidFill>
-                  <a:srgbClr val="FFFFFF"/>
-                </a:solidFill>
-                <a:latin typeface="Malgun Gothic" pitchFamily="34" charset="0"/>
-                <a:ea typeface="Malgun Gothic" pitchFamily="34" charset="-122"/>
-                <a:cs typeface="Malgun Gothic" pitchFamily="34" charset="-120"/>
-              </a:rPr>
-              <a:t>1.5~3</a:t>
-            </a:r>
-            <a:endParaRPr lang="en-US" sz="850" dirty="0"/>
+                  <a:srgbClr val="52514E"/>
+                </a:solidFill>
+                <a:latin typeface="Malgun Gothic" pitchFamily="34" charset="0"/>
+                <a:ea typeface="Malgun Gothic" pitchFamily="34" charset="-122"/>
+                <a:cs typeface="Malgun Gothic" pitchFamily="34" charset="-120"/>
+              </a:rPr>
+              <a:t>  신청 뒤는 전화</a:t>
+            </a:r>
+            <a:endParaRPr lang="en-US" sz="1800" dirty="0"/>
           </a:p>
         </p:txBody>
       </p:sp>
       <p:sp>
         <p:nvSpPr>
-          <p:cNvPr id="27" name="Text 24"/>
+          <p:cNvPr id="25" name="Text 22"/>
           <p:cNvSpPr txBox="1"/>
           <p:nvPr/>
         </p:nvSpPr>
         <p:spPr>
           <a:xfrm>
-            <a:off x="4069080" y="3383280"/>
-            <a:ext cx="2743200" cy="502920"/>
+            <a:off x="4160520" y="1280160"/>
+            <a:ext cx="2331720" cy="2103120"/>
           </a:xfrm>
           <a:prstGeom prst="rect">
             <a:avLst/>
@@ -8185,7 +7412,7 @@
                 <a:ea typeface="Malgun Gothic" pitchFamily="34" charset="-122"/>
                 <a:cs typeface="Malgun Gothic" pitchFamily="34" charset="-120"/>
               </a:rPr>
-              <a:t>수임 1건당 광고비 24만~98만 원, 수수료 300만의 8~33% → 어느 경우든 광고는 남음</a:t>
+              <a:t>변리사 기억으로 수임 10건 중 1~2건. 직접 전화 문의 월 5건 이내, 어디서 번호를 봤는지 모름</a:t>
             </a:r>
             <a:endParaRPr lang="en-US" sz="850" dirty="0"/>
           </a:p>
@@ -8197,7 +7424,7 @@
               <a:buNone/>
             </a:pPr>
             <a:r>
-              <a:rPr lang="en-US" sz="850" dirty="0">
+              <a:rPr lang="en-US" sz="850" b="1" dirty="0">
                 <a:solidFill>
                   <a:srgbClr val="0B0B0B"/>
                 </a:solidFill>
@@ -8209,241 +7436,6 @@
             </a:r>
             <a:endParaRPr lang="en-US" sz="850" dirty="0"/>
           </a:p>
-        </p:txBody>
-      </p:sp>
-      <p:sp>
-        <p:nvSpPr>
-          <p:cNvPr id="28" name="Text 25"/>
-          <p:cNvSpPr txBox="1"/>
-          <p:nvPr/>
-        </p:nvSpPr>
-        <p:spPr>
-          <a:xfrm>
-            <a:off x="4069080" y="3904488"/>
-            <a:ext cx="2743200" cy="411480"/>
-          </a:xfrm>
-          <a:prstGeom prst="rect">
-            <a:avLst/>
-          </a:prstGeom>
-          <a:noFill/>
-          <a:ln/>
-        </p:spPr>
-        <p:txBody>
-          <a:bodyPr wrap="square" lIns="0" tIns="0" rIns="0" bIns="0" rtlCol="0" anchor="t"/>
-          <a:lstStyle/>
-          <a:p>
-            <a:pPr indent="0" marL="0">
-              <a:buNone/>
-            </a:pPr>
-            <a:r>
-              <a:rPr lang="en-US" sz="900" b="1" dirty="0">
-                <a:solidFill>
-                  <a:srgbClr val="2A78D6"/>
-                </a:solidFill>
-                <a:latin typeface="Malgun Gothic" pitchFamily="34" charset="0"/>
-                <a:ea typeface="Malgun Gothic" pitchFamily="34" charset="-122"/>
-                <a:cs typeface="Malgun Gothic" pitchFamily="34" charset="-120"/>
-              </a:rPr>
-              <a:t>→ 신청마다 수임 여부 기록, 번호 클릭 기록</a:t>
-            </a:r>
-            <a:endParaRPr lang="en-US" sz="900" dirty="0"/>
-          </a:p>
-        </p:txBody>
-      </p:sp>
-      <p:sp>
-        <p:nvSpPr>
-          <p:cNvPr id="29" name="Text 26"/>
-          <p:cNvSpPr txBox="1"/>
-          <p:nvPr/>
-        </p:nvSpPr>
-        <p:spPr>
-          <a:xfrm>
-            <a:off x="7040880" y="658368"/>
-            <a:ext cx="1691640" cy="219456"/>
-          </a:xfrm>
-          <a:prstGeom prst="rect">
-            <a:avLst/>
-          </a:prstGeom>
-          <a:noFill/>
-          <a:ln/>
-        </p:spPr>
-        <p:txBody>
-          <a:bodyPr wrap="square" lIns="0" tIns="0" rIns="0" bIns="0" rtlCol="0" anchor="ctr"/>
-          <a:lstStyle/>
-          <a:p>
-            <a:pPr indent="0" marL="0">
-              <a:buNone/>
-            </a:pPr>
-            <a:r>
-              <a:rPr lang="en-US" sz="950" b="1" dirty="0">
-                <a:solidFill>
-                  <a:srgbClr val="52514E"/>
-                </a:solidFill>
-                <a:latin typeface="Malgun Gothic" pitchFamily="34" charset="0"/>
-                <a:ea typeface="Malgun Gothic" pitchFamily="34" charset="-122"/>
-                <a:cs typeface="Malgun Gothic" pitchFamily="34" charset="-120"/>
-              </a:rPr>
-              <a:t>수임당 매출</a:t>
-            </a:r>
-            <a:endParaRPr lang="en-US" sz="950" dirty="0"/>
-          </a:p>
-        </p:txBody>
-      </p:sp>
-      <p:sp>
-        <p:nvSpPr>
-          <p:cNvPr id="30" name="Text 27"/>
-          <p:cNvSpPr txBox="1"/>
-          <p:nvPr/>
-        </p:nvSpPr>
-        <p:spPr>
-          <a:xfrm>
-            <a:off x="7040880" y="1024128"/>
-            <a:ext cx="1691640" cy="1371600"/>
-          </a:xfrm>
-          <a:prstGeom prst="rect">
-            <a:avLst/>
-          </a:prstGeom>
-          <a:noFill/>
-          <a:ln/>
-        </p:spPr>
-        <p:txBody>
-          <a:bodyPr wrap="square" lIns="0" tIns="0" rIns="0" bIns="0" rtlCol="0" anchor="t"/>
-          <a:lstStyle/>
-          <a:p>
-            <a:pPr indent="0" marL="0">
-              <a:buNone/>
-            </a:pPr>
-            <a:r>
-              <a:rPr lang="en-US" sz="1000" dirty="0">
-                <a:solidFill>
-                  <a:srgbClr val="0B0B0B"/>
-                </a:solidFill>
-                <a:latin typeface="Malgun Gothic" pitchFamily="34" charset="0"/>
-                <a:ea typeface="Malgun Gothic" pitchFamily="34" charset="-122"/>
-                <a:cs typeface="Malgun Gothic" pitchFamily="34" charset="-120"/>
-              </a:rPr>
-              <a:t>출원  </a:t>
-            </a:r>
-            <a:pPr indent="0" marL="0">
-              <a:buNone/>
-            </a:pPr>
-            <a:r>
-              <a:rPr lang="en-US" sz="1600" b="1" dirty="0">
-                <a:solidFill>
-                  <a:srgbClr val="2A78D6"/>
-                </a:solidFill>
-                <a:latin typeface="Malgun Gothic" pitchFamily="34" charset="0"/>
-                <a:ea typeface="Malgun Gothic" pitchFamily="34" charset="-122"/>
-                <a:cs typeface="Malgun Gothic" pitchFamily="34" charset="-120"/>
-              </a:rPr>
-              <a:t>300만 원</a:t>
-            </a:r>
-            <a:endParaRPr lang="en-US" sz="1000" dirty="0"/>
-          </a:p>
-          <a:p>
-            <a:pPr indent="0" marL="0">
-              <a:buNone/>
-            </a:pPr>
-            <a:r>
-              <a:rPr lang="en-US" sz="850" dirty="0">
-                <a:solidFill>
-                  <a:srgbClr val="52514E"/>
-                </a:solidFill>
-                <a:latin typeface="Malgun Gothic" pitchFamily="34" charset="0"/>
-                <a:ea typeface="Malgun Gothic" pitchFamily="34" charset="-122"/>
-                <a:cs typeface="Malgun Gothic" pitchFamily="34" charset="-120"/>
-              </a:rPr>
-              <a:t>신청의 94% (2,021건)</a:t>
-            </a:r>
-            <a:endParaRPr lang="en-US" sz="1000" dirty="0"/>
-          </a:p>
-          <a:p>
-            <a:pPr indent="0" marL="0">
-              <a:buNone/>
-            </a:pPr>
-            <a:r>
-              <a:rPr lang="en-US" sz="1000" dirty="0">
-                <a:solidFill>
-                  <a:srgbClr val="0B0B0B"/>
-                </a:solidFill>
-                <a:latin typeface="Malgun Gothic" pitchFamily="34" charset="0"/>
-                <a:ea typeface="Malgun Gothic" pitchFamily="34" charset="-122"/>
-                <a:cs typeface="Malgun Gothic" pitchFamily="34" charset="-120"/>
-              </a:rPr>
-              <a:t> </a:t>
-            </a:r>
-            <a:endParaRPr lang="en-US" sz="1000" dirty="0"/>
-          </a:p>
-          <a:p>
-            <a:pPr indent="0" marL="0">
-              <a:buNone/>
-            </a:pPr>
-            <a:r>
-              <a:rPr lang="en-US" sz="1000" dirty="0">
-                <a:solidFill>
-                  <a:srgbClr val="0B0B0B"/>
-                </a:solidFill>
-                <a:latin typeface="Malgun Gothic" pitchFamily="34" charset="0"/>
-                <a:ea typeface="Malgun Gothic" pitchFamily="34" charset="-122"/>
-                <a:cs typeface="Malgun Gothic" pitchFamily="34" charset="-120"/>
-              </a:rPr>
-              <a:t>분쟁  </a:t>
-            </a:r>
-            <a:pPr indent="0" marL="0">
-              <a:buNone/>
-            </a:pPr>
-            <a:r>
-              <a:rPr lang="en-US" sz="1600" b="1" dirty="0">
-                <a:solidFill>
-                  <a:srgbClr val="EB6834"/>
-                </a:solidFill>
-                <a:latin typeface="Malgun Gothic" pitchFamily="34" charset="0"/>
-                <a:ea typeface="Malgun Gothic" pitchFamily="34" charset="-122"/>
-                <a:cs typeface="Malgun Gothic" pitchFamily="34" charset="-120"/>
-              </a:rPr>
-              <a:t>2,000만 원</a:t>
-            </a:r>
-            <a:endParaRPr lang="en-US" sz="1000" dirty="0"/>
-          </a:p>
-          <a:p>
-            <a:pPr indent="0" marL="0">
-              <a:buNone/>
-            </a:pPr>
-            <a:r>
-              <a:rPr lang="en-US" sz="850" dirty="0">
-                <a:solidFill>
-                  <a:srgbClr val="52514E"/>
-                </a:solidFill>
-                <a:latin typeface="Malgun Gothic" pitchFamily="34" charset="0"/>
-                <a:ea typeface="Malgun Gothic" pitchFamily="34" charset="-122"/>
-                <a:cs typeface="Malgun Gothic" pitchFamily="34" charset="-120"/>
-              </a:rPr>
-              <a:t>신청의 6% (120건)</a:t>
-            </a:r>
-            <a:endParaRPr lang="en-US" sz="1000" dirty="0"/>
-          </a:p>
-        </p:txBody>
-      </p:sp>
-      <p:sp>
-        <p:nvSpPr>
-          <p:cNvPr id="31" name="Text 28"/>
-          <p:cNvSpPr txBox="1"/>
-          <p:nvPr/>
-        </p:nvSpPr>
-        <p:spPr>
-          <a:xfrm>
-            <a:off x="7040880" y="2487168"/>
-            <a:ext cx="1691640" cy="1371600"/>
-          </a:xfrm>
-          <a:prstGeom prst="rect">
-            <a:avLst/>
-          </a:prstGeom>
-          <a:noFill/>
-          <a:ln/>
-        </p:spPr>
-        <p:txBody>
-          <a:bodyPr wrap="square" lIns="0" tIns="0" rIns="0" bIns="0" rtlCol="0" anchor="t"/>
-          <a:lstStyle/>
           <a:p>
             <a:pPr indent="0" marL="0">
               <a:spcAft>
@@ -8452,7 +7444,7 @@
               <a:buNone/>
             </a:pPr>
             <a:r>
-              <a:rPr lang="en-US" sz="850" b="1" dirty="0">
+              <a:rPr lang="en-US" sz="850" dirty="0">
                 <a:solidFill>
                   <a:srgbClr val="0B0B0B"/>
                 </a:solidFill>
@@ -8460,7 +7452,7 @@
                 <a:ea typeface="Malgun Gothic" pitchFamily="34" charset="-122"/>
                 <a:cs typeface="Malgun Gothic" pitchFamily="34" charset="-120"/>
               </a:rPr>
-              <a:t>수수료 7배</a:t>
+              <a:t>주말 신청은 평일의 절반(z, 우연일 확률 0.1% 미만). 0~7시 신청 13%</a:t>
             </a:r>
             <a:endParaRPr lang="en-US" sz="850" dirty="0"/>
           </a:p>
@@ -8480,10 +7472,32 @@
                 <a:ea typeface="Malgun Gothic" pitchFamily="34" charset="-122"/>
                 <a:cs typeface="Malgun Gothic" pitchFamily="34" charset="-120"/>
               </a:rPr>
-              <a:t>분쟁 검색자가 가장 짧게 머묾(5초 이탈 36%) → 페이지 문제 가능성</a:t>
+              <a:t>전화 문의가 폼만큼 있는데 안 잡힘. 휴대폰(44%)은 번호 클릭으로 셀 수 있고 PC는 못 셈</a:t>
             </a:r>
             <a:endParaRPr lang="en-US" sz="850" dirty="0"/>
           </a:p>
+        </p:txBody>
+      </p:sp>
+      <p:sp>
+        <p:nvSpPr>
+          <p:cNvPr id="26" name="Text 23"/>
+          <p:cNvSpPr txBox="1"/>
+          <p:nvPr/>
+        </p:nvSpPr>
+        <p:spPr>
+          <a:xfrm>
+            <a:off x="4160520" y="3493008"/>
+            <a:ext cx="2331720" cy="822960"/>
+          </a:xfrm>
+          <a:prstGeom prst="rect">
+            <a:avLst/>
+          </a:prstGeom>
+          <a:noFill/>
+          <a:ln/>
+        </p:spPr>
+        <p:txBody>
+          <a:bodyPr wrap="square" lIns="0" tIns="0" rIns="0" bIns="0" rtlCol="0" anchor="t"/>
+          <a:lstStyle/>
           <a:p>
             <a:pPr indent="0" marL="0">
               <a:spcAft>
@@ -8492,30 +7506,109 @@
               <a:buNone/>
             </a:pPr>
             <a:r>
-              <a:rPr lang="en-US" sz="850" dirty="0">
-                <a:solidFill>
-                  <a:srgbClr val="0B0B0B"/>
-                </a:solidFill>
-                <a:latin typeface="Malgun Gothic" pitchFamily="34" charset="0"/>
-                <a:ea typeface="Malgun Gothic" pitchFamily="34" charset="-122"/>
-                <a:cs typeface="Malgun Gothic" pitchFamily="34" charset="-120"/>
-              </a:rPr>
-              <a:t>분쟁의 79%가 번호만, 변리사: 분쟁은 전화·소개가 주</a:t>
+              <a:rPr lang="en-US" sz="850" b="1" dirty="0">
+                <a:solidFill>
+                  <a:srgbClr val="2A78D6"/>
+                </a:solidFill>
+                <a:latin typeface="Malgun Gothic" pitchFamily="34" charset="0"/>
+                <a:ea typeface="Malgun Gothic" pitchFamily="34" charset="-122"/>
+                <a:cs typeface="Malgun Gothic" pitchFamily="34" charset="-120"/>
+              </a:rPr>
+              <a:t>→ 휴대폰 번호 클릭 기록, PC는 전용 착신 번호</a:t>
             </a:r>
             <a:endParaRPr lang="en-US" sz="850" dirty="0"/>
           </a:p>
+          <a:p>
+            <a:pPr indent="0" marL="0">
+              <a:spcAft>
+                <a:spcPts val="300"/>
+              </a:spcAft>
+              <a:buNone/>
+            </a:pPr>
+            <a:r>
+              <a:rPr lang="en-US" sz="850" b="1" dirty="0">
+                <a:solidFill>
+                  <a:srgbClr val="2A78D6"/>
+                </a:solidFill>
+                <a:latin typeface="Malgun Gothic" pitchFamily="34" charset="0"/>
+                <a:ea typeface="Malgun Gothic" pitchFamily="34" charset="-122"/>
+                <a:cs typeface="Malgun Gothic" pitchFamily="34" charset="-120"/>
+              </a:rPr>
+              <a:t>→ 수임 여부는 분기 1회 기록</a:t>
+            </a:r>
+            <a:endParaRPr lang="en-US" sz="850" dirty="0"/>
+          </a:p>
+          <a:p>
+            <a:pPr indent="0" marL="0">
+              <a:spcAft>
+                <a:spcPts val="300"/>
+              </a:spcAft>
+              <a:buNone/>
+            </a:pPr>
+            <a:r>
+              <a:rPr lang="en-US" sz="850" b="1" dirty="0">
+                <a:solidFill>
+                  <a:srgbClr val="2A78D6"/>
+                </a:solidFill>
+                <a:latin typeface="Malgun Gothic" pitchFamily="34" charset="0"/>
+                <a:ea typeface="Malgun Gothic" pitchFamily="34" charset="-122"/>
+                <a:cs typeface="Malgun Gothic" pitchFamily="34" charset="-120"/>
+              </a:rPr>
+              <a:t>→ 간편 신청 유지, 0~7시 신청에 "오전 8시 이후 연락"</a:t>
+            </a:r>
+            <a:endParaRPr lang="en-US" sz="850" dirty="0"/>
+          </a:p>
         </p:txBody>
       </p:sp>
       <p:sp>
         <p:nvSpPr>
-          <p:cNvPr id="32" name="Text 29"/>
+          <p:cNvPr id="27" name="Text 24"/>
           <p:cNvSpPr txBox="1"/>
           <p:nvPr/>
         </p:nvSpPr>
         <p:spPr>
           <a:xfrm>
-            <a:off x="7040880" y="3904488"/>
-            <a:ext cx="1691640" cy="411480"/>
+            <a:off x="6675120" y="658368"/>
+            <a:ext cx="2057400" cy="219456"/>
+          </a:xfrm>
+          <a:prstGeom prst="rect">
+            <a:avLst/>
+          </a:prstGeom>
+          <a:noFill/>
+          <a:ln/>
+        </p:spPr>
+        <p:txBody>
+          <a:bodyPr wrap="square" lIns="0" tIns="0" rIns="0" bIns="0" rtlCol="0" anchor="ctr"/>
+          <a:lstStyle/>
+          <a:p>
+            <a:pPr indent="0" marL="0">
+              <a:buNone/>
+            </a:pPr>
+            <a:r>
+              <a:rPr lang="en-US" sz="950" b="1" dirty="0">
+                <a:solidFill>
+                  <a:srgbClr val="52514E"/>
+                </a:solidFill>
+                <a:latin typeface="Malgun Gothic" pitchFamily="34" charset="0"/>
+                <a:ea typeface="Malgun Gothic" pitchFamily="34" charset="-122"/>
+                <a:cs typeface="Malgun Gothic" pitchFamily="34" charset="-120"/>
+              </a:rPr>
+              <a:t>수임당 매출 (4장)</a:t>
+            </a:r>
+            <a:endParaRPr lang="en-US" sz="950" dirty="0"/>
+          </a:p>
+        </p:txBody>
+      </p:sp>
+      <p:sp>
+        <p:nvSpPr>
+          <p:cNvPr id="28" name="Text 25"/>
+          <p:cNvSpPr txBox="1"/>
+          <p:nvPr/>
+        </p:nvSpPr>
+        <p:spPr>
+          <a:xfrm>
+            <a:off x="6675120" y="932688"/>
+            <a:ext cx="2057400" cy="1097280"/>
           </a:xfrm>
           <a:prstGeom prst="rect">
             <a:avLst/>
@@ -8531,7 +7624,21 @@
               <a:buNone/>
             </a:pPr>
             <a:r>
-              <a:rPr lang="en-US" sz="900" b="1" dirty="0">
+              <a:rPr lang="en-US" sz="950" dirty="0">
+                <a:solidFill>
+                  <a:srgbClr val="0B0B0B"/>
+                </a:solidFill>
+                <a:latin typeface="Malgun Gothic" pitchFamily="34" charset="0"/>
+                <a:ea typeface="Malgun Gothic" pitchFamily="34" charset="-122"/>
+                <a:cs typeface="Malgun Gothic" pitchFamily="34" charset="-120"/>
+              </a:rPr>
+              <a:t>출원  </a:t>
+            </a:r>
+            <a:pPr indent="0" marL="0">
+              <a:buNone/>
+            </a:pPr>
+            <a:r>
+              <a:rPr lang="en-US" sz="1500" b="1" dirty="0">
                 <a:solidFill>
                   <a:srgbClr val="2A78D6"/>
                 </a:solidFill>
@@ -8539,15 +7646,224 @@
                 <a:ea typeface="Malgun Gothic" pitchFamily="34" charset="-122"/>
                 <a:cs typeface="Malgun Gothic" pitchFamily="34" charset="-120"/>
               </a:rPr>
-              <a:t>→ 분쟁 전용 페이지</a:t>
-            </a:r>
-            <a:endParaRPr lang="en-US" sz="900" dirty="0"/>
+              <a:t>300만 원</a:t>
+            </a:r>
+            <a:endParaRPr lang="en-US" sz="950" dirty="0"/>
+          </a:p>
+          <a:p>
+            <a:pPr indent="0" marL="0">
+              <a:buNone/>
+            </a:pPr>
+            <a:r>
+              <a:rPr lang="en-US" sz="800" dirty="0">
+                <a:solidFill>
+                  <a:srgbClr val="52514E"/>
+                </a:solidFill>
+                <a:latin typeface="Malgun Gothic" pitchFamily="34" charset="0"/>
+                <a:ea typeface="Malgun Gothic" pitchFamily="34" charset="-122"/>
+                <a:cs typeface="Malgun Gothic" pitchFamily="34" charset="-120"/>
+              </a:rPr>
+              <a:t>신청의 94% (2,021건)</a:t>
+            </a:r>
+            <a:endParaRPr lang="en-US" sz="950" dirty="0"/>
+          </a:p>
+          <a:p>
+            <a:pPr indent="0" marL="0">
+              <a:buNone/>
+            </a:pPr>
+            <a:r>
+              <a:rPr lang="en-US" sz="950" dirty="0">
+                <a:solidFill>
+                  <a:srgbClr val="0B0B0B"/>
+                </a:solidFill>
+                <a:latin typeface="Malgun Gothic" pitchFamily="34" charset="0"/>
+                <a:ea typeface="Malgun Gothic" pitchFamily="34" charset="-122"/>
+                <a:cs typeface="Malgun Gothic" pitchFamily="34" charset="-120"/>
+              </a:rPr>
+              <a:t>분쟁  </a:t>
+            </a:r>
+            <a:pPr indent="0" marL="0">
+              <a:buNone/>
+            </a:pPr>
+            <a:r>
+              <a:rPr lang="en-US" sz="1500" b="1" dirty="0">
+                <a:solidFill>
+                  <a:srgbClr val="EB6834"/>
+                </a:solidFill>
+                <a:latin typeface="Malgun Gothic" pitchFamily="34" charset="0"/>
+                <a:ea typeface="Malgun Gothic" pitchFamily="34" charset="-122"/>
+                <a:cs typeface="Malgun Gothic" pitchFamily="34" charset="-120"/>
+              </a:rPr>
+              <a:t>2,000만 원</a:t>
+            </a:r>
+            <a:endParaRPr lang="en-US" sz="950" dirty="0"/>
+          </a:p>
+          <a:p>
+            <a:pPr indent="0" marL="0">
+              <a:buNone/>
+            </a:pPr>
+            <a:r>
+              <a:rPr lang="en-US" sz="800" dirty="0">
+                <a:solidFill>
+                  <a:srgbClr val="52514E"/>
+                </a:solidFill>
+                <a:latin typeface="Malgun Gothic" pitchFamily="34" charset="0"/>
+                <a:ea typeface="Malgun Gothic" pitchFamily="34" charset="-122"/>
+                <a:cs typeface="Malgun Gothic" pitchFamily="34" charset="-120"/>
+              </a:rPr>
+              <a:t>신청의 6% (120건)</a:t>
+            </a:r>
+            <a:endParaRPr lang="en-US" sz="950" dirty="0"/>
           </a:p>
         </p:txBody>
       </p:sp>
       <p:sp>
         <p:nvSpPr>
-          <p:cNvPr id="33" name="Shape 30"/>
+          <p:cNvPr id="29" name="Text 26"/>
+          <p:cNvSpPr txBox="1"/>
+          <p:nvPr/>
+        </p:nvSpPr>
+        <p:spPr>
+          <a:xfrm>
+            <a:off x="6675120" y="2075688"/>
+            <a:ext cx="2057400" cy="1371600"/>
+          </a:xfrm>
+          <a:prstGeom prst="rect">
+            <a:avLst/>
+          </a:prstGeom>
+          <a:noFill/>
+          <a:ln/>
+        </p:spPr>
+        <p:txBody>
+          <a:bodyPr wrap="square" lIns="0" tIns="0" rIns="0" bIns="0" rtlCol="0" anchor="t"/>
+          <a:lstStyle/>
+          <a:p>
+            <a:pPr indent="0" marL="0">
+              <a:spcAft>
+                <a:spcPts val="300"/>
+              </a:spcAft>
+              <a:buNone/>
+            </a:pPr>
+            <a:r>
+              <a:rPr lang="en-US" sz="850" dirty="0">
+                <a:solidFill>
+                  <a:srgbClr val="0B0B0B"/>
+                </a:solidFill>
+                <a:latin typeface="Malgun Gothic" pitchFamily="34" charset="0"/>
+                <a:ea typeface="Malgun Gothic" pitchFamily="34" charset="-122"/>
+                <a:cs typeface="Malgun Gothic" pitchFamily="34" charset="-120"/>
+              </a:rPr>
+              <a:t>수수료 7배라 연 매출은 출원과 비슷하거나 더 큼 (2,300만~4,600만 vs 2,700만~5,300만, 전환율 같다고 가정)</a:t>
+            </a:r>
+            <a:endParaRPr lang="en-US" sz="850" dirty="0"/>
+          </a:p>
+          <a:p>
+            <a:pPr indent="0" marL="0">
+              <a:spcAft>
+                <a:spcPts val="300"/>
+              </a:spcAft>
+              <a:buNone/>
+            </a:pPr>
+            <a:r>
+              <a:rPr lang="en-US" sz="850" dirty="0">
+                <a:solidFill>
+                  <a:srgbClr val="0B0B0B"/>
+                </a:solidFill>
+                <a:latin typeface="Malgun Gothic" pitchFamily="34" charset="0"/>
+                <a:ea typeface="Malgun Gothic" pitchFamily="34" charset="-122"/>
+                <a:cs typeface="Malgun Gothic" pitchFamily="34" charset="-120"/>
+              </a:rPr>
+              <a:t>분쟁 신청은 전체 감소 뒤에도 안 줄음</a:t>
+            </a:r>
+            <a:endParaRPr lang="en-US" sz="850" dirty="0"/>
+          </a:p>
+          <a:p>
+            <a:pPr indent="0" marL="0">
+              <a:spcAft>
+                <a:spcPts val="300"/>
+              </a:spcAft>
+              <a:buNone/>
+            </a:pPr>
+            <a:r>
+              <a:rPr lang="en-US" sz="850" dirty="0">
+                <a:solidFill>
+                  <a:srgbClr val="0B0B0B"/>
+                </a:solidFill>
+                <a:latin typeface="Malgun Gothic" pitchFamily="34" charset="0"/>
+                <a:ea typeface="Malgun Gothic" pitchFamily="34" charset="-122"/>
+                <a:cs typeface="Malgun Gothic" pitchFamily="34" charset="-120"/>
+              </a:rPr>
+              <a:t>분쟁 검색자가 가장 짧게 머묾 → 페이지 문제 가능성</a:t>
+            </a:r>
+            <a:endParaRPr lang="en-US" sz="850" dirty="0"/>
+          </a:p>
+        </p:txBody>
+      </p:sp>
+      <p:sp>
+        <p:nvSpPr>
+          <p:cNvPr id="30" name="Text 27"/>
+          <p:cNvSpPr txBox="1"/>
+          <p:nvPr/>
+        </p:nvSpPr>
+        <p:spPr>
+          <a:xfrm>
+            <a:off x="6675120" y="3493008"/>
+            <a:ext cx="2057400" cy="822960"/>
+          </a:xfrm>
+          <a:prstGeom prst="rect">
+            <a:avLst/>
+          </a:prstGeom>
+          <a:noFill/>
+          <a:ln/>
+        </p:spPr>
+        <p:txBody>
+          <a:bodyPr wrap="square" lIns="0" tIns="0" rIns="0" bIns="0" rtlCol="0" anchor="t"/>
+          <a:lstStyle/>
+          <a:p>
+            <a:pPr indent="0" marL="0">
+              <a:spcAft>
+                <a:spcPts val="300"/>
+              </a:spcAft>
+              <a:buNone/>
+            </a:pPr>
+            <a:r>
+              <a:rPr lang="en-US" sz="850" b="1" dirty="0">
+                <a:solidFill>
+                  <a:srgbClr val="2A78D6"/>
+                </a:solidFill>
+                <a:latin typeface="Malgun Gothic" pitchFamily="34" charset="0"/>
+                <a:ea typeface="Malgun Gothic" pitchFamily="34" charset="-122"/>
+                <a:cs typeface="Malgun Gothic" pitchFamily="34" charset="-120"/>
+              </a:rPr>
+              <a:t>→ 분쟁 페이지를 리뉴얼 우선순위에, 폼보다 전화</a:t>
+            </a:r>
+            <a:endParaRPr lang="en-US" sz="850" dirty="0"/>
+          </a:p>
+          <a:p>
+            <a:pPr indent="0" marL="0">
+              <a:spcAft>
+                <a:spcPts val="300"/>
+              </a:spcAft>
+              <a:buNone/>
+            </a:pPr>
+            <a:r>
+              <a:rPr lang="en-US" sz="850" b="1" dirty="0">
+                <a:solidFill>
+                  <a:srgbClr val="2A78D6"/>
+                </a:solidFill>
+                <a:latin typeface="Malgun Gothic" pitchFamily="34" charset="0"/>
+                <a:ea typeface="Malgun Gothic" pitchFamily="34" charset="-122"/>
+                <a:cs typeface="Malgun Gothic" pitchFamily="34" charset="-120"/>
+              </a:rPr>
+              <a:t>→ 분쟁 광고는 줄이지 않음</a:t>
+            </a:r>
+            <a:endParaRPr lang="en-US" sz="850" dirty="0"/>
+          </a:p>
+        </p:txBody>
+      </p:sp>
+      <p:sp>
+        <p:nvSpPr>
+          <p:cNvPr id="31" name="Shape 28"/>
           <p:cNvSpPr/>
           <p:nvPr/>
         </p:nvSpPr>
@@ -8570,7 +7886,7 @@
       </p:sp>
       <p:sp>
         <p:nvSpPr>
-          <p:cNvPr id="34" name="Text 31"/>
+          <p:cNvPr id="32" name="Text 29"/>
           <p:cNvSpPr txBox="1"/>
           <p:nvPr/>
         </p:nvSpPr>
@@ -8604,7 +7920,7 @@
                 <a:ea typeface="Malgun Gothic" pitchFamily="34" charset="-122"/>
                 <a:cs typeface="Malgun Gothic" pitchFamily="34" charset="-120"/>
               </a:rPr>
-              <a:t>출처: GA4 광고 유입 120세션(2026-09-02 ~ 10-01), Clarity 녹화 5건, 네이버 광고 보고서 90일, 신청 게시판 2,141건(스팸·형식 오류 33건 제외), 변리사 답(수임률·수수료)</a:t>
+              <a:t>출처: 알림 문자·게시판(2,141건) ÷ 서버 실제 방문(슬라이드 2), 네이버 광고 90일 + 같은 기간 게시판 15건, GA4 광고 유입 120세션, Clarity 녹화 5건, 변리사 답(수임률·수수료·문의)</a:t>
             </a:r>
             <a:endParaRPr lang="en-US" sz="800" dirty="0"/>
           </a:p>
@@ -8624,7 +7940,7 @@
                 <a:ea typeface="Malgun Gothic" pitchFamily="34" charset="-122"/>
                 <a:cs typeface="Malgun Gothic" pitchFamily="34" charset="-120"/>
               </a:rPr>
-              <a:t>한계: 수임률·수수료는 기록이 아닌 기억에 의한 대략의 값. 유형별 체류 차이는 우연일 확률 6~22%라 경향</a:t>
+              <a:t>한계: 수임률·수수료는 기록이 아닌 기억에 의한 대략의 값. 유형별 체류 차이는 우연일 확률 6~22%라 경향. 분쟁 매출은 전환율을 출원과 같다고 가정</a:t>
             </a:r>
             <a:endParaRPr lang="en-US" sz="800" dirty="0"/>
           </a:p>
@@ -8757,7 +8073,7 @@
           </p:nvPr>
         </p:nvGraphicFramePr>
         <p:xfrm>
-          <a:off x="411480" y="713232"/>
+          <a:off x="411480" y="676656"/>
           <a:ext cx="8321040" cy="914400"/>
         </p:xfrm>
         <a:graphic>
@@ -8765,12 +8081,12 @@
             <a:tbl>
               <a:tblPr/>
               <a:tblGrid>
+                <a:gridCol w="868680"/>
                 <a:gridCol w="685800"/>
-                <a:gridCol w="777240"/>
                 <a:gridCol w="4846320"/>
-                <a:gridCol w="2011680"/>
+                <a:gridCol w="1920240"/>
               </a:tblGrid>
-              <a:tr h="283464">
+              <a:tr h="256032">
                 <a:tc>
                   <a:txBody>
                     <a:bodyPr/>
@@ -8780,7 +8096,7 @@
                         <a:buNone/>
                       </a:pPr>
                       <a:r>
-                        <a:rPr lang="en-US" sz="950" b="1" dirty="0">
+                        <a:rPr lang="en-US" sz="900" b="1" dirty="0">
                           <a:solidFill>
                             <a:srgbClr val="52514E"/>
                           </a:solidFill>
@@ -8790,14 +8106,14 @@
                         </a:rPr>
                         <a:t>근거</a:t>
                       </a:r>
-                      <a:endParaRPr lang="en-US" sz="950" dirty="0">
+                      <a:endParaRPr lang="en-US" sz="900" dirty="0">
                         <a:latin typeface="Malgun Gothic" charset="0"/>
                         <a:ea typeface="Malgun Gothic" charset="0"/>
                         <a:cs typeface="Malgun Gothic" charset="0"/>
                       </a:endParaRPr>
                     </a:p>
                   </a:txBody>
-                  <a:tcPr marL="76200" marR="76200" marT="25400" marB="25400" anchor="ctr">
+                  <a:tcPr marL="63500" marR="63500" marT="25400" marB="25400" anchor="ctr">
                     <a:lnL w="0" cap="flat" cmpd="sng" algn="ctr">
                       <a:noFill/>
                     </a:lnL>
@@ -8830,7 +8146,7 @@
                         <a:buNone/>
                       </a:pPr>
                       <a:r>
-                        <a:rPr lang="en-US" sz="950" b="1" dirty="0">
+                        <a:rPr lang="en-US" sz="900" b="1" dirty="0">
                           <a:solidFill>
                             <a:srgbClr val="52514E"/>
                           </a:solidFill>
@@ -8840,14 +8156,14 @@
                         </a:rPr>
                         <a:t>누가</a:t>
                       </a:r>
-                      <a:endParaRPr lang="en-US" sz="950" dirty="0">
+                      <a:endParaRPr lang="en-US" sz="900" dirty="0">
                         <a:latin typeface="Malgun Gothic" charset="0"/>
                         <a:ea typeface="Malgun Gothic" charset="0"/>
                         <a:cs typeface="Malgun Gothic" charset="0"/>
                       </a:endParaRPr>
                     </a:p>
                   </a:txBody>
-                  <a:tcPr marL="76200" marR="76200" marT="25400" marB="25400" anchor="ctr">
+                  <a:tcPr marL="63500" marR="63500" marT="25400" marB="25400" anchor="ctr">
                     <a:lnL w="0" cap="flat" cmpd="sng" algn="ctr">
                       <a:noFill/>
                     </a:lnL>
@@ -8880,7 +8196,7 @@
                         <a:buNone/>
                       </a:pPr>
                       <a:r>
-                        <a:rPr lang="en-US" sz="950" b="1" dirty="0">
+                        <a:rPr lang="en-US" sz="900" b="1" dirty="0">
                           <a:solidFill>
                             <a:srgbClr val="52514E"/>
                           </a:solidFill>
@@ -8890,14 +8206,14 @@
                         </a:rPr>
                         <a:t>무엇을</a:t>
                       </a:r>
-                      <a:endParaRPr lang="en-US" sz="950" dirty="0">
+                      <a:endParaRPr lang="en-US" sz="900" dirty="0">
                         <a:latin typeface="Malgun Gothic" charset="0"/>
                         <a:ea typeface="Malgun Gothic" charset="0"/>
                         <a:cs typeface="Malgun Gothic" charset="0"/>
                       </a:endParaRPr>
                     </a:p>
                   </a:txBody>
-                  <a:tcPr marL="76200" marR="76200" marT="25400" marB="25400" anchor="ctr">
+                  <a:tcPr marL="63500" marR="63500" marT="25400" marB="25400" anchor="ctr">
                     <a:lnL w="0" cap="flat" cmpd="sng" algn="ctr">
                       <a:noFill/>
                     </a:lnL>
@@ -8930,7 +8246,7 @@
                         <a:buNone/>
                       </a:pPr>
                       <a:r>
-                        <a:rPr lang="en-US" sz="950" b="1" dirty="0">
+                        <a:rPr lang="en-US" sz="900" b="1" dirty="0">
                           <a:solidFill>
                             <a:srgbClr val="52514E"/>
                           </a:solidFill>
@@ -8940,14 +8256,14 @@
                         </a:rPr>
                         <a:t>움직이는 지표</a:t>
                       </a:r>
-                      <a:endParaRPr lang="en-US" sz="950" dirty="0">
+                      <a:endParaRPr lang="en-US" sz="900" dirty="0">
                         <a:latin typeface="Malgun Gothic" charset="0"/>
                         <a:ea typeface="Malgun Gothic" charset="0"/>
                         <a:cs typeface="Malgun Gothic" charset="0"/>
                       </a:endParaRPr>
                     </a:p>
                   </a:txBody>
-                  <a:tcPr marL="76200" marR="76200" marT="25400" marB="25400" anchor="ctr">
+                  <a:tcPr marL="63500" marR="63500" marT="25400" marB="25400" anchor="ctr">
                     <a:lnL w="0" cap="flat" cmpd="sng" algn="ctr">
                       <a:noFill/>
                     </a:lnL>
@@ -8972,7 +8288,7 @@
                   </a:tcPr>
                 </a:tc>
               </a:tr>
-              <a:tr h="283464">
+              <a:tr h="256032">
                 <a:tc>
                   <a:txBody>
                     <a:bodyPr/>
@@ -8982,7 +8298,7 @@
                         <a:buNone/>
                       </a:pPr>
                       <a:r>
-                        <a:rPr lang="en-US" sz="950" dirty="0">
+                        <a:rPr lang="en-US" sz="900" dirty="0">
                           <a:solidFill>
                             <a:srgbClr val="0B0B0B"/>
                           </a:solidFill>
@@ -8990,16 +8306,16 @@
                           <a:ea typeface="Malgun Gothic" pitchFamily="34" charset="-122"/>
                           <a:cs typeface="Malgun Gothic" pitchFamily="34" charset="-120"/>
                         </a:rPr>
-                        <a:t>1·2장</a:t>
+                        <a:t>1-4·2-2·4-1</a:t>
                       </a:r>
-                      <a:endParaRPr lang="en-US" sz="950" dirty="0">
+                      <a:endParaRPr lang="en-US" sz="900" dirty="0">
                         <a:latin typeface="Malgun Gothic" charset="0"/>
                         <a:ea typeface="Malgun Gothic" charset="0"/>
                         <a:cs typeface="Malgun Gothic" charset="0"/>
                       </a:endParaRPr>
                     </a:p>
                   </a:txBody>
-                  <a:tcPr marL="76200" marR="76200" marT="25400" marB="25400" anchor="ctr">
+                  <a:tcPr marL="63500" marR="63500" marT="25400" marB="25400" anchor="ctr">
                     <a:lnL w="0" cap="flat" cmpd="sng" algn="ctr">
                       <a:noFill/>
                     </a:lnL>
@@ -9032,7 +8348,7 @@
                         <a:buNone/>
                       </a:pPr>
                       <a:r>
-                        <a:rPr lang="en-US" sz="950" dirty="0">
+                        <a:rPr lang="en-US" sz="900" dirty="0">
                           <a:solidFill>
                             <a:srgbClr val="0B0B0B"/>
                           </a:solidFill>
@@ -9042,14 +8358,14 @@
                         </a:rPr>
                         <a:t>나(개발)</a:t>
                       </a:r>
-                      <a:endParaRPr lang="en-US" sz="950" dirty="0">
+                      <a:endParaRPr lang="en-US" sz="900" dirty="0">
                         <a:latin typeface="Malgun Gothic" charset="0"/>
                         <a:ea typeface="Malgun Gothic" charset="0"/>
                         <a:cs typeface="Malgun Gothic" charset="0"/>
                       </a:endParaRPr>
                     </a:p>
                   </a:txBody>
-                  <a:tcPr marL="76200" marR="76200" marT="25400" marB="25400" anchor="ctr">
+                  <a:tcPr marL="63500" marR="63500" marT="25400" marB="25400" anchor="ctr">
                     <a:lnL w="0" cap="flat" cmpd="sng" algn="ctr">
                       <a:noFill/>
                     </a:lnL>
@@ -9082,7 +8398,7 @@
                         <a:buNone/>
                       </a:pPr>
                       <a:r>
-                        <a:rPr lang="en-US" sz="950" dirty="0">
+                        <a:rPr lang="en-US" sz="900" dirty="0">
                           <a:solidFill>
                             <a:srgbClr val="0B0B0B"/>
                           </a:solidFill>
@@ -9090,16 +8406,16 @@
                           <a:ea typeface="Malgun Gothic" pitchFamily="34" charset="-122"/>
                           <a:cs typeface="Malgun Gothic" pitchFamily="34" charset="-120"/>
                         </a:rPr>
-                        <a:t>새 사이트(텍스트·첫 화면 신청 칸·분쟁 페이지·휴대폰), 변리사 확인 뒤 공개</a:t>
+                        <a:t>새 사이트: 글자를 텍스트로, 첫 화면 신청 칸, 분쟁 페이지, 휴대폰. 변리사 확인 뒤 공개</a:t>
                       </a:r>
-                      <a:endParaRPr lang="en-US" sz="950" dirty="0">
+                      <a:endParaRPr lang="en-US" sz="900" dirty="0">
                         <a:latin typeface="Malgun Gothic" charset="0"/>
                         <a:ea typeface="Malgun Gothic" charset="0"/>
                         <a:cs typeface="Malgun Gothic" charset="0"/>
                       </a:endParaRPr>
                     </a:p>
                   </a:txBody>
-                  <a:tcPr marL="76200" marR="76200" marT="25400" marB="25400" anchor="ctr">
+                  <a:tcPr marL="63500" marR="63500" marT="25400" marB="25400" anchor="ctr">
                     <a:lnL w="0" cap="flat" cmpd="sng" algn="ctr">
                       <a:noFill/>
                     </a:lnL>
@@ -9132,7 +8448,7 @@
                         <a:buNone/>
                       </a:pPr>
                       <a:r>
-                        <a:rPr lang="en-US" sz="950" dirty="0">
+                        <a:rPr lang="en-US" sz="900" dirty="0">
                           <a:solidFill>
                             <a:srgbClr val="0B0B0B"/>
                           </a:solidFill>
@@ -9142,14 +8458,14 @@
                         </a:rPr>
                         <a:t>방문당 신청률, 네이버 검색 방문</a:t>
                       </a:r>
-                      <a:endParaRPr lang="en-US" sz="950" dirty="0">
+                      <a:endParaRPr lang="en-US" sz="900" dirty="0">
                         <a:latin typeface="Malgun Gothic" charset="0"/>
                         <a:ea typeface="Malgun Gothic" charset="0"/>
                         <a:cs typeface="Malgun Gothic" charset="0"/>
                       </a:endParaRPr>
                     </a:p>
                   </a:txBody>
-                  <a:tcPr marL="76200" marR="76200" marT="25400" marB="25400" anchor="ctr">
+                  <a:tcPr marL="63500" marR="63500" marT="25400" marB="25400" anchor="ctr">
                     <a:lnL w="0" cap="flat" cmpd="sng" algn="ctr">
                       <a:noFill/>
                     </a:lnL>
@@ -9174,7 +8490,7 @@
                   </a:tcPr>
                 </a:tc>
               </a:tr>
-              <a:tr h="283464">
+              <a:tr h="256032">
                 <a:tc>
                   <a:txBody>
                     <a:bodyPr/>
@@ -9184,7 +8500,7 @@
                         <a:buNone/>
                       </a:pPr>
                       <a:r>
-                        <a:rPr lang="en-US" sz="950" dirty="0">
+                        <a:rPr lang="en-US" sz="900" dirty="0">
                           <a:solidFill>
                             <a:srgbClr val="0B0B0B"/>
                           </a:solidFill>
@@ -9194,14 +8510,14 @@
                         </a:rPr>
                         <a:t>1-6</a:t>
                       </a:r>
-                      <a:endParaRPr lang="en-US" sz="950" dirty="0">
+                      <a:endParaRPr lang="en-US" sz="900" dirty="0">
                         <a:latin typeface="Malgun Gothic" charset="0"/>
                         <a:ea typeface="Malgun Gothic" charset="0"/>
                         <a:cs typeface="Malgun Gothic" charset="0"/>
                       </a:endParaRPr>
                     </a:p>
                   </a:txBody>
-                  <a:tcPr marL="76200" marR="76200" marT="25400" marB="25400" anchor="ctr">
+                  <a:tcPr marL="63500" marR="63500" marT="25400" marB="25400" anchor="ctr">
                     <a:lnL w="0" cap="flat" cmpd="sng" algn="ctr">
                       <a:noFill/>
                     </a:lnL>
@@ -9234,7 +8550,7 @@
                         <a:buNone/>
                       </a:pPr>
                       <a:r>
-                        <a:rPr lang="en-US" sz="950" dirty="0">
+                        <a:rPr lang="en-US" sz="900" dirty="0">
                           <a:solidFill>
                             <a:srgbClr val="0B0B0B"/>
                           </a:solidFill>
@@ -9244,14 +8560,14 @@
                         </a:rPr>
                         <a:t>변리사</a:t>
                       </a:r>
-                      <a:endParaRPr lang="en-US" sz="950" dirty="0">
+                      <a:endParaRPr lang="en-US" sz="900" dirty="0">
                         <a:latin typeface="Malgun Gothic" charset="0"/>
                         <a:ea typeface="Malgun Gothic" charset="0"/>
                         <a:cs typeface="Malgun Gothic" charset="0"/>
                       </a:endParaRPr>
                     </a:p>
                   </a:txBody>
-                  <a:tcPr marL="76200" marR="76200" marT="25400" marB="25400" anchor="ctr">
+                  <a:tcPr marL="63500" marR="63500" marT="25400" marB="25400" anchor="ctr">
                     <a:lnL w="0" cap="flat" cmpd="sng" algn="ctr">
                       <a:noFill/>
                     </a:lnL>
@@ -9284,7 +8600,7 @@
                         <a:buNone/>
                       </a:pPr>
                       <a:r>
-                        <a:rPr lang="en-US" sz="950" dirty="0">
+                        <a:rPr lang="en-US" sz="900" dirty="0">
                           <a:solidFill>
                             <a:srgbClr val="0B0B0B"/>
                           </a:solidFill>
@@ -9292,16 +8608,16 @@
                           <a:ea typeface="Malgun Gothic" pitchFamily="34" charset="-122"/>
                           <a:cs typeface="Malgun Gothic" pitchFamily="34" charset="-120"/>
                         </a:rPr>
-                        <a:t>포괄 검색어 입찰 낮추기·제외, 지방 키워드 늘리기</a:t>
+                        <a:t>포괄 검색어 입찰 낮추기·제외, 확장 검색 정리, 지방·심사관출신 늘리기 (4주 단위)</a:t>
                       </a:r>
-                      <a:endParaRPr lang="en-US" sz="950" dirty="0">
+                      <a:endParaRPr lang="en-US" sz="900" dirty="0">
                         <a:latin typeface="Malgun Gothic" charset="0"/>
                         <a:ea typeface="Malgun Gothic" charset="0"/>
                         <a:cs typeface="Malgun Gothic" charset="0"/>
                       </a:endParaRPr>
                     </a:p>
                   </a:txBody>
-                  <a:tcPr marL="76200" marR="76200" marT="25400" marB="25400" anchor="ctr">
+                  <a:tcPr marL="63500" marR="63500" marT="25400" marB="25400" anchor="ctr">
                     <a:lnL w="0" cap="flat" cmpd="sng" algn="ctr">
                       <a:noFill/>
                     </a:lnL>
@@ -9334,7 +8650,7 @@
                         <a:buNone/>
                       </a:pPr>
                       <a:r>
-                        <a:rPr lang="en-US" sz="950" dirty="0">
+                        <a:rPr lang="en-US" sz="900" dirty="0">
                           <a:solidFill>
                             <a:srgbClr val="0B0B0B"/>
                           </a:solidFill>
@@ -9344,14 +8660,14 @@
                         </a:rPr>
                         <a:t>광고 클릭률, 광고비</a:t>
                       </a:r>
-                      <a:endParaRPr lang="en-US" sz="950" dirty="0">
+                      <a:endParaRPr lang="en-US" sz="900" dirty="0">
                         <a:latin typeface="Malgun Gothic" charset="0"/>
                         <a:ea typeface="Malgun Gothic" charset="0"/>
                         <a:cs typeface="Malgun Gothic" charset="0"/>
                       </a:endParaRPr>
                     </a:p>
                   </a:txBody>
-                  <a:tcPr marL="76200" marR="76200" marT="25400" marB="25400" anchor="ctr">
+                  <a:tcPr marL="63500" marR="63500" marT="25400" marB="25400" anchor="ctr">
                     <a:lnL w="0" cap="flat" cmpd="sng" algn="ctr">
                       <a:noFill/>
                     </a:lnL>
@@ -9376,7 +8692,7 @@
                   </a:tcPr>
                 </a:tc>
               </a:tr>
-              <a:tr h="283464">
+              <a:tr h="256032">
                 <a:tc>
                   <a:txBody>
                     <a:bodyPr/>
@@ -9386,7 +8702,7 @@
                         <a:buNone/>
                       </a:pPr>
                       <a:r>
-                        <a:rPr lang="en-US" sz="950" dirty="0">
+                        <a:rPr lang="en-US" sz="900" dirty="0">
                           <a:solidFill>
                             <a:srgbClr val="0B0B0B"/>
                           </a:solidFill>
@@ -9394,16 +8710,16 @@
                           <a:ea typeface="Malgun Gothic" pitchFamily="34" charset="-122"/>
                           <a:cs typeface="Malgun Gothic" pitchFamily="34" charset="-120"/>
                         </a:rPr>
-                        <a:t>5-1</a:t>
+                        <a:t>3-1·5-1</a:t>
                       </a:r>
-                      <a:endParaRPr lang="en-US" sz="950" dirty="0">
+                      <a:endParaRPr lang="en-US" sz="900" dirty="0">
                         <a:latin typeface="Malgun Gothic" charset="0"/>
                         <a:ea typeface="Malgun Gothic" charset="0"/>
                         <a:cs typeface="Malgun Gothic" charset="0"/>
                       </a:endParaRPr>
                     </a:p>
                   </a:txBody>
-                  <a:tcPr marL="76200" marR="76200" marT="25400" marB="25400" anchor="ctr">
+                  <a:tcPr marL="63500" marR="63500" marT="25400" marB="25400" anchor="ctr">
                     <a:lnL w="0" cap="flat" cmpd="sng" algn="ctr">
                       <a:noFill/>
                     </a:lnL>
@@ -9436,7 +8752,7 @@
                         <a:buNone/>
                       </a:pPr>
                       <a:r>
-                        <a:rPr lang="en-US" sz="950" dirty="0">
+                        <a:rPr lang="en-US" sz="900" dirty="0">
                           <a:solidFill>
                             <a:srgbClr val="0B0B0B"/>
                           </a:solidFill>
@@ -9446,14 +8762,14 @@
                         </a:rPr>
                         <a:t>변리사</a:t>
                       </a:r>
-                      <a:endParaRPr lang="en-US" sz="950" dirty="0">
+                      <a:endParaRPr lang="en-US" sz="900" dirty="0">
                         <a:latin typeface="Malgun Gothic" charset="0"/>
                         <a:ea typeface="Malgun Gothic" charset="0"/>
                         <a:cs typeface="Malgun Gothic" charset="0"/>
                       </a:endParaRPr>
                     </a:p>
                   </a:txBody>
-                  <a:tcPr marL="76200" marR="76200" marT="25400" marB="25400" anchor="ctr">
+                  <a:tcPr marL="63500" marR="63500" marT="25400" marB="25400" anchor="ctr">
                     <a:lnL w="0" cap="flat" cmpd="sng" algn="ctr">
                       <a:noFill/>
                     </a:lnL>
@@ -9486,7 +8802,7 @@
                         <a:buNone/>
                       </a:pPr>
                       <a:r>
-                        <a:rPr lang="en-US" sz="950" dirty="0">
+                        <a:rPr lang="en-US" sz="900" dirty="0">
                           <a:solidFill>
                             <a:srgbClr val="0B0B0B"/>
                           </a:solidFill>
@@ -9494,16 +8810,16 @@
                           <a:ea typeface="Malgun Gothic" pitchFamily="34" charset="-122"/>
                           <a:cs typeface="Malgun Gothic" pitchFamily="34" charset="-120"/>
                         </a:rPr>
-                        <a:t>네이버 광고 전환 추적 설치(신청함, 승인 대기)</a:t>
+                        <a:t>신청마다 수임 여부 기록(분기 1회), 네이버 전환 추적(신청함, 승인 뒤 설치)</a:t>
                       </a:r>
-                      <a:endParaRPr lang="en-US" sz="950" dirty="0">
+                      <a:endParaRPr lang="en-US" sz="900" dirty="0">
                         <a:latin typeface="Malgun Gothic" charset="0"/>
                         <a:ea typeface="Malgun Gothic" charset="0"/>
                         <a:cs typeface="Malgun Gothic" charset="0"/>
                       </a:endParaRPr>
                     </a:p>
                   </a:txBody>
-                  <a:tcPr marL="76200" marR="76200" marT="25400" marB="25400" anchor="ctr">
+                  <a:tcPr marL="63500" marR="63500" marT="25400" marB="25400" anchor="ctr">
                     <a:lnL w="0" cap="flat" cmpd="sng" algn="ctr">
                       <a:noFill/>
                     </a:lnL>
@@ -9536,7 +8852,7 @@
                         <a:buNone/>
                       </a:pPr>
                       <a:r>
-                        <a:rPr lang="en-US" sz="950" dirty="0">
+                        <a:rPr lang="en-US" sz="900" dirty="0">
                           <a:solidFill>
                             <a:srgbClr val="0B0B0B"/>
                           </a:solidFill>
@@ -9544,16 +8860,16 @@
                           <a:ea typeface="Malgun Gothic" pitchFamily="34" charset="-122"/>
                           <a:cs typeface="Malgun Gothic" pitchFamily="34" charset="-120"/>
                         </a:rPr>
-                        <a:t>검색어별 신청</a:t>
+                        <a:t>수임 전환율, 검색어별 신청</a:t>
                       </a:r>
-                      <a:endParaRPr lang="en-US" sz="950" dirty="0">
+                      <a:endParaRPr lang="en-US" sz="900" dirty="0">
                         <a:latin typeface="Malgun Gothic" charset="0"/>
                         <a:ea typeface="Malgun Gothic" charset="0"/>
                         <a:cs typeface="Malgun Gothic" charset="0"/>
                       </a:endParaRPr>
                     </a:p>
                   </a:txBody>
-                  <a:tcPr marL="76200" marR="76200" marT="25400" marB="25400" anchor="ctr">
+                  <a:tcPr marL="63500" marR="63500" marT="25400" marB="25400" anchor="ctr">
                     <a:lnL w="0" cap="flat" cmpd="sng" algn="ctr">
                       <a:noFill/>
                     </a:lnL>
@@ -9578,7 +8894,7 @@
                   </a:tcPr>
                 </a:tc>
               </a:tr>
-              <a:tr h="283464">
+              <a:tr h="256032">
                 <a:tc>
                   <a:txBody>
                     <a:bodyPr/>
@@ -9588,7 +8904,7 @@
                         <a:buNone/>
                       </a:pPr>
                       <a:r>
-                        <a:rPr lang="en-US" sz="950" dirty="0">
+                        <a:rPr lang="en-US" sz="900" dirty="0">
                           <a:solidFill>
                             <a:srgbClr val="0B0B0B"/>
                           </a:solidFill>
@@ -9596,16 +8912,16 @@
                           <a:ea typeface="Malgun Gothic" pitchFamily="34" charset="-122"/>
                           <a:cs typeface="Malgun Gothic" pitchFamily="34" charset="-120"/>
                         </a:rPr>
-                        <a:t>3장</a:t>
+                        <a:t>1-2·1-3</a:t>
                       </a:r>
-                      <a:endParaRPr lang="en-US" sz="950" dirty="0">
+                      <a:endParaRPr lang="en-US" sz="900" dirty="0">
                         <a:latin typeface="Malgun Gothic" charset="0"/>
                         <a:ea typeface="Malgun Gothic" charset="0"/>
                         <a:cs typeface="Malgun Gothic" charset="0"/>
                       </a:endParaRPr>
                     </a:p>
                   </a:txBody>
-                  <a:tcPr marL="76200" marR="76200" marT="25400" marB="25400" anchor="ctr">
+                  <a:tcPr marL="63500" marR="63500" marT="25400" marB="25400" anchor="ctr">
                     <a:lnL w="0" cap="flat" cmpd="sng" algn="ctr">
                       <a:noFill/>
                     </a:lnL>
@@ -9638,7 +8954,7 @@
                         <a:buNone/>
                       </a:pPr>
                       <a:r>
-                        <a:rPr lang="en-US" sz="950" dirty="0">
+                        <a:rPr lang="en-US" sz="900" dirty="0">
                           <a:solidFill>
                             <a:srgbClr val="0B0B0B"/>
                           </a:solidFill>
@@ -9648,14 +8964,14 @@
                         </a:rPr>
                         <a:t>변리사</a:t>
                       </a:r>
-                      <a:endParaRPr lang="en-US" sz="950" dirty="0">
+                      <a:endParaRPr lang="en-US" sz="900" dirty="0">
                         <a:latin typeface="Malgun Gothic" charset="0"/>
                         <a:ea typeface="Malgun Gothic" charset="0"/>
                         <a:cs typeface="Malgun Gothic" charset="0"/>
                       </a:endParaRPr>
                     </a:p>
                   </a:txBody>
-                  <a:tcPr marL="76200" marR="76200" marT="25400" marB="25400" anchor="ctr">
+                  <a:tcPr marL="63500" marR="63500" marT="25400" marB="25400" anchor="ctr">
                     <a:lnL w="0" cap="flat" cmpd="sng" algn="ctr">
                       <a:noFill/>
                     </a:lnL>
@@ -9688,7 +9004,7 @@
                         <a:buNone/>
                       </a:pPr>
                       <a:r>
-                        <a:rPr lang="en-US" sz="950" dirty="0">
+                        <a:rPr lang="en-US" sz="900" dirty="0">
                           <a:solidFill>
                             <a:srgbClr val="0B0B0B"/>
                           </a:solidFill>
@@ -9696,16 +9012,16 @@
                           <a:ea typeface="Malgun Gothic" pitchFamily="34" charset="-122"/>
                           <a:cs typeface="Malgun Gothic" pitchFamily="34" charset="-120"/>
                         </a:rPr>
-                        <a:t>신청마다 수임 여부 기록(분기 1회)</a:t>
+                        <a:t>다음 광고 재개 결정, 블로그는 읽을 내용이 있는 글로</a:t>
                       </a:r>
-                      <a:endParaRPr lang="en-US" sz="950" dirty="0">
+                      <a:endParaRPr lang="en-US" sz="900" dirty="0">
                         <a:latin typeface="Malgun Gothic" charset="0"/>
                         <a:ea typeface="Malgun Gothic" charset="0"/>
                         <a:cs typeface="Malgun Gothic" charset="0"/>
                       </a:endParaRPr>
                     </a:p>
                   </a:txBody>
-                  <a:tcPr marL="76200" marR="76200" marT="25400" marB="25400" anchor="ctr">
+                  <a:tcPr marL="63500" marR="63500" marT="25400" marB="25400" anchor="ctr">
                     <a:lnL w="0" cap="flat" cmpd="sng" algn="ctr">
                       <a:noFill/>
                     </a:lnL>
@@ -9738,209 +9054,7 @@
                         <a:buNone/>
                       </a:pPr>
                       <a:r>
-                        <a:rPr lang="en-US" sz="950" dirty="0">
-                          <a:solidFill>
-                            <a:srgbClr val="0B0B0B"/>
-                          </a:solidFill>
-                          <a:latin typeface="Malgun Gothic" pitchFamily="34" charset="0"/>
-                          <a:ea typeface="Malgun Gothic" pitchFamily="34" charset="-122"/>
-                          <a:cs typeface="Malgun Gothic" pitchFamily="34" charset="-120"/>
-                        </a:rPr>
-                        <a:t>수임 전환율</a:t>
-                      </a:r>
-                      <a:endParaRPr lang="en-US" sz="950" dirty="0">
-                        <a:latin typeface="Malgun Gothic" charset="0"/>
-                        <a:ea typeface="Malgun Gothic" charset="0"/>
-                        <a:cs typeface="Malgun Gothic" charset="0"/>
-                      </a:endParaRPr>
-                    </a:p>
-                  </a:txBody>
-                  <a:tcPr marL="76200" marR="76200" marT="25400" marB="25400" anchor="ctr">
-                    <a:lnL w="0" cap="flat" cmpd="sng" algn="ctr">
-                      <a:noFill/>
-                    </a:lnL>
-                    <a:lnR w="0" cap="flat" cmpd="sng" algn="ctr">
-                      <a:noFill/>
-                    </a:lnR>
-                    <a:lnT w="0" cap="flat" cmpd="sng" algn="ctr">
-                      <a:noFill/>
-                    </a:lnT>
-                    <a:lnB w="6350" cap="flat" cmpd="sng" algn="ctr">
-                      <a:solidFill>
-                        <a:srgbClr val="DFE3E2"/>
-                      </a:solidFill>
-                      <a:prstDash val="solid"/>
-                      <a:round/>
-                      <a:headEnd type="none" w="med" len="med"/>
-                      <a:tailEnd type="none" w="med" len="med"/>
-                    </a:lnB>
-                    <a:solidFill>
-                      <a:srgbClr val="FFFFFF"/>
-                    </a:solidFill>
-                  </a:tcPr>
-                </a:tc>
-              </a:tr>
-              <a:tr h="283464">
-                <a:tc>
-                  <a:txBody>
-                    <a:bodyPr/>
-                    <a:lstStyle/>
-                    <a:p>
-                      <a:pPr indent="0" marL="0">
-                        <a:buNone/>
-                      </a:pPr>
-                      <a:r>
-                        <a:rPr lang="en-US" sz="950" dirty="0">
-                          <a:solidFill>
-                            <a:srgbClr val="0B0B0B"/>
-                          </a:solidFill>
-                          <a:latin typeface="Malgun Gothic" pitchFamily="34" charset="0"/>
-                          <a:ea typeface="Malgun Gothic" pitchFamily="34" charset="-122"/>
-                          <a:cs typeface="Malgun Gothic" pitchFamily="34" charset="-120"/>
-                        </a:rPr>
-                        <a:t>1-2·1-3</a:t>
-                      </a:r>
-                      <a:endParaRPr lang="en-US" sz="950" dirty="0">
-                        <a:latin typeface="Malgun Gothic" charset="0"/>
-                        <a:ea typeface="Malgun Gothic" charset="0"/>
-                        <a:cs typeface="Malgun Gothic" charset="0"/>
-                      </a:endParaRPr>
-                    </a:p>
-                  </a:txBody>
-                  <a:tcPr marL="76200" marR="76200" marT="25400" marB="25400" anchor="ctr">
-                    <a:lnL w="0" cap="flat" cmpd="sng" algn="ctr">
-                      <a:noFill/>
-                    </a:lnL>
-                    <a:lnR w="0" cap="flat" cmpd="sng" algn="ctr">
-                      <a:noFill/>
-                    </a:lnR>
-                    <a:lnT w="0" cap="flat" cmpd="sng" algn="ctr">
-                      <a:noFill/>
-                    </a:lnT>
-                    <a:lnB w="6350" cap="flat" cmpd="sng" algn="ctr">
-                      <a:solidFill>
-                        <a:srgbClr val="DFE3E2"/>
-                      </a:solidFill>
-                      <a:prstDash val="solid"/>
-                      <a:round/>
-                      <a:headEnd type="none" w="med" len="med"/>
-                      <a:tailEnd type="none" w="med" len="med"/>
-                    </a:lnB>
-                    <a:solidFill>
-                      <a:srgbClr val="FFFFFF"/>
-                    </a:solidFill>
-                  </a:tcPr>
-                </a:tc>
-                <a:tc>
-                  <a:txBody>
-                    <a:bodyPr/>
-                    <a:lstStyle/>
-                    <a:p>
-                      <a:pPr indent="0" marL="0">
-                        <a:buNone/>
-                      </a:pPr>
-                      <a:r>
-                        <a:rPr lang="en-US" sz="950" dirty="0">
-                          <a:solidFill>
-                            <a:srgbClr val="0B0B0B"/>
-                          </a:solidFill>
-                          <a:latin typeface="Malgun Gothic" pitchFamily="34" charset="0"/>
-                          <a:ea typeface="Malgun Gothic" pitchFamily="34" charset="-122"/>
-                          <a:cs typeface="Malgun Gothic" pitchFamily="34" charset="-120"/>
-                        </a:rPr>
-                        <a:t>변리사</a:t>
-                      </a:r>
-                      <a:endParaRPr lang="en-US" sz="950" dirty="0">
-                        <a:latin typeface="Malgun Gothic" charset="0"/>
-                        <a:ea typeface="Malgun Gothic" charset="0"/>
-                        <a:cs typeface="Malgun Gothic" charset="0"/>
-                      </a:endParaRPr>
-                    </a:p>
-                  </a:txBody>
-                  <a:tcPr marL="76200" marR="76200" marT="25400" marB="25400" anchor="ctr">
-                    <a:lnL w="0" cap="flat" cmpd="sng" algn="ctr">
-                      <a:noFill/>
-                    </a:lnL>
-                    <a:lnR w="0" cap="flat" cmpd="sng" algn="ctr">
-                      <a:noFill/>
-                    </a:lnR>
-                    <a:lnT w="0" cap="flat" cmpd="sng" algn="ctr">
-                      <a:noFill/>
-                    </a:lnT>
-                    <a:lnB w="6350" cap="flat" cmpd="sng" algn="ctr">
-                      <a:solidFill>
-                        <a:srgbClr val="DFE3E2"/>
-                      </a:solidFill>
-                      <a:prstDash val="solid"/>
-                      <a:round/>
-                      <a:headEnd type="none" w="med" len="med"/>
-                      <a:tailEnd type="none" w="med" len="med"/>
-                    </a:lnB>
-                    <a:solidFill>
-                      <a:srgbClr val="FFFFFF"/>
-                    </a:solidFill>
-                  </a:tcPr>
-                </a:tc>
-                <a:tc>
-                  <a:txBody>
-                    <a:bodyPr/>
-                    <a:lstStyle/>
-                    <a:p>
-                      <a:pPr indent="0" marL="0">
-                        <a:buNone/>
-                      </a:pPr>
-                      <a:r>
-                        <a:rPr lang="en-US" sz="950" dirty="0">
-                          <a:solidFill>
-                            <a:srgbClr val="0B0B0B"/>
-                          </a:solidFill>
-                          <a:latin typeface="Malgun Gothic" pitchFamily="34" charset="0"/>
-                          <a:ea typeface="Malgun Gothic" pitchFamily="34" charset="-122"/>
-                          <a:cs typeface="Malgun Gothic" pitchFamily="34" charset="-120"/>
-                        </a:rPr>
-                        <a:t>다음 광고 재개 결정, 블로그는 읽을 내용이 있는 글로</a:t>
-                      </a:r>
-                      <a:endParaRPr lang="en-US" sz="950" dirty="0">
-                        <a:latin typeface="Malgun Gothic" charset="0"/>
-                        <a:ea typeface="Malgun Gothic" charset="0"/>
-                        <a:cs typeface="Malgun Gothic" charset="0"/>
-                      </a:endParaRPr>
-                    </a:p>
-                  </a:txBody>
-                  <a:tcPr marL="76200" marR="76200" marT="25400" marB="25400" anchor="ctr">
-                    <a:lnL w="0" cap="flat" cmpd="sng" algn="ctr">
-                      <a:noFill/>
-                    </a:lnL>
-                    <a:lnR w="0" cap="flat" cmpd="sng" algn="ctr">
-                      <a:noFill/>
-                    </a:lnR>
-                    <a:lnT w="0" cap="flat" cmpd="sng" algn="ctr">
-                      <a:noFill/>
-                    </a:lnT>
-                    <a:lnB w="6350" cap="flat" cmpd="sng" algn="ctr">
-                      <a:solidFill>
-                        <a:srgbClr val="DFE3E2"/>
-                      </a:solidFill>
-                      <a:prstDash val="solid"/>
-                      <a:round/>
-                      <a:headEnd type="none" w="med" len="med"/>
-                      <a:tailEnd type="none" w="med" len="med"/>
-                    </a:lnB>
-                    <a:solidFill>
-                      <a:srgbClr val="FFFFFF"/>
-                    </a:solidFill>
-                  </a:tcPr>
-                </a:tc>
-                <a:tc>
-                  <a:txBody>
-                    <a:bodyPr/>
-                    <a:lstStyle/>
-                    <a:p>
-                      <a:pPr indent="0" marL="0">
-                        <a:buNone/>
-                      </a:pPr>
-                      <a:r>
-                        <a:rPr lang="en-US" sz="950" dirty="0">
+                        <a:rPr lang="en-US" sz="900" dirty="0">
                           <a:solidFill>
                             <a:srgbClr val="0B0B0B"/>
                           </a:solidFill>
@@ -9950,14 +9064,14 @@
                         </a:rPr>
                         <a:t>다음·블로그 방문</a:t>
                       </a:r>
-                      <a:endParaRPr lang="en-US" sz="950" dirty="0">
+                      <a:endParaRPr lang="en-US" sz="900" dirty="0">
                         <a:latin typeface="Malgun Gothic" charset="0"/>
                         <a:ea typeface="Malgun Gothic" charset="0"/>
                         <a:cs typeface="Malgun Gothic" charset="0"/>
                       </a:endParaRPr>
                     </a:p>
                   </a:txBody>
-                  <a:tcPr marL="76200" marR="76200" marT="25400" marB="25400" anchor="ctr">
+                  <a:tcPr marL="63500" marR="63500" marT="25400" marB="25400" anchor="ctr">
                     <a:lnL w="0" cap="flat" cmpd="sng" algn="ctr">
                       <a:noFill/>
                     </a:lnL>
@@ -9994,8 +9108,8 @@
         </p:nvSpPr>
         <p:spPr>
           <a:xfrm>
-            <a:off x="411480" y="2542032"/>
-            <a:ext cx="8321040" cy="530352"/>
+            <a:off x="411480" y="2048256"/>
+            <a:ext cx="8321040" cy="384048"/>
           </a:xfrm>
           <a:prstGeom prst="rect">
             <a:avLst/>
@@ -10019,8 +9133,8 @@
         </p:nvSpPr>
         <p:spPr>
           <a:xfrm>
-            <a:off x="576072" y="2542032"/>
-            <a:ext cx="7991856" cy="530352"/>
+            <a:off x="548640" y="2048256"/>
+            <a:ext cx="8046720" cy="384048"/>
           </a:xfrm>
           <a:prstGeom prst="rect">
             <a:avLst/>
@@ -10036,7 +9150,7 @@
               <a:buNone/>
             </a:pPr>
             <a:r>
-              <a:rPr lang="en-US" sz="1100" b="1" dirty="0">
+              <a:rPr lang="en-US" sz="1000" b="1" dirty="0">
                 <a:solidFill>
                   <a:srgbClr val="2A78D6"/>
                 </a:solidFill>
@@ -10050,7 +9164,7 @@
               <a:buNone/>
             </a:pPr>
             <a:r>
-              <a:rPr lang="en-US" sz="1100" dirty="0">
+              <a:rPr lang="en-US" sz="1000" dirty="0">
                 <a:solidFill>
                   <a:srgbClr val="0B0B0B"/>
                 </a:solidFill>
@@ -10064,7 +9178,7 @@
               <a:buNone/>
             </a:pPr>
             <a:r>
-              <a:rPr lang="en-US" sz="1600" b="1" dirty="0">
+              <a:rPr lang="en-US" sz="1400" b="1" dirty="0">
                 <a:solidFill>
                   <a:srgbClr val="2A78D6"/>
                 </a:solidFill>
@@ -10078,7 +9192,7 @@
               <a:buNone/>
             </a:pPr>
             <a:r>
-              <a:rPr lang="en-US" sz="1100" dirty="0">
+              <a:rPr lang="en-US" sz="1000" dirty="0">
                 <a:solidFill>
                   <a:srgbClr val="0B0B0B"/>
                 </a:solidFill>
@@ -10086,13 +9200,13 @@
                 <a:ea typeface="Malgun Gothic" pitchFamily="34" charset="-122"/>
                 <a:cs typeface="Malgun Gothic" pitchFamily="34" charset="-120"/>
               </a:rPr>
-              <a:t>이면 지금 방문으로 연 177건  →  목표 </a:t>
+              <a:t>이면 지금 방문(3,812)으로 연 177건  →  목표 </a:t>
             </a:r>
             <a:pPr indent="0" marL="0">
               <a:buNone/>
             </a:pPr>
             <a:r>
-              <a:rPr lang="en-US" sz="1600" b="1" dirty="0">
+              <a:rPr lang="en-US" sz="1400" b="1" dirty="0">
                 <a:solidFill>
                   <a:srgbClr val="2A78D6"/>
                 </a:solidFill>
@@ -10102,7 +9216,7 @@
               </a:rPr>
               <a:t>연 150건</a:t>
             </a:r>
-            <a:endParaRPr lang="en-US" sz="1100" dirty="0"/>
+            <a:endParaRPr lang="en-US" sz="1000" dirty="0"/>
           </a:p>
         </p:txBody>
       </p:sp>
@@ -10114,8 +9228,8 @@
         </p:nvSpPr>
         <p:spPr>
           <a:xfrm>
-            <a:off x="411480" y="3182112"/>
-            <a:ext cx="8321040" cy="219456"/>
+            <a:off x="411480" y="2542032"/>
+            <a:ext cx="4023360" cy="219456"/>
           </a:xfrm>
           <a:prstGeom prst="rect">
             <a:avLst/>
@@ -10139,7 +9253,7 @@
                 <a:ea typeface="Malgun Gothic" pitchFamily="34" charset="-122"/>
                 <a:cs typeface="Malgun Gothic" pitchFamily="34" charset="-120"/>
               </a:rPr>
-              <a:t>한계</a:t>
+              <a:t>설치한 측정 (5-1, 2026-10-06 옛 사이트에)</a:t>
             </a:r>
             <a:endParaRPr lang="en-US" sz="950" dirty="0"/>
           </a:p>
@@ -10153,8 +9267,8 @@
         </p:nvSpPr>
         <p:spPr>
           <a:xfrm>
-            <a:off x="411480" y="3401568"/>
-            <a:ext cx="8321040" cy="685800"/>
+            <a:off x="411480" y="2761488"/>
+            <a:ext cx="4023360" cy="1188720"/>
           </a:xfrm>
           <a:prstGeom prst="rect">
             <a:avLst/>
@@ -10174,7 +9288,7 @@
               <a:buChar char="•"/>
             </a:pPr>
             <a:r>
-              <a:rPr lang="en-US" sz="900" dirty="0">
+              <a:rPr lang="en-US" sz="800" dirty="0">
                 <a:solidFill>
                   <a:srgbClr val="0B0B0B"/>
                 </a:solidFill>
@@ -10182,9 +9296,9 @@
                 <a:ea typeface="Malgun Gothic" pitchFamily="34" charset="-122"/>
                 <a:cs typeface="Malgun Gothic" pitchFamily="34" charset="-120"/>
               </a:rPr>
-              <a:t>표본: 광고 90일 신청 15건, 광고 유입 120건 · 기간: 광고 90일, GA4 1개월</a:t>
-            </a:r>
-            <a:endParaRPr lang="en-US" sz="900" dirty="0"/>
+              <a:t>GA4: 광고 유입을 광고/검색어/광고그룹으로, 입구 구분(출원/분쟁/간편), 폼 시작·제출·완료 이벤트</a:t>
+            </a:r>
+            <a:endParaRPr lang="en-US" sz="800" dirty="0"/>
           </a:p>
           <a:p>
             <a:pPr marL="127000" indent="-127000">
@@ -10195,7 +9309,7 @@
               <a:buChar char="•"/>
             </a:pPr>
             <a:r>
-              <a:rPr lang="en-US" sz="900" dirty="0">
+              <a:rPr lang="en-US" sz="800" dirty="0">
                 <a:solidFill>
                   <a:srgbClr val="0B0B0B"/>
                 </a:solidFill>
@@ -10203,9 +9317,9 @@
                 <a:ea typeface="Malgun Gothic" pitchFamily="34" charset="-122"/>
                 <a:cs typeface="Malgun Gothic" pitchFamily="34" charset="-120"/>
               </a:rPr>
-              <a:t>서버 통계: 봇 제거는 추정, 경로는 추이, 2025년 이후 신뢰 낮음 · 2021년 원인: 다음 중단만 확인, 블로그·검색은 추정</a:t>
-            </a:r>
-            <a:endParaRPr lang="en-US" sz="900" dirty="0"/>
+              <a:t>신청 글에 유입 경로·검색어 저장(DB 미확인), 첫 화면 검색어를 신청 페이지로 넘김</a:t>
+            </a:r>
+            <a:endParaRPr lang="en-US" sz="800" dirty="0"/>
           </a:p>
           <a:p>
             <a:pPr marL="127000" indent="-127000">
@@ -10216,7 +9330,7 @@
               <a:buChar char="•"/>
             </a:pPr>
             <a:r>
-              <a:rPr lang="en-US" sz="900" dirty="0">
+              <a:rPr lang="en-US" sz="800" dirty="0">
                 <a:solidFill>
                   <a:srgbClr val="0B0B0B"/>
                 </a:solidFill>
@@ -10224,22 +9338,209 @@
                 <a:ea typeface="Malgun Gothic" pitchFamily="34" charset="-122"/>
                 <a:cs typeface="Malgun Gothic" pitchFamily="34" charset="-120"/>
               </a:rPr>
-              <a:t>수임 전환율 데이터 없음 · 수임률·수수료는 기억에 의한 대략의 값</a:t>
-            </a:r>
-            <a:endParaRPr lang="en-US" sz="900" dirty="0"/>
+              <a:t>Clarity 녹화. 옛 UA 코드 제거, 작업자 IP 차단</a:t>
+            </a:r>
+            <a:endParaRPr lang="en-US" sz="800" dirty="0"/>
+          </a:p>
+          <a:p>
+            <a:pPr marL="127000" indent="-127000">
+              <a:spcAft>
+                <a:spcPts val="300"/>
+              </a:spcAft>
+              <a:buSzPct val="100000"/>
+              <a:buChar char="•"/>
+            </a:pPr>
+            <a:r>
+              <a:rPr lang="en-US" sz="800" dirty="0">
+                <a:solidFill>
+                  <a:srgbClr val="0B0B0B"/>
+                </a:solidFill>
+                <a:latin typeface="Malgun Gothic" pitchFamily="34" charset="0"/>
+                <a:ea typeface="Malgun Gothic" pitchFamily="34" charset="-122"/>
+                <a:cs typeface="Malgun Gothic" pitchFamily="34" charset="-120"/>
+              </a:rPr>
+              <a:t>네이버 전환 추적: 서비스 신청함, 승인 뒤 설치</a:t>
+            </a:r>
+            <a:endParaRPr lang="en-US" sz="800" dirty="0"/>
           </a:p>
         </p:txBody>
       </p:sp>
       <p:sp>
         <p:nvSpPr>
-          <p:cNvPr id="8" name="Shape 5"/>
+          <p:cNvPr id="8" name="Text 5"/>
+          <p:cNvSpPr txBox="1"/>
+          <p:nvPr/>
+        </p:nvSpPr>
+        <p:spPr>
+          <a:xfrm>
+            <a:off x="4709160" y="2542032"/>
+            <a:ext cx="4023360" cy="219456"/>
+          </a:xfrm>
+          <a:prstGeom prst="rect">
+            <a:avLst/>
+          </a:prstGeom>
+          <a:noFill/>
+          <a:ln/>
+        </p:spPr>
+        <p:txBody>
+          <a:bodyPr wrap="square" lIns="0" tIns="0" rIns="0" bIns="0" rtlCol="0" anchor="ctr"/>
+          <a:lstStyle/>
+          <a:p>
+            <a:pPr indent="0" marL="0">
+              <a:buNone/>
+            </a:pPr>
+            <a:r>
+              <a:rPr lang="en-US" sz="950" b="1" dirty="0">
+                <a:solidFill>
+                  <a:srgbClr val="52514E"/>
+                </a:solidFill>
+                <a:latin typeface="Malgun Gothic" pitchFamily="34" charset="0"/>
+                <a:ea typeface="Malgun Gothic" pitchFamily="34" charset="-122"/>
+                <a:cs typeface="Malgun Gothic" pitchFamily="34" charset="-120"/>
+              </a:rPr>
+              <a:t>한계 (5-2)</a:t>
+            </a:r>
+            <a:endParaRPr lang="en-US" sz="950" dirty="0"/>
+          </a:p>
+        </p:txBody>
+      </p:sp>
+      <p:sp>
+        <p:nvSpPr>
+          <p:cNvPr id="9" name="Text 6"/>
+          <p:cNvSpPr txBox="1"/>
+          <p:nvPr/>
+        </p:nvSpPr>
+        <p:spPr>
+          <a:xfrm>
+            <a:off x="4709160" y="2761488"/>
+            <a:ext cx="4023360" cy="1188720"/>
+          </a:xfrm>
+          <a:prstGeom prst="rect">
+            <a:avLst/>
+          </a:prstGeom>
+          <a:noFill/>
+          <a:ln/>
+        </p:spPr>
+        <p:txBody>
+          <a:bodyPr wrap="square" lIns="0" tIns="0" rIns="0" bIns="0" rtlCol="0" anchor="t"/>
+          <a:lstStyle/>
+          <a:p>
+            <a:pPr marL="127000" indent="-127000">
+              <a:spcAft>
+                <a:spcPts val="300"/>
+              </a:spcAft>
+              <a:buSzPct val="100000"/>
+              <a:buChar char="•"/>
+            </a:pPr>
+            <a:r>
+              <a:rPr lang="en-US" sz="800" dirty="0">
+                <a:solidFill>
+                  <a:srgbClr val="0B0B0B"/>
+                </a:solidFill>
+                <a:latin typeface="Malgun Gothic" pitchFamily="34" charset="0"/>
+                <a:ea typeface="Malgun Gothic" pitchFamily="34" charset="-122"/>
+                <a:cs typeface="Malgun Gothic" pitchFamily="34" charset="-120"/>
+              </a:rPr>
+              <a:t>표본: 광고 90일 신청 15건, 광고 유입 120건 · 기간: 광고 90일, GA4 1개월</a:t>
+            </a:r>
+            <a:endParaRPr lang="en-US" sz="800" dirty="0"/>
+          </a:p>
+          <a:p>
+            <a:pPr marL="127000" indent="-127000">
+              <a:spcAft>
+                <a:spcPts val="300"/>
+              </a:spcAft>
+              <a:buSzPct val="100000"/>
+              <a:buChar char="•"/>
+            </a:pPr>
+            <a:r>
+              <a:rPr lang="en-US" sz="800" dirty="0">
+                <a:solidFill>
+                  <a:srgbClr val="0B0B0B"/>
+                </a:solidFill>
+                <a:latin typeface="Malgun Gothic" pitchFamily="34" charset="0"/>
+                <a:ea typeface="Malgun Gothic" pitchFamily="34" charset="-122"/>
+                <a:cs typeface="Malgun Gothic" pitchFamily="34" charset="-120"/>
+              </a:rPr>
+              <a:t>서버 통계: 봇 제거는 추정, 경로는 추이, 2025년 이후 신뢰 낮음</a:t>
+            </a:r>
+            <a:endParaRPr lang="en-US" sz="800" dirty="0"/>
+          </a:p>
+          <a:p>
+            <a:pPr marL="127000" indent="-127000">
+              <a:spcAft>
+                <a:spcPts val="300"/>
+              </a:spcAft>
+              <a:buSzPct val="100000"/>
+              <a:buChar char="•"/>
+            </a:pPr>
+            <a:r>
+              <a:rPr lang="en-US" sz="800" dirty="0">
+                <a:solidFill>
+                  <a:srgbClr val="0B0B0B"/>
+                </a:solidFill>
+                <a:latin typeface="Malgun Gothic" pitchFamily="34" charset="0"/>
+                <a:ea typeface="Malgun Gothic" pitchFamily="34" charset="-122"/>
+                <a:cs typeface="Malgun Gothic" pitchFamily="34" charset="-120"/>
+              </a:rPr>
+              <a:t>2021년 원인: 다음 중단만 확인, 블로그·네이버 검색은 추정</a:t>
+            </a:r>
+            <a:endParaRPr lang="en-US" sz="800" dirty="0"/>
+          </a:p>
+          <a:p>
+            <a:pPr marL="127000" indent="-127000">
+              <a:spcAft>
+                <a:spcPts val="300"/>
+              </a:spcAft>
+              <a:buSzPct val="100000"/>
+              <a:buChar char="•"/>
+            </a:pPr>
+            <a:r>
+              <a:rPr lang="en-US" sz="800" dirty="0">
+                <a:solidFill>
+                  <a:srgbClr val="0B0B0B"/>
+                </a:solidFill>
+                <a:latin typeface="Malgun Gothic" pitchFamily="34" charset="0"/>
+                <a:ea typeface="Malgun Gothic" pitchFamily="34" charset="-122"/>
+                <a:cs typeface="Malgun Gothic" pitchFamily="34" charset="-120"/>
+              </a:rPr>
+              <a:t>수임 전환율 데이터 없음 · 변리사 답은 기억에 의한 값 · 구글 미검토</a:t>
+            </a:r>
+            <a:endParaRPr lang="en-US" sz="800" dirty="0"/>
+          </a:p>
+          <a:p>
+            <a:pPr marL="127000" indent="-127000">
+              <a:spcAft>
+                <a:spcPts val="300"/>
+              </a:spcAft>
+              <a:buSzPct val="100000"/>
+              <a:buChar char="•"/>
+            </a:pPr>
+            <a:r>
+              <a:rPr lang="en-US" sz="800" dirty="0">
+                <a:solidFill>
+                  <a:srgbClr val="52514E"/>
+                </a:solidFill>
+                <a:latin typeface="Malgun Gothic" pitchFamily="34" charset="0"/>
+                <a:ea typeface="Malgun Gothic" pitchFamily="34" charset="-122"/>
+                <a:cs typeface="Malgun Gothic" pitchFamily="34" charset="-120"/>
+              </a:rPr>
+              <a:t>검정: 포괄 vs 구체적 클릭률·지역명·주말 신청은 우연일 확률 0.1% 미만(피셔·z). 신청 18→15는 73%(이항), 유형별 체류 6~22%(피셔)</a:t>
+            </a:r>
+            <a:endParaRPr lang="en-US" sz="800" dirty="0"/>
+          </a:p>
+        </p:txBody>
+      </p:sp>
+      <p:sp>
+        <p:nvSpPr>
+          <p:cNvPr id="10" name="Shape 7"/>
           <p:cNvSpPr/>
           <p:nvPr/>
         </p:nvSpPr>
         <p:spPr>
           <a:xfrm>
-            <a:off x="411480" y="4114800"/>
-            <a:ext cx="8321040" cy="292608"/>
+            <a:off x="411480" y="4023360"/>
+            <a:ext cx="8321040" cy="274320"/>
           </a:xfrm>
           <a:prstGeom prst="rect">
             <a:avLst/>
@@ -10257,14 +9558,14 @@
       </p:sp>
       <p:sp>
         <p:nvSpPr>
-          <p:cNvPr id="9" name="Text 6"/>
+          <p:cNvPr id="11" name="Text 8"/>
           <p:cNvSpPr txBox="1"/>
           <p:nvPr/>
         </p:nvSpPr>
         <p:spPr>
           <a:xfrm>
-            <a:off x="521208" y="4114800"/>
-            <a:ext cx="8101584" cy="292608"/>
+            <a:off x="521208" y="4023360"/>
+            <a:ext cx="8101584" cy="274320"/>
           </a:xfrm>
           <a:prstGeom prst="rect">
             <a:avLst/>
@@ -10280,7 +9581,7 @@
               <a:buNone/>
             </a:pPr>
             <a:r>
-              <a:rPr lang="en-US" sz="1000" b="1" dirty="0">
+              <a:rPr lang="en-US" sz="950" b="1" dirty="0">
                 <a:solidFill>
                   <a:srgbClr val="0B0B0B"/>
                 </a:solidFill>
@@ -10294,7 +9595,7 @@
               <a:buNone/>
             </a:pPr>
             <a:r>
-              <a:rPr lang="en-US" sz="1000" dirty="0">
+              <a:rPr lang="en-US" sz="950" dirty="0">
                 <a:solidFill>
                   <a:srgbClr val="0B0B0B"/>
                 </a:solidFill>
@@ -10304,13 +9605,13 @@
               </a:rPr>
               <a:t>변리사가 리포트를 읽고 action item을 반영하겠다고 답함</a:t>
             </a:r>
-            <a:endParaRPr lang="en-US" sz="1000" dirty="0"/>
+            <a:endParaRPr lang="en-US" sz="950" dirty="0"/>
           </a:p>
         </p:txBody>
       </p:sp>
       <p:sp>
         <p:nvSpPr>
-          <p:cNvPr id="10" name="Text 7"/>
+          <p:cNvPr id="12" name="Text 9"/>
           <p:cNvSpPr txBox="1"/>
           <p:nvPr/>
         </p:nvSpPr>

--- a/slides.pptx
+++ b/slides.pptx
@@ -151,7 +151,7 @@
               <a:lstStyle/>
               <a:p>
                 <a:pPr>
-                  <a:defRPr b="0" i="0" strike="noStrike" sz="800" u="none">
+                  <a:defRPr b="0" i="0" strike="noStrike" sz="650" u="none">
                     <a:solidFill>
                       <a:srgbClr val="0B0B0B"/>
                     </a:solidFill>
@@ -288,7 +288,7 @@
               <a:lstStyle/>
               <a:p>
                 <a:pPr>
-                  <a:defRPr b="0" i="0" strike="noStrike" sz="800" u="none">
+                  <a:defRPr b="0" i="0" strike="noStrike" sz="650" u="none">
                     <a:solidFill>
                       <a:srgbClr val="0B0B0B"/>
                     </a:solidFill>
@@ -404,7 +404,7 @@
             <a:lstStyle/>
             <a:p>
               <a:pPr>
-                <a:defRPr b="0" i="0" strike="noStrike" sz="800" u="none">
+                <a:defRPr b="0" i="0" strike="noStrike" sz="650" u="none">
                   <a:solidFill>
                     <a:srgbClr val="0B0B0B"/>
                   </a:solidFill>
@@ -450,7 +450,7 @@
           <a:lstStyle/>
           <a:p>
             <a:pPr>
-              <a:defRPr sz="750" b="0" i="0" u="none" strike="noStrike">
+              <a:defRPr sz="700" b="0" i="0" u="none" strike="noStrike">
                 <a:solidFill>
                   <a:srgbClr val="52514E"/>
                 </a:solidFill>
@@ -579,7 +579,7 @@
               <a:lstStyle/>
               <a:p>
                 <a:pPr>
-                  <a:defRPr b="0" i="0" strike="noStrike" sz="700" u="none">
+                  <a:defRPr b="0" i="0" strike="noStrike" sz="650" u="none">
                     <a:solidFill>
                       <a:srgbClr val="0B0B0B"/>
                     </a:solidFill>
@@ -686,7 +686,7 @@
               <a:lstStyle/>
               <a:p>
                 <a:pPr>
-                  <a:defRPr b="0" i="0" strike="noStrike" sz="700" u="none">
+                  <a:defRPr b="0" i="0" strike="noStrike" sz="650" u="none">
                     <a:solidFill>
                       <a:srgbClr val="0B0B0B"/>
                     </a:solidFill>
@@ -772,7 +772,7 @@
             <a:lstStyle/>
             <a:p>
               <a:pPr>
-                <a:defRPr b="0" i="0" strike="noStrike" sz="700" u="none">
+                <a:defRPr b="0" i="0" strike="noStrike" sz="650" u="none">
                   <a:solidFill>
                     <a:srgbClr val="0B0B0B"/>
                   </a:solidFill>
@@ -1585,7 +1585,7 @@
         <a:lstStyle/>
         <a:p>
           <a:pPr>
-            <a:defRPr sz="750">
+            <a:defRPr sz="800">
               <a:solidFill>
                 <a:srgbClr val="0B0B0B"/>
               </a:solidFill>
@@ -3713,8 +3713,8 @@
         </p:nvSpPr>
         <p:spPr>
           <a:xfrm>
-            <a:off x="411480" y="1097280"/>
-            <a:ext cx="4754880" cy="237744"/>
+            <a:off x="411480" y="1078992"/>
+            <a:ext cx="4206240" cy="237744"/>
           </a:xfrm>
           <a:prstGeom prst="rect">
             <a:avLst/>
@@ -3730,7 +3730,7 @@
               <a:buNone/>
             </a:pPr>
             <a:r>
-              <a:rPr lang="en-US" sz="1100" b="1" dirty="0">
+              <a:rPr lang="en-US" sz="1000" b="1" dirty="0">
                 <a:solidFill>
                   <a:srgbClr val="0B0B0B"/>
                 </a:solidFill>
@@ -3740,7 +3740,7 @@
               </a:rPr>
               <a:t>신청은 2020년 308건에서 2022년 72건으로, 2년 만에 4분의 1이 됐다</a:t>
             </a:r>
-            <a:endParaRPr lang="en-US" sz="1100" dirty="0"/>
+            <a:endParaRPr lang="en-US" sz="1000" dirty="0"/>
           </a:p>
         </p:txBody>
       </p:sp>
@@ -3752,8 +3752,8 @@
         </p:nvSpPr>
         <p:spPr>
           <a:xfrm>
-            <a:off x="411480" y="1335024"/>
-            <a:ext cx="4754880" cy="182880"/>
+            <a:off x="411480" y="1316736"/>
+            <a:ext cx="4206240" cy="182880"/>
           </a:xfrm>
           <a:prstGeom prst="rect">
             <a:avLst/>
@@ -3790,8 +3790,8 @@
           <p:nvPr/>
         </p:nvGraphicFramePr>
         <p:xfrm>
-          <a:off x="338328" y="1554480"/>
-          <a:ext cx="4892040" cy="2834640"/>
+          <a:off x="338328" y="1499616"/>
+          <a:ext cx="4297680" cy="1325880"/>
         </p:xfrm>
         <a:graphic xmlns:a="http://schemas.openxmlformats.org/drawingml/2006/main">
           <a:graphicData uri="http://schemas.openxmlformats.org/drawingml/2006/chart">
@@ -3807,8 +3807,8 @@
         </p:nvSpPr>
         <p:spPr>
           <a:xfrm>
-            <a:off x="5440680" y="1097280"/>
-            <a:ext cx="3291840" cy="219456"/>
+            <a:off x="411480" y="2871216"/>
+            <a:ext cx="4206240" cy="237744"/>
           </a:xfrm>
           <a:prstGeom prst="rect">
             <a:avLst/>
@@ -3824,17 +3824,17 @@
               <a:buNone/>
             </a:pPr>
             <a:r>
-              <a:rPr lang="en-US" sz="950" b="1" dirty="0">
-                <a:solidFill>
-                  <a:srgbClr val="52514E"/>
-                </a:solidFill>
-                <a:latin typeface="Malgun Gothic" pitchFamily="34" charset="0"/>
-                <a:ea typeface="Malgun Gothic" pitchFamily="34" charset="-122"/>
-                <a:cs typeface="Malgun Gothic" pitchFamily="34" charset="-120"/>
-              </a:rPr>
-              <a:t>문제</a:t>
-            </a:r>
-            <a:endParaRPr lang="en-US" sz="950" dirty="0"/>
+              <a:rPr lang="en-US" sz="1000" b="1" dirty="0">
+                <a:solidFill>
+                  <a:srgbClr val="0B0B0B"/>
+                </a:solidFill>
+                <a:latin typeface="Malgun Gothic" pitchFamily="34" charset="0"/>
+                <a:ea typeface="Malgun Gothic" pitchFamily="34" charset="-122"/>
+                <a:cs typeface="Malgun Gothic" pitchFamily="34" charset="-120"/>
+              </a:rPr>
+              <a:t>방문도 같은 기간에 절반: 6,648(2020) → 3,397(2022)</a:t>
+            </a:r>
+            <a:endParaRPr lang="en-US" sz="1000" dirty="0"/>
           </a:p>
         </p:txBody>
       </p:sp>
@@ -3846,8 +3846,102 @@
         </p:nvSpPr>
         <p:spPr>
           <a:xfrm>
-            <a:off x="5440680" y="1335024"/>
-            <a:ext cx="3291840" cy="548640"/>
+            <a:off x="411480" y="3108960"/>
+            <a:ext cx="4206240" cy="182880"/>
+          </a:xfrm>
+          <a:prstGeom prst="rect">
+            <a:avLst/>
+          </a:prstGeom>
+          <a:noFill/>
+          <a:ln/>
+        </p:spPr>
+        <p:txBody>
+          <a:bodyPr wrap="square" lIns="0" tIns="0" rIns="0" bIns="0" rtlCol="0" anchor="ctr"/>
+          <a:lstStyle/>
+          <a:p>
+            <a:pPr indent="0" marL="0">
+              <a:buNone/>
+            </a:pPr>
+            <a:r>
+              <a:rPr lang="en-US" sz="800" dirty="0">
+                <a:solidFill>
+                  <a:srgbClr val="52514E"/>
+                </a:solidFill>
+                <a:latin typeface="Malgun Gothic" pitchFamily="34" charset="0"/>
+                <a:ea typeface="Malgun Gothic" pitchFamily="34" charset="-122"/>
+                <a:cs typeface="Malgun Gothic" pitchFamily="34" charset="-120"/>
+              </a:rPr>
+              <a:t>봇을 뺀 실제 방문 추정, 명 · 봇 = OS가 Robot·Linux인 방문. 2016·17·19년은 OS 자료 없음</a:t>
+            </a:r>
+            <a:endParaRPr lang="en-US" sz="800" dirty="0"/>
+          </a:p>
+        </p:txBody>
+      </p:sp>
+      <p:graphicFrame>
+        <p:nvGraphicFramePr>
+          <p:cNvPr id="10" name="Chart 1" descr=""/>
+          <p:cNvGraphicFramePr/>
+          <p:nvPr/>
+        </p:nvGraphicFramePr>
+        <p:xfrm>
+          <a:off x="338328" y="3291840"/>
+          <a:ext cx="4297680" cy="1115568"/>
+        </p:xfrm>
+        <a:graphic xmlns:a="http://schemas.openxmlformats.org/drawingml/2006/main">
+          <a:graphicData uri="http://schemas.openxmlformats.org/drawingml/2006/chart">
+            <c:chart xmlns:c="http://schemas.openxmlformats.org/drawingml/2006/chart" r:id="rId2"/>
+          </a:graphicData>
+        </a:graphic>
+      </p:graphicFrame>
+      <p:sp>
+        <p:nvSpPr>
+          <p:cNvPr id="11" name="Text 7"/>
+          <p:cNvSpPr txBox="1"/>
+          <p:nvPr/>
+        </p:nvSpPr>
+        <p:spPr>
+          <a:xfrm>
+            <a:off x="4937760" y="1097280"/>
+            <a:ext cx="3794760" cy="219456"/>
+          </a:xfrm>
+          <a:prstGeom prst="rect">
+            <a:avLst/>
+          </a:prstGeom>
+          <a:noFill/>
+          <a:ln/>
+        </p:spPr>
+        <p:txBody>
+          <a:bodyPr wrap="square" lIns="0" tIns="0" rIns="0" bIns="0" rtlCol="0" anchor="ctr"/>
+          <a:lstStyle/>
+          <a:p>
+            <a:pPr indent="0" marL="0">
+              <a:buNone/>
+            </a:pPr>
+            <a:r>
+              <a:rPr lang="en-US" sz="950" b="1" dirty="0">
+                <a:solidFill>
+                  <a:srgbClr val="52514E"/>
+                </a:solidFill>
+                <a:latin typeface="Malgun Gothic" pitchFamily="34" charset="0"/>
+                <a:ea typeface="Malgun Gothic" pitchFamily="34" charset="-122"/>
+                <a:cs typeface="Malgun Gothic" pitchFamily="34" charset="-120"/>
+              </a:rPr>
+              <a:t>문제</a:t>
+            </a:r>
+            <a:endParaRPr lang="en-US" sz="950" dirty="0"/>
+          </a:p>
+        </p:txBody>
+      </p:sp>
+      <p:sp>
+        <p:nvSpPr>
+          <p:cNvPr id="12" name="Text 8"/>
+          <p:cNvSpPr txBox="1"/>
+          <p:nvPr/>
+        </p:nvSpPr>
+        <p:spPr>
+          <a:xfrm>
+            <a:off x="4937760" y="1335024"/>
+            <a:ext cx="3794760" cy="548640"/>
           </a:xfrm>
           <a:prstGeom prst="rect">
             <a:avLst/>
@@ -3902,14 +3996,14 @@
       </p:sp>
       <p:sp>
         <p:nvSpPr>
-          <p:cNvPr id="10" name="Text 7"/>
+          <p:cNvPr id="13" name="Text 9"/>
           <p:cNvSpPr txBox="1"/>
           <p:nvPr/>
         </p:nvSpPr>
         <p:spPr>
           <a:xfrm>
-            <a:off x="5440680" y="1938528"/>
-            <a:ext cx="3291840" cy="219456"/>
+            <a:off x="4937760" y="1938528"/>
+            <a:ext cx="3794760" cy="219456"/>
           </a:xfrm>
           <a:prstGeom prst="rect">
             <a:avLst/>
@@ -3941,14 +4035,14 @@
       </p:sp>
       <p:sp>
         <p:nvSpPr>
-          <p:cNvPr id="11" name="Text 8"/>
+          <p:cNvPr id="14" name="Text 10"/>
           <p:cNvSpPr txBox="1"/>
           <p:nvPr/>
         </p:nvSpPr>
         <p:spPr>
           <a:xfrm>
-            <a:off x="5440680" y="2157984"/>
-            <a:ext cx="3291840" cy="292608"/>
+            <a:off x="4937760" y="2157984"/>
+            <a:ext cx="3794760" cy="292608"/>
           </a:xfrm>
           <a:prstGeom prst="rect">
             <a:avLst/>
@@ -4022,14 +4116,14 @@
       </p:sp>
       <p:sp>
         <p:nvSpPr>
-          <p:cNvPr id="12" name="Text 9"/>
+          <p:cNvPr id="15" name="Text 11"/>
           <p:cNvSpPr txBox="1"/>
           <p:nvPr/>
         </p:nvSpPr>
         <p:spPr>
           <a:xfrm>
-            <a:off x="5440680" y="2487168"/>
-            <a:ext cx="3291840" cy="777240"/>
+            <a:off x="4937760" y="2487168"/>
+            <a:ext cx="3794760" cy="777240"/>
           </a:xfrm>
           <a:prstGeom prst="rect">
             <a:avLst/>
@@ -4086,14 +4180,14 @@
       </p:sp>
       <p:sp>
         <p:nvSpPr>
-          <p:cNvPr id="13" name="Text 10"/>
+          <p:cNvPr id="16" name="Text 12"/>
           <p:cNvSpPr txBox="1"/>
           <p:nvPr/>
         </p:nvSpPr>
         <p:spPr>
           <a:xfrm>
-            <a:off x="5440680" y="3291840"/>
-            <a:ext cx="3291840" cy="219456"/>
+            <a:off x="4937760" y="3291840"/>
+            <a:ext cx="3794760" cy="219456"/>
           </a:xfrm>
           <a:prstGeom prst="rect">
             <a:avLst/>
@@ -4125,14 +4219,14 @@
       </p:sp>
       <p:sp>
         <p:nvSpPr>
-          <p:cNvPr id="14" name="Text 11"/>
+          <p:cNvPr id="17" name="Text 13"/>
           <p:cNvSpPr txBox="1"/>
           <p:nvPr/>
         </p:nvSpPr>
         <p:spPr>
           <a:xfrm>
-            <a:off x="5440680" y="3511296"/>
-            <a:ext cx="3291840" cy="868680"/>
+            <a:off x="4937760" y="3511296"/>
+            <a:ext cx="3794760" cy="868680"/>
           </a:xfrm>
           <a:prstGeom prst="rect">
             <a:avLst/>
@@ -4210,7 +4304,7 @@
       </p:sp>
       <p:sp>
         <p:nvSpPr>
-          <p:cNvPr id="15" name="Shape 12"/>
+          <p:cNvPr id="18" name="Shape 14"/>
           <p:cNvSpPr/>
           <p:nvPr/>
         </p:nvSpPr>
@@ -4233,7 +4327,7 @@
       </p:sp>
       <p:sp>
         <p:nvSpPr>
-          <p:cNvPr id="16" name="Text 13"/>
+          <p:cNvPr id="19" name="Text 15"/>
           <p:cNvSpPr txBox="1"/>
           <p:nvPr/>
         </p:nvSpPr>
@@ -4267,7 +4361,27 @@
                 <a:ea typeface="Malgun Gothic" pitchFamily="34" charset="-122"/>
                 <a:cs typeface="Malgun Gothic" pitchFamily="34" charset="-120"/>
               </a:rPr>
-              <a:t>출처: 관리자 페이지 문자 전송내역 2014-11 ~ 2026-10-05, 2,895건 → 스팸 254건 제외 2,641건. 236건 분해는 셰이플리(떼는 순서에 따라 36~71%라 평균)</a:t>
+              <a:t>출처: 관리자 페이지 문자 전송내역 2014-11 ~ 2026-10-05, 2,895건 → 스팸 254건 제외 2,641건. 접속자통계 연도별·OS별 방문자(같은 IP는 하루 1회). 236건 분해는 셰이플리(순서에 따라 36~71%라 평균)</a:t>
+            </a:r>
+            <a:endParaRPr lang="en-US" sz="800" dirty="0"/>
+          </a:p>
+          <a:p>
+            <a:pPr indent="0" marL="0">
+              <a:spcAft>
+                <a:spcPts val="100"/>
+              </a:spcAft>
+              <a:buNone/>
+            </a:pPr>
+            <a:r>
+              <a:rPr lang="en-US" sz="800" dirty="0">
+                <a:solidFill>
+                  <a:srgbClr val="52514E"/>
+                </a:solidFill>
+                <a:latin typeface="Malgun Gothic" pitchFamily="34" charset="0"/>
+                <a:ea typeface="Malgun Gothic" pitchFamily="34" charset="-122"/>
+                <a:cs typeface="Malgun Gothic" pitchFamily="34" charset="-120"/>
+              </a:rPr>
+              <a:t>봇 근거: 2021-10부터 방문이 월 900 → 2,100인데 신청은 12 → 5, 급증분은 전부 경로 없는 "직접". 2025년 이후는 신뢰 낮음</a:t>
             </a:r>
             <a:endParaRPr lang="en-US" sz="800" dirty="0"/>
           </a:p>
@@ -4414,7 +4528,7 @@
         <p:spPr>
           <a:xfrm>
             <a:off x="411480" y="658368"/>
-            <a:ext cx="2514600" cy="237744"/>
+            <a:ext cx="8321040" cy="237744"/>
           </a:xfrm>
           <a:prstGeom prst="rect">
             <a:avLst/>
@@ -4430,7 +4544,7 @@
               <a:buNone/>
             </a:pPr>
             <a:r>
-              <a:rPr lang="en-US" sz="1050" b="1" dirty="0">
+              <a:rPr lang="en-US" sz="1100" b="1" dirty="0">
                 <a:solidFill>
                   <a:srgbClr val="0B0B0B"/>
                 </a:solidFill>
@@ -4438,9 +4552,9 @@
                 <a:ea typeface="Malgun Gothic" pitchFamily="34" charset="-122"/>
                 <a:cs typeface="Malgun Gothic" pitchFamily="34" charset="-120"/>
               </a:rPr>
-              <a:t>방문은 2020→2022년에 절반</a:t>
-            </a:r>
-            <a:endParaRPr lang="en-US" sz="1050" dirty="0"/>
+              <a:t>끊긴 것은 다음·블로그·네이버 검색이다. 광고는 가장 덜 줄었다</a:t>
+            </a:r>
+            <a:endParaRPr lang="en-US" sz="1100" dirty="0"/>
           </a:p>
         </p:txBody>
       </p:sp>
@@ -4453,7 +4567,7 @@
         <p:spPr>
           <a:xfrm>
             <a:off x="411480" y="896112"/>
-            <a:ext cx="2514600" cy="182880"/>
+            <a:ext cx="8321040" cy="182880"/>
           </a:xfrm>
           <a:prstGeom prst="rect">
             <a:avLst/>
@@ -4477,201 +4591,22 @@
                 <a:ea typeface="Malgun Gothic" pitchFamily="34" charset="-122"/>
                 <a:cs typeface="Malgun Gothic" pitchFamily="34" charset="-120"/>
               </a:rPr>
-              <a:t>봇을 뺀 실제 방문 추정, 명</a:t>
+              <a:t>경로별 연간 방문 (서버 기록, "직접" 제외. 출처를 놓치는 경우가 많아 추이로만 봄)</a:t>
             </a:r>
             <a:endParaRPr lang="en-US" sz="800" dirty="0"/>
           </a:p>
         </p:txBody>
       </p:sp>
-      <p:graphicFrame>
-        <p:nvGraphicFramePr>
-          <p:cNvPr id="5" name="Chart 0" descr=""/>
-          <p:cNvGraphicFramePr/>
-          <p:nvPr/>
-        </p:nvGraphicFramePr>
-        <p:xfrm>
-          <a:off x="338328" y="1097280"/>
-          <a:ext cx="2606040" cy="1965960"/>
-        </p:xfrm>
-        <a:graphic xmlns:a="http://schemas.openxmlformats.org/drawingml/2006/main">
-          <a:graphicData uri="http://schemas.openxmlformats.org/drawingml/2006/chart">
-            <c:chart xmlns:c="http://schemas.openxmlformats.org/drawingml/2006/chart" r:id="rId1"/>
-          </a:graphicData>
-        </a:graphic>
-      </p:graphicFrame>
-      <p:sp>
-        <p:nvSpPr>
-          <p:cNvPr id="6" name="Text 3"/>
-          <p:cNvSpPr txBox="1"/>
-          <p:nvPr/>
-        </p:nvSpPr>
-        <p:spPr>
-          <a:xfrm>
-            <a:off x="411480" y="3072384"/>
-            <a:ext cx="2514600" cy="365760"/>
-          </a:xfrm>
-          <a:prstGeom prst="rect">
-            <a:avLst/>
-          </a:prstGeom>
-          <a:noFill/>
-          <a:ln/>
-        </p:spPr>
-        <p:txBody>
-          <a:bodyPr wrap="square" lIns="0" tIns="0" rIns="0" bIns="0" rtlCol="0" anchor="t"/>
-          <a:lstStyle/>
-          <a:p>
-            <a:pPr indent="0" marL="0">
-              <a:spcAft>
-                <a:spcPts val="300"/>
-              </a:spcAft>
-              <a:buNone/>
-            </a:pPr>
-            <a:r>
-              <a:rPr lang="en-US" sz="750" b="1" dirty="0">
-                <a:solidFill>
-                  <a:srgbClr val="0B0B0B"/>
-                </a:solidFill>
-                <a:latin typeface="Malgun Gothic" pitchFamily="34" charset="0"/>
-                <a:ea typeface="Malgun Gothic" pitchFamily="34" charset="-122"/>
-                <a:cs typeface="Malgun Gothic" pitchFamily="34" charset="-120"/>
-              </a:rPr>
-              <a:t>봇 추정 = OS가 Robot·Linux인 방문을 뺌</a:t>
-            </a:r>
-            <a:endParaRPr lang="en-US" sz="750" dirty="0"/>
-          </a:p>
-          <a:p>
-            <a:pPr indent="0" marL="0">
-              <a:spcAft>
-                <a:spcPts val="300"/>
-              </a:spcAft>
-              <a:buNone/>
-            </a:pPr>
-            <a:r>
-              <a:rPr lang="en-US" sz="750" dirty="0">
-                <a:solidFill>
-                  <a:srgbClr val="0B0B0B"/>
-                </a:solidFill>
-                <a:latin typeface="Malgun Gothic" pitchFamily="34" charset="0"/>
-                <a:ea typeface="Malgun Gothic" pitchFamily="34" charset="-122"/>
-                <a:cs typeface="Malgun Gothic" pitchFamily="34" charset="-120"/>
-              </a:rPr>
-              <a:t>근거: 2021-10부터 방문이 월 900 → 2,100인데 신청은 12 → 5, 급증분은 전부 경로 없는 "직접"</a:t>
-            </a:r>
-            <a:endParaRPr lang="en-US" sz="750" dirty="0"/>
-          </a:p>
-        </p:txBody>
-      </p:sp>
-      <p:sp>
-        <p:nvSpPr>
-          <p:cNvPr id="7" name="Shape 4"/>
+      <p:sp>
+        <p:nvSpPr>
+          <p:cNvPr id="5" name="Shape 3"/>
           <p:cNvSpPr/>
           <p:nvPr/>
         </p:nvSpPr>
         <p:spPr>
           <a:xfrm>
-            <a:off x="3063240" y="685800"/>
-            <a:ext cx="0" cy="2743200"/>
-          </a:xfrm>
-          <a:prstGeom prst="line">
-            <a:avLst/>
-          </a:prstGeom>
-          <a:noFill/>
-          <a:ln w="12700">
-            <a:solidFill>
-              <a:srgbClr val="DFE3E2"/>
-            </a:solidFill>
-            <a:prstDash val="solid"/>
-          </a:ln>
-        </p:spPr>
-      </p:sp>
-      <p:sp>
-        <p:nvSpPr>
-          <p:cNvPr id="8" name="Text 5"/>
-          <p:cNvSpPr txBox="1"/>
-          <p:nvPr/>
-        </p:nvSpPr>
-        <p:spPr>
-          <a:xfrm>
-            <a:off x="3200400" y="658368"/>
-            <a:ext cx="5532120" cy="237744"/>
-          </a:xfrm>
-          <a:prstGeom prst="rect">
-            <a:avLst/>
-          </a:prstGeom>
-          <a:noFill/>
-          <a:ln/>
-        </p:spPr>
-        <p:txBody>
-          <a:bodyPr wrap="square" lIns="0" tIns="0" rIns="0" bIns="0" rtlCol="0" anchor="ctr"/>
-          <a:lstStyle/>
-          <a:p>
-            <a:pPr indent="0" marL="0">
-              <a:buNone/>
-            </a:pPr>
-            <a:r>
-              <a:rPr lang="en-US" sz="1050" b="1" dirty="0">
-                <a:solidFill>
-                  <a:srgbClr val="0B0B0B"/>
-                </a:solidFill>
-                <a:latin typeface="Malgun Gothic" pitchFamily="34" charset="0"/>
-                <a:ea typeface="Malgun Gothic" pitchFamily="34" charset="-122"/>
-                <a:cs typeface="Malgun Gothic" pitchFamily="34" charset="-120"/>
-              </a:rPr>
-              <a:t>끊긴 것은 다음·블로그·네이버 검색이다. 광고는 가장 덜 줄었다</a:t>
-            </a:r>
-            <a:endParaRPr lang="en-US" sz="1050" dirty="0"/>
-          </a:p>
-        </p:txBody>
-      </p:sp>
-      <p:sp>
-        <p:nvSpPr>
-          <p:cNvPr id="9" name="Text 6"/>
-          <p:cNvSpPr txBox="1"/>
-          <p:nvPr/>
-        </p:nvSpPr>
-        <p:spPr>
-          <a:xfrm>
-            <a:off x="3200400" y="896112"/>
-            <a:ext cx="5532120" cy="182880"/>
-          </a:xfrm>
-          <a:prstGeom prst="rect">
-            <a:avLst/>
-          </a:prstGeom>
-          <a:noFill/>
-          <a:ln/>
-        </p:spPr>
-        <p:txBody>
-          <a:bodyPr wrap="square" lIns="0" tIns="0" rIns="0" bIns="0" rtlCol="0" anchor="ctr"/>
-          <a:lstStyle/>
-          <a:p>
-            <a:pPr indent="0" marL="0">
-              <a:buNone/>
-            </a:pPr>
-            <a:r>
-              <a:rPr lang="en-US" sz="800" dirty="0">
-                <a:solidFill>
-                  <a:srgbClr val="52514E"/>
-                </a:solidFill>
-                <a:latin typeface="Malgun Gothic" pitchFamily="34" charset="0"/>
-                <a:ea typeface="Malgun Gothic" pitchFamily="34" charset="-122"/>
-                <a:cs typeface="Malgun Gothic" pitchFamily="34" charset="-120"/>
-              </a:rPr>
-              <a:t>경로별 연간 방문 (서버 기록, "직접" 제외. 출처를 놓치는 경우가 많아 추이로만 봄)</a:t>
-            </a:r>
-            <a:endParaRPr lang="en-US" sz="800" dirty="0"/>
-          </a:p>
-        </p:txBody>
-      </p:sp>
-      <p:sp>
-        <p:nvSpPr>
-          <p:cNvPr id="10" name="Shape 7"/>
-          <p:cNvSpPr/>
-          <p:nvPr/>
-        </p:nvSpPr>
-        <p:spPr>
-          <a:xfrm>
-            <a:off x="5138928" y="1216152"/>
-            <a:ext cx="896112" cy="1737360"/>
+            <a:off x="3063240" y="1216152"/>
+            <a:ext cx="2148840" cy="1700784"/>
           </a:xfrm>
           <a:prstGeom prst="rect">
             <a:avLst/>
@@ -4689,14 +4624,14 @@
       </p:sp>
       <p:sp>
         <p:nvSpPr>
-          <p:cNvPr id="11" name="Text 8"/>
+          <p:cNvPr id="6" name="Text 4"/>
           <p:cNvSpPr txBox="1"/>
           <p:nvPr/>
         </p:nvSpPr>
         <p:spPr>
           <a:xfrm>
-            <a:off x="5138928" y="1069848"/>
-            <a:ext cx="896112" cy="137160"/>
+            <a:off x="3063240" y="1069848"/>
+            <a:ext cx="2148840" cy="137160"/>
           </a:xfrm>
           <a:prstGeom prst="rect">
             <a:avLst/>
@@ -4728,30 +4663,30 @@
       </p:sp>
       <p:graphicFrame>
         <p:nvGraphicFramePr>
-          <p:cNvPr id="12" name="Chart 1" descr=""/>
+          <p:cNvPr id="7" name="Chart 0" descr=""/>
           <p:cNvGraphicFramePr/>
           <p:nvPr/>
         </p:nvGraphicFramePr>
         <p:xfrm>
-          <a:off x="3108960" y="1097280"/>
-          <a:ext cx="5669280" cy="2103120"/>
+          <a:off x="320040" y="1097280"/>
+          <a:ext cx="8458200" cy="2103120"/>
         </p:xfrm>
         <a:graphic xmlns:a="http://schemas.openxmlformats.org/drawingml/2006/main">
           <a:graphicData uri="http://schemas.openxmlformats.org/drawingml/2006/chart">
-            <c:chart xmlns:c="http://schemas.openxmlformats.org/drawingml/2006/chart" r:id="rId2"/>
+            <c:chart xmlns:c="http://schemas.openxmlformats.org/drawingml/2006/chart" r:id="rId1"/>
           </a:graphicData>
         </a:graphic>
       </p:graphicFrame>
       <p:sp>
         <p:nvSpPr>
-          <p:cNvPr id="13" name="Text 9"/>
+          <p:cNvPr id="8" name="Text 5"/>
           <p:cNvSpPr txBox="1"/>
           <p:nvPr/>
         </p:nvSpPr>
         <p:spPr>
           <a:xfrm>
-            <a:off x="3200400" y="3200400"/>
-            <a:ext cx="5532120" cy="201168"/>
+            <a:off x="411480" y="3200400"/>
+            <a:ext cx="8321040" cy="201168"/>
           </a:xfrm>
           <a:prstGeom prst="rect">
             <a:avLst/>
@@ -4767,7 +4702,7 @@
               <a:buNone/>
             </a:pPr>
             <a:r>
-              <a:rPr lang="en-US" sz="850" b="1" dirty="0">
+              <a:rPr lang="en-US" sz="900" b="1" dirty="0">
                 <a:solidFill>
                   <a:srgbClr val="0B0B0B"/>
                 </a:solidFill>
@@ -4777,13 +4712,13 @@
               </a:rPr>
               <a:t>2020 → 2022:  다음 −99% · 네이버 블로그 −93% · 네이버 검색 −54% · 네이버 광고 −40%  (신청 −77%)</a:t>
             </a:r>
-            <a:endParaRPr lang="en-US" sz="850" dirty="0"/>
+            <a:endParaRPr lang="en-US" sz="900" dirty="0"/>
           </a:p>
         </p:txBody>
       </p:sp>
       <p:sp>
         <p:nvSpPr>
-          <p:cNvPr id="14" name="Shape 10"/>
+          <p:cNvPr id="9" name="Shape 6"/>
           <p:cNvSpPr/>
           <p:nvPr/>
         </p:nvSpPr>
@@ -4808,7 +4743,7 @@
       </p:sp>
       <p:sp>
         <p:nvSpPr>
-          <p:cNvPr id="15" name="Text 11"/>
+          <p:cNvPr id="10" name="Text 7"/>
           <p:cNvSpPr txBox="1"/>
           <p:nvPr/>
         </p:nvSpPr>
@@ -4847,7 +4782,7 @@
       </p:sp>
       <p:sp>
         <p:nvSpPr>
-          <p:cNvPr id="16" name="Text 12"/>
+          <p:cNvPr id="11" name="Text 8"/>
           <p:cNvSpPr txBox="1"/>
           <p:nvPr/>
         </p:nvSpPr>
@@ -4886,7 +4821,7 @@
       </p:sp>
       <p:sp>
         <p:nvSpPr>
-          <p:cNvPr id="17" name="Text 13"/>
+          <p:cNvPr id="12" name="Text 9"/>
           <p:cNvSpPr txBox="1"/>
           <p:nvPr/>
         </p:nvSpPr>
@@ -4925,7 +4860,7 @@
       </p:sp>
       <p:sp>
         <p:nvSpPr>
-          <p:cNvPr id="18" name="Shape 14"/>
+          <p:cNvPr id="13" name="Shape 10"/>
           <p:cNvSpPr/>
           <p:nvPr/>
         </p:nvSpPr>
@@ -4950,7 +4885,7 @@
       </p:sp>
       <p:sp>
         <p:nvSpPr>
-          <p:cNvPr id="19" name="Text 15"/>
+          <p:cNvPr id="14" name="Text 11"/>
           <p:cNvSpPr txBox="1"/>
           <p:nvPr/>
         </p:nvSpPr>
@@ -4989,7 +4924,7 @@
       </p:sp>
       <p:sp>
         <p:nvSpPr>
-          <p:cNvPr id="20" name="Text 16"/>
+          <p:cNvPr id="15" name="Text 12"/>
           <p:cNvSpPr txBox="1"/>
           <p:nvPr/>
         </p:nvSpPr>
@@ -5028,7 +4963,7 @@
       </p:sp>
       <p:sp>
         <p:nvSpPr>
-          <p:cNvPr id="21" name="Text 17"/>
+          <p:cNvPr id="16" name="Text 13"/>
           <p:cNvSpPr txBox="1"/>
           <p:nvPr/>
         </p:nvSpPr>
@@ -5067,7 +5002,7 @@
       </p:sp>
       <p:sp>
         <p:nvSpPr>
-          <p:cNvPr id="22" name="Shape 18"/>
+          <p:cNvPr id="17" name="Shape 14"/>
           <p:cNvSpPr/>
           <p:nvPr/>
         </p:nvSpPr>
@@ -5092,7 +5027,7 @@
       </p:sp>
       <p:sp>
         <p:nvSpPr>
-          <p:cNvPr id="23" name="Text 19"/>
+          <p:cNvPr id="18" name="Text 15"/>
           <p:cNvSpPr txBox="1"/>
           <p:nvPr/>
         </p:nvSpPr>
@@ -5131,7 +5066,7 @@
       </p:sp>
       <p:sp>
         <p:nvSpPr>
-          <p:cNvPr id="24" name="Text 20"/>
+          <p:cNvPr id="19" name="Text 16"/>
           <p:cNvSpPr txBox="1"/>
           <p:nvPr/>
         </p:nvSpPr>
@@ -5170,7 +5105,7 @@
       </p:sp>
       <p:sp>
         <p:nvSpPr>
-          <p:cNvPr id="25" name="Text 21"/>
+          <p:cNvPr id="20" name="Text 17"/>
           <p:cNvSpPr txBox="1"/>
           <p:nvPr/>
         </p:nvSpPr>
@@ -5209,7 +5144,7 @@
       </p:sp>
       <p:sp>
         <p:nvSpPr>
-          <p:cNvPr id="26" name="Shape 22"/>
+          <p:cNvPr id="21" name="Shape 18"/>
           <p:cNvSpPr/>
           <p:nvPr/>
         </p:nvSpPr>
@@ -5234,7 +5169,7 @@
       </p:sp>
       <p:sp>
         <p:nvSpPr>
-          <p:cNvPr id="27" name="Text 23"/>
+          <p:cNvPr id="22" name="Text 19"/>
           <p:cNvSpPr txBox="1"/>
           <p:nvPr/>
         </p:nvSpPr>
@@ -5273,7 +5208,7 @@
       </p:sp>
       <p:sp>
         <p:nvSpPr>
-          <p:cNvPr id="28" name="Text 24"/>
+          <p:cNvPr id="23" name="Text 20"/>
           <p:cNvSpPr txBox="1"/>
           <p:nvPr/>
         </p:nvSpPr>
@@ -5312,7 +5247,7 @@
       </p:sp>
       <p:sp>
         <p:nvSpPr>
-          <p:cNvPr id="29" name="Text 25"/>
+          <p:cNvPr id="24" name="Text 21"/>
           <p:cNvSpPr txBox="1"/>
           <p:nvPr/>
         </p:nvSpPr>
@@ -5351,7 +5286,7 @@
       </p:sp>
       <p:sp>
         <p:nvSpPr>
-          <p:cNvPr id="30" name="Shape 26"/>
+          <p:cNvPr id="25" name="Shape 22"/>
           <p:cNvSpPr/>
           <p:nvPr/>
         </p:nvSpPr>
@@ -5374,7 +5309,7 @@
       </p:sp>
       <p:sp>
         <p:nvSpPr>
-          <p:cNvPr id="31" name="Text 27"/>
+          <p:cNvPr id="26" name="Text 23"/>
           <p:cNvSpPr txBox="1"/>
           <p:nvPr/>
         </p:nvSpPr>
@@ -5408,7 +5343,7 @@
                 <a:ea typeface="Malgun Gothic" pitchFamily="34" charset="-122"/>
                 <a:cs typeface="Malgun Gothic" pitchFamily="34" charset="-120"/>
               </a:rPr>
-              <a:t>출처: 관리자 페이지 접속자통계 — 연도별·OS별 방문자(2015 ~ 2025, 같은 IP는 하루 1회), 유입 도메인별 방문(2016 ~ 2026-10-06). 2016·17·19년은 OS 자료 없음, 2025년 이후 신뢰 낮음</a:t>
+              <a:t>출처: 관리자 페이지 접속자통계 — 유입 도메인별 방문 2016 ~ 2026-10-06</a:t>
             </a:r>
             <a:endParaRPr lang="en-US" sz="800" dirty="0"/>
           </a:p>

--- a/slides.pptx
+++ b/slides.pptx
@@ -3713,7 +3713,7 @@
         </p:nvSpPr>
         <p:spPr>
           <a:xfrm>
-            <a:off x="411480" y="1078992"/>
+            <a:off x="411480" y="1042416"/>
             <a:ext cx="4206240" cy="237744"/>
           </a:xfrm>
           <a:prstGeom prst="rect">
@@ -3752,7 +3752,7 @@
         </p:nvSpPr>
         <p:spPr>
           <a:xfrm>
-            <a:off x="411480" y="1316736"/>
+            <a:off x="411480" y="1280160"/>
             <a:ext cx="4206240" cy="182880"/>
           </a:xfrm>
           <a:prstGeom prst="rect">
@@ -3790,8 +3790,8 @@
           <p:nvPr/>
         </p:nvGraphicFramePr>
         <p:xfrm>
-          <a:off x="338328" y="1499616"/>
-          <a:ext cx="4297680" cy="1325880"/>
+          <a:off x="338328" y="1444752"/>
+          <a:ext cx="4297680" cy="1143000"/>
         </p:xfrm>
         <a:graphic xmlns:a="http://schemas.openxmlformats.org/drawingml/2006/main">
           <a:graphicData uri="http://schemas.openxmlformats.org/drawingml/2006/chart">
@@ -3807,8 +3807,8 @@
         </p:nvSpPr>
         <p:spPr>
           <a:xfrm>
-            <a:off x="411480" y="2871216"/>
-            <a:ext cx="4206240" cy="237744"/>
+            <a:off x="411480" y="2633472"/>
+            <a:ext cx="4206240" cy="365760"/>
           </a:xfrm>
           <a:prstGeom prst="rect">
             <a:avLst/>
@@ -3817,14 +3817,14 @@
           <a:ln/>
         </p:spPr>
         <p:txBody>
-          <a:bodyPr wrap="square" lIns="0" tIns="0" rIns="0" bIns="0" rtlCol="0" anchor="ctr"/>
+          <a:bodyPr wrap="square" lIns="0" tIns="0" rIns="0" bIns="0" rtlCol="0" anchor="t"/>
           <a:lstStyle/>
           <a:p>
             <a:pPr indent="0" marL="0">
               <a:buNone/>
             </a:pPr>
             <a:r>
-              <a:rPr lang="en-US" sz="1000" b="1" dirty="0">
+              <a:rPr lang="en-US" sz="900" b="1" dirty="0">
                 <a:solidFill>
                   <a:srgbClr val="0B0B0B"/>
                 </a:solidFill>
@@ -3832,9 +3832,9 @@
                 <a:ea typeface="Malgun Gothic" pitchFamily="34" charset="-122"/>
                 <a:cs typeface="Malgun Gothic" pitchFamily="34" charset="-120"/>
               </a:rPr>
-              <a:t>방문도 같은 기간에 절반: 6,648(2020) → 3,397(2022)</a:t>
-            </a:r>
-            <a:endParaRPr lang="en-US" sz="1000" dirty="0"/>
+              <a:t>방문자수는 2015년(11,253)부터 꾸준히 감소, 2022년부터 3,000명대 횡보. 신청 급감 구간에 6,648 → 3,397 절반</a:t>
+            </a:r>
+            <a:endParaRPr lang="en-US" sz="900" dirty="0"/>
           </a:p>
         </p:txBody>
       </p:sp>
@@ -3846,8 +3846,8 @@
         </p:nvSpPr>
         <p:spPr>
           <a:xfrm>
-            <a:off x="411480" y="3108960"/>
-            <a:ext cx="4206240" cy="182880"/>
+            <a:off x="411480" y="2999232"/>
+            <a:ext cx="4206240" cy="274320"/>
           </a:xfrm>
           <a:prstGeom prst="rect">
             <a:avLst/>
@@ -3856,14 +3856,14 @@
           <a:ln/>
         </p:spPr>
         <p:txBody>
-          <a:bodyPr wrap="square" lIns="0" tIns="0" rIns="0" bIns="0" rtlCol="0" anchor="ctr"/>
+          <a:bodyPr wrap="square" lIns="0" tIns="0" rIns="0" bIns="0" rtlCol="0" anchor="t"/>
           <a:lstStyle/>
           <a:p>
             <a:pPr indent="0" marL="0">
               <a:buNone/>
             </a:pPr>
             <a:r>
-              <a:rPr lang="en-US" sz="800" dirty="0">
+              <a:rPr lang="en-US" sz="700" dirty="0">
                 <a:solidFill>
                   <a:srgbClr val="52514E"/>
                 </a:solidFill>
@@ -3871,9 +3871,9 @@
                 <a:ea typeface="Malgun Gothic" pitchFamily="34" charset="-122"/>
                 <a:cs typeface="Malgun Gothic" pitchFamily="34" charset="-120"/>
               </a:rPr>
-              <a:t>봇을 뺀 실제 방문 추정, 명 · 봇 = OS가 Robot·Linux인 방문. 2016·17·19년은 OS 자료 없음</a:t>
-            </a:r>
-            <a:endParaRPr lang="en-US" sz="800" dirty="0"/>
+              <a:t>실제 방문 추정 = 전체 − 봇 추정(OS "Robot"·"Linux" 방문). 접속자통계 연도별·OS별 방문자, 같은 IP는 하루 1회</a:t>
+            </a:r>
+            <a:endParaRPr lang="en-US" sz="700" dirty="0"/>
           </a:p>
         </p:txBody>
       </p:sp>
@@ -3884,8 +3884,8 @@
           <p:nvPr/>
         </p:nvGraphicFramePr>
         <p:xfrm>
-          <a:off x="338328" y="3291840"/>
-          <a:ext cx="4297680" cy="1115568"/>
+          <a:off x="338328" y="3255264"/>
+          <a:ext cx="4297680" cy="1152144"/>
         </p:xfrm>
         <a:graphic xmlns:a="http://schemas.openxmlformats.org/drawingml/2006/main">
           <a:graphicData uri="http://schemas.openxmlformats.org/drawingml/2006/chart">
@@ -4333,8 +4333,8 @@
         </p:nvSpPr>
         <p:spPr>
           <a:xfrm>
-            <a:off x="411480" y="4535424"/>
-            <a:ext cx="8046720" cy="384048"/>
+            <a:off x="411480" y="4526280"/>
+            <a:ext cx="8046720" cy="548640"/>
           </a:xfrm>
           <a:prstGeom prst="rect">
             <a:avLst/>
@@ -4347,13 +4347,10 @@
           <a:lstStyle/>
           <a:p>
             <a:pPr indent="0" marL="0">
-              <a:spcAft>
-                <a:spcPts val="100"/>
-              </a:spcAft>
-              <a:buNone/>
-            </a:pPr>
-            <a:r>
-              <a:rPr lang="en-US" sz="800" dirty="0">
+              <a:buNone/>
+            </a:pPr>
+            <a:r>
+              <a:rPr lang="en-US" sz="700" dirty="0">
                 <a:solidFill>
                   <a:srgbClr val="52514E"/>
                 </a:solidFill>
@@ -4363,17 +4360,14 @@
               </a:rPr>
               <a:t>출처: 관리자 페이지 문자 전송내역 2014-11 ~ 2026-10-05, 2,895건 → 스팸 254건 제외 2,641건. 접속자통계 연도별·OS별 방문자(같은 IP는 하루 1회). 236건 분해는 셰이플리(순서에 따라 36~71%라 평균)</a:t>
             </a:r>
-            <a:endParaRPr lang="en-US" sz="800" dirty="0"/>
-          </a:p>
-          <a:p>
-            <a:pPr indent="0" marL="0">
-              <a:spcAft>
-                <a:spcPts val="100"/>
-              </a:spcAft>
-              <a:buNone/>
-            </a:pPr>
-            <a:r>
-              <a:rPr lang="en-US" sz="800" dirty="0">
+            <a:endParaRPr lang="en-US" sz="700" dirty="0"/>
+          </a:p>
+          <a:p>
+            <a:pPr indent="0" marL="0">
+              <a:buNone/>
+            </a:pPr>
+            <a:r>
+              <a:rPr lang="en-US" sz="700" dirty="0">
                 <a:solidFill>
                   <a:srgbClr val="52514E"/>
                 </a:solidFill>
@@ -4381,19 +4375,16 @@
                 <a:ea typeface="Malgun Gothic" pitchFamily="34" charset="-122"/>
                 <a:cs typeface="Malgun Gothic" pitchFamily="34" charset="-120"/>
               </a:rPr>
-              <a:t>봇 근거: 2021-10부터 방문이 월 900 → 2,100인데 신청은 12 → 5, 급증분은 전부 경로 없는 "직접". 2025년 이후는 신뢰 낮음</a:t>
-            </a:r>
-            <a:endParaRPr lang="en-US" sz="800" dirty="0"/>
-          </a:p>
-          <a:p>
-            <a:pPr indent="0" marL="0">
-              <a:spcAft>
-                <a:spcPts val="100"/>
-              </a:spcAft>
-              <a:buNone/>
-            </a:pPr>
-            <a:r>
-              <a:rPr lang="en-US" sz="800" dirty="0">
+              <a:t>봇 추정 근거: 2021-10부터 방문이 월 900 → 2,100인데 신청은 월 12 → 5. 급증분은 전부 유입 경로 없는 "직접", 시간대 0~23시 고름. 2025 신뢰 낮음: Robot 8,848 급증, Chrome도 두 배인데 신청은 그대로 → Chrome인 척하는 자동 접속 추정</a:t>
+            </a:r>
+            <a:endParaRPr lang="en-US" sz="700" dirty="0"/>
+          </a:p>
+          <a:p>
+            <a:pPr indent="0" marL="0">
+              <a:buNone/>
+            </a:pPr>
+            <a:r>
+              <a:rPr lang="en-US" sz="700" dirty="0">
                 <a:solidFill>
                   <a:srgbClr val="52514E"/>
                 </a:solidFill>
@@ -4403,7 +4394,7 @@
               </a:rPr>
               <a:t>손실 = 연 200건 감소 × 수임 10~20% × 수수료 300만 원. 목표 = 방문 3,812(2024) 그대로 두고 신청률만 4.6%로 되돌리면 177건</a:t>
             </a:r>
-            <a:endParaRPr lang="en-US" sz="800" dirty="0"/>
+            <a:endParaRPr lang="en-US" sz="700" dirty="0"/>
           </a:p>
         </p:txBody>
       </p:sp>
@@ -4527,7 +4518,7 @@
         </p:nvSpPr>
         <p:spPr>
           <a:xfrm>
-            <a:off x="411480" y="658368"/>
+            <a:off x="411480" y="640080"/>
             <a:ext cx="8321040" cy="237744"/>
           </a:xfrm>
           <a:prstGeom prst="rect">
@@ -4544,7 +4535,7 @@
               <a:buNone/>
             </a:pPr>
             <a:r>
-              <a:rPr lang="en-US" sz="1100" b="1" dirty="0">
+              <a:rPr lang="en-US" sz="1050" b="1" dirty="0">
                 <a:solidFill>
                   <a:srgbClr val="0B0B0B"/>
                 </a:solidFill>
@@ -4552,9 +4543,9 @@
                 <a:ea typeface="Malgun Gothic" pitchFamily="34" charset="-122"/>
                 <a:cs typeface="Malgun Gothic" pitchFamily="34" charset="-120"/>
               </a:rPr>
-              <a:t>끊긴 것은 다음·블로그·네이버 검색이다. 광고는 가장 덜 줄었다</a:t>
-            </a:r>
-            <a:endParaRPr lang="en-US" sz="1100" dirty="0"/>
+              <a:t>2020→2022년에 끊긴 것은 다음·블로그·네이버 검색. 광고는 가장 덜 감소 → 신청 감소의 원인은 광고가 아님</a:t>
+            </a:r>
+            <a:endParaRPr lang="en-US" sz="1050" dirty="0"/>
           </a:p>
         </p:txBody>
       </p:sp>
@@ -4566,7 +4557,7 @@
         </p:nvSpPr>
         <p:spPr>
           <a:xfrm>
-            <a:off x="411480" y="896112"/>
+            <a:off x="411480" y="877824"/>
             <a:ext cx="8321040" cy="182880"/>
           </a:xfrm>
           <a:prstGeom prst="rect">
@@ -4591,7 +4582,7 @@
                 <a:ea typeface="Malgun Gothic" pitchFamily="34" charset="-122"/>
                 <a:cs typeface="Malgun Gothic" pitchFamily="34" charset="-120"/>
               </a:rPr>
-              <a:t>경로별 연간 방문 (서버 기록, "직접" 제외. 출처를 놓치는 경우가 많아 추이로만 봄)</a:t>
+              <a:t>접속자통계 / 유입 도메인별 방문 8종 / 2016 ~ 2026-10-06 / "직접"(봇 대부분) 제외 / 서버는 유입 경로를 놓치는 경우가 많아 추이로만 봄 (광고 보고서 90일 클릭 388 vs 서버 9달 203)</a:t>
             </a:r>
             <a:endParaRPr lang="en-US" sz="800" dirty="0"/>
           </a:p>
@@ -4605,8 +4596,8 @@
         </p:nvSpPr>
         <p:spPr>
           <a:xfrm>
-            <a:off x="3063240" y="1216152"/>
-            <a:ext cx="2148840" cy="1700784"/>
+            <a:off x="3063240" y="1188720"/>
+            <a:ext cx="2148840" cy="1188720"/>
           </a:xfrm>
           <a:prstGeom prst="rect">
             <a:avLst/>
@@ -4630,8 +4621,8 @@
         </p:nvSpPr>
         <p:spPr>
           <a:xfrm>
-            <a:off x="3063240" y="1069848"/>
-            <a:ext cx="2148840" cy="137160"/>
+            <a:off x="3063240" y="1060704"/>
+            <a:ext cx="2148840" cy="128016"/>
           </a:xfrm>
           <a:prstGeom prst="rect">
             <a:avLst/>
@@ -4668,8 +4659,8 @@
           <p:nvPr/>
         </p:nvGraphicFramePr>
         <p:xfrm>
-          <a:off x="320040" y="1097280"/>
-          <a:ext cx="8458200" cy="2103120"/>
+          <a:off x="320040" y="1078992"/>
+          <a:ext cx="8458200" cy="1572768"/>
         </p:xfrm>
         <a:graphic xmlns:a="http://schemas.openxmlformats.org/drawingml/2006/main">
           <a:graphicData uri="http://schemas.openxmlformats.org/drawingml/2006/chart">
@@ -4685,7 +4676,7 @@
         </p:nvSpPr>
         <p:spPr>
           <a:xfrm>
-            <a:off x="411480" y="3200400"/>
+            <a:off x="411480" y="2651760"/>
             <a:ext cx="8321040" cy="201168"/>
           </a:xfrm>
           <a:prstGeom prst="rect">
@@ -4710,7 +4701,7 @@
                 <a:ea typeface="Malgun Gothic" pitchFamily="34" charset="-122"/>
                 <a:cs typeface="Malgun Gothic" pitchFamily="34" charset="-120"/>
               </a:rPr>
-              <a:t>2020 → 2022:  다음 −99% · 네이버 블로그 −93% · 네이버 검색 −54% · 네이버 광고 −40%  (신청 −77%)</a:t>
+              <a:t>2020→22:  네이버 광고 −40% · 네이버 검색 −54% · 네이버 블로그 −93% · 다음 −99% · 신청(문자) −77%</a:t>
             </a:r>
             <a:endParaRPr lang="en-US" sz="900" dirty="0"/>
           </a:p>
@@ -4724,8 +4715,8 @@
         </p:nvSpPr>
         <p:spPr>
           <a:xfrm>
-            <a:off x="411480" y="3493008"/>
-            <a:ext cx="45720" cy="914400"/>
+            <a:off x="411480" y="2907792"/>
+            <a:ext cx="45720" cy="1517904"/>
           </a:xfrm>
           <a:prstGeom prst="rect">
             <a:avLst/>
@@ -4749,8 +4740,8 @@
         </p:nvSpPr>
         <p:spPr>
           <a:xfrm>
-            <a:off x="521208" y="3493008"/>
-            <a:ext cx="1901952" cy="219456"/>
+            <a:off x="502920" y="2907792"/>
+            <a:ext cx="1920240" cy="182880"/>
           </a:xfrm>
           <a:prstGeom prst="rect">
             <a:avLst/>
@@ -4766,7 +4757,7 @@
               <a:buNone/>
             </a:pPr>
             <a:r>
-              <a:rPr lang="en-US" sz="1050" b="1" dirty="0">
+              <a:rPr lang="en-US" sz="950" b="1" dirty="0">
                 <a:solidFill>
                   <a:srgbClr val="1BAF7A"/>
                 </a:solidFill>
@@ -4774,9 +4765,9 @@
                 <a:ea typeface="Malgun Gothic" pitchFamily="34" charset="-122"/>
                 <a:cs typeface="Malgun Gothic" pitchFamily="34" charset="-120"/>
               </a:rPr>
-              <a:t>다음 −99%</a:t>
-            </a:r>
-            <a:endParaRPr lang="en-US" sz="1050" dirty="0"/>
+              <a:t>1-2 다음</a:t>
+            </a:r>
+            <a:endParaRPr lang="en-US" sz="950" dirty="0"/>
           </a:p>
         </p:txBody>
       </p:sp>
@@ -4788,8 +4779,8 @@
         </p:nvSpPr>
         <p:spPr>
           <a:xfrm>
-            <a:off x="521208" y="3712464"/>
-            <a:ext cx="1901952" cy="457200"/>
+            <a:off x="502920" y="3108960"/>
+            <a:ext cx="1920240" cy="1316736"/>
           </a:xfrm>
           <a:prstGeom prst="rect">
             <a:avLst/>
@@ -4802,10 +4793,13 @@
           <a:lstStyle/>
           <a:p>
             <a:pPr indent="0" marL="0">
-              <a:buNone/>
-            </a:pPr>
-            <a:r>
-              <a:rPr lang="en-US" sz="800" dirty="0">
+              <a:spcAft>
+                <a:spcPts val="300"/>
+              </a:spcAft>
+              <a:buNone/>
+            </a:pPr>
+            <a:r>
+              <a:rPr lang="en-US" sz="700" dirty="0">
                 <a:solidFill>
                   <a:srgbClr val="0B0B0B"/>
                 </a:solidFill>
@@ -4813,61 +4807,82 @@
                 <a:ea typeface="Malgun Gothic" pitchFamily="34" charset="-122"/>
                 <a:cs typeface="Malgun Gothic" pitchFamily="34" charset="-120"/>
               </a:rPr>
-              <a:t>광고·등록 중단 (확인된 원인). 2020년 수준(644)이면 연 30건</a:t>
-            </a:r>
-            <a:endParaRPr lang="en-US" sz="800" dirty="0"/>
+              <a:t>변리사 답: 다음 광고·등록 중단. 그 외 사무소 내부 변화 없음</a:t>
+            </a:r>
+            <a:endParaRPr lang="en-US" sz="700" dirty="0"/>
+          </a:p>
+          <a:p>
+            <a:pPr indent="0" marL="0">
+              <a:spcAft>
+                <a:spcPts val="300"/>
+              </a:spcAft>
+              <a:buNone/>
+            </a:pPr>
+            <a:r>
+              <a:rPr lang="en-US" sz="700" dirty="0">
+                <a:solidFill>
+                  <a:srgbClr val="0B0B0B"/>
+                </a:solidFill>
+                <a:latin typeface="Malgun Gothic" pitchFamily="34" charset="0"/>
+                <a:ea typeface="Malgun Gothic" pitchFamily="34" charset="-122"/>
+                <a:cs typeface="Malgun Gothic" pitchFamily="34" charset="-120"/>
+              </a:rPr>
+              <a:t>2015~2020년 연 640~1,620 → 2022년 7</a:t>
+            </a:r>
+            <a:endParaRPr lang="en-US" sz="700" dirty="0"/>
+          </a:p>
+          <a:p>
+            <a:pPr indent="0" marL="0">
+              <a:spcAft>
+                <a:spcPts val="300"/>
+              </a:spcAft>
+              <a:buNone/>
+            </a:pPr>
+            <a:r>
+              <a:rPr lang="en-US" sz="700" dirty="0">
+                <a:solidFill>
+                  <a:srgbClr val="0B0B0B"/>
+                </a:solidFill>
+                <a:latin typeface="Malgun Gothic" pitchFamily="34" charset="0"/>
+                <a:ea typeface="Malgun Gothic" pitchFamily="34" charset="-122"/>
+                <a:cs typeface="Malgun Gothic" pitchFamily="34" charset="-120"/>
+              </a:rPr>
+              <a:t>=&gt; 확인된 원인. 중단 시점이 2021-05이면 신청이 처음 꺾인 달(2장)과 일치</a:t>
+            </a:r>
+            <a:endParaRPr lang="en-US" sz="700" dirty="0"/>
+          </a:p>
+          <a:p>
+            <a:pPr indent="0" marL="0">
+              <a:spcAft>
+                <a:spcPts val="300"/>
+              </a:spcAft>
+              <a:buNone/>
+            </a:pPr>
+            <a:r>
+              <a:rPr lang="en-US" sz="700" b="1" dirty="0">
+                <a:solidFill>
+                  <a:srgbClr val="2A78D6"/>
+                </a:solidFill>
+                <a:latin typeface="Malgun Gothic" pitchFamily="34" charset="0"/>
+                <a:ea typeface="Malgun Gothic" pitchFamily="34" charset="-122"/>
+                <a:cs typeface="Malgun Gothic" pitchFamily="34" charset="-120"/>
+              </a:rPr>
+              <a:t>=&gt; action item: 다음(카카오) 재개. 2020년 수준(644)이면 연 30건, 수임 3~6건 = 매출 연 900만~1,800만 원. 비용은 네이버 단가(1,891원)면 연 약 120만 원. 손익분기 클릭당 14,000~28,000원</a:t>
+            </a:r>
+            <a:endParaRPr lang="en-US" sz="700" dirty="0"/>
           </a:p>
         </p:txBody>
       </p:sp>
       <p:sp>
         <p:nvSpPr>
-          <p:cNvPr id="12" name="Text 9"/>
-          <p:cNvSpPr txBox="1"/>
-          <p:nvPr/>
-        </p:nvSpPr>
-        <p:spPr>
-          <a:xfrm>
-            <a:off x="521208" y="4187952"/>
-            <a:ext cx="1901952" cy="219456"/>
-          </a:xfrm>
-          <a:prstGeom prst="rect">
-            <a:avLst/>
-          </a:prstGeom>
-          <a:noFill/>
-          <a:ln/>
-        </p:spPr>
-        <p:txBody>
-          <a:bodyPr wrap="square" lIns="0" tIns="0" rIns="0" bIns="0" rtlCol="0" anchor="t"/>
-          <a:lstStyle/>
-          <a:p>
-            <a:pPr indent="0" marL="0">
-              <a:buNone/>
-            </a:pPr>
-            <a:r>
-              <a:rPr lang="en-US" sz="850" b="1" dirty="0">
-                <a:solidFill>
-                  <a:srgbClr val="2A78D6"/>
-                </a:solidFill>
-                <a:latin typeface="Malgun Gothic" pitchFamily="34" charset="0"/>
-                <a:ea typeface="Malgun Gothic" pitchFamily="34" charset="-122"/>
-                <a:cs typeface="Malgun Gothic" pitchFamily="34" charset="-120"/>
-              </a:rPr>
-              <a:t>→ 다음(카카오) 재개를 비용 대 수익으로 검토</a:t>
-            </a:r>
-            <a:endParaRPr lang="en-US" sz="850" dirty="0"/>
-          </a:p>
-        </p:txBody>
-      </p:sp>
-      <p:sp>
-        <p:nvSpPr>
-          <p:cNvPr id="13" name="Shape 10"/>
+          <p:cNvPr id="12" name="Shape 9"/>
           <p:cNvSpPr/>
           <p:nvPr/>
         </p:nvSpPr>
         <p:spPr>
           <a:xfrm>
-            <a:off x="2514600" y="3493008"/>
-            <a:ext cx="45720" cy="914400"/>
+            <a:off x="2514600" y="2907792"/>
+            <a:ext cx="45720" cy="1517904"/>
           </a:xfrm>
           <a:prstGeom prst="rect">
             <a:avLst/>
@@ -4885,53 +4900,53 @@
       </p:sp>
       <p:sp>
         <p:nvSpPr>
+          <p:cNvPr id="13" name="Text 10"/>
+          <p:cNvSpPr txBox="1"/>
+          <p:nvPr/>
+        </p:nvSpPr>
+        <p:spPr>
+          <a:xfrm>
+            <a:off x="2606040" y="2907792"/>
+            <a:ext cx="1920240" cy="182880"/>
+          </a:xfrm>
+          <a:prstGeom prst="rect">
+            <a:avLst/>
+          </a:prstGeom>
+          <a:noFill/>
+          <a:ln/>
+        </p:spPr>
+        <p:txBody>
+          <a:bodyPr wrap="square" lIns="0" tIns="0" rIns="0" bIns="0" rtlCol="0" anchor="ctr"/>
+          <a:lstStyle/>
+          <a:p>
+            <a:pPr indent="0" marL="0">
+              <a:buNone/>
+            </a:pPr>
+            <a:r>
+              <a:rPr lang="en-US" sz="950" b="1" dirty="0">
+                <a:solidFill>
+                  <a:srgbClr val="EB6834"/>
+                </a:solidFill>
+                <a:latin typeface="Malgun Gothic" pitchFamily="34" charset="0"/>
+                <a:ea typeface="Malgun Gothic" pitchFamily="34" charset="-122"/>
+                <a:cs typeface="Malgun Gothic" pitchFamily="34" charset="-120"/>
+              </a:rPr>
+              <a:t>1-3 블로그</a:t>
+            </a:r>
+            <a:endParaRPr lang="en-US" sz="950" dirty="0"/>
+          </a:p>
+        </p:txBody>
+      </p:sp>
+      <p:sp>
+        <p:nvSpPr>
           <p:cNvPr id="14" name="Text 11"/>
           <p:cNvSpPr txBox="1"/>
           <p:nvPr/>
         </p:nvSpPr>
         <p:spPr>
           <a:xfrm>
-            <a:off x="2624328" y="3493008"/>
-            <a:ext cx="1901952" cy="219456"/>
-          </a:xfrm>
-          <a:prstGeom prst="rect">
-            <a:avLst/>
-          </a:prstGeom>
-          <a:noFill/>
-          <a:ln/>
-        </p:spPr>
-        <p:txBody>
-          <a:bodyPr wrap="square" lIns="0" tIns="0" rIns="0" bIns="0" rtlCol="0" anchor="ctr"/>
-          <a:lstStyle/>
-          <a:p>
-            <a:pPr indent="0" marL="0">
-              <a:buNone/>
-            </a:pPr>
-            <a:r>
-              <a:rPr lang="en-US" sz="1050" b="1" dirty="0">
-                <a:solidFill>
-                  <a:srgbClr val="EB6834"/>
-                </a:solidFill>
-                <a:latin typeface="Malgun Gothic" pitchFamily="34" charset="0"/>
-                <a:ea typeface="Malgun Gothic" pitchFamily="34" charset="-122"/>
-                <a:cs typeface="Malgun Gothic" pitchFamily="34" charset="-120"/>
-              </a:rPr>
-              <a:t>네이버 블로그 −93%</a:t>
-            </a:r>
-            <a:endParaRPr lang="en-US" sz="1050" dirty="0"/>
-          </a:p>
-        </p:txBody>
-      </p:sp>
-      <p:sp>
-        <p:nvSpPr>
-          <p:cNvPr id="15" name="Text 12"/>
-          <p:cNvSpPr txBox="1"/>
-          <p:nvPr/>
-        </p:nvSpPr>
-        <p:spPr>
-          <a:xfrm>
-            <a:off x="2624328" y="3712464"/>
-            <a:ext cx="1901952" cy="457200"/>
+            <a:off x="2606040" y="3108960"/>
+            <a:ext cx="1920240" cy="1316736"/>
           </a:xfrm>
           <a:prstGeom prst="rect">
             <a:avLst/>
@@ -4944,10 +4959,13 @@
           <a:lstStyle/>
           <a:p>
             <a:pPr indent="0" marL="0">
-              <a:buNone/>
-            </a:pPr>
-            <a:r>
-              <a:rPr lang="en-US" sz="800" dirty="0">
+              <a:spcAft>
+                <a:spcPts val="300"/>
+              </a:spcAft>
+              <a:buNone/>
+            </a:pPr>
+            <a:r>
+              <a:rPr lang="en-US" sz="700" dirty="0">
                 <a:solidFill>
                   <a:srgbClr val="0B0B0B"/>
                 </a:solidFill>
@@ -4955,61 +4973,102 @@
                 <a:ea typeface="Malgun Gothic" pitchFamily="34" charset="-122"/>
                 <a:cs typeface="Malgun Gothic" pitchFamily="34" charset="-120"/>
               </a:rPr>
-              <a:t>글 수는 그대로(2020·21년 318·322건). 실적 나열 글 + 네이버 노출 방식 변화로 추정</a:t>
-            </a:r>
-            <a:endParaRPr lang="en-US" sz="800" dirty="0"/>
+              <a:t>글 2,736건의 날짜·제목, 최근 50건 본문 / 2014 ~ 2026</a:t>
+            </a:r>
+            <a:endParaRPr lang="en-US" sz="700" dirty="0"/>
+          </a:p>
+          <a:p>
+            <a:pPr indent="0" marL="0">
+              <a:spcAft>
+                <a:spcPts val="300"/>
+              </a:spcAft>
+              <a:buNone/>
+            </a:pPr>
+            <a:r>
+              <a:rPr lang="en-US" sz="700" dirty="0">
+                <a:solidFill>
+                  <a:srgbClr val="0B0B0B"/>
+                </a:solidFill>
+                <a:latin typeface="Malgun Gothic" pitchFamily="34" charset="0"/>
+                <a:ea typeface="Malgun Gothic" pitchFamily="34" charset="-122"/>
+                <a:cs typeface="Malgun Gothic" pitchFamily="34" charset="-120"/>
+              </a:rPr>
+              <a:t>=&gt; 글의 양은 원인 아님 (가장 많이 쓴 2020~21년에 600 → 118)</a:t>
+            </a:r>
+            <a:endParaRPr lang="en-US" sz="700" dirty="0"/>
+          </a:p>
+          <a:p>
+            <a:pPr indent="0" marL="0">
+              <a:spcAft>
+                <a:spcPts val="300"/>
+              </a:spcAft>
+              <a:buNone/>
+            </a:pPr>
+            <a:r>
+              <a:rPr lang="en-US" sz="700" dirty="0">
+                <a:solidFill>
+                  <a:srgbClr val="0B0B0B"/>
+                </a:solidFill>
+                <a:latin typeface="Malgun Gothic" pitchFamily="34" charset="0"/>
+                <a:ea typeface="Malgun Gothic" pitchFamily="34" charset="-122"/>
+                <a:cs typeface="Malgun Gothic" pitchFamily="34" charset="-120"/>
+              </a:rPr>
+              <a:t>=&gt; 후보 1: 글 형태 변화(읽을 글 → 실적 리스트). 2016년 정점 뒤 계단식 감소와 일치</a:t>
+            </a:r>
+            <a:endParaRPr lang="en-US" sz="700" dirty="0"/>
+          </a:p>
+          <a:p>
+            <a:pPr indent="0" marL="0">
+              <a:spcAft>
+                <a:spcPts val="300"/>
+              </a:spcAft>
+              <a:buNone/>
+            </a:pPr>
+            <a:r>
+              <a:rPr lang="en-US" sz="700" dirty="0">
+                <a:solidFill>
+                  <a:srgbClr val="0B0B0B"/>
+                </a:solidFill>
+                <a:latin typeface="Malgun Gothic" pitchFamily="34" charset="0"/>
+                <a:ea typeface="Malgun Gothic" pitchFamily="34" charset="-122"/>
+                <a:cs typeface="Malgun Gothic" pitchFamily="34" charset="-120"/>
+              </a:rPr>
+              <a:t>=&gt; 후보 2: 네이버 노출 방식 변화(2016 C-Rank, 2018 VIEW, 2021-10 스마트블록). 둘이 겹친 것으로 봄</a:t>
+            </a:r>
+            <a:endParaRPr lang="en-US" sz="700" dirty="0"/>
+          </a:p>
+          <a:p>
+            <a:pPr indent="0" marL="0">
+              <a:spcAft>
+                <a:spcPts val="300"/>
+              </a:spcAft>
+              <a:buNone/>
+            </a:pPr>
+            <a:r>
+              <a:rPr lang="en-US" sz="700" b="1" dirty="0">
+                <a:solidFill>
+                  <a:srgbClr val="2A78D6"/>
+                </a:solidFill>
+                <a:latin typeface="Malgun Gothic" pitchFamily="34" charset="0"/>
+                <a:ea typeface="Malgun Gothic" pitchFamily="34" charset="-122"/>
+                <a:cs typeface="Malgun Gothic" pitchFamily="34" charset="-120"/>
+              </a:rPr>
+              <a:t>=&gt; action item: 읽을 내용이 있는 글로. 광고비 없는 경로지만 효과는 몇 년, 네이버에 달림</a:t>
+            </a:r>
+            <a:endParaRPr lang="en-US" sz="700" dirty="0"/>
           </a:p>
         </p:txBody>
       </p:sp>
       <p:sp>
         <p:nvSpPr>
-          <p:cNvPr id="16" name="Text 13"/>
-          <p:cNvSpPr txBox="1"/>
-          <p:nvPr/>
-        </p:nvSpPr>
-        <p:spPr>
-          <a:xfrm>
-            <a:off x="2624328" y="4187952"/>
-            <a:ext cx="1901952" cy="219456"/>
-          </a:xfrm>
-          <a:prstGeom prst="rect">
-            <a:avLst/>
-          </a:prstGeom>
-          <a:noFill/>
-          <a:ln/>
-        </p:spPr>
-        <p:txBody>
-          <a:bodyPr wrap="square" lIns="0" tIns="0" rIns="0" bIns="0" rtlCol="0" anchor="t"/>
-          <a:lstStyle/>
-          <a:p>
-            <a:pPr indent="0" marL="0">
-              <a:buNone/>
-            </a:pPr>
-            <a:r>
-              <a:rPr lang="en-US" sz="850" b="1" dirty="0">
-                <a:solidFill>
-                  <a:srgbClr val="2A78D6"/>
-                </a:solidFill>
-                <a:latin typeface="Malgun Gothic" pitchFamily="34" charset="0"/>
-                <a:ea typeface="Malgun Gothic" pitchFamily="34" charset="-122"/>
-                <a:cs typeface="Malgun Gothic" pitchFamily="34" charset="-120"/>
-              </a:rPr>
-              <a:t>→ 읽을 내용이 있는 글로</a:t>
-            </a:r>
-            <a:endParaRPr lang="en-US" sz="850" dirty="0"/>
-          </a:p>
-        </p:txBody>
-      </p:sp>
-      <p:sp>
-        <p:nvSpPr>
-          <p:cNvPr id="17" name="Shape 14"/>
+          <p:cNvPr id="15" name="Shape 12"/>
           <p:cNvSpPr/>
           <p:nvPr/>
         </p:nvSpPr>
         <p:spPr>
           <a:xfrm>
-            <a:off x="4617720" y="3493008"/>
-            <a:ext cx="45720" cy="914400"/>
+            <a:off x="4617720" y="2907792"/>
+            <a:ext cx="45720" cy="1517904"/>
           </a:xfrm>
           <a:prstGeom prst="rect">
             <a:avLst/>
@@ -5027,14 +5086,14 @@
       </p:sp>
       <p:sp>
         <p:nvSpPr>
-          <p:cNvPr id="18" name="Text 15"/>
+          <p:cNvPr id="16" name="Text 13"/>
           <p:cNvSpPr txBox="1"/>
           <p:nvPr/>
         </p:nvSpPr>
         <p:spPr>
           <a:xfrm>
-            <a:off x="4727448" y="3493008"/>
-            <a:ext cx="1901952" cy="219456"/>
+            <a:off x="4709160" y="2907792"/>
+            <a:ext cx="1920240" cy="182880"/>
           </a:xfrm>
           <a:prstGeom prst="rect">
             <a:avLst/>
@@ -5050,7 +5109,7 @@
               <a:buNone/>
             </a:pPr>
             <a:r>
-              <a:rPr lang="en-US" sz="1050" b="1" dirty="0">
+              <a:rPr lang="en-US" sz="950" b="1" dirty="0">
                 <a:solidFill>
                   <a:srgbClr val="2A78D6"/>
                 </a:solidFill>
@@ -5058,22 +5117,22 @@
                 <a:ea typeface="Malgun Gothic" pitchFamily="34" charset="-122"/>
                 <a:cs typeface="Malgun Gothic" pitchFamily="34" charset="-120"/>
               </a:rPr>
-              <a:t>네이버 검색 −54%</a:t>
-            </a:r>
-            <a:endParaRPr lang="en-US" sz="1050" dirty="0"/>
+              <a:t>1-4 네이버 검색</a:t>
+            </a:r>
+            <a:endParaRPr lang="en-US" sz="950" dirty="0"/>
           </a:p>
         </p:txBody>
       </p:sp>
       <p:sp>
         <p:nvSpPr>
-          <p:cNvPr id="19" name="Text 16"/>
+          <p:cNvPr id="17" name="Text 14"/>
           <p:cNvSpPr txBox="1"/>
           <p:nvPr/>
         </p:nvSpPr>
         <p:spPr>
           <a:xfrm>
-            <a:off x="4727448" y="3712464"/>
-            <a:ext cx="1901952" cy="457200"/>
+            <a:off x="4709160" y="3108960"/>
+            <a:ext cx="1920240" cy="1316736"/>
           </a:xfrm>
           <a:prstGeom prst="rect">
             <a:avLst/>
@@ -5086,10 +5145,13 @@
           <a:lstStyle/>
           <a:p>
             <a:pPr indent="0" marL="0">
-              <a:buNone/>
-            </a:pPr>
-            <a:r>
-              <a:rPr lang="en-US" sz="800" dirty="0">
+              <a:spcAft>
+                <a:spcPts val="300"/>
+              </a:spcAft>
+              <a:buNone/>
+            </a:pPr>
+            <a:r>
+              <a:rPr lang="en-US" sz="700" dirty="0">
                 <a:solidFill>
                   <a:srgbClr val="0B0B0B"/>
                 </a:solidFill>
@@ -5097,61 +5159,62 @@
                 <a:ea typeface="Malgun Gothic" pitchFamily="34" charset="-122"/>
                 <a:cs typeface="Malgun Gothic" pitchFamily="34" charset="-120"/>
               </a:rPr>
-              <a:t>사이트 글자가 전부 이미지라 검색엔진이 못 읽음 + 네이버 개편(추정)</a:t>
-            </a:r>
-            <a:endParaRPr lang="en-US" sz="800" dirty="0"/>
+              <a:t>광고 아닌 네이버 검색 결과에서 온 방문. 4,902(2016) → 2,220(2020) → 1,028(2022) → 776(2026). 블로그와 같은 시기, 같은 방향</a:t>
+            </a:r>
+            <a:endParaRPr lang="en-US" sz="700" dirty="0"/>
+          </a:p>
+          <a:p>
+            <a:pPr indent="0" marL="0">
+              <a:spcAft>
+                <a:spcPts val="300"/>
+              </a:spcAft>
+              <a:buNone/>
+            </a:pPr>
+            <a:r>
+              <a:rPr lang="en-US" sz="700" dirty="0">
+                <a:solidFill>
+                  <a:srgbClr val="0B0B0B"/>
+                </a:solidFill>
+                <a:latin typeface="Malgun Gothic" pitchFamily="34" charset="0"/>
+                <a:ea typeface="Malgun Gothic" pitchFamily="34" charset="-122"/>
+                <a:cs typeface="Malgun Gothic" pitchFamily="34" charset="-120"/>
+              </a:rPr>
+              <a:t>=&gt; 사이트 쪽(글자가 전부 이미지라 검색엔진이 못 읽음) + 네이버 쪽(1-3과 같은 개편). 과거 검색 순위 자료가 없어 비중은 모름</a:t>
+            </a:r>
+            <a:endParaRPr lang="en-US" sz="700" dirty="0"/>
+          </a:p>
+          <a:p>
+            <a:pPr indent="0" marL="0">
+              <a:spcAft>
+                <a:spcPts val="300"/>
+              </a:spcAft>
+              <a:buNone/>
+            </a:pPr>
+            <a:r>
+              <a:rPr lang="en-US" sz="700" b="1" dirty="0">
+                <a:solidFill>
+                  <a:srgbClr val="2A78D6"/>
+                </a:solidFill>
+                <a:latin typeface="Malgun Gothic" pitchFamily="34" charset="0"/>
+                <a:ea typeface="Malgun Gothic" pitchFamily="34" charset="-122"/>
+                <a:cs typeface="Malgun Gothic" pitchFamily="34" charset="-120"/>
+              </a:rPr>
+              <a:t>=&gt; action item: 리뉴얼로 글자를 텍스트로. 그 뒤 유입이 늘면 사이트 쪽 원인이 컸던 것</a:t>
+            </a:r>
+            <a:endParaRPr lang="en-US" sz="700" dirty="0"/>
           </a:p>
         </p:txBody>
       </p:sp>
       <p:sp>
         <p:nvSpPr>
-          <p:cNvPr id="20" name="Text 17"/>
-          <p:cNvSpPr txBox="1"/>
-          <p:nvPr/>
-        </p:nvSpPr>
-        <p:spPr>
-          <a:xfrm>
-            <a:off x="4727448" y="4187952"/>
-            <a:ext cx="1901952" cy="219456"/>
-          </a:xfrm>
-          <a:prstGeom prst="rect">
-            <a:avLst/>
-          </a:prstGeom>
-          <a:noFill/>
-          <a:ln/>
-        </p:spPr>
-        <p:txBody>
-          <a:bodyPr wrap="square" lIns="0" tIns="0" rIns="0" bIns="0" rtlCol="0" anchor="t"/>
-          <a:lstStyle/>
-          <a:p>
-            <a:pPr indent="0" marL="0">
-              <a:buNone/>
-            </a:pPr>
-            <a:r>
-              <a:rPr lang="en-US" sz="850" b="1" dirty="0">
-                <a:solidFill>
-                  <a:srgbClr val="2A78D6"/>
-                </a:solidFill>
-                <a:latin typeface="Malgun Gothic" pitchFamily="34" charset="0"/>
-                <a:ea typeface="Malgun Gothic" pitchFamily="34" charset="-122"/>
-                <a:cs typeface="Malgun Gothic" pitchFamily="34" charset="-120"/>
-              </a:rPr>
-              <a:t>→ 리뉴얼로 글자를 텍스트로</a:t>
-            </a:r>
-            <a:endParaRPr lang="en-US" sz="850" dirty="0"/>
-          </a:p>
-        </p:txBody>
-      </p:sp>
-      <p:sp>
-        <p:nvSpPr>
-          <p:cNvPr id="21" name="Shape 18"/>
+          <p:cNvPr id="18" name="Shape 15"/>
           <p:cNvSpPr/>
           <p:nvPr/>
         </p:nvSpPr>
         <p:spPr>
           <a:xfrm>
-            <a:off x="6720840" y="3493008"/>
-            <a:ext cx="45720" cy="914400"/>
+            <a:off x="6720840" y="2907792"/>
+            <a:ext cx="45720" cy="1517904"/>
           </a:xfrm>
           <a:prstGeom prst="rect">
             <a:avLst/>
@@ -5169,14 +5232,14 @@
       </p:sp>
       <p:sp>
         <p:nvSpPr>
-          <p:cNvPr id="22" name="Text 19"/>
+          <p:cNvPr id="19" name="Text 16"/>
           <p:cNvSpPr txBox="1"/>
           <p:nvPr/>
         </p:nvSpPr>
         <p:spPr>
           <a:xfrm>
-            <a:off x="6830568" y="3493008"/>
-            <a:ext cx="1901952" cy="219456"/>
+            <a:off x="6812280" y="2907792"/>
+            <a:ext cx="1920240" cy="182880"/>
           </a:xfrm>
           <a:prstGeom prst="rect">
             <a:avLst/>
@@ -5192,7 +5255,7 @@
               <a:buNone/>
             </a:pPr>
             <a:r>
-              <a:rPr lang="en-US" sz="1050" b="1" dirty="0">
+              <a:rPr lang="en-US" sz="950" b="1" dirty="0">
                 <a:solidFill>
                   <a:srgbClr val="C08A00"/>
                 </a:solidFill>
@@ -5200,22 +5263,22 @@
                 <a:ea typeface="Malgun Gothic" pitchFamily="34" charset="-122"/>
                 <a:cs typeface="Malgun Gothic" pitchFamily="34" charset="-120"/>
               </a:rPr>
-              <a:t>네이버 광고 −40%</a:t>
-            </a:r>
-            <a:endParaRPr lang="en-US" sz="1050" dirty="0"/>
+              <a:t>1-5 네이버 광고</a:t>
+            </a:r>
+            <a:endParaRPr lang="en-US" sz="950" dirty="0"/>
           </a:p>
         </p:txBody>
       </p:sp>
       <p:sp>
         <p:nvSpPr>
-          <p:cNvPr id="23" name="Text 20"/>
+          <p:cNvPr id="20" name="Text 17"/>
           <p:cNvSpPr txBox="1"/>
           <p:nvPr/>
         </p:nvSpPr>
         <p:spPr>
           <a:xfrm>
-            <a:off x="6830568" y="3712464"/>
-            <a:ext cx="1901952" cy="457200"/>
+            <a:off x="6812280" y="3108960"/>
+            <a:ext cx="1920240" cy="1316736"/>
           </a:xfrm>
           <a:prstGeom prst="rect">
             <a:avLst/>
@@ -5228,10 +5291,13 @@
           <a:lstStyle/>
           <a:p>
             <a:pPr indent="0" marL="0">
-              <a:buNone/>
-            </a:pPr>
-            <a:r>
-              <a:rPr lang="en-US" sz="800" dirty="0">
+              <a:spcAft>
+                <a:spcPts val="300"/>
+              </a:spcAft>
+              <a:buNone/>
+            </a:pPr>
+            <a:r>
+              <a:rPr lang="en-US" sz="700" dirty="0">
                 <a:solidFill>
                   <a:srgbClr val="0B0B0B"/>
                 </a:solidFill>
@@ -5239,54 +5305,75 @@
                 <a:ea typeface="Malgun Gothic" pitchFamily="34" charset="-122"/>
                 <a:cs typeface="Malgun Gothic" pitchFamily="34" charset="-120"/>
               </a:rPr>
-              <a:t>가장 덜 줄어 원인 아님. 지금 실제 방문의 3분의 2, 모바일 44%</a:t>
-            </a:r>
-            <a:endParaRPr lang="en-US" sz="800" dirty="0"/>
+              <a:t>옛 사이트 세션(1개월) 약 180, 그중 광고 주소로 온 방문 120 (GA4). 기기: 신청 페이지 142명 중 모바일 44%</a:t>
+            </a:r>
+            <a:endParaRPr lang="en-US" sz="700" dirty="0"/>
+          </a:p>
+          <a:p>
+            <a:pPr indent="0" marL="0">
+              <a:spcAft>
+                <a:spcPts val="300"/>
+              </a:spcAft>
+              <a:buNone/>
+            </a:pPr>
+            <a:r>
+              <a:rPr lang="en-US" sz="700" dirty="0">
+                <a:solidFill>
+                  <a:srgbClr val="0B0B0B"/>
+                </a:solidFill>
+                <a:latin typeface="Malgun Gothic" pitchFamily="34" charset="0"/>
+                <a:ea typeface="Malgun Gothic" pitchFamily="34" charset="-122"/>
+                <a:cs typeface="Malgun Gothic" pitchFamily="34" charset="-120"/>
+              </a:rPr>
+              <a:t>=&gt; 실제 방문의 3분의 2가 광고 → 랜딩은 광고 방문자 기준, 휴대폰부터 (사이트는 PC 폭 고정)</a:t>
+            </a:r>
+            <a:endParaRPr lang="en-US" sz="700" dirty="0"/>
+          </a:p>
+          <a:p>
+            <a:pPr indent="0" marL="0">
+              <a:spcAft>
+                <a:spcPts val="300"/>
+              </a:spcAft>
+              <a:buNone/>
+            </a:pPr>
+            <a:r>
+              <a:rPr lang="en-US" sz="700" dirty="0">
+                <a:solidFill>
+                  <a:srgbClr val="0B0B0B"/>
+                </a:solidFill>
+                <a:latin typeface="Malgun Gothic" pitchFamily="34" charset="0"/>
+                <a:ea typeface="Malgun Gothic" pitchFamily="34" charset="-122"/>
+                <a:cs typeface="Malgun Gothic" pitchFamily="34" charset="-120"/>
+              </a:rPr>
+              <a:t>=&gt; 첫 화면 경유는 광고 검색어가 사라지고 조회수가 두 번 셈</a:t>
+            </a:r>
+            <a:endParaRPr lang="en-US" sz="700" dirty="0"/>
+          </a:p>
+          <a:p>
+            <a:pPr indent="0" marL="0">
+              <a:spcAft>
+                <a:spcPts val="300"/>
+              </a:spcAft>
+              <a:buNone/>
+            </a:pPr>
+            <a:r>
+              <a:rPr lang="en-US" sz="700" b="1" dirty="0">
+                <a:solidFill>
+                  <a:srgbClr val="2A78D6"/>
+                </a:solidFill>
+                <a:latin typeface="Malgun Gothic" pitchFamily="34" charset="0"/>
+                <a:ea typeface="Malgun Gothic" pitchFamily="34" charset="-122"/>
+                <a:cs typeface="Malgun Gothic" pitchFamily="34" charset="-120"/>
+              </a:rPr>
+              <a:t>=&gt; action item: 리뉴얼에서는 광고가 바로 해당 페이지로</a:t>
+            </a:r>
+            <a:endParaRPr lang="en-US" sz="700" dirty="0"/>
           </a:p>
         </p:txBody>
       </p:sp>
       <p:sp>
         <p:nvSpPr>
-          <p:cNvPr id="24" name="Text 21"/>
-          <p:cNvSpPr txBox="1"/>
-          <p:nvPr/>
-        </p:nvSpPr>
-        <p:spPr>
-          <a:xfrm>
-            <a:off x="6830568" y="4187952"/>
-            <a:ext cx="1901952" cy="219456"/>
-          </a:xfrm>
-          <a:prstGeom prst="rect">
-            <a:avLst/>
-          </a:prstGeom>
-          <a:noFill/>
-          <a:ln/>
-        </p:spPr>
-        <p:txBody>
-          <a:bodyPr wrap="square" lIns="0" tIns="0" rIns="0" bIns="0" rtlCol="0" anchor="t"/>
-          <a:lstStyle/>
-          <a:p>
-            <a:pPr indent="0" marL="0">
-              <a:buNone/>
-            </a:pPr>
-            <a:r>
-              <a:rPr lang="en-US" sz="850" b="1" dirty="0">
-                <a:solidFill>
-                  <a:srgbClr val="2A78D6"/>
-                </a:solidFill>
-                <a:latin typeface="Malgun Gothic" pitchFamily="34" charset="0"/>
-                <a:ea typeface="Malgun Gothic" pitchFamily="34" charset="-122"/>
-                <a:cs typeface="Malgun Gothic" pitchFamily="34" charset="-120"/>
-              </a:rPr>
-              <a:t>→ 랜딩은 광고 방문자 기준, 휴대폰부터</a:t>
-            </a:r>
-            <a:endParaRPr lang="en-US" sz="850" dirty="0"/>
-          </a:p>
-        </p:txBody>
-      </p:sp>
-      <p:sp>
-        <p:nvSpPr>
-          <p:cNvPr id="25" name="Shape 22"/>
+          <p:cNvPr id="21" name="Shape 18"/>
           <p:cNvSpPr/>
           <p:nvPr/>
         </p:nvSpPr>
@@ -5309,14 +5396,14 @@
       </p:sp>
       <p:sp>
         <p:nvSpPr>
-          <p:cNvPr id="26" name="Text 23"/>
+          <p:cNvPr id="22" name="Text 19"/>
           <p:cNvSpPr txBox="1"/>
           <p:nvPr/>
         </p:nvSpPr>
         <p:spPr>
           <a:xfrm>
-            <a:off x="411480" y="4535424"/>
-            <a:ext cx="8046720" cy="384048"/>
+            <a:off x="411480" y="4526280"/>
+            <a:ext cx="8046720" cy="548640"/>
           </a:xfrm>
           <a:prstGeom prst="rect">
             <a:avLst/>
@@ -5329,9 +5416,6 @@
           <a:lstStyle/>
           <a:p>
             <a:pPr indent="0" marL="0">
-              <a:spcAft>
-                <a:spcPts val="100"/>
-              </a:spcAft>
               <a:buNone/>
             </a:pPr>
             <a:r>
@@ -5343,27 +5427,7 @@
                 <a:ea typeface="Malgun Gothic" pitchFamily="34" charset="-122"/>
                 <a:cs typeface="Malgun Gothic" pitchFamily="34" charset="-120"/>
               </a:rPr>
-              <a:t>출처: 관리자 페이지 접속자통계 — 유입 도메인별 방문 2016 ~ 2026-10-06</a:t>
-            </a:r>
-            <a:endParaRPr lang="en-US" sz="800" dirty="0"/>
-          </a:p>
-          <a:p>
-            <a:pPr indent="0" marL="0">
-              <a:spcAft>
-                <a:spcPts val="100"/>
-              </a:spcAft>
-              <a:buNone/>
-            </a:pPr>
-            <a:r>
-              <a:rPr lang="en-US" sz="800" dirty="0">
-                <a:solidFill>
-                  <a:srgbClr val="52514E"/>
-                </a:solidFill>
-                <a:latin typeface="Malgun Gothic" pitchFamily="34" charset="0"/>
-                <a:ea typeface="Malgun Gothic" pitchFamily="34" charset="-122"/>
-                <a:cs typeface="Malgun Gothic" pitchFamily="34" charset="-120"/>
-              </a:rPr>
-              <a:t>경로 비교는 "직접"(봇 대부분) 제외. 서버 광고 유입 203 vs 광고 보고서 클릭 388(같은 90일)이라 경로는 추이로만 봄. 감소율은 2020 → 2022</a:t>
+              <a:t>출처: 관리자 페이지 접속자통계(유입 도메인별), 사무소 네이버 블로그 글 목록, GA4 2026-09-02 ~ 10-01(작업자 접속 섞인 "직접" 69세션 제외). 변리사 답은 기억에 의한 값</a:t>
             </a:r>
             <a:endParaRPr lang="en-US" sz="800" dirty="0"/>
           </a:p>
@@ -6294,8 +6358,8 @@
         </p:nvSpPr>
         <p:spPr>
           <a:xfrm>
-            <a:off x="411480" y="4535424"/>
-            <a:ext cx="8046720" cy="384048"/>
+            <a:off x="411480" y="4526280"/>
+            <a:ext cx="8046720" cy="548640"/>
           </a:xfrm>
           <a:prstGeom prst="rect">
             <a:avLst/>
@@ -6308,9 +6372,6 @@
           <a:lstStyle/>
           <a:p>
             <a:pPr indent="0" marL="0">
-              <a:spcAft>
-                <a:spcPts val="100"/>
-              </a:spcAft>
               <a:buNone/>
             </a:pPr>
             <a:r>
@@ -6328,9 +6389,6 @@
           </a:p>
           <a:p>
             <a:pPr indent="0" marL="0">
-              <a:spcAft>
-                <a:spcPts val="100"/>
-              </a:spcAft>
               <a:buNone/>
             </a:pPr>
             <a:r>
@@ -7827,8 +7885,8 @@
         </p:nvSpPr>
         <p:spPr>
           <a:xfrm>
-            <a:off x="411480" y="4535424"/>
-            <a:ext cx="8046720" cy="384048"/>
+            <a:off x="411480" y="4526280"/>
+            <a:ext cx="8046720" cy="548640"/>
           </a:xfrm>
           <a:prstGeom prst="rect">
             <a:avLst/>
@@ -7841,9 +7899,6 @@
           <a:lstStyle/>
           <a:p>
             <a:pPr indent="0" marL="0">
-              <a:spcAft>
-                <a:spcPts val="100"/>
-              </a:spcAft>
               <a:buNone/>
             </a:pPr>
             <a:r>
@@ -7861,9 +7916,6 @@
           </a:p>
           <a:p>
             <a:pPr indent="0" marL="0">
-              <a:spcAft>
-                <a:spcPts val="100"/>
-              </a:spcAft>
               <a:buNone/>
             </a:pPr>
             <a:r>

--- a/slides.pptx
+++ b/slides.pptx
@@ -1988,6 +1988,338 @@
 </file>
 
 <file path=ppt/charts/chart5.xml><?xml version="1.0" encoding="utf-8"?>
+<c:chartSpace xmlns:c="http://schemas.openxmlformats.org/drawingml/2006/chart" xmlns:a="http://schemas.openxmlformats.org/drawingml/2006/main" xmlns:r="http://schemas.openxmlformats.org/officeDocument/2006/relationships">
+  <c:date1904 val="0"/>
+  <c:roundedCorners val="1"/>
+  <c:chart>
+    <c:autoTitleDeleted val="1"/>
+    <c:plotArea>
+      <c:layout/>
+      <c:barChart>
+        <c:barDir val="col"/>
+        <c:grouping val="clustered"/>
+        <c:varyColors val="0"/>
+        <c:ser>
+          <c:idx val="0"/>
+          <c:order val="0"/>
+          <c:tx>
+            <c:strRef>
+              <c:f>Sheet1!$B$1</c:f>
+              <c:strCache>
+                <c:ptCount val="1"/>
+                <c:pt idx="0">
+                  <c:v>2025</c:v>
+                </c:pt>
+              </c:strCache>
+            </c:strRef>
+          </c:tx>
+          <c:spPr>
+            <a:solidFill>
+              <a:srgbClr val="B8B6B0"/>
+            </a:solidFill>
+            <a:effectLst/>
+          </c:spPr>
+          <c:invertIfNegative val="0"/>
+          <c:dLbls>
+            <c:numFmt formatCode="0;;;" sourceLinked="0"/>
+            <c:txPr>
+              <a:bodyPr/>
+              <a:lstStyle/>
+              <a:p>
+                <a:pPr>
+                  <a:defRPr b="0" i="0" strike="noStrike" sz="700" u="none">
+                    <a:solidFill>
+                      <a:srgbClr val="0B0B0B"/>
+                    </a:solidFill>
+                    <a:latin typeface="Arial"/>
+                  </a:defRPr>
+                </a:pPr>
+              </a:p>
+            </c:txPr>
+            <c:showLegendKey val="0"/>
+            <c:showVal val="1"/>
+            <c:showCatName val="0"/>
+            <c:showSerName val="0"/>
+            <c:showPercent val="0"/>
+            <c:showBubbleSize val="0"/>
+            <c:showLeaderLines val="0"/>
+          </c:dLbls>
+          <c:cat>
+            <c:multiLvlStrRef>
+              <c:f>Sheet1!$A$2:$A$5</c:f>
+              <c:multiLvlStrCache>
+                <c:ptCount val="4"/>
+                <c:lvl>
+                  <c:pt idx="0">
+                    <c:v>광고비 134만→73만 원</c:v>
+                  </c:pt>
+                  <c:pt idx="1">
+                    <c:v>클릭 671→388</c:v>
+                  </c:pt>
+                  <c:pt idx="2">
+                    <c:v>클릭당 1,993→1,891원</c:v>
+                  </c:pt>
+                  <c:pt idx="3">
+                    <c:v>신청 18→15</c:v>
+                  </c:pt>
+                </c:lvl>
+              </c:multiLvlStrCache>
+            </c:multiLvlStrRef>
+          </c:cat>
+          <c:val>
+            <c:numRef>
+              <c:f>Sheet1!$B$2:$B$5</c:f>
+              <c:numCache>
+                <c:formatCode>General</c:formatCode>
+                <c:ptCount val="4"/>
+                <c:pt idx="0">
+                  <c:v>100</c:v>
+                </c:pt>
+                <c:pt idx="1">
+                  <c:v>100</c:v>
+                </c:pt>
+                <c:pt idx="2">
+                  <c:v>100</c:v>
+                </c:pt>
+                <c:pt idx="3">
+                  <c:v>100</c:v>
+                </c:pt>
+              </c:numCache>
+            </c:numRef>
+          </c:val>
+        </c:ser>
+        <c:ser>
+          <c:idx val="1"/>
+          <c:order val="1"/>
+          <c:tx>
+            <c:strRef>
+              <c:f>Sheet1!$C$1</c:f>
+              <c:strCache>
+                <c:ptCount val="1"/>
+                <c:pt idx="0">
+                  <c:v>2026</c:v>
+                </c:pt>
+              </c:strCache>
+            </c:strRef>
+          </c:tx>
+          <c:spPr>
+            <a:solidFill>
+              <a:srgbClr val="2A78D6"/>
+            </a:solidFill>
+            <a:effectLst/>
+          </c:spPr>
+          <c:invertIfNegative val="0"/>
+          <c:dLbls>
+            <c:numFmt formatCode="0;;;" sourceLinked="0"/>
+            <c:txPr>
+              <a:bodyPr/>
+              <a:lstStyle/>
+              <a:p>
+                <a:pPr>
+                  <a:defRPr b="0" i="0" strike="noStrike" sz="700" u="none">
+                    <a:solidFill>
+                      <a:srgbClr val="0B0B0B"/>
+                    </a:solidFill>
+                    <a:latin typeface="Arial"/>
+                  </a:defRPr>
+                </a:pPr>
+              </a:p>
+            </c:txPr>
+            <c:showLegendKey val="0"/>
+            <c:showVal val="1"/>
+            <c:showCatName val="0"/>
+            <c:showSerName val="0"/>
+            <c:showPercent val="0"/>
+            <c:showBubbleSize val="0"/>
+            <c:showLeaderLines val="0"/>
+          </c:dLbls>
+          <c:cat>
+            <c:multiLvlStrRef>
+              <c:f>Sheet1!$A$2:$A$5</c:f>
+              <c:multiLvlStrCache>
+                <c:ptCount val="4"/>
+                <c:lvl>
+                  <c:pt idx="0">
+                    <c:v>광고비 134만→73만 원</c:v>
+                  </c:pt>
+                  <c:pt idx="1">
+                    <c:v>클릭 671→388</c:v>
+                  </c:pt>
+                  <c:pt idx="2">
+                    <c:v>클릭당 1,993→1,891원</c:v>
+                  </c:pt>
+                  <c:pt idx="3">
+                    <c:v>신청 18→15</c:v>
+                  </c:pt>
+                </c:lvl>
+              </c:multiLvlStrCache>
+            </c:multiLvlStrRef>
+          </c:cat>
+          <c:val>
+            <c:numRef>
+              <c:f>Sheet1!$C$2:$C$5</c:f>
+              <c:numCache>
+                <c:formatCode>General</c:formatCode>
+                <c:ptCount val="4"/>
+                <c:pt idx="0">
+                  <c:v>55</c:v>
+                </c:pt>
+                <c:pt idx="1">
+                  <c:v>58</c:v>
+                </c:pt>
+                <c:pt idx="2">
+                  <c:v>95</c:v>
+                </c:pt>
+                <c:pt idx="3">
+                  <c:v>83</c:v>
+                </c:pt>
+              </c:numCache>
+            </c:numRef>
+          </c:val>
+        </c:ser>
+        <c:dLbls>
+          <c:numFmt formatCode="0;;;" sourceLinked="0"/>
+          <c:txPr>
+            <a:bodyPr/>
+            <a:lstStyle/>
+            <a:p>
+              <a:pPr>
+                <a:defRPr b="0" i="0" strike="noStrike" sz="700" u="none">
+                  <a:solidFill>
+                    <a:srgbClr val="0B0B0B"/>
+                  </a:solidFill>
+                  <a:latin typeface="Arial"/>
+                </a:defRPr>
+              </a:pPr>
+            </a:p>
+          </c:txPr>
+          <c:showLegendKey val="0"/>
+          <c:showVal val="1"/>
+          <c:showCatName val="0"/>
+          <c:showSerName val="0"/>
+          <c:showPercent val="0"/>
+          <c:showBubbleSize val="0"/>
+          <c:showLeaderLines val="0"/>
+        </c:dLbls>
+        <c:gapWidth val="45"/>
+        <c:overlap val="0"/>
+        <c:axId val="2094734554"/>
+        <c:axId val="2094734552"/>
+        <c:axId val="2094734556"/>
+      </c:barChart>
+      <c:catAx>
+        <c:axId val="2094734554"/>
+        <c:scaling>
+          <c:orientation val="minMax"/>
+        </c:scaling>
+        <c:delete val="0"/>
+        <c:axPos val="b"/>
+        <c:numFmt formatCode="General" sourceLinked="1"/>
+        <c:majorTickMark val="out"/>
+        <c:minorTickMark val="none"/>
+        <c:tickLblPos val="low"/>
+        <c:spPr>
+          <a:ln w="12700" cap="flat">
+            <a:noFill/>
+            <a:prstDash val="solid"/>
+            <a:round/>
+          </a:ln>
+        </c:spPr>
+        <c:txPr>
+          <a:bodyPr/>
+          <a:lstStyle/>
+          <a:p>
+            <a:pPr>
+              <a:defRPr sz="650" b="0" i="0" u="none" strike="noStrike">
+                <a:solidFill>
+                  <a:srgbClr val="52514E"/>
+                </a:solidFill>
+                <a:latin typeface="Malgun Gothic"/>
+              </a:defRPr>
+            </a:pPr>
+            <a:endParaRPr lang="en-US"/>
+          </a:p>
+        </c:txPr>
+        <c:crossAx val="2094734552"/>
+        <c:crosses val="autoZero"/>
+        <c:auto val="1"/>
+        <c:lblAlgn val="ctr"/>
+        <c:noMultiLvlLbl val="1"/>
+      </c:catAx>
+      <c:valAx>
+        <c:axId val="2094734552"/>
+        <c:scaling>
+          <c:orientation val="minMax"/>
+        </c:scaling>
+        <c:delete val="1"/>
+        <c:axPos val="l"/>
+        <c:numFmt formatCode="General" sourceLinked="0"/>
+        <c:majorTickMark val="out"/>
+        <c:minorTickMark val="none"/>
+        <c:tickLblPos val="nextTo"/>
+        <c:spPr>
+          <a:ln w="12700" cap="flat">
+            <a:noFill/>
+            <a:prstDash val="solid"/>
+            <a:round/>
+          </a:ln>
+        </c:spPr>
+        <c:txPr>
+          <a:bodyPr/>
+          <a:lstStyle/>
+          <a:p>
+            <a:pPr>
+              <a:defRPr sz="750" b="0" i="0" u="none" strike="noStrike">
+                <a:solidFill>
+                  <a:srgbClr val="52514E"/>
+                </a:solidFill>
+                <a:latin typeface="Malgun Gothic"/>
+              </a:defRPr>
+            </a:pPr>
+            <a:endParaRPr lang="en-US"/>
+          </a:p>
+        </c:txPr>
+        <c:crossAx val="2094734554"/>
+        <c:crosses val="autoZero"/>
+        <c:crossBetween val="between"/>
+      </c:valAx>
+      <c:spPr>
+        <a:solidFill>
+          <a:srgbClr val="FFFFFF">
+            <a:alpha val="0"/>
+          </a:srgbClr>
+        </a:solidFill>
+        <a:ln w="12700" cap="flat">
+          <a:solidFill>
+            <a:srgbClr val="FFFFFF"/>
+          </a:solidFill>
+        </a:ln>
+        <a:effectLst/>
+      </c:spPr>
+    </c:plotArea>
+    <c:plotVisOnly val="1"/>
+    <c:dispBlanksAs val="span"/>
+  </c:chart>
+  <c:spPr>
+    <a:solidFill>
+      <a:srgbClr val="FFFFFF">
+        <a:alpha val="0"/>
+      </a:srgbClr>
+    </a:solidFill>
+    <a:ln w="12700" cap="flat">
+      <a:solidFill>
+        <a:srgbClr val="FFFFFF"/>
+      </a:solidFill>
+    </a:ln>
+    <a:effectLst/>
+  </c:spPr>
+  <c:externalData r:id="rId1">
+    <c:autoUpdate val="0"/>
+  </c:externalData>
+</c:chartSpace>
+</file>
+
+<file path=ppt/charts/chart6.xml><?xml version="1.0" encoding="utf-8"?>
 <c:chartSpace xmlns:c="http://schemas.openxmlformats.org/drawingml/2006/chart" xmlns:a="http://schemas.openxmlformats.org/drawingml/2006/main" xmlns:r="http://schemas.openxmlformats.org/officeDocument/2006/relationships">
   <c:date1904 val="0"/>
   <c:roundedCorners val="1"/>
@@ -6062,8 +6394,8 @@
         </p:nvSpPr>
         <p:spPr>
           <a:xfrm>
-            <a:off x="5440680" y="1865376"/>
-            <a:ext cx="3291840" cy="1188720"/>
+            <a:off x="5440680" y="1847088"/>
+            <a:ext cx="3291840" cy="566928"/>
           </a:xfrm>
           <a:prstGeom prst="rect">
             <a:avLst/>
@@ -6082,7 +6414,7 @@
               <a:buNone/>
             </a:pPr>
             <a:r>
-              <a:rPr lang="en-US" sz="850" dirty="0">
+              <a:rPr lang="en-US" sz="800" dirty="0">
                 <a:solidFill>
                   <a:srgbClr val="0B0B0B"/>
                 </a:solidFill>
@@ -6090,9 +6422,9 @@
                 <a:ea typeface="Malgun Gothic" pitchFamily="34" charset="-122"/>
                 <a:cs typeface="Malgun Gothic" pitchFamily="34" charset="-120"/>
               </a:rPr>
-              <a:t>포괄 검색어가 노출 68%, 광고비 26%를 쓰고 클릭은 20%. 클릭당 비용은 같음(2,547원 대 2,434원)</a:t>
-            </a:r>
-            <a:endParaRPr lang="en-US" sz="850" dirty="0"/>
+              <a:t>포괄 검색어가 노출 68%, 광고비 26%를 쓰고 클릭은 20%. 클릭당 비용은 같음(2,547원 대 2,434원). 피셔, 우연일 확률 0.1% 미만</a:t>
+            </a:r>
+            <a:endParaRPr lang="en-US" sz="800" dirty="0"/>
           </a:p>
           <a:p>
             <a:pPr indent="0" marL="0">
@@ -6104,68 +6436,122 @@
             <a:r>
               <a:rPr lang="en-US" sz="800" dirty="0">
                 <a:solidFill>
+                  <a:srgbClr val="0B0B0B"/>
+                </a:solidFill>
+                <a:latin typeface="Malgun Gothic" pitchFamily="34" charset="0"/>
+                <a:ea typeface="Malgun Gothic" pitchFamily="34" charset="-122"/>
+                <a:cs typeface="Malgun Gothic" pitchFamily="34" charset="-120"/>
+              </a:rPr>
+              <a:t>확장 검색은 직접 등록한 키워드의 절반만 눌림(0.32% 대 0.61%)</a:t>
+            </a:r>
+            <a:endParaRPr lang="en-US" sz="800" dirty="0"/>
+          </a:p>
+        </p:txBody>
+      </p:sp>
+      <p:sp>
+        <p:nvSpPr>
+          <p:cNvPr id="18" name="Text 15"/>
+          <p:cNvSpPr txBox="1"/>
+          <p:nvPr/>
+        </p:nvSpPr>
+        <p:spPr>
+          <a:xfrm>
+            <a:off x="5440680" y="2432304"/>
+            <a:ext cx="3291840" cy="237744"/>
+          </a:xfrm>
+          <a:prstGeom prst="rect">
+            <a:avLst/>
+          </a:prstGeom>
+          <a:noFill/>
+          <a:ln/>
+        </p:spPr>
+        <p:txBody>
+          <a:bodyPr wrap="square" lIns="0" tIns="0" rIns="0" bIns="0" rtlCol="0" anchor="ctr"/>
+          <a:lstStyle/>
+          <a:p>
+            <a:pPr indent="0" marL="0">
+              <a:buNone/>
+            </a:pPr>
+            <a:r>
+              <a:rPr lang="en-US" sz="950" b="1" dirty="0">
+                <a:solidFill>
+                  <a:srgbClr val="0B0B0B"/>
+                </a:solidFill>
+                <a:latin typeface="Malgun Gothic" pitchFamily="34" charset="0"/>
+                <a:ea typeface="Malgun Gothic" pitchFamily="34" charset="-122"/>
+                <a:cs typeface="Malgun Gothic" pitchFamily="34" charset="-120"/>
+              </a:rPr>
+              <a:t>작년 정리로 광고비 −45%에 신청은 −17%</a:t>
+            </a:r>
+            <a:endParaRPr lang="en-US" sz="950" dirty="0"/>
+          </a:p>
+        </p:txBody>
+      </p:sp>
+      <p:sp>
+        <p:nvSpPr>
+          <p:cNvPr id="19" name="Text 16"/>
+          <p:cNvSpPr txBox="1"/>
+          <p:nvPr/>
+        </p:nvSpPr>
+        <p:spPr>
+          <a:xfrm>
+            <a:off x="5440680" y="2670048"/>
+            <a:ext cx="3291840" cy="182880"/>
+          </a:xfrm>
+          <a:prstGeom prst="rect">
+            <a:avLst/>
+          </a:prstGeom>
+          <a:noFill/>
+          <a:ln/>
+        </p:spPr>
+        <p:txBody>
+          <a:bodyPr wrap="square" lIns="0" tIns="0" rIns="0" bIns="0" rtlCol="0" anchor="ctr"/>
+          <a:lstStyle/>
+          <a:p>
+            <a:pPr indent="0" marL="0">
+              <a:buNone/>
+            </a:pPr>
+            <a:r>
+              <a:rPr lang="en-US" sz="800" dirty="0">
+                <a:solidFill>
                   <a:srgbClr val="52514E"/>
                 </a:solidFill>
                 <a:latin typeface="Malgun Gothic" pitchFamily="34" charset="0"/>
                 <a:ea typeface="Malgun Gothic" pitchFamily="34" charset="-122"/>
                 <a:cs typeface="Malgun Gothic" pitchFamily="34" charset="-120"/>
               </a:rPr>
-              <a:t>피셔 정확검정, 우연일 확률 0.1% 미만</a:t>
-            </a:r>
-            <a:endParaRPr lang="en-US" sz="850" dirty="0"/>
-          </a:p>
-          <a:p>
-            <a:pPr indent="0" marL="0">
-              <a:spcAft>
-                <a:spcPts val="300"/>
-              </a:spcAft>
-              <a:buNone/>
-            </a:pPr>
-            <a:r>
-              <a:rPr lang="en-US" sz="850" dirty="0">
-                <a:solidFill>
-                  <a:srgbClr val="0B0B0B"/>
-                </a:solidFill>
-                <a:latin typeface="Malgun Gothic" pitchFamily="34" charset="0"/>
-                <a:ea typeface="Malgun Gothic" pitchFamily="34" charset="-122"/>
-                <a:cs typeface="Malgun Gothic" pitchFamily="34" charset="-120"/>
-              </a:rPr>
-              <a:t>확장 검색은 직접 등록한 키워드의 절반만 눌림(0.32% 대 0.61%)</a:t>
-            </a:r>
-            <a:endParaRPr lang="en-US" sz="850" dirty="0"/>
-          </a:p>
-          <a:p>
-            <a:pPr indent="0" marL="0">
-              <a:spcAft>
-                <a:spcPts val="300"/>
-              </a:spcAft>
-              <a:buNone/>
-            </a:pPr>
-            <a:r>
-              <a:rPr lang="en-US" sz="850" dirty="0">
-                <a:solidFill>
-                  <a:srgbClr val="0B0B0B"/>
-                </a:solidFill>
-                <a:latin typeface="Malgun Gothic" pitchFamily="34" charset="0"/>
-                <a:ea typeface="Malgun Gothic" pitchFamily="34" charset="-122"/>
-                <a:cs typeface="Malgun Gothic" pitchFamily="34" charset="-120"/>
-              </a:rPr>
-              <a:t>작년 정리로 광고비 −45%에 신청은 18 → 15(−17%). 광고비대로 줄지 않았다는 경향(포아송 8%)</a:t>
-            </a:r>
-            <a:endParaRPr lang="en-US" sz="850" dirty="0"/>
+              <a:t>작년 정리 전후, 같은 90일. 2025년을 100으로. 18→15는 우연일 확률 73%(이항), 광고비대로 줄었다면 15건 이상일 확률 8%(포아송)</a:t>
+            </a:r>
+            <a:endParaRPr lang="en-US" sz="800" dirty="0"/>
           </a:p>
         </p:txBody>
       </p:sp>
-      <p:sp>
-        <p:nvSpPr>
-          <p:cNvPr id="18" name="Shape 15"/>
+      <p:graphicFrame>
+        <p:nvGraphicFramePr>
+          <p:cNvPr id="20" name="Chart 1" descr=""/>
+          <p:cNvGraphicFramePr/>
+          <p:nvPr/>
+        </p:nvGraphicFramePr>
+        <p:xfrm>
+          <a:off x="5394960" y="2834640"/>
+          <a:ext cx="3383280" cy="932688"/>
+        </p:xfrm>
+        <a:graphic xmlns:a="http://schemas.openxmlformats.org/drawingml/2006/main">
+          <a:graphicData uri="http://schemas.openxmlformats.org/drawingml/2006/chart">
+            <c:chart xmlns:c="http://schemas.openxmlformats.org/drawingml/2006/chart" r:id="rId2"/>
+          </a:graphicData>
+        </a:graphic>
+      </p:graphicFrame>
+      <p:sp>
+        <p:nvSpPr>
+          <p:cNvPr id="21" name="Shape 17"/>
           <p:cNvSpPr/>
           <p:nvPr/>
         </p:nvSpPr>
         <p:spPr>
           <a:xfrm>
-            <a:off x="5440680" y="3108960"/>
-            <a:ext cx="3291840" cy="1298448"/>
+            <a:off x="5440680" y="3822192"/>
+            <a:ext cx="3291840" cy="603504"/>
           </a:xfrm>
           <a:prstGeom prst="rect">
             <a:avLst/>
@@ -6183,14 +6569,14 @@
       </p:sp>
       <p:sp>
         <p:nvSpPr>
-          <p:cNvPr id="19" name="Text 16"/>
+          <p:cNvPr id="22" name="Text 18"/>
           <p:cNvSpPr txBox="1"/>
           <p:nvPr/>
         </p:nvSpPr>
         <p:spPr>
           <a:xfrm>
-            <a:off x="5550408" y="3163824"/>
-            <a:ext cx="3072384" cy="1207008"/>
+            <a:off x="5532120" y="3858768"/>
+            <a:ext cx="3108960" cy="548640"/>
           </a:xfrm>
           <a:prstGeom prst="rect">
             <a:avLst/>
@@ -6209,28 +6595,27 @@
               <a:buNone/>
             </a:pPr>
             <a:r>
-              <a:rPr lang="en-US" sz="850" b="1" dirty="0">
-                <a:solidFill>
-                  <a:srgbClr val="EB6834"/>
-                </a:solidFill>
-                <a:latin typeface="Malgun Gothic" pitchFamily="34" charset="0"/>
-                <a:ea typeface="Malgun Gothic" pitchFamily="34" charset="-122"/>
-                <a:cs typeface="Malgun Gothic" pitchFamily="34" charset="-120"/>
-              </a:rPr>
-              <a:t>뺌</a:t>
-            </a:r>
-            <a:endParaRPr lang="en-US" sz="850" dirty="0"/>
-          </a:p>
-          <a:p>
-            <a:pPr marL="127000" indent="-127000">
+              <a:rPr lang="en-US" sz="750" dirty="0">
+                <a:solidFill>
+                  <a:srgbClr val="0B0B0B"/>
+                </a:solidFill>
+                <a:latin typeface="Malgun Gothic" pitchFamily="34" charset="0"/>
+                <a:ea typeface="Malgun Gothic" pitchFamily="34" charset="-122"/>
+                <a:cs typeface="Malgun Gothic" pitchFamily="34" charset="-120"/>
+              </a:rPr>
+              <a:t>뺌: 특허·특허법인·변리사·특허사무소 입찰 낮추거나 제외("특허출원"은 남김). 확장 검색은 성적 나쁜 그룹부터 끔, "변리사파견" 등 무관 노출 정리</a:t>
+            </a:r>
+            <a:endParaRPr lang="en-US" sz="750" dirty="0"/>
+          </a:p>
+          <a:p>
+            <a:pPr indent="0" marL="0">
               <a:spcAft>
                 <a:spcPts val="300"/>
               </a:spcAft>
-              <a:buSzPct val="100000"/>
-              <a:buChar char="•"/>
-            </a:pPr>
-            <a:r>
-              <a:rPr lang="en-US" sz="850" dirty="0">
+              <a:buNone/>
+            </a:pPr>
+            <a:r>
+              <a:rPr lang="en-US" sz="750" dirty="0">
                 <a:solidFill>
                   <a:srgbClr val="0B0B0B"/>
                 </a:solidFill>
@@ -6238,98 +6623,15 @@
                 <a:ea typeface="Malgun Gothic" pitchFamily="34" charset="-122"/>
                 <a:cs typeface="Malgun Gothic" pitchFamily="34" charset="-120"/>
               </a:rPr>
-              <a:t>특허·특허법인·변리사·특허사무소 입찰 낮추거나 제외("특허출원"은 남김)</a:t>
-            </a:r>
-            <a:endParaRPr lang="en-US" sz="850" dirty="0"/>
-          </a:p>
-          <a:p>
-            <a:pPr marL="127000" indent="-127000">
-              <a:spcAft>
-                <a:spcPts val="300"/>
-              </a:spcAft>
-              <a:buSzPct val="100000"/>
-              <a:buChar char="•"/>
-            </a:pPr>
-            <a:r>
-              <a:rPr lang="en-US" sz="850" dirty="0">
-                <a:solidFill>
-                  <a:srgbClr val="0B0B0B"/>
-                </a:solidFill>
-                <a:latin typeface="Malgun Gothic" pitchFamily="34" charset="0"/>
-                <a:ea typeface="Malgun Gothic" pitchFamily="34" charset="-122"/>
-                <a:cs typeface="Malgun Gothic" pitchFamily="34" charset="-120"/>
-              </a:rPr>
-              <a:t>확장 검색은 성적 나쁜 그룹부터 끔, "변리사파견" 등 무관 노출 정리</a:t>
-            </a:r>
-            <a:endParaRPr lang="en-US" sz="850" dirty="0"/>
-          </a:p>
-          <a:p>
-            <a:pPr indent="0" marL="0">
-              <a:spcAft>
-                <a:spcPts val="300"/>
-              </a:spcAft>
-              <a:buNone/>
-            </a:pPr>
-            <a:r>
-              <a:rPr lang="en-US" sz="850" b="1" dirty="0">
-                <a:solidFill>
-                  <a:srgbClr val="2A78D6"/>
-                </a:solidFill>
-                <a:latin typeface="Malgun Gothic" pitchFamily="34" charset="0"/>
-                <a:ea typeface="Malgun Gothic" pitchFamily="34" charset="-122"/>
-                <a:cs typeface="Malgun Gothic" pitchFamily="34" charset="-120"/>
-              </a:rPr>
-              <a:t>늘림</a:t>
-            </a:r>
-            <a:endParaRPr lang="en-US" sz="850" dirty="0"/>
-          </a:p>
-          <a:p>
-            <a:pPr marL="127000" indent="-127000">
-              <a:spcAft>
-                <a:spcPts val="300"/>
-              </a:spcAft>
-              <a:buSzPct val="100000"/>
-              <a:buChar char="•"/>
-            </a:pPr>
-            <a:r>
-              <a:rPr lang="en-US" sz="850" dirty="0">
-                <a:solidFill>
-                  <a:srgbClr val="0B0B0B"/>
-                </a:solidFill>
-                <a:latin typeface="Malgun Gothic" pitchFamily="34" charset="0"/>
-                <a:ea typeface="Malgun Gothic" pitchFamily="34" charset="-122"/>
-                <a:cs typeface="Malgun Gothic" pitchFamily="34" charset="-120"/>
-              </a:rPr>
-              <a:t>지방 키워드(클릭률 1.9%, 클릭당 706원, 변리사 선호)</a:t>
-            </a:r>
-            <a:endParaRPr lang="en-US" sz="850" dirty="0"/>
-          </a:p>
-          <a:p>
-            <a:pPr marL="127000" indent="-127000">
-              <a:spcAft>
-                <a:spcPts val="300"/>
-              </a:spcAft>
-              <a:buSzPct val="100000"/>
-              <a:buChar char="•"/>
-            </a:pPr>
-            <a:r>
-              <a:rPr lang="en-US" sz="850" dirty="0">
-                <a:solidFill>
-                  <a:srgbClr val="0B0B0B"/>
-                </a:solidFill>
-                <a:latin typeface="Malgun Gothic" pitchFamily="34" charset="0"/>
-                <a:ea typeface="Malgun Gothic" pitchFamily="34" charset="-122"/>
-                <a:cs typeface="Malgun Gothic" pitchFamily="34" charset="-120"/>
-              </a:rPr>
-              <a:t>심사관출신 그룹(클릭률 1위, 비용 2.5%)</a:t>
-            </a:r>
-            <a:endParaRPr lang="en-US" sz="850" dirty="0"/>
+              <a:t>늘림: 지방 키워드(클릭률 1.9%, 클릭당 706원, 변리사 선호), 심사관출신 그룹(클릭률 1위, 비용 2.5%)</a:t>
+            </a:r>
+            <a:endParaRPr lang="en-US" sz="750" dirty="0"/>
           </a:p>
         </p:txBody>
       </p:sp>
       <p:sp>
         <p:nvSpPr>
-          <p:cNvPr id="20" name="Shape 17"/>
+          <p:cNvPr id="23" name="Shape 19"/>
           <p:cNvSpPr/>
           <p:nvPr/>
         </p:nvSpPr>
@@ -6352,7 +6654,7 @@
       </p:sp>
       <p:sp>
         <p:nvSpPr>
-          <p:cNvPr id="21" name="Text 18"/>
+          <p:cNvPr id="24" name="Text 20"/>
           <p:cNvSpPr txBox="1"/>
           <p:nvPr/>
         </p:nvSpPr>

--- a/slides.pptx
+++ b/slides.pptx
@@ -598,9 +598,9 @@
           </c:dLbls>
           <c:cat>
             <c:multiLvlStrRef>
-              <c:f>Sheet1!$A$2:$A$8</c:f>
+              <c:f>Sheet1!$A$2:$A$10</c:f>
               <c:multiLvlStrCache>
-                <c:ptCount val="7"/>
+                <c:ptCount val="9"/>
                 <c:lvl>
                   <c:pt idx="0">
                     <c:v>2015</c:v>
@@ -622,6 +622,12 @@
                   </c:pt>
                   <c:pt idx="6">
                     <c:v>2024</c:v>
+                  </c:pt>
+                  <c:pt idx="7">
+                    <c:v>2025*</c:v>
+                  </c:pt>
+                  <c:pt idx="8">
+                    <c:v>2026*</c:v>
                   </c:pt>
                 </c:lvl>
               </c:multiLvlStrCache>
@@ -629,10 +635,10 @@
           </c:cat>
           <c:val>
             <c:numRef>
-              <c:f>Sheet1!$B$2:$B$8</c:f>
+              <c:f>Sheet1!$B$2:$B$10</c:f>
               <c:numCache>
                 <c:formatCode>General</c:formatCode>
-                <c:ptCount val="7"/>
+                <c:ptCount val="9"/>
                 <c:pt idx="0">
                   <c:v>11253</c:v>
                 </c:pt>
@@ -653,6 +659,12 @@
                 </c:pt>
                 <c:pt idx="6">
                   <c:v>3812</c:v>
+                </c:pt>
+                <c:pt idx="7">
+                  <c:v>0</c:v>
+                </c:pt>
+                <c:pt idx="8">
+                  <c:v>0</c:v>
                 </c:pt>
               </c:numCache>
             </c:numRef>
@@ -705,9 +717,9 @@
           </c:dLbls>
           <c:cat>
             <c:multiLvlStrRef>
-              <c:f>Sheet1!$A$2:$A$8</c:f>
+              <c:f>Sheet1!$A$2:$A$10</c:f>
               <c:multiLvlStrCache>
-                <c:ptCount val="7"/>
+                <c:ptCount val="9"/>
                 <c:lvl>
                   <c:pt idx="0">
                     <c:v>2015</c:v>
@@ -729,6 +741,12 @@
                   </c:pt>
                   <c:pt idx="6">
                     <c:v>2024</c:v>
+                  </c:pt>
+                  <c:pt idx="7">
+                    <c:v>2025*</c:v>
+                  </c:pt>
+                  <c:pt idx="8">
+                    <c:v>2026*</c:v>
                   </c:pt>
                 </c:lvl>
               </c:multiLvlStrCache>
@@ -736,10 +754,10 @@
           </c:cat>
           <c:val>
             <c:numRef>
-              <c:f>Sheet1!$C$2:$C$8</c:f>
+              <c:f>Sheet1!$C$2:$C$10</c:f>
               <c:numCache>
                 <c:formatCode>General</c:formatCode>
-                <c:ptCount val="7"/>
+                <c:ptCount val="9"/>
                 <c:pt idx="0">
                   <c:v>0</c:v>
                 </c:pt>
@@ -760,6 +778,131 @@
                 </c:pt>
                 <c:pt idx="6">
                   <c:v>0</c:v>
+                </c:pt>
+                <c:pt idx="7">
+                  <c:v>0</c:v>
+                </c:pt>
+                <c:pt idx="8">
+                  <c:v>0</c:v>
+                </c:pt>
+              </c:numCache>
+            </c:numRef>
+          </c:val>
+        </c:ser>
+        <c:ser>
+          <c:idx val="2"/>
+          <c:order val="2"/>
+          <c:tx>
+            <c:strRef>
+              <c:f>Sheet1!$D$1</c:f>
+              <c:strCache>
+                <c:ptCount val="1"/>
+                <c:pt idx="0">
+                  <c:v>신뢰 낮음</c:v>
+                </c:pt>
+              </c:strCache>
+            </c:strRef>
+          </c:tx>
+          <c:spPr>
+            <a:solidFill>
+              <a:srgbClr val="E3E8EA"/>
+            </a:solidFill>
+            <a:effectLst/>
+          </c:spPr>
+          <c:invertIfNegative val="0"/>
+          <c:dLbls>
+            <c:numFmt formatCode="#,##0;;;" sourceLinked="0"/>
+            <c:txPr>
+              <a:bodyPr/>
+              <a:lstStyle/>
+              <a:p>
+                <a:pPr>
+                  <a:defRPr b="0" i="0" strike="noStrike" sz="650" u="none">
+                    <a:solidFill>
+                      <a:srgbClr val="0B0B0B"/>
+                    </a:solidFill>
+                    <a:latin typeface="Arial"/>
+                  </a:defRPr>
+                </a:pPr>
+              </a:p>
+            </c:txPr>
+            <c:showLegendKey val="0"/>
+            <c:showVal val="1"/>
+            <c:showCatName val="0"/>
+            <c:showSerName val="0"/>
+            <c:showPercent val="0"/>
+            <c:showBubbleSize val="0"/>
+            <c:showLeaderLines val="0"/>
+          </c:dLbls>
+          <c:cat>
+            <c:multiLvlStrRef>
+              <c:f>Sheet1!$A$2:$A$10</c:f>
+              <c:multiLvlStrCache>
+                <c:ptCount val="9"/>
+                <c:lvl>
+                  <c:pt idx="0">
+                    <c:v>2015</c:v>
+                  </c:pt>
+                  <c:pt idx="1">
+                    <c:v>2018</c:v>
+                  </c:pt>
+                  <c:pt idx="2">
+                    <c:v>2020</c:v>
+                  </c:pt>
+                  <c:pt idx="3">
+                    <c:v>2021</c:v>
+                  </c:pt>
+                  <c:pt idx="4">
+                    <c:v>2022</c:v>
+                  </c:pt>
+                  <c:pt idx="5">
+                    <c:v>2023</c:v>
+                  </c:pt>
+                  <c:pt idx="6">
+                    <c:v>2024</c:v>
+                  </c:pt>
+                  <c:pt idx="7">
+                    <c:v>2025*</c:v>
+                  </c:pt>
+                  <c:pt idx="8">
+                    <c:v>2026*</c:v>
+                  </c:pt>
+                </c:lvl>
+              </c:multiLvlStrCache>
+            </c:multiLvlStrRef>
+          </c:cat>
+          <c:val>
+            <c:numRef>
+              <c:f>Sheet1!$D$2:$D$10</c:f>
+              <c:numCache>
+                <c:formatCode>General</c:formatCode>
+                <c:ptCount val="9"/>
+                <c:pt idx="0">
+                  <c:v>0</c:v>
+                </c:pt>
+                <c:pt idx="1">
+                  <c:v>0</c:v>
+                </c:pt>
+                <c:pt idx="2">
+                  <c:v>0</c:v>
+                </c:pt>
+                <c:pt idx="3">
+                  <c:v>0</c:v>
+                </c:pt>
+                <c:pt idx="4">
+                  <c:v>0</c:v>
+                </c:pt>
+                <c:pt idx="5">
+                  <c:v>0</c:v>
+                </c:pt>
+                <c:pt idx="6">
+                  <c:v>0</c:v>
+                </c:pt>
+                <c:pt idx="7">
+                  <c:v>8887</c:v>
+                </c:pt>
+                <c:pt idx="8">
+                  <c:v>8799</c:v>
                 </c:pt>
               </c:numCache>
             </c:numRef>
@@ -4203,7 +4346,7 @@
                 <a:ea typeface="Malgun Gothic" pitchFamily="34" charset="-122"/>
                 <a:cs typeface="Malgun Gothic" pitchFamily="34" charset="-120"/>
               </a:rPr>
-              <a:t>실제 방문 추정 = 전체 − 봇 추정(OS "Robot"·"Linux" 방문). 접속자통계 연도별·OS별 방문자, 같은 IP는 하루 1회</a:t>
+              <a:t>실제 방문 추정 = 전체 − 봇 추정(OS "Robot"·"Linux" 방문). 접속자통계 연도별·OS별 방문자, 같은 IP는 하루 1회. *2025·26은 신뢰 낮음(연한 색), 2026은 10-06까지</a:t>
             </a:r>
             <a:endParaRPr lang="en-US" sz="700" dirty="0"/>
           </a:p>

--- a/slides.pptx
+++ b/slides.pptx
@@ -4346,7 +4346,7 @@
                 <a:ea typeface="Malgun Gothic" pitchFamily="34" charset="-122"/>
                 <a:cs typeface="Malgun Gothic" pitchFamily="34" charset="-120"/>
               </a:rPr>
-              <a:t>실제 방문 추정 = 전체 − 봇 추정(OS "Robot"·"Linux" 방문). 접속자통계 연도별·OS별 방문자, 같은 IP는 하루 1회. *2025·26은 신뢰 낮음(연한 색), 2026은 10-06까지</a:t>
+              <a:t>실제 방문 = 전체 − 봇(OS Robot·Linux). *2025·26은 신뢰 낮음</a:t>
             </a:r>
             <a:endParaRPr lang="en-US" sz="700" dirty="0"/>
           </a:p>
@@ -4825,7 +4825,7 @@
               <a:buNone/>
             </a:pPr>
             <a:r>
-              <a:rPr lang="en-US" sz="700" dirty="0">
+              <a:rPr lang="en-US" sz="800" dirty="0">
                 <a:solidFill>
                   <a:srgbClr val="52514E"/>
                 </a:solidFill>
@@ -4833,16 +4833,16 @@
                 <a:ea typeface="Malgun Gothic" pitchFamily="34" charset="-122"/>
                 <a:cs typeface="Malgun Gothic" pitchFamily="34" charset="-120"/>
               </a:rPr>
-              <a:t>출처: 관리자 페이지 문자 전송내역 2014-11 ~ 2026-10-05, 2,895건 → 스팸 254건 제외 2,641건. 접속자통계 연도별·OS별 방문자(같은 IP는 하루 1회). 236건 분해는 셰이플리(순서에 따라 36~71%라 평균)</a:t>
-            </a:r>
-            <a:endParaRPr lang="en-US" sz="700" dirty="0"/>
+              <a:t>출처: 신청 알림 문자 2014-11 ~ 2026-10-05, 2,895건 → 스팸 254건 제외 2,641건. 접속자통계 연도별·OS별 방문자. 236건 분해는 셰이플리</a:t>
+            </a:r>
+            <a:endParaRPr lang="en-US" sz="800" dirty="0"/>
           </a:p>
           <a:p>
             <a:pPr indent="0" marL="0">
               <a:buNone/>
             </a:pPr>
             <a:r>
-              <a:rPr lang="en-US" sz="700" dirty="0">
+              <a:rPr lang="en-US" sz="800" dirty="0">
                 <a:solidFill>
                   <a:srgbClr val="52514E"/>
                 </a:solidFill>
@@ -4850,16 +4850,16 @@
                 <a:ea typeface="Malgun Gothic" pitchFamily="34" charset="-122"/>
                 <a:cs typeface="Malgun Gothic" pitchFamily="34" charset="-120"/>
               </a:rPr>
-              <a:t>봇 추정 근거: 2021-10부터 방문이 월 900 → 2,100인데 신청은 월 12 → 5. 급증분은 전부 유입 경로 없는 "직접", 시간대 0~23시 고름. 2025 신뢰 낮음: Robot 8,848 급증, Chrome도 두 배인데 신청은 그대로 → Chrome인 척하는 자동 접속 추정</a:t>
-            </a:r>
-            <a:endParaRPr lang="en-US" sz="700" dirty="0"/>
+              <a:t>봇 근거: 2021-10부터 방문 월 900 → 2,100인데 신청은 12 → 5, 급증분은 전부 경로 없는 "직접". 2025년은 Chrome인 척하는 자동 접속으로 추정</a:t>
+            </a:r>
+            <a:endParaRPr lang="en-US" sz="800" dirty="0"/>
           </a:p>
           <a:p>
             <a:pPr indent="0" marL="0">
               <a:buNone/>
             </a:pPr>
             <a:r>
-              <a:rPr lang="en-US" sz="700" dirty="0">
+              <a:rPr lang="en-US" sz="800" dirty="0">
                 <a:solidFill>
                   <a:srgbClr val="52514E"/>
                 </a:solidFill>
@@ -4869,7 +4869,7 @@
               </a:rPr>
               <a:t>손실 = 연 200건 감소 × 수임 10~20% × 수수료 300만 원. 목표 = 방문 3,812(2024) 그대로 두고 신청률만 4.6%로 되돌리면 177건</a:t>
             </a:r>
-            <a:endParaRPr lang="en-US" sz="700" dirty="0"/>
+            <a:endParaRPr lang="en-US" sz="800" dirty="0"/>
           </a:p>
         </p:txBody>
       </p:sp>
@@ -5057,7 +5057,7 @@
                 <a:ea typeface="Malgun Gothic" pitchFamily="34" charset="-122"/>
                 <a:cs typeface="Malgun Gothic" pitchFamily="34" charset="-120"/>
               </a:rPr>
-              <a:t>접속자통계 / 유입 도메인별 방문 8종 / 2016 ~ 2026-10-06 / "직접"(봇 대부분) 제외 / 서버는 유입 경로를 놓치는 경우가 많아 추이로만 봄 (광고 보고서 90일 클릭 388 vs 서버 9달 203)</a:t>
+              <a:t>경로별 연간 방문 (서버 기록, "직접" 제외. 출처를 놓치는 경우가 많아 추이로만 봄)</a:t>
             </a:r>
             <a:endParaRPr lang="en-US" sz="800" dirty="0"/>
           </a:p>
@@ -5216,7 +5216,7 @@
         <p:spPr>
           <a:xfrm>
             <a:off x="502920" y="2907792"/>
-            <a:ext cx="1920240" cy="182880"/>
+            <a:ext cx="1920240" cy="219456"/>
           </a:xfrm>
           <a:prstGeom prst="rect">
             <a:avLst/>
@@ -5232,7 +5232,7 @@
               <a:buNone/>
             </a:pPr>
             <a:r>
-              <a:rPr lang="en-US" sz="950" b="1" dirty="0">
+              <a:rPr lang="en-US" sz="1100" b="1" dirty="0">
                 <a:solidFill>
                   <a:srgbClr val="1BAF7A"/>
                 </a:solidFill>
@@ -5240,9 +5240,9 @@
                 <a:ea typeface="Malgun Gothic" pitchFamily="34" charset="-122"/>
                 <a:cs typeface="Malgun Gothic" pitchFamily="34" charset="-120"/>
               </a:rPr>
-              <a:t>1-2 다음</a:t>
-            </a:r>
-            <a:endParaRPr lang="en-US" sz="950" dirty="0"/>
+              <a:t>다음 −99%</a:t>
+            </a:r>
+            <a:endParaRPr lang="en-US" sz="1100" dirty="0"/>
           </a:p>
         </p:txBody>
       </p:sp>
@@ -5254,8 +5254,8 @@
         </p:nvSpPr>
         <p:spPr>
           <a:xfrm>
-            <a:off x="502920" y="3108960"/>
-            <a:ext cx="1920240" cy="1316736"/>
+            <a:off x="502920" y="3163824"/>
+            <a:ext cx="1920240" cy="1261872"/>
           </a:xfrm>
           <a:prstGeom prst="rect">
             <a:avLst/>
@@ -5274,7 +5274,7 @@
               <a:buNone/>
             </a:pPr>
             <a:r>
-              <a:rPr lang="en-US" sz="700" dirty="0">
+              <a:rPr lang="en-US" sz="900" dirty="0">
                 <a:solidFill>
                   <a:srgbClr val="0B0B0B"/>
                 </a:solidFill>
@@ -5282,9 +5282,9 @@
                 <a:ea typeface="Malgun Gothic" pitchFamily="34" charset="-122"/>
                 <a:cs typeface="Malgun Gothic" pitchFamily="34" charset="-120"/>
               </a:rPr>
-              <a:t>변리사 답: 다음 광고·등록 중단. 그 외 사무소 내부 변화 없음</a:t>
-            </a:r>
-            <a:endParaRPr lang="en-US" sz="700" dirty="0"/>
+              <a:t>다음 광고·등록 중단 (확인된 원인)</a:t>
+            </a:r>
+            <a:endParaRPr lang="en-US" sz="900" dirty="0"/>
           </a:p>
           <a:p>
             <a:pPr indent="0" marL="0">
@@ -5294,47 +5294,7 @@
               <a:buNone/>
             </a:pPr>
             <a:r>
-              <a:rPr lang="en-US" sz="700" dirty="0">
-                <a:solidFill>
-                  <a:srgbClr val="0B0B0B"/>
-                </a:solidFill>
-                <a:latin typeface="Malgun Gothic" pitchFamily="34" charset="0"/>
-                <a:ea typeface="Malgun Gothic" pitchFamily="34" charset="-122"/>
-                <a:cs typeface="Malgun Gothic" pitchFamily="34" charset="-120"/>
-              </a:rPr>
-              <a:t>2015~2020년 연 640~1,620 → 2022년 7</a:t>
-            </a:r>
-            <a:endParaRPr lang="en-US" sz="700" dirty="0"/>
-          </a:p>
-          <a:p>
-            <a:pPr indent="0" marL="0">
-              <a:spcAft>
-                <a:spcPts val="300"/>
-              </a:spcAft>
-              <a:buNone/>
-            </a:pPr>
-            <a:r>
-              <a:rPr lang="en-US" sz="700" dirty="0">
-                <a:solidFill>
-                  <a:srgbClr val="0B0B0B"/>
-                </a:solidFill>
-                <a:latin typeface="Malgun Gothic" pitchFamily="34" charset="0"/>
-                <a:ea typeface="Malgun Gothic" pitchFamily="34" charset="-122"/>
-                <a:cs typeface="Malgun Gothic" pitchFamily="34" charset="-120"/>
-              </a:rPr>
-              <a:t>=&gt; 확인된 원인. 중단 시점이 2021-05이면 신청이 처음 꺾인 달(2장)과 일치</a:t>
-            </a:r>
-            <a:endParaRPr lang="en-US" sz="700" dirty="0"/>
-          </a:p>
-          <a:p>
-            <a:pPr indent="0" marL="0">
-              <a:spcAft>
-                <a:spcPts val="300"/>
-              </a:spcAft>
-              <a:buNone/>
-            </a:pPr>
-            <a:r>
-              <a:rPr lang="en-US" sz="700" b="1" dirty="0">
+              <a:rPr lang="en-US" sz="900" b="1" dirty="0">
                 <a:solidFill>
                   <a:srgbClr val="2A78D6"/>
                 </a:solidFill>
@@ -5342,9 +5302,9 @@
                 <a:ea typeface="Malgun Gothic" pitchFamily="34" charset="-122"/>
                 <a:cs typeface="Malgun Gothic" pitchFamily="34" charset="-120"/>
               </a:rPr>
-              <a:t>=&gt; action item: 다음(카카오) 재개. 2020년 수준(644)이면 연 30건, 수임 3~6건 = 매출 연 900만~1,800만 원. 비용은 네이버 단가(1,891원)면 연 약 120만 원. 손익분기 클릭당 14,000~28,000원</a:t>
-            </a:r>
-            <a:endParaRPr lang="en-US" sz="700" dirty="0"/>
+              <a:t>→ 다음 재개. 연 30건, 매출 900만~1,800만 원. 비용은 네이버 단가면 연 120만 원</a:t>
+            </a:r>
+            <a:endParaRPr lang="en-US" sz="900" dirty="0"/>
           </a:p>
         </p:txBody>
       </p:sp>
@@ -5382,7 +5342,7 @@
         <p:spPr>
           <a:xfrm>
             <a:off x="2606040" y="2907792"/>
-            <a:ext cx="1920240" cy="182880"/>
+            <a:ext cx="1920240" cy="219456"/>
           </a:xfrm>
           <a:prstGeom prst="rect">
             <a:avLst/>
@@ -5398,7 +5358,7 @@
               <a:buNone/>
             </a:pPr>
             <a:r>
-              <a:rPr lang="en-US" sz="950" b="1" dirty="0">
+              <a:rPr lang="en-US" sz="1100" b="1" dirty="0">
                 <a:solidFill>
                   <a:srgbClr val="EB6834"/>
                 </a:solidFill>
@@ -5406,9 +5366,9 @@
                 <a:ea typeface="Malgun Gothic" pitchFamily="34" charset="-122"/>
                 <a:cs typeface="Malgun Gothic" pitchFamily="34" charset="-120"/>
               </a:rPr>
-              <a:t>1-3 블로그</a:t>
-            </a:r>
-            <a:endParaRPr lang="en-US" sz="950" dirty="0"/>
+              <a:t>네이버 블로그 −93%</a:t>
+            </a:r>
+            <a:endParaRPr lang="en-US" sz="1100" dirty="0"/>
           </a:p>
         </p:txBody>
       </p:sp>
@@ -5420,8 +5380,8 @@
         </p:nvSpPr>
         <p:spPr>
           <a:xfrm>
-            <a:off x="2606040" y="3108960"/>
-            <a:ext cx="1920240" cy="1316736"/>
+            <a:off x="2606040" y="3163824"/>
+            <a:ext cx="1920240" cy="1261872"/>
           </a:xfrm>
           <a:prstGeom prst="rect">
             <a:avLst/>
@@ -5440,7 +5400,7 @@
               <a:buNone/>
             </a:pPr>
             <a:r>
-              <a:rPr lang="en-US" sz="700" dirty="0">
+              <a:rPr lang="en-US" sz="900" dirty="0">
                 <a:solidFill>
                   <a:srgbClr val="0B0B0B"/>
                 </a:solidFill>
@@ -5448,9 +5408,9 @@
                 <a:ea typeface="Malgun Gothic" pitchFamily="34" charset="-122"/>
                 <a:cs typeface="Malgun Gothic" pitchFamily="34" charset="-120"/>
               </a:rPr>
-              <a:t>글 2,736건의 날짜·제목, 최근 50건 본문 / 2014 ~ 2026</a:t>
-            </a:r>
-            <a:endParaRPr lang="en-US" sz="700" dirty="0"/>
+              <a:t>글의 양은 원인 아님 (가장 많이 쓴 2020~21년에 600 → 118)</a:t>
+            </a:r>
+            <a:endParaRPr lang="en-US" sz="900" dirty="0"/>
           </a:p>
           <a:p>
             <a:pPr indent="0" marL="0">
@@ -5460,7 +5420,7 @@
               <a:buNone/>
             </a:pPr>
             <a:r>
-              <a:rPr lang="en-US" sz="700" dirty="0">
+              <a:rPr lang="en-US" sz="900" dirty="0">
                 <a:solidFill>
                   <a:srgbClr val="0B0B0B"/>
                 </a:solidFill>
@@ -5468,9 +5428,9 @@
                 <a:ea typeface="Malgun Gothic" pitchFamily="34" charset="-122"/>
                 <a:cs typeface="Malgun Gothic" pitchFamily="34" charset="-120"/>
               </a:rPr>
-              <a:t>=&gt; 글의 양은 원인 아님 (가장 많이 쓴 2020~21년에 600 → 118)</a:t>
-            </a:r>
-            <a:endParaRPr lang="en-US" sz="700" dirty="0"/>
+              <a:t>글 형태 변화 + 네이버 노출 방식 변화로 추정</a:t>
+            </a:r>
+            <a:endParaRPr lang="en-US" sz="900" dirty="0"/>
           </a:p>
           <a:p>
             <a:pPr indent="0" marL="0">
@@ -5480,47 +5440,7 @@
               <a:buNone/>
             </a:pPr>
             <a:r>
-              <a:rPr lang="en-US" sz="700" dirty="0">
-                <a:solidFill>
-                  <a:srgbClr val="0B0B0B"/>
-                </a:solidFill>
-                <a:latin typeface="Malgun Gothic" pitchFamily="34" charset="0"/>
-                <a:ea typeface="Malgun Gothic" pitchFamily="34" charset="-122"/>
-                <a:cs typeface="Malgun Gothic" pitchFamily="34" charset="-120"/>
-              </a:rPr>
-              <a:t>=&gt; 후보 1: 글 형태 변화(읽을 글 → 실적 리스트). 2016년 정점 뒤 계단식 감소와 일치</a:t>
-            </a:r>
-            <a:endParaRPr lang="en-US" sz="700" dirty="0"/>
-          </a:p>
-          <a:p>
-            <a:pPr indent="0" marL="0">
-              <a:spcAft>
-                <a:spcPts val="300"/>
-              </a:spcAft>
-              <a:buNone/>
-            </a:pPr>
-            <a:r>
-              <a:rPr lang="en-US" sz="700" dirty="0">
-                <a:solidFill>
-                  <a:srgbClr val="0B0B0B"/>
-                </a:solidFill>
-                <a:latin typeface="Malgun Gothic" pitchFamily="34" charset="0"/>
-                <a:ea typeface="Malgun Gothic" pitchFamily="34" charset="-122"/>
-                <a:cs typeface="Malgun Gothic" pitchFamily="34" charset="-120"/>
-              </a:rPr>
-              <a:t>=&gt; 후보 2: 네이버 노출 방식 변화(2016 C-Rank, 2018 VIEW, 2021-10 스마트블록). 둘이 겹친 것으로 봄</a:t>
-            </a:r>
-            <a:endParaRPr lang="en-US" sz="700" dirty="0"/>
-          </a:p>
-          <a:p>
-            <a:pPr indent="0" marL="0">
-              <a:spcAft>
-                <a:spcPts val="300"/>
-              </a:spcAft>
-              <a:buNone/>
-            </a:pPr>
-            <a:r>
-              <a:rPr lang="en-US" sz="700" b="1" dirty="0">
+              <a:rPr lang="en-US" sz="900" b="1" dirty="0">
                 <a:solidFill>
                   <a:srgbClr val="2A78D6"/>
                 </a:solidFill>
@@ -5528,9 +5448,9 @@
                 <a:ea typeface="Malgun Gothic" pitchFamily="34" charset="-122"/>
                 <a:cs typeface="Malgun Gothic" pitchFamily="34" charset="-120"/>
               </a:rPr>
-              <a:t>=&gt; action item: 읽을 내용이 있는 글로. 광고비 없는 경로지만 효과는 몇 년, 네이버에 달림</a:t>
-            </a:r>
-            <a:endParaRPr lang="en-US" sz="700" dirty="0"/>
+              <a:t>→ 읽을 내용이 있는 글로</a:t>
+            </a:r>
+            <a:endParaRPr lang="en-US" sz="900" dirty="0"/>
           </a:p>
         </p:txBody>
       </p:sp>
@@ -5568,7 +5488,7 @@
         <p:spPr>
           <a:xfrm>
             <a:off x="4709160" y="2907792"/>
-            <a:ext cx="1920240" cy="182880"/>
+            <a:ext cx="1920240" cy="219456"/>
           </a:xfrm>
           <a:prstGeom prst="rect">
             <a:avLst/>
@@ -5584,7 +5504,7 @@
               <a:buNone/>
             </a:pPr>
             <a:r>
-              <a:rPr lang="en-US" sz="950" b="1" dirty="0">
+              <a:rPr lang="en-US" sz="1100" b="1" dirty="0">
                 <a:solidFill>
                   <a:srgbClr val="2A78D6"/>
                 </a:solidFill>
@@ -5592,9 +5512,9 @@
                 <a:ea typeface="Malgun Gothic" pitchFamily="34" charset="-122"/>
                 <a:cs typeface="Malgun Gothic" pitchFamily="34" charset="-120"/>
               </a:rPr>
-              <a:t>1-4 네이버 검색</a:t>
-            </a:r>
-            <a:endParaRPr lang="en-US" sz="950" dirty="0"/>
+              <a:t>네이버 검색 −54%</a:t>
+            </a:r>
+            <a:endParaRPr lang="en-US" sz="1100" dirty="0"/>
           </a:p>
         </p:txBody>
       </p:sp>
@@ -5606,8 +5526,8 @@
         </p:nvSpPr>
         <p:spPr>
           <a:xfrm>
-            <a:off x="4709160" y="3108960"/>
-            <a:ext cx="1920240" cy="1316736"/>
+            <a:off x="4709160" y="3163824"/>
+            <a:ext cx="1920240" cy="1261872"/>
           </a:xfrm>
           <a:prstGeom prst="rect">
             <a:avLst/>
@@ -5626,7 +5546,7 @@
               <a:buNone/>
             </a:pPr>
             <a:r>
-              <a:rPr lang="en-US" sz="700" dirty="0">
+              <a:rPr lang="en-US" sz="900" dirty="0">
                 <a:solidFill>
                   <a:srgbClr val="0B0B0B"/>
                 </a:solidFill>
@@ -5634,9 +5554,9 @@
                 <a:ea typeface="Malgun Gothic" pitchFamily="34" charset="-122"/>
                 <a:cs typeface="Malgun Gothic" pitchFamily="34" charset="-120"/>
               </a:rPr>
-              <a:t>광고 아닌 네이버 검색 결과에서 온 방문. 4,902(2016) → 2,220(2020) → 1,028(2022) → 776(2026). 블로그와 같은 시기, 같은 방향</a:t>
-            </a:r>
-            <a:endParaRPr lang="en-US" sz="700" dirty="0"/>
+              <a:t>사이트 글자가 전부 이미지라 검색엔진이 못 읽음 (추정)</a:t>
+            </a:r>
+            <a:endParaRPr lang="en-US" sz="900" dirty="0"/>
           </a:p>
           <a:p>
             <a:pPr indent="0" marL="0">
@@ -5646,27 +5566,7 @@
               <a:buNone/>
             </a:pPr>
             <a:r>
-              <a:rPr lang="en-US" sz="700" dirty="0">
-                <a:solidFill>
-                  <a:srgbClr val="0B0B0B"/>
-                </a:solidFill>
-                <a:latin typeface="Malgun Gothic" pitchFamily="34" charset="0"/>
-                <a:ea typeface="Malgun Gothic" pitchFamily="34" charset="-122"/>
-                <a:cs typeface="Malgun Gothic" pitchFamily="34" charset="-120"/>
-              </a:rPr>
-              <a:t>=&gt; 사이트 쪽(글자가 전부 이미지라 검색엔진이 못 읽음) + 네이버 쪽(1-3과 같은 개편). 과거 검색 순위 자료가 없어 비중은 모름</a:t>
-            </a:r>
-            <a:endParaRPr lang="en-US" sz="700" dirty="0"/>
-          </a:p>
-          <a:p>
-            <a:pPr indent="0" marL="0">
-              <a:spcAft>
-                <a:spcPts val="300"/>
-              </a:spcAft>
-              <a:buNone/>
-            </a:pPr>
-            <a:r>
-              <a:rPr lang="en-US" sz="700" b="1" dirty="0">
+              <a:rPr lang="en-US" sz="900" b="1" dirty="0">
                 <a:solidFill>
                   <a:srgbClr val="2A78D6"/>
                 </a:solidFill>
@@ -5674,9 +5574,9 @@
                 <a:ea typeface="Malgun Gothic" pitchFamily="34" charset="-122"/>
                 <a:cs typeface="Malgun Gothic" pitchFamily="34" charset="-120"/>
               </a:rPr>
-              <a:t>=&gt; action item: 리뉴얼로 글자를 텍스트로. 그 뒤 유입이 늘면 사이트 쪽 원인이 컸던 것</a:t>
-            </a:r>
-            <a:endParaRPr lang="en-US" sz="700" dirty="0"/>
+              <a:t>→ 리뉴얼로 글자를 텍스트로. 유입이 늘면 확인</a:t>
+            </a:r>
+            <a:endParaRPr lang="en-US" sz="900" dirty="0"/>
           </a:p>
         </p:txBody>
       </p:sp>
@@ -5714,7 +5614,7 @@
         <p:spPr>
           <a:xfrm>
             <a:off x="6812280" y="2907792"/>
-            <a:ext cx="1920240" cy="182880"/>
+            <a:ext cx="1920240" cy="219456"/>
           </a:xfrm>
           <a:prstGeom prst="rect">
             <a:avLst/>
@@ -5730,7 +5630,7 @@
               <a:buNone/>
             </a:pPr>
             <a:r>
-              <a:rPr lang="en-US" sz="950" b="1" dirty="0">
+              <a:rPr lang="en-US" sz="1100" b="1" dirty="0">
                 <a:solidFill>
                   <a:srgbClr val="C08A00"/>
                 </a:solidFill>
@@ -5738,9 +5638,9 @@
                 <a:ea typeface="Malgun Gothic" pitchFamily="34" charset="-122"/>
                 <a:cs typeface="Malgun Gothic" pitchFamily="34" charset="-120"/>
               </a:rPr>
-              <a:t>1-5 네이버 광고</a:t>
-            </a:r>
-            <a:endParaRPr lang="en-US" sz="950" dirty="0"/>
+              <a:t>네이버 광고 −40%</a:t>
+            </a:r>
+            <a:endParaRPr lang="en-US" sz="1100" dirty="0"/>
           </a:p>
         </p:txBody>
       </p:sp>
@@ -5752,8 +5652,8 @@
         </p:nvSpPr>
         <p:spPr>
           <a:xfrm>
-            <a:off x="6812280" y="3108960"/>
-            <a:ext cx="1920240" cy="1316736"/>
+            <a:off x="6812280" y="3163824"/>
+            <a:ext cx="1920240" cy="1261872"/>
           </a:xfrm>
           <a:prstGeom prst="rect">
             <a:avLst/>
@@ -5772,7 +5672,7 @@
               <a:buNone/>
             </a:pPr>
             <a:r>
-              <a:rPr lang="en-US" sz="700" dirty="0">
+              <a:rPr lang="en-US" sz="900" dirty="0">
                 <a:solidFill>
                   <a:srgbClr val="0B0B0B"/>
                 </a:solidFill>
@@ -5780,9 +5680,9 @@
                 <a:ea typeface="Malgun Gothic" pitchFamily="34" charset="-122"/>
                 <a:cs typeface="Malgun Gothic" pitchFamily="34" charset="-120"/>
               </a:rPr>
-              <a:t>옛 사이트 세션(1개월) 약 180, 그중 광고 주소로 온 방문 120 (GA4). 기기: 신청 페이지 142명 중 모바일 44%</a:t>
-            </a:r>
-            <a:endParaRPr lang="en-US" sz="700" dirty="0"/>
+              <a:t>실제 방문의 3분의 2가 광고. 모바일 44%, 사이트는 PC 폭 고정</a:t>
+            </a:r>
+            <a:endParaRPr lang="en-US" sz="900" dirty="0"/>
           </a:p>
           <a:p>
             <a:pPr indent="0" marL="0">
@@ -5792,47 +5692,7 @@
               <a:buNone/>
             </a:pPr>
             <a:r>
-              <a:rPr lang="en-US" sz="700" dirty="0">
-                <a:solidFill>
-                  <a:srgbClr val="0B0B0B"/>
-                </a:solidFill>
-                <a:latin typeface="Malgun Gothic" pitchFamily="34" charset="0"/>
-                <a:ea typeface="Malgun Gothic" pitchFamily="34" charset="-122"/>
-                <a:cs typeface="Malgun Gothic" pitchFamily="34" charset="-120"/>
-              </a:rPr>
-              <a:t>=&gt; 실제 방문의 3분의 2가 광고 → 랜딩은 광고 방문자 기준, 휴대폰부터 (사이트는 PC 폭 고정)</a:t>
-            </a:r>
-            <a:endParaRPr lang="en-US" sz="700" dirty="0"/>
-          </a:p>
-          <a:p>
-            <a:pPr indent="0" marL="0">
-              <a:spcAft>
-                <a:spcPts val="300"/>
-              </a:spcAft>
-              <a:buNone/>
-            </a:pPr>
-            <a:r>
-              <a:rPr lang="en-US" sz="700" dirty="0">
-                <a:solidFill>
-                  <a:srgbClr val="0B0B0B"/>
-                </a:solidFill>
-                <a:latin typeface="Malgun Gothic" pitchFamily="34" charset="0"/>
-                <a:ea typeface="Malgun Gothic" pitchFamily="34" charset="-122"/>
-                <a:cs typeface="Malgun Gothic" pitchFamily="34" charset="-120"/>
-              </a:rPr>
-              <a:t>=&gt; 첫 화면 경유는 광고 검색어가 사라지고 조회수가 두 번 셈</a:t>
-            </a:r>
-            <a:endParaRPr lang="en-US" sz="700" dirty="0"/>
-          </a:p>
-          <a:p>
-            <a:pPr indent="0" marL="0">
-              <a:spcAft>
-                <a:spcPts val="300"/>
-              </a:spcAft>
-              <a:buNone/>
-            </a:pPr>
-            <a:r>
-              <a:rPr lang="en-US" sz="700" b="1" dirty="0">
+              <a:rPr lang="en-US" sz="900" b="1" dirty="0">
                 <a:solidFill>
                   <a:srgbClr val="2A78D6"/>
                 </a:solidFill>
@@ -5840,9 +5700,9 @@
                 <a:ea typeface="Malgun Gothic" pitchFamily="34" charset="-122"/>
                 <a:cs typeface="Malgun Gothic" pitchFamily="34" charset="-120"/>
               </a:rPr>
-              <a:t>=&gt; action item: 리뉴얼에서는 광고가 바로 해당 페이지로</a:t>
-            </a:r>
-            <a:endParaRPr lang="en-US" sz="700" dirty="0"/>
+              <a:t>→ 랜딩은 광고 방문자 기준, 휴대폰부터</a:t>
+            </a:r>
+            <a:endParaRPr lang="en-US" sz="900" dirty="0"/>
           </a:p>
         </p:txBody>
       </p:sp>
@@ -5902,7 +5762,7 @@
                 <a:ea typeface="Malgun Gothic" pitchFamily="34" charset="-122"/>
                 <a:cs typeface="Malgun Gothic" pitchFamily="34" charset="-120"/>
               </a:rPr>
-              <a:t>출처: 관리자 페이지 접속자통계(유입 도메인별), 사무소 네이버 블로그 글 목록, GA4 2026-09-02 ~ 10-01(작업자 접속 섞인 "직접" 69세션 제외). 변리사 답은 기억에 의한 값</a:t>
+              <a:t>출처: 접속자통계 유입 도메인별 방문 2016 ~ 2026-10-06, 블로그 글 목록 2,736건, GA4 2026-09. 감소율은 2020 → 2022. 다음 중단은 변리사 확인</a:t>
             </a:r>
             <a:endParaRPr lang="en-US" sz="800" dirty="0"/>
           </a:p>
@@ -6557,7 +6417,7 @@
               <a:buNone/>
             </a:pPr>
             <a:r>
-              <a:rPr lang="en-US" sz="800" dirty="0">
+              <a:rPr lang="en-US" sz="850" dirty="0">
                 <a:solidFill>
                   <a:srgbClr val="0B0B0B"/>
                 </a:solidFill>
@@ -6565,9 +6425,9 @@
                 <a:ea typeface="Malgun Gothic" pitchFamily="34" charset="-122"/>
                 <a:cs typeface="Malgun Gothic" pitchFamily="34" charset="-120"/>
               </a:rPr>
-              <a:t>포괄 검색어가 노출 68%, 광고비 26%를 쓰고 클릭은 20%. 클릭당 비용은 같음(2,547원 대 2,434원). 피셔, 우연일 확률 0.1% 미만</a:t>
-            </a:r>
-            <a:endParaRPr lang="en-US" sz="800" dirty="0"/>
+              <a:t>포괄 검색어가 노출 68%, 광고비 26%를 쓰고 클릭은 20% (피셔, 우연일 확률 0.1% 미만)</a:t>
+            </a:r>
+            <a:endParaRPr lang="en-US" sz="850" dirty="0"/>
           </a:p>
           <a:p>
             <a:pPr indent="0" marL="0">
@@ -6577,7 +6437,7 @@
               <a:buNone/>
             </a:pPr>
             <a:r>
-              <a:rPr lang="en-US" sz="800" dirty="0">
+              <a:rPr lang="en-US" sz="850" dirty="0">
                 <a:solidFill>
                   <a:srgbClr val="0B0B0B"/>
                 </a:solidFill>
@@ -6585,9 +6445,9 @@
                 <a:ea typeface="Malgun Gothic" pitchFamily="34" charset="-122"/>
                 <a:cs typeface="Malgun Gothic" pitchFamily="34" charset="-120"/>
               </a:rPr>
-              <a:t>확장 검색은 직접 등록한 키워드의 절반만 눌림(0.32% 대 0.61%)</a:t>
-            </a:r>
-            <a:endParaRPr lang="en-US" sz="800" dirty="0"/>
+              <a:t>확장 검색은 직접 등록한 키워드의 절반만 눌림 (0.32% 대 0.61%)</a:t>
+            </a:r>
+            <a:endParaRPr lang="en-US" sz="850" dirty="0"/>
           </a:p>
         </p:txBody>
       </p:sp>
@@ -6663,7 +6523,7 @@
                 <a:ea typeface="Malgun Gothic" pitchFamily="34" charset="-122"/>
                 <a:cs typeface="Malgun Gothic" pitchFamily="34" charset="-120"/>
               </a:rPr>
-              <a:t>작년 정리 전후, 같은 90일. 2025년을 100으로. 18→15는 우연일 확률 73%(이항), 광고비대로 줄었다면 15건 이상일 확률 8%(포아송)</a:t>
+              <a:t>작년 정리 전후, 같은 90일. 2025년을 100으로. 광고비대로 줄지 않았다는 경향</a:t>
             </a:r>
             <a:endParaRPr lang="en-US" sz="800" dirty="0"/>
           </a:p>
@@ -6738,7 +6598,7 @@
               <a:buNone/>
             </a:pPr>
             <a:r>
-              <a:rPr lang="en-US" sz="750" dirty="0">
+              <a:rPr lang="en-US" sz="850" dirty="0">
                 <a:solidFill>
                   <a:srgbClr val="0B0B0B"/>
                 </a:solidFill>
@@ -6746,9 +6606,9 @@
                 <a:ea typeface="Malgun Gothic" pitchFamily="34" charset="-122"/>
                 <a:cs typeface="Malgun Gothic" pitchFamily="34" charset="-120"/>
               </a:rPr>
-              <a:t>뺌: 특허·특허법인·변리사·특허사무소 입찰 낮추거나 제외("특허출원"은 남김). 확장 검색은 성적 나쁜 그룹부터 끔, "변리사파견" 등 무관 노출 정리</a:t>
-            </a:r>
-            <a:endParaRPr lang="en-US" sz="750" dirty="0"/>
+              <a:t>뺌: 특허·변리사 등 포괄 검색어 입찰 낮추기, 확장 검색은 성적 나쁜 그룹부터 끔</a:t>
+            </a:r>
+            <a:endParaRPr lang="en-US" sz="850" dirty="0"/>
           </a:p>
           <a:p>
             <a:pPr indent="0" marL="0">
@@ -6758,7 +6618,7 @@
               <a:buNone/>
             </a:pPr>
             <a:r>
-              <a:rPr lang="en-US" sz="750" dirty="0">
+              <a:rPr lang="en-US" sz="850" dirty="0">
                 <a:solidFill>
                   <a:srgbClr val="0B0B0B"/>
                 </a:solidFill>
@@ -6766,9 +6626,9 @@
                 <a:ea typeface="Malgun Gothic" pitchFamily="34" charset="-122"/>
                 <a:cs typeface="Malgun Gothic" pitchFamily="34" charset="-120"/>
               </a:rPr>
-              <a:t>늘림: 지방 키워드(클릭률 1.9%, 클릭당 706원, 변리사 선호), 심사관출신 그룹(클릭률 1위, 비용 2.5%)</a:t>
-            </a:r>
-            <a:endParaRPr lang="en-US" sz="750" dirty="0"/>
+              <a:t>늘림: 지방 키워드(클릭률 1.9%, 706원), 심사관출신 그룹(클릭률 1위)</a:t>
+            </a:r>
+            <a:endParaRPr lang="en-US" sz="850" dirty="0"/>
           </a:p>
         </p:txBody>
       </p:sp>
@@ -6828,7 +6688,7 @@
                 <a:ea typeface="Malgun Gothic" pitchFamily="34" charset="-122"/>
                 <a:cs typeface="Malgun Gothic" pitchFamily="34" charset="-120"/>
               </a:rPr>
-              <a:t>출처: 네이버 검색광고 검색어 보고서 2026-07-06 ~ 10-03(90일, 27,277행), 비교용 2025-07-02 ~ 09-29. GA4 2026-09-02 ~ 10-01(작업자 접속 69세션 제외)</a:t>
+              <a:t>출처: 네이버 검색광고 검색어 보고서 2026-07-06 ~ 10-03(90일, 27,277행), 비교용 2025-07-02 ~ 09-29. GA4 2026-09(작업자 접속 제외)</a:t>
             </a:r>
             <a:endParaRPr lang="en-US" sz="800" dirty="0"/>
           </a:p>
@@ -6845,7 +6705,7 @@
                 <a:ea typeface="Malgun Gothic" pitchFamily="34" charset="-122"/>
                 <a:cs typeface="Malgun Gothic" pitchFamily="34" charset="-120"/>
               </a:rPr>
-              <a:t>검색어 9,383개를 글자 규칙으로 유형 분류(클릭 난 231개는 검산). 한계: 전환 측정이 없어 클릭까지만 봄. 확장 검색의 실제 검색어는 보고서에 안 나옴</a:t>
+              <a:t>검색어 9,383개를 뜻으로 유형 분류. 한계: 전환 측정이 없어 클릭까지만 봄</a:t>
             </a:r>
             <a:endParaRPr lang="en-US" sz="800" dirty="0"/>
           </a:p>
@@ -7575,7 +7435,7 @@
               <a:buNone/>
             </a:pPr>
             <a:r>
-              <a:rPr lang="en-US" sz="750" dirty="0">
+              <a:rPr lang="en-US" sz="800" dirty="0">
                 <a:solidFill>
                   <a:srgbClr val="52514E"/>
                 </a:solidFill>
@@ -7583,9 +7443,9 @@
                 <a:ea typeface="Malgun Gothic" pitchFamily="34" charset="-122"/>
                 <a:cs typeface="Malgun Gothic" pitchFamily="34" charset="-120"/>
               </a:rPr>
-              <a:t>광고 100번 눌리면 4명 신청, 수임은 1건 미만(90일). 수임 1건당 광고비 24만~98만 원 = 수수료의 8~33% → 광고는 남음</a:t>
-            </a:r>
-            <a:endParaRPr lang="en-US" sz="750" dirty="0"/>
+              <a:t>광고 100번 눌리면 4명 신청, 수임은 1건 미만. 수임 1건당 광고비는 수수료의 8~33% → 광고는 남음</a:t>
+            </a:r>
+            <a:endParaRPr lang="en-US" sz="800" dirty="0"/>
           </a:p>
         </p:txBody>
       </p:sp>
@@ -7708,7 +7568,7 @@
               <a:buNone/>
             </a:pPr>
             <a:r>
-              <a:rPr lang="en-US" sz="850" b="1" dirty="0">
+              <a:rPr lang="en-US" sz="900" b="1" dirty="0">
                 <a:solidFill>
                   <a:srgbClr val="2A78D6"/>
                 </a:solidFill>
@@ -7716,9 +7576,9 @@
                 <a:ea typeface="Malgun Gothic" pitchFamily="34" charset="-122"/>
                 <a:cs typeface="Malgun Gothic" pitchFamily="34" charset="-120"/>
               </a:rPr>
-              <a:t>→ 18초 안에 "누가·무엇을·무료로", 읽기 끝에 간편 신청, 휴대폰 대응, 비용·절차 블록</a:t>
-            </a:r>
-            <a:endParaRPr lang="en-US" sz="850" dirty="0"/>
+              <a:t>→ 첫 화면에 "누가·무엇을·무료로", 읽기 끝에 간편 신청, 휴대폰 대응</a:t>
+            </a:r>
+            <a:endParaRPr lang="en-US" sz="900" dirty="0"/>
           </a:p>
         </p:txBody>
       </p:sp>
@@ -7842,7 +7702,7 @@
               <a:buNone/>
             </a:pPr>
             <a:r>
-              <a:rPr lang="en-US" sz="850" dirty="0">
+              <a:rPr lang="en-US" sz="900" dirty="0">
                 <a:solidFill>
                   <a:srgbClr val="0B0B0B"/>
                 </a:solidFill>
@@ -7850,9 +7710,9 @@
                 <a:ea typeface="Malgun Gothic" pitchFamily="34" charset="-122"/>
                 <a:cs typeface="Malgun Gothic" pitchFamily="34" charset="-120"/>
               </a:rPr>
-              <a:t>변리사 기억으로 수임 10건 중 1~2건. 직접 전화 문의 월 5건 이내, 어디서 번호를 봤는지 모름</a:t>
-            </a:r>
-            <a:endParaRPr lang="en-US" sz="850" dirty="0"/>
+              <a:t>수임률은 변리사 기억으로 10건 중 1~2건</a:t>
+            </a:r>
+            <a:endParaRPr lang="en-US" sz="900" dirty="0"/>
           </a:p>
           <a:p>
             <a:pPr indent="0" marL="0">
@@ -7862,7 +7722,7 @@
               <a:buNone/>
             </a:pPr>
             <a:r>
-              <a:rPr lang="en-US" sz="850" b="1" dirty="0">
+              <a:rPr lang="en-US" sz="900" b="1" dirty="0">
                 <a:solidFill>
                   <a:srgbClr val="0B0B0B"/>
                 </a:solidFill>
@@ -7872,7 +7732,7 @@
               </a:rPr>
               <a:t>신청의 81%가 휴대폰 번호만 남기는 간편 신청</a:t>
             </a:r>
-            <a:endParaRPr lang="en-US" sz="850" dirty="0"/>
+            <a:endParaRPr lang="en-US" sz="900" dirty="0"/>
           </a:p>
           <a:p>
             <a:pPr indent="0" marL="0">
@@ -7882,7 +7742,7 @@
               <a:buNone/>
             </a:pPr>
             <a:r>
-              <a:rPr lang="en-US" sz="850" dirty="0">
+              <a:rPr lang="en-US" sz="900" dirty="0">
                 <a:solidFill>
                   <a:srgbClr val="0B0B0B"/>
                 </a:solidFill>
@@ -7890,10 +7750,32 @@
                 <a:ea typeface="Malgun Gothic" pitchFamily="34" charset="-122"/>
                 <a:cs typeface="Malgun Gothic" pitchFamily="34" charset="-120"/>
               </a:rPr>
-              <a:t>주말 신청은 평일의 절반(z, 우연일 확률 0.1% 미만). 0~7시 신청 13%</a:t>
-            </a:r>
-            <a:endParaRPr lang="en-US" sz="850" dirty="0"/>
-          </a:p>
+              <a:t>전화 문의가 폼만큼 있는데 어디서 봤는지 안 잡힘</a:t>
+            </a:r>
+            <a:endParaRPr lang="en-US" sz="900" dirty="0"/>
+          </a:p>
+        </p:txBody>
+      </p:sp>
+      <p:sp>
+        <p:nvSpPr>
+          <p:cNvPr id="26" name="Text 23"/>
+          <p:cNvSpPr txBox="1"/>
+          <p:nvPr/>
+        </p:nvSpPr>
+        <p:spPr>
+          <a:xfrm>
+            <a:off x="4160520" y="3493008"/>
+            <a:ext cx="2331720" cy="822960"/>
+          </a:xfrm>
+          <a:prstGeom prst="rect">
+            <a:avLst/>
+          </a:prstGeom>
+          <a:noFill/>
+          <a:ln/>
+        </p:spPr>
+        <p:txBody>
+          <a:bodyPr wrap="square" lIns="0" tIns="0" rIns="0" bIns="0" rtlCol="0" anchor="t"/>
+          <a:lstStyle/>
           <a:p>
             <a:pPr indent="0" marL="0">
               <a:spcAft>
@@ -7902,40 +7784,18 @@
               <a:buNone/>
             </a:pPr>
             <a:r>
-              <a:rPr lang="en-US" sz="850" dirty="0">
-                <a:solidFill>
-                  <a:srgbClr val="0B0B0B"/>
-                </a:solidFill>
-                <a:latin typeface="Malgun Gothic" pitchFamily="34" charset="0"/>
-                <a:ea typeface="Malgun Gothic" pitchFamily="34" charset="-122"/>
-                <a:cs typeface="Malgun Gothic" pitchFamily="34" charset="-120"/>
-              </a:rPr>
-              <a:t>전화 문의가 폼만큼 있는데 안 잡힘. 휴대폰(44%)은 번호 클릭으로 셀 수 있고 PC는 못 셈</a:t>
-            </a:r>
-            <a:endParaRPr lang="en-US" sz="850" dirty="0"/>
-          </a:p>
-        </p:txBody>
-      </p:sp>
-      <p:sp>
-        <p:nvSpPr>
-          <p:cNvPr id="26" name="Text 23"/>
-          <p:cNvSpPr txBox="1"/>
-          <p:nvPr/>
-        </p:nvSpPr>
-        <p:spPr>
-          <a:xfrm>
-            <a:off x="4160520" y="3493008"/>
-            <a:ext cx="2331720" cy="822960"/>
-          </a:xfrm>
-          <a:prstGeom prst="rect">
-            <a:avLst/>
-          </a:prstGeom>
-          <a:noFill/>
-          <a:ln/>
-        </p:spPr>
-        <p:txBody>
-          <a:bodyPr wrap="square" lIns="0" tIns="0" rIns="0" bIns="0" rtlCol="0" anchor="t"/>
-          <a:lstStyle/>
+              <a:rPr lang="en-US" sz="900" b="1" dirty="0">
+                <a:solidFill>
+                  <a:srgbClr val="2A78D6"/>
+                </a:solidFill>
+                <a:latin typeface="Malgun Gothic" pitchFamily="34" charset="0"/>
+                <a:ea typeface="Malgun Gothic" pitchFamily="34" charset="-122"/>
+                <a:cs typeface="Malgun Gothic" pitchFamily="34" charset="-120"/>
+              </a:rPr>
+              <a:t>→ 신청마다 수임 여부 기록</a:t>
+            </a:r>
+            <a:endParaRPr lang="en-US" sz="900" dirty="0"/>
+          </a:p>
           <a:p>
             <a:pPr indent="0" marL="0">
               <a:spcAft>
@@ -7944,7 +7804,7 @@
               <a:buNone/>
             </a:pPr>
             <a:r>
-              <a:rPr lang="en-US" sz="850" b="1" dirty="0">
+              <a:rPr lang="en-US" sz="900" b="1" dirty="0">
                 <a:solidFill>
                   <a:srgbClr val="2A78D6"/>
                 </a:solidFill>
@@ -7952,10 +7812,189 @@
                 <a:ea typeface="Malgun Gothic" pitchFamily="34" charset="-122"/>
                 <a:cs typeface="Malgun Gothic" pitchFamily="34" charset="-120"/>
               </a:rPr>
-              <a:t>→ 휴대폰 번호 클릭 기록, PC는 전용 착신 번호</a:t>
-            </a:r>
-            <a:endParaRPr lang="en-US" sz="850" dirty="0"/>
-          </a:p>
+              <a:t>→ 전화번호 클릭 기록, 전용 착신 번호</a:t>
+            </a:r>
+            <a:endParaRPr lang="en-US" sz="900" dirty="0"/>
+          </a:p>
+        </p:txBody>
+      </p:sp>
+      <p:sp>
+        <p:nvSpPr>
+          <p:cNvPr id="27" name="Text 24"/>
+          <p:cNvSpPr txBox="1"/>
+          <p:nvPr/>
+        </p:nvSpPr>
+        <p:spPr>
+          <a:xfrm>
+            <a:off x="6675120" y="658368"/>
+            <a:ext cx="2057400" cy="219456"/>
+          </a:xfrm>
+          <a:prstGeom prst="rect">
+            <a:avLst/>
+          </a:prstGeom>
+          <a:noFill/>
+          <a:ln/>
+        </p:spPr>
+        <p:txBody>
+          <a:bodyPr wrap="square" lIns="0" tIns="0" rIns="0" bIns="0" rtlCol="0" anchor="ctr"/>
+          <a:lstStyle/>
+          <a:p>
+            <a:pPr indent="0" marL="0">
+              <a:buNone/>
+            </a:pPr>
+            <a:r>
+              <a:rPr lang="en-US" sz="950" b="1" dirty="0">
+                <a:solidFill>
+                  <a:srgbClr val="52514E"/>
+                </a:solidFill>
+                <a:latin typeface="Malgun Gothic" pitchFamily="34" charset="0"/>
+                <a:ea typeface="Malgun Gothic" pitchFamily="34" charset="-122"/>
+                <a:cs typeface="Malgun Gothic" pitchFamily="34" charset="-120"/>
+              </a:rPr>
+              <a:t>수임당 매출 (4장)</a:t>
+            </a:r>
+            <a:endParaRPr lang="en-US" sz="950" dirty="0"/>
+          </a:p>
+        </p:txBody>
+      </p:sp>
+      <p:sp>
+        <p:nvSpPr>
+          <p:cNvPr id="28" name="Text 25"/>
+          <p:cNvSpPr txBox="1"/>
+          <p:nvPr/>
+        </p:nvSpPr>
+        <p:spPr>
+          <a:xfrm>
+            <a:off x="6675120" y="932688"/>
+            <a:ext cx="2057400" cy="1097280"/>
+          </a:xfrm>
+          <a:prstGeom prst="rect">
+            <a:avLst/>
+          </a:prstGeom>
+          <a:noFill/>
+          <a:ln/>
+        </p:spPr>
+        <p:txBody>
+          <a:bodyPr wrap="square" lIns="0" tIns="0" rIns="0" bIns="0" rtlCol="0" anchor="t"/>
+          <a:lstStyle/>
+          <a:p>
+            <a:pPr indent="0" marL="0">
+              <a:buNone/>
+            </a:pPr>
+            <a:r>
+              <a:rPr lang="en-US" sz="950" dirty="0">
+                <a:solidFill>
+                  <a:srgbClr val="0B0B0B"/>
+                </a:solidFill>
+                <a:latin typeface="Malgun Gothic" pitchFamily="34" charset="0"/>
+                <a:ea typeface="Malgun Gothic" pitchFamily="34" charset="-122"/>
+                <a:cs typeface="Malgun Gothic" pitchFamily="34" charset="-120"/>
+              </a:rPr>
+              <a:t>출원  </a:t>
+            </a:r>
+            <a:pPr indent="0" marL="0">
+              <a:buNone/>
+            </a:pPr>
+            <a:r>
+              <a:rPr lang="en-US" sz="1500" b="1" dirty="0">
+                <a:solidFill>
+                  <a:srgbClr val="2A78D6"/>
+                </a:solidFill>
+                <a:latin typeface="Malgun Gothic" pitchFamily="34" charset="0"/>
+                <a:ea typeface="Malgun Gothic" pitchFamily="34" charset="-122"/>
+                <a:cs typeface="Malgun Gothic" pitchFamily="34" charset="-120"/>
+              </a:rPr>
+              <a:t>300만 원</a:t>
+            </a:r>
+            <a:endParaRPr lang="en-US" sz="950" dirty="0"/>
+          </a:p>
+          <a:p>
+            <a:pPr indent="0" marL="0">
+              <a:buNone/>
+            </a:pPr>
+            <a:r>
+              <a:rPr lang="en-US" sz="800" dirty="0">
+                <a:solidFill>
+                  <a:srgbClr val="52514E"/>
+                </a:solidFill>
+                <a:latin typeface="Malgun Gothic" pitchFamily="34" charset="0"/>
+                <a:ea typeface="Malgun Gothic" pitchFamily="34" charset="-122"/>
+                <a:cs typeface="Malgun Gothic" pitchFamily="34" charset="-120"/>
+              </a:rPr>
+              <a:t>신청의 94% (2,021건)</a:t>
+            </a:r>
+            <a:endParaRPr lang="en-US" sz="950" dirty="0"/>
+          </a:p>
+          <a:p>
+            <a:pPr indent="0" marL="0">
+              <a:buNone/>
+            </a:pPr>
+            <a:r>
+              <a:rPr lang="en-US" sz="950" dirty="0">
+                <a:solidFill>
+                  <a:srgbClr val="0B0B0B"/>
+                </a:solidFill>
+                <a:latin typeface="Malgun Gothic" pitchFamily="34" charset="0"/>
+                <a:ea typeface="Malgun Gothic" pitchFamily="34" charset="-122"/>
+                <a:cs typeface="Malgun Gothic" pitchFamily="34" charset="-120"/>
+              </a:rPr>
+              <a:t>분쟁  </a:t>
+            </a:r>
+            <a:pPr indent="0" marL="0">
+              <a:buNone/>
+            </a:pPr>
+            <a:r>
+              <a:rPr lang="en-US" sz="1500" b="1" dirty="0">
+                <a:solidFill>
+                  <a:srgbClr val="EB6834"/>
+                </a:solidFill>
+                <a:latin typeface="Malgun Gothic" pitchFamily="34" charset="0"/>
+                <a:ea typeface="Malgun Gothic" pitchFamily="34" charset="-122"/>
+                <a:cs typeface="Malgun Gothic" pitchFamily="34" charset="-120"/>
+              </a:rPr>
+              <a:t>2,000만 원</a:t>
+            </a:r>
+            <a:endParaRPr lang="en-US" sz="950" dirty="0"/>
+          </a:p>
+          <a:p>
+            <a:pPr indent="0" marL="0">
+              <a:buNone/>
+            </a:pPr>
+            <a:r>
+              <a:rPr lang="en-US" sz="800" dirty="0">
+                <a:solidFill>
+                  <a:srgbClr val="52514E"/>
+                </a:solidFill>
+                <a:latin typeface="Malgun Gothic" pitchFamily="34" charset="0"/>
+                <a:ea typeface="Malgun Gothic" pitchFamily="34" charset="-122"/>
+                <a:cs typeface="Malgun Gothic" pitchFamily="34" charset="-120"/>
+              </a:rPr>
+              <a:t>신청의 6% (120건)</a:t>
+            </a:r>
+            <a:endParaRPr lang="en-US" sz="950" dirty="0"/>
+          </a:p>
+        </p:txBody>
+      </p:sp>
+      <p:sp>
+        <p:nvSpPr>
+          <p:cNvPr id="29" name="Text 26"/>
+          <p:cNvSpPr txBox="1"/>
+          <p:nvPr/>
+        </p:nvSpPr>
+        <p:spPr>
+          <a:xfrm>
+            <a:off x="6675120" y="2075688"/>
+            <a:ext cx="2057400" cy="1371600"/>
+          </a:xfrm>
+          <a:prstGeom prst="rect">
+            <a:avLst/>
+          </a:prstGeom>
+          <a:noFill/>
+          <a:ln/>
+        </p:spPr>
+        <p:txBody>
+          <a:bodyPr wrap="square" lIns="0" tIns="0" rIns="0" bIns="0" rtlCol="0" anchor="t"/>
+          <a:lstStyle/>
           <a:p>
             <a:pPr indent="0" marL="0">
               <a:spcAft>
@@ -7964,17 +8003,17 @@
               <a:buNone/>
             </a:pPr>
             <a:r>
-              <a:rPr lang="en-US" sz="850" b="1" dirty="0">
-                <a:solidFill>
-                  <a:srgbClr val="2A78D6"/>
-                </a:solidFill>
-                <a:latin typeface="Malgun Gothic" pitchFamily="34" charset="0"/>
-                <a:ea typeface="Malgun Gothic" pitchFamily="34" charset="-122"/>
-                <a:cs typeface="Malgun Gothic" pitchFamily="34" charset="-120"/>
-              </a:rPr>
-              <a:t>→ 수임 여부는 분기 1회 기록</a:t>
-            </a:r>
-            <a:endParaRPr lang="en-US" sz="850" dirty="0"/>
+              <a:rPr lang="en-US" sz="900" dirty="0">
+                <a:solidFill>
+                  <a:srgbClr val="0B0B0B"/>
+                </a:solidFill>
+                <a:latin typeface="Malgun Gothic" pitchFamily="34" charset="0"/>
+                <a:ea typeface="Malgun Gothic" pitchFamily="34" charset="-122"/>
+                <a:cs typeface="Malgun Gothic" pitchFamily="34" charset="-120"/>
+              </a:rPr>
+              <a:t>수수료 7배라 연 매출은 출원과 비슷하거나 더 큼</a:t>
+            </a:r>
+            <a:endParaRPr lang="en-US" sz="900" dirty="0"/>
           </a:p>
           <a:p>
             <a:pPr indent="0" marL="0">
@@ -7984,187 +8023,30 @@
               <a:buNone/>
             </a:pPr>
             <a:r>
-              <a:rPr lang="en-US" sz="850" b="1" dirty="0">
-                <a:solidFill>
-                  <a:srgbClr val="2A78D6"/>
-                </a:solidFill>
-                <a:latin typeface="Malgun Gothic" pitchFamily="34" charset="0"/>
-                <a:ea typeface="Malgun Gothic" pitchFamily="34" charset="-122"/>
-                <a:cs typeface="Malgun Gothic" pitchFamily="34" charset="-120"/>
-              </a:rPr>
-              <a:t>→ 간편 신청 유지, 0~7시 신청에 "오전 8시 이후 연락"</a:t>
-            </a:r>
-            <a:endParaRPr lang="en-US" sz="850" dirty="0"/>
+              <a:rPr lang="en-US" sz="900" dirty="0">
+                <a:solidFill>
+                  <a:srgbClr val="0B0B0B"/>
+                </a:solidFill>
+                <a:latin typeface="Malgun Gothic" pitchFamily="34" charset="0"/>
+                <a:ea typeface="Malgun Gothic" pitchFamily="34" charset="-122"/>
+                <a:cs typeface="Malgun Gothic" pitchFamily="34" charset="-120"/>
+              </a:rPr>
+              <a:t>분쟁 검색자가 가장 짧게 머묾 → 페이지 문제 가능성</a:t>
+            </a:r>
+            <a:endParaRPr lang="en-US" sz="900" dirty="0"/>
           </a:p>
         </p:txBody>
       </p:sp>
       <p:sp>
         <p:nvSpPr>
-          <p:cNvPr id="27" name="Text 24"/>
+          <p:cNvPr id="30" name="Text 27"/>
           <p:cNvSpPr txBox="1"/>
           <p:nvPr/>
         </p:nvSpPr>
         <p:spPr>
           <a:xfrm>
-            <a:off x="6675120" y="658368"/>
-            <a:ext cx="2057400" cy="219456"/>
-          </a:xfrm>
-          <a:prstGeom prst="rect">
-            <a:avLst/>
-          </a:prstGeom>
-          <a:noFill/>
-          <a:ln/>
-        </p:spPr>
-        <p:txBody>
-          <a:bodyPr wrap="square" lIns="0" tIns="0" rIns="0" bIns="0" rtlCol="0" anchor="ctr"/>
-          <a:lstStyle/>
-          <a:p>
-            <a:pPr indent="0" marL="0">
-              <a:buNone/>
-            </a:pPr>
-            <a:r>
-              <a:rPr lang="en-US" sz="950" b="1" dirty="0">
-                <a:solidFill>
-                  <a:srgbClr val="52514E"/>
-                </a:solidFill>
-                <a:latin typeface="Malgun Gothic" pitchFamily="34" charset="0"/>
-                <a:ea typeface="Malgun Gothic" pitchFamily="34" charset="-122"/>
-                <a:cs typeface="Malgun Gothic" pitchFamily="34" charset="-120"/>
-              </a:rPr>
-              <a:t>수임당 매출 (4장)</a:t>
-            </a:r>
-            <a:endParaRPr lang="en-US" sz="950" dirty="0"/>
-          </a:p>
-        </p:txBody>
-      </p:sp>
-      <p:sp>
-        <p:nvSpPr>
-          <p:cNvPr id="28" name="Text 25"/>
-          <p:cNvSpPr txBox="1"/>
-          <p:nvPr/>
-        </p:nvSpPr>
-        <p:spPr>
-          <a:xfrm>
-            <a:off x="6675120" y="932688"/>
-            <a:ext cx="2057400" cy="1097280"/>
-          </a:xfrm>
-          <a:prstGeom prst="rect">
-            <a:avLst/>
-          </a:prstGeom>
-          <a:noFill/>
-          <a:ln/>
-        </p:spPr>
-        <p:txBody>
-          <a:bodyPr wrap="square" lIns="0" tIns="0" rIns="0" bIns="0" rtlCol="0" anchor="t"/>
-          <a:lstStyle/>
-          <a:p>
-            <a:pPr indent="0" marL="0">
-              <a:buNone/>
-            </a:pPr>
-            <a:r>
-              <a:rPr lang="en-US" sz="950" dirty="0">
-                <a:solidFill>
-                  <a:srgbClr val="0B0B0B"/>
-                </a:solidFill>
-                <a:latin typeface="Malgun Gothic" pitchFamily="34" charset="0"/>
-                <a:ea typeface="Malgun Gothic" pitchFamily="34" charset="-122"/>
-                <a:cs typeface="Malgun Gothic" pitchFamily="34" charset="-120"/>
-              </a:rPr>
-              <a:t>출원  </a:t>
-            </a:r>
-            <a:pPr indent="0" marL="0">
-              <a:buNone/>
-            </a:pPr>
-            <a:r>
-              <a:rPr lang="en-US" sz="1500" b="1" dirty="0">
-                <a:solidFill>
-                  <a:srgbClr val="2A78D6"/>
-                </a:solidFill>
-                <a:latin typeface="Malgun Gothic" pitchFamily="34" charset="0"/>
-                <a:ea typeface="Malgun Gothic" pitchFamily="34" charset="-122"/>
-                <a:cs typeface="Malgun Gothic" pitchFamily="34" charset="-120"/>
-              </a:rPr>
-              <a:t>300만 원</a:t>
-            </a:r>
-            <a:endParaRPr lang="en-US" sz="950" dirty="0"/>
-          </a:p>
-          <a:p>
-            <a:pPr indent="0" marL="0">
-              <a:buNone/>
-            </a:pPr>
-            <a:r>
-              <a:rPr lang="en-US" sz="800" dirty="0">
-                <a:solidFill>
-                  <a:srgbClr val="52514E"/>
-                </a:solidFill>
-                <a:latin typeface="Malgun Gothic" pitchFamily="34" charset="0"/>
-                <a:ea typeface="Malgun Gothic" pitchFamily="34" charset="-122"/>
-                <a:cs typeface="Malgun Gothic" pitchFamily="34" charset="-120"/>
-              </a:rPr>
-              <a:t>신청의 94% (2,021건)</a:t>
-            </a:r>
-            <a:endParaRPr lang="en-US" sz="950" dirty="0"/>
-          </a:p>
-          <a:p>
-            <a:pPr indent="0" marL="0">
-              <a:buNone/>
-            </a:pPr>
-            <a:r>
-              <a:rPr lang="en-US" sz="950" dirty="0">
-                <a:solidFill>
-                  <a:srgbClr val="0B0B0B"/>
-                </a:solidFill>
-                <a:latin typeface="Malgun Gothic" pitchFamily="34" charset="0"/>
-                <a:ea typeface="Malgun Gothic" pitchFamily="34" charset="-122"/>
-                <a:cs typeface="Malgun Gothic" pitchFamily="34" charset="-120"/>
-              </a:rPr>
-              <a:t>분쟁  </a:t>
-            </a:r>
-            <a:pPr indent="0" marL="0">
-              <a:buNone/>
-            </a:pPr>
-            <a:r>
-              <a:rPr lang="en-US" sz="1500" b="1" dirty="0">
-                <a:solidFill>
-                  <a:srgbClr val="EB6834"/>
-                </a:solidFill>
-                <a:latin typeface="Malgun Gothic" pitchFamily="34" charset="0"/>
-                <a:ea typeface="Malgun Gothic" pitchFamily="34" charset="-122"/>
-                <a:cs typeface="Malgun Gothic" pitchFamily="34" charset="-120"/>
-              </a:rPr>
-              <a:t>2,000만 원</a:t>
-            </a:r>
-            <a:endParaRPr lang="en-US" sz="950" dirty="0"/>
-          </a:p>
-          <a:p>
-            <a:pPr indent="0" marL="0">
-              <a:buNone/>
-            </a:pPr>
-            <a:r>
-              <a:rPr lang="en-US" sz="800" dirty="0">
-                <a:solidFill>
-                  <a:srgbClr val="52514E"/>
-                </a:solidFill>
-                <a:latin typeface="Malgun Gothic" pitchFamily="34" charset="0"/>
-                <a:ea typeface="Malgun Gothic" pitchFamily="34" charset="-122"/>
-                <a:cs typeface="Malgun Gothic" pitchFamily="34" charset="-120"/>
-              </a:rPr>
-              <a:t>신청의 6% (120건)</a:t>
-            </a:r>
-            <a:endParaRPr lang="en-US" sz="950" dirty="0"/>
-          </a:p>
-        </p:txBody>
-      </p:sp>
-      <p:sp>
-        <p:nvSpPr>
-          <p:cNvPr id="29" name="Text 26"/>
-          <p:cNvSpPr txBox="1"/>
-          <p:nvPr/>
-        </p:nvSpPr>
-        <p:spPr>
-          <a:xfrm>
-            <a:off x="6675120" y="2075688"/>
-            <a:ext cx="2057400" cy="1371600"/>
+            <a:off x="6675120" y="3493008"/>
+            <a:ext cx="2057400" cy="822960"/>
           </a:xfrm>
           <a:prstGeom prst="rect">
             <a:avLst/>
@@ -8183,17 +8065,17 @@
               <a:buNone/>
             </a:pPr>
             <a:r>
-              <a:rPr lang="en-US" sz="850" dirty="0">
-                <a:solidFill>
-                  <a:srgbClr val="0B0B0B"/>
-                </a:solidFill>
-                <a:latin typeface="Malgun Gothic" pitchFamily="34" charset="0"/>
-                <a:ea typeface="Malgun Gothic" pitchFamily="34" charset="-122"/>
-                <a:cs typeface="Malgun Gothic" pitchFamily="34" charset="-120"/>
-              </a:rPr>
-              <a:t>수수료 7배라 연 매출은 출원과 비슷하거나 더 큼 (2,300만~4,600만 vs 2,700만~5,300만, 전환율 같다고 가정)</a:t>
-            </a:r>
-            <a:endParaRPr lang="en-US" sz="850" dirty="0"/>
+              <a:rPr lang="en-US" sz="900" b="1" dirty="0">
+                <a:solidFill>
+                  <a:srgbClr val="2A78D6"/>
+                </a:solidFill>
+                <a:latin typeface="Malgun Gothic" pitchFamily="34" charset="0"/>
+                <a:ea typeface="Malgun Gothic" pitchFamily="34" charset="-122"/>
+                <a:cs typeface="Malgun Gothic" pitchFamily="34" charset="-120"/>
+              </a:rPr>
+              <a:t>→ 분쟁 전용 페이지, 폼보다 전화</a:t>
+            </a:r>
+            <a:endParaRPr lang="en-US" sz="900" dirty="0"/>
           </a:p>
           <a:p>
             <a:pPr indent="0" marL="0">
@@ -8203,69 +8085,7 @@
               <a:buNone/>
             </a:pPr>
             <a:r>
-              <a:rPr lang="en-US" sz="850" dirty="0">
-                <a:solidFill>
-                  <a:srgbClr val="0B0B0B"/>
-                </a:solidFill>
-                <a:latin typeface="Malgun Gothic" pitchFamily="34" charset="0"/>
-                <a:ea typeface="Malgun Gothic" pitchFamily="34" charset="-122"/>
-                <a:cs typeface="Malgun Gothic" pitchFamily="34" charset="-120"/>
-              </a:rPr>
-              <a:t>분쟁 신청은 전체 감소 뒤에도 안 줄음</a:t>
-            </a:r>
-            <a:endParaRPr lang="en-US" sz="850" dirty="0"/>
-          </a:p>
-          <a:p>
-            <a:pPr indent="0" marL="0">
-              <a:spcAft>
-                <a:spcPts val="300"/>
-              </a:spcAft>
-              <a:buNone/>
-            </a:pPr>
-            <a:r>
-              <a:rPr lang="en-US" sz="850" dirty="0">
-                <a:solidFill>
-                  <a:srgbClr val="0B0B0B"/>
-                </a:solidFill>
-                <a:latin typeface="Malgun Gothic" pitchFamily="34" charset="0"/>
-                <a:ea typeface="Malgun Gothic" pitchFamily="34" charset="-122"/>
-                <a:cs typeface="Malgun Gothic" pitchFamily="34" charset="-120"/>
-              </a:rPr>
-              <a:t>분쟁 검색자가 가장 짧게 머묾 → 페이지 문제 가능성</a:t>
-            </a:r>
-            <a:endParaRPr lang="en-US" sz="850" dirty="0"/>
-          </a:p>
-        </p:txBody>
-      </p:sp>
-      <p:sp>
-        <p:nvSpPr>
-          <p:cNvPr id="30" name="Text 27"/>
-          <p:cNvSpPr txBox="1"/>
-          <p:nvPr/>
-        </p:nvSpPr>
-        <p:spPr>
-          <a:xfrm>
-            <a:off x="6675120" y="3493008"/>
-            <a:ext cx="2057400" cy="822960"/>
-          </a:xfrm>
-          <a:prstGeom prst="rect">
-            <a:avLst/>
-          </a:prstGeom>
-          <a:noFill/>
-          <a:ln/>
-        </p:spPr>
-        <p:txBody>
-          <a:bodyPr wrap="square" lIns="0" tIns="0" rIns="0" bIns="0" rtlCol="0" anchor="t"/>
-          <a:lstStyle/>
-          <a:p>
-            <a:pPr indent="0" marL="0">
-              <a:spcAft>
-                <a:spcPts val="300"/>
-              </a:spcAft>
-              <a:buNone/>
-            </a:pPr>
-            <a:r>
-              <a:rPr lang="en-US" sz="850" b="1" dirty="0">
+              <a:rPr lang="en-US" sz="900" b="1" dirty="0">
                 <a:solidFill>
                   <a:srgbClr val="2A78D6"/>
                 </a:solidFill>
@@ -8273,29 +8093,9 @@
                 <a:ea typeface="Malgun Gothic" pitchFamily="34" charset="-122"/>
                 <a:cs typeface="Malgun Gothic" pitchFamily="34" charset="-120"/>
               </a:rPr>
-              <a:t>→ 분쟁 페이지를 리뉴얼 우선순위에, 폼보다 전화</a:t>
-            </a:r>
-            <a:endParaRPr lang="en-US" sz="850" dirty="0"/>
-          </a:p>
-          <a:p>
-            <a:pPr indent="0" marL="0">
-              <a:spcAft>
-                <a:spcPts val="300"/>
-              </a:spcAft>
-              <a:buNone/>
-            </a:pPr>
-            <a:r>
-              <a:rPr lang="en-US" sz="850" b="1" dirty="0">
-                <a:solidFill>
-                  <a:srgbClr val="2A78D6"/>
-                </a:solidFill>
-                <a:latin typeface="Malgun Gothic" pitchFamily="34" charset="0"/>
-                <a:ea typeface="Malgun Gothic" pitchFamily="34" charset="-122"/>
-                <a:cs typeface="Malgun Gothic" pitchFamily="34" charset="-120"/>
-              </a:rPr>
               <a:t>→ 분쟁 광고는 줄이지 않음</a:t>
             </a:r>
-            <a:endParaRPr lang="en-US" sz="850" dirty="0"/>
+            <a:endParaRPr lang="en-US" sz="900" dirty="0"/>
           </a:p>
         </p:txBody>
       </p:sp>
@@ -8355,7 +8155,7 @@
                 <a:ea typeface="Malgun Gothic" pitchFamily="34" charset="-122"/>
                 <a:cs typeface="Malgun Gothic" pitchFamily="34" charset="-120"/>
               </a:rPr>
-              <a:t>출처: 알림 문자·게시판(2,141건) ÷ 서버 실제 방문(슬라이드 2), 네이버 광고 90일 + 같은 기간 게시판 15건, GA4 광고 유입 120세션, Clarity 녹화 5건, 변리사 답(수임률·수수료·문의)</a:t>
+              <a:t>출처: 신청 알림 문자·게시판 2,141건, 서버 실제 방문, 네이버 광고 90일, GA4 광고 유입 120세션, Clarity 녹화 5건, 변리사 답</a:t>
             </a:r>
             <a:endParaRPr lang="en-US" sz="800" dirty="0"/>
           </a:p>
@@ -8372,7 +8172,7 @@
                 <a:ea typeface="Malgun Gothic" pitchFamily="34" charset="-122"/>
                 <a:cs typeface="Malgun Gothic" pitchFamily="34" charset="-120"/>
               </a:rPr>
-              <a:t>한계: 수임률·수수료는 기록이 아닌 기억에 의한 대략의 값. 유형별 체류 차이는 우연일 확률 6~22%라 경향. 분쟁 매출은 전환율을 출원과 같다고 가정</a:t>
+              <a:t>한계: 수임률·수수료는 기억에 의한 값. 유형별 체류 차이는 경향(우연일 확률 6~22%)</a:t>
             </a:r>
             <a:endParaRPr lang="en-US" sz="800" dirty="0"/>
           </a:p>
@@ -9720,7 +9520,7 @@
               <a:buChar char="•"/>
             </a:pPr>
             <a:r>
-              <a:rPr lang="en-US" sz="800" dirty="0">
+              <a:rPr lang="en-US" sz="900" dirty="0">
                 <a:solidFill>
                   <a:srgbClr val="0B0B0B"/>
                 </a:solidFill>
@@ -9728,9 +9528,9 @@
                 <a:ea typeface="Malgun Gothic" pitchFamily="34" charset="-122"/>
                 <a:cs typeface="Malgun Gothic" pitchFamily="34" charset="-120"/>
               </a:rPr>
-              <a:t>GA4: 광고 유입을 광고/검색어/광고그룹으로, 입구 구분(출원/분쟁/간편), 폼 시작·제출·완료 이벤트</a:t>
-            </a:r>
-            <a:endParaRPr lang="en-US" sz="800" dirty="0"/>
+              <a:t>GA4: 광고 유입을 검색어별로, 폼 시작·제출·완료 이벤트</a:t>
+            </a:r>
+            <a:endParaRPr lang="en-US" sz="900" dirty="0"/>
           </a:p>
           <a:p>
             <a:pPr marL="127000" indent="-127000">
@@ -9741,7 +9541,7 @@
               <a:buChar char="•"/>
             </a:pPr>
             <a:r>
-              <a:rPr lang="en-US" sz="800" dirty="0">
+              <a:rPr lang="en-US" sz="900" dirty="0">
                 <a:solidFill>
                   <a:srgbClr val="0B0B0B"/>
                 </a:solidFill>
@@ -9749,9 +9549,9 @@
                 <a:ea typeface="Malgun Gothic" pitchFamily="34" charset="-122"/>
                 <a:cs typeface="Malgun Gothic" pitchFamily="34" charset="-120"/>
               </a:rPr>
-              <a:t>신청 글에 유입 경로·검색어 저장(DB 미확인), 첫 화면 검색어를 신청 페이지로 넘김</a:t>
-            </a:r>
-            <a:endParaRPr lang="en-US" sz="800" dirty="0"/>
+              <a:t>신청 글에 유입 경로·검색어 저장</a:t>
+            </a:r>
+            <a:endParaRPr lang="en-US" sz="900" dirty="0"/>
           </a:p>
           <a:p>
             <a:pPr marL="127000" indent="-127000">
@@ -9762,7 +9562,7 @@
               <a:buChar char="•"/>
             </a:pPr>
             <a:r>
-              <a:rPr lang="en-US" sz="800" dirty="0">
+              <a:rPr lang="en-US" sz="900" dirty="0">
                 <a:solidFill>
                   <a:srgbClr val="0B0B0B"/>
                 </a:solidFill>
@@ -9770,9 +9570,9 @@
                 <a:ea typeface="Malgun Gothic" pitchFamily="34" charset="-122"/>
                 <a:cs typeface="Malgun Gothic" pitchFamily="34" charset="-120"/>
               </a:rPr>
-              <a:t>Clarity 녹화. 옛 UA 코드 제거, 작업자 IP 차단</a:t>
-            </a:r>
-            <a:endParaRPr lang="en-US" sz="800" dirty="0"/>
+              <a:t>Clarity 녹화, 작업자 IP 차단</a:t>
+            </a:r>
+            <a:endParaRPr lang="en-US" sz="900" dirty="0"/>
           </a:p>
           <a:p>
             <a:pPr marL="127000" indent="-127000">
@@ -9783,7 +9583,7 @@
               <a:buChar char="•"/>
             </a:pPr>
             <a:r>
-              <a:rPr lang="en-US" sz="800" dirty="0">
+              <a:rPr lang="en-US" sz="900" dirty="0">
                 <a:solidFill>
                   <a:srgbClr val="0B0B0B"/>
                 </a:solidFill>
@@ -9791,9 +9591,9 @@
                 <a:ea typeface="Malgun Gothic" pitchFamily="34" charset="-122"/>
                 <a:cs typeface="Malgun Gothic" pitchFamily="34" charset="-120"/>
               </a:rPr>
-              <a:t>네이버 전환 추적: 서비스 신청함, 승인 뒤 설치</a:t>
-            </a:r>
-            <a:endParaRPr lang="en-US" sz="800" dirty="0"/>
+              <a:t>네이버 전환 추적: 신청함, 승인 뒤 설치</a:t>
+            </a:r>
+            <a:endParaRPr lang="en-US" sz="900" dirty="0"/>
           </a:p>
         </p:txBody>
       </p:sp>
@@ -9865,7 +9665,7 @@
               <a:buChar char="•"/>
             </a:pPr>
             <a:r>
-              <a:rPr lang="en-US" sz="800" dirty="0">
+              <a:rPr lang="en-US" sz="900" dirty="0">
                 <a:solidFill>
                   <a:srgbClr val="0B0B0B"/>
                 </a:solidFill>
@@ -9873,9 +9673,9 @@
                 <a:ea typeface="Malgun Gothic" pitchFamily="34" charset="-122"/>
                 <a:cs typeface="Malgun Gothic" pitchFamily="34" charset="-120"/>
               </a:rPr>
-              <a:t>표본: 광고 90일 신청 15건, 광고 유입 120건 · 기간: 광고 90일, GA4 1개월</a:t>
-            </a:r>
-            <a:endParaRPr lang="en-US" sz="800" dirty="0"/>
+              <a:t>표본: 광고 90일 신청 15건, 광고 유입 120건</a:t>
+            </a:r>
+            <a:endParaRPr lang="en-US" sz="900" dirty="0"/>
           </a:p>
           <a:p>
             <a:pPr marL="127000" indent="-127000">
@@ -9886,7 +9686,7 @@
               <a:buChar char="•"/>
             </a:pPr>
             <a:r>
-              <a:rPr lang="en-US" sz="800" dirty="0">
+              <a:rPr lang="en-US" sz="900" dirty="0">
                 <a:solidFill>
                   <a:srgbClr val="0B0B0B"/>
                 </a:solidFill>
@@ -9896,7 +9696,7 @@
               </a:rPr>
               <a:t>서버 통계: 봇 제거는 추정, 경로는 추이, 2025년 이후 신뢰 낮음</a:t>
             </a:r>
-            <a:endParaRPr lang="en-US" sz="800" dirty="0"/>
+            <a:endParaRPr lang="en-US" sz="900" dirty="0"/>
           </a:p>
           <a:p>
             <a:pPr marL="127000" indent="-127000">
@@ -9907,7 +9707,7 @@
               <a:buChar char="•"/>
             </a:pPr>
             <a:r>
-              <a:rPr lang="en-US" sz="800" dirty="0">
+              <a:rPr lang="en-US" sz="900" dirty="0">
                 <a:solidFill>
                   <a:srgbClr val="0B0B0B"/>
                 </a:solidFill>
@@ -9915,9 +9715,9 @@
                 <a:ea typeface="Malgun Gothic" pitchFamily="34" charset="-122"/>
                 <a:cs typeface="Malgun Gothic" pitchFamily="34" charset="-120"/>
               </a:rPr>
-              <a:t>2021년 원인: 다음 중단만 확인, 블로그·네이버 검색은 추정</a:t>
-            </a:r>
-            <a:endParaRPr lang="en-US" sz="800" dirty="0"/>
+              <a:t>원인: 다음 중단만 확인, 블로그·네이버 검색은 추정</a:t>
+            </a:r>
+            <a:endParaRPr lang="en-US" sz="900" dirty="0"/>
           </a:p>
           <a:p>
             <a:pPr marL="127000" indent="-127000">
@@ -9928,7 +9728,7 @@
               <a:buChar char="•"/>
             </a:pPr>
             <a:r>
-              <a:rPr lang="en-US" sz="800" dirty="0">
+              <a:rPr lang="en-US" sz="900" dirty="0">
                 <a:solidFill>
                   <a:srgbClr val="0B0B0B"/>
                 </a:solidFill>
@@ -9936,30 +9736,9 @@
                 <a:ea typeface="Malgun Gothic" pitchFamily="34" charset="-122"/>
                 <a:cs typeface="Malgun Gothic" pitchFamily="34" charset="-120"/>
               </a:rPr>
-              <a:t>수임 전환율 데이터 없음 · 변리사 답은 기억에 의한 값 · 구글 미검토</a:t>
-            </a:r>
-            <a:endParaRPr lang="en-US" sz="800" dirty="0"/>
-          </a:p>
-          <a:p>
-            <a:pPr marL="127000" indent="-127000">
-              <a:spcAft>
-                <a:spcPts val="300"/>
-              </a:spcAft>
-              <a:buSzPct val="100000"/>
-              <a:buChar char="•"/>
-            </a:pPr>
-            <a:r>
-              <a:rPr lang="en-US" sz="800" dirty="0">
-                <a:solidFill>
-                  <a:srgbClr val="52514E"/>
-                </a:solidFill>
-                <a:latin typeface="Malgun Gothic" pitchFamily="34" charset="0"/>
-                <a:ea typeface="Malgun Gothic" pitchFamily="34" charset="-122"/>
-                <a:cs typeface="Malgun Gothic" pitchFamily="34" charset="-120"/>
-              </a:rPr>
-              <a:t>검정: 포괄 vs 구체적 클릭률·지역명·주말 신청은 우연일 확률 0.1% 미만(피셔·z). 신청 18→15는 73%(이항), 유형별 체류 6~22%(피셔)</a:t>
-            </a:r>
-            <a:endParaRPr lang="en-US" sz="800" dirty="0"/>
+              <a:t>수임 전환율 데이터 없음 · 변리사 답은 기억에 의한 값</a:t>
+            </a:r>
+            <a:endParaRPr lang="en-US" sz="900" dirty="0"/>
           </a:p>
         </p:txBody>
       </p:sp>

--- a/slides.pptx
+++ b/slides.pptx
@@ -4346,7 +4346,7 @@
                 <a:ea typeface="Malgun Gothic" pitchFamily="34" charset="-122"/>
                 <a:cs typeface="Malgun Gothic" pitchFamily="34" charset="-120"/>
               </a:rPr>
-              <a:t>실제 방문 = 전체 − 봇(OS Robot·Linux). *2025·26은 신뢰 낮음</a:t>
+              <a:t>실제 방문 추정 = 전체 − 봇 추정(OS "Robot"·"Linux" 방문). 접속자통계 연도별·OS별 방문자, 같은 IP는 하루 1회. *2025·26은 신뢰 낮음(연한 색), 2026은 10-06까지</a:t>
             </a:r>
             <a:endParaRPr lang="en-US" sz="700" dirty="0"/>
           </a:p>
@@ -4825,7 +4825,7 @@
               <a:buNone/>
             </a:pPr>
             <a:r>
-              <a:rPr lang="en-US" sz="800" dirty="0">
+              <a:rPr lang="en-US" sz="700" dirty="0">
                 <a:solidFill>
                   <a:srgbClr val="52514E"/>
                 </a:solidFill>
@@ -4833,16 +4833,16 @@
                 <a:ea typeface="Malgun Gothic" pitchFamily="34" charset="-122"/>
                 <a:cs typeface="Malgun Gothic" pitchFamily="34" charset="-120"/>
               </a:rPr>
-              <a:t>출처: 신청 알림 문자 2014-11 ~ 2026-10-05, 2,895건 → 스팸 254건 제외 2,641건. 접속자통계 연도별·OS별 방문자. 236건 분해는 셰이플리</a:t>
-            </a:r>
-            <a:endParaRPr lang="en-US" sz="800" dirty="0"/>
-          </a:p>
-          <a:p>
-            <a:pPr indent="0" marL="0">
-              <a:buNone/>
-            </a:pPr>
-            <a:r>
-              <a:rPr lang="en-US" sz="800" dirty="0">
+              <a:t>출처: 관리자 페이지 문자 전송내역 2014-11 ~ 2026-10-05, 2,895건 → 스팸 254건 제외 2,641건. 접속자통계 연도별·OS별 방문자(같은 IP는 하루 1회). 236건 분해는 셰이플리(순서에 따라 36~71%라 평균)</a:t>
+            </a:r>
+            <a:endParaRPr lang="en-US" sz="700" dirty="0"/>
+          </a:p>
+          <a:p>
+            <a:pPr indent="0" marL="0">
+              <a:buNone/>
+            </a:pPr>
+            <a:r>
+              <a:rPr lang="en-US" sz="700" dirty="0">
                 <a:solidFill>
                   <a:srgbClr val="52514E"/>
                 </a:solidFill>
@@ -4850,16 +4850,16 @@
                 <a:ea typeface="Malgun Gothic" pitchFamily="34" charset="-122"/>
                 <a:cs typeface="Malgun Gothic" pitchFamily="34" charset="-120"/>
               </a:rPr>
-              <a:t>봇 근거: 2021-10부터 방문 월 900 → 2,100인데 신청은 12 → 5, 급증분은 전부 경로 없는 "직접". 2025년은 Chrome인 척하는 자동 접속으로 추정</a:t>
-            </a:r>
-            <a:endParaRPr lang="en-US" sz="800" dirty="0"/>
-          </a:p>
-          <a:p>
-            <a:pPr indent="0" marL="0">
-              <a:buNone/>
-            </a:pPr>
-            <a:r>
-              <a:rPr lang="en-US" sz="800" dirty="0">
+              <a:t>봇 추정 근거: 2021-10부터 방문이 월 900 → 2,100인데 신청은 월 12 → 5. 급증분은 전부 유입 경로 없는 "직접", 시간대 0~23시 고름. 2025 신뢰 낮음: Robot 8,848 급증, Chrome도 두 배인데 신청은 그대로 → Chrome인 척하는 자동 접속 추정</a:t>
+            </a:r>
+            <a:endParaRPr lang="en-US" sz="700" dirty="0"/>
+          </a:p>
+          <a:p>
+            <a:pPr indent="0" marL="0">
+              <a:buNone/>
+            </a:pPr>
+            <a:r>
+              <a:rPr lang="en-US" sz="700" dirty="0">
                 <a:solidFill>
                   <a:srgbClr val="52514E"/>
                 </a:solidFill>
@@ -4869,7 +4869,7 @@
               </a:rPr>
               <a:t>손실 = 연 200건 감소 × 수임 10~20% × 수수료 300만 원. 목표 = 방문 3,812(2024) 그대로 두고 신청률만 4.6%로 되돌리면 177건</a:t>
             </a:r>
-            <a:endParaRPr lang="en-US" sz="800" dirty="0"/>
+            <a:endParaRPr lang="en-US" sz="700" dirty="0"/>
           </a:p>
         </p:txBody>
       </p:sp>
@@ -5057,7 +5057,7 @@
                 <a:ea typeface="Malgun Gothic" pitchFamily="34" charset="-122"/>
                 <a:cs typeface="Malgun Gothic" pitchFamily="34" charset="-120"/>
               </a:rPr>
-              <a:t>경로별 연간 방문 (서버 기록, "직접" 제외. 출처를 놓치는 경우가 많아 추이로만 봄)</a:t>
+              <a:t>접속자통계 / 유입 도메인별 방문 8종 / 2016 ~ 2026-10-06 / "직접"(봇 대부분) 제외 / 서버는 유입 경로를 놓치는 경우가 많아 추이로만 봄 (광고 보고서 90일 클릭 388 vs 서버 9달 203)</a:t>
             </a:r>
             <a:endParaRPr lang="en-US" sz="800" dirty="0"/>
           </a:p>
@@ -5216,7 +5216,7 @@
         <p:spPr>
           <a:xfrm>
             <a:off x="502920" y="2907792"/>
-            <a:ext cx="1920240" cy="219456"/>
+            <a:ext cx="1920240" cy="182880"/>
           </a:xfrm>
           <a:prstGeom prst="rect">
             <a:avLst/>
@@ -5232,7 +5232,7 @@
               <a:buNone/>
             </a:pPr>
             <a:r>
-              <a:rPr lang="en-US" sz="1100" b="1" dirty="0">
+              <a:rPr lang="en-US" sz="950" b="1" dirty="0">
                 <a:solidFill>
                   <a:srgbClr val="1BAF7A"/>
                 </a:solidFill>
@@ -5240,9 +5240,9 @@
                 <a:ea typeface="Malgun Gothic" pitchFamily="34" charset="-122"/>
                 <a:cs typeface="Malgun Gothic" pitchFamily="34" charset="-120"/>
               </a:rPr>
-              <a:t>다음 −99%</a:t>
-            </a:r>
-            <a:endParaRPr lang="en-US" sz="1100" dirty="0"/>
+              <a:t>1-2 다음</a:t>
+            </a:r>
+            <a:endParaRPr lang="en-US" sz="950" dirty="0"/>
           </a:p>
         </p:txBody>
       </p:sp>
@@ -5254,8 +5254,8 @@
         </p:nvSpPr>
         <p:spPr>
           <a:xfrm>
-            <a:off x="502920" y="3163824"/>
-            <a:ext cx="1920240" cy="1261872"/>
+            <a:off x="502920" y="3108960"/>
+            <a:ext cx="1920240" cy="1316736"/>
           </a:xfrm>
           <a:prstGeom prst="rect">
             <a:avLst/>
@@ -5274,7 +5274,7 @@
               <a:buNone/>
             </a:pPr>
             <a:r>
-              <a:rPr lang="en-US" sz="900" dirty="0">
+              <a:rPr lang="en-US" sz="700" dirty="0">
                 <a:solidFill>
                   <a:srgbClr val="0B0B0B"/>
                 </a:solidFill>
@@ -5282,9 +5282,9 @@
                 <a:ea typeface="Malgun Gothic" pitchFamily="34" charset="-122"/>
                 <a:cs typeface="Malgun Gothic" pitchFamily="34" charset="-120"/>
               </a:rPr>
-              <a:t>다음 광고·등록 중단 (확인된 원인)</a:t>
-            </a:r>
-            <a:endParaRPr lang="en-US" sz="900" dirty="0"/>
+              <a:t>변리사 답: 다음 광고·등록 중단. 그 외 사무소 내부 변화 없음</a:t>
+            </a:r>
+            <a:endParaRPr lang="en-US" sz="700" dirty="0"/>
           </a:p>
           <a:p>
             <a:pPr indent="0" marL="0">
@@ -5294,7 +5294,47 @@
               <a:buNone/>
             </a:pPr>
             <a:r>
-              <a:rPr lang="en-US" sz="900" b="1" dirty="0">
+              <a:rPr lang="en-US" sz="700" dirty="0">
+                <a:solidFill>
+                  <a:srgbClr val="0B0B0B"/>
+                </a:solidFill>
+                <a:latin typeface="Malgun Gothic" pitchFamily="34" charset="0"/>
+                <a:ea typeface="Malgun Gothic" pitchFamily="34" charset="-122"/>
+                <a:cs typeface="Malgun Gothic" pitchFamily="34" charset="-120"/>
+              </a:rPr>
+              <a:t>2015~2020년 연 640~1,620 → 2022년 7</a:t>
+            </a:r>
+            <a:endParaRPr lang="en-US" sz="700" dirty="0"/>
+          </a:p>
+          <a:p>
+            <a:pPr indent="0" marL="0">
+              <a:spcAft>
+                <a:spcPts val="300"/>
+              </a:spcAft>
+              <a:buNone/>
+            </a:pPr>
+            <a:r>
+              <a:rPr lang="en-US" sz="700" dirty="0">
+                <a:solidFill>
+                  <a:srgbClr val="0B0B0B"/>
+                </a:solidFill>
+                <a:latin typeface="Malgun Gothic" pitchFamily="34" charset="0"/>
+                <a:ea typeface="Malgun Gothic" pitchFamily="34" charset="-122"/>
+                <a:cs typeface="Malgun Gothic" pitchFamily="34" charset="-120"/>
+              </a:rPr>
+              <a:t>=&gt; 확인된 원인. 중단 시점이 2021-05이면 신청이 처음 꺾인 달(2장)과 일치</a:t>
+            </a:r>
+            <a:endParaRPr lang="en-US" sz="700" dirty="0"/>
+          </a:p>
+          <a:p>
+            <a:pPr indent="0" marL="0">
+              <a:spcAft>
+                <a:spcPts val="300"/>
+              </a:spcAft>
+              <a:buNone/>
+            </a:pPr>
+            <a:r>
+              <a:rPr lang="en-US" sz="700" b="1" dirty="0">
                 <a:solidFill>
                   <a:srgbClr val="2A78D6"/>
                 </a:solidFill>
@@ -5302,9 +5342,9 @@
                 <a:ea typeface="Malgun Gothic" pitchFamily="34" charset="-122"/>
                 <a:cs typeface="Malgun Gothic" pitchFamily="34" charset="-120"/>
               </a:rPr>
-              <a:t>→ 다음 재개. 연 30건, 매출 900만~1,800만 원. 비용은 네이버 단가면 연 120만 원</a:t>
-            </a:r>
-            <a:endParaRPr lang="en-US" sz="900" dirty="0"/>
+              <a:t>=&gt; action item: 다음(카카오) 재개. 2020년 수준(644)이면 연 30건, 수임 3~6건 = 매출 연 900만~1,800만 원. 비용은 네이버 단가(1,891원)면 연 약 120만 원. 손익분기 클릭당 14,000~28,000원</a:t>
+            </a:r>
+            <a:endParaRPr lang="en-US" sz="700" dirty="0"/>
           </a:p>
         </p:txBody>
       </p:sp>
@@ -5342,7 +5382,7 @@
         <p:spPr>
           <a:xfrm>
             <a:off x="2606040" y="2907792"/>
-            <a:ext cx="1920240" cy="219456"/>
+            <a:ext cx="1920240" cy="182880"/>
           </a:xfrm>
           <a:prstGeom prst="rect">
             <a:avLst/>
@@ -5358,7 +5398,7 @@
               <a:buNone/>
             </a:pPr>
             <a:r>
-              <a:rPr lang="en-US" sz="1100" b="1" dirty="0">
+              <a:rPr lang="en-US" sz="950" b="1" dirty="0">
                 <a:solidFill>
                   <a:srgbClr val="EB6834"/>
                 </a:solidFill>
@@ -5366,9 +5406,9 @@
                 <a:ea typeface="Malgun Gothic" pitchFamily="34" charset="-122"/>
                 <a:cs typeface="Malgun Gothic" pitchFamily="34" charset="-120"/>
               </a:rPr>
-              <a:t>네이버 블로그 −93%</a:t>
-            </a:r>
-            <a:endParaRPr lang="en-US" sz="1100" dirty="0"/>
+              <a:t>1-3 블로그</a:t>
+            </a:r>
+            <a:endParaRPr lang="en-US" sz="950" dirty="0"/>
           </a:p>
         </p:txBody>
       </p:sp>
@@ -5380,8 +5420,8 @@
         </p:nvSpPr>
         <p:spPr>
           <a:xfrm>
-            <a:off x="2606040" y="3163824"/>
-            <a:ext cx="1920240" cy="1261872"/>
+            <a:off x="2606040" y="3108960"/>
+            <a:ext cx="1920240" cy="1316736"/>
           </a:xfrm>
           <a:prstGeom prst="rect">
             <a:avLst/>
@@ -5400,7 +5440,7 @@
               <a:buNone/>
             </a:pPr>
             <a:r>
-              <a:rPr lang="en-US" sz="900" dirty="0">
+              <a:rPr lang="en-US" sz="700" dirty="0">
                 <a:solidFill>
                   <a:srgbClr val="0B0B0B"/>
                 </a:solidFill>
@@ -5408,9 +5448,9 @@
                 <a:ea typeface="Malgun Gothic" pitchFamily="34" charset="-122"/>
                 <a:cs typeface="Malgun Gothic" pitchFamily="34" charset="-120"/>
               </a:rPr>
-              <a:t>글의 양은 원인 아님 (가장 많이 쓴 2020~21년에 600 → 118)</a:t>
-            </a:r>
-            <a:endParaRPr lang="en-US" sz="900" dirty="0"/>
+              <a:t>글 2,736건의 날짜·제목, 최근 50건 본문 / 2014 ~ 2026</a:t>
+            </a:r>
+            <a:endParaRPr lang="en-US" sz="700" dirty="0"/>
           </a:p>
           <a:p>
             <a:pPr indent="0" marL="0">
@@ -5420,7 +5460,7 @@
               <a:buNone/>
             </a:pPr>
             <a:r>
-              <a:rPr lang="en-US" sz="900" dirty="0">
+              <a:rPr lang="en-US" sz="700" dirty="0">
                 <a:solidFill>
                   <a:srgbClr val="0B0B0B"/>
                 </a:solidFill>
@@ -5428,9 +5468,9 @@
                 <a:ea typeface="Malgun Gothic" pitchFamily="34" charset="-122"/>
                 <a:cs typeface="Malgun Gothic" pitchFamily="34" charset="-120"/>
               </a:rPr>
-              <a:t>글 형태 변화 + 네이버 노출 방식 변화로 추정</a:t>
-            </a:r>
-            <a:endParaRPr lang="en-US" sz="900" dirty="0"/>
+              <a:t>=&gt; 글의 양은 원인 아님 (가장 많이 쓴 2020~21년에 600 → 118)</a:t>
+            </a:r>
+            <a:endParaRPr lang="en-US" sz="700" dirty="0"/>
           </a:p>
           <a:p>
             <a:pPr indent="0" marL="0">
@@ -5440,7 +5480,47 @@
               <a:buNone/>
             </a:pPr>
             <a:r>
-              <a:rPr lang="en-US" sz="900" b="1" dirty="0">
+              <a:rPr lang="en-US" sz="700" dirty="0">
+                <a:solidFill>
+                  <a:srgbClr val="0B0B0B"/>
+                </a:solidFill>
+                <a:latin typeface="Malgun Gothic" pitchFamily="34" charset="0"/>
+                <a:ea typeface="Malgun Gothic" pitchFamily="34" charset="-122"/>
+                <a:cs typeface="Malgun Gothic" pitchFamily="34" charset="-120"/>
+              </a:rPr>
+              <a:t>=&gt; 후보 1: 글 형태 변화(읽을 글 → 실적 리스트). 2016년 정점 뒤 계단식 감소와 일치</a:t>
+            </a:r>
+            <a:endParaRPr lang="en-US" sz="700" dirty="0"/>
+          </a:p>
+          <a:p>
+            <a:pPr indent="0" marL="0">
+              <a:spcAft>
+                <a:spcPts val="300"/>
+              </a:spcAft>
+              <a:buNone/>
+            </a:pPr>
+            <a:r>
+              <a:rPr lang="en-US" sz="700" dirty="0">
+                <a:solidFill>
+                  <a:srgbClr val="0B0B0B"/>
+                </a:solidFill>
+                <a:latin typeface="Malgun Gothic" pitchFamily="34" charset="0"/>
+                <a:ea typeface="Malgun Gothic" pitchFamily="34" charset="-122"/>
+                <a:cs typeface="Malgun Gothic" pitchFamily="34" charset="-120"/>
+              </a:rPr>
+              <a:t>=&gt; 후보 2: 네이버 노출 방식 변화(2016 C-Rank, 2018 VIEW, 2021-10 스마트블록). 둘이 겹친 것으로 봄</a:t>
+            </a:r>
+            <a:endParaRPr lang="en-US" sz="700" dirty="0"/>
+          </a:p>
+          <a:p>
+            <a:pPr indent="0" marL="0">
+              <a:spcAft>
+                <a:spcPts val="300"/>
+              </a:spcAft>
+              <a:buNone/>
+            </a:pPr>
+            <a:r>
+              <a:rPr lang="en-US" sz="700" b="1" dirty="0">
                 <a:solidFill>
                   <a:srgbClr val="2A78D6"/>
                 </a:solidFill>
@@ -5448,9 +5528,9 @@
                 <a:ea typeface="Malgun Gothic" pitchFamily="34" charset="-122"/>
                 <a:cs typeface="Malgun Gothic" pitchFamily="34" charset="-120"/>
               </a:rPr>
-              <a:t>→ 읽을 내용이 있는 글로</a:t>
-            </a:r>
-            <a:endParaRPr lang="en-US" sz="900" dirty="0"/>
+              <a:t>=&gt; action item: 읽을 내용이 있는 글로. 광고비 없는 경로지만 효과는 몇 년, 네이버에 달림</a:t>
+            </a:r>
+            <a:endParaRPr lang="en-US" sz="700" dirty="0"/>
           </a:p>
         </p:txBody>
       </p:sp>
@@ -5488,7 +5568,7 @@
         <p:spPr>
           <a:xfrm>
             <a:off x="4709160" y="2907792"/>
-            <a:ext cx="1920240" cy="219456"/>
+            <a:ext cx="1920240" cy="182880"/>
           </a:xfrm>
           <a:prstGeom prst="rect">
             <a:avLst/>
@@ -5504,7 +5584,7 @@
               <a:buNone/>
             </a:pPr>
             <a:r>
-              <a:rPr lang="en-US" sz="1100" b="1" dirty="0">
+              <a:rPr lang="en-US" sz="950" b="1" dirty="0">
                 <a:solidFill>
                   <a:srgbClr val="2A78D6"/>
                 </a:solidFill>
@@ -5512,9 +5592,9 @@
                 <a:ea typeface="Malgun Gothic" pitchFamily="34" charset="-122"/>
                 <a:cs typeface="Malgun Gothic" pitchFamily="34" charset="-120"/>
               </a:rPr>
-              <a:t>네이버 검색 −54%</a:t>
-            </a:r>
-            <a:endParaRPr lang="en-US" sz="1100" dirty="0"/>
+              <a:t>1-4 네이버 검색</a:t>
+            </a:r>
+            <a:endParaRPr lang="en-US" sz="950" dirty="0"/>
           </a:p>
         </p:txBody>
       </p:sp>
@@ -5526,8 +5606,8 @@
         </p:nvSpPr>
         <p:spPr>
           <a:xfrm>
-            <a:off x="4709160" y="3163824"/>
-            <a:ext cx="1920240" cy="1261872"/>
+            <a:off x="4709160" y="3108960"/>
+            <a:ext cx="1920240" cy="1316736"/>
           </a:xfrm>
           <a:prstGeom prst="rect">
             <a:avLst/>
@@ -5546,7 +5626,7 @@
               <a:buNone/>
             </a:pPr>
             <a:r>
-              <a:rPr lang="en-US" sz="900" dirty="0">
+              <a:rPr lang="en-US" sz="700" dirty="0">
                 <a:solidFill>
                   <a:srgbClr val="0B0B0B"/>
                 </a:solidFill>
@@ -5554,9 +5634,9 @@
                 <a:ea typeface="Malgun Gothic" pitchFamily="34" charset="-122"/>
                 <a:cs typeface="Malgun Gothic" pitchFamily="34" charset="-120"/>
               </a:rPr>
-              <a:t>사이트 글자가 전부 이미지라 검색엔진이 못 읽음 (추정)</a:t>
-            </a:r>
-            <a:endParaRPr lang="en-US" sz="900" dirty="0"/>
+              <a:t>광고 아닌 네이버 검색 결과에서 온 방문. 4,902(2016) → 2,220(2020) → 1,028(2022) → 776(2026). 블로그와 같은 시기, 같은 방향</a:t>
+            </a:r>
+            <a:endParaRPr lang="en-US" sz="700" dirty="0"/>
           </a:p>
           <a:p>
             <a:pPr indent="0" marL="0">
@@ -5566,7 +5646,27 @@
               <a:buNone/>
             </a:pPr>
             <a:r>
-              <a:rPr lang="en-US" sz="900" b="1" dirty="0">
+              <a:rPr lang="en-US" sz="700" dirty="0">
+                <a:solidFill>
+                  <a:srgbClr val="0B0B0B"/>
+                </a:solidFill>
+                <a:latin typeface="Malgun Gothic" pitchFamily="34" charset="0"/>
+                <a:ea typeface="Malgun Gothic" pitchFamily="34" charset="-122"/>
+                <a:cs typeface="Malgun Gothic" pitchFamily="34" charset="-120"/>
+              </a:rPr>
+              <a:t>=&gt; 사이트 쪽(글자가 전부 이미지라 검색엔진이 못 읽음) + 네이버 쪽(1-3과 같은 개편). 과거 검색 순위 자료가 없어 비중은 모름</a:t>
+            </a:r>
+            <a:endParaRPr lang="en-US" sz="700" dirty="0"/>
+          </a:p>
+          <a:p>
+            <a:pPr indent="0" marL="0">
+              <a:spcAft>
+                <a:spcPts val="300"/>
+              </a:spcAft>
+              <a:buNone/>
+            </a:pPr>
+            <a:r>
+              <a:rPr lang="en-US" sz="700" b="1" dirty="0">
                 <a:solidFill>
                   <a:srgbClr val="2A78D6"/>
                 </a:solidFill>
@@ -5574,9 +5674,9 @@
                 <a:ea typeface="Malgun Gothic" pitchFamily="34" charset="-122"/>
                 <a:cs typeface="Malgun Gothic" pitchFamily="34" charset="-120"/>
               </a:rPr>
-              <a:t>→ 리뉴얼로 글자를 텍스트로. 유입이 늘면 확인</a:t>
-            </a:r>
-            <a:endParaRPr lang="en-US" sz="900" dirty="0"/>
+              <a:t>=&gt; action item: 리뉴얼로 글자를 텍스트로. 그 뒤 유입이 늘면 사이트 쪽 원인이 컸던 것</a:t>
+            </a:r>
+            <a:endParaRPr lang="en-US" sz="700" dirty="0"/>
           </a:p>
         </p:txBody>
       </p:sp>
@@ -5614,7 +5714,7 @@
         <p:spPr>
           <a:xfrm>
             <a:off x="6812280" y="2907792"/>
-            <a:ext cx="1920240" cy="219456"/>
+            <a:ext cx="1920240" cy="182880"/>
           </a:xfrm>
           <a:prstGeom prst="rect">
             <a:avLst/>
@@ -5630,7 +5730,7 @@
               <a:buNone/>
             </a:pPr>
             <a:r>
-              <a:rPr lang="en-US" sz="1100" b="1" dirty="0">
+              <a:rPr lang="en-US" sz="950" b="1" dirty="0">
                 <a:solidFill>
                   <a:srgbClr val="C08A00"/>
                 </a:solidFill>
@@ -5638,9 +5738,9 @@
                 <a:ea typeface="Malgun Gothic" pitchFamily="34" charset="-122"/>
                 <a:cs typeface="Malgun Gothic" pitchFamily="34" charset="-120"/>
               </a:rPr>
-              <a:t>네이버 광고 −40%</a:t>
-            </a:r>
-            <a:endParaRPr lang="en-US" sz="1100" dirty="0"/>
+              <a:t>1-5 네이버 광고</a:t>
+            </a:r>
+            <a:endParaRPr lang="en-US" sz="950" dirty="0"/>
           </a:p>
         </p:txBody>
       </p:sp>
@@ -5652,8 +5752,8 @@
         </p:nvSpPr>
         <p:spPr>
           <a:xfrm>
-            <a:off x="6812280" y="3163824"/>
-            <a:ext cx="1920240" cy="1261872"/>
+            <a:off x="6812280" y="3108960"/>
+            <a:ext cx="1920240" cy="1316736"/>
           </a:xfrm>
           <a:prstGeom prst="rect">
             <a:avLst/>
@@ -5672,7 +5772,7 @@
               <a:buNone/>
             </a:pPr>
             <a:r>
-              <a:rPr lang="en-US" sz="900" dirty="0">
+              <a:rPr lang="en-US" sz="700" dirty="0">
                 <a:solidFill>
                   <a:srgbClr val="0B0B0B"/>
                 </a:solidFill>
@@ -5680,9 +5780,9 @@
                 <a:ea typeface="Malgun Gothic" pitchFamily="34" charset="-122"/>
                 <a:cs typeface="Malgun Gothic" pitchFamily="34" charset="-120"/>
               </a:rPr>
-              <a:t>실제 방문의 3분의 2가 광고. 모바일 44%, 사이트는 PC 폭 고정</a:t>
-            </a:r>
-            <a:endParaRPr lang="en-US" sz="900" dirty="0"/>
+              <a:t>옛 사이트 세션(1개월) 약 180, 그중 광고 주소로 온 방문 120 (GA4). 기기: 신청 페이지 142명 중 모바일 44%</a:t>
+            </a:r>
+            <a:endParaRPr lang="en-US" sz="700" dirty="0"/>
           </a:p>
           <a:p>
             <a:pPr indent="0" marL="0">
@@ -5692,7 +5792,47 @@
               <a:buNone/>
             </a:pPr>
             <a:r>
-              <a:rPr lang="en-US" sz="900" b="1" dirty="0">
+              <a:rPr lang="en-US" sz="700" dirty="0">
+                <a:solidFill>
+                  <a:srgbClr val="0B0B0B"/>
+                </a:solidFill>
+                <a:latin typeface="Malgun Gothic" pitchFamily="34" charset="0"/>
+                <a:ea typeface="Malgun Gothic" pitchFamily="34" charset="-122"/>
+                <a:cs typeface="Malgun Gothic" pitchFamily="34" charset="-120"/>
+              </a:rPr>
+              <a:t>=&gt; 실제 방문의 3분의 2가 광고 → 랜딩은 광고 방문자 기준, 휴대폰부터 (사이트는 PC 폭 고정)</a:t>
+            </a:r>
+            <a:endParaRPr lang="en-US" sz="700" dirty="0"/>
+          </a:p>
+          <a:p>
+            <a:pPr indent="0" marL="0">
+              <a:spcAft>
+                <a:spcPts val="300"/>
+              </a:spcAft>
+              <a:buNone/>
+            </a:pPr>
+            <a:r>
+              <a:rPr lang="en-US" sz="700" dirty="0">
+                <a:solidFill>
+                  <a:srgbClr val="0B0B0B"/>
+                </a:solidFill>
+                <a:latin typeface="Malgun Gothic" pitchFamily="34" charset="0"/>
+                <a:ea typeface="Malgun Gothic" pitchFamily="34" charset="-122"/>
+                <a:cs typeface="Malgun Gothic" pitchFamily="34" charset="-120"/>
+              </a:rPr>
+              <a:t>=&gt; 첫 화면 경유는 광고 검색어가 사라지고 조회수가 두 번 셈</a:t>
+            </a:r>
+            <a:endParaRPr lang="en-US" sz="700" dirty="0"/>
+          </a:p>
+          <a:p>
+            <a:pPr indent="0" marL="0">
+              <a:spcAft>
+                <a:spcPts val="300"/>
+              </a:spcAft>
+              <a:buNone/>
+            </a:pPr>
+            <a:r>
+              <a:rPr lang="en-US" sz="700" b="1" dirty="0">
                 <a:solidFill>
                   <a:srgbClr val="2A78D6"/>
                 </a:solidFill>
@@ -5700,9 +5840,9 @@
                 <a:ea typeface="Malgun Gothic" pitchFamily="34" charset="-122"/>
                 <a:cs typeface="Malgun Gothic" pitchFamily="34" charset="-120"/>
               </a:rPr>
-              <a:t>→ 랜딩은 광고 방문자 기준, 휴대폰부터</a:t>
-            </a:r>
-            <a:endParaRPr lang="en-US" sz="900" dirty="0"/>
+              <a:t>=&gt; action item: 리뉴얼에서는 광고가 바로 해당 페이지로</a:t>
+            </a:r>
+            <a:endParaRPr lang="en-US" sz="700" dirty="0"/>
           </a:p>
         </p:txBody>
       </p:sp>
@@ -5762,7 +5902,7 @@
                 <a:ea typeface="Malgun Gothic" pitchFamily="34" charset="-122"/>
                 <a:cs typeface="Malgun Gothic" pitchFamily="34" charset="-120"/>
               </a:rPr>
-              <a:t>출처: 접속자통계 유입 도메인별 방문 2016 ~ 2026-10-06, 블로그 글 목록 2,736건, GA4 2026-09. 감소율은 2020 → 2022. 다음 중단은 변리사 확인</a:t>
+              <a:t>출처: 관리자 페이지 접속자통계(유입 도메인별), 사무소 네이버 블로그 글 목록, GA4 2026-09-02 ~ 10-01(작업자 접속 섞인 "직접" 69세션 제외). 변리사 답은 기억에 의한 값</a:t>
             </a:r>
             <a:endParaRPr lang="en-US" sz="800" dirty="0"/>
           </a:p>
@@ -6417,7 +6557,7 @@
               <a:buNone/>
             </a:pPr>
             <a:r>
-              <a:rPr lang="en-US" sz="850" dirty="0">
+              <a:rPr lang="en-US" sz="800" dirty="0">
                 <a:solidFill>
                   <a:srgbClr val="0B0B0B"/>
                 </a:solidFill>
@@ -6425,9 +6565,9 @@
                 <a:ea typeface="Malgun Gothic" pitchFamily="34" charset="-122"/>
                 <a:cs typeface="Malgun Gothic" pitchFamily="34" charset="-120"/>
               </a:rPr>
-              <a:t>포괄 검색어가 노출 68%, 광고비 26%를 쓰고 클릭은 20% (피셔, 우연일 확률 0.1% 미만)</a:t>
-            </a:r>
-            <a:endParaRPr lang="en-US" sz="850" dirty="0"/>
+              <a:t>포괄 검색어가 노출 68%, 광고비 26%를 쓰고 클릭은 20%. 클릭당 비용은 같음(2,547원 대 2,434원). 피셔, 우연일 확률 0.1% 미만</a:t>
+            </a:r>
+            <a:endParaRPr lang="en-US" sz="800" dirty="0"/>
           </a:p>
           <a:p>
             <a:pPr indent="0" marL="0">
@@ -6437,7 +6577,7 @@
               <a:buNone/>
             </a:pPr>
             <a:r>
-              <a:rPr lang="en-US" sz="850" dirty="0">
+              <a:rPr lang="en-US" sz="800" dirty="0">
                 <a:solidFill>
                   <a:srgbClr val="0B0B0B"/>
                 </a:solidFill>
@@ -6445,9 +6585,9 @@
                 <a:ea typeface="Malgun Gothic" pitchFamily="34" charset="-122"/>
                 <a:cs typeface="Malgun Gothic" pitchFamily="34" charset="-120"/>
               </a:rPr>
-              <a:t>확장 검색은 직접 등록한 키워드의 절반만 눌림 (0.32% 대 0.61%)</a:t>
-            </a:r>
-            <a:endParaRPr lang="en-US" sz="850" dirty="0"/>
+              <a:t>확장 검색은 직접 등록한 키워드의 절반만 눌림(0.32% 대 0.61%)</a:t>
+            </a:r>
+            <a:endParaRPr lang="en-US" sz="800" dirty="0"/>
           </a:p>
         </p:txBody>
       </p:sp>
@@ -6523,7 +6663,7 @@
                 <a:ea typeface="Malgun Gothic" pitchFamily="34" charset="-122"/>
                 <a:cs typeface="Malgun Gothic" pitchFamily="34" charset="-120"/>
               </a:rPr>
-              <a:t>작년 정리 전후, 같은 90일. 2025년을 100으로. 광고비대로 줄지 않았다는 경향</a:t>
+              <a:t>작년 정리 전후, 같은 90일. 2025년을 100으로. 18→15는 우연일 확률 73%(이항), 광고비대로 줄었다면 15건 이상일 확률 8%(포아송)</a:t>
             </a:r>
             <a:endParaRPr lang="en-US" sz="800" dirty="0"/>
           </a:p>
@@ -6598,7 +6738,7 @@
               <a:buNone/>
             </a:pPr>
             <a:r>
-              <a:rPr lang="en-US" sz="850" dirty="0">
+              <a:rPr lang="en-US" sz="750" dirty="0">
                 <a:solidFill>
                   <a:srgbClr val="0B0B0B"/>
                 </a:solidFill>
@@ -6606,9 +6746,9 @@
                 <a:ea typeface="Malgun Gothic" pitchFamily="34" charset="-122"/>
                 <a:cs typeface="Malgun Gothic" pitchFamily="34" charset="-120"/>
               </a:rPr>
-              <a:t>뺌: 특허·변리사 등 포괄 검색어 입찰 낮추기, 확장 검색은 성적 나쁜 그룹부터 끔</a:t>
-            </a:r>
-            <a:endParaRPr lang="en-US" sz="850" dirty="0"/>
+              <a:t>뺌: 특허·특허법인·변리사·특허사무소 입찰 낮추거나 제외("특허출원"은 남김). 확장 검색은 성적 나쁜 그룹부터 끔, "변리사파견" 등 무관 노출 정리</a:t>
+            </a:r>
+            <a:endParaRPr lang="en-US" sz="750" dirty="0"/>
           </a:p>
           <a:p>
             <a:pPr indent="0" marL="0">
@@ -6618,7 +6758,7 @@
               <a:buNone/>
             </a:pPr>
             <a:r>
-              <a:rPr lang="en-US" sz="850" dirty="0">
+              <a:rPr lang="en-US" sz="750" dirty="0">
                 <a:solidFill>
                   <a:srgbClr val="0B0B0B"/>
                 </a:solidFill>
@@ -6626,9 +6766,9 @@
                 <a:ea typeface="Malgun Gothic" pitchFamily="34" charset="-122"/>
                 <a:cs typeface="Malgun Gothic" pitchFamily="34" charset="-120"/>
               </a:rPr>
-              <a:t>늘림: 지방 키워드(클릭률 1.9%, 706원), 심사관출신 그룹(클릭률 1위)</a:t>
-            </a:r>
-            <a:endParaRPr lang="en-US" sz="850" dirty="0"/>
+              <a:t>늘림: 지방 키워드(클릭률 1.9%, 클릭당 706원, 변리사 선호), 심사관출신 그룹(클릭률 1위, 비용 2.5%)</a:t>
+            </a:r>
+            <a:endParaRPr lang="en-US" sz="750" dirty="0"/>
           </a:p>
         </p:txBody>
       </p:sp>
@@ -6688,7 +6828,7 @@
                 <a:ea typeface="Malgun Gothic" pitchFamily="34" charset="-122"/>
                 <a:cs typeface="Malgun Gothic" pitchFamily="34" charset="-120"/>
               </a:rPr>
-              <a:t>출처: 네이버 검색광고 검색어 보고서 2026-07-06 ~ 10-03(90일, 27,277행), 비교용 2025-07-02 ~ 09-29. GA4 2026-09(작업자 접속 제외)</a:t>
+              <a:t>출처: 네이버 검색광고 검색어 보고서 2026-07-06 ~ 10-03(90일, 27,277행), 비교용 2025-07-02 ~ 09-29. GA4 2026-09-02 ~ 10-01(작업자 접속 69세션 제외)</a:t>
             </a:r>
             <a:endParaRPr lang="en-US" sz="800" dirty="0"/>
           </a:p>
@@ -6705,7 +6845,7 @@
                 <a:ea typeface="Malgun Gothic" pitchFamily="34" charset="-122"/>
                 <a:cs typeface="Malgun Gothic" pitchFamily="34" charset="-120"/>
               </a:rPr>
-              <a:t>검색어 9,383개를 뜻으로 유형 분류. 한계: 전환 측정이 없어 클릭까지만 봄</a:t>
+              <a:t>검색어 9,383개를 글자 규칙으로 유형 분류(클릭 난 231개는 검산). 한계: 전환 측정이 없어 클릭까지만 봄. 확장 검색의 실제 검색어는 보고서에 안 나옴</a:t>
             </a:r>
             <a:endParaRPr lang="en-US" sz="800" dirty="0"/>
           </a:p>
@@ -7435,7 +7575,7 @@
               <a:buNone/>
             </a:pPr>
             <a:r>
-              <a:rPr lang="en-US" sz="800" dirty="0">
+              <a:rPr lang="en-US" sz="750" dirty="0">
                 <a:solidFill>
                   <a:srgbClr val="52514E"/>
                 </a:solidFill>
@@ -7443,9 +7583,9 @@
                 <a:ea typeface="Malgun Gothic" pitchFamily="34" charset="-122"/>
                 <a:cs typeface="Malgun Gothic" pitchFamily="34" charset="-120"/>
               </a:rPr>
-              <a:t>광고 100번 눌리면 4명 신청, 수임은 1건 미만. 수임 1건당 광고비는 수수료의 8~33% → 광고는 남음</a:t>
-            </a:r>
-            <a:endParaRPr lang="en-US" sz="800" dirty="0"/>
+              <a:t>광고 100번 눌리면 4명 신청, 수임은 1건 미만(90일). 수임 1건당 광고비 24만~98만 원 = 수수료의 8~33% → 광고는 남음</a:t>
+            </a:r>
+            <a:endParaRPr lang="en-US" sz="750" dirty="0"/>
           </a:p>
         </p:txBody>
       </p:sp>
@@ -7568,7 +7708,7 @@
               <a:buNone/>
             </a:pPr>
             <a:r>
-              <a:rPr lang="en-US" sz="900" b="1" dirty="0">
+              <a:rPr lang="en-US" sz="850" b="1" dirty="0">
                 <a:solidFill>
                   <a:srgbClr val="2A78D6"/>
                 </a:solidFill>
@@ -7576,9 +7716,9 @@
                 <a:ea typeface="Malgun Gothic" pitchFamily="34" charset="-122"/>
                 <a:cs typeface="Malgun Gothic" pitchFamily="34" charset="-120"/>
               </a:rPr>
-              <a:t>→ 첫 화면에 "누가·무엇을·무료로", 읽기 끝에 간편 신청, 휴대폰 대응</a:t>
-            </a:r>
-            <a:endParaRPr lang="en-US" sz="900" dirty="0"/>
+              <a:t>→ 18초 안에 "누가·무엇을·무료로", 읽기 끝에 간편 신청, 휴대폰 대응, 비용·절차 블록</a:t>
+            </a:r>
+            <a:endParaRPr lang="en-US" sz="850" dirty="0"/>
           </a:p>
         </p:txBody>
       </p:sp>
@@ -7702,7 +7842,7 @@
               <a:buNone/>
             </a:pPr>
             <a:r>
-              <a:rPr lang="en-US" sz="900" dirty="0">
+              <a:rPr lang="en-US" sz="850" dirty="0">
                 <a:solidFill>
                   <a:srgbClr val="0B0B0B"/>
                 </a:solidFill>
@@ -7710,9 +7850,9 @@
                 <a:ea typeface="Malgun Gothic" pitchFamily="34" charset="-122"/>
                 <a:cs typeface="Malgun Gothic" pitchFamily="34" charset="-120"/>
               </a:rPr>
-              <a:t>수임률은 변리사 기억으로 10건 중 1~2건</a:t>
-            </a:r>
-            <a:endParaRPr lang="en-US" sz="900" dirty="0"/>
+              <a:t>변리사 기억으로 수임 10건 중 1~2건. 직접 전화 문의 월 5건 이내, 어디서 번호를 봤는지 모름</a:t>
+            </a:r>
+            <a:endParaRPr lang="en-US" sz="850" dirty="0"/>
           </a:p>
           <a:p>
             <a:pPr indent="0" marL="0">
@@ -7722,7 +7862,7 @@
               <a:buNone/>
             </a:pPr>
             <a:r>
-              <a:rPr lang="en-US" sz="900" b="1" dirty="0">
+              <a:rPr lang="en-US" sz="850" b="1" dirty="0">
                 <a:solidFill>
                   <a:srgbClr val="0B0B0B"/>
                 </a:solidFill>
@@ -7732,7 +7872,7 @@
               </a:rPr>
               <a:t>신청의 81%가 휴대폰 번호만 남기는 간편 신청</a:t>
             </a:r>
-            <a:endParaRPr lang="en-US" sz="900" dirty="0"/>
+            <a:endParaRPr lang="en-US" sz="850" dirty="0"/>
           </a:p>
           <a:p>
             <a:pPr indent="0" marL="0">
@@ -7742,7 +7882,7 @@
               <a:buNone/>
             </a:pPr>
             <a:r>
-              <a:rPr lang="en-US" sz="900" dirty="0">
+              <a:rPr lang="en-US" sz="850" dirty="0">
                 <a:solidFill>
                   <a:srgbClr val="0B0B0B"/>
                 </a:solidFill>
@@ -7750,9 +7890,29 @@
                 <a:ea typeface="Malgun Gothic" pitchFamily="34" charset="-122"/>
                 <a:cs typeface="Malgun Gothic" pitchFamily="34" charset="-120"/>
               </a:rPr>
-              <a:t>전화 문의가 폼만큼 있는데 어디서 봤는지 안 잡힘</a:t>
-            </a:r>
-            <a:endParaRPr lang="en-US" sz="900" dirty="0"/>
+              <a:t>주말 신청은 평일의 절반(z, 우연일 확률 0.1% 미만). 0~7시 신청 13%</a:t>
+            </a:r>
+            <a:endParaRPr lang="en-US" sz="850" dirty="0"/>
+          </a:p>
+          <a:p>
+            <a:pPr indent="0" marL="0">
+              <a:spcAft>
+                <a:spcPts val="300"/>
+              </a:spcAft>
+              <a:buNone/>
+            </a:pPr>
+            <a:r>
+              <a:rPr lang="en-US" sz="850" dirty="0">
+                <a:solidFill>
+                  <a:srgbClr val="0B0B0B"/>
+                </a:solidFill>
+                <a:latin typeface="Malgun Gothic" pitchFamily="34" charset="0"/>
+                <a:ea typeface="Malgun Gothic" pitchFamily="34" charset="-122"/>
+                <a:cs typeface="Malgun Gothic" pitchFamily="34" charset="-120"/>
+              </a:rPr>
+              <a:t>전화 문의가 폼만큼 있는데 안 잡힘. 휴대폰(44%)은 번호 클릭으로 셀 수 있고 PC는 못 셈</a:t>
+            </a:r>
+            <a:endParaRPr lang="en-US" sz="850" dirty="0"/>
           </a:p>
         </p:txBody>
       </p:sp>
@@ -7784,7 +7944,7 @@
               <a:buNone/>
             </a:pPr>
             <a:r>
-              <a:rPr lang="en-US" sz="900" b="1" dirty="0">
+              <a:rPr lang="en-US" sz="850" b="1" dirty="0">
                 <a:solidFill>
                   <a:srgbClr val="2A78D6"/>
                 </a:solidFill>
@@ -7792,9 +7952,9 @@
                 <a:ea typeface="Malgun Gothic" pitchFamily="34" charset="-122"/>
                 <a:cs typeface="Malgun Gothic" pitchFamily="34" charset="-120"/>
               </a:rPr>
-              <a:t>→ 신청마다 수임 여부 기록</a:t>
-            </a:r>
-            <a:endParaRPr lang="en-US" sz="900" dirty="0"/>
+              <a:t>→ 휴대폰 번호 클릭 기록, PC는 전용 착신 번호</a:t>
+            </a:r>
+            <a:endParaRPr lang="en-US" sz="850" dirty="0"/>
           </a:p>
           <a:p>
             <a:pPr indent="0" marL="0">
@@ -7804,7 +7964,7 @@
               <a:buNone/>
             </a:pPr>
             <a:r>
-              <a:rPr lang="en-US" sz="900" b="1" dirty="0">
+              <a:rPr lang="en-US" sz="850" b="1" dirty="0">
                 <a:solidFill>
                   <a:srgbClr val="2A78D6"/>
                 </a:solidFill>
@@ -7812,9 +7972,29 @@
                 <a:ea typeface="Malgun Gothic" pitchFamily="34" charset="-122"/>
                 <a:cs typeface="Malgun Gothic" pitchFamily="34" charset="-120"/>
               </a:rPr>
-              <a:t>→ 전화번호 클릭 기록, 전용 착신 번호</a:t>
-            </a:r>
-            <a:endParaRPr lang="en-US" sz="900" dirty="0"/>
+              <a:t>→ 수임 여부는 분기 1회 기록</a:t>
+            </a:r>
+            <a:endParaRPr lang="en-US" sz="850" dirty="0"/>
+          </a:p>
+          <a:p>
+            <a:pPr indent="0" marL="0">
+              <a:spcAft>
+                <a:spcPts val="300"/>
+              </a:spcAft>
+              <a:buNone/>
+            </a:pPr>
+            <a:r>
+              <a:rPr lang="en-US" sz="850" b="1" dirty="0">
+                <a:solidFill>
+                  <a:srgbClr val="2A78D6"/>
+                </a:solidFill>
+                <a:latin typeface="Malgun Gothic" pitchFamily="34" charset="0"/>
+                <a:ea typeface="Malgun Gothic" pitchFamily="34" charset="-122"/>
+                <a:cs typeface="Malgun Gothic" pitchFamily="34" charset="-120"/>
+              </a:rPr>
+              <a:t>→ 간편 신청 유지, 0~7시 신청에 "오전 8시 이후 연락"</a:t>
+            </a:r>
+            <a:endParaRPr lang="en-US" sz="850" dirty="0"/>
           </a:p>
         </p:txBody>
       </p:sp>
@@ -8003,7 +8183,7 @@
               <a:buNone/>
             </a:pPr>
             <a:r>
-              <a:rPr lang="en-US" sz="900" dirty="0">
+              <a:rPr lang="en-US" sz="850" dirty="0">
                 <a:solidFill>
                   <a:srgbClr val="0B0B0B"/>
                 </a:solidFill>
@@ -8011,9 +8191,9 @@
                 <a:ea typeface="Malgun Gothic" pitchFamily="34" charset="-122"/>
                 <a:cs typeface="Malgun Gothic" pitchFamily="34" charset="-120"/>
               </a:rPr>
-              <a:t>수수료 7배라 연 매출은 출원과 비슷하거나 더 큼</a:t>
-            </a:r>
-            <a:endParaRPr lang="en-US" sz="900" dirty="0"/>
+              <a:t>수수료 7배라 연 매출은 출원과 비슷하거나 더 큼 (2,300만~4,600만 vs 2,700만~5,300만, 전환율 같다고 가정)</a:t>
+            </a:r>
+            <a:endParaRPr lang="en-US" sz="850" dirty="0"/>
           </a:p>
           <a:p>
             <a:pPr indent="0" marL="0">
@@ -8023,7 +8203,7 @@
               <a:buNone/>
             </a:pPr>
             <a:r>
-              <a:rPr lang="en-US" sz="900" dirty="0">
+              <a:rPr lang="en-US" sz="850" dirty="0">
                 <a:solidFill>
                   <a:srgbClr val="0B0B0B"/>
                 </a:solidFill>
@@ -8031,9 +8211,29 @@
                 <a:ea typeface="Malgun Gothic" pitchFamily="34" charset="-122"/>
                 <a:cs typeface="Malgun Gothic" pitchFamily="34" charset="-120"/>
               </a:rPr>
+              <a:t>분쟁 신청은 전체 감소 뒤에도 안 줄음</a:t>
+            </a:r>
+            <a:endParaRPr lang="en-US" sz="850" dirty="0"/>
+          </a:p>
+          <a:p>
+            <a:pPr indent="0" marL="0">
+              <a:spcAft>
+                <a:spcPts val="300"/>
+              </a:spcAft>
+              <a:buNone/>
+            </a:pPr>
+            <a:r>
+              <a:rPr lang="en-US" sz="850" dirty="0">
+                <a:solidFill>
+                  <a:srgbClr val="0B0B0B"/>
+                </a:solidFill>
+                <a:latin typeface="Malgun Gothic" pitchFamily="34" charset="0"/>
+                <a:ea typeface="Malgun Gothic" pitchFamily="34" charset="-122"/>
+                <a:cs typeface="Malgun Gothic" pitchFamily="34" charset="-120"/>
+              </a:rPr>
               <a:t>분쟁 검색자가 가장 짧게 머묾 → 페이지 문제 가능성</a:t>
             </a:r>
-            <a:endParaRPr lang="en-US" sz="900" dirty="0"/>
+            <a:endParaRPr lang="en-US" sz="850" dirty="0"/>
           </a:p>
         </p:txBody>
       </p:sp>
@@ -8065,7 +8265,7 @@
               <a:buNone/>
             </a:pPr>
             <a:r>
-              <a:rPr lang="en-US" sz="900" b="1" dirty="0">
+              <a:rPr lang="en-US" sz="850" b="1" dirty="0">
                 <a:solidFill>
                   <a:srgbClr val="2A78D6"/>
                 </a:solidFill>
@@ -8073,9 +8273,9 @@
                 <a:ea typeface="Malgun Gothic" pitchFamily="34" charset="-122"/>
                 <a:cs typeface="Malgun Gothic" pitchFamily="34" charset="-120"/>
               </a:rPr>
-              <a:t>→ 분쟁 전용 페이지, 폼보다 전화</a:t>
-            </a:r>
-            <a:endParaRPr lang="en-US" sz="900" dirty="0"/>
+              <a:t>→ 분쟁 페이지를 리뉴얼 우선순위에, 폼보다 전화</a:t>
+            </a:r>
+            <a:endParaRPr lang="en-US" sz="850" dirty="0"/>
           </a:p>
           <a:p>
             <a:pPr indent="0" marL="0">
@@ -8085,7 +8285,7 @@
               <a:buNone/>
             </a:pPr>
             <a:r>
-              <a:rPr lang="en-US" sz="900" b="1" dirty="0">
+              <a:rPr lang="en-US" sz="850" b="1" dirty="0">
                 <a:solidFill>
                   <a:srgbClr val="2A78D6"/>
                 </a:solidFill>
@@ -8095,7 +8295,7 @@
               </a:rPr>
               <a:t>→ 분쟁 광고는 줄이지 않음</a:t>
             </a:r>
-            <a:endParaRPr lang="en-US" sz="900" dirty="0"/>
+            <a:endParaRPr lang="en-US" sz="850" dirty="0"/>
           </a:p>
         </p:txBody>
       </p:sp>
@@ -8155,7 +8355,7 @@
                 <a:ea typeface="Malgun Gothic" pitchFamily="34" charset="-122"/>
                 <a:cs typeface="Malgun Gothic" pitchFamily="34" charset="-120"/>
               </a:rPr>
-              <a:t>출처: 신청 알림 문자·게시판 2,141건, 서버 실제 방문, 네이버 광고 90일, GA4 광고 유입 120세션, Clarity 녹화 5건, 변리사 답</a:t>
+              <a:t>출처: 알림 문자·게시판(2,141건) ÷ 서버 실제 방문(슬라이드 2), 네이버 광고 90일 + 같은 기간 게시판 15건, GA4 광고 유입 120세션, Clarity 녹화 5건, 변리사 답(수임률·수수료·문의)</a:t>
             </a:r>
             <a:endParaRPr lang="en-US" sz="800" dirty="0"/>
           </a:p>
@@ -8172,7 +8372,7 @@
                 <a:ea typeface="Malgun Gothic" pitchFamily="34" charset="-122"/>
                 <a:cs typeface="Malgun Gothic" pitchFamily="34" charset="-120"/>
               </a:rPr>
-              <a:t>한계: 수임률·수수료는 기억에 의한 값. 유형별 체류 차이는 경향(우연일 확률 6~22%)</a:t>
+              <a:t>한계: 수임률·수수료는 기록이 아닌 기억에 의한 대략의 값. 유형별 체류 차이는 우연일 확률 6~22%라 경향. 분쟁 매출은 전환율을 출원과 같다고 가정</a:t>
             </a:r>
             <a:endParaRPr lang="en-US" sz="800" dirty="0"/>
           </a:p>
@@ -9520,7 +9720,7 @@
               <a:buChar char="•"/>
             </a:pPr>
             <a:r>
-              <a:rPr lang="en-US" sz="900" dirty="0">
+              <a:rPr lang="en-US" sz="800" dirty="0">
                 <a:solidFill>
                   <a:srgbClr val="0B0B0B"/>
                 </a:solidFill>
@@ -9528,9 +9728,9 @@
                 <a:ea typeface="Malgun Gothic" pitchFamily="34" charset="-122"/>
                 <a:cs typeface="Malgun Gothic" pitchFamily="34" charset="-120"/>
               </a:rPr>
-              <a:t>GA4: 광고 유입을 검색어별로, 폼 시작·제출·완료 이벤트</a:t>
-            </a:r>
-            <a:endParaRPr lang="en-US" sz="900" dirty="0"/>
+              <a:t>GA4: 광고 유입을 광고/검색어/광고그룹으로, 입구 구분(출원/분쟁/간편), 폼 시작·제출·완료 이벤트</a:t>
+            </a:r>
+            <a:endParaRPr lang="en-US" sz="800" dirty="0"/>
           </a:p>
           <a:p>
             <a:pPr marL="127000" indent="-127000">
@@ -9541,7 +9741,7 @@
               <a:buChar char="•"/>
             </a:pPr>
             <a:r>
-              <a:rPr lang="en-US" sz="900" dirty="0">
+              <a:rPr lang="en-US" sz="800" dirty="0">
                 <a:solidFill>
                   <a:srgbClr val="0B0B0B"/>
                 </a:solidFill>
@@ -9549,9 +9749,9 @@
                 <a:ea typeface="Malgun Gothic" pitchFamily="34" charset="-122"/>
                 <a:cs typeface="Malgun Gothic" pitchFamily="34" charset="-120"/>
               </a:rPr>
-              <a:t>신청 글에 유입 경로·검색어 저장</a:t>
-            </a:r>
-            <a:endParaRPr lang="en-US" sz="900" dirty="0"/>
+              <a:t>신청 글에 유입 경로·검색어 저장(DB 미확인), 첫 화면 검색어를 신청 페이지로 넘김</a:t>
+            </a:r>
+            <a:endParaRPr lang="en-US" sz="800" dirty="0"/>
           </a:p>
           <a:p>
             <a:pPr marL="127000" indent="-127000">
@@ -9562,7 +9762,7 @@
               <a:buChar char="•"/>
             </a:pPr>
             <a:r>
-              <a:rPr lang="en-US" sz="900" dirty="0">
+              <a:rPr lang="en-US" sz="800" dirty="0">
                 <a:solidFill>
                   <a:srgbClr val="0B0B0B"/>
                 </a:solidFill>
@@ -9570,9 +9770,9 @@
                 <a:ea typeface="Malgun Gothic" pitchFamily="34" charset="-122"/>
                 <a:cs typeface="Malgun Gothic" pitchFamily="34" charset="-120"/>
               </a:rPr>
-              <a:t>Clarity 녹화, 작업자 IP 차단</a:t>
-            </a:r>
-            <a:endParaRPr lang="en-US" sz="900" dirty="0"/>
+              <a:t>Clarity 녹화. 옛 UA 코드 제거, 작업자 IP 차단</a:t>
+            </a:r>
+            <a:endParaRPr lang="en-US" sz="800" dirty="0"/>
           </a:p>
           <a:p>
             <a:pPr marL="127000" indent="-127000">
@@ -9583,7 +9783,7 @@
               <a:buChar char="•"/>
             </a:pPr>
             <a:r>
-              <a:rPr lang="en-US" sz="900" dirty="0">
+              <a:rPr lang="en-US" sz="800" dirty="0">
                 <a:solidFill>
                   <a:srgbClr val="0B0B0B"/>
                 </a:solidFill>
@@ -9591,9 +9791,9 @@
                 <a:ea typeface="Malgun Gothic" pitchFamily="34" charset="-122"/>
                 <a:cs typeface="Malgun Gothic" pitchFamily="34" charset="-120"/>
               </a:rPr>
-              <a:t>네이버 전환 추적: 신청함, 승인 뒤 설치</a:t>
-            </a:r>
-            <a:endParaRPr lang="en-US" sz="900" dirty="0"/>
+              <a:t>네이버 전환 추적: 서비스 신청함, 승인 뒤 설치</a:t>
+            </a:r>
+            <a:endParaRPr lang="en-US" sz="800" dirty="0"/>
           </a:p>
         </p:txBody>
       </p:sp>
@@ -9665,7 +9865,7 @@
               <a:buChar char="•"/>
             </a:pPr>
             <a:r>
-              <a:rPr lang="en-US" sz="900" dirty="0">
+              <a:rPr lang="en-US" sz="800" dirty="0">
                 <a:solidFill>
                   <a:srgbClr val="0B0B0B"/>
                 </a:solidFill>
@@ -9673,9 +9873,9 @@
                 <a:ea typeface="Malgun Gothic" pitchFamily="34" charset="-122"/>
                 <a:cs typeface="Malgun Gothic" pitchFamily="34" charset="-120"/>
               </a:rPr>
-              <a:t>표본: 광고 90일 신청 15건, 광고 유입 120건</a:t>
-            </a:r>
-            <a:endParaRPr lang="en-US" sz="900" dirty="0"/>
+              <a:t>표본: 광고 90일 신청 15건, 광고 유입 120건 · 기간: 광고 90일, GA4 1개월</a:t>
+            </a:r>
+            <a:endParaRPr lang="en-US" sz="800" dirty="0"/>
           </a:p>
           <a:p>
             <a:pPr marL="127000" indent="-127000">
@@ -9686,7 +9886,7 @@
               <a:buChar char="•"/>
             </a:pPr>
             <a:r>
-              <a:rPr lang="en-US" sz="900" dirty="0">
+              <a:rPr lang="en-US" sz="800" dirty="0">
                 <a:solidFill>
                   <a:srgbClr val="0B0B0B"/>
                 </a:solidFill>
@@ -9696,7 +9896,7 @@
               </a:rPr>
               <a:t>서버 통계: 봇 제거는 추정, 경로는 추이, 2025년 이후 신뢰 낮음</a:t>
             </a:r>
-            <a:endParaRPr lang="en-US" sz="900" dirty="0"/>
+            <a:endParaRPr lang="en-US" sz="800" dirty="0"/>
           </a:p>
           <a:p>
             <a:pPr marL="127000" indent="-127000">
@@ -9707,7 +9907,7 @@
               <a:buChar char="•"/>
             </a:pPr>
             <a:r>
-              <a:rPr lang="en-US" sz="900" dirty="0">
+              <a:rPr lang="en-US" sz="800" dirty="0">
                 <a:solidFill>
                   <a:srgbClr val="0B0B0B"/>
                 </a:solidFill>
@@ -9715,9 +9915,9 @@
                 <a:ea typeface="Malgun Gothic" pitchFamily="34" charset="-122"/>
                 <a:cs typeface="Malgun Gothic" pitchFamily="34" charset="-120"/>
               </a:rPr>
-              <a:t>원인: 다음 중단만 확인, 블로그·네이버 검색은 추정</a:t>
-            </a:r>
-            <a:endParaRPr lang="en-US" sz="900" dirty="0"/>
+              <a:t>2021년 원인: 다음 중단만 확인, 블로그·네이버 검색은 추정</a:t>
+            </a:r>
+            <a:endParaRPr lang="en-US" sz="800" dirty="0"/>
           </a:p>
           <a:p>
             <a:pPr marL="127000" indent="-127000">
@@ -9728,7 +9928,7 @@
               <a:buChar char="•"/>
             </a:pPr>
             <a:r>
-              <a:rPr lang="en-US" sz="900" dirty="0">
+              <a:rPr lang="en-US" sz="800" dirty="0">
                 <a:solidFill>
                   <a:srgbClr val="0B0B0B"/>
                 </a:solidFill>
@@ -9736,9 +9936,30 @@
                 <a:ea typeface="Malgun Gothic" pitchFamily="34" charset="-122"/>
                 <a:cs typeface="Malgun Gothic" pitchFamily="34" charset="-120"/>
               </a:rPr>
-              <a:t>수임 전환율 데이터 없음 · 변리사 답은 기억에 의한 값</a:t>
-            </a:r>
-            <a:endParaRPr lang="en-US" sz="900" dirty="0"/>
+              <a:t>수임 전환율 데이터 없음 · 변리사 답은 기억에 의한 값 · 구글 미검토</a:t>
+            </a:r>
+            <a:endParaRPr lang="en-US" sz="800" dirty="0"/>
+          </a:p>
+          <a:p>
+            <a:pPr marL="127000" indent="-127000">
+              <a:spcAft>
+                <a:spcPts val="300"/>
+              </a:spcAft>
+              <a:buSzPct val="100000"/>
+              <a:buChar char="•"/>
+            </a:pPr>
+            <a:r>
+              <a:rPr lang="en-US" sz="800" dirty="0">
+                <a:solidFill>
+                  <a:srgbClr val="52514E"/>
+                </a:solidFill>
+                <a:latin typeface="Malgun Gothic" pitchFamily="34" charset="0"/>
+                <a:ea typeface="Malgun Gothic" pitchFamily="34" charset="-122"/>
+                <a:cs typeface="Malgun Gothic" pitchFamily="34" charset="-120"/>
+              </a:rPr>
+              <a:t>검정: 포괄 vs 구체적 클릭률·지역명·주말 신청은 우연일 확률 0.1% 미만(피셔·z). 신청 18→15는 73%(이항), 유형별 체류 6~22%(피셔)</a:t>
+            </a:r>
+            <a:endParaRPr lang="en-US" sz="800" dirty="0"/>
           </a:p>
         </p:txBody>
       </p:sp>

--- a/slides.pptx
+++ b/slides.pptx
@@ -5342,7 +5342,7 @@
                 <a:ea typeface="Malgun Gothic" pitchFamily="34" charset="-122"/>
                 <a:cs typeface="Malgun Gothic" pitchFamily="34" charset="-120"/>
               </a:rPr>
-              <a:t>=&gt; action item: 다음(카카오) 재개. 2020년 수준(644)이면 연 30건, 수임 3~6건 = 매출 연 900만~1,800만 원. 비용은 네이버 단가(1,891원)면 연 약 120만 원. 손익분기 클릭당 14,000~28,000원</a:t>
+              <a:t>=&gt; action item: 다음(카카오) 재개. 되찾을 방문 644 − 131 = 513이면 연 24건, 수임 2~5건 = 매출 연 700만~1,400만 원. 비용은 네이버 단가(1,891원)면 연 약 97만 원. 손익분기 클릭당 14,000~28,000원</a:t>
             </a:r>
             <a:endParaRPr lang="en-US" sz="700" dirty="0"/>
           </a:p>
